--- a/Docs/UnrealEngine_문서_김정환.pptx
+++ b/Docs/UnrealEngine_문서_김정환.pptx
@@ -5,7 +5,7 @@
     <p:sldMasterId id="2147483648" r:id="rId1"/>
   </p:sldMasterIdLst>
   <p:notesMasterIdLst>
-    <p:notesMasterId r:id="rId18"/>
+    <p:notesMasterId r:id="rId19"/>
   </p:notesMasterIdLst>
   <p:sldIdLst>
     <p:sldId id="258" r:id="rId2"/>
@@ -21,9 +21,10 @@
     <p:sldId id="292" r:id="rId12"/>
     <p:sldId id="290" r:id="rId13"/>
     <p:sldId id="293" r:id="rId14"/>
-    <p:sldId id="265" r:id="rId15"/>
-    <p:sldId id="276" r:id="rId16"/>
-    <p:sldId id="284" r:id="rId17"/>
+    <p:sldId id="294" r:id="rId15"/>
+    <p:sldId id="265" r:id="rId16"/>
+    <p:sldId id="276" r:id="rId17"/>
+    <p:sldId id="284" r:id="rId18"/>
   </p:sldIdLst>
   <p:sldSz cx="12192000" cy="6858000"/>
   <p:notesSz cx="6858000" cy="9144000"/>
@@ -1675,34 +1676,26 @@
           <a:bodyPr/>
           <a:lstStyle/>
           <a:p>
+            <a:pPr marL="0" lvl="0" indent="0">
+              <a:buFont typeface="Arial" panose="020B0604020202020204" pitchFamily="34" charset="0"/>
+              <a:buNone/>
+            </a:pPr>
             <a:r>
               <a:rPr lang="ko-KR" altLang="en-US" dirty="0" err="1" smtClean="0"/>
-              <a:t>랜드스케이프</a:t>
+              <a:t>몬스터</a:t>
             </a:r>
             <a:r>
               <a:rPr lang="ko-KR" altLang="en-US" dirty="0" smtClean="0"/>
-              <a:t> 적용 후 에러 확</a:t>
-            </a:r>
-            <a:endParaRPr lang="en-US" altLang="ko-KR" sz="1200" dirty="0" smtClean="0">
-              <a:solidFill>
-                <a:schemeClr val="bg1">
-                  <a:lumMod val="95000"/>
-                </a:schemeClr>
-              </a:solidFill>
-              <a:latin typeface="Noto Sans KR Medium" panose="020B0200000000000000" pitchFamily="34" charset="-128"/>
-              <a:ea typeface="Noto Sans KR Medium" panose="020B0200000000000000" pitchFamily="34" charset="-128"/>
-            </a:endParaRPr>
-          </a:p>
-          <a:p>
-            <a:endParaRPr lang="en-US" altLang="ko-KR" sz="1200" dirty="0" smtClean="0">
-              <a:solidFill>
-                <a:schemeClr val="bg1">
-                  <a:lumMod val="95000"/>
-                </a:schemeClr>
-              </a:solidFill>
-              <a:latin typeface="Noto Sans KR Medium" panose="020B0200000000000000" pitchFamily="34" charset="-128"/>
-              <a:ea typeface="Noto Sans KR Medium" panose="020B0200000000000000" pitchFamily="34" charset="-128"/>
-            </a:endParaRPr>
+              <a:t> 종류</a:t>
+            </a:r>
+            <a:endParaRPr lang="en-US" altLang="ko-KR" dirty="0" smtClean="0"/>
+          </a:p>
+          <a:p>
+            <a:pPr marL="0" lvl="0" indent="0">
+              <a:buFont typeface="Arial" panose="020B0604020202020204" pitchFamily="34" charset="0"/>
+              <a:buNone/>
+            </a:pPr>
+            <a:endParaRPr lang="en-US" altLang="ko-KR" dirty="0" smtClean="0"/>
           </a:p>
         </p:txBody>
       </p:sp>
@@ -1732,7 +1725,7 @@
     </p:spTree>
     <p:extLst>
       <p:ext uri="{BB962C8B-B14F-4D97-AF65-F5344CB8AC3E}">
-        <p14:creationId xmlns:p14="http://schemas.microsoft.com/office/powerpoint/2010/main" val="230171614"/>
+        <p14:creationId xmlns:p14="http://schemas.microsoft.com/office/powerpoint/2010/main" val="2471636769"/>
       </p:ext>
     </p:extLst>
   </p:cSld>
@@ -1786,7 +1779,34 @@
           <a:bodyPr/>
           <a:lstStyle/>
           <a:p>
-            <a:endParaRPr lang="en-US" altLang="ko-KR" baseline="0" dirty="0" smtClean="0"/>
+            <a:r>
+              <a:rPr lang="ko-KR" altLang="en-US" dirty="0" err="1" smtClean="0"/>
+              <a:t>랜드스케이프</a:t>
+            </a:r>
+            <a:r>
+              <a:rPr lang="ko-KR" altLang="en-US" dirty="0" smtClean="0"/>
+              <a:t> 적용 후 에러 확</a:t>
+            </a:r>
+            <a:endParaRPr lang="en-US" altLang="ko-KR" sz="1200" dirty="0" smtClean="0">
+              <a:solidFill>
+                <a:schemeClr val="bg1">
+                  <a:lumMod val="95000"/>
+                </a:schemeClr>
+              </a:solidFill>
+              <a:latin typeface="Noto Sans KR Medium" panose="020B0200000000000000" pitchFamily="34" charset="-128"/>
+              <a:ea typeface="Noto Sans KR Medium" panose="020B0200000000000000" pitchFamily="34" charset="-128"/>
+            </a:endParaRPr>
+          </a:p>
+          <a:p>
+            <a:endParaRPr lang="en-US" altLang="ko-KR" sz="1200" dirty="0" smtClean="0">
+              <a:solidFill>
+                <a:schemeClr val="bg1">
+                  <a:lumMod val="95000"/>
+                </a:schemeClr>
+              </a:solidFill>
+              <a:latin typeface="Noto Sans KR Medium" panose="020B0200000000000000" pitchFamily="34" charset="-128"/>
+              <a:ea typeface="Noto Sans KR Medium" panose="020B0200000000000000" pitchFamily="34" charset="-128"/>
+            </a:endParaRPr>
           </a:p>
         </p:txBody>
       </p:sp>
@@ -1816,7 +1836,7 @@
     </p:spTree>
     <p:extLst>
       <p:ext uri="{BB962C8B-B14F-4D97-AF65-F5344CB8AC3E}">
-        <p14:creationId xmlns:p14="http://schemas.microsoft.com/office/powerpoint/2010/main" val="497498286"/>
+        <p14:creationId xmlns:p14="http://schemas.microsoft.com/office/powerpoint/2010/main" val="230171614"/>
       </p:ext>
     </p:extLst>
   </p:cSld>
@@ -1870,13 +1890,7 @@
           <a:bodyPr/>
           <a:lstStyle/>
           <a:p>
-            <a:endParaRPr lang="en-US" altLang="ko-KR" sz="1200" b="0" dirty="0" smtClean="0">
-              <a:solidFill>
-                <a:schemeClr val="bg1"/>
-              </a:solidFill>
-              <a:latin typeface="Noto Sans KR Light" panose="020B0200000000000000" pitchFamily="34" charset="-128"/>
-              <a:ea typeface="Noto Sans KR Light" panose="020B0200000000000000" pitchFamily="34" charset="-128"/>
-            </a:endParaRPr>
+            <a:endParaRPr lang="en-US" altLang="ko-KR" baseline="0" dirty="0" smtClean="0"/>
           </a:p>
         </p:txBody>
       </p:sp>
@@ -1898,6 +1912,96 @@
             <a:fld id="{3959A276-DDEF-4E56-B152-12AB79E03CC8}" type="slidenum">
               <a:rPr lang="ko-KR" altLang="en-US" smtClean="0"/>
               <a:t>16</a:t>
+            </a:fld>
+            <a:endParaRPr lang="ko-KR" altLang="en-US"/>
+          </a:p>
+        </p:txBody>
+      </p:sp>
+    </p:spTree>
+    <p:extLst>
+      <p:ext uri="{BB962C8B-B14F-4D97-AF65-F5344CB8AC3E}">
+        <p14:creationId xmlns:p14="http://schemas.microsoft.com/office/powerpoint/2010/main" val="497498286"/>
+      </p:ext>
+    </p:extLst>
+  </p:cSld>
+  <p:clrMapOvr>
+    <a:masterClrMapping/>
+  </p:clrMapOvr>
+</p:notes>
+</file>
+
+<file path=ppt/notesSlides/notesSlide16.xml><?xml version="1.0" encoding="utf-8"?>
+<p:notes xmlns:a="http://schemas.openxmlformats.org/drawingml/2006/main" xmlns:r="http://schemas.openxmlformats.org/officeDocument/2006/relationships" xmlns:p="http://schemas.openxmlformats.org/presentationml/2006/main">
+  <p:cSld>
+    <p:spTree>
+      <p:nvGrpSpPr>
+        <p:cNvPr id="1" name=""/>
+        <p:cNvGrpSpPr/>
+        <p:nvPr/>
+      </p:nvGrpSpPr>
+      <p:grpSpPr>
+        <a:xfrm>
+          <a:off x="0" y="0"/>
+          <a:ext cx="0" cy="0"/>
+          <a:chOff x="0" y="0"/>
+          <a:chExt cx="0" cy="0"/>
+        </a:xfrm>
+      </p:grpSpPr>
+      <p:sp>
+        <p:nvSpPr>
+          <p:cNvPr id="2" name="슬라이드 이미지 개체 틀 1"/>
+          <p:cNvSpPr>
+            <a:spLocks noGrp="1" noRot="1" noChangeAspect="1"/>
+          </p:cNvSpPr>
+          <p:nvPr>
+            <p:ph type="sldImg"/>
+          </p:nvPr>
+        </p:nvSpPr>
+        <p:spPr/>
+      </p:sp>
+      <p:sp>
+        <p:nvSpPr>
+          <p:cNvPr id="3" name="슬라이드 노트 개체 틀 2"/>
+          <p:cNvSpPr>
+            <a:spLocks noGrp="1"/>
+          </p:cNvSpPr>
+          <p:nvPr>
+            <p:ph type="body" idx="1"/>
+          </p:nvPr>
+        </p:nvSpPr>
+        <p:spPr/>
+        <p:txBody>
+          <a:bodyPr/>
+          <a:lstStyle/>
+          <a:p>
+            <a:endParaRPr lang="en-US" altLang="ko-KR" sz="1200" b="0" dirty="0" smtClean="0">
+              <a:solidFill>
+                <a:schemeClr val="bg1"/>
+              </a:solidFill>
+              <a:latin typeface="Noto Sans KR Light" panose="020B0200000000000000" pitchFamily="34" charset="-128"/>
+              <a:ea typeface="Noto Sans KR Light" panose="020B0200000000000000" pitchFamily="34" charset="-128"/>
+            </a:endParaRPr>
+          </a:p>
+        </p:txBody>
+      </p:sp>
+      <p:sp>
+        <p:nvSpPr>
+          <p:cNvPr id="4" name="슬라이드 번호 개체 틀 3"/>
+          <p:cNvSpPr>
+            <a:spLocks noGrp="1"/>
+          </p:cNvSpPr>
+          <p:nvPr>
+            <p:ph type="sldNum" sz="quarter" idx="10"/>
+          </p:nvPr>
+        </p:nvSpPr>
+        <p:spPr/>
+        <p:txBody>
+          <a:bodyPr/>
+          <a:lstStyle/>
+          <a:p>
+            <a:fld id="{3959A276-DDEF-4E56-B152-12AB79E03CC8}" type="slidenum">
+              <a:rPr lang="ko-KR" altLang="en-US" smtClean="0"/>
+              <a:t>17</a:t>
             </a:fld>
             <a:endParaRPr lang="ko-KR" altLang="en-US"/>
           </a:p>
@@ -11236,7 +11340,7 @@
         <p:spPr>
           <a:xfrm>
             <a:off x="454275" y="1480347"/>
-            <a:ext cx="5651249" cy="2708434"/>
+            <a:ext cx="5651249" cy="1785104"/>
           </a:xfrm>
           <a:prstGeom prst="rect">
             <a:avLst/>
@@ -11249,31 +11353,58 @@
           <a:lstStyle/>
           <a:p>
             <a:r>
-              <a:rPr lang="ko-KR" altLang="en-US" sz="1000" dirty="0" smtClean="0">
-                <a:solidFill>
-                  <a:schemeClr val="bg1">
-                    <a:lumMod val="95000"/>
-                  </a:schemeClr>
-                </a:solidFill>
-                <a:latin typeface="Noto Sans KR Medium" panose="020B0200000000000000" pitchFamily="34" charset="-128"/>
-                <a:ea typeface="Noto Sans KR Medium" panose="020B0200000000000000" pitchFamily="34" charset="-128"/>
-              </a:rPr>
-              <a:t>보스 </a:t>
-            </a:r>
-            <a:r>
-              <a:rPr lang="ko-KR" altLang="en-US" sz="1000" dirty="0" err="1" smtClean="0">
-                <a:solidFill>
-                  <a:schemeClr val="bg1">
-                    <a:lumMod val="95000"/>
-                  </a:schemeClr>
-                </a:solidFill>
-                <a:latin typeface="Noto Sans KR Medium" panose="020B0200000000000000" pitchFamily="34" charset="-128"/>
-                <a:ea typeface="Noto Sans KR Medium" panose="020B0200000000000000" pitchFamily="34" charset="-128"/>
-              </a:rPr>
-              <a:t>몬스터는</a:t>
-            </a:r>
-            <a:r>
-              <a:rPr lang="ko-KR" altLang="en-US" sz="1000" dirty="0" smtClean="0">
+              <a:rPr lang="en-US" altLang="ko-KR" sz="1000" dirty="0" err="1">
+                <a:solidFill>
+                  <a:schemeClr val="bg1">
+                    <a:lumMod val="95000"/>
+                  </a:schemeClr>
+                </a:solidFill>
+                <a:latin typeface="Noto Sans KR Medium" panose="020B0200000000000000" pitchFamily="34" charset="-128"/>
+                <a:ea typeface="Noto Sans KR Medium" panose="020B0200000000000000" pitchFamily="34" charset="-128"/>
+              </a:rPr>
+              <a:t>StageData</a:t>
+            </a:r>
+            <a:endParaRPr lang="en-US" altLang="ko-KR" sz="1000" dirty="0">
+              <a:solidFill>
+                <a:schemeClr val="bg1">
+                  <a:lumMod val="95000"/>
+                </a:schemeClr>
+              </a:solidFill>
+              <a:latin typeface="Noto Sans KR Medium" panose="020B0200000000000000" pitchFamily="34" charset="-128"/>
+              <a:ea typeface="Noto Sans KR Medium" panose="020B0200000000000000" pitchFamily="34" charset="-128"/>
+            </a:endParaRPr>
+          </a:p>
+          <a:p>
+            <a:pPr marL="171450" indent="-171450">
+              <a:buFontTx/>
+              <a:buChar char="-"/>
+            </a:pPr>
+            <a:r>
+              <a:rPr lang="ko-KR" altLang="en-US" sz="1000" dirty="0">
+                <a:solidFill>
+                  <a:schemeClr val="bg1">
+                    <a:lumMod val="95000"/>
+                  </a:schemeClr>
+                </a:solidFill>
+                <a:latin typeface="Noto Sans KR Medium" panose="020B0200000000000000" pitchFamily="34" charset="-128"/>
+                <a:ea typeface="Noto Sans KR Medium" panose="020B0200000000000000" pitchFamily="34" charset="-128"/>
+              </a:rPr>
+              <a:t>레벨을 구성하는 구역에 </a:t>
+            </a:r>
+            <a:r>
+              <a:rPr lang="ko-KR" altLang="en-US" sz="1000" dirty="0" err="1">
+                <a:solidFill>
+                  <a:schemeClr val="bg1">
+                    <a:lumMod val="95000"/>
+                  </a:schemeClr>
+                </a:solidFill>
+                <a:latin typeface="Noto Sans KR Medium" panose="020B0200000000000000" pitchFamily="34" charset="-128"/>
+                <a:ea typeface="Noto Sans KR Medium" panose="020B0200000000000000" pitchFamily="34" charset="-128"/>
+              </a:rPr>
+              <a:t>스폰될</a:t>
+            </a:r>
+            <a:r>
+              <a:rPr lang="ko-KR" altLang="en-US" sz="1000" dirty="0">
                 <a:solidFill>
                   <a:schemeClr val="bg1">
                     <a:lumMod val="95000"/>
@@ -11285,29 +11416,139 @@
               <a:t> </a:t>
             </a:r>
             <a:r>
-              <a:rPr lang="ko-KR" altLang="en-US" sz="1000" dirty="0" err="1" smtClean="0">
-                <a:solidFill>
-                  <a:schemeClr val="bg1">
-                    <a:lumMod val="95000"/>
-                  </a:schemeClr>
-                </a:solidFill>
-                <a:latin typeface="Noto Sans KR Medium" panose="020B0200000000000000" pitchFamily="34" charset="-128"/>
-                <a:ea typeface="Noto Sans KR Medium" panose="020B0200000000000000" pitchFamily="34" charset="-128"/>
-              </a:rPr>
-              <a:t>기믹을</a:t>
-            </a:r>
-            <a:r>
-              <a:rPr lang="ko-KR" altLang="en-US" sz="1000" dirty="0" smtClean="0">
-                <a:solidFill>
-                  <a:schemeClr val="bg1">
-                    <a:lumMod val="95000"/>
-                  </a:schemeClr>
-                </a:solidFill>
-                <a:latin typeface="Noto Sans KR Medium" panose="020B0200000000000000" pitchFamily="34" charset="-128"/>
-                <a:ea typeface="Noto Sans KR Medium" panose="020B0200000000000000" pitchFamily="34" charset="-128"/>
-              </a:rPr>
-              <a:t> 수행할 수 있도록 구현</a:t>
-            </a:r>
+              <a:rPr lang="ko-KR" altLang="en-US" sz="1000" dirty="0" err="1">
+                <a:solidFill>
+                  <a:schemeClr val="bg1">
+                    <a:lumMod val="95000"/>
+                  </a:schemeClr>
+                </a:solidFill>
+                <a:latin typeface="Noto Sans KR Medium" panose="020B0200000000000000" pitchFamily="34" charset="-128"/>
+                <a:ea typeface="Noto Sans KR Medium" panose="020B0200000000000000" pitchFamily="34" charset="-128"/>
+              </a:rPr>
+              <a:t>몬스터들</a:t>
+            </a:r>
+            <a:r>
+              <a:rPr lang="ko-KR" altLang="en-US" sz="1000" dirty="0">
+                <a:solidFill>
+                  <a:schemeClr val="bg1">
+                    <a:lumMod val="95000"/>
+                  </a:schemeClr>
+                </a:solidFill>
+                <a:latin typeface="Noto Sans KR Medium" panose="020B0200000000000000" pitchFamily="34" charset="-128"/>
+                <a:ea typeface="Noto Sans KR Medium" panose="020B0200000000000000" pitchFamily="34" charset="-128"/>
+              </a:rPr>
+              <a:t> </a:t>
+            </a:r>
+            <a:r>
+              <a:rPr lang="en-US" altLang="ko-KR" sz="1000" dirty="0">
+                <a:solidFill>
+                  <a:schemeClr val="bg1">
+                    <a:lumMod val="95000"/>
+                  </a:schemeClr>
+                </a:solidFill>
+                <a:latin typeface="Noto Sans KR Medium" panose="020B0200000000000000" pitchFamily="34" charset="-128"/>
+                <a:ea typeface="Noto Sans KR Medium" panose="020B0200000000000000" pitchFamily="34" charset="-128"/>
+              </a:rPr>
+              <a:t>ID</a:t>
+            </a:r>
+            <a:r>
+              <a:rPr lang="ko-KR" altLang="en-US" sz="1000" dirty="0">
+                <a:solidFill>
+                  <a:schemeClr val="bg1">
+                    <a:lumMod val="95000"/>
+                  </a:schemeClr>
+                </a:solidFill>
+                <a:latin typeface="Noto Sans KR Medium" panose="020B0200000000000000" pitchFamily="34" charset="-128"/>
+                <a:ea typeface="Noto Sans KR Medium" panose="020B0200000000000000" pitchFamily="34" charset="-128"/>
+              </a:rPr>
+              <a:t>와 개수를 가지고 있음</a:t>
+            </a:r>
+            <a:endParaRPr lang="en-US" altLang="ko-KR" sz="1000" dirty="0">
+              <a:solidFill>
+                <a:schemeClr val="bg1">
+                  <a:lumMod val="95000"/>
+                </a:schemeClr>
+              </a:solidFill>
+              <a:latin typeface="Noto Sans KR Medium" panose="020B0200000000000000" pitchFamily="34" charset="-128"/>
+              <a:ea typeface="Noto Sans KR Medium" panose="020B0200000000000000" pitchFamily="34" charset="-128"/>
+            </a:endParaRPr>
+          </a:p>
+          <a:p>
+            <a:pPr marL="171450" indent="-171450">
+              <a:buFontTx/>
+              <a:buChar char="-"/>
+            </a:pPr>
+            <a:r>
+              <a:rPr lang="ko-KR" altLang="en-US" sz="1000" dirty="0">
+                <a:solidFill>
+                  <a:schemeClr val="bg1">
+                    <a:lumMod val="95000"/>
+                  </a:schemeClr>
+                </a:solidFill>
+                <a:latin typeface="Noto Sans KR Medium" panose="020B0200000000000000" pitchFamily="34" charset="-128"/>
+                <a:ea typeface="Noto Sans KR Medium" panose="020B0200000000000000" pitchFamily="34" charset="-128"/>
+              </a:rPr>
+              <a:t>레벨 </a:t>
+            </a:r>
+            <a:r>
+              <a:rPr lang="ko-KR" altLang="en-US" sz="1000" dirty="0" err="1">
+                <a:solidFill>
+                  <a:schemeClr val="bg1">
+                    <a:lumMod val="95000"/>
+                  </a:schemeClr>
+                </a:solidFill>
+                <a:latin typeface="Noto Sans KR Medium" panose="020B0200000000000000" pitchFamily="34" charset="-128"/>
+                <a:ea typeface="Noto Sans KR Medium" panose="020B0200000000000000" pitchFamily="34" charset="-128"/>
+              </a:rPr>
+              <a:t>클리어</a:t>
+            </a:r>
+            <a:r>
+              <a:rPr lang="ko-KR" altLang="en-US" sz="1000" dirty="0">
+                <a:solidFill>
+                  <a:schemeClr val="bg1">
+                    <a:lumMod val="95000"/>
+                  </a:schemeClr>
+                </a:solidFill>
+                <a:latin typeface="Noto Sans KR Medium" panose="020B0200000000000000" pitchFamily="34" charset="-128"/>
+                <a:ea typeface="Noto Sans KR Medium" panose="020B0200000000000000" pitchFamily="34" charset="-128"/>
+              </a:rPr>
+              <a:t> 시</a:t>
+            </a:r>
+            <a:r>
+              <a:rPr lang="en-US" altLang="ko-KR" sz="1000" dirty="0">
+                <a:solidFill>
+                  <a:schemeClr val="bg1">
+                    <a:lumMod val="95000"/>
+                  </a:schemeClr>
+                </a:solidFill>
+                <a:latin typeface="Noto Sans KR Medium" panose="020B0200000000000000" pitchFamily="34" charset="-128"/>
+                <a:ea typeface="Noto Sans KR Medium" panose="020B0200000000000000" pitchFamily="34" charset="-128"/>
+              </a:rPr>
+              <a:t> </a:t>
+            </a:r>
+            <a:r>
+              <a:rPr lang="ko-KR" altLang="en-US" sz="1000" dirty="0">
+                <a:solidFill>
+                  <a:schemeClr val="bg1">
+                    <a:lumMod val="95000"/>
+                  </a:schemeClr>
+                </a:solidFill>
+                <a:latin typeface="Noto Sans KR Medium" panose="020B0200000000000000" pitchFamily="34" charset="-128"/>
+                <a:ea typeface="Noto Sans KR Medium" panose="020B0200000000000000" pitchFamily="34" charset="-128"/>
+              </a:rPr>
+              <a:t>보상 아이템 및 재화도 포함됨</a:t>
+            </a:r>
+            <a:endParaRPr lang="en-US" altLang="ko-KR" sz="1000" dirty="0">
+              <a:solidFill>
+                <a:schemeClr val="bg1">
+                  <a:lumMod val="95000"/>
+                </a:schemeClr>
+              </a:solidFill>
+              <a:latin typeface="Noto Sans KR Medium" panose="020B0200000000000000" pitchFamily="34" charset="-128"/>
+              <a:ea typeface="Noto Sans KR Medium" panose="020B0200000000000000" pitchFamily="34" charset="-128"/>
+            </a:endParaRPr>
+          </a:p>
+          <a:p>
             <a:endParaRPr lang="en-US" altLang="ko-KR" sz="1000" dirty="0" smtClean="0">
               <a:solidFill>
                 <a:schemeClr val="bg1">
@@ -11319,93 +11560,17 @@
             </a:endParaRPr>
           </a:p>
           <a:p>
-            <a:pPr marL="171450" indent="-171450">
-              <a:buFontTx/>
-              <a:buChar char="-"/>
-            </a:pPr>
-            <a:r>
-              <a:rPr lang="ko-KR" altLang="en-US" sz="1000" dirty="0" smtClean="0">
-                <a:solidFill>
-                  <a:schemeClr val="bg1">
-                    <a:lumMod val="95000"/>
-                  </a:schemeClr>
-                </a:solidFill>
-                <a:latin typeface="Noto Sans KR Medium" panose="020B0200000000000000" pitchFamily="34" charset="-128"/>
-                <a:ea typeface="Noto Sans KR Medium" panose="020B0200000000000000" pitchFamily="34" charset="-128"/>
-              </a:rPr>
-              <a:t>일반 액션마다 </a:t>
-            </a:r>
-            <a:r>
-              <a:rPr lang="en-US" altLang="ko-KR" sz="1000" dirty="0">
-                <a:solidFill>
-                  <a:schemeClr val="bg1">
-                    <a:lumMod val="95000"/>
-                  </a:schemeClr>
-                </a:solidFill>
-                <a:latin typeface="Noto Sans KR Medium" panose="020B0200000000000000" pitchFamily="34" charset="-128"/>
-                <a:ea typeface="Noto Sans KR Medium" panose="020B0200000000000000" pitchFamily="34" charset="-128"/>
-              </a:rPr>
-              <a:t>1</a:t>
-            </a:r>
-            <a:r>
-              <a:rPr lang="ko-KR" altLang="en-US" sz="1000" dirty="0" smtClean="0">
-                <a:solidFill>
-                  <a:schemeClr val="bg1">
-                    <a:lumMod val="95000"/>
-                  </a:schemeClr>
-                </a:solidFill>
-                <a:latin typeface="Noto Sans KR Medium" panose="020B0200000000000000" pitchFamily="34" charset="-128"/>
-                <a:ea typeface="Noto Sans KR Medium" panose="020B0200000000000000" pitchFamily="34" charset="-128"/>
-              </a:rPr>
-              <a:t>씩 스킬 포인트를 얻고</a:t>
-            </a:r>
-            <a:r>
-              <a:rPr lang="en-US" altLang="ko-KR" sz="1000" dirty="0" smtClean="0">
-                <a:solidFill>
-                  <a:schemeClr val="bg1">
-                    <a:lumMod val="95000"/>
-                  </a:schemeClr>
-                </a:solidFill>
-                <a:latin typeface="Noto Sans KR Medium" panose="020B0200000000000000" pitchFamily="34" charset="-128"/>
-                <a:ea typeface="Noto Sans KR Medium" panose="020B0200000000000000" pitchFamily="34" charset="-128"/>
-              </a:rPr>
-              <a:t>, 10 </a:t>
-            </a:r>
-            <a:r>
-              <a:rPr lang="ko-KR" altLang="en-US" sz="1000" dirty="0" smtClean="0">
-                <a:solidFill>
-                  <a:schemeClr val="bg1">
-                    <a:lumMod val="95000"/>
-                  </a:schemeClr>
-                </a:solidFill>
-                <a:latin typeface="Noto Sans KR Medium" panose="020B0200000000000000" pitchFamily="34" charset="-128"/>
-                <a:ea typeface="Noto Sans KR Medium" panose="020B0200000000000000" pitchFamily="34" charset="-128"/>
-              </a:rPr>
-              <a:t>이상 스킬 포인트가 모이면 </a:t>
-            </a:r>
-            <a:r>
-              <a:rPr lang="ko-KR" altLang="en-US" sz="1000" dirty="0" err="1" smtClean="0">
-                <a:solidFill>
-                  <a:schemeClr val="bg1">
-                    <a:lumMod val="95000"/>
-                  </a:schemeClr>
-                </a:solidFill>
-                <a:latin typeface="Noto Sans KR Medium" panose="020B0200000000000000" pitchFamily="34" charset="-128"/>
-                <a:ea typeface="Noto Sans KR Medium" panose="020B0200000000000000" pitchFamily="34" charset="-128"/>
-              </a:rPr>
-              <a:t>기믹</a:t>
-            </a:r>
-            <a:r>
-              <a:rPr lang="ko-KR" altLang="en-US" sz="1000" dirty="0" smtClean="0">
-                <a:solidFill>
-                  <a:schemeClr val="bg1">
-                    <a:lumMod val="95000"/>
-                  </a:schemeClr>
-                </a:solidFill>
-                <a:latin typeface="Noto Sans KR Medium" panose="020B0200000000000000" pitchFamily="34" charset="-128"/>
-                <a:ea typeface="Noto Sans KR Medium" panose="020B0200000000000000" pitchFamily="34" charset="-128"/>
-              </a:rPr>
-              <a:t> 액션을 수행</a:t>
+            <a:r>
+              <a:rPr lang="en-US" altLang="ko-KR" sz="1000" dirty="0" err="1" smtClean="0">
+                <a:solidFill>
+                  <a:schemeClr val="bg1">
+                    <a:lumMod val="95000"/>
+                  </a:schemeClr>
+                </a:solidFill>
+                <a:latin typeface="Noto Sans KR Medium" panose="020B0200000000000000" pitchFamily="34" charset="-128"/>
+                <a:ea typeface="Noto Sans KR Medium" panose="020B0200000000000000" pitchFamily="34" charset="-128"/>
+              </a:rPr>
+              <a:t>StageSection</a:t>
             </a:r>
             <a:endParaRPr lang="en-US" altLang="ko-KR" sz="1000" dirty="0" smtClean="0">
               <a:solidFill>
@@ -11423,6 +11588,42 @@
               <a:buChar char="-"/>
             </a:pPr>
             <a:r>
+              <a:rPr lang="ko-KR" altLang="en-US" sz="1000" dirty="0" smtClean="0">
+                <a:solidFill>
+                  <a:schemeClr val="bg1">
+                    <a:lumMod val="95000"/>
+                  </a:schemeClr>
+                </a:solidFill>
+                <a:latin typeface="Noto Sans KR Medium" panose="020B0200000000000000" pitchFamily="34" charset="-128"/>
+                <a:ea typeface="Noto Sans KR Medium" panose="020B0200000000000000" pitchFamily="34" charset="-128"/>
+              </a:rPr>
+              <a:t>스테이지는 몇 개의 구역으로 구성되어 있고</a:t>
+            </a:r>
+            <a:r>
+              <a:rPr lang="en-US" altLang="ko-KR" sz="1000" dirty="0" smtClean="0">
+                <a:solidFill>
+                  <a:schemeClr val="bg1">
+                    <a:lumMod val="95000"/>
+                  </a:schemeClr>
+                </a:solidFill>
+                <a:latin typeface="Noto Sans KR Medium" panose="020B0200000000000000" pitchFamily="34" charset="-128"/>
+                <a:ea typeface="Noto Sans KR Medium" panose="020B0200000000000000" pitchFamily="34" charset="-128"/>
+              </a:rPr>
+              <a:t>, </a:t>
+            </a:r>
+            <a:r>
+              <a:rPr lang="ko-KR" altLang="en-US" sz="1000" dirty="0" smtClean="0">
+                <a:solidFill>
+                  <a:schemeClr val="bg1">
+                    <a:lumMod val="95000"/>
+                  </a:schemeClr>
+                </a:solidFill>
+                <a:latin typeface="Noto Sans KR Medium" panose="020B0200000000000000" pitchFamily="34" charset="-128"/>
+                <a:ea typeface="Noto Sans KR Medium" panose="020B0200000000000000" pitchFamily="34" charset="-128"/>
+              </a:rPr>
+              <a:t>모든 구역을 </a:t>
+            </a:r>
+            <a:r>
               <a:rPr lang="ko-KR" altLang="en-US" sz="1000" dirty="0" err="1" smtClean="0">
                 <a:solidFill>
                   <a:schemeClr val="bg1">
@@ -11432,19 +11633,85 @@
                 <a:latin typeface="Noto Sans KR Medium" panose="020B0200000000000000" pitchFamily="34" charset="-128"/>
                 <a:ea typeface="Noto Sans KR Medium" panose="020B0200000000000000" pitchFamily="34" charset="-128"/>
               </a:rPr>
-              <a:t>기믹</a:t>
-            </a:r>
-            <a:r>
-              <a:rPr lang="ko-KR" altLang="en-US" sz="1000" dirty="0" smtClean="0">
-                <a:solidFill>
-                  <a:schemeClr val="bg1">
-                    <a:lumMod val="95000"/>
-                  </a:schemeClr>
-                </a:solidFill>
-                <a:latin typeface="Noto Sans KR Medium" panose="020B0200000000000000" pitchFamily="34" charset="-128"/>
-                <a:ea typeface="Noto Sans KR Medium" panose="020B0200000000000000" pitchFamily="34" charset="-128"/>
-              </a:rPr>
-              <a:t> 액션 종류</a:t>
+              <a:t>클리어하면</a:t>
+            </a:r>
+            <a:r>
+              <a:rPr lang="ko-KR" altLang="en-US" sz="1000" dirty="0" smtClean="0">
+                <a:solidFill>
+                  <a:schemeClr val="bg1">
+                    <a:lumMod val="95000"/>
+                  </a:schemeClr>
+                </a:solidFill>
+                <a:latin typeface="Noto Sans KR Medium" panose="020B0200000000000000" pitchFamily="34" charset="-128"/>
+                <a:ea typeface="Noto Sans KR Medium" panose="020B0200000000000000" pitchFamily="34" charset="-128"/>
+              </a:rPr>
+              <a:t> 스테이지 종료됨</a:t>
+            </a:r>
+            <a:r>
+              <a:rPr lang="en-US" altLang="ko-KR" sz="1000" dirty="0" smtClean="0">
+                <a:solidFill>
+                  <a:schemeClr val="bg1">
+                    <a:lumMod val="95000"/>
+                  </a:schemeClr>
+                </a:solidFill>
+                <a:latin typeface="Noto Sans KR Medium" panose="020B0200000000000000" pitchFamily="34" charset="-128"/>
+                <a:ea typeface="Noto Sans KR Medium" panose="020B0200000000000000" pitchFamily="34" charset="-128"/>
+              </a:rPr>
+              <a:t>.</a:t>
+            </a:r>
+          </a:p>
+          <a:p>
+            <a:pPr marL="171450" indent="-171450">
+              <a:buFontTx/>
+              <a:buChar char="-"/>
+            </a:pPr>
+            <a:r>
+              <a:rPr lang="en-US" altLang="ko-KR" sz="1000" dirty="0" err="1" smtClean="0">
+                <a:solidFill>
+                  <a:schemeClr val="bg1">
+                    <a:lumMod val="95000"/>
+                  </a:schemeClr>
+                </a:solidFill>
+                <a:latin typeface="Noto Sans KR Medium" panose="020B0200000000000000" pitchFamily="34" charset="-128"/>
+                <a:ea typeface="Noto Sans KR Medium" panose="020B0200000000000000" pitchFamily="34" charset="-128"/>
+              </a:rPr>
+              <a:t>StageSection</a:t>
+            </a:r>
+            <a:r>
+              <a:rPr lang="ko-KR" altLang="en-US" sz="1000" dirty="0" smtClean="0">
+                <a:solidFill>
+                  <a:schemeClr val="bg1">
+                    <a:lumMod val="95000"/>
+                  </a:schemeClr>
+                </a:solidFill>
+                <a:latin typeface="Noto Sans KR Medium" panose="020B0200000000000000" pitchFamily="34" charset="-128"/>
+                <a:ea typeface="Noto Sans KR Medium" panose="020B0200000000000000" pitchFamily="34" charset="-128"/>
+              </a:rPr>
+              <a:t>은 레벨 배치되어 있고 </a:t>
+            </a:r>
+            <a:r>
+              <a:rPr lang="en-US" altLang="ko-KR" sz="1000" dirty="0" smtClean="0">
+                <a:solidFill>
+                  <a:schemeClr val="bg1">
+                    <a:lumMod val="95000"/>
+                  </a:schemeClr>
+                </a:solidFill>
+                <a:latin typeface="Noto Sans KR Medium" panose="020B0200000000000000" pitchFamily="34" charset="-128"/>
+                <a:ea typeface="Noto Sans KR Medium" panose="020B0200000000000000" pitchFamily="34" charset="-128"/>
+              </a:rPr>
+              <a:t>Index</a:t>
+            </a:r>
+            <a:r>
+              <a:rPr lang="ko-KR" altLang="en-US" sz="1000" dirty="0" smtClean="0">
+                <a:solidFill>
+                  <a:schemeClr val="bg1">
+                    <a:lumMod val="95000"/>
+                  </a:schemeClr>
+                </a:solidFill>
+                <a:latin typeface="Noto Sans KR Medium" panose="020B0200000000000000" pitchFamily="34" charset="-128"/>
+                <a:ea typeface="Noto Sans KR Medium" panose="020B0200000000000000" pitchFamily="34" charset="-128"/>
+              </a:rPr>
+              <a:t>를 부여하여 각각의 구역을 표시함</a:t>
             </a:r>
             <a:endParaRPr lang="en-US" altLang="ko-KR" sz="1000" dirty="0" smtClean="0">
               <a:solidFill>
@@ -11457,7 +11724,7 @@
             </a:endParaRPr>
           </a:p>
           <a:p>
-            <a:pPr marL="628650" lvl="1" indent="-171450">
+            <a:pPr marL="171450" indent="-171450">
               <a:buFontTx/>
               <a:buChar char="-"/>
             </a:pPr>
@@ -11471,7 +11738,31 @@
                 <a:latin typeface="Noto Sans KR Medium" panose="020B0200000000000000" pitchFamily="34" charset="-128"/>
                 <a:ea typeface="Noto Sans KR Medium" panose="020B0200000000000000" pitchFamily="34" charset="-128"/>
               </a:rPr>
-              <a:t>카운터 </a:t>
+              <a:t>플레이어가 </a:t>
+            </a:r>
+            <a:r>
+              <a:rPr lang="en-US" altLang="ko-KR" sz="1000" dirty="0" err="1" smtClean="0">
+                <a:solidFill>
+                  <a:schemeClr val="bg1">
+                    <a:lumMod val="95000"/>
+                  </a:schemeClr>
+                </a:solidFill>
+                <a:latin typeface="Noto Sans KR Medium" panose="020B0200000000000000" pitchFamily="34" charset="-128"/>
+                <a:ea typeface="Noto Sans KR Medium" panose="020B0200000000000000" pitchFamily="34" charset="-128"/>
+              </a:rPr>
+              <a:t>StageSection</a:t>
+            </a:r>
+            <a:r>
+              <a:rPr lang="ko-KR" altLang="en-US" sz="1000" dirty="0" smtClean="0">
+                <a:solidFill>
+                  <a:schemeClr val="bg1">
+                    <a:lumMod val="95000"/>
+                  </a:schemeClr>
+                </a:solidFill>
+                <a:latin typeface="Noto Sans KR Medium" panose="020B0200000000000000" pitchFamily="34" charset="-128"/>
+                <a:ea typeface="Noto Sans KR Medium" panose="020B0200000000000000" pitchFamily="34" charset="-128"/>
+              </a:rPr>
+              <a:t>에 들어서면 설정된 </a:t>
             </a:r>
             <a:r>
               <a:rPr lang="en-US" altLang="ko-KR" sz="1000" dirty="0" smtClean="0">
@@ -11483,139 +11774,43 @@
                 <a:latin typeface="Noto Sans KR Medium" panose="020B0200000000000000" pitchFamily="34" charset="-128"/>
                 <a:ea typeface="Noto Sans KR Medium" panose="020B0200000000000000" pitchFamily="34" charset="-128"/>
               </a:rPr>
-              <a:t>: </a:t>
-            </a:r>
-            <a:r>
-              <a:rPr lang="ko-KR" altLang="en-US" sz="1000" dirty="0" smtClean="0">
-                <a:solidFill>
-                  <a:schemeClr val="bg1">
-                    <a:lumMod val="95000"/>
-                  </a:schemeClr>
-                </a:solidFill>
-                <a:latin typeface="Noto Sans KR Medium" panose="020B0200000000000000" pitchFamily="34" charset="-128"/>
-                <a:ea typeface="Noto Sans KR Medium" panose="020B0200000000000000" pitchFamily="34" charset="-128"/>
-              </a:rPr>
-              <a:t>보스가 정면으로 이동하며 공격함</a:t>
-            </a:r>
-            <a:r>
-              <a:rPr lang="en-US" altLang="ko-KR" sz="1000" dirty="0" smtClean="0">
-                <a:solidFill>
-                  <a:schemeClr val="bg1">
-                    <a:lumMod val="95000"/>
-                  </a:schemeClr>
-                </a:solidFill>
-                <a:latin typeface="Noto Sans KR Medium" panose="020B0200000000000000" pitchFamily="34" charset="-128"/>
-                <a:ea typeface="Noto Sans KR Medium" panose="020B0200000000000000" pitchFamily="34" charset="-128"/>
-              </a:rPr>
-              <a:t>. </a:t>
-            </a:r>
-            <a:r>
-              <a:rPr lang="ko-KR" altLang="en-US" sz="1000" dirty="0" smtClean="0">
-                <a:solidFill>
-                  <a:schemeClr val="bg1">
-                    <a:lumMod val="95000"/>
-                  </a:schemeClr>
-                </a:solidFill>
-                <a:latin typeface="Noto Sans KR Medium" panose="020B0200000000000000" pitchFamily="34" charset="-128"/>
-                <a:ea typeface="Noto Sans KR Medium" panose="020B0200000000000000" pitchFamily="34" charset="-128"/>
-              </a:rPr>
-              <a:t>보스 정면 </a:t>
-            </a:r>
-            <a:r>
-              <a:rPr lang="en-US" altLang="ko-KR" sz="1000" dirty="0" smtClean="0">
-                <a:solidFill>
-                  <a:schemeClr val="bg1">
-                    <a:lumMod val="95000"/>
-                  </a:schemeClr>
-                </a:solidFill>
-                <a:latin typeface="Noto Sans KR Medium" panose="020B0200000000000000" pitchFamily="34" charset="-128"/>
-                <a:ea typeface="Noto Sans KR Medium" panose="020B0200000000000000" pitchFamily="34" charset="-128"/>
-              </a:rPr>
-              <a:t>(</a:t>
-            </a:r>
-            <a:r>
-              <a:rPr lang="ko-KR" altLang="en-US" sz="1000" dirty="0" smtClean="0">
-                <a:solidFill>
-                  <a:schemeClr val="bg1">
-                    <a:lumMod val="95000"/>
-                  </a:schemeClr>
-                </a:solidFill>
-                <a:latin typeface="Noto Sans KR Medium" panose="020B0200000000000000" pitchFamily="34" charset="-128"/>
-                <a:ea typeface="Noto Sans KR Medium" panose="020B0200000000000000" pitchFamily="34" charset="-128"/>
-              </a:rPr>
-              <a:t>보스 기준 </a:t>
-            </a:r>
-            <a:r>
-              <a:rPr lang="en-US" altLang="ko-KR" sz="1000" dirty="0" smtClean="0">
-                <a:solidFill>
-                  <a:schemeClr val="bg1">
-                    <a:lumMod val="95000"/>
-                  </a:schemeClr>
-                </a:solidFill>
-                <a:latin typeface="Noto Sans KR Medium" panose="020B0200000000000000" pitchFamily="34" charset="-128"/>
-                <a:ea typeface="Noto Sans KR Medium" panose="020B0200000000000000" pitchFamily="34" charset="-128"/>
-              </a:rPr>
-              <a:t>120</a:t>
-            </a:r>
-            <a:r>
-              <a:rPr lang="ko-KR" altLang="en-US" sz="1000" dirty="0" smtClean="0">
-                <a:solidFill>
-                  <a:schemeClr val="bg1">
-                    <a:lumMod val="95000"/>
-                  </a:schemeClr>
-                </a:solidFill>
-                <a:latin typeface="Noto Sans KR Medium" panose="020B0200000000000000" pitchFamily="34" charset="-128"/>
-                <a:ea typeface="Noto Sans KR Medium" panose="020B0200000000000000" pitchFamily="34" charset="-128"/>
-              </a:rPr>
-              <a:t>도 이내 방향</a:t>
-            </a:r>
-            <a:r>
-              <a:rPr lang="en-US" altLang="ko-KR" sz="1000" dirty="0" smtClean="0">
-                <a:solidFill>
-                  <a:schemeClr val="bg1">
-                    <a:lumMod val="95000"/>
-                  </a:schemeClr>
-                </a:solidFill>
-                <a:latin typeface="Noto Sans KR Medium" panose="020B0200000000000000" pitchFamily="34" charset="-128"/>
-                <a:ea typeface="Noto Sans KR Medium" panose="020B0200000000000000" pitchFamily="34" charset="-128"/>
-              </a:rPr>
-              <a:t>)</a:t>
-            </a:r>
-            <a:r>
-              <a:rPr lang="ko-KR" altLang="en-US" sz="1000" dirty="0" smtClean="0">
-                <a:solidFill>
-                  <a:schemeClr val="bg1">
-                    <a:lumMod val="95000"/>
-                  </a:schemeClr>
-                </a:solidFill>
-                <a:latin typeface="Noto Sans KR Medium" panose="020B0200000000000000" pitchFamily="34" charset="-128"/>
-                <a:ea typeface="Noto Sans KR Medium" panose="020B0200000000000000" pitchFamily="34" charset="-128"/>
-              </a:rPr>
-              <a:t>에서 스매시</a:t>
-            </a:r>
-            <a:r>
-              <a:rPr lang="en-US" altLang="ko-KR" sz="1000" dirty="0" smtClean="0">
-                <a:solidFill>
-                  <a:schemeClr val="bg1">
-                    <a:lumMod val="95000"/>
-                  </a:schemeClr>
-                </a:solidFill>
-                <a:latin typeface="Noto Sans KR Medium" panose="020B0200000000000000" pitchFamily="34" charset="-128"/>
-                <a:ea typeface="Noto Sans KR Medium" panose="020B0200000000000000" pitchFamily="34" charset="-128"/>
-              </a:rPr>
-              <a:t>, </a:t>
-            </a:r>
-            <a:r>
-              <a:rPr lang="ko-KR" altLang="en-US" sz="1000" dirty="0" smtClean="0">
-                <a:solidFill>
-                  <a:schemeClr val="bg1">
-                    <a:lumMod val="95000"/>
-                  </a:schemeClr>
-                </a:solidFill>
-                <a:latin typeface="Noto Sans KR Medium" panose="020B0200000000000000" pitchFamily="34" charset="-128"/>
-                <a:ea typeface="Noto Sans KR Medium" panose="020B0200000000000000" pitchFamily="34" charset="-128"/>
-              </a:rPr>
-              <a:t>스킬 공격 시 파훼 가능</a:t>
+              <a:t>Index</a:t>
+            </a:r>
+            <a:r>
+              <a:rPr lang="ko-KR" altLang="en-US" sz="1000" dirty="0" smtClean="0">
+                <a:solidFill>
+                  <a:schemeClr val="bg1">
+                    <a:lumMod val="95000"/>
+                  </a:schemeClr>
+                </a:solidFill>
+                <a:latin typeface="Noto Sans KR Medium" panose="020B0200000000000000" pitchFamily="34" charset="-128"/>
+                <a:ea typeface="Noto Sans KR Medium" panose="020B0200000000000000" pitchFamily="34" charset="-128"/>
+              </a:rPr>
+              <a:t>를 통해 </a:t>
+            </a:r>
+            <a:r>
+              <a:rPr lang="ko-KR" altLang="en-US" sz="1000" dirty="0" err="1" smtClean="0">
+                <a:solidFill>
+                  <a:schemeClr val="bg1">
+                    <a:lumMod val="95000"/>
+                  </a:schemeClr>
+                </a:solidFill>
+                <a:latin typeface="Noto Sans KR Medium" panose="020B0200000000000000" pitchFamily="34" charset="-128"/>
+                <a:ea typeface="Noto Sans KR Medium" panose="020B0200000000000000" pitchFamily="34" charset="-128"/>
+              </a:rPr>
+              <a:t>몬스터들을</a:t>
+            </a:r>
+            <a:r>
+              <a:rPr lang="ko-KR" altLang="en-US" sz="1000" dirty="0" smtClean="0">
+                <a:solidFill>
+                  <a:schemeClr val="bg1">
+                    <a:lumMod val="95000"/>
+                  </a:schemeClr>
+                </a:solidFill>
+                <a:latin typeface="Noto Sans KR Medium" panose="020B0200000000000000" pitchFamily="34" charset="-128"/>
+                <a:ea typeface="Noto Sans KR Medium" panose="020B0200000000000000" pitchFamily="34" charset="-128"/>
+              </a:rPr>
+              <a:t> 생성</a:t>
             </a:r>
             <a:endParaRPr lang="en-US" altLang="ko-KR" sz="1000" dirty="0" smtClean="0">
               <a:solidFill>
@@ -11628,7 +11823,7 @@
             </a:endParaRPr>
           </a:p>
           <a:p>
-            <a:pPr marL="628650" lvl="1" indent="-171450">
+            <a:pPr marL="171450" indent="-171450">
               <a:buFontTx/>
               <a:buChar char="-"/>
             </a:pPr>
@@ -11642,105 +11837,32 @@
                 <a:latin typeface="Noto Sans KR Medium" panose="020B0200000000000000" pitchFamily="34" charset="-128"/>
                 <a:ea typeface="Noto Sans KR Medium" panose="020B0200000000000000" pitchFamily="34" charset="-128"/>
               </a:rPr>
-              <a:t>무력화 </a:t>
-            </a:r>
-            <a:r>
-              <a:rPr lang="en-US" altLang="ko-KR" sz="1000" dirty="0" smtClean="0">
-                <a:solidFill>
-                  <a:schemeClr val="bg1">
-                    <a:lumMod val="95000"/>
-                  </a:schemeClr>
-                </a:solidFill>
-                <a:latin typeface="Noto Sans KR Medium" panose="020B0200000000000000" pitchFamily="34" charset="-128"/>
-                <a:ea typeface="Noto Sans KR Medium" panose="020B0200000000000000" pitchFamily="34" charset="-128"/>
-              </a:rPr>
-              <a:t>: </a:t>
-            </a:r>
-            <a:r>
-              <a:rPr lang="ko-KR" altLang="en-US" sz="1000" dirty="0" smtClean="0">
-                <a:solidFill>
-                  <a:schemeClr val="bg1">
-                    <a:lumMod val="95000"/>
-                  </a:schemeClr>
-                </a:solidFill>
-                <a:latin typeface="Noto Sans KR Medium" panose="020B0200000000000000" pitchFamily="34" charset="-128"/>
-                <a:ea typeface="Noto Sans KR Medium" panose="020B0200000000000000" pitchFamily="34" charset="-128"/>
-              </a:rPr>
-              <a:t>보스가 일정 시간 동안 무력화 가능 상태가 됨</a:t>
-            </a:r>
-            <a:r>
-              <a:rPr lang="en-US" altLang="ko-KR" sz="1000" dirty="0" smtClean="0">
-                <a:solidFill>
-                  <a:schemeClr val="bg1">
-                    <a:lumMod val="95000"/>
-                  </a:schemeClr>
-                </a:solidFill>
-                <a:latin typeface="Noto Sans KR Medium" panose="020B0200000000000000" pitchFamily="34" charset="-128"/>
-                <a:ea typeface="Noto Sans KR Medium" panose="020B0200000000000000" pitchFamily="34" charset="-128"/>
-              </a:rPr>
-              <a:t>.</a:t>
-            </a:r>
-            <a:br>
-              <a:rPr lang="en-US" altLang="ko-KR" sz="1000" dirty="0" smtClean="0">
-                <a:solidFill>
-                  <a:schemeClr val="bg1">
-                    <a:lumMod val="95000"/>
-                  </a:schemeClr>
-                </a:solidFill>
-                <a:latin typeface="Noto Sans KR Medium" panose="020B0200000000000000" pitchFamily="34" charset="-128"/>
-                <a:ea typeface="Noto Sans KR Medium" panose="020B0200000000000000" pitchFamily="34" charset="-128"/>
-              </a:rPr>
-            </a:br>
-            <a:r>
-              <a:rPr lang="ko-KR" altLang="en-US" sz="1000" dirty="0" smtClean="0">
-                <a:solidFill>
-                  <a:schemeClr val="bg1">
-                    <a:lumMod val="95000"/>
-                  </a:schemeClr>
-                </a:solidFill>
-                <a:latin typeface="Noto Sans KR Medium" panose="020B0200000000000000" pitchFamily="34" charset="-128"/>
-                <a:ea typeface="Noto Sans KR Medium" panose="020B0200000000000000" pitchFamily="34" charset="-128"/>
-              </a:rPr>
-              <a:t>무력화 게이지를 </a:t>
-            </a:r>
-            <a:r>
-              <a:rPr lang="en-US" altLang="ko-KR" sz="1000" dirty="0" smtClean="0">
-                <a:solidFill>
-                  <a:schemeClr val="bg1">
-                    <a:lumMod val="95000"/>
-                  </a:schemeClr>
-                </a:solidFill>
-                <a:latin typeface="Noto Sans KR Medium" panose="020B0200000000000000" pitchFamily="34" charset="-128"/>
-                <a:ea typeface="Noto Sans KR Medium" panose="020B0200000000000000" pitchFamily="34" charset="-128"/>
-              </a:rPr>
-              <a:t>0</a:t>
-            </a:r>
-            <a:r>
-              <a:rPr lang="ko-KR" altLang="en-US" sz="1000" dirty="0" smtClean="0">
-                <a:solidFill>
-                  <a:schemeClr val="bg1">
-                    <a:lumMod val="95000"/>
-                  </a:schemeClr>
-                </a:solidFill>
-                <a:latin typeface="Noto Sans KR Medium" panose="020B0200000000000000" pitchFamily="34" charset="-128"/>
-                <a:ea typeface="Noto Sans KR Medium" panose="020B0200000000000000" pitchFamily="34" charset="-128"/>
-              </a:rPr>
-              <a:t>으로 만들지 못하면 일정 시간 후 매우 강력한 공격을 수행</a:t>
-            </a:r>
-            <a:r>
-              <a:rPr lang="en-US" altLang="ko-KR" sz="1000" dirty="0" smtClean="0">
-                <a:solidFill>
-                  <a:schemeClr val="bg1">
-                    <a:lumMod val="95000"/>
-                  </a:schemeClr>
-                </a:solidFill>
-                <a:latin typeface="Noto Sans KR Medium" panose="020B0200000000000000" pitchFamily="34" charset="-128"/>
-                <a:ea typeface="Noto Sans KR Medium" panose="020B0200000000000000" pitchFamily="34" charset="-128"/>
-              </a:rPr>
-              <a:t>.</a:t>
-            </a:r>
-          </a:p>
-          <a:p>
+              <a:t>생성된 </a:t>
+            </a:r>
+            <a:r>
+              <a:rPr lang="ko-KR" altLang="en-US" sz="1000" dirty="0" err="1" smtClean="0">
+                <a:solidFill>
+                  <a:schemeClr val="bg1">
+                    <a:lumMod val="95000"/>
+                  </a:schemeClr>
+                </a:solidFill>
+                <a:latin typeface="Noto Sans KR Medium" panose="020B0200000000000000" pitchFamily="34" charset="-128"/>
+                <a:ea typeface="Noto Sans KR Medium" panose="020B0200000000000000" pitchFamily="34" charset="-128"/>
+              </a:rPr>
+              <a:t>몬스터들을</a:t>
+            </a:r>
+            <a:r>
+              <a:rPr lang="ko-KR" altLang="en-US" sz="1000" dirty="0" smtClean="0">
+                <a:solidFill>
+                  <a:schemeClr val="bg1">
+                    <a:lumMod val="95000"/>
+                  </a:schemeClr>
+                </a:solidFill>
+                <a:latin typeface="Noto Sans KR Medium" panose="020B0200000000000000" pitchFamily="34" charset="-128"/>
+                <a:ea typeface="Noto Sans KR Medium" panose="020B0200000000000000" pitchFamily="34" charset="-128"/>
+              </a:rPr>
+              <a:t> 모두 쓰러뜨리면 해당 구역이 완료됨</a:t>
+            </a:r>
             <a:endParaRPr lang="en-US" altLang="ko-KR" sz="1000" dirty="0" smtClean="0">
               <a:solidFill>
                 <a:schemeClr val="bg1">
@@ -11752,32 +11874,6 @@
             </a:endParaRPr>
           </a:p>
           <a:p>
-            <a:r>
-              <a:rPr lang="ko-KR" altLang="en-US" sz="1000" dirty="0" smtClean="0">
-                <a:solidFill>
-                  <a:schemeClr val="bg1">
-                    <a:lumMod val="95000"/>
-                  </a:schemeClr>
-                </a:solidFill>
-                <a:latin typeface="Noto Sans KR Medium" panose="020B0200000000000000" pitchFamily="34" charset="-128"/>
-                <a:ea typeface="Noto Sans KR Medium" panose="020B0200000000000000" pitchFamily="34" charset="-128"/>
-              </a:rPr>
-              <a:t>보스 </a:t>
-            </a:r>
-            <a:r>
-              <a:rPr lang="en-US" altLang="ko-KR" sz="1000" dirty="0" smtClean="0">
-                <a:solidFill>
-                  <a:schemeClr val="bg1">
-                    <a:lumMod val="95000"/>
-                  </a:schemeClr>
-                </a:solidFill>
-                <a:latin typeface="Noto Sans KR Medium" panose="020B0200000000000000" pitchFamily="34" charset="-128"/>
-                <a:ea typeface="Noto Sans KR Medium" panose="020B0200000000000000" pitchFamily="34" charset="-128"/>
-              </a:rPr>
-              <a:t>BT</a:t>
-            </a:r>
-          </a:p>
-          <a:p>
             <a:pPr marL="171450" indent="-171450">
               <a:buFontTx/>
               <a:buChar char="-"/>
@@ -11792,7 +11888,91 @@
                 <a:latin typeface="Noto Sans KR Medium" panose="020B0200000000000000" pitchFamily="34" charset="-128"/>
                 <a:ea typeface="Noto Sans KR Medium" panose="020B0200000000000000" pitchFamily="34" charset="-128"/>
               </a:rPr>
-              <a:t>일반 상태일 시</a:t>
+              <a:t>레벨에서 생성할 </a:t>
+            </a:r>
+            <a:r>
+              <a:rPr lang="ko-KR" altLang="en-US" sz="1000" dirty="0" err="1" smtClean="0">
+                <a:solidFill>
+                  <a:schemeClr val="bg1">
+                    <a:lumMod val="95000"/>
+                  </a:schemeClr>
+                </a:solidFill>
+                <a:latin typeface="Noto Sans KR Medium" panose="020B0200000000000000" pitchFamily="34" charset="-128"/>
+                <a:ea typeface="Noto Sans KR Medium" panose="020B0200000000000000" pitchFamily="34" charset="-128"/>
+              </a:rPr>
+              <a:t>몬스터들은</a:t>
+            </a:r>
+            <a:r>
+              <a:rPr lang="ko-KR" altLang="en-US" sz="1000" dirty="0" smtClean="0">
+                <a:solidFill>
+                  <a:schemeClr val="bg1">
+                    <a:lumMod val="95000"/>
+                  </a:schemeClr>
+                </a:solidFill>
+                <a:latin typeface="Noto Sans KR Medium" panose="020B0200000000000000" pitchFamily="34" charset="-128"/>
+                <a:ea typeface="Noto Sans KR Medium" panose="020B0200000000000000" pitchFamily="34" charset="-128"/>
+              </a:rPr>
+              <a:t> 각 구역에서 새로 </a:t>
+            </a:r>
+            <a:r>
+              <a:rPr lang="ko-KR" altLang="en-US" sz="1000" dirty="0" err="1" smtClean="0">
+                <a:solidFill>
+                  <a:schemeClr val="bg1">
+                    <a:lumMod val="95000"/>
+                  </a:schemeClr>
+                </a:solidFill>
+                <a:latin typeface="Noto Sans KR Medium" panose="020B0200000000000000" pitchFamily="34" charset="-128"/>
+                <a:ea typeface="Noto Sans KR Medium" panose="020B0200000000000000" pitchFamily="34" charset="-128"/>
+              </a:rPr>
+              <a:t>스폰하는</a:t>
+            </a:r>
+            <a:r>
+              <a:rPr lang="ko-KR" altLang="en-US" sz="1000" dirty="0" smtClean="0">
+                <a:solidFill>
+                  <a:schemeClr val="bg1">
+                    <a:lumMod val="95000"/>
+                  </a:schemeClr>
+                </a:solidFill>
+                <a:latin typeface="Noto Sans KR Medium" panose="020B0200000000000000" pitchFamily="34" charset="-128"/>
+                <a:ea typeface="Noto Sans KR Medium" panose="020B0200000000000000" pitchFamily="34" charset="-128"/>
+              </a:rPr>
+              <a:t> 것이 아니라</a:t>
+            </a:r>
+            <a:r>
+              <a:rPr lang="en-US" altLang="ko-KR" sz="1000" dirty="0">
+                <a:solidFill>
+                  <a:schemeClr val="bg1">
+                    <a:lumMod val="95000"/>
+                  </a:schemeClr>
+                </a:solidFill>
+                <a:latin typeface="Noto Sans KR Medium" panose="020B0200000000000000" pitchFamily="34" charset="-128"/>
+                <a:ea typeface="Noto Sans KR Medium" panose="020B0200000000000000" pitchFamily="34" charset="-128"/>
+              </a:rPr>
+              <a:t> </a:t>
+            </a:r>
+            <a:r>
+              <a:rPr lang="en-US" altLang="ko-KR" sz="1000" dirty="0" err="1" smtClean="0">
+                <a:solidFill>
+                  <a:schemeClr val="bg1">
+                    <a:lumMod val="95000"/>
+                  </a:schemeClr>
+                </a:solidFill>
+                <a:latin typeface="Noto Sans KR Medium" panose="020B0200000000000000" pitchFamily="34" charset="-128"/>
+                <a:ea typeface="Noto Sans KR Medium" panose="020B0200000000000000" pitchFamily="34" charset="-128"/>
+              </a:rPr>
+              <a:t>ObjectPoolManager</a:t>
+            </a:r>
+            <a:r>
+              <a:rPr lang="ko-KR" altLang="en-US" sz="1000" dirty="0" smtClean="0">
+                <a:solidFill>
+                  <a:schemeClr val="bg1">
+                    <a:lumMod val="95000"/>
+                  </a:schemeClr>
+                </a:solidFill>
+                <a:latin typeface="Noto Sans KR Medium" panose="020B0200000000000000" pitchFamily="34" charset="-128"/>
+                <a:ea typeface="Noto Sans KR Medium" panose="020B0200000000000000" pitchFamily="34" charset="-128"/>
+              </a:rPr>
+              <a:t>에 등록되어 재사용됨</a:t>
             </a:r>
             <a:r>
               <a:rPr lang="en-US" altLang="ko-KR" sz="1000" dirty="0" smtClean="0">
@@ -11804,410 +11984,8 @@
                 <a:latin typeface="Noto Sans KR Medium" panose="020B0200000000000000" pitchFamily="34" charset="-128"/>
                 <a:ea typeface="Noto Sans KR Medium" panose="020B0200000000000000" pitchFamily="34" charset="-128"/>
               </a:rPr>
-              <a:t>, </a:t>
-            </a:r>
-            <a:r>
-              <a:rPr lang="ko-KR" altLang="en-US" sz="1000" dirty="0" smtClean="0">
-                <a:solidFill>
-                  <a:schemeClr val="bg1">
-                    <a:lumMod val="95000"/>
-                  </a:schemeClr>
-                </a:solidFill>
-                <a:latin typeface="Noto Sans KR Medium" panose="020B0200000000000000" pitchFamily="34" charset="-128"/>
-                <a:ea typeface="Noto Sans KR Medium" panose="020B0200000000000000" pitchFamily="34" charset="-128"/>
-              </a:rPr>
-              <a:t>주변 </a:t>
-            </a:r>
-            <a:r>
-              <a:rPr lang="ko-KR" altLang="en-US" sz="1000" dirty="0" err="1" smtClean="0">
-                <a:solidFill>
-                  <a:schemeClr val="bg1">
-                    <a:lumMod val="95000"/>
-                  </a:schemeClr>
-                </a:solidFill>
-                <a:latin typeface="Noto Sans KR Medium" panose="020B0200000000000000" pitchFamily="34" charset="-128"/>
-                <a:ea typeface="Noto Sans KR Medium" panose="020B0200000000000000" pitchFamily="34" charset="-128"/>
-              </a:rPr>
-              <a:t>랜덤한</a:t>
-            </a:r>
-            <a:r>
-              <a:rPr lang="ko-KR" altLang="en-US" sz="1000" dirty="0" smtClean="0">
-                <a:solidFill>
-                  <a:schemeClr val="bg1">
-                    <a:lumMod val="95000"/>
-                  </a:schemeClr>
-                </a:solidFill>
-                <a:latin typeface="Noto Sans KR Medium" panose="020B0200000000000000" pitchFamily="34" charset="-128"/>
-                <a:ea typeface="Noto Sans KR Medium" panose="020B0200000000000000" pitchFamily="34" charset="-128"/>
-              </a:rPr>
-              <a:t> 곳을 돌아다니며 탐색</a:t>
-            </a:r>
-            <a:endParaRPr lang="en-US" altLang="ko-KR" sz="1000" dirty="0" smtClean="0">
-              <a:solidFill>
-                <a:schemeClr val="bg1">
-                  <a:lumMod val="95000"/>
-                </a:schemeClr>
-              </a:solidFill>
-              <a:latin typeface="Noto Sans KR Medium" panose="020B0200000000000000" pitchFamily="34" charset="-128"/>
-              <a:ea typeface="Noto Sans KR Medium" panose="020B0200000000000000" pitchFamily="34" charset="-128"/>
-            </a:endParaRPr>
-          </a:p>
-          <a:p>
-            <a:pPr marL="628650" lvl="1" indent="-171450">
-              <a:buFontTx/>
-              <a:buChar char="-"/>
-            </a:pPr>
-            <a:r>
-              <a:rPr lang="en-US" altLang="ko-KR" sz="1000" dirty="0" err="1" smtClean="0">
-                <a:solidFill>
-                  <a:schemeClr val="bg1">
-                    <a:lumMod val="95000"/>
-                  </a:schemeClr>
-                </a:solidFill>
-                <a:latin typeface="Noto Sans KR Medium" panose="020B0200000000000000" pitchFamily="34" charset="-128"/>
-                <a:ea typeface="Noto Sans KR Medium" panose="020B0200000000000000" pitchFamily="34" charset="-128"/>
-              </a:rPr>
-              <a:t>FindPlayer</a:t>
-            </a:r>
-            <a:r>
-              <a:rPr lang="ko-KR" altLang="en-US" sz="1000" dirty="0" smtClean="0">
-                <a:solidFill>
-                  <a:schemeClr val="bg1">
-                    <a:lumMod val="95000"/>
-                  </a:schemeClr>
-                </a:solidFill>
-                <a:latin typeface="Noto Sans KR Medium" panose="020B0200000000000000" pitchFamily="34" charset="-128"/>
-                <a:ea typeface="Noto Sans KR Medium" panose="020B0200000000000000" pitchFamily="34" charset="-128"/>
-              </a:rPr>
-              <a:t>를 이용하여 </a:t>
-            </a:r>
-            <a:r>
-              <a:rPr lang="en-US" altLang="ko-KR" sz="1000" dirty="0" smtClean="0">
-                <a:solidFill>
-                  <a:schemeClr val="bg1">
-                    <a:lumMod val="95000"/>
-                  </a:schemeClr>
-                </a:solidFill>
-                <a:latin typeface="Noto Sans KR Medium" panose="020B0200000000000000" pitchFamily="34" charset="-128"/>
-                <a:ea typeface="Noto Sans KR Medium" panose="020B0200000000000000" pitchFamily="34" charset="-128"/>
-              </a:rPr>
-              <a:t>1</a:t>
-            </a:r>
-            <a:r>
-              <a:rPr lang="ko-KR" altLang="en-US" sz="1000" dirty="0" smtClean="0">
-                <a:solidFill>
-                  <a:schemeClr val="bg1">
-                    <a:lumMod val="95000"/>
-                  </a:schemeClr>
-                </a:solidFill>
-                <a:latin typeface="Noto Sans KR Medium" panose="020B0200000000000000" pitchFamily="34" charset="-128"/>
-                <a:ea typeface="Noto Sans KR Medium" panose="020B0200000000000000" pitchFamily="34" charset="-128"/>
-              </a:rPr>
-              <a:t>초마다 주변을 탐색</a:t>
-            </a:r>
-            <a:endParaRPr lang="en-US" altLang="ko-KR" sz="1000" dirty="0" smtClean="0">
-              <a:solidFill>
-                <a:schemeClr val="bg1">
-                  <a:lumMod val="95000"/>
-                </a:schemeClr>
-              </a:solidFill>
-              <a:latin typeface="Noto Sans KR Medium" panose="020B0200000000000000" pitchFamily="34" charset="-128"/>
-              <a:ea typeface="Noto Sans KR Medium" panose="020B0200000000000000" pitchFamily="34" charset="-128"/>
-            </a:endParaRPr>
-          </a:p>
-          <a:p>
-            <a:pPr marL="628650" lvl="1" indent="-171450">
-              <a:buFontTx/>
-              <a:buChar char="-"/>
-            </a:pPr>
-            <a:r>
-              <a:rPr lang="ko-KR" altLang="en-US" sz="1000" dirty="0" smtClean="0">
-                <a:solidFill>
-                  <a:schemeClr val="bg1">
-                    <a:lumMod val="95000"/>
-                  </a:schemeClr>
-                </a:solidFill>
-                <a:latin typeface="Noto Sans KR Medium" panose="020B0200000000000000" pitchFamily="34" charset="-128"/>
-                <a:ea typeface="Noto Sans KR Medium" panose="020B0200000000000000" pitchFamily="34" charset="-128"/>
-              </a:rPr>
-              <a:t>플레이어 발견 시</a:t>
-            </a:r>
-            <a:r>
-              <a:rPr lang="en-US" altLang="ko-KR" sz="1000" dirty="0" smtClean="0">
-                <a:solidFill>
-                  <a:schemeClr val="bg1">
-                    <a:lumMod val="95000"/>
-                  </a:schemeClr>
-                </a:solidFill>
-                <a:latin typeface="Noto Sans KR Medium" panose="020B0200000000000000" pitchFamily="34" charset="-128"/>
-                <a:ea typeface="Noto Sans KR Medium" panose="020B0200000000000000" pitchFamily="34" charset="-128"/>
-              </a:rPr>
-              <a:t>, </a:t>
-            </a:r>
-            <a:r>
-              <a:rPr lang="ko-KR" altLang="en-US" sz="1000" dirty="0" smtClean="0">
-                <a:solidFill>
-                  <a:schemeClr val="bg1">
-                    <a:lumMod val="95000"/>
-                  </a:schemeClr>
-                </a:solidFill>
-                <a:latin typeface="Noto Sans KR Medium" panose="020B0200000000000000" pitchFamily="34" charset="-128"/>
-                <a:ea typeface="Noto Sans KR Medium" panose="020B0200000000000000" pitchFamily="34" charset="-128"/>
-              </a:rPr>
-              <a:t>공격 상태로 전환</a:t>
-            </a:r>
-            <a:endParaRPr lang="en-US" altLang="ko-KR" sz="1000" dirty="0" smtClean="0">
-              <a:solidFill>
-                <a:schemeClr val="bg1">
-                  <a:lumMod val="95000"/>
-                </a:schemeClr>
-              </a:solidFill>
-              <a:latin typeface="Noto Sans KR Medium" panose="020B0200000000000000" pitchFamily="34" charset="-128"/>
-              <a:ea typeface="Noto Sans KR Medium" panose="020B0200000000000000" pitchFamily="34" charset="-128"/>
-            </a:endParaRPr>
-          </a:p>
-          <a:p>
-            <a:pPr marL="171450" indent="-171450">
-              <a:buFontTx/>
-              <a:buChar char="-"/>
-            </a:pPr>
-            <a:r>
-              <a:rPr lang="ko-KR" altLang="en-US" sz="1000" dirty="0" smtClean="0">
-                <a:solidFill>
-                  <a:schemeClr val="bg1">
-                    <a:lumMod val="95000"/>
-                  </a:schemeClr>
-                </a:solidFill>
-                <a:latin typeface="Noto Sans KR Medium" panose="020B0200000000000000" pitchFamily="34" charset="-128"/>
-                <a:ea typeface="Noto Sans KR Medium" panose="020B0200000000000000" pitchFamily="34" charset="-128"/>
-              </a:rPr>
-              <a:t>공격 상태</a:t>
-            </a:r>
-            <a:endParaRPr lang="en-US" altLang="ko-KR" sz="1000" dirty="0" smtClean="0">
-              <a:solidFill>
-                <a:schemeClr val="bg1">
-                  <a:lumMod val="95000"/>
-                </a:schemeClr>
-              </a:solidFill>
-              <a:latin typeface="Noto Sans KR Medium" panose="020B0200000000000000" pitchFamily="34" charset="-128"/>
-              <a:ea typeface="Noto Sans KR Medium" panose="020B0200000000000000" pitchFamily="34" charset="-128"/>
-            </a:endParaRPr>
-          </a:p>
-          <a:p>
-            <a:pPr marL="628650" lvl="1" indent="-171450">
-              <a:buFontTx/>
-              <a:buChar char="-"/>
-            </a:pPr>
-            <a:r>
-              <a:rPr lang="ko-KR" altLang="en-US" sz="1000" dirty="0" smtClean="0">
-                <a:solidFill>
-                  <a:schemeClr val="bg1">
-                    <a:lumMod val="95000"/>
-                  </a:schemeClr>
-                </a:solidFill>
-                <a:latin typeface="Noto Sans KR Medium" panose="020B0200000000000000" pitchFamily="34" charset="-128"/>
-                <a:ea typeface="Noto Sans KR Medium" panose="020B0200000000000000" pitchFamily="34" charset="-128"/>
-              </a:rPr>
-              <a:t>플레이어와의 거리를 확인</a:t>
-            </a:r>
-            <a:endParaRPr lang="en-US" altLang="ko-KR" sz="1000" dirty="0" smtClean="0">
-              <a:solidFill>
-                <a:schemeClr val="bg1">
-                  <a:lumMod val="95000"/>
-                </a:schemeClr>
-              </a:solidFill>
-              <a:latin typeface="Noto Sans KR Medium" panose="020B0200000000000000" pitchFamily="34" charset="-128"/>
-              <a:ea typeface="Noto Sans KR Medium" panose="020B0200000000000000" pitchFamily="34" charset="-128"/>
-            </a:endParaRPr>
-          </a:p>
-          <a:p>
-            <a:pPr marL="1085850" lvl="2" indent="-171450">
-              <a:buFontTx/>
-              <a:buChar char="-"/>
-            </a:pPr>
-            <a:r>
-              <a:rPr lang="ko-KR" altLang="en-US" sz="1000" dirty="0" smtClean="0">
-                <a:solidFill>
-                  <a:schemeClr val="bg1">
-                    <a:lumMod val="95000"/>
-                  </a:schemeClr>
-                </a:solidFill>
-                <a:latin typeface="Noto Sans KR Medium" panose="020B0200000000000000" pitchFamily="34" charset="-128"/>
-                <a:ea typeface="Noto Sans KR Medium" panose="020B0200000000000000" pitchFamily="34" charset="-128"/>
-              </a:rPr>
-              <a:t>근접 공격이 불가한 거리라면 추적하며 원거리 공격을 수행</a:t>
-            </a:r>
-            <a:endParaRPr lang="en-US" altLang="ko-KR" sz="1000" dirty="0" smtClean="0">
-              <a:solidFill>
-                <a:schemeClr val="bg1">
-                  <a:lumMod val="95000"/>
-                </a:schemeClr>
-              </a:solidFill>
-              <a:latin typeface="Noto Sans KR Medium" panose="020B0200000000000000" pitchFamily="34" charset="-128"/>
-              <a:ea typeface="Noto Sans KR Medium" panose="020B0200000000000000" pitchFamily="34" charset="-128"/>
-            </a:endParaRPr>
-          </a:p>
-          <a:p>
-            <a:pPr marL="1085850" lvl="2" indent="-171450">
-              <a:buFontTx/>
-              <a:buChar char="-"/>
-            </a:pPr>
-            <a:r>
-              <a:rPr lang="ko-KR" altLang="en-US" sz="1000" dirty="0" smtClean="0">
-                <a:solidFill>
-                  <a:schemeClr val="bg1">
-                    <a:lumMod val="95000"/>
-                  </a:schemeClr>
-                </a:solidFill>
-                <a:latin typeface="Noto Sans KR Medium" panose="020B0200000000000000" pitchFamily="34" charset="-128"/>
-                <a:ea typeface="Noto Sans KR Medium" panose="020B0200000000000000" pitchFamily="34" charset="-128"/>
-              </a:rPr>
-              <a:t>근접 공격이 가능하면 일반 공격 중 랜덤으로 한 개 수행</a:t>
-            </a:r>
-            <a:endParaRPr lang="en-US" altLang="ko-KR" sz="1000" dirty="0" smtClean="0">
-              <a:solidFill>
-                <a:schemeClr val="bg1">
-                  <a:lumMod val="95000"/>
-                </a:schemeClr>
-              </a:solidFill>
-              <a:latin typeface="Noto Sans KR Medium" panose="020B0200000000000000" pitchFamily="34" charset="-128"/>
-              <a:ea typeface="Noto Sans KR Medium" panose="020B0200000000000000" pitchFamily="34" charset="-128"/>
-            </a:endParaRPr>
-          </a:p>
-          <a:p>
-            <a:pPr marL="1085850" lvl="2" indent="-171450">
-              <a:buFontTx/>
-              <a:buChar char="-"/>
-            </a:pPr>
-            <a:r>
-              <a:rPr lang="ko-KR" altLang="en-US" sz="1000" dirty="0" smtClean="0">
-                <a:solidFill>
-                  <a:schemeClr val="bg1">
-                    <a:lumMod val="95000"/>
-                  </a:schemeClr>
-                </a:solidFill>
-                <a:latin typeface="Noto Sans KR Medium" panose="020B0200000000000000" pitchFamily="34" charset="-128"/>
-                <a:ea typeface="Noto Sans KR Medium" panose="020B0200000000000000" pitchFamily="34" charset="-128"/>
-              </a:rPr>
-              <a:t>만약</a:t>
-            </a:r>
-            <a:r>
-              <a:rPr lang="en-US" altLang="ko-KR" sz="1000" dirty="0" smtClean="0">
-                <a:solidFill>
-                  <a:schemeClr val="bg1">
-                    <a:lumMod val="95000"/>
-                  </a:schemeClr>
-                </a:solidFill>
-                <a:latin typeface="Noto Sans KR Medium" panose="020B0200000000000000" pitchFamily="34" charset="-128"/>
-                <a:ea typeface="Noto Sans KR Medium" panose="020B0200000000000000" pitchFamily="34" charset="-128"/>
-              </a:rPr>
-              <a:t>, </a:t>
-            </a:r>
-            <a:r>
-              <a:rPr lang="ko-KR" altLang="en-US" sz="1000" dirty="0" smtClean="0">
-                <a:solidFill>
-                  <a:schemeClr val="bg1">
-                    <a:lumMod val="95000"/>
-                  </a:schemeClr>
-                </a:solidFill>
-                <a:latin typeface="Noto Sans KR Medium" panose="020B0200000000000000" pitchFamily="34" charset="-128"/>
-                <a:ea typeface="Noto Sans KR Medium" panose="020B0200000000000000" pitchFamily="34" charset="-128"/>
-              </a:rPr>
-              <a:t>스킬 포인트가 </a:t>
-            </a:r>
-            <a:r>
-              <a:rPr lang="en-US" altLang="ko-KR" sz="1000" dirty="0" smtClean="0">
-                <a:solidFill>
-                  <a:schemeClr val="bg1">
-                    <a:lumMod val="95000"/>
-                  </a:schemeClr>
-                </a:solidFill>
-                <a:latin typeface="Noto Sans KR Medium" panose="020B0200000000000000" pitchFamily="34" charset="-128"/>
-                <a:ea typeface="Noto Sans KR Medium" panose="020B0200000000000000" pitchFamily="34" charset="-128"/>
-              </a:rPr>
-              <a:t>10 </a:t>
-            </a:r>
-            <a:r>
-              <a:rPr lang="ko-KR" altLang="en-US" sz="1000" dirty="0" smtClean="0">
-                <a:solidFill>
-                  <a:schemeClr val="bg1">
-                    <a:lumMod val="95000"/>
-                  </a:schemeClr>
-                </a:solidFill>
-                <a:latin typeface="Noto Sans KR Medium" panose="020B0200000000000000" pitchFamily="34" charset="-128"/>
-                <a:ea typeface="Noto Sans KR Medium" panose="020B0200000000000000" pitchFamily="34" charset="-128"/>
-              </a:rPr>
-              <a:t>이상 모여 </a:t>
-            </a:r>
-            <a:r>
-              <a:rPr lang="ko-KR" altLang="en-US" sz="1000" dirty="0" err="1" smtClean="0">
-                <a:solidFill>
-                  <a:schemeClr val="bg1">
-                    <a:lumMod val="95000"/>
-                  </a:schemeClr>
-                </a:solidFill>
-                <a:latin typeface="Noto Sans KR Medium" panose="020B0200000000000000" pitchFamily="34" charset="-128"/>
-                <a:ea typeface="Noto Sans KR Medium" panose="020B0200000000000000" pitchFamily="34" charset="-128"/>
-              </a:rPr>
-              <a:t>기믹</a:t>
-            </a:r>
-            <a:r>
-              <a:rPr lang="ko-KR" altLang="en-US" sz="1000" dirty="0" smtClean="0">
-                <a:solidFill>
-                  <a:schemeClr val="bg1">
-                    <a:lumMod val="95000"/>
-                  </a:schemeClr>
-                </a:solidFill>
-                <a:latin typeface="Noto Sans KR Medium" panose="020B0200000000000000" pitchFamily="34" charset="-128"/>
-                <a:ea typeface="Noto Sans KR Medium" panose="020B0200000000000000" pitchFamily="34" charset="-128"/>
-              </a:rPr>
-              <a:t> 행동이 가능하다면 </a:t>
-            </a:r>
-            <a:r>
-              <a:rPr lang="ko-KR" altLang="en-US" sz="1000" dirty="0" err="1" smtClean="0">
-                <a:solidFill>
-                  <a:schemeClr val="bg1">
-                    <a:lumMod val="95000"/>
-                  </a:schemeClr>
-                </a:solidFill>
-                <a:latin typeface="Noto Sans KR Medium" panose="020B0200000000000000" pitchFamily="34" charset="-128"/>
-                <a:ea typeface="Noto Sans KR Medium" panose="020B0200000000000000" pitchFamily="34" charset="-128"/>
-              </a:rPr>
-              <a:t>기믹</a:t>
-            </a:r>
-            <a:r>
-              <a:rPr lang="ko-KR" altLang="en-US" sz="1000" dirty="0" smtClean="0">
-                <a:solidFill>
-                  <a:schemeClr val="bg1">
-                    <a:lumMod val="95000"/>
-                  </a:schemeClr>
-                </a:solidFill>
-                <a:latin typeface="Noto Sans KR Medium" panose="020B0200000000000000" pitchFamily="34" charset="-128"/>
-                <a:ea typeface="Noto Sans KR Medium" panose="020B0200000000000000" pitchFamily="34" charset="-128"/>
-              </a:rPr>
-              <a:t> 수행</a:t>
-            </a:r>
-            <a:r>
-              <a:rPr lang="en-US" altLang="ko-KR" sz="1000" dirty="0" smtClean="0">
-                <a:solidFill>
-                  <a:schemeClr val="bg1">
-                    <a:lumMod val="95000"/>
-                  </a:schemeClr>
-                </a:solidFill>
-                <a:latin typeface="Noto Sans KR Medium" panose="020B0200000000000000" pitchFamily="34" charset="-128"/>
-                <a:ea typeface="Noto Sans KR Medium" panose="020B0200000000000000" pitchFamily="34" charset="-128"/>
-              </a:rPr>
               <a:t>.</a:t>
             </a:r>
-            <a:endParaRPr lang="en-US" altLang="ko-KR" sz="1000" dirty="0">
-              <a:solidFill>
-                <a:schemeClr val="bg1">
-                  <a:lumMod val="95000"/>
-                </a:schemeClr>
-              </a:solidFill>
-              <a:latin typeface="Noto Sans KR Medium" panose="020B0200000000000000" pitchFamily="34" charset="-128"/>
-              <a:ea typeface="Noto Sans KR Medium" panose="020B0200000000000000" pitchFamily="34" charset="-128"/>
-            </a:endParaRPr>
           </a:p>
         </p:txBody>
       </p:sp>
@@ -12242,7 +12020,19 @@
                 <a:latin typeface="Noto Sans KR ExtraBold" panose="020B0200000000000000" pitchFamily="34" charset="-128"/>
                 <a:ea typeface="Noto Sans KR ExtraBold" panose="020B0200000000000000" pitchFamily="34" charset="-128"/>
               </a:rPr>
-              <a:t>스테이지 데이터</a:t>
+              <a:t>레벨과 스테이지 </a:t>
+            </a:r>
+            <a:r>
+              <a:rPr lang="ko-KR" altLang="en-US" sz="1000" dirty="0" smtClean="0">
+                <a:solidFill>
+                  <a:schemeClr val="bg1">
+                    <a:lumMod val="95000"/>
+                  </a:schemeClr>
+                </a:solidFill>
+                <a:latin typeface="Noto Sans KR ExtraBold" panose="020B0200000000000000" pitchFamily="34" charset="-128"/>
+                <a:ea typeface="Noto Sans KR ExtraBold" panose="020B0200000000000000" pitchFamily="34" charset="-128"/>
+              </a:rPr>
+              <a:t>데이터</a:t>
             </a:r>
             <a:endParaRPr lang="en-US" altLang="ko-KR" sz="1000" dirty="0" smtClean="0">
               <a:solidFill>
@@ -12295,14 +12085,14 @@
       </p:grpSpPr>
       <p:sp>
         <p:nvSpPr>
-          <p:cNvPr id="12" name="직사각형 11"/>
+          <p:cNvPr id="36" name="직사각형 35"/>
           <p:cNvSpPr/>
           <p:nvPr/>
         </p:nvSpPr>
         <p:spPr>
           <a:xfrm>
             <a:off x="454275" y="315047"/>
-            <a:ext cx="3152775" cy="395859"/>
+            <a:ext cx="5641725" cy="395859"/>
           </a:xfrm>
           <a:prstGeom prst="rect">
             <a:avLst/>
@@ -12333,6 +12123,42 @@
           <a:lstStyle/>
           <a:p>
             <a:r>
+              <a:rPr lang="ko-KR" altLang="en-US" sz="1200" dirty="0">
+                <a:solidFill>
+                  <a:schemeClr val="bg1">
+                    <a:lumMod val="95000"/>
+                  </a:schemeClr>
+                </a:solidFill>
+                <a:latin typeface="Noto Sans KR Medium" panose="020B0200000000000000" pitchFamily="34" charset="-128"/>
+                <a:ea typeface="Noto Sans KR Medium" panose="020B0200000000000000" pitchFamily="34" charset="-128"/>
+              </a:rPr>
+              <a:t>핵심 기능 </a:t>
+            </a:r>
+            <a:r>
+              <a:rPr lang="en-US" altLang="ko-KR" sz="1200" dirty="0">
+                <a:solidFill>
+                  <a:schemeClr val="bg1">
+                    <a:lumMod val="95000"/>
+                  </a:schemeClr>
+                </a:solidFill>
+                <a:latin typeface="Noto Sans KR Medium" panose="020B0200000000000000" pitchFamily="34" charset="-128"/>
+                <a:ea typeface="Noto Sans KR Medium" panose="020B0200000000000000" pitchFamily="34" charset="-128"/>
+              </a:rPr>
+              <a:t>3</a:t>
+            </a:r>
+            <a:r>
+              <a:rPr lang="en-US" altLang="ko-KR" sz="1200" dirty="0" smtClean="0">
+                <a:solidFill>
+                  <a:schemeClr val="bg1">
+                    <a:lumMod val="95000"/>
+                  </a:schemeClr>
+                </a:solidFill>
+                <a:latin typeface="Noto Sans KR Medium" panose="020B0200000000000000" pitchFamily="34" charset="-128"/>
+                <a:ea typeface="Noto Sans KR Medium" panose="020B0200000000000000" pitchFamily="34" charset="-128"/>
+              </a:rPr>
+              <a:t>. </a:t>
+            </a:r>
+            <a:r>
               <a:rPr lang="ko-KR" altLang="en-US" sz="1200" dirty="0" smtClean="0">
                 <a:solidFill>
                   <a:schemeClr val="bg1">
@@ -12342,7 +12168,7 @@
                 <a:latin typeface="Noto Sans KR Medium" panose="020B0200000000000000" pitchFamily="34" charset="-128"/>
                 <a:ea typeface="Noto Sans KR Medium" panose="020B0200000000000000" pitchFamily="34" charset="-128"/>
               </a:rPr>
-              <a:t>트러블슈팅</a:t>
+              <a:t>스테이지</a:t>
             </a:r>
             <a:endParaRPr lang="ko-KR" altLang="en-US" sz="1200" dirty="0">
               <a:solidFill>
@@ -12358,14 +12184,14 @@
       </p:sp>
       <p:sp>
         <p:nvSpPr>
-          <p:cNvPr id="5" name="직사각형 4"/>
+          <p:cNvPr id="4" name="직사각형 3"/>
           <p:cNvSpPr/>
           <p:nvPr/>
         </p:nvSpPr>
         <p:spPr>
           <a:xfrm>
-            <a:off x="454275" y="1234126"/>
-            <a:ext cx="1072730" cy="246221"/>
+            <a:off x="454275" y="710906"/>
+            <a:ext cx="1507144" cy="523220"/>
           </a:xfrm>
           <a:prstGeom prst="rect">
             <a:avLst/>
@@ -12378,7 +12204,7 @@
           <a:lstStyle/>
           <a:p>
             <a:r>
-              <a:rPr lang="ko-KR" altLang="en-US" sz="1000" dirty="0" smtClean="0">
+              <a:rPr lang="en-US" altLang="ko-KR" sz="1000" dirty="0" smtClean="0">
                 <a:solidFill>
                   <a:schemeClr val="bg1">
                     <a:lumMod val="95000"/>
@@ -12387,9 +12213,32 @@
                 <a:latin typeface="Noto Sans KR ExtraBold" panose="020B0200000000000000" pitchFamily="34" charset="-128"/>
                 <a:ea typeface="Noto Sans KR ExtraBold" panose="020B0200000000000000" pitchFamily="34" charset="-128"/>
               </a:rPr>
-              <a:t>문제 발생과 원인</a:t>
-            </a:r>
-            <a:endParaRPr lang="en-US" altLang="ko-KR" sz="1000" dirty="0">
+              <a:t/>
+            </a:r>
+            <a:br>
+              <a:rPr lang="en-US" altLang="ko-KR" sz="1000" dirty="0" smtClean="0">
+                <a:solidFill>
+                  <a:schemeClr val="bg1">
+                    <a:lumMod val="95000"/>
+                  </a:schemeClr>
+                </a:solidFill>
+                <a:latin typeface="Noto Sans KR ExtraBold" panose="020B0200000000000000" pitchFamily="34" charset="-128"/>
+                <a:ea typeface="Noto Sans KR ExtraBold" panose="020B0200000000000000" pitchFamily="34" charset="-128"/>
+              </a:rPr>
+            </a:br>
+            <a:r>
+              <a:rPr lang="ko-KR" altLang="en-US" dirty="0" smtClean="0">
+                <a:solidFill>
+                  <a:schemeClr val="bg1">
+                    <a:lumMod val="95000"/>
+                  </a:schemeClr>
+                </a:solidFill>
+                <a:latin typeface="Noto Sans KR ExtraBold" panose="020B0200000000000000" pitchFamily="34" charset="-128"/>
+                <a:ea typeface="Noto Sans KR ExtraBold" panose="020B0200000000000000" pitchFamily="34" charset="-128"/>
+              </a:rPr>
+              <a:t>스테이지 진행</a:t>
+            </a:r>
+            <a:endParaRPr lang="ko-KR" altLang="en-US" dirty="0">
               <a:solidFill>
                 <a:schemeClr val="bg1">
                   <a:lumMod val="95000"/>
@@ -12403,14 +12252,14 @@
       </p:sp>
       <p:cxnSp>
         <p:nvCxnSpPr>
-          <p:cNvPr id="19" name="직선 연결선 18"/>
+          <p:cNvPr id="8" name="직선 연결선 7"/>
           <p:cNvCxnSpPr/>
           <p:nvPr/>
         </p:nvCxnSpPr>
         <p:spPr>
           <a:xfrm>
             <a:off x="540000" y="710906"/>
-            <a:ext cx="11112000" cy="0"/>
+            <a:ext cx="5556000" cy="0"/>
           </a:xfrm>
           <a:prstGeom prst="line">
             <a:avLst/>
@@ -12440,175 +12289,14 @@
       </p:cxnSp>
       <p:sp>
         <p:nvSpPr>
-          <p:cNvPr id="22" name="직사각형 21"/>
-          <p:cNvSpPr/>
-          <p:nvPr/>
-        </p:nvSpPr>
-        <p:spPr>
-          <a:xfrm>
-            <a:off x="454275" y="710906"/>
-            <a:ext cx="2776722" cy="523220"/>
-          </a:xfrm>
-          <a:prstGeom prst="rect">
-            <a:avLst/>
-          </a:prstGeom>
-        </p:spPr>
-        <p:txBody>
-          <a:bodyPr wrap="none">
-            <a:spAutoFit/>
-          </a:bodyPr>
-          <a:lstStyle/>
-          <a:p>
-            <a:r>
-              <a:rPr lang="en-US" altLang="ko-KR" sz="1000" dirty="0" smtClean="0">
-                <a:solidFill>
-                  <a:schemeClr val="bg1">
-                    <a:lumMod val="95000"/>
-                  </a:schemeClr>
-                </a:solidFill>
-                <a:latin typeface="Noto Sans KR ExtraBold" panose="020B0200000000000000" pitchFamily="34" charset="-128"/>
-                <a:ea typeface="Noto Sans KR ExtraBold" panose="020B0200000000000000" pitchFamily="34" charset="-128"/>
-              </a:rPr>
-              <a:t/>
-            </a:r>
-            <a:br>
-              <a:rPr lang="en-US" altLang="ko-KR" sz="1000" dirty="0" smtClean="0">
-                <a:solidFill>
-                  <a:schemeClr val="bg1">
-                    <a:lumMod val="95000"/>
-                  </a:schemeClr>
-                </a:solidFill>
-                <a:latin typeface="Noto Sans KR ExtraBold" panose="020B0200000000000000" pitchFamily="34" charset="-128"/>
-                <a:ea typeface="Noto Sans KR ExtraBold" panose="020B0200000000000000" pitchFamily="34" charset="-128"/>
-              </a:rPr>
-            </a:br>
-            <a:r>
-              <a:rPr lang="ko-KR" altLang="en-US" dirty="0" err="1" smtClean="0">
-                <a:solidFill>
-                  <a:schemeClr val="bg1">
-                    <a:lumMod val="95000"/>
-                  </a:schemeClr>
-                </a:solidFill>
-                <a:latin typeface="Noto Sans KR ExtraBold" panose="020B0200000000000000" pitchFamily="34" charset="-128"/>
-                <a:ea typeface="Noto Sans KR ExtraBold" panose="020B0200000000000000" pitchFamily="34" charset="-128"/>
-              </a:rPr>
-              <a:t>랜드</a:t>
-            </a:r>
-            <a:r>
-              <a:rPr lang="ko-KR" altLang="en-US" dirty="0" smtClean="0">
-                <a:solidFill>
-                  <a:schemeClr val="bg1">
-                    <a:lumMod val="95000"/>
-                  </a:schemeClr>
-                </a:solidFill>
-                <a:latin typeface="Noto Sans KR ExtraBold" panose="020B0200000000000000" pitchFamily="34" charset="-128"/>
-                <a:ea typeface="Noto Sans KR ExtraBold" panose="020B0200000000000000" pitchFamily="34" charset="-128"/>
-              </a:rPr>
-              <a:t> </a:t>
-            </a:r>
-            <a:r>
-              <a:rPr lang="ko-KR" altLang="en-US" dirty="0" err="1" smtClean="0">
-                <a:solidFill>
-                  <a:schemeClr val="bg1">
-                    <a:lumMod val="95000"/>
-                  </a:schemeClr>
-                </a:solidFill>
-                <a:latin typeface="Noto Sans KR ExtraBold" panose="020B0200000000000000" pitchFamily="34" charset="-128"/>
-                <a:ea typeface="Noto Sans KR ExtraBold" panose="020B0200000000000000" pitchFamily="34" charset="-128"/>
-              </a:rPr>
-              <a:t>스케이프</a:t>
-            </a:r>
-            <a:r>
-              <a:rPr lang="ko-KR" altLang="en-US" dirty="0" smtClean="0">
-                <a:solidFill>
-                  <a:schemeClr val="bg1">
-                    <a:lumMod val="95000"/>
-                  </a:schemeClr>
-                </a:solidFill>
-                <a:latin typeface="Noto Sans KR ExtraBold" panose="020B0200000000000000" pitchFamily="34" charset="-128"/>
-                <a:ea typeface="Noto Sans KR ExtraBold" panose="020B0200000000000000" pitchFamily="34" charset="-128"/>
-              </a:rPr>
-              <a:t> 적용 후 에러</a:t>
-            </a:r>
-            <a:r>
-              <a:rPr lang="en-US" altLang="ko-KR" dirty="0" smtClean="0">
-                <a:solidFill>
-                  <a:schemeClr val="bg1">
-                    <a:lumMod val="95000"/>
-                  </a:schemeClr>
-                </a:solidFill>
-                <a:latin typeface="Noto Sans KR ExtraBold" panose="020B0200000000000000" pitchFamily="34" charset="-128"/>
-                <a:ea typeface="Noto Sans KR ExtraBold" panose="020B0200000000000000" pitchFamily="34" charset="-128"/>
-              </a:rPr>
-              <a:t> </a:t>
-            </a:r>
-            <a:endParaRPr lang="ko-KR" altLang="en-US" dirty="0">
-              <a:solidFill>
-                <a:schemeClr val="bg1">
-                  <a:lumMod val="95000"/>
-                </a:schemeClr>
-              </a:solidFill>
-              <a:latin typeface="Noto Sans KR ExtraBold" panose="020B0200000000000000" pitchFamily="34" charset="-128"/>
-              <a:ea typeface="Noto Sans KR ExtraBold" panose="020B0200000000000000" pitchFamily="34" charset="-128"/>
-            </a:endParaRPr>
-          </a:p>
-        </p:txBody>
-      </p:sp>
-      <p:sp>
-        <p:nvSpPr>
           <p:cNvPr id="9" name="직사각형 8"/>
           <p:cNvSpPr/>
           <p:nvPr/>
         </p:nvSpPr>
         <p:spPr>
           <a:xfrm>
-            <a:off x="454275" y="3850226"/>
-            <a:ext cx="688009" cy="246221"/>
-          </a:xfrm>
-          <a:prstGeom prst="rect">
-            <a:avLst/>
-          </a:prstGeom>
-        </p:spPr>
-        <p:txBody>
-          <a:bodyPr wrap="none">
-            <a:spAutoFit/>
-          </a:bodyPr>
-          <a:lstStyle/>
-          <a:p>
-            <a:r>
-              <a:rPr lang="ko-KR" altLang="en-US" sz="1000" dirty="0">
-                <a:solidFill>
-                  <a:schemeClr val="bg1">
-                    <a:lumMod val="95000"/>
-                  </a:schemeClr>
-                </a:solidFill>
-                <a:latin typeface="Noto Sans KR ExtraBold" panose="020B0200000000000000" pitchFamily="34" charset="-128"/>
-                <a:ea typeface="Noto Sans KR ExtraBold" panose="020B0200000000000000" pitchFamily="34" charset="-128"/>
-              </a:rPr>
-              <a:t>해결 방법</a:t>
-            </a:r>
-            <a:endParaRPr lang="en-US" altLang="ko-KR" sz="1000" dirty="0">
-              <a:solidFill>
-                <a:schemeClr val="bg1">
-                  <a:lumMod val="95000"/>
-                </a:schemeClr>
-              </a:solidFill>
-              <a:latin typeface="Noto Sans KR ExtraBold" panose="020B0200000000000000" pitchFamily="34" charset="-128"/>
-              <a:ea typeface="Noto Sans KR ExtraBold" panose="020B0200000000000000" pitchFamily="34" charset="-128"/>
-            </a:endParaRPr>
-          </a:p>
-        </p:txBody>
-      </p:sp>
-      <p:sp>
-        <p:nvSpPr>
-          <p:cNvPr id="10" name="직사각형 9"/>
-          <p:cNvSpPr/>
-          <p:nvPr/>
-        </p:nvSpPr>
-        <p:spPr>
-          <a:xfrm>
             <a:off x="454275" y="1480347"/>
-            <a:ext cx="8755039" cy="2246769"/>
+            <a:ext cx="5651249" cy="3323987"/>
           </a:xfrm>
           <a:prstGeom prst="rect">
             <a:avLst/>
@@ -12630,7 +12318,131 @@
                 <a:latin typeface="Noto Sans KR Medium" panose="020B0200000000000000" pitchFamily="34" charset="-128"/>
                 <a:ea typeface="Noto Sans KR Medium" panose="020B0200000000000000" pitchFamily="34" charset="-128"/>
               </a:rPr>
-              <a:t>문제 발생 배경</a:t>
+              <a:t>스테이지 진행은 발행</a:t>
+            </a:r>
+            <a:r>
+              <a:rPr lang="en-US" altLang="ko-KR" sz="1000" dirty="0" smtClean="0">
+                <a:solidFill>
+                  <a:schemeClr val="bg1">
+                    <a:lumMod val="95000"/>
+                  </a:schemeClr>
+                </a:solidFill>
+                <a:latin typeface="Noto Sans KR Medium" panose="020B0200000000000000" pitchFamily="34" charset="-128"/>
+                <a:ea typeface="Noto Sans KR Medium" panose="020B0200000000000000" pitchFamily="34" charset="-128"/>
+              </a:rPr>
+              <a:t>-</a:t>
+            </a:r>
+            <a:r>
+              <a:rPr lang="ko-KR" altLang="en-US" sz="1000" dirty="0" smtClean="0">
+                <a:solidFill>
+                  <a:schemeClr val="bg1">
+                    <a:lumMod val="95000"/>
+                  </a:schemeClr>
+                </a:solidFill>
+                <a:latin typeface="Noto Sans KR Medium" panose="020B0200000000000000" pitchFamily="34" charset="-128"/>
+                <a:ea typeface="Noto Sans KR Medium" panose="020B0200000000000000" pitchFamily="34" charset="-128"/>
+              </a:rPr>
+              <a:t>구독 모델을 확장한 이벤트 버스 방식으로 진행함</a:t>
+            </a:r>
+            <a:r>
+              <a:rPr lang="en-US" altLang="ko-KR" sz="1000" dirty="0" smtClean="0">
+                <a:solidFill>
+                  <a:schemeClr val="bg1">
+                    <a:lumMod val="95000"/>
+                  </a:schemeClr>
+                </a:solidFill>
+                <a:latin typeface="Noto Sans KR Medium" panose="020B0200000000000000" pitchFamily="34" charset="-128"/>
+                <a:ea typeface="Noto Sans KR Medium" panose="020B0200000000000000" pitchFamily="34" charset="-128"/>
+              </a:rPr>
+              <a:t>.</a:t>
+            </a:r>
+          </a:p>
+          <a:p>
+            <a:r>
+              <a:rPr lang="ko-KR" altLang="en-US" sz="1000" dirty="0" smtClean="0">
+                <a:solidFill>
+                  <a:schemeClr val="bg1">
+                    <a:lumMod val="95000"/>
+                  </a:schemeClr>
+                </a:solidFill>
+                <a:latin typeface="Noto Sans KR Medium" panose="020B0200000000000000" pitchFamily="34" charset="-128"/>
+                <a:ea typeface="Noto Sans KR Medium" panose="020B0200000000000000" pitchFamily="34" charset="-128"/>
+              </a:rPr>
+              <a:t>각 </a:t>
+            </a:r>
+            <a:r>
+              <a:rPr lang="ko-KR" altLang="en-US" sz="1000" dirty="0" err="1" smtClean="0">
+                <a:solidFill>
+                  <a:schemeClr val="bg1">
+                    <a:lumMod val="95000"/>
+                  </a:schemeClr>
+                </a:solidFill>
+                <a:latin typeface="Noto Sans KR Medium" panose="020B0200000000000000" pitchFamily="34" charset="-128"/>
+                <a:ea typeface="Noto Sans KR Medium" panose="020B0200000000000000" pitchFamily="34" charset="-128"/>
+              </a:rPr>
+              <a:t>액터들이</a:t>
+            </a:r>
+            <a:r>
+              <a:rPr lang="ko-KR" altLang="en-US" sz="1000" dirty="0" smtClean="0">
+                <a:solidFill>
+                  <a:schemeClr val="bg1">
+                    <a:lumMod val="95000"/>
+                  </a:schemeClr>
+                </a:solidFill>
+                <a:latin typeface="Noto Sans KR Medium" panose="020B0200000000000000" pitchFamily="34" charset="-128"/>
+                <a:ea typeface="Noto Sans KR Medium" panose="020B0200000000000000" pitchFamily="34" charset="-128"/>
+              </a:rPr>
+              <a:t> 직접적으로 의존 관계를 맺지 않도록 하기 위해 </a:t>
+            </a:r>
+            <a:r>
+              <a:rPr lang="en-US" altLang="ko-KR" sz="1000" dirty="0" err="1" smtClean="0">
+                <a:solidFill>
+                  <a:schemeClr val="bg1">
+                    <a:lumMod val="95000"/>
+                  </a:schemeClr>
+                </a:solidFill>
+                <a:latin typeface="Noto Sans KR Medium" panose="020B0200000000000000" pitchFamily="34" charset="-128"/>
+                <a:ea typeface="Noto Sans KR Medium" panose="020B0200000000000000" pitchFamily="34" charset="-128"/>
+              </a:rPr>
+              <a:t>GameMode</a:t>
+            </a:r>
+            <a:r>
+              <a:rPr lang="ko-KR" altLang="en-US" sz="1000" dirty="0" smtClean="0">
+                <a:solidFill>
+                  <a:schemeClr val="bg1">
+                    <a:lumMod val="95000"/>
+                  </a:schemeClr>
+                </a:solidFill>
+                <a:latin typeface="Noto Sans KR Medium" panose="020B0200000000000000" pitchFamily="34" charset="-128"/>
+                <a:ea typeface="Noto Sans KR Medium" panose="020B0200000000000000" pitchFamily="34" charset="-128"/>
+              </a:rPr>
+              <a:t>를 통한 이벤트 기반으로 작업</a:t>
+            </a:r>
+            <a:r>
+              <a:rPr lang="en-US" altLang="ko-KR" sz="1000" dirty="0" smtClean="0">
+                <a:solidFill>
+                  <a:schemeClr val="bg1">
+                    <a:lumMod val="95000"/>
+                  </a:schemeClr>
+                </a:solidFill>
+                <a:latin typeface="Noto Sans KR Medium" panose="020B0200000000000000" pitchFamily="34" charset="-128"/>
+                <a:ea typeface="Noto Sans KR Medium" panose="020B0200000000000000" pitchFamily="34" charset="-128"/>
+              </a:rPr>
+              <a:t>.</a:t>
+            </a:r>
+          </a:p>
+          <a:p>
+            <a:r>
+              <a:rPr lang="ko-KR" altLang="en-US" sz="1000" dirty="0" smtClean="0">
+                <a:solidFill>
+                  <a:schemeClr val="bg1">
+                    <a:lumMod val="95000"/>
+                  </a:schemeClr>
+                </a:solidFill>
+                <a:latin typeface="Noto Sans KR Medium" panose="020B0200000000000000" pitchFamily="34" charset="-128"/>
+                <a:ea typeface="Noto Sans KR Medium" panose="020B0200000000000000" pitchFamily="34" charset="-128"/>
+              </a:rPr>
+              <a:t>스테이지 진행에 발생하는 이벤트 종류</a:t>
             </a:r>
             <a:endParaRPr lang="en-US" altLang="ko-KR" sz="1000" dirty="0" smtClean="0">
               <a:solidFill>
@@ -12643,89 +12455,21 @@
             </a:endParaRPr>
           </a:p>
           <a:p>
-            <a:r>
-              <a:rPr lang="ko-KR" altLang="en-US" sz="1000" dirty="0" smtClean="0">
-                <a:solidFill>
-                  <a:schemeClr val="bg1">
-                    <a:lumMod val="95000"/>
-                  </a:schemeClr>
-                </a:solidFill>
-                <a:latin typeface="Noto Sans KR Medium" panose="020B0200000000000000" pitchFamily="34" charset="-128"/>
-                <a:ea typeface="Noto Sans KR Medium" panose="020B0200000000000000" pitchFamily="34" charset="-128"/>
-              </a:rPr>
-              <a:t>플레이어와 </a:t>
-            </a:r>
-            <a:r>
-              <a:rPr lang="ko-KR" altLang="en-US" sz="1000" dirty="0" err="1" smtClean="0">
-                <a:solidFill>
-                  <a:schemeClr val="bg1">
-                    <a:lumMod val="95000"/>
-                  </a:schemeClr>
-                </a:solidFill>
-                <a:latin typeface="Noto Sans KR Medium" panose="020B0200000000000000" pitchFamily="34" charset="-128"/>
-                <a:ea typeface="Noto Sans KR Medium" panose="020B0200000000000000" pitchFamily="34" charset="-128"/>
-              </a:rPr>
-              <a:t>몬스터</a:t>
-            </a:r>
-            <a:r>
-              <a:rPr lang="ko-KR" altLang="en-US" sz="1000" dirty="0" smtClean="0">
-                <a:solidFill>
-                  <a:schemeClr val="bg1">
-                    <a:lumMod val="95000"/>
-                  </a:schemeClr>
-                </a:solidFill>
-                <a:latin typeface="Noto Sans KR Medium" panose="020B0200000000000000" pitchFamily="34" charset="-128"/>
-                <a:ea typeface="Noto Sans KR Medium" panose="020B0200000000000000" pitchFamily="34" charset="-128"/>
-              </a:rPr>
-              <a:t> 기반 기능 구현 후</a:t>
-            </a:r>
-            <a:r>
-              <a:rPr lang="en-US" altLang="ko-KR" sz="1000" dirty="0" smtClean="0">
-                <a:solidFill>
-                  <a:schemeClr val="bg1">
-                    <a:lumMod val="95000"/>
-                  </a:schemeClr>
-                </a:solidFill>
-                <a:latin typeface="Noto Sans KR Medium" panose="020B0200000000000000" pitchFamily="34" charset="-128"/>
-                <a:ea typeface="Noto Sans KR Medium" panose="020B0200000000000000" pitchFamily="34" charset="-128"/>
-              </a:rPr>
-              <a:t>, </a:t>
-            </a:r>
-            <a:r>
-              <a:rPr lang="ko-KR" altLang="en-US" sz="1000" dirty="0" smtClean="0">
-                <a:solidFill>
-                  <a:schemeClr val="bg1">
-                    <a:lumMod val="95000"/>
-                  </a:schemeClr>
-                </a:solidFill>
-                <a:latin typeface="Noto Sans KR Medium" panose="020B0200000000000000" pitchFamily="34" charset="-128"/>
-                <a:ea typeface="Noto Sans KR Medium" panose="020B0200000000000000" pitchFamily="34" charset="-128"/>
-              </a:rPr>
-              <a:t>게임을 진행하기 위한</a:t>
-            </a:r>
-            <a:r>
-              <a:rPr lang="en-US" altLang="ko-KR" sz="1000" dirty="0" smtClean="0">
-                <a:solidFill>
-                  <a:schemeClr val="bg1">
-                    <a:lumMod val="95000"/>
-                  </a:schemeClr>
-                </a:solidFill>
-                <a:latin typeface="Noto Sans KR Medium" panose="020B0200000000000000" pitchFamily="34" charset="-128"/>
-                <a:ea typeface="Noto Sans KR Medium" panose="020B0200000000000000" pitchFamily="34" charset="-128"/>
-              </a:rPr>
-              <a:t> </a:t>
-            </a:r>
-            <a:r>
-              <a:rPr lang="ko-KR" altLang="en-US" sz="1000" dirty="0" smtClean="0">
-                <a:solidFill>
-                  <a:schemeClr val="bg1">
-                    <a:lumMod val="95000"/>
-                  </a:schemeClr>
-                </a:solidFill>
-                <a:latin typeface="Noto Sans KR Medium" panose="020B0200000000000000" pitchFamily="34" charset="-128"/>
-                <a:ea typeface="Noto Sans KR Medium" panose="020B0200000000000000" pitchFamily="34" charset="-128"/>
-              </a:rPr>
-              <a:t>레벨이 필요했고</a:t>
+            <a:pPr marL="171450" indent="-171450">
+              <a:buFontTx/>
+              <a:buChar char="-"/>
+            </a:pPr>
+            <a:r>
+              <a:rPr lang="ko-KR" altLang="en-US" sz="1000" dirty="0" smtClean="0">
+                <a:solidFill>
+                  <a:schemeClr val="bg1">
+                    <a:lumMod val="95000"/>
+                  </a:schemeClr>
+                </a:solidFill>
+                <a:latin typeface="Noto Sans KR Medium" panose="020B0200000000000000" pitchFamily="34" charset="-128"/>
+                <a:ea typeface="Noto Sans KR Medium" panose="020B0200000000000000" pitchFamily="34" charset="-128"/>
+              </a:rPr>
+              <a:t>플레이어 사망</a:t>
             </a:r>
             <a:endParaRPr lang="en-US" altLang="ko-KR" sz="1000" dirty="0" smtClean="0">
               <a:solidFill>
@@ -12738,6 +12482,10 @@
             </a:endParaRPr>
           </a:p>
           <a:p>
+            <a:pPr marL="171450" indent="-171450">
+              <a:buFontTx/>
+              <a:buChar char="-"/>
+            </a:pPr>
             <a:r>
               <a:rPr lang="ko-KR" altLang="en-US" sz="1000" dirty="0" err="1" smtClean="0">
                 <a:solidFill>
@@ -12748,43 +12496,19 @@
                 <a:latin typeface="Noto Sans KR Medium" panose="020B0200000000000000" pitchFamily="34" charset="-128"/>
                 <a:ea typeface="Noto Sans KR Medium" panose="020B0200000000000000" pitchFamily="34" charset="-128"/>
               </a:rPr>
-              <a:t>랜드</a:t>
-            </a:r>
-            <a:r>
-              <a:rPr lang="ko-KR" altLang="en-US" sz="1000" dirty="0" smtClean="0">
-                <a:solidFill>
-                  <a:schemeClr val="bg1">
-                    <a:lumMod val="95000"/>
-                  </a:schemeClr>
-                </a:solidFill>
-                <a:latin typeface="Noto Sans KR Medium" panose="020B0200000000000000" pitchFamily="34" charset="-128"/>
-                <a:ea typeface="Noto Sans KR Medium" panose="020B0200000000000000" pitchFamily="34" charset="-128"/>
-              </a:rPr>
-              <a:t> </a:t>
-            </a:r>
-            <a:r>
-              <a:rPr lang="ko-KR" altLang="en-US" sz="1000" dirty="0" err="1" smtClean="0">
-                <a:solidFill>
-                  <a:schemeClr val="bg1">
-                    <a:lumMod val="95000"/>
-                  </a:schemeClr>
-                </a:solidFill>
-                <a:latin typeface="Noto Sans KR Medium" panose="020B0200000000000000" pitchFamily="34" charset="-128"/>
-                <a:ea typeface="Noto Sans KR Medium" panose="020B0200000000000000" pitchFamily="34" charset="-128"/>
-              </a:rPr>
-              <a:t>스케이프를</a:t>
-            </a:r>
-            <a:r>
-              <a:rPr lang="ko-KR" altLang="en-US" sz="1000" dirty="0" smtClean="0">
-                <a:solidFill>
-                  <a:schemeClr val="bg1">
-                    <a:lumMod val="95000"/>
-                  </a:schemeClr>
-                </a:solidFill>
-                <a:latin typeface="Noto Sans KR Medium" panose="020B0200000000000000" pitchFamily="34" charset="-128"/>
-                <a:ea typeface="Noto Sans KR Medium" panose="020B0200000000000000" pitchFamily="34" charset="-128"/>
-              </a:rPr>
-              <a:t> 가지고 레벨을 만들어 테스트하던 도중 에러 발생</a:t>
+              <a:t>몬스터</a:t>
+            </a:r>
+            <a:r>
+              <a:rPr lang="ko-KR" altLang="en-US" sz="1000" dirty="0" smtClean="0">
+                <a:solidFill>
+                  <a:schemeClr val="bg1">
+                    <a:lumMod val="95000"/>
+                  </a:schemeClr>
+                </a:solidFill>
+                <a:latin typeface="Noto Sans KR Medium" panose="020B0200000000000000" pitchFamily="34" charset="-128"/>
+                <a:ea typeface="Noto Sans KR Medium" panose="020B0200000000000000" pitchFamily="34" charset="-128"/>
+              </a:rPr>
+              <a:t> 사망</a:t>
             </a:r>
             <a:endParaRPr lang="en-US" altLang="ko-KR" sz="1000" dirty="0" smtClean="0">
               <a:solidFill>
@@ -12797,6 +12521,319 @@
             </a:endParaRPr>
           </a:p>
           <a:p>
+            <a:pPr marL="171450" indent="-171450">
+              <a:buFontTx/>
+              <a:buChar char="-"/>
+            </a:pPr>
+            <a:r>
+              <a:rPr lang="ko-KR" altLang="en-US" sz="1000" dirty="0" smtClean="0">
+                <a:solidFill>
+                  <a:schemeClr val="bg1">
+                    <a:lumMod val="95000"/>
+                  </a:schemeClr>
+                </a:solidFill>
+                <a:latin typeface="Noto Sans KR Medium" panose="020B0200000000000000" pitchFamily="34" charset="-128"/>
+                <a:ea typeface="Noto Sans KR Medium" panose="020B0200000000000000" pitchFamily="34" charset="-128"/>
+              </a:rPr>
+              <a:t>구역 완료</a:t>
+            </a:r>
+            <a:endParaRPr lang="en-US" altLang="ko-KR" sz="1000" dirty="0" smtClean="0">
+              <a:solidFill>
+                <a:schemeClr val="bg1">
+                  <a:lumMod val="95000"/>
+                </a:schemeClr>
+              </a:solidFill>
+              <a:latin typeface="Noto Sans KR Medium" panose="020B0200000000000000" pitchFamily="34" charset="-128"/>
+              <a:ea typeface="Noto Sans KR Medium" panose="020B0200000000000000" pitchFamily="34" charset="-128"/>
+            </a:endParaRPr>
+          </a:p>
+          <a:p>
+            <a:endParaRPr lang="en-US" altLang="ko-KR" sz="1000" dirty="0" smtClean="0">
+              <a:solidFill>
+                <a:schemeClr val="bg1">
+                  <a:lumMod val="95000"/>
+                </a:schemeClr>
+              </a:solidFill>
+              <a:latin typeface="Noto Sans KR Medium" panose="020B0200000000000000" pitchFamily="34" charset="-128"/>
+              <a:ea typeface="Noto Sans KR Medium" panose="020B0200000000000000" pitchFamily="34" charset="-128"/>
+            </a:endParaRPr>
+          </a:p>
+          <a:p>
+            <a:r>
+              <a:rPr lang="ko-KR" altLang="en-US" sz="1000" dirty="0" smtClean="0">
+                <a:solidFill>
+                  <a:schemeClr val="bg1">
+                    <a:lumMod val="95000"/>
+                  </a:schemeClr>
+                </a:solidFill>
+                <a:latin typeface="Noto Sans KR Medium" panose="020B0200000000000000" pitchFamily="34" charset="-128"/>
+                <a:ea typeface="Noto Sans KR Medium" panose="020B0200000000000000" pitchFamily="34" charset="-128"/>
+              </a:rPr>
+              <a:t>진행에 필요한 주된 데이터는 </a:t>
+            </a:r>
+            <a:r>
+              <a:rPr lang="en-US" altLang="ko-KR" sz="1000" dirty="0" err="1" smtClean="0">
+                <a:solidFill>
+                  <a:schemeClr val="bg1">
+                    <a:lumMod val="95000"/>
+                  </a:schemeClr>
+                </a:solidFill>
+                <a:latin typeface="Noto Sans KR Medium" panose="020B0200000000000000" pitchFamily="34" charset="-128"/>
+                <a:ea typeface="Noto Sans KR Medium" panose="020B0200000000000000" pitchFamily="34" charset="-128"/>
+              </a:rPr>
+              <a:t>GameState</a:t>
+            </a:r>
+            <a:r>
+              <a:rPr lang="ko-KR" altLang="en-US" sz="1000" dirty="0" smtClean="0">
+                <a:solidFill>
+                  <a:schemeClr val="bg1">
+                    <a:lumMod val="95000"/>
+                  </a:schemeClr>
+                </a:solidFill>
+                <a:latin typeface="Noto Sans KR Medium" panose="020B0200000000000000" pitchFamily="34" charset="-128"/>
+                <a:ea typeface="Noto Sans KR Medium" panose="020B0200000000000000" pitchFamily="34" charset="-128"/>
+              </a:rPr>
+              <a:t>에서 관리</a:t>
+            </a:r>
+            <a:endParaRPr lang="en-US" altLang="ko-KR" sz="1000" dirty="0" smtClean="0">
+              <a:solidFill>
+                <a:schemeClr val="bg1">
+                  <a:lumMod val="95000"/>
+                </a:schemeClr>
+              </a:solidFill>
+              <a:latin typeface="Noto Sans KR Medium" panose="020B0200000000000000" pitchFamily="34" charset="-128"/>
+              <a:ea typeface="Noto Sans KR Medium" panose="020B0200000000000000" pitchFamily="34" charset="-128"/>
+            </a:endParaRPr>
+          </a:p>
+          <a:p>
+            <a:r>
+              <a:rPr lang="ko-KR" altLang="en-US" sz="1000" dirty="0" smtClean="0">
+                <a:solidFill>
+                  <a:schemeClr val="bg1">
+                    <a:lumMod val="95000"/>
+                  </a:schemeClr>
+                </a:solidFill>
+                <a:latin typeface="Noto Sans KR Medium" panose="020B0200000000000000" pitchFamily="34" charset="-128"/>
+                <a:ea typeface="Noto Sans KR Medium" panose="020B0200000000000000" pitchFamily="34" charset="-128"/>
+              </a:rPr>
+              <a:t>각 구역의 </a:t>
+            </a:r>
+            <a:r>
+              <a:rPr lang="ko-KR" altLang="en-US" sz="1000" dirty="0" err="1" smtClean="0">
+                <a:solidFill>
+                  <a:schemeClr val="bg1">
+                    <a:lumMod val="95000"/>
+                  </a:schemeClr>
+                </a:solidFill>
+                <a:latin typeface="Noto Sans KR Medium" panose="020B0200000000000000" pitchFamily="34" charset="-128"/>
+                <a:ea typeface="Noto Sans KR Medium" panose="020B0200000000000000" pitchFamily="34" charset="-128"/>
+              </a:rPr>
+              <a:t>클리어</a:t>
+            </a:r>
+            <a:r>
+              <a:rPr lang="ko-KR" altLang="en-US" sz="1000" dirty="0" smtClean="0">
+                <a:solidFill>
+                  <a:schemeClr val="bg1">
+                    <a:lumMod val="95000"/>
+                  </a:schemeClr>
+                </a:solidFill>
+                <a:latin typeface="Noto Sans KR Medium" panose="020B0200000000000000" pitchFamily="34" charset="-128"/>
+                <a:ea typeface="Noto Sans KR Medium" panose="020B0200000000000000" pitchFamily="34" charset="-128"/>
+              </a:rPr>
+              <a:t> 여부를 보관 중</a:t>
+            </a:r>
+            <a:endParaRPr lang="en-US" altLang="ko-KR" sz="1000" dirty="0" smtClean="0">
+              <a:solidFill>
+                <a:schemeClr val="bg1">
+                  <a:lumMod val="95000"/>
+                </a:schemeClr>
+              </a:solidFill>
+              <a:latin typeface="Noto Sans KR Medium" panose="020B0200000000000000" pitchFamily="34" charset="-128"/>
+              <a:ea typeface="Noto Sans KR Medium" panose="020B0200000000000000" pitchFamily="34" charset="-128"/>
+            </a:endParaRPr>
+          </a:p>
+          <a:p>
+            <a:endParaRPr lang="en-US" altLang="ko-KR" sz="1000" dirty="0" smtClean="0">
+              <a:solidFill>
+                <a:schemeClr val="bg1">
+                  <a:lumMod val="95000"/>
+                </a:schemeClr>
+              </a:solidFill>
+              <a:latin typeface="Noto Sans KR Medium" panose="020B0200000000000000" pitchFamily="34" charset="-128"/>
+              <a:ea typeface="Noto Sans KR Medium" panose="020B0200000000000000" pitchFamily="34" charset="-128"/>
+            </a:endParaRPr>
+          </a:p>
+          <a:p>
+            <a:r>
+              <a:rPr lang="en-US" altLang="ko-KR" sz="1000" dirty="0" err="1" smtClean="0">
+                <a:solidFill>
+                  <a:schemeClr val="bg1">
+                    <a:lumMod val="95000"/>
+                  </a:schemeClr>
+                </a:solidFill>
+                <a:latin typeface="Noto Sans KR Medium" panose="020B0200000000000000" pitchFamily="34" charset="-128"/>
+                <a:ea typeface="Noto Sans KR Medium" panose="020B0200000000000000" pitchFamily="34" charset="-128"/>
+              </a:rPr>
+              <a:t>GameState</a:t>
+            </a:r>
+            <a:r>
+              <a:rPr lang="ko-KR" altLang="en-US" sz="1000" dirty="0" smtClean="0">
+                <a:solidFill>
+                  <a:schemeClr val="bg1">
+                    <a:lumMod val="95000"/>
+                  </a:schemeClr>
+                </a:solidFill>
+                <a:latin typeface="Noto Sans KR Medium" panose="020B0200000000000000" pitchFamily="34" charset="-128"/>
+                <a:ea typeface="Noto Sans KR Medium" panose="020B0200000000000000" pitchFamily="34" charset="-128"/>
+              </a:rPr>
+              <a:t>는 게임 시작 시</a:t>
+            </a:r>
+            <a:r>
+              <a:rPr lang="en-US" altLang="ko-KR" sz="1000" dirty="0" smtClean="0">
+                <a:solidFill>
+                  <a:schemeClr val="bg1">
+                    <a:lumMod val="95000"/>
+                  </a:schemeClr>
+                </a:solidFill>
+                <a:latin typeface="Noto Sans KR Medium" panose="020B0200000000000000" pitchFamily="34" charset="-128"/>
+                <a:ea typeface="Noto Sans KR Medium" panose="020B0200000000000000" pitchFamily="34" charset="-128"/>
+              </a:rPr>
+              <a:t>, </a:t>
+            </a:r>
+            <a:r>
+              <a:rPr lang="en-US" altLang="ko-KR" sz="1000" dirty="0" err="1" smtClean="0">
+                <a:solidFill>
+                  <a:schemeClr val="bg1">
+                    <a:lumMod val="95000"/>
+                  </a:schemeClr>
+                </a:solidFill>
+                <a:latin typeface="Noto Sans KR Medium" panose="020B0200000000000000" pitchFamily="34" charset="-128"/>
+                <a:ea typeface="Noto Sans KR Medium" panose="020B0200000000000000" pitchFamily="34" charset="-128"/>
+              </a:rPr>
+              <a:t>GameMode</a:t>
+            </a:r>
+            <a:r>
+              <a:rPr lang="ko-KR" altLang="en-US" sz="1000" dirty="0" smtClean="0">
+                <a:solidFill>
+                  <a:schemeClr val="bg1">
+                    <a:lumMod val="95000"/>
+                  </a:schemeClr>
+                </a:solidFill>
+                <a:latin typeface="Noto Sans KR Medium" panose="020B0200000000000000" pitchFamily="34" charset="-128"/>
+                <a:ea typeface="Noto Sans KR Medium" panose="020B0200000000000000" pitchFamily="34" charset="-128"/>
+              </a:rPr>
+              <a:t>의 구역 완료 이벤트를 구독함</a:t>
+            </a:r>
+            <a:r>
+              <a:rPr lang="en-US" altLang="ko-KR" sz="1000" dirty="0" smtClean="0">
+                <a:solidFill>
+                  <a:schemeClr val="bg1">
+                    <a:lumMod val="95000"/>
+                  </a:schemeClr>
+                </a:solidFill>
+                <a:latin typeface="Noto Sans KR Medium" panose="020B0200000000000000" pitchFamily="34" charset="-128"/>
+                <a:ea typeface="Noto Sans KR Medium" panose="020B0200000000000000" pitchFamily="34" charset="-128"/>
+              </a:rPr>
+              <a:t>.</a:t>
+            </a:r>
+          </a:p>
+          <a:p>
+            <a:r>
+              <a:rPr lang="en-US" altLang="ko-KR" sz="1000" dirty="0" err="1" smtClean="0">
+                <a:solidFill>
+                  <a:schemeClr val="bg1">
+                    <a:lumMod val="95000"/>
+                  </a:schemeClr>
+                </a:solidFill>
+                <a:latin typeface="Noto Sans KR Medium" panose="020B0200000000000000" pitchFamily="34" charset="-128"/>
+                <a:ea typeface="Noto Sans KR Medium" panose="020B0200000000000000" pitchFamily="34" charset="-128"/>
+              </a:rPr>
+              <a:t>StageSection</a:t>
+            </a:r>
+            <a:r>
+              <a:rPr lang="ko-KR" altLang="en-US" sz="1000" dirty="0" smtClean="0">
+                <a:solidFill>
+                  <a:schemeClr val="bg1">
+                    <a:lumMod val="95000"/>
+                  </a:schemeClr>
+                </a:solidFill>
+                <a:latin typeface="Noto Sans KR Medium" panose="020B0200000000000000" pitchFamily="34" charset="-128"/>
+                <a:ea typeface="Noto Sans KR Medium" panose="020B0200000000000000" pitchFamily="34" charset="-128"/>
+              </a:rPr>
+              <a:t>은 게임 시작 시</a:t>
+            </a:r>
+            <a:r>
+              <a:rPr lang="en-US" altLang="ko-KR" sz="1000" dirty="0" smtClean="0">
+                <a:solidFill>
+                  <a:schemeClr val="bg1">
+                    <a:lumMod val="95000"/>
+                  </a:schemeClr>
+                </a:solidFill>
+                <a:latin typeface="Noto Sans KR Medium" panose="020B0200000000000000" pitchFamily="34" charset="-128"/>
+                <a:ea typeface="Noto Sans KR Medium" panose="020B0200000000000000" pitchFamily="34" charset="-128"/>
+              </a:rPr>
+              <a:t>, </a:t>
+            </a:r>
+            <a:r>
+              <a:rPr lang="en-US" altLang="ko-KR" sz="1000" dirty="0" err="1" smtClean="0">
+                <a:solidFill>
+                  <a:schemeClr val="bg1">
+                    <a:lumMod val="95000"/>
+                  </a:schemeClr>
+                </a:solidFill>
+                <a:latin typeface="Noto Sans KR Medium" panose="020B0200000000000000" pitchFamily="34" charset="-128"/>
+                <a:ea typeface="Noto Sans KR Medium" panose="020B0200000000000000" pitchFamily="34" charset="-128"/>
+              </a:rPr>
+              <a:t>CombatGameMode</a:t>
+            </a:r>
+            <a:r>
+              <a:rPr lang="ko-KR" altLang="en-US" sz="1000" dirty="0" smtClean="0">
+                <a:solidFill>
+                  <a:schemeClr val="bg1">
+                    <a:lumMod val="95000"/>
+                  </a:schemeClr>
+                </a:solidFill>
+                <a:latin typeface="Noto Sans KR Medium" panose="020B0200000000000000" pitchFamily="34" charset="-128"/>
+                <a:ea typeface="Noto Sans KR Medium" panose="020B0200000000000000" pitchFamily="34" charset="-128"/>
+              </a:rPr>
+              <a:t>의</a:t>
+            </a:r>
+            <a:r>
+              <a:rPr lang="en-US" altLang="ko-KR" sz="1000" dirty="0" smtClean="0">
+                <a:solidFill>
+                  <a:schemeClr val="bg1">
+                    <a:lumMod val="95000"/>
+                  </a:schemeClr>
+                </a:solidFill>
+                <a:latin typeface="Noto Sans KR Medium" panose="020B0200000000000000" pitchFamily="34" charset="-128"/>
+                <a:ea typeface="Noto Sans KR Medium" panose="020B0200000000000000" pitchFamily="34" charset="-128"/>
+              </a:rPr>
+              <a:t> </a:t>
+            </a:r>
+            <a:r>
+              <a:rPr lang="ko-KR" altLang="en-US" sz="1000" dirty="0" err="1" smtClean="0">
+                <a:solidFill>
+                  <a:schemeClr val="bg1">
+                    <a:lumMod val="95000"/>
+                  </a:schemeClr>
+                </a:solidFill>
+                <a:latin typeface="Noto Sans KR Medium" panose="020B0200000000000000" pitchFamily="34" charset="-128"/>
+                <a:ea typeface="Noto Sans KR Medium" panose="020B0200000000000000" pitchFamily="34" charset="-128"/>
+              </a:rPr>
+              <a:t>몬스터</a:t>
+            </a:r>
+            <a:r>
+              <a:rPr lang="ko-KR" altLang="en-US" sz="1000" dirty="0" smtClean="0">
+                <a:solidFill>
+                  <a:schemeClr val="bg1">
+                    <a:lumMod val="95000"/>
+                  </a:schemeClr>
+                </a:solidFill>
+                <a:latin typeface="Noto Sans KR Medium" panose="020B0200000000000000" pitchFamily="34" charset="-128"/>
+                <a:ea typeface="Noto Sans KR Medium" panose="020B0200000000000000" pitchFamily="34" charset="-128"/>
+              </a:rPr>
+              <a:t> 사망에 해당하는 이벤트를 구독해둠</a:t>
+            </a:r>
             <a:endParaRPr lang="en-US" altLang="ko-KR" sz="1000" dirty="0">
               <a:solidFill>
                 <a:schemeClr val="bg1">
@@ -12808,6 +12845,114 @@
             </a:endParaRPr>
           </a:p>
           <a:p>
+            <a:r>
+              <a:rPr lang="ko-KR" altLang="en-US" sz="1000" dirty="0" err="1" smtClean="0">
+                <a:solidFill>
+                  <a:schemeClr val="bg1">
+                    <a:lumMod val="95000"/>
+                  </a:schemeClr>
+                </a:solidFill>
+                <a:latin typeface="Noto Sans KR Medium" panose="020B0200000000000000" pitchFamily="34" charset="-128"/>
+                <a:ea typeface="Noto Sans KR Medium" panose="020B0200000000000000" pitchFamily="34" charset="-128"/>
+              </a:rPr>
+              <a:t>몬스터는</a:t>
+            </a:r>
+            <a:r>
+              <a:rPr lang="ko-KR" altLang="en-US" sz="1000" dirty="0" smtClean="0">
+                <a:solidFill>
+                  <a:schemeClr val="bg1">
+                    <a:lumMod val="95000"/>
+                  </a:schemeClr>
+                </a:solidFill>
+                <a:latin typeface="Noto Sans KR Medium" panose="020B0200000000000000" pitchFamily="34" charset="-128"/>
+                <a:ea typeface="Noto Sans KR Medium" panose="020B0200000000000000" pitchFamily="34" charset="-128"/>
+              </a:rPr>
+              <a:t> 생성 시</a:t>
+            </a:r>
+            <a:r>
+              <a:rPr lang="en-US" altLang="ko-KR" sz="1000" dirty="0" smtClean="0">
+                <a:solidFill>
+                  <a:schemeClr val="bg1">
+                    <a:lumMod val="95000"/>
+                  </a:schemeClr>
+                </a:solidFill>
+                <a:latin typeface="Noto Sans KR Medium" panose="020B0200000000000000" pitchFamily="34" charset="-128"/>
+                <a:ea typeface="Noto Sans KR Medium" panose="020B0200000000000000" pitchFamily="34" charset="-128"/>
+              </a:rPr>
+              <a:t>, </a:t>
+            </a:r>
+            <a:r>
+              <a:rPr lang="ko-KR" altLang="en-US" sz="1000" dirty="0" smtClean="0">
+                <a:solidFill>
+                  <a:schemeClr val="bg1">
+                    <a:lumMod val="95000"/>
+                  </a:schemeClr>
+                </a:solidFill>
+                <a:latin typeface="Noto Sans KR Medium" panose="020B0200000000000000" pitchFamily="34" charset="-128"/>
+                <a:ea typeface="Noto Sans KR Medium" panose="020B0200000000000000" pitchFamily="34" charset="-128"/>
+              </a:rPr>
+              <a:t>자신이 속한 </a:t>
+            </a:r>
+            <a:r>
+              <a:rPr lang="en-US" altLang="ko-KR" sz="1000" dirty="0" err="1" smtClean="0">
+                <a:solidFill>
+                  <a:schemeClr val="bg1">
+                    <a:lumMod val="95000"/>
+                  </a:schemeClr>
+                </a:solidFill>
+                <a:latin typeface="Noto Sans KR Medium" panose="020B0200000000000000" pitchFamily="34" charset="-128"/>
+                <a:ea typeface="Noto Sans KR Medium" panose="020B0200000000000000" pitchFamily="34" charset="-128"/>
+              </a:rPr>
+              <a:t>StageSecion</a:t>
+            </a:r>
+            <a:r>
+              <a:rPr lang="ko-KR" altLang="en-US" sz="1000" dirty="0" smtClean="0">
+                <a:solidFill>
+                  <a:schemeClr val="bg1">
+                    <a:lumMod val="95000"/>
+                  </a:schemeClr>
+                </a:solidFill>
+                <a:latin typeface="Noto Sans KR Medium" panose="020B0200000000000000" pitchFamily="34" charset="-128"/>
+                <a:ea typeface="Noto Sans KR Medium" panose="020B0200000000000000" pitchFamily="34" charset="-128"/>
+              </a:rPr>
+              <a:t>의 </a:t>
+            </a:r>
+            <a:r>
+              <a:rPr lang="en-US" altLang="ko-KR" sz="1000" dirty="0" smtClean="0">
+                <a:solidFill>
+                  <a:schemeClr val="bg1">
+                    <a:lumMod val="95000"/>
+                  </a:schemeClr>
+                </a:solidFill>
+                <a:latin typeface="Noto Sans KR Medium" panose="020B0200000000000000" pitchFamily="34" charset="-128"/>
+                <a:ea typeface="Noto Sans KR Medium" panose="020B0200000000000000" pitchFamily="34" charset="-128"/>
+              </a:rPr>
+              <a:t>Index</a:t>
+            </a:r>
+            <a:r>
+              <a:rPr lang="ko-KR" altLang="en-US" sz="1000" dirty="0" smtClean="0">
+                <a:solidFill>
+                  <a:schemeClr val="bg1">
+                    <a:lumMod val="95000"/>
+                  </a:schemeClr>
+                </a:solidFill>
+                <a:latin typeface="Noto Sans KR Medium" panose="020B0200000000000000" pitchFamily="34" charset="-128"/>
+                <a:ea typeface="Noto Sans KR Medium" panose="020B0200000000000000" pitchFamily="34" charset="-128"/>
+              </a:rPr>
+              <a:t>를 전달받아 소속을 </a:t>
+            </a:r>
+            <a:r>
+              <a:rPr lang="ko-KR" altLang="en-US" sz="1000" dirty="0" err="1" smtClean="0">
+                <a:solidFill>
+                  <a:schemeClr val="bg1">
+                    <a:lumMod val="95000"/>
+                  </a:schemeClr>
+                </a:solidFill>
+                <a:latin typeface="Noto Sans KR Medium" panose="020B0200000000000000" pitchFamily="34" charset="-128"/>
+                <a:ea typeface="Noto Sans KR Medium" panose="020B0200000000000000" pitchFamily="34" charset="-128"/>
+              </a:rPr>
+              <a:t>지정받음</a:t>
+            </a:r>
             <a:endParaRPr lang="en-US" altLang="ko-KR" sz="1000" dirty="0" smtClean="0">
               <a:solidFill>
                 <a:schemeClr val="bg1">
@@ -12829,7 +12974,127 @@
                 <a:latin typeface="Noto Sans KR Medium" panose="020B0200000000000000" pitchFamily="34" charset="-128"/>
                 <a:ea typeface="Noto Sans KR Medium" panose="020B0200000000000000" pitchFamily="34" charset="-128"/>
               </a:rPr>
-              <a:t>원인 분석</a:t>
+              <a:t>그리고 </a:t>
+            </a:r>
+            <a:r>
+              <a:rPr lang="ko-KR" altLang="en-US" sz="1000" dirty="0" err="1" smtClean="0">
+                <a:solidFill>
+                  <a:schemeClr val="bg1">
+                    <a:lumMod val="95000"/>
+                  </a:schemeClr>
+                </a:solidFill>
+                <a:latin typeface="Noto Sans KR Medium" panose="020B0200000000000000" pitchFamily="34" charset="-128"/>
+                <a:ea typeface="Noto Sans KR Medium" panose="020B0200000000000000" pitchFamily="34" charset="-128"/>
+              </a:rPr>
+              <a:t>몬스터가</a:t>
+            </a:r>
+            <a:r>
+              <a:rPr lang="ko-KR" altLang="en-US" sz="1000" dirty="0" smtClean="0">
+                <a:solidFill>
+                  <a:schemeClr val="bg1">
+                    <a:lumMod val="95000"/>
+                  </a:schemeClr>
+                </a:solidFill>
+                <a:latin typeface="Noto Sans KR Medium" panose="020B0200000000000000" pitchFamily="34" charset="-128"/>
+                <a:ea typeface="Noto Sans KR Medium" panose="020B0200000000000000" pitchFamily="34" charset="-128"/>
+              </a:rPr>
+              <a:t> 죽으면 </a:t>
+            </a:r>
+            <a:r>
+              <a:rPr lang="en-US" altLang="ko-KR" sz="1000" dirty="0" err="1" smtClean="0">
+                <a:solidFill>
+                  <a:schemeClr val="bg1">
+                    <a:lumMod val="95000"/>
+                  </a:schemeClr>
+                </a:solidFill>
+                <a:latin typeface="Noto Sans KR Medium" panose="020B0200000000000000" pitchFamily="34" charset="-128"/>
+                <a:ea typeface="Noto Sans KR Medium" panose="020B0200000000000000" pitchFamily="34" charset="-128"/>
+              </a:rPr>
+              <a:t>CombatGameMode</a:t>
+            </a:r>
+            <a:r>
+              <a:rPr lang="ko-KR" altLang="en-US" sz="1000" dirty="0" smtClean="0">
+                <a:solidFill>
+                  <a:schemeClr val="bg1">
+                    <a:lumMod val="95000"/>
+                  </a:schemeClr>
+                </a:solidFill>
+                <a:latin typeface="Noto Sans KR Medium" panose="020B0200000000000000" pitchFamily="34" charset="-128"/>
+                <a:ea typeface="Noto Sans KR Medium" panose="020B0200000000000000" pitchFamily="34" charset="-128"/>
+              </a:rPr>
+              <a:t>에 </a:t>
+            </a:r>
+            <a:r>
+              <a:rPr lang="ko-KR" altLang="en-US" sz="1000" dirty="0" err="1" smtClean="0">
+                <a:solidFill>
+                  <a:schemeClr val="bg1">
+                    <a:lumMod val="95000"/>
+                  </a:schemeClr>
+                </a:solidFill>
+                <a:latin typeface="Noto Sans KR Medium" panose="020B0200000000000000" pitchFamily="34" charset="-128"/>
+                <a:ea typeface="Noto Sans KR Medium" panose="020B0200000000000000" pitchFamily="34" charset="-128"/>
+              </a:rPr>
+              <a:t>몬스터</a:t>
+            </a:r>
+            <a:r>
+              <a:rPr lang="ko-KR" altLang="en-US" sz="1000" dirty="0" smtClean="0">
+                <a:solidFill>
+                  <a:schemeClr val="bg1">
+                    <a:lumMod val="95000"/>
+                  </a:schemeClr>
+                </a:solidFill>
+                <a:latin typeface="Noto Sans KR Medium" panose="020B0200000000000000" pitchFamily="34" charset="-128"/>
+                <a:ea typeface="Noto Sans KR Medium" panose="020B0200000000000000" pitchFamily="34" charset="-128"/>
+              </a:rPr>
+              <a:t> 사망 이벤트 발행과 함께</a:t>
+            </a:r>
+            <a:r>
+              <a:rPr lang="en-US" altLang="ko-KR" sz="1000" dirty="0" smtClean="0">
+                <a:solidFill>
+                  <a:schemeClr val="bg1">
+                    <a:lumMod val="95000"/>
+                  </a:schemeClr>
+                </a:solidFill>
+                <a:latin typeface="Noto Sans KR Medium" panose="020B0200000000000000" pitchFamily="34" charset="-128"/>
+                <a:ea typeface="Noto Sans KR Medium" panose="020B0200000000000000" pitchFamily="34" charset="-128"/>
+              </a:rPr>
+              <a:t>, </a:t>
+            </a:r>
+            <a:r>
+              <a:rPr lang="ko-KR" altLang="en-US" sz="1000" dirty="0" smtClean="0">
+                <a:solidFill>
+                  <a:schemeClr val="bg1">
+                    <a:lumMod val="95000"/>
+                  </a:schemeClr>
+                </a:solidFill>
+                <a:latin typeface="Noto Sans KR Medium" panose="020B0200000000000000" pitchFamily="34" charset="-128"/>
+                <a:ea typeface="Noto Sans KR Medium" panose="020B0200000000000000" pitchFamily="34" charset="-128"/>
+              </a:rPr>
+              <a:t>소속 구역 </a:t>
+            </a:r>
+            <a:r>
+              <a:rPr lang="en-US" altLang="ko-KR" sz="1000" dirty="0" smtClean="0">
+                <a:solidFill>
+                  <a:schemeClr val="bg1">
+                    <a:lumMod val="95000"/>
+                  </a:schemeClr>
+                </a:solidFill>
+                <a:latin typeface="Noto Sans KR Medium" panose="020B0200000000000000" pitchFamily="34" charset="-128"/>
+                <a:ea typeface="Noto Sans KR Medium" panose="020B0200000000000000" pitchFamily="34" charset="-128"/>
+              </a:rPr>
+              <a:t>Index</a:t>
+            </a:r>
+            <a:r>
+              <a:rPr lang="ko-KR" altLang="en-US" sz="1000" dirty="0" smtClean="0">
+                <a:solidFill>
+                  <a:schemeClr val="bg1">
+                    <a:lumMod val="95000"/>
+                  </a:schemeClr>
+                </a:solidFill>
+                <a:latin typeface="Noto Sans KR Medium" panose="020B0200000000000000" pitchFamily="34" charset="-128"/>
+                <a:ea typeface="Noto Sans KR Medium" panose="020B0200000000000000" pitchFamily="34" charset="-128"/>
+              </a:rPr>
+              <a:t>를 전달</a:t>
             </a:r>
             <a:endParaRPr lang="en-US" altLang="ko-KR" sz="1000" dirty="0" smtClean="0">
               <a:solidFill>
@@ -12842,456 +13107,6 @@
             </a:endParaRPr>
           </a:p>
           <a:p>
-            <a:r>
-              <a:rPr lang="ko-KR" altLang="en-US" sz="1000" dirty="0" err="1" smtClean="0">
-                <a:solidFill>
-                  <a:schemeClr val="bg1">
-                    <a:lumMod val="95000"/>
-                  </a:schemeClr>
-                </a:solidFill>
-                <a:latin typeface="Noto Sans KR Medium" panose="020B0200000000000000" pitchFamily="34" charset="-128"/>
-                <a:ea typeface="Noto Sans KR Medium" panose="020B0200000000000000" pitchFamily="34" charset="-128"/>
-              </a:rPr>
-              <a:t>몬스터</a:t>
-            </a:r>
-            <a:r>
-              <a:rPr lang="ko-KR" altLang="en-US" sz="1000" dirty="0" smtClean="0">
-                <a:solidFill>
-                  <a:schemeClr val="bg1">
-                    <a:lumMod val="95000"/>
-                  </a:schemeClr>
-                </a:solidFill>
-                <a:latin typeface="Noto Sans KR Medium" panose="020B0200000000000000" pitchFamily="34" charset="-128"/>
-                <a:ea typeface="Noto Sans KR Medium" panose="020B0200000000000000" pitchFamily="34" charset="-128"/>
-              </a:rPr>
-              <a:t> </a:t>
-            </a:r>
-            <a:r>
-              <a:rPr lang="ko-KR" altLang="en-US" sz="1000" dirty="0" err="1" smtClean="0">
-                <a:solidFill>
-                  <a:schemeClr val="bg1">
-                    <a:lumMod val="95000"/>
-                  </a:schemeClr>
-                </a:solidFill>
-                <a:latin typeface="Noto Sans KR Medium" panose="020B0200000000000000" pitchFamily="34" charset="-128"/>
-                <a:ea typeface="Noto Sans KR Medium" panose="020B0200000000000000" pitchFamily="34" charset="-128"/>
-              </a:rPr>
-              <a:t>액터를</a:t>
-            </a:r>
-            <a:r>
-              <a:rPr lang="ko-KR" altLang="en-US" sz="1000" dirty="0" smtClean="0">
-                <a:solidFill>
-                  <a:schemeClr val="bg1">
-                    <a:lumMod val="95000"/>
-                  </a:schemeClr>
-                </a:solidFill>
-                <a:latin typeface="Noto Sans KR Medium" panose="020B0200000000000000" pitchFamily="34" charset="-128"/>
-                <a:ea typeface="Noto Sans KR Medium" panose="020B0200000000000000" pitchFamily="34" charset="-128"/>
-              </a:rPr>
-              <a:t> </a:t>
-            </a:r>
-            <a:r>
-              <a:rPr lang="ko-KR" altLang="en-US" sz="1000" dirty="0" err="1" smtClean="0">
-                <a:solidFill>
-                  <a:schemeClr val="bg1">
-                    <a:lumMod val="95000"/>
-                  </a:schemeClr>
-                </a:solidFill>
-                <a:latin typeface="Noto Sans KR Medium" panose="020B0200000000000000" pitchFamily="34" charset="-128"/>
-                <a:ea typeface="Noto Sans KR Medium" panose="020B0200000000000000" pitchFamily="34" charset="-128"/>
-              </a:rPr>
-              <a:t>스폰</a:t>
-            </a:r>
-            <a:r>
-              <a:rPr lang="ko-KR" altLang="en-US" sz="1000" dirty="0" smtClean="0">
-                <a:solidFill>
-                  <a:schemeClr val="bg1">
-                    <a:lumMod val="95000"/>
-                  </a:schemeClr>
-                </a:solidFill>
-                <a:latin typeface="Noto Sans KR Medium" panose="020B0200000000000000" pitchFamily="34" charset="-128"/>
-                <a:ea typeface="Noto Sans KR Medium" panose="020B0200000000000000" pitchFamily="34" charset="-128"/>
-              </a:rPr>
-              <a:t> 시</a:t>
-            </a:r>
-            <a:r>
-              <a:rPr lang="en-US" altLang="ko-KR" sz="1000" dirty="0" smtClean="0">
-                <a:solidFill>
-                  <a:schemeClr val="bg1">
-                    <a:lumMod val="95000"/>
-                  </a:schemeClr>
-                </a:solidFill>
-                <a:latin typeface="Noto Sans KR Medium" panose="020B0200000000000000" pitchFamily="34" charset="-128"/>
-                <a:ea typeface="Noto Sans KR Medium" panose="020B0200000000000000" pitchFamily="34" charset="-128"/>
-              </a:rPr>
-              <a:t>, </a:t>
-            </a:r>
-            <a:r>
-              <a:rPr lang="en-US" altLang="ko-KR" sz="1000" dirty="0" err="1" smtClean="0">
-                <a:solidFill>
-                  <a:schemeClr val="bg1">
-                    <a:lumMod val="95000"/>
-                  </a:schemeClr>
-                </a:solidFill>
-                <a:latin typeface="Noto Sans KR Medium" panose="020B0200000000000000" pitchFamily="34" charset="-128"/>
-                <a:ea typeface="Noto Sans KR Medium" panose="020B0200000000000000" pitchFamily="34" charset="-128"/>
-              </a:rPr>
-              <a:t>nullptr</a:t>
-            </a:r>
-            <a:r>
-              <a:rPr lang="en-US" altLang="ko-KR" sz="1000" dirty="0" smtClean="0">
-                <a:solidFill>
-                  <a:schemeClr val="bg1">
-                    <a:lumMod val="95000"/>
-                  </a:schemeClr>
-                </a:solidFill>
-                <a:latin typeface="Noto Sans KR Medium" panose="020B0200000000000000" pitchFamily="34" charset="-128"/>
-                <a:ea typeface="Noto Sans KR Medium" panose="020B0200000000000000" pitchFamily="34" charset="-128"/>
-              </a:rPr>
-              <a:t> </a:t>
-            </a:r>
-            <a:r>
-              <a:rPr lang="ko-KR" altLang="en-US" sz="1000" dirty="0" smtClean="0">
-                <a:solidFill>
-                  <a:schemeClr val="bg1">
-                    <a:lumMod val="95000"/>
-                  </a:schemeClr>
-                </a:solidFill>
-                <a:latin typeface="Noto Sans KR Medium" panose="020B0200000000000000" pitchFamily="34" charset="-128"/>
-                <a:ea typeface="Noto Sans KR Medium" panose="020B0200000000000000" pitchFamily="34" charset="-128"/>
-              </a:rPr>
-              <a:t>반환으로 인한 에러</a:t>
-            </a:r>
-            <a:r>
-              <a:rPr lang="en-US" altLang="ko-KR" sz="1000" dirty="0" smtClean="0">
-                <a:solidFill>
-                  <a:schemeClr val="bg1">
-                    <a:lumMod val="95000"/>
-                  </a:schemeClr>
-                </a:solidFill>
-                <a:latin typeface="Noto Sans KR Medium" panose="020B0200000000000000" pitchFamily="34" charset="-128"/>
-                <a:ea typeface="Noto Sans KR Medium" panose="020B0200000000000000" pitchFamily="34" charset="-128"/>
-              </a:rPr>
-              <a:t>.</a:t>
-            </a:r>
-          </a:p>
-          <a:p>
-            <a:r>
-              <a:rPr lang="ko-KR" altLang="en-US" sz="1000" dirty="0" smtClean="0">
-                <a:solidFill>
-                  <a:schemeClr val="bg1">
-                    <a:lumMod val="95000"/>
-                  </a:schemeClr>
-                </a:solidFill>
-                <a:latin typeface="Noto Sans KR Medium" panose="020B0200000000000000" pitchFamily="34" charset="-128"/>
-                <a:ea typeface="Noto Sans KR Medium" panose="020B0200000000000000" pitchFamily="34" charset="-128"/>
-              </a:rPr>
-              <a:t>기존 테스트에 쓰던 레벨에선 발생하지 않는 것을 확인</a:t>
-            </a:r>
-            <a:r>
-              <a:rPr lang="en-US" altLang="ko-KR" sz="1000" dirty="0" smtClean="0">
-                <a:solidFill>
-                  <a:schemeClr val="bg1">
-                    <a:lumMod val="95000"/>
-                  </a:schemeClr>
-                </a:solidFill>
-                <a:latin typeface="Noto Sans KR Medium" panose="020B0200000000000000" pitchFamily="34" charset="-128"/>
-                <a:ea typeface="Noto Sans KR Medium" panose="020B0200000000000000" pitchFamily="34" charset="-128"/>
-              </a:rPr>
-              <a:t>.</a:t>
-            </a:r>
-          </a:p>
-          <a:p>
-            <a:r>
-              <a:rPr lang="ko-KR" altLang="en-US" sz="1000" dirty="0" smtClean="0">
-                <a:solidFill>
-                  <a:schemeClr val="bg1">
-                    <a:lumMod val="95000"/>
-                  </a:schemeClr>
-                </a:solidFill>
-                <a:latin typeface="Noto Sans KR Medium" panose="020B0200000000000000" pitchFamily="34" charset="-128"/>
-                <a:ea typeface="Noto Sans KR Medium" panose="020B0200000000000000" pitchFamily="34" charset="-128"/>
-              </a:rPr>
-              <a:t>새로 </a:t>
-            </a:r>
-            <a:r>
-              <a:rPr lang="ko-KR" altLang="en-US" sz="1000" dirty="0">
-                <a:solidFill>
-                  <a:schemeClr val="bg1">
-                    <a:lumMod val="95000"/>
-                  </a:schemeClr>
-                </a:solidFill>
-                <a:latin typeface="Noto Sans KR Medium" panose="020B0200000000000000" pitchFamily="34" charset="-128"/>
-                <a:ea typeface="Noto Sans KR Medium" panose="020B0200000000000000" pitchFamily="34" charset="-128"/>
-              </a:rPr>
-              <a:t>작업 중인 </a:t>
-            </a:r>
-            <a:r>
-              <a:rPr lang="ko-KR" altLang="en-US" sz="1000" dirty="0" smtClean="0">
-                <a:solidFill>
-                  <a:schemeClr val="bg1">
-                    <a:lumMod val="95000"/>
-                  </a:schemeClr>
-                </a:solidFill>
-                <a:latin typeface="Noto Sans KR Medium" panose="020B0200000000000000" pitchFamily="34" charset="-128"/>
-                <a:ea typeface="Noto Sans KR Medium" panose="020B0200000000000000" pitchFamily="34" charset="-128"/>
-              </a:rPr>
-              <a:t>레벨과의 차이점이 </a:t>
-            </a:r>
-            <a:r>
-              <a:rPr lang="ko-KR" altLang="en-US" sz="1000" dirty="0" err="1" smtClean="0">
-                <a:solidFill>
-                  <a:schemeClr val="bg1">
-                    <a:lumMod val="95000"/>
-                  </a:schemeClr>
-                </a:solidFill>
-                <a:latin typeface="Noto Sans KR Medium" panose="020B0200000000000000" pitchFamily="34" charset="-128"/>
-                <a:ea typeface="Noto Sans KR Medium" panose="020B0200000000000000" pitchFamily="34" charset="-128"/>
-              </a:rPr>
-              <a:t>랜드</a:t>
-            </a:r>
-            <a:r>
-              <a:rPr lang="ko-KR" altLang="en-US" sz="1000" dirty="0" smtClean="0">
-                <a:solidFill>
-                  <a:schemeClr val="bg1">
-                    <a:lumMod val="95000"/>
-                  </a:schemeClr>
-                </a:solidFill>
-                <a:latin typeface="Noto Sans KR Medium" panose="020B0200000000000000" pitchFamily="34" charset="-128"/>
-                <a:ea typeface="Noto Sans KR Medium" panose="020B0200000000000000" pitchFamily="34" charset="-128"/>
-              </a:rPr>
-              <a:t> </a:t>
-            </a:r>
-            <a:r>
-              <a:rPr lang="ko-KR" altLang="en-US" sz="1000" dirty="0" err="1" smtClean="0">
-                <a:solidFill>
-                  <a:schemeClr val="bg1">
-                    <a:lumMod val="95000"/>
-                  </a:schemeClr>
-                </a:solidFill>
-                <a:latin typeface="Noto Sans KR Medium" panose="020B0200000000000000" pitchFamily="34" charset="-128"/>
-                <a:ea typeface="Noto Sans KR Medium" panose="020B0200000000000000" pitchFamily="34" charset="-128"/>
-              </a:rPr>
-              <a:t>스케이프</a:t>
-            </a:r>
-            <a:r>
-              <a:rPr lang="ko-KR" altLang="en-US" sz="1000" dirty="0" smtClean="0">
-                <a:solidFill>
-                  <a:schemeClr val="bg1">
-                    <a:lumMod val="95000"/>
-                  </a:schemeClr>
-                </a:solidFill>
-                <a:latin typeface="Noto Sans KR Medium" panose="020B0200000000000000" pitchFamily="34" charset="-128"/>
-                <a:ea typeface="Noto Sans KR Medium" panose="020B0200000000000000" pitchFamily="34" charset="-128"/>
-              </a:rPr>
-              <a:t> 사용 여부</a:t>
-            </a:r>
-            <a:r>
-              <a:rPr lang="en-US" altLang="ko-KR" sz="1000" dirty="0" smtClean="0">
-                <a:solidFill>
-                  <a:schemeClr val="bg1">
-                    <a:lumMod val="95000"/>
-                  </a:schemeClr>
-                </a:solidFill>
-                <a:latin typeface="Noto Sans KR Medium" panose="020B0200000000000000" pitchFamily="34" charset="-128"/>
-                <a:ea typeface="Noto Sans KR Medium" panose="020B0200000000000000" pitchFamily="34" charset="-128"/>
-              </a:rPr>
-              <a:t>.</a:t>
-            </a:r>
-          </a:p>
-          <a:p>
-            <a:endParaRPr lang="en-US" altLang="ko-KR" sz="1000" dirty="0" smtClean="0">
-              <a:solidFill>
-                <a:schemeClr val="bg1">
-                  <a:lumMod val="95000"/>
-                </a:schemeClr>
-              </a:solidFill>
-              <a:latin typeface="Noto Sans KR Medium" panose="020B0200000000000000" pitchFamily="34" charset="-128"/>
-              <a:ea typeface="Noto Sans KR Medium" panose="020B0200000000000000" pitchFamily="34" charset="-128"/>
-            </a:endParaRPr>
-          </a:p>
-          <a:p>
-            <a:r>
-              <a:rPr lang="ko-KR" altLang="en-US" sz="1000" dirty="0" smtClean="0">
-                <a:solidFill>
-                  <a:schemeClr val="bg1">
-                    <a:lumMod val="95000"/>
-                  </a:schemeClr>
-                </a:solidFill>
-                <a:latin typeface="Noto Sans KR Medium" panose="020B0200000000000000" pitchFamily="34" charset="-128"/>
-                <a:ea typeface="Noto Sans KR Medium" panose="020B0200000000000000" pitchFamily="34" charset="-128"/>
-              </a:rPr>
-              <a:t>기존 테스트 레벨에서 바닥은 넓은 </a:t>
-            </a:r>
-            <a:r>
-              <a:rPr lang="ko-KR" altLang="en-US" sz="1000" dirty="0" err="1" smtClean="0">
-                <a:solidFill>
-                  <a:schemeClr val="bg1">
-                    <a:lumMod val="95000"/>
-                  </a:schemeClr>
-                </a:solidFill>
-                <a:latin typeface="Noto Sans KR Medium" panose="020B0200000000000000" pitchFamily="34" charset="-128"/>
-                <a:ea typeface="Noto Sans KR Medium" panose="020B0200000000000000" pitchFamily="34" charset="-128"/>
-              </a:rPr>
-              <a:t>큐브를</a:t>
-            </a:r>
-            <a:r>
-              <a:rPr lang="ko-KR" altLang="en-US" sz="1000" dirty="0" smtClean="0">
-                <a:solidFill>
-                  <a:schemeClr val="bg1">
-                    <a:lumMod val="95000"/>
-                  </a:schemeClr>
-                </a:solidFill>
-                <a:latin typeface="Noto Sans KR Medium" panose="020B0200000000000000" pitchFamily="34" charset="-128"/>
-                <a:ea typeface="Noto Sans KR Medium" panose="020B0200000000000000" pitchFamily="34" charset="-128"/>
-              </a:rPr>
-              <a:t> 사용</a:t>
-            </a:r>
-            <a:r>
-              <a:rPr lang="en-US" altLang="ko-KR" sz="1000" dirty="0" smtClean="0">
-                <a:solidFill>
-                  <a:schemeClr val="bg1">
-                    <a:lumMod val="95000"/>
-                  </a:schemeClr>
-                </a:solidFill>
-                <a:latin typeface="Noto Sans KR Medium" panose="020B0200000000000000" pitchFamily="34" charset="-128"/>
-                <a:ea typeface="Noto Sans KR Medium" panose="020B0200000000000000" pitchFamily="34" charset="-128"/>
-              </a:rPr>
-              <a:t>.</a:t>
-            </a:r>
-          </a:p>
-          <a:p>
-            <a:r>
-              <a:rPr lang="ko-KR" altLang="en-US" sz="1000" dirty="0" err="1" smtClean="0">
-                <a:solidFill>
-                  <a:schemeClr val="bg1">
-                    <a:lumMod val="95000"/>
-                  </a:schemeClr>
-                </a:solidFill>
-                <a:latin typeface="Noto Sans KR Medium" panose="020B0200000000000000" pitchFamily="34" charset="-128"/>
-                <a:ea typeface="Noto Sans KR Medium" panose="020B0200000000000000" pitchFamily="34" charset="-128"/>
-              </a:rPr>
-              <a:t>랜드</a:t>
-            </a:r>
-            <a:r>
-              <a:rPr lang="ko-KR" altLang="en-US" sz="1000" dirty="0" smtClean="0">
-                <a:solidFill>
-                  <a:schemeClr val="bg1">
-                    <a:lumMod val="95000"/>
-                  </a:schemeClr>
-                </a:solidFill>
-                <a:latin typeface="Noto Sans KR Medium" panose="020B0200000000000000" pitchFamily="34" charset="-128"/>
-                <a:ea typeface="Noto Sans KR Medium" panose="020B0200000000000000" pitchFamily="34" charset="-128"/>
-              </a:rPr>
-              <a:t> </a:t>
-            </a:r>
-            <a:r>
-              <a:rPr lang="ko-KR" altLang="en-US" sz="1000" dirty="0" err="1" smtClean="0">
-                <a:solidFill>
-                  <a:schemeClr val="bg1">
-                    <a:lumMod val="95000"/>
-                  </a:schemeClr>
-                </a:solidFill>
-                <a:latin typeface="Noto Sans KR Medium" panose="020B0200000000000000" pitchFamily="34" charset="-128"/>
-                <a:ea typeface="Noto Sans KR Medium" panose="020B0200000000000000" pitchFamily="34" charset="-128"/>
-              </a:rPr>
-              <a:t>스케이프는</a:t>
-            </a:r>
-            <a:r>
-              <a:rPr lang="ko-KR" altLang="en-US" sz="1000" dirty="0" smtClean="0">
-                <a:solidFill>
-                  <a:schemeClr val="bg1">
-                    <a:lumMod val="95000"/>
-                  </a:schemeClr>
-                </a:solidFill>
-                <a:latin typeface="Noto Sans KR Medium" panose="020B0200000000000000" pitchFamily="34" charset="-128"/>
-                <a:ea typeface="Noto Sans KR Medium" panose="020B0200000000000000" pitchFamily="34" charset="-128"/>
-              </a:rPr>
-              <a:t> 일반 </a:t>
-            </a:r>
-            <a:r>
-              <a:rPr lang="ko-KR" altLang="en-US" sz="1000" dirty="0" err="1" smtClean="0">
-                <a:solidFill>
-                  <a:schemeClr val="bg1">
-                    <a:lumMod val="95000"/>
-                  </a:schemeClr>
-                </a:solidFill>
-                <a:latin typeface="Noto Sans KR Medium" panose="020B0200000000000000" pitchFamily="34" charset="-128"/>
-                <a:ea typeface="Noto Sans KR Medium" panose="020B0200000000000000" pitchFamily="34" charset="-128"/>
-              </a:rPr>
-              <a:t>스태틱</a:t>
-            </a:r>
-            <a:r>
-              <a:rPr lang="ko-KR" altLang="en-US" sz="1000" dirty="0" smtClean="0">
-                <a:solidFill>
-                  <a:schemeClr val="bg1">
-                    <a:lumMod val="95000"/>
-                  </a:schemeClr>
-                </a:solidFill>
-                <a:latin typeface="Noto Sans KR Medium" panose="020B0200000000000000" pitchFamily="34" charset="-128"/>
-                <a:ea typeface="Noto Sans KR Medium" panose="020B0200000000000000" pitchFamily="34" charset="-128"/>
-              </a:rPr>
-              <a:t> </a:t>
-            </a:r>
-            <a:r>
-              <a:rPr lang="ko-KR" altLang="en-US" sz="1000" dirty="0" err="1" smtClean="0">
-                <a:solidFill>
-                  <a:schemeClr val="bg1">
-                    <a:lumMod val="95000"/>
-                  </a:schemeClr>
-                </a:solidFill>
-                <a:latin typeface="Noto Sans KR Medium" panose="020B0200000000000000" pitchFamily="34" charset="-128"/>
-                <a:ea typeface="Noto Sans KR Medium" panose="020B0200000000000000" pitchFamily="34" charset="-128"/>
-              </a:rPr>
-              <a:t>메쉬와</a:t>
-            </a:r>
-            <a:r>
-              <a:rPr lang="ko-KR" altLang="en-US" sz="1000" dirty="0" smtClean="0">
-                <a:solidFill>
-                  <a:schemeClr val="bg1">
-                    <a:lumMod val="95000"/>
-                  </a:schemeClr>
-                </a:solidFill>
-                <a:latin typeface="Noto Sans KR Medium" panose="020B0200000000000000" pitchFamily="34" charset="-128"/>
-                <a:ea typeface="Noto Sans KR Medium" panose="020B0200000000000000" pitchFamily="34" charset="-128"/>
-              </a:rPr>
-              <a:t> 달리 충돌 설정과 </a:t>
-            </a:r>
-            <a:r>
-              <a:rPr lang="en-US" altLang="ko-KR" sz="1000" dirty="0" smtClean="0">
-                <a:solidFill>
-                  <a:schemeClr val="bg1">
-                    <a:lumMod val="95000"/>
-                  </a:schemeClr>
-                </a:solidFill>
-                <a:latin typeface="Noto Sans KR Medium" panose="020B0200000000000000" pitchFamily="34" charset="-128"/>
-                <a:ea typeface="Noto Sans KR Medium" panose="020B0200000000000000" pitchFamily="34" charset="-128"/>
-              </a:rPr>
-              <a:t>Z</a:t>
-            </a:r>
-            <a:r>
-              <a:rPr lang="ko-KR" altLang="en-US" sz="1000" dirty="0" smtClean="0">
-                <a:solidFill>
-                  <a:schemeClr val="bg1">
-                    <a:lumMod val="95000"/>
-                  </a:schemeClr>
-                </a:solidFill>
-                <a:latin typeface="Noto Sans KR Medium" panose="020B0200000000000000" pitchFamily="34" charset="-128"/>
-                <a:ea typeface="Noto Sans KR Medium" panose="020B0200000000000000" pitchFamily="34" charset="-128"/>
-              </a:rPr>
-              <a:t>축 높이 문제가 있었음</a:t>
-            </a:r>
-            <a:endParaRPr lang="en-US" altLang="ko-KR" sz="1000" dirty="0" smtClean="0">
-              <a:solidFill>
-                <a:schemeClr val="bg1">
-                  <a:lumMod val="95000"/>
-                </a:schemeClr>
-              </a:solidFill>
-              <a:latin typeface="Noto Sans KR Medium" panose="020B0200000000000000" pitchFamily="34" charset="-128"/>
-              <a:ea typeface="Noto Sans KR Medium" panose="020B0200000000000000" pitchFamily="34" charset="-128"/>
-            </a:endParaRPr>
-          </a:p>
-          <a:p>
             <a:endParaRPr lang="en-US" altLang="ko-KR" sz="1000" dirty="0">
               <a:solidFill>
                 <a:schemeClr val="bg1">
@@ -13304,6 +13119,30 @@
           </a:p>
           <a:p>
             <a:r>
+              <a:rPr lang="en-US" altLang="ko-KR" sz="1000" dirty="0" err="1" smtClean="0">
+                <a:solidFill>
+                  <a:schemeClr val="bg1">
+                    <a:lumMod val="95000"/>
+                  </a:schemeClr>
+                </a:solidFill>
+                <a:latin typeface="Noto Sans KR Medium" panose="020B0200000000000000" pitchFamily="34" charset="-128"/>
+                <a:ea typeface="Noto Sans KR Medium" panose="020B0200000000000000" pitchFamily="34" charset="-128"/>
+              </a:rPr>
+              <a:t>StageSection</a:t>
+            </a:r>
+            <a:r>
+              <a:rPr lang="ko-KR" altLang="en-US" sz="1000" dirty="0" smtClean="0">
+                <a:solidFill>
+                  <a:schemeClr val="bg1">
+                    <a:lumMod val="95000"/>
+                  </a:schemeClr>
+                </a:solidFill>
+                <a:latin typeface="Noto Sans KR Medium" panose="020B0200000000000000" pitchFamily="34" charset="-128"/>
+                <a:ea typeface="Noto Sans KR Medium" panose="020B0200000000000000" pitchFamily="34" charset="-128"/>
+              </a:rPr>
+              <a:t>을 앞선 구독했던 이벤트를 통해서 </a:t>
+            </a:r>
+            <a:r>
               <a:rPr lang="ko-KR" altLang="en-US" sz="1000" dirty="0" err="1" smtClean="0">
                 <a:solidFill>
                   <a:schemeClr val="bg1">
@@ -13313,19 +13152,45 @@
                 <a:latin typeface="Noto Sans KR Medium" panose="020B0200000000000000" pitchFamily="34" charset="-128"/>
                 <a:ea typeface="Noto Sans KR Medium" panose="020B0200000000000000" pitchFamily="34" charset="-128"/>
               </a:rPr>
-              <a:t>몬스터</a:t>
-            </a:r>
-            <a:r>
-              <a:rPr lang="ko-KR" altLang="en-US" sz="1000" dirty="0" smtClean="0">
-                <a:solidFill>
-                  <a:schemeClr val="bg1">
-                    <a:lumMod val="95000"/>
-                  </a:schemeClr>
-                </a:solidFill>
-                <a:latin typeface="Noto Sans KR Medium" panose="020B0200000000000000" pitchFamily="34" charset="-128"/>
-                <a:ea typeface="Noto Sans KR Medium" panose="020B0200000000000000" pitchFamily="34" charset="-128"/>
-              </a:rPr>
-              <a:t> </a:t>
+              <a:t>몬스터의</a:t>
+            </a:r>
+            <a:r>
+              <a:rPr lang="ko-KR" altLang="en-US" sz="1000" dirty="0" smtClean="0">
+                <a:solidFill>
+                  <a:schemeClr val="bg1">
+                    <a:lumMod val="95000"/>
+                  </a:schemeClr>
+                </a:solidFill>
+                <a:latin typeface="Noto Sans KR Medium" panose="020B0200000000000000" pitchFamily="34" charset="-128"/>
+                <a:ea typeface="Noto Sans KR Medium" panose="020B0200000000000000" pitchFamily="34" charset="-128"/>
+              </a:rPr>
+              <a:t> 사망을 전달받음</a:t>
+            </a:r>
+            <a:r>
+              <a:rPr lang="en-US" altLang="ko-KR" sz="1000" dirty="0" smtClean="0">
+                <a:solidFill>
+                  <a:schemeClr val="bg1">
+                    <a:lumMod val="95000"/>
+                  </a:schemeClr>
+                </a:solidFill>
+                <a:latin typeface="Noto Sans KR Medium" panose="020B0200000000000000" pitchFamily="34" charset="-128"/>
+                <a:ea typeface="Noto Sans KR Medium" panose="020B0200000000000000" pitchFamily="34" charset="-128"/>
+              </a:rPr>
+              <a:t>.</a:t>
+            </a:r>
+          </a:p>
+          <a:p>
+            <a:r>
+              <a:rPr lang="ko-KR" altLang="en-US" sz="1000" dirty="0" smtClean="0">
+                <a:solidFill>
+                  <a:schemeClr val="bg1">
+                    <a:lumMod val="95000"/>
+                  </a:schemeClr>
+                </a:solidFill>
+                <a:latin typeface="Noto Sans KR Medium" panose="020B0200000000000000" pitchFamily="34" charset="-128"/>
+                <a:ea typeface="Noto Sans KR Medium" panose="020B0200000000000000" pitchFamily="34" charset="-128"/>
+              </a:rPr>
+              <a:t>그리고 구역의 </a:t>
             </a:r>
             <a:r>
               <a:rPr lang="ko-KR" altLang="en-US" sz="1000" dirty="0" err="1" smtClean="0">
@@ -13337,43 +13202,19 @@
                 <a:latin typeface="Noto Sans KR Medium" panose="020B0200000000000000" pitchFamily="34" charset="-128"/>
                 <a:ea typeface="Noto Sans KR Medium" panose="020B0200000000000000" pitchFamily="34" charset="-128"/>
               </a:rPr>
-              <a:t>액터</a:t>
-            </a:r>
-            <a:r>
-              <a:rPr lang="ko-KR" altLang="en-US" sz="1000" dirty="0" smtClean="0">
-                <a:solidFill>
-                  <a:schemeClr val="bg1">
-                    <a:lumMod val="95000"/>
-                  </a:schemeClr>
-                </a:solidFill>
-                <a:latin typeface="Noto Sans KR Medium" panose="020B0200000000000000" pitchFamily="34" charset="-128"/>
-                <a:ea typeface="Noto Sans KR Medium" panose="020B0200000000000000" pitchFamily="34" charset="-128"/>
-              </a:rPr>
-              <a:t> </a:t>
-            </a:r>
-            <a:r>
-              <a:rPr lang="ko-KR" altLang="en-US" sz="1000" dirty="0" err="1" smtClean="0">
-                <a:solidFill>
-                  <a:schemeClr val="bg1">
-                    <a:lumMod val="95000"/>
-                  </a:schemeClr>
-                </a:solidFill>
-                <a:latin typeface="Noto Sans KR Medium" panose="020B0200000000000000" pitchFamily="34" charset="-128"/>
-                <a:ea typeface="Noto Sans KR Medium" panose="020B0200000000000000" pitchFamily="34" charset="-128"/>
-              </a:rPr>
-              <a:t>스폰</a:t>
-            </a:r>
-            <a:r>
-              <a:rPr lang="ko-KR" altLang="en-US" sz="1000" dirty="0" smtClean="0">
-                <a:solidFill>
-                  <a:schemeClr val="bg1">
-                    <a:lumMod val="95000"/>
-                  </a:schemeClr>
-                </a:solidFill>
-                <a:latin typeface="Noto Sans KR Medium" panose="020B0200000000000000" pitchFamily="34" charset="-128"/>
-                <a:ea typeface="Noto Sans KR Medium" panose="020B0200000000000000" pitchFamily="34" charset="-128"/>
-              </a:rPr>
-              <a:t> 시</a:t>
+              <a:t>몬스터가</a:t>
+            </a:r>
+            <a:r>
+              <a:rPr lang="ko-KR" altLang="en-US" sz="1000" dirty="0" smtClean="0">
+                <a:solidFill>
+                  <a:schemeClr val="bg1">
+                    <a:lumMod val="95000"/>
+                  </a:schemeClr>
+                </a:solidFill>
+                <a:latin typeface="Noto Sans KR Medium" panose="020B0200000000000000" pitchFamily="34" charset="-128"/>
+                <a:ea typeface="Noto Sans KR Medium" panose="020B0200000000000000" pitchFamily="34" charset="-128"/>
+              </a:rPr>
+              <a:t> 모두 죽었다면 구역 완료 이벤트를 발행</a:t>
             </a:r>
             <a:r>
               <a:rPr lang="en-US" altLang="ko-KR" sz="1000" dirty="0" smtClean="0">
@@ -13385,81 +13226,11 @@
                 <a:latin typeface="Noto Sans KR Medium" panose="020B0200000000000000" pitchFamily="34" charset="-128"/>
                 <a:ea typeface="Noto Sans KR Medium" panose="020B0200000000000000" pitchFamily="34" charset="-128"/>
               </a:rPr>
-              <a:t>, </a:t>
-            </a:r>
-            <a:r>
-              <a:rPr lang="ko-KR" altLang="en-US" sz="1000" dirty="0" err="1" smtClean="0">
-                <a:solidFill>
-                  <a:schemeClr val="bg1">
-                    <a:lumMod val="95000"/>
-                  </a:schemeClr>
-                </a:solidFill>
-                <a:latin typeface="Noto Sans KR Medium" panose="020B0200000000000000" pitchFamily="34" charset="-128"/>
-                <a:ea typeface="Noto Sans KR Medium" panose="020B0200000000000000" pitchFamily="34" charset="-128"/>
-              </a:rPr>
-              <a:t>랜드</a:t>
-            </a:r>
-            <a:r>
-              <a:rPr lang="ko-KR" altLang="en-US" sz="1000" dirty="0" smtClean="0">
-                <a:solidFill>
-                  <a:schemeClr val="bg1">
-                    <a:lumMod val="95000"/>
-                  </a:schemeClr>
-                </a:solidFill>
-                <a:latin typeface="Noto Sans KR Medium" panose="020B0200000000000000" pitchFamily="34" charset="-128"/>
-                <a:ea typeface="Noto Sans KR Medium" panose="020B0200000000000000" pitchFamily="34" charset="-128"/>
-              </a:rPr>
-              <a:t> </a:t>
-            </a:r>
-            <a:r>
-              <a:rPr lang="ko-KR" altLang="en-US" sz="1000" dirty="0" err="1" smtClean="0">
-                <a:solidFill>
-                  <a:schemeClr val="bg1">
-                    <a:lumMod val="95000"/>
-                  </a:schemeClr>
-                </a:solidFill>
-                <a:latin typeface="Noto Sans KR Medium" panose="020B0200000000000000" pitchFamily="34" charset="-128"/>
-                <a:ea typeface="Noto Sans KR Medium" panose="020B0200000000000000" pitchFamily="34" charset="-128"/>
-              </a:rPr>
-              <a:t>스케이프와</a:t>
-            </a:r>
-            <a:r>
-              <a:rPr lang="ko-KR" altLang="en-US" sz="1000" dirty="0" smtClean="0">
-                <a:solidFill>
-                  <a:schemeClr val="bg1">
-                    <a:lumMod val="95000"/>
-                  </a:schemeClr>
-                </a:solidFill>
-                <a:latin typeface="Noto Sans KR Medium" panose="020B0200000000000000" pitchFamily="34" charset="-128"/>
-                <a:ea typeface="Noto Sans KR Medium" panose="020B0200000000000000" pitchFamily="34" charset="-128"/>
-              </a:rPr>
-              <a:t> 충돌하며 실패 처리되어 </a:t>
-            </a:r>
-            <a:r>
-              <a:rPr lang="en-US" altLang="ko-KR" sz="1000" dirty="0" err="1" smtClean="0">
-                <a:solidFill>
-                  <a:schemeClr val="bg1">
-                    <a:lumMod val="95000"/>
-                  </a:schemeClr>
-                </a:solidFill>
-                <a:latin typeface="Noto Sans KR Medium" panose="020B0200000000000000" pitchFamily="34" charset="-128"/>
-                <a:ea typeface="Noto Sans KR Medium" panose="020B0200000000000000" pitchFamily="34" charset="-128"/>
-              </a:rPr>
-              <a:t>nullptr</a:t>
-            </a:r>
-            <a:r>
-              <a:rPr lang="ko-KR" altLang="en-US" sz="1000" dirty="0" smtClean="0">
-                <a:solidFill>
-                  <a:schemeClr val="bg1">
-                    <a:lumMod val="95000"/>
-                  </a:schemeClr>
-                </a:solidFill>
-                <a:latin typeface="Noto Sans KR Medium" panose="020B0200000000000000" pitchFamily="34" charset="-128"/>
-                <a:ea typeface="Noto Sans KR Medium" panose="020B0200000000000000" pitchFamily="34" charset="-128"/>
-              </a:rPr>
-              <a:t>이 반환된 것</a:t>
-            </a:r>
-            <a:endParaRPr lang="en-US" altLang="ko-KR" sz="1000" dirty="0" smtClean="0">
+              <a:t>.</a:t>
+            </a:r>
+          </a:p>
+          <a:p>
+            <a:endParaRPr lang="en-US" altLang="ko-KR" sz="1000" dirty="0">
               <a:solidFill>
                 <a:schemeClr val="bg1">
                   <a:lumMod val="95000"/>
@@ -13469,18 +13240,118 @@
               <a:ea typeface="Noto Sans KR Medium" panose="020B0200000000000000" pitchFamily="34" charset="-128"/>
             </a:endParaRPr>
           </a:p>
+          <a:p>
+            <a:r>
+              <a:rPr lang="ko-KR" altLang="en-US" sz="1000" dirty="0" smtClean="0">
+                <a:solidFill>
+                  <a:schemeClr val="bg1">
+                    <a:lumMod val="95000"/>
+                  </a:schemeClr>
+                </a:solidFill>
+                <a:latin typeface="Noto Sans KR Medium" panose="020B0200000000000000" pitchFamily="34" charset="-128"/>
+                <a:ea typeface="Noto Sans KR Medium" panose="020B0200000000000000" pitchFamily="34" charset="-128"/>
+              </a:rPr>
+              <a:t>구역 완료 이벤트가 발행되면 </a:t>
+            </a:r>
+            <a:r>
+              <a:rPr lang="en-US" altLang="ko-KR" sz="1000" dirty="0" err="1" smtClean="0">
+                <a:solidFill>
+                  <a:schemeClr val="bg1">
+                    <a:lumMod val="95000"/>
+                  </a:schemeClr>
+                </a:solidFill>
+                <a:latin typeface="Noto Sans KR Medium" panose="020B0200000000000000" pitchFamily="34" charset="-128"/>
+                <a:ea typeface="Noto Sans KR Medium" panose="020B0200000000000000" pitchFamily="34" charset="-128"/>
+              </a:rPr>
+              <a:t>GameState</a:t>
+            </a:r>
+            <a:r>
+              <a:rPr lang="ko-KR" altLang="en-US" sz="1000" dirty="0" smtClean="0">
+                <a:solidFill>
+                  <a:schemeClr val="bg1">
+                    <a:lumMod val="95000"/>
+                  </a:schemeClr>
+                </a:solidFill>
+                <a:latin typeface="Noto Sans KR Medium" panose="020B0200000000000000" pitchFamily="34" charset="-128"/>
+                <a:ea typeface="Noto Sans KR Medium" panose="020B0200000000000000" pitchFamily="34" charset="-128"/>
+              </a:rPr>
+              <a:t>에서 해당 구역을 완료처리</a:t>
+            </a:r>
+            <a:r>
+              <a:rPr lang="en-US" altLang="ko-KR" sz="1000" dirty="0" smtClean="0">
+                <a:solidFill>
+                  <a:schemeClr val="bg1">
+                    <a:lumMod val="95000"/>
+                  </a:schemeClr>
+                </a:solidFill>
+                <a:latin typeface="Noto Sans KR Medium" panose="020B0200000000000000" pitchFamily="34" charset="-128"/>
+                <a:ea typeface="Noto Sans KR Medium" panose="020B0200000000000000" pitchFamily="34" charset="-128"/>
+              </a:rPr>
+              <a:t>.</a:t>
+            </a:r>
+          </a:p>
+          <a:p>
+            <a:r>
+              <a:rPr lang="ko-KR" altLang="en-US" sz="1000" dirty="0" smtClean="0">
+                <a:solidFill>
+                  <a:schemeClr val="bg1">
+                    <a:lumMod val="95000"/>
+                  </a:schemeClr>
+                </a:solidFill>
+                <a:latin typeface="Noto Sans KR Medium" panose="020B0200000000000000" pitchFamily="34" charset="-128"/>
+                <a:ea typeface="Noto Sans KR Medium" panose="020B0200000000000000" pitchFamily="34" charset="-128"/>
+              </a:rPr>
+              <a:t>모든 구역이 완료되면 </a:t>
+            </a:r>
+            <a:r>
+              <a:rPr lang="en-US" altLang="ko-KR" sz="1000" dirty="0" err="1" smtClean="0">
+                <a:solidFill>
+                  <a:schemeClr val="bg1">
+                    <a:lumMod val="95000"/>
+                  </a:schemeClr>
+                </a:solidFill>
+                <a:latin typeface="Noto Sans KR Medium" panose="020B0200000000000000" pitchFamily="34" charset="-128"/>
+                <a:ea typeface="Noto Sans KR Medium" panose="020B0200000000000000" pitchFamily="34" charset="-128"/>
+              </a:rPr>
+              <a:t>GameMode</a:t>
+            </a:r>
+            <a:r>
+              <a:rPr lang="ko-KR" altLang="en-US" sz="1000" dirty="0" smtClean="0">
+                <a:solidFill>
+                  <a:schemeClr val="bg1">
+                    <a:lumMod val="95000"/>
+                  </a:schemeClr>
+                </a:solidFill>
+                <a:latin typeface="Noto Sans KR Medium" panose="020B0200000000000000" pitchFamily="34" charset="-128"/>
+                <a:ea typeface="Noto Sans KR Medium" panose="020B0200000000000000" pitchFamily="34" charset="-128"/>
+              </a:rPr>
+              <a:t>에서 게임 완료 처리</a:t>
+            </a:r>
+            <a:r>
+              <a:rPr lang="en-US" altLang="ko-KR" sz="1000" dirty="0" smtClean="0">
+                <a:solidFill>
+                  <a:schemeClr val="bg1">
+                    <a:lumMod val="95000"/>
+                  </a:schemeClr>
+                </a:solidFill>
+                <a:latin typeface="Noto Sans KR Medium" panose="020B0200000000000000" pitchFamily="34" charset="-128"/>
+                <a:ea typeface="Noto Sans KR Medium" panose="020B0200000000000000" pitchFamily="34" charset="-128"/>
+              </a:rPr>
+              <a:t>.</a:t>
+            </a:r>
+          </a:p>
         </p:txBody>
       </p:sp>
       <p:sp>
         <p:nvSpPr>
-          <p:cNvPr id="13" name="직사각형 12"/>
+          <p:cNvPr id="11" name="직사각형 10"/>
           <p:cNvSpPr/>
           <p:nvPr/>
         </p:nvSpPr>
         <p:spPr>
           <a:xfrm>
-            <a:off x="454274" y="4096447"/>
-            <a:ext cx="8755039" cy="400110"/>
+            <a:off x="444751" y="1234126"/>
+            <a:ext cx="2427758" cy="246221"/>
           </a:xfrm>
           <a:prstGeom prst="rect">
             <a:avLst/>
@@ -13493,244 +13364,33 @@
           <a:lstStyle/>
           <a:p>
             <a:r>
-              <a:rPr lang="ko-KR" altLang="en-US" sz="1000" dirty="0" err="1">
-                <a:solidFill>
-                  <a:schemeClr val="bg1">
-                    <a:lumMod val="95000"/>
-                  </a:schemeClr>
-                </a:solidFill>
-                <a:latin typeface="Noto Sans KR Medium" panose="020B0200000000000000" pitchFamily="34" charset="-128"/>
-                <a:ea typeface="Noto Sans KR Medium" panose="020B0200000000000000" pitchFamily="34" charset="-128"/>
-              </a:rPr>
-              <a:t>액터</a:t>
-            </a:r>
-            <a:r>
-              <a:rPr lang="ko-KR" altLang="en-US" sz="1000" dirty="0">
-                <a:solidFill>
-                  <a:schemeClr val="bg1">
-                    <a:lumMod val="95000"/>
-                  </a:schemeClr>
-                </a:solidFill>
-                <a:latin typeface="Noto Sans KR Medium" panose="020B0200000000000000" pitchFamily="34" charset="-128"/>
-                <a:ea typeface="Noto Sans KR Medium" panose="020B0200000000000000" pitchFamily="34" charset="-128"/>
-              </a:rPr>
-              <a:t> </a:t>
-            </a:r>
-            <a:r>
-              <a:rPr lang="ko-KR" altLang="en-US" sz="1000" dirty="0" err="1">
-                <a:solidFill>
-                  <a:schemeClr val="bg1">
-                    <a:lumMod val="95000"/>
-                  </a:schemeClr>
-                </a:solidFill>
-                <a:latin typeface="Noto Sans KR Medium" panose="020B0200000000000000" pitchFamily="34" charset="-128"/>
-                <a:ea typeface="Noto Sans KR Medium" panose="020B0200000000000000" pitchFamily="34" charset="-128"/>
-              </a:rPr>
-              <a:t>스폰</a:t>
-            </a:r>
-            <a:r>
-              <a:rPr lang="ko-KR" altLang="en-US" sz="1000" dirty="0">
-                <a:solidFill>
-                  <a:schemeClr val="bg1">
-                    <a:lumMod val="95000"/>
-                  </a:schemeClr>
-                </a:solidFill>
-                <a:latin typeface="Noto Sans KR Medium" panose="020B0200000000000000" pitchFamily="34" charset="-128"/>
-                <a:ea typeface="Noto Sans KR Medium" panose="020B0200000000000000" pitchFamily="34" charset="-128"/>
-              </a:rPr>
-              <a:t> 시</a:t>
-            </a:r>
-            <a:r>
-              <a:rPr lang="en-US" altLang="ko-KR" sz="1000" dirty="0">
-                <a:solidFill>
-                  <a:schemeClr val="bg1">
-                    <a:lumMod val="95000"/>
-                  </a:schemeClr>
-                </a:solidFill>
-                <a:latin typeface="Noto Sans KR Medium" panose="020B0200000000000000" pitchFamily="34" charset="-128"/>
-                <a:ea typeface="Noto Sans KR Medium" panose="020B0200000000000000" pitchFamily="34" charset="-128"/>
-              </a:rPr>
-              <a:t>, </a:t>
-            </a:r>
-            <a:r>
-              <a:rPr lang="en-US" altLang="ko-KR" sz="1000" dirty="0" err="1">
-                <a:solidFill>
-                  <a:schemeClr val="bg1">
-                    <a:lumMod val="95000"/>
-                  </a:schemeClr>
-                </a:solidFill>
-                <a:latin typeface="Noto Sans KR Medium" panose="020B0200000000000000" pitchFamily="34" charset="-128"/>
-                <a:ea typeface="Noto Sans KR Medium" panose="020B0200000000000000" pitchFamily="34" charset="-128"/>
-              </a:rPr>
-              <a:t>FActorSpawnParameters</a:t>
-            </a:r>
-            <a:r>
-              <a:rPr lang="ko-KR" altLang="en-US" sz="1000" dirty="0">
-                <a:solidFill>
-                  <a:schemeClr val="bg1">
-                    <a:lumMod val="95000"/>
-                  </a:schemeClr>
-                </a:solidFill>
-                <a:latin typeface="Noto Sans KR Medium" panose="020B0200000000000000" pitchFamily="34" charset="-128"/>
-                <a:ea typeface="Noto Sans KR Medium" panose="020B0200000000000000" pitchFamily="34" charset="-128"/>
-              </a:rPr>
-              <a:t>에 </a:t>
-            </a:r>
-            <a:r>
-              <a:rPr lang="en-US" altLang="ko-KR" sz="1000" dirty="0" err="1">
-                <a:solidFill>
-                  <a:schemeClr val="bg1">
-                    <a:lumMod val="95000"/>
-                  </a:schemeClr>
-                </a:solidFill>
-                <a:latin typeface="Noto Sans KR Medium" panose="020B0200000000000000" pitchFamily="34" charset="-128"/>
-                <a:ea typeface="Noto Sans KR Medium" panose="020B0200000000000000" pitchFamily="34" charset="-128"/>
-              </a:rPr>
-              <a:t>SpawnCollisionHandlingOverride</a:t>
-            </a:r>
-            <a:r>
-              <a:rPr lang="en-US" altLang="ko-KR" sz="1000" dirty="0">
-                <a:solidFill>
-                  <a:schemeClr val="bg1">
-                    <a:lumMod val="95000"/>
-                  </a:schemeClr>
-                </a:solidFill>
-                <a:latin typeface="Noto Sans KR Medium" panose="020B0200000000000000" pitchFamily="34" charset="-128"/>
-                <a:ea typeface="Noto Sans KR Medium" panose="020B0200000000000000" pitchFamily="34" charset="-128"/>
-              </a:rPr>
-              <a:t> </a:t>
-            </a:r>
-            <a:r>
-              <a:rPr lang="ko-KR" altLang="en-US" sz="1000" dirty="0">
-                <a:solidFill>
-                  <a:schemeClr val="bg1">
-                    <a:lumMod val="95000"/>
-                  </a:schemeClr>
-                </a:solidFill>
-                <a:latin typeface="Noto Sans KR Medium" panose="020B0200000000000000" pitchFamily="34" charset="-128"/>
-                <a:ea typeface="Noto Sans KR Medium" panose="020B0200000000000000" pitchFamily="34" charset="-128"/>
-              </a:rPr>
-              <a:t>설정을 </a:t>
-            </a:r>
-            <a:r>
-              <a:rPr lang="en-US" altLang="ko-KR" sz="1000" dirty="0" err="1">
-                <a:solidFill>
-                  <a:schemeClr val="bg1">
-                    <a:lumMod val="95000"/>
-                  </a:schemeClr>
-                </a:solidFill>
-                <a:latin typeface="Noto Sans KR Medium" panose="020B0200000000000000" pitchFamily="34" charset="-128"/>
-                <a:ea typeface="Noto Sans KR Medium" panose="020B0200000000000000" pitchFamily="34" charset="-128"/>
-              </a:rPr>
-              <a:t>AlwaysSpawn</a:t>
-            </a:r>
-            <a:r>
-              <a:rPr lang="ko-KR" altLang="en-US" sz="1000" dirty="0">
-                <a:solidFill>
-                  <a:schemeClr val="bg1">
-                    <a:lumMod val="95000"/>
-                  </a:schemeClr>
-                </a:solidFill>
-                <a:latin typeface="Noto Sans KR Medium" panose="020B0200000000000000" pitchFamily="34" charset="-128"/>
-                <a:ea typeface="Noto Sans KR Medium" panose="020B0200000000000000" pitchFamily="34" charset="-128"/>
-              </a:rPr>
-              <a:t>을 변경 후 해결</a:t>
-            </a:r>
-            <a:endParaRPr lang="en-US" altLang="ko-KR" sz="1000" dirty="0">
+              <a:rPr lang="ko-KR" altLang="en-US" sz="1000" dirty="0" smtClean="0">
+                <a:solidFill>
+                  <a:schemeClr val="bg1">
+                    <a:lumMod val="95000"/>
+                  </a:schemeClr>
+                </a:solidFill>
+                <a:latin typeface="Noto Sans KR ExtraBold" panose="020B0200000000000000" pitchFamily="34" charset="-128"/>
+                <a:ea typeface="Noto Sans KR ExtraBold" panose="020B0200000000000000" pitchFamily="34" charset="-128"/>
+              </a:rPr>
+              <a:t>이벤트 기반 진행</a:t>
+            </a:r>
+            <a:endParaRPr lang="en-US" altLang="ko-KR" sz="1000" dirty="0" smtClean="0">
               <a:solidFill>
                 <a:schemeClr val="bg1">
                   <a:lumMod val="95000"/>
                 </a:schemeClr>
               </a:solidFill>
-              <a:latin typeface="Noto Sans KR Medium" panose="020B0200000000000000" pitchFamily="34" charset="-128"/>
-              <a:ea typeface="Noto Sans KR Medium" panose="020B0200000000000000" pitchFamily="34" charset="-128"/>
+              <a:latin typeface="Noto Sans KR ExtraBold" panose="020B0200000000000000" pitchFamily="34" charset="-128"/>
+              <a:ea typeface="Noto Sans KR ExtraBold" panose="020B0200000000000000" pitchFamily="34" charset="-128"/>
             </a:endParaRPr>
-          </a:p>
-          <a:p>
-            <a:r>
-              <a:rPr lang="ko-KR" altLang="en-US" sz="1000" dirty="0" err="1">
-                <a:solidFill>
-                  <a:schemeClr val="bg1">
-                    <a:lumMod val="95000"/>
-                  </a:schemeClr>
-                </a:solidFill>
-                <a:latin typeface="Noto Sans KR Medium" panose="020B0200000000000000" pitchFamily="34" charset="-128"/>
-                <a:ea typeface="Noto Sans KR Medium" panose="020B0200000000000000" pitchFamily="34" charset="-128"/>
-              </a:rPr>
-              <a:t>스폰</a:t>
-            </a:r>
-            <a:r>
-              <a:rPr lang="ko-KR" altLang="en-US" sz="1000" dirty="0">
-                <a:solidFill>
-                  <a:schemeClr val="bg1">
-                    <a:lumMod val="95000"/>
-                  </a:schemeClr>
-                </a:solidFill>
-                <a:latin typeface="Noto Sans KR Medium" panose="020B0200000000000000" pitchFamily="34" charset="-128"/>
-                <a:ea typeface="Noto Sans KR Medium" panose="020B0200000000000000" pitchFamily="34" charset="-128"/>
-              </a:rPr>
-              <a:t> 시</a:t>
-            </a:r>
-            <a:r>
-              <a:rPr lang="en-US" altLang="ko-KR" sz="1000" dirty="0">
-                <a:solidFill>
-                  <a:schemeClr val="bg1">
-                    <a:lumMod val="95000"/>
-                  </a:schemeClr>
-                </a:solidFill>
-                <a:latin typeface="Noto Sans KR Medium" panose="020B0200000000000000" pitchFamily="34" charset="-128"/>
-                <a:ea typeface="Noto Sans KR Medium" panose="020B0200000000000000" pitchFamily="34" charset="-128"/>
-              </a:rPr>
-              <a:t>, </a:t>
-            </a:r>
-            <a:r>
-              <a:rPr lang="ko-KR" altLang="en-US" sz="1000" dirty="0">
-                <a:solidFill>
-                  <a:schemeClr val="bg1">
-                    <a:lumMod val="95000"/>
-                  </a:schemeClr>
-                </a:solidFill>
-                <a:latin typeface="Noto Sans KR Medium" panose="020B0200000000000000" pitchFamily="34" charset="-128"/>
-                <a:ea typeface="Noto Sans KR Medium" panose="020B0200000000000000" pitchFamily="34" charset="-128"/>
-              </a:rPr>
-              <a:t>충돌하거나 겹치더라도 </a:t>
-            </a:r>
-            <a:r>
-              <a:rPr lang="ko-KR" altLang="en-US" sz="1000" dirty="0" err="1">
-                <a:solidFill>
-                  <a:schemeClr val="bg1">
-                    <a:lumMod val="95000"/>
-                  </a:schemeClr>
-                </a:solidFill>
-                <a:latin typeface="Noto Sans KR Medium" panose="020B0200000000000000" pitchFamily="34" charset="-128"/>
-                <a:ea typeface="Noto Sans KR Medium" panose="020B0200000000000000" pitchFamily="34" charset="-128"/>
-              </a:rPr>
-              <a:t>스폰하도록</a:t>
-            </a:r>
-            <a:r>
-              <a:rPr lang="ko-KR" altLang="en-US" sz="1000" dirty="0">
-                <a:solidFill>
-                  <a:schemeClr val="bg1">
-                    <a:lumMod val="95000"/>
-                  </a:schemeClr>
-                </a:solidFill>
-                <a:latin typeface="Noto Sans KR Medium" panose="020B0200000000000000" pitchFamily="34" charset="-128"/>
-                <a:ea typeface="Noto Sans KR Medium" panose="020B0200000000000000" pitchFamily="34" charset="-128"/>
-              </a:rPr>
-              <a:t> 설정</a:t>
-            </a:r>
-            <a:r>
-              <a:rPr lang="ko-KR" altLang="en-US" sz="1000" dirty="0"/>
-              <a:t>인</a:t>
-            </a:r>
-            <a:endParaRPr lang="en-US" altLang="ko-KR" sz="1000" dirty="0"/>
           </a:p>
         </p:txBody>
       </p:sp>
     </p:spTree>
     <p:extLst>
       <p:ext uri="{BB962C8B-B14F-4D97-AF65-F5344CB8AC3E}">
-        <p14:creationId xmlns:p14="http://schemas.microsoft.com/office/powerpoint/2010/main" val="1674360491"/>
+        <p14:creationId xmlns:p14="http://schemas.microsoft.com/office/powerpoint/2010/main" val="2376976332"/>
       </p:ext>
     </p:extLst>
   </p:cSld>
@@ -13827,6 +13487,1477 @@
           </a:p>
         </p:txBody>
       </p:sp>
+      <p:sp>
+        <p:nvSpPr>
+          <p:cNvPr id="5" name="직사각형 4"/>
+          <p:cNvSpPr/>
+          <p:nvPr/>
+        </p:nvSpPr>
+        <p:spPr>
+          <a:xfrm>
+            <a:off x="454275" y="1234126"/>
+            <a:ext cx="1072730" cy="246221"/>
+          </a:xfrm>
+          <a:prstGeom prst="rect">
+            <a:avLst/>
+          </a:prstGeom>
+        </p:spPr>
+        <p:txBody>
+          <a:bodyPr wrap="none">
+            <a:spAutoFit/>
+          </a:bodyPr>
+          <a:lstStyle/>
+          <a:p>
+            <a:r>
+              <a:rPr lang="ko-KR" altLang="en-US" sz="1000" dirty="0" smtClean="0">
+                <a:solidFill>
+                  <a:schemeClr val="bg1">
+                    <a:lumMod val="95000"/>
+                  </a:schemeClr>
+                </a:solidFill>
+                <a:latin typeface="Noto Sans KR ExtraBold" panose="020B0200000000000000" pitchFamily="34" charset="-128"/>
+                <a:ea typeface="Noto Sans KR ExtraBold" panose="020B0200000000000000" pitchFamily="34" charset="-128"/>
+              </a:rPr>
+              <a:t>문제 발생과 원인</a:t>
+            </a:r>
+            <a:endParaRPr lang="en-US" altLang="ko-KR" sz="1000" dirty="0">
+              <a:solidFill>
+                <a:schemeClr val="bg1">
+                  <a:lumMod val="95000"/>
+                </a:schemeClr>
+              </a:solidFill>
+              <a:latin typeface="Noto Sans KR ExtraBold" panose="020B0200000000000000" pitchFamily="34" charset="-128"/>
+              <a:ea typeface="Noto Sans KR ExtraBold" panose="020B0200000000000000" pitchFamily="34" charset="-128"/>
+            </a:endParaRPr>
+          </a:p>
+        </p:txBody>
+      </p:sp>
+      <p:cxnSp>
+        <p:nvCxnSpPr>
+          <p:cNvPr id="19" name="직선 연결선 18"/>
+          <p:cNvCxnSpPr/>
+          <p:nvPr/>
+        </p:nvCxnSpPr>
+        <p:spPr>
+          <a:xfrm>
+            <a:off x="540000" y="710906"/>
+            <a:ext cx="11112000" cy="0"/>
+          </a:xfrm>
+          <a:prstGeom prst="line">
+            <a:avLst/>
+          </a:prstGeom>
+          <a:ln>
+            <a:solidFill>
+              <a:schemeClr val="bg1">
+                <a:lumMod val="65000"/>
+              </a:schemeClr>
+            </a:solidFill>
+          </a:ln>
+        </p:spPr>
+        <p:style>
+          <a:lnRef idx="1">
+            <a:schemeClr val="accent1"/>
+          </a:lnRef>
+          <a:fillRef idx="0">
+            <a:schemeClr val="accent1"/>
+          </a:fillRef>
+          <a:effectRef idx="0">
+            <a:schemeClr val="accent1"/>
+          </a:effectRef>
+          <a:fontRef idx="minor">
+            <a:schemeClr val="tx1"/>
+          </a:fontRef>
+        </p:style>
+      </p:cxnSp>
+      <p:sp>
+        <p:nvSpPr>
+          <p:cNvPr id="22" name="직사각형 21"/>
+          <p:cNvSpPr/>
+          <p:nvPr/>
+        </p:nvSpPr>
+        <p:spPr>
+          <a:xfrm>
+            <a:off x="454275" y="710906"/>
+            <a:ext cx="2776722" cy="523220"/>
+          </a:xfrm>
+          <a:prstGeom prst="rect">
+            <a:avLst/>
+          </a:prstGeom>
+        </p:spPr>
+        <p:txBody>
+          <a:bodyPr wrap="none">
+            <a:spAutoFit/>
+          </a:bodyPr>
+          <a:lstStyle/>
+          <a:p>
+            <a:r>
+              <a:rPr lang="en-US" altLang="ko-KR" sz="1000" dirty="0" smtClean="0">
+                <a:solidFill>
+                  <a:schemeClr val="bg1">
+                    <a:lumMod val="95000"/>
+                  </a:schemeClr>
+                </a:solidFill>
+                <a:latin typeface="Noto Sans KR ExtraBold" panose="020B0200000000000000" pitchFamily="34" charset="-128"/>
+                <a:ea typeface="Noto Sans KR ExtraBold" panose="020B0200000000000000" pitchFamily="34" charset="-128"/>
+              </a:rPr>
+              <a:t/>
+            </a:r>
+            <a:br>
+              <a:rPr lang="en-US" altLang="ko-KR" sz="1000" dirty="0" smtClean="0">
+                <a:solidFill>
+                  <a:schemeClr val="bg1">
+                    <a:lumMod val="95000"/>
+                  </a:schemeClr>
+                </a:solidFill>
+                <a:latin typeface="Noto Sans KR ExtraBold" panose="020B0200000000000000" pitchFamily="34" charset="-128"/>
+                <a:ea typeface="Noto Sans KR ExtraBold" panose="020B0200000000000000" pitchFamily="34" charset="-128"/>
+              </a:rPr>
+            </a:br>
+            <a:r>
+              <a:rPr lang="ko-KR" altLang="en-US" dirty="0" err="1" smtClean="0">
+                <a:solidFill>
+                  <a:schemeClr val="bg1">
+                    <a:lumMod val="95000"/>
+                  </a:schemeClr>
+                </a:solidFill>
+                <a:latin typeface="Noto Sans KR ExtraBold" panose="020B0200000000000000" pitchFamily="34" charset="-128"/>
+                <a:ea typeface="Noto Sans KR ExtraBold" panose="020B0200000000000000" pitchFamily="34" charset="-128"/>
+              </a:rPr>
+              <a:t>랜드</a:t>
+            </a:r>
+            <a:r>
+              <a:rPr lang="ko-KR" altLang="en-US" dirty="0" smtClean="0">
+                <a:solidFill>
+                  <a:schemeClr val="bg1">
+                    <a:lumMod val="95000"/>
+                  </a:schemeClr>
+                </a:solidFill>
+                <a:latin typeface="Noto Sans KR ExtraBold" panose="020B0200000000000000" pitchFamily="34" charset="-128"/>
+                <a:ea typeface="Noto Sans KR ExtraBold" panose="020B0200000000000000" pitchFamily="34" charset="-128"/>
+              </a:rPr>
+              <a:t> </a:t>
+            </a:r>
+            <a:r>
+              <a:rPr lang="ko-KR" altLang="en-US" dirty="0" err="1" smtClean="0">
+                <a:solidFill>
+                  <a:schemeClr val="bg1">
+                    <a:lumMod val="95000"/>
+                  </a:schemeClr>
+                </a:solidFill>
+                <a:latin typeface="Noto Sans KR ExtraBold" panose="020B0200000000000000" pitchFamily="34" charset="-128"/>
+                <a:ea typeface="Noto Sans KR ExtraBold" panose="020B0200000000000000" pitchFamily="34" charset="-128"/>
+              </a:rPr>
+              <a:t>스케이프</a:t>
+            </a:r>
+            <a:r>
+              <a:rPr lang="ko-KR" altLang="en-US" dirty="0" smtClean="0">
+                <a:solidFill>
+                  <a:schemeClr val="bg1">
+                    <a:lumMod val="95000"/>
+                  </a:schemeClr>
+                </a:solidFill>
+                <a:latin typeface="Noto Sans KR ExtraBold" panose="020B0200000000000000" pitchFamily="34" charset="-128"/>
+                <a:ea typeface="Noto Sans KR ExtraBold" panose="020B0200000000000000" pitchFamily="34" charset="-128"/>
+              </a:rPr>
+              <a:t> 적용 후 에러</a:t>
+            </a:r>
+            <a:r>
+              <a:rPr lang="en-US" altLang="ko-KR" dirty="0" smtClean="0">
+                <a:solidFill>
+                  <a:schemeClr val="bg1">
+                    <a:lumMod val="95000"/>
+                  </a:schemeClr>
+                </a:solidFill>
+                <a:latin typeface="Noto Sans KR ExtraBold" panose="020B0200000000000000" pitchFamily="34" charset="-128"/>
+                <a:ea typeface="Noto Sans KR ExtraBold" panose="020B0200000000000000" pitchFamily="34" charset="-128"/>
+              </a:rPr>
+              <a:t> </a:t>
+            </a:r>
+            <a:endParaRPr lang="ko-KR" altLang="en-US" dirty="0">
+              <a:solidFill>
+                <a:schemeClr val="bg1">
+                  <a:lumMod val="95000"/>
+                </a:schemeClr>
+              </a:solidFill>
+              <a:latin typeface="Noto Sans KR ExtraBold" panose="020B0200000000000000" pitchFamily="34" charset="-128"/>
+              <a:ea typeface="Noto Sans KR ExtraBold" panose="020B0200000000000000" pitchFamily="34" charset="-128"/>
+            </a:endParaRPr>
+          </a:p>
+        </p:txBody>
+      </p:sp>
+      <p:sp>
+        <p:nvSpPr>
+          <p:cNvPr id="9" name="직사각형 8"/>
+          <p:cNvSpPr/>
+          <p:nvPr/>
+        </p:nvSpPr>
+        <p:spPr>
+          <a:xfrm>
+            <a:off x="454275" y="3850226"/>
+            <a:ext cx="688009" cy="246221"/>
+          </a:xfrm>
+          <a:prstGeom prst="rect">
+            <a:avLst/>
+          </a:prstGeom>
+        </p:spPr>
+        <p:txBody>
+          <a:bodyPr wrap="none">
+            <a:spAutoFit/>
+          </a:bodyPr>
+          <a:lstStyle/>
+          <a:p>
+            <a:r>
+              <a:rPr lang="ko-KR" altLang="en-US" sz="1000" dirty="0">
+                <a:solidFill>
+                  <a:schemeClr val="bg1">
+                    <a:lumMod val="95000"/>
+                  </a:schemeClr>
+                </a:solidFill>
+                <a:latin typeface="Noto Sans KR ExtraBold" panose="020B0200000000000000" pitchFamily="34" charset="-128"/>
+                <a:ea typeface="Noto Sans KR ExtraBold" panose="020B0200000000000000" pitchFamily="34" charset="-128"/>
+              </a:rPr>
+              <a:t>해결 방법</a:t>
+            </a:r>
+            <a:endParaRPr lang="en-US" altLang="ko-KR" sz="1000" dirty="0">
+              <a:solidFill>
+                <a:schemeClr val="bg1">
+                  <a:lumMod val="95000"/>
+                </a:schemeClr>
+              </a:solidFill>
+              <a:latin typeface="Noto Sans KR ExtraBold" panose="020B0200000000000000" pitchFamily="34" charset="-128"/>
+              <a:ea typeface="Noto Sans KR ExtraBold" panose="020B0200000000000000" pitchFamily="34" charset="-128"/>
+            </a:endParaRPr>
+          </a:p>
+        </p:txBody>
+      </p:sp>
+      <p:sp>
+        <p:nvSpPr>
+          <p:cNvPr id="10" name="직사각형 9"/>
+          <p:cNvSpPr/>
+          <p:nvPr/>
+        </p:nvSpPr>
+        <p:spPr>
+          <a:xfrm>
+            <a:off x="454275" y="1480347"/>
+            <a:ext cx="8755039" cy="2246769"/>
+          </a:xfrm>
+          <a:prstGeom prst="rect">
+            <a:avLst/>
+          </a:prstGeom>
+        </p:spPr>
+        <p:txBody>
+          <a:bodyPr wrap="square">
+            <a:spAutoFit/>
+          </a:bodyPr>
+          <a:lstStyle/>
+          <a:p>
+            <a:r>
+              <a:rPr lang="ko-KR" altLang="en-US" sz="1000" dirty="0" smtClean="0">
+                <a:solidFill>
+                  <a:schemeClr val="bg1">
+                    <a:lumMod val="95000"/>
+                  </a:schemeClr>
+                </a:solidFill>
+                <a:latin typeface="Noto Sans KR Medium" panose="020B0200000000000000" pitchFamily="34" charset="-128"/>
+                <a:ea typeface="Noto Sans KR Medium" panose="020B0200000000000000" pitchFamily="34" charset="-128"/>
+              </a:rPr>
+              <a:t>문제 발생 배경</a:t>
+            </a:r>
+            <a:endParaRPr lang="en-US" altLang="ko-KR" sz="1000" dirty="0" smtClean="0">
+              <a:solidFill>
+                <a:schemeClr val="bg1">
+                  <a:lumMod val="95000"/>
+                </a:schemeClr>
+              </a:solidFill>
+              <a:latin typeface="Noto Sans KR Medium" panose="020B0200000000000000" pitchFamily="34" charset="-128"/>
+              <a:ea typeface="Noto Sans KR Medium" panose="020B0200000000000000" pitchFamily="34" charset="-128"/>
+            </a:endParaRPr>
+          </a:p>
+          <a:p>
+            <a:r>
+              <a:rPr lang="ko-KR" altLang="en-US" sz="1000" dirty="0" smtClean="0">
+                <a:solidFill>
+                  <a:schemeClr val="bg1">
+                    <a:lumMod val="95000"/>
+                  </a:schemeClr>
+                </a:solidFill>
+                <a:latin typeface="Noto Sans KR Medium" panose="020B0200000000000000" pitchFamily="34" charset="-128"/>
+                <a:ea typeface="Noto Sans KR Medium" panose="020B0200000000000000" pitchFamily="34" charset="-128"/>
+              </a:rPr>
+              <a:t>플레이어와 </a:t>
+            </a:r>
+            <a:r>
+              <a:rPr lang="ko-KR" altLang="en-US" sz="1000" dirty="0" err="1" smtClean="0">
+                <a:solidFill>
+                  <a:schemeClr val="bg1">
+                    <a:lumMod val="95000"/>
+                  </a:schemeClr>
+                </a:solidFill>
+                <a:latin typeface="Noto Sans KR Medium" panose="020B0200000000000000" pitchFamily="34" charset="-128"/>
+                <a:ea typeface="Noto Sans KR Medium" panose="020B0200000000000000" pitchFamily="34" charset="-128"/>
+              </a:rPr>
+              <a:t>몬스터</a:t>
+            </a:r>
+            <a:r>
+              <a:rPr lang="ko-KR" altLang="en-US" sz="1000" dirty="0" smtClean="0">
+                <a:solidFill>
+                  <a:schemeClr val="bg1">
+                    <a:lumMod val="95000"/>
+                  </a:schemeClr>
+                </a:solidFill>
+                <a:latin typeface="Noto Sans KR Medium" panose="020B0200000000000000" pitchFamily="34" charset="-128"/>
+                <a:ea typeface="Noto Sans KR Medium" panose="020B0200000000000000" pitchFamily="34" charset="-128"/>
+              </a:rPr>
+              <a:t> 기반 기능 구현 후</a:t>
+            </a:r>
+            <a:r>
+              <a:rPr lang="en-US" altLang="ko-KR" sz="1000" dirty="0" smtClean="0">
+                <a:solidFill>
+                  <a:schemeClr val="bg1">
+                    <a:lumMod val="95000"/>
+                  </a:schemeClr>
+                </a:solidFill>
+                <a:latin typeface="Noto Sans KR Medium" panose="020B0200000000000000" pitchFamily="34" charset="-128"/>
+                <a:ea typeface="Noto Sans KR Medium" panose="020B0200000000000000" pitchFamily="34" charset="-128"/>
+              </a:rPr>
+              <a:t>, </a:t>
+            </a:r>
+            <a:r>
+              <a:rPr lang="ko-KR" altLang="en-US" sz="1000" dirty="0" smtClean="0">
+                <a:solidFill>
+                  <a:schemeClr val="bg1">
+                    <a:lumMod val="95000"/>
+                  </a:schemeClr>
+                </a:solidFill>
+                <a:latin typeface="Noto Sans KR Medium" panose="020B0200000000000000" pitchFamily="34" charset="-128"/>
+                <a:ea typeface="Noto Sans KR Medium" panose="020B0200000000000000" pitchFamily="34" charset="-128"/>
+              </a:rPr>
+              <a:t>게임을 진행하기 위한</a:t>
+            </a:r>
+            <a:r>
+              <a:rPr lang="en-US" altLang="ko-KR" sz="1000" dirty="0" smtClean="0">
+                <a:solidFill>
+                  <a:schemeClr val="bg1">
+                    <a:lumMod val="95000"/>
+                  </a:schemeClr>
+                </a:solidFill>
+                <a:latin typeface="Noto Sans KR Medium" panose="020B0200000000000000" pitchFamily="34" charset="-128"/>
+                <a:ea typeface="Noto Sans KR Medium" panose="020B0200000000000000" pitchFamily="34" charset="-128"/>
+              </a:rPr>
+              <a:t> </a:t>
+            </a:r>
+            <a:r>
+              <a:rPr lang="ko-KR" altLang="en-US" sz="1000" dirty="0" smtClean="0">
+                <a:solidFill>
+                  <a:schemeClr val="bg1">
+                    <a:lumMod val="95000"/>
+                  </a:schemeClr>
+                </a:solidFill>
+                <a:latin typeface="Noto Sans KR Medium" panose="020B0200000000000000" pitchFamily="34" charset="-128"/>
+                <a:ea typeface="Noto Sans KR Medium" panose="020B0200000000000000" pitchFamily="34" charset="-128"/>
+              </a:rPr>
+              <a:t>레벨이 필요했고</a:t>
+            </a:r>
+            <a:endParaRPr lang="en-US" altLang="ko-KR" sz="1000" dirty="0" smtClean="0">
+              <a:solidFill>
+                <a:schemeClr val="bg1">
+                  <a:lumMod val="95000"/>
+                </a:schemeClr>
+              </a:solidFill>
+              <a:latin typeface="Noto Sans KR Medium" panose="020B0200000000000000" pitchFamily="34" charset="-128"/>
+              <a:ea typeface="Noto Sans KR Medium" panose="020B0200000000000000" pitchFamily="34" charset="-128"/>
+            </a:endParaRPr>
+          </a:p>
+          <a:p>
+            <a:r>
+              <a:rPr lang="ko-KR" altLang="en-US" sz="1000" dirty="0" err="1" smtClean="0">
+                <a:solidFill>
+                  <a:schemeClr val="bg1">
+                    <a:lumMod val="95000"/>
+                  </a:schemeClr>
+                </a:solidFill>
+                <a:latin typeface="Noto Sans KR Medium" panose="020B0200000000000000" pitchFamily="34" charset="-128"/>
+                <a:ea typeface="Noto Sans KR Medium" panose="020B0200000000000000" pitchFamily="34" charset="-128"/>
+              </a:rPr>
+              <a:t>랜드</a:t>
+            </a:r>
+            <a:r>
+              <a:rPr lang="ko-KR" altLang="en-US" sz="1000" dirty="0" smtClean="0">
+                <a:solidFill>
+                  <a:schemeClr val="bg1">
+                    <a:lumMod val="95000"/>
+                  </a:schemeClr>
+                </a:solidFill>
+                <a:latin typeface="Noto Sans KR Medium" panose="020B0200000000000000" pitchFamily="34" charset="-128"/>
+                <a:ea typeface="Noto Sans KR Medium" panose="020B0200000000000000" pitchFamily="34" charset="-128"/>
+              </a:rPr>
+              <a:t> </a:t>
+            </a:r>
+            <a:r>
+              <a:rPr lang="ko-KR" altLang="en-US" sz="1000" dirty="0" err="1" smtClean="0">
+                <a:solidFill>
+                  <a:schemeClr val="bg1">
+                    <a:lumMod val="95000"/>
+                  </a:schemeClr>
+                </a:solidFill>
+                <a:latin typeface="Noto Sans KR Medium" panose="020B0200000000000000" pitchFamily="34" charset="-128"/>
+                <a:ea typeface="Noto Sans KR Medium" panose="020B0200000000000000" pitchFamily="34" charset="-128"/>
+              </a:rPr>
+              <a:t>스케이프를</a:t>
+            </a:r>
+            <a:r>
+              <a:rPr lang="ko-KR" altLang="en-US" sz="1000" dirty="0" smtClean="0">
+                <a:solidFill>
+                  <a:schemeClr val="bg1">
+                    <a:lumMod val="95000"/>
+                  </a:schemeClr>
+                </a:solidFill>
+                <a:latin typeface="Noto Sans KR Medium" panose="020B0200000000000000" pitchFamily="34" charset="-128"/>
+                <a:ea typeface="Noto Sans KR Medium" panose="020B0200000000000000" pitchFamily="34" charset="-128"/>
+              </a:rPr>
+              <a:t> 가지고 레벨을 만들어 테스트하던 도중 에러 발생</a:t>
+            </a:r>
+            <a:endParaRPr lang="en-US" altLang="ko-KR" sz="1000" dirty="0" smtClean="0">
+              <a:solidFill>
+                <a:schemeClr val="bg1">
+                  <a:lumMod val="95000"/>
+                </a:schemeClr>
+              </a:solidFill>
+              <a:latin typeface="Noto Sans KR Medium" panose="020B0200000000000000" pitchFamily="34" charset="-128"/>
+              <a:ea typeface="Noto Sans KR Medium" panose="020B0200000000000000" pitchFamily="34" charset="-128"/>
+            </a:endParaRPr>
+          </a:p>
+          <a:p>
+            <a:endParaRPr lang="en-US" altLang="ko-KR" sz="1000" dirty="0">
+              <a:solidFill>
+                <a:schemeClr val="bg1">
+                  <a:lumMod val="95000"/>
+                </a:schemeClr>
+              </a:solidFill>
+              <a:latin typeface="Noto Sans KR Medium" panose="020B0200000000000000" pitchFamily="34" charset="-128"/>
+              <a:ea typeface="Noto Sans KR Medium" panose="020B0200000000000000" pitchFamily="34" charset="-128"/>
+            </a:endParaRPr>
+          </a:p>
+          <a:p>
+            <a:endParaRPr lang="en-US" altLang="ko-KR" sz="1000" dirty="0" smtClean="0">
+              <a:solidFill>
+                <a:schemeClr val="bg1">
+                  <a:lumMod val="95000"/>
+                </a:schemeClr>
+              </a:solidFill>
+              <a:latin typeface="Noto Sans KR Medium" panose="020B0200000000000000" pitchFamily="34" charset="-128"/>
+              <a:ea typeface="Noto Sans KR Medium" panose="020B0200000000000000" pitchFamily="34" charset="-128"/>
+            </a:endParaRPr>
+          </a:p>
+          <a:p>
+            <a:r>
+              <a:rPr lang="ko-KR" altLang="en-US" sz="1000" dirty="0" smtClean="0">
+                <a:solidFill>
+                  <a:schemeClr val="bg1">
+                    <a:lumMod val="95000"/>
+                  </a:schemeClr>
+                </a:solidFill>
+                <a:latin typeface="Noto Sans KR Medium" panose="020B0200000000000000" pitchFamily="34" charset="-128"/>
+                <a:ea typeface="Noto Sans KR Medium" panose="020B0200000000000000" pitchFamily="34" charset="-128"/>
+              </a:rPr>
+              <a:t>원인 분석</a:t>
+            </a:r>
+            <a:endParaRPr lang="en-US" altLang="ko-KR" sz="1000" dirty="0" smtClean="0">
+              <a:solidFill>
+                <a:schemeClr val="bg1">
+                  <a:lumMod val="95000"/>
+                </a:schemeClr>
+              </a:solidFill>
+              <a:latin typeface="Noto Sans KR Medium" panose="020B0200000000000000" pitchFamily="34" charset="-128"/>
+              <a:ea typeface="Noto Sans KR Medium" panose="020B0200000000000000" pitchFamily="34" charset="-128"/>
+            </a:endParaRPr>
+          </a:p>
+          <a:p>
+            <a:r>
+              <a:rPr lang="ko-KR" altLang="en-US" sz="1000" dirty="0" err="1" smtClean="0">
+                <a:solidFill>
+                  <a:schemeClr val="bg1">
+                    <a:lumMod val="95000"/>
+                  </a:schemeClr>
+                </a:solidFill>
+                <a:latin typeface="Noto Sans KR Medium" panose="020B0200000000000000" pitchFamily="34" charset="-128"/>
+                <a:ea typeface="Noto Sans KR Medium" panose="020B0200000000000000" pitchFamily="34" charset="-128"/>
+              </a:rPr>
+              <a:t>몬스터</a:t>
+            </a:r>
+            <a:r>
+              <a:rPr lang="ko-KR" altLang="en-US" sz="1000" dirty="0" smtClean="0">
+                <a:solidFill>
+                  <a:schemeClr val="bg1">
+                    <a:lumMod val="95000"/>
+                  </a:schemeClr>
+                </a:solidFill>
+                <a:latin typeface="Noto Sans KR Medium" panose="020B0200000000000000" pitchFamily="34" charset="-128"/>
+                <a:ea typeface="Noto Sans KR Medium" panose="020B0200000000000000" pitchFamily="34" charset="-128"/>
+              </a:rPr>
+              <a:t> </a:t>
+            </a:r>
+            <a:r>
+              <a:rPr lang="ko-KR" altLang="en-US" sz="1000" dirty="0" err="1" smtClean="0">
+                <a:solidFill>
+                  <a:schemeClr val="bg1">
+                    <a:lumMod val="95000"/>
+                  </a:schemeClr>
+                </a:solidFill>
+                <a:latin typeface="Noto Sans KR Medium" panose="020B0200000000000000" pitchFamily="34" charset="-128"/>
+                <a:ea typeface="Noto Sans KR Medium" panose="020B0200000000000000" pitchFamily="34" charset="-128"/>
+              </a:rPr>
+              <a:t>액터를</a:t>
+            </a:r>
+            <a:r>
+              <a:rPr lang="ko-KR" altLang="en-US" sz="1000" dirty="0" smtClean="0">
+                <a:solidFill>
+                  <a:schemeClr val="bg1">
+                    <a:lumMod val="95000"/>
+                  </a:schemeClr>
+                </a:solidFill>
+                <a:latin typeface="Noto Sans KR Medium" panose="020B0200000000000000" pitchFamily="34" charset="-128"/>
+                <a:ea typeface="Noto Sans KR Medium" panose="020B0200000000000000" pitchFamily="34" charset="-128"/>
+              </a:rPr>
+              <a:t> </a:t>
+            </a:r>
+            <a:r>
+              <a:rPr lang="ko-KR" altLang="en-US" sz="1000" dirty="0" err="1" smtClean="0">
+                <a:solidFill>
+                  <a:schemeClr val="bg1">
+                    <a:lumMod val="95000"/>
+                  </a:schemeClr>
+                </a:solidFill>
+                <a:latin typeface="Noto Sans KR Medium" panose="020B0200000000000000" pitchFamily="34" charset="-128"/>
+                <a:ea typeface="Noto Sans KR Medium" panose="020B0200000000000000" pitchFamily="34" charset="-128"/>
+              </a:rPr>
+              <a:t>스폰</a:t>
+            </a:r>
+            <a:r>
+              <a:rPr lang="ko-KR" altLang="en-US" sz="1000" dirty="0" smtClean="0">
+                <a:solidFill>
+                  <a:schemeClr val="bg1">
+                    <a:lumMod val="95000"/>
+                  </a:schemeClr>
+                </a:solidFill>
+                <a:latin typeface="Noto Sans KR Medium" panose="020B0200000000000000" pitchFamily="34" charset="-128"/>
+                <a:ea typeface="Noto Sans KR Medium" panose="020B0200000000000000" pitchFamily="34" charset="-128"/>
+              </a:rPr>
+              <a:t> 시</a:t>
+            </a:r>
+            <a:r>
+              <a:rPr lang="en-US" altLang="ko-KR" sz="1000" dirty="0" smtClean="0">
+                <a:solidFill>
+                  <a:schemeClr val="bg1">
+                    <a:lumMod val="95000"/>
+                  </a:schemeClr>
+                </a:solidFill>
+                <a:latin typeface="Noto Sans KR Medium" panose="020B0200000000000000" pitchFamily="34" charset="-128"/>
+                <a:ea typeface="Noto Sans KR Medium" panose="020B0200000000000000" pitchFamily="34" charset="-128"/>
+              </a:rPr>
+              <a:t>, </a:t>
+            </a:r>
+            <a:r>
+              <a:rPr lang="en-US" altLang="ko-KR" sz="1000" dirty="0" err="1" smtClean="0">
+                <a:solidFill>
+                  <a:schemeClr val="bg1">
+                    <a:lumMod val="95000"/>
+                  </a:schemeClr>
+                </a:solidFill>
+                <a:latin typeface="Noto Sans KR Medium" panose="020B0200000000000000" pitchFamily="34" charset="-128"/>
+                <a:ea typeface="Noto Sans KR Medium" panose="020B0200000000000000" pitchFamily="34" charset="-128"/>
+              </a:rPr>
+              <a:t>nullptr</a:t>
+            </a:r>
+            <a:r>
+              <a:rPr lang="en-US" altLang="ko-KR" sz="1000" dirty="0" smtClean="0">
+                <a:solidFill>
+                  <a:schemeClr val="bg1">
+                    <a:lumMod val="95000"/>
+                  </a:schemeClr>
+                </a:solidFill>
+                <a:latin typeface="Noto Sans KR Medium" panose="020B0200000000000000" pitchFamily="34" charset="-128"/>
+                <a:ea typeface="Noto Sans KR Medium" panose="020B0200000000000000" pitchFamily="34" charset="-128"/>
+              </a:rPr>
+              <a:t> </a:t>
+            </a:r>
+            <a:r>
+              <a:rPr lang="ko-KR" altLang="en-US" sz="1000" dirty="0" smtClean="0">
+                <a:solidFill>
+                  <a:schemeClr val="bg1">
+                    <a:lumMod val="95000"/>
+                  </a:schemeClr>
+                </a:solidFill>
+                <a:latin typeface="Noto Sans KR Medium" panose="020B0200000000000000" pitchFamily="34" charset="-128"/>
+                <a:ea typeface="Noto Sans KR Medium" panose="020B0200000000000000" pitchFamily="34" charset="-128"/>
+              </a:rPr>
+              <a:t>반환으로 인한 에러</a:t>
+            </a:r>
+            <a:r>
+              <a:rPr lang="en-US" altLang="ko-KR" sz="1000" dirty="0" smtClean="0">
+                <a:solidFill>
+                  <a:schemeClr val="bg1">
+                    <a:lumMod val="95000"/>
+                  </a:schemeClr>
+                </a:solidFill>
+                <a:latin typeface="Noto Sans KR Medium" panose="020B0200000000000000" pitchFamily="34" charset="-128"/>
+                <a:ea typeface="Noto Sans KR Medium" panose="020B0200000000000000" pitchFamily="34" charset="-128"/>
+              </a:rPr>
+              <a:t>.</a:t>
+            </a:r>
+          </a:p>
+          <a:p>
+            <a:r>
+              <a:rPr lang="ko-KR" altLang="en-US" sz="1000" dirty="0" smtClean="0">
+                <a:solidFill>
+                  <a:schemeClr val="bg1">
+                    <a:lumMod val="95000"/>
+                  </a:schemeClr>
+                </a:solidFill>
+                <a:latin typeface="Noto Sans KR Medium" panose="020B0200000000000000" pitchFamily="34" charset="-128"/>
+                <a:ea typeface="Noto Sans KR Medium" panose="020B0200000000000000" pitchFamily="34" charset="-128"/>
+              </a:rPr>
+              <a:t>기존 테스트에 쓰던 레벨에선 발생하지 않는 것을 확인</a:t>
+            </a:r>
+            <a:r>
+              <a:rPr lang="en-US" altLang="ko-KR" sz="1000" dirty="0" smtClean="0">
+                <a:solidFill>
+                  <a:schemeClr val="bg1">
+                    <a:lumMod val="95000"/>
+                  </a:schemeClr>
+                </a:solidFill>
+                <a:latin typeface="Noto Sans KR Medium" panose="020B0200000000000000" pitchFamily="34" charset="-128"/>
+                <a:ea typeface="Noto Sans KR Medium" panose="020B0200000000000000" pitchFamily="34" charset="-128"/>
+              </a:rPr>
+              <a:t>.</a:t>
+            </a:r>
+          </a:p>
+          <a:p>
+            <a:r>
+              <a:rPr lang="ko-KR" altLang="en-US" sz="1000" dirty="0" smtClean="0">
+                <a:solidFill>
+                  <a:schemeClr val="bg1">
+                    <a:lumMod val="95000"/>
+                  </a:schemeClr>
+                </a:solidFill>
+                <a:latin typeface="Noto Sans KR Medium" panose="020B0200000000000000" pitchFamily="34" charset="-128"/>
+                <a:ea typeface="Noto Sans KR Medium" panose="020B0200000000000000" pitchFamily="34" charset="-128"/>
+              </a:rPr>
+              <a:t>새로 </a:t>
+            </a:r>
+            <a:r>
+              <a:rPr lang="ko-KR" altLang="en-US" sz="1000" dirty="0">
+                <a:solidFill>
+                  <a:schemeClr val="bg1">
+                    <a:lumMod val="95000"/>
+                  </a:schemeClr>
+                </a:solidFill>
+                <a:latin typeface="Noto Sans KR Medium" panose="020B0200000000000000" pitchFamily="34" charset="-128"/>
+                <a:ea typeface="Noto Sans KR Medium" panose="020B0200000000000000" pitchFamily="34" charset="-128"/>
+              </a:rPr>
+              <a:t>작업 중인 </a:t>
+            </a:r>
+            <a:r>
+              <a:rPr lang="ko-KR" altLang="en-US" sz="1000" dirty="0" smtClean="0">
+                <a:solidFill>
+                  <a:schemeClr val="bg1">
+                    <a:lumMod val="95000"/>
+                  </a:schemeClr>
+                </a:solidFill>
+                <a:latin typeface="Noto Sans KR Medium" panose="020B0200000000000000" pitchFamily="34" charset="-128"/>
+                <a:ea typeface="Noto Sans KR Medium" panose="020B0200000000000000" pitchFamily="34" charset="-128"/>
+              </a:rPr>
+              <a:t>레벨과의 차이점이 </a:t>
+            </a:r>
+            <a:r>
+              <a:rPr lang="ko-KR" altLang="en-US" sz="1000" dirty="0" err="1" smtClean="0">
+                <a:solidFill>
+                  <a:schemeClr val="bg1">
+                    <a:lumMod val="95000"/>
+                  </a:schemeClr>
+                </a:solidFill>
+                <a:latin typeface="Noto Sans KR Medium" panose="020B0200000000000000" pitchFamily="34" charset="-128"/>
+                <a:ea typeface="Noto Sans KR Medium" panose="020B0200000000000000" pitchFamily="34" charset="-128"/>
+              </a:rPr>
+              <a:t>랜드</a:t>
+            </a:r>
+            <a:r>
+              <a:rPr lang="ko-KR" altLang="en-US" sz="1000" dirty="0" smtClean="0">
+                <a:solidFill>
+                  <a:schemeClr val="bg1">
+                    <a:lumMod val="95000"/>
+                  </a:schemeClr>
+                </a:solidFill>
+                <a:latin typeface="Noto Sans KR Medium" panose="020B0200000000000000" pitchFamily="34" charset="-128"/>
+                <a:ea typeface="Noto Sans KR Medium" panose="020B0200000000000000" pitchFamily="34" charset="-128"/>
+              </a:rPr>
+              <a:t> </a:t>
+            </a:r>
+            <a:r>
+              <a:rPr lang="ko-KR" altLang="en-US" sz="1000" dirty="0" err="1" smtClean="0">
+                <a:solidFill>
+                  <a:schemeClr val="bg1">
+                    <a:lumMod val="95000"/>
+                  </a:schemeClr>
+                </a:solidFill>
+                <a:latin typeface="Noto Sans KR Medium" panose="020B0200000000000000" pitchFamily="34" charset="-128"/>
+                <a:ea typeface="Noto Sans KR Medium" panose="020B0200000000000000" pitchFamily="34" charset="-128"/>
+              </a:rPr>
+              <a:t>스케이프</a:t>
+            </a:r>
+            <a:r>
+              <a:rPr lang="ko-KR" altLang="en-US" sz="1000" dirty="0" smtClean="0">
+                <a:solidFill>
+                  <a:schemeClr val="bg1">
+                    <a:lumMod val="95000"/>
+                  </a:schemeClr>
+                </a:solidFill>
+                <a:latin typeface="Noto Sans KR Medium" panose="020B0200000000000000" pitchFamily="34" charset="-128"/>
+                <a:ea typeface="Noto Sans KR Medium" panose="020B0200000000000000" pitchFamily="34" charset="-128"/>
+              </a:rPr>
+              <a:t> 사용 여부</a:t>
+            </a:r>
+            <a:r>
+              <a:rPr lang="en-US" altLang="ko-KR" sz="1000" dirty="0" smtClean="0">
+                <a:solidFill>
+                  <a:schemeClr val="bg1">
+                    <a:lumMod val="95000"/>
+                  </a:schemeClr>
+                </a:solidFill>
+                <a:latin typeface="Noto Sans KR Medium" panose="020B0200000000000000" pitchFamily="34" charset="-128"/>
+                <a:ea typeface="Noto Sans KR Medium" panose="020B0200000000000000" pitchFamily="34" charset="-128"/>
+              </a:rPr>
+              <a:t>.</a:t>
+            </a:r>
+          </a:p>
+          <a:p>
+            <a:endParaRPr lang="en-US" altLang="ko-KR" sz="1000" dirty="0" smtClean="0">
+              <a:solidFill>
+                <a:schemeClr val="bg1">
+                  <a:lumMod val="95000"/>
+                </a:schemeClr>
+              </a:solidFill>
+              <a:latin typeface="Noto Sans KR Medium" panose="020B0200000000000000" pitchFamily="34" charset="-128"/>
+              <a:ea typeface="Noto Sans KR Medium" panose="020B0200000000000000" pitchFamily="34" charset="-128"/>
+            </a:endParaRPr>
+          </a:p>
+          <a:p>
+            <a:r>
+              <a:rPr lang="ko-KR" altLang="en-US" sz="1000" dirty="0" smtClean="0">
+                <a:solidFill>
+                  <a:schemeClr val="bg1">
+                    <a:lumMod val="95000"/>
+                  </a:schemeClr>
+                </a:solidFill>
+                <a:latin typeface="Noto Sans KR Medium" panose="020B0200000000000000" pitchFamily="34" charset="-128"/>
+                <a:ea typeface="Noto Sans KR Medium" panose="020B0200000000000000" pitchFamily="34" charset="-128"/>
+              </a:rPr>
+              <a:t>기존 테스트 레벨에서 바닥은 넓은 </a:t>
+            </a:r>
+            <a:r>
+              <a:rPr lang="ko-KR" altLang="en-US" sz="1000" dirty="0" err="1" smtClean="0">
+                <a:solidFill>
+                  <a:schemeClr val="bg1">
+                    <a:lumMod val="95000"/>
+                  </a:schemeClr>
+                </a:solidFill>
+                <a:latin typeface="Noto Sans KR Medium" panose="020B0200000000000000" pitchFamily="34" charset="-128"/>
+                <a:ea typeface="Noto Sans KR Medium" panose="020B0200000000000000" pitchFamily="34" charset="-128"/>
+              </a:rPr>
+              <a:t>큐브를</a:t>
+            </a:r>
+            <a:r>
+              <a:rPr lang="ko-KR" altLang="en-US" sz="1000" dirty="0" smtClean="0">
+                <a:solidFill>
+                  <a:schemeClr val="bg1">
+                    <a:lumMod val="95000"/>
+                  </a:schemeClr>
+                </a:solidFill>
+                <a:latin typeface="Noto Sans KR Medium" panose="020B0200000000000000" pitchFamily="34" charset="-128"/>
+                <a:ea typeface="Noto Sans KR Medium" panose="020B0200000000000000" pitchFamily="34" charset="-128"/>
+              </a:rPr>
+              <a:t> 사용</a:t>
+            </a:r>
+            <a:r>
+              <a:rPr lang="en-US" altLang="ko-KR" sz="1000" dirty="0" smtClean="0">
+                <a:solidFill>
+                  <a:schemeClr val="bg1">
+                    <a:lumMod val="95000"/>
+                  </a:schemeClr>
+                </a:solidFill>
+                <a:latin typeface="Noto Sans KR Medium" panose="020B0200000000000000" pitchFamily="34" charset="-128"/>
+                <a:ea typeface="Noto Sans KR Medium" panose="020B0200000000000000" pitchFamily="34" charset="-128"/>
+              </a:rPr>
+              <a:t>.</a:t>
+            </a:r>
+          </a:p>
+          <a:p>
+            <a:r>
+              <a:rPr lang="ko-KR" altLang="en-US" sz="1000" dirty="0" err="1" smtClean="0">
+                <a:solidFill>
+                  <a:schemeClr val="bg1">
+                    <a:lumMod val="95000"/>
+                  </a:schemeClr>
+                </a:solidFill>
+                <a:latin typeface="Noto Sans KR Medium" panose="020B0200000000000000" pitchFamily="34" charset="-128"/>
+                <a:ea typeface="Noto Sans KR Medium" panose="020B0200000000000000" pitchFamily="34" charset="-128"/>
+              </a:rPr>
+              <a:t>랜드</a:t>
+            </a:r>
+            <a:r>
+              <a:rPr lang="ko-KR" altLang="en-US" sz="1000" dirty="0" smtClean="0">
+                <a:solidFill>
+                  <a:schemeClr val="bg1">
+                    <a:lumMod val="95000"/>
+                  </a:schemeClr>
+                </a:solidFill>
+                <a:latin typeface="Noto Sans KR Medium" panose="020B0200000000000000" pitchFamily="34" charset="-128"/>
+                <a:ea typeface="Noto Sans KR Medium" panose="020B0200000000000000" pitchFamily="34" charset="-128"/>
+              </a:rPr>
+              <a:t> </a:t>
+            </a:r>
+            <a:r>
+              <a:rPr lang="ko-KR" altLang="en-US" sz="1000" dirty="0" err="1" smtClean="0">
+                <a:solidFill>
+                  <a:schemeClr val="bg1">
+                    <a:lumMod val="95000"/>
+                  </a:schemeClr>
+                </a:solidFill>
+                <a:latin typeface="Noto Sans KR Medium" panose="020B0200000000000000" pitchFamily="34" charset="-128"/>
+                <a:ea typeface="Noto Sans KR Medium" panose="020B0200000000000000" pitchFamily="34" charset="-128"/>
+              </a:rPr>
+              <a:t>스케이프는</a:t>
+            </a:r>
+            <a:r>
+              <a:rPr lang="ko-KR" altLang="en-US" sz="1000" dirty="0" smtClean="0">
+                <a:solidFill>
+                  <a:schemeClr val="bg1">
+                    <a:lumMod val="95000"/>
+                  </a:schemeClr>
+                </a:solidFill>
+                <a:latin typeface="Noto Sans KR Medium" panose="020B0200000000000000" pitchFamily="34" charset="-128"/>
+                <a:ea typeface="Noto Sans KR Medium" panose="020B0200000000000000" pitchFamily="34" charset="-128"/>
+              </a:rPr>
+              <a:t> 일반 </a:t>
+            </a:r>
+            <a:r>
+              <a:rPr lang="ko-KR" altLang="en-US" sz="1000" dirty="0" err="1" smtClean="0">
+                <a:solidFill>
+                  <a:schemeClr val="bg1">
+                    <a:lumMod val="95000"/>
+                  </a:schemeClr>
+                </a:solidFill>
+                <a:latin typeface="Noto Sans KR Medium" panose="020B0200000000000000" pitchFamily="34" charset="-128"/>
+                <a:ea typeface="Noto Sans KR Medium" panose="020B0200000000000000" pitchFamily="34" charset="-128"/>
+              </a:rPr>
+              <a:t>스태틱</a:t>
+            </a:r>
+            <a:r>
+              <a:rPr lang="ko-KR" altLang="en-US" sz="1000" dirty="0" smtClean="0">
+                <a:solidFill>
+                  <a:schemeClr val="bg1">
+                    <a:lumMod val="95000"/>
+                  </a:schemeClr>
+                </a:solidFill>
+                <a:latin typeface="Noto Sans KR Medium" panose="020B0200000000000000" pitchFamily="34" charset="-128"/>
+                <a:ea typeface="Noto Sans KR Medium" panose="020B0200000000000000" pitchFamily="34" charset="-128"/>
+              </a:rPr>
+              <a:t> </a:t>
+            </a:r>
+            <a:r>
+              <a:rPr lang="ko-KR" altLang="en-US" sz="1000" dirty="0" err="1" smtClean="0">
+                <a:solidFill>
+                  <a:schemeClr val="bg1">
+                    <a:lumMod val="95000"/>
+                  </a:schemeClr>
+                </a:solidFill>
+                <a:latin typeface="Noto Sans KR Medium" panose="020B0200000000000000" pitchFamily="34" charset="-128"/>
+                <a:ea typeface="Noto Sans KR Medium" panose="020B0200000000000000" pitchFamily="34" charset="-128"/>
+              </a:rPr>
+              <a:t>메쉬와</a:t>
+            </a:r>
+            <a:r>
+              <a:rPr lang="ko-KR" altLang="en-US" sz="1000" dirty="0" smtClean="0">
+                <a:solidFill>
+                  <a:schemeClr val="bg1">
+                    <a:lumMod val="95000"/>
+                  </a:schemeClr>
+                </a:solidFill>
+                <a:latin typeface="Noto Sans KR Medium" panose="020B0200000000000000" pitchFamily="34" charset="-128"/>
+                <a:ea typeface="Noto Sans KR Medium" panose="020B0200000000000000" pitchFamily="34" charset="-128"/>
+              </a:rPr>
+              <a:t> 달리 충돌 설정과 </a:t>
+            </a:r>
+            <a:r>
+              <a:rPr lang="en-US" altLang="ko-KR" sz="1000" dirty="0" smtClean="0">
+                <a:solidFill>
+                  <a:schemeClr val="bg1">
+                    <a:lumMod val="95000"/>
+                  </a:schemeClr>
+                </a:solidFill>
+                <a:latin typeface="Noto Sans KR Medium" panose="020B0200000000000000" pitchFamily="34" charset="-128"/>
+                <a:ea typeface="Noto Sans KR Medium" panose="020B0200000000000000" pitchFamily="34" charset="-128"/>
+              </a:rPr>
+              <a:t>Z</a:t>
+            </a:r>
+            <a:r>
+              <a:rPr lang="ko-KR" altLang="en-US" sz="1000" dirty="0" smtClean="0">
+                <a:solidFill>
+                  <a:schemeClr val="bg1">
+                    <a:lumMod val="95000"/>
+                  </a:schemeClr>
+                </a:solidFill>
+                <a:latin typeface="Noto Sans KR Medium" panose="020B0200000000000000" pitchFamily="34" charset="-128"/>
+                <a:ea typeface="Noto Sans KR Medium" panose="020B0200000000000000" pitchFamily="34" charset="-128"/>
+              </a:rPr>
+              <a:t>축 높이 문제가 있었음</a:t>
+            </a:r>
+            <a:endParaRPr lang="en-US" altLang="ko-KR" sz="1000" dirty="0" smtClean="0">
+              <a:solidFill>
+                <a:schemeClr val="bg1">
+                  <a:lumMod val="95000"/>
+                </a:schemeClr>
+              </a:solidFill>
+              <a:latin typeface="Noto Sans KR Medium" panose="020B0200000000000000" pitchFamily="34" charset="-128"/>
+              <a:ea typeface="Noto Sans KR Medium" panose="020B0200000000000000" pitchFamily="34" charset="-128"/>
+            </a:endParaRPr>
+          </a:p>
+          <a:p>
+            <a:endParaRPr lang="en-US" altLang="ko-KR" sz="1000" dirty="0">
+              <a:solidFill>
+                <a:schemeClr val="bg1">
+                  <a:lumMod val="95000"/>
+                </a:schemeClr>
+              </a:solidFill>
+              <a:latin typeface="Noto Sans KR Medium" panose="020B0200000000000000" pitchFamily="34" charset="-128"/>
+              <a:ea typeface="Noto Sans KR Medium" panose="020B0200000000000000" pitchFamily="34" charset="-128"/>
+            </a:endParaRPr>
+          </a:p>
+          <a:p>
+            <a:r>
+              <a:rPr lang="ko-KR" altLang="en-US" sz="1000" dirty="0" err="1" smtClean="0">
+                <a:solidFill>
+                  <a:schemeClr val="bg1">
+                    <a:lumMod val="95000"/>
+                  </a:schemeClr>
+                </a:solidFill>
+                <a:latin typeface="Noto Sans KR Medium" panose="020B0200000000000000" pitchFamily="34" charset="-128"/>
+                <a:ea typeface="Noto Sans KR Medium" panose="020B0200000000000000" pitchFamily="34" charset="-128"/>
+              </a:rPr>
+              <a:t>몬스터</a:t>
+            </a:r>
+            <a:r>
+              <a:rPr lang="ko-KR" altLang="en-US" sz="1000" dirty="0" smtClean="0">
+                <a:solidFill>
+                  <a:schemeClr val="bg1">
+                    <a:lumMod val="95000"/>
+                  </a:schemeClr>
+                </a:solidFill>
+                <a:latin typeface="Noto Sans KR Medium" panose="020B0200000000000000" pitchFamily="34" charset="-128"/>
+                <a:ea typeface="Noto Sans KR Medium" panose="020B0200000000000000" pitchFamily="34" charset="-128"/>
+              </a:rPr>
+              <a:t> </a:t>
+            </a:r>
+            <a:r>
+              <a:rPr lang="ko-KR" altLang="en-US" sz="1000" dirty="0" err="1" smtClean="0">
+                <a:solidFill>
+                  <a:schemeClr val="bg1">
+                    <a:lumMod val="95000"/>
+                  </a:schemeClr>
+                </a:solidFill>
+                <a:latin typeface="Noto Sans KR Medium" panose="020B0200000000000000" pitchFamily="34" charset="-128"/>
+                <a:ea typeface="Noto Sans KR Medium" panose="020B0200000000000000" pitchFamily="34" charset="-128"/>
+              </a:rPr>
+              <a:t>액터</a:t>
+            </a:r>
+            <a:r>
+              <a:rPr lang="ko-KR" altLang="en-US" sz="1000" dirty="0" smtClean="0">
+                <a:solidFill>
+                  <a:schemeClr val="bg1">
+                    <a:lumMod val="95000"/>
+                  </a:schemeClr>
+                </a:solidFill>
+                <a:latin typeface="Noto Sans KR Medium" panose="020B0200000000000000" pitchFamily="34" charset="-128"/>
+                <a:ea typeface="Noto Sans KR Medium" panose="020B0200000000000000" pitchFamily="34" charset="-128"/>
+              </a:rPr>
+              <a:t> </a:t>
+            </a:r>
+            <a:r>
+              <a:rPr lang="ko-KR" altLang="en-US" sz="1000" dirty="0" err="1" smtClean="0">
+                <a:solidFill>
+                  <a:schemeClr val="bg1">
+                    <a:lumMod val="95000"/>
+                  </a:schemeClr>
+                </a:solidFill>
+                <a:latin typeface="Noto Sans KR Medium" panose="020B0200000000000000" pitchFamily="34" charset="-128"/>
+                <a:ea typeface="Noto Sans KR Medium" panose="020B0200000000000000" pitchFamily="34" charset="-128"/>
+              </a:rPr>
+              <a:t>스폰</a:t>
+            </a:r>
+            <a:r>
+              <a:rPr lang="ko-KR" altLang="en-US" sz="1000" dirty="0" smtClean="0">
+                <a:solidFill>
+                  <a:schemeClr val="bg1">
+                    <a:lumMod val="95000"/>
+                  </a:schemeClr>
+                </a:solidFill>
+                <a:latin typeface="Noto Sans KR Medium" panose="020B0200000000000000" pitchFamily="34" charset="-128"/>
+                <a:ea typeface="Noto Sans KR Medium" panose="020B0200000000000000" pitchFamily="34" charset="-128"/>
+              </a:rPr>
+              <a:t> 시</a:t>
+            </a:r>
+            <a:r>
+              <a:rPr lang="en-US" altLang="ko-KR" sz="1000" dirty="0" smtClean="0">
+                <a:solidFill>
+                  <a:schemeClr val="bg1">
+                    <a:lumMod val="95000"/>
+                  </a:schemeClr>
+                </a:solidFill>
+                <a:latin typeface="Noto Sans KR Medium" panose="020B0200000000000000" pitchFamily="34" charset="-128"/>
+                <a:ea typeface="Noto Sans KR Medium" panose="020B0200000000000000" pitchFamily="34" charset="-128"/>
+              </a:rPr>
+              <a:t>, </a:t>
+            </a:r>
+            <a:r>
+              <a:rPr lang="ko-KR" altLang="en-US" sz="1000" dirty="0" err="1" smtClean="0">
+                <a:solidFill>
+                  <a:schemeClr val="bg1">
+                    <a:lumMod val="95000"/>
+                  </a:schemeClr>
+                </a:solidFill>
+                <a:latin typeface="Noto Sans KR Medium" panose="020B0200000000000000" pitchFamily="34" charset="-128"/>
+                <a:ea typeface="Noto Sans KR Medium" panose="020B0200000000000000" pitchFamily="34" charset="-128"/>
+              </a:rPr>
+              <a:t>랜드</a:t>
+            </a:r>
+            <a:r>
+              <a:rPr lang="ko-KR" altLang="en-US" sz="1000" dirty="0" smtClean="0">
+                <a:solidFill>
+                  <a:schemeClr val="bg1">
+                    <a:lumMod val="95000"/>
+                  </a:schemeClr>
+                </a:solidFill>
+                <a:latin typeface="Noto Sans KR Medium" panose="020B0200000000000000" pitchFamily="34" charset="-128"/>
+                <a:ea typeface="Noto Sans KR Medium" panose="020B0200000000000000" pitchFamily="34" charset="-128"/>
+              </a:rPr>
+              <a:t> </a:t>
+            </a:r>
+            <a:r>
+              <a:rPr lang="ko-KR" altLang="en-US" sz="1000" dirty="0" err="1" smtClean="0">
+                <a:solidFill>
+                  <a:schemeClr val="bg1">
+                    <a:lumMod val="95000"/>
+                  </a:schemeClr>
+                </a:solidFill>
+                <a:latin typeface="Noto Sans KR Medium" panose="020B0200000000000000" pitchFamily="34" charset="-128"/>
+                <a:ea typeface="Noto Sans KR Medium" panose="020B0200000000000000" pitchFamily="34" charset="-128"/>
+              </a:rPr>
+              <a:t>스케이프와</a:t>
+            </a:r>
+            <a:r>
+              <a:rPr lang="ko-KR" altLang="en-US" sz="1000" dirty="0" smtClean="0">
+                <a:solidFill>
+                  <a:schemeClr val="bg1">
+                    <a:lumMod val="95000"/>
+                  </a:schemeClr>
+                </a:solidFill>
+                <a:latin typeface="Noto Sans KR Medium" panose="020B0200000000000000" pitchFamily="34" charset="-128"/>
+                <a:ea typeface="Noto Sans KR Medium" panose="020B0200000000000000" pitchFamily="34" charset="-128"/>
+              </a:rPr>
+              <a:t> 충돌하며 실패 처리되어 </a:t>
+            </a:r>
+            <a:r>
+              <a:rPr lang="en-US" altLang="ko-KR" sz="1000" dirty="0" err="1" smtClean="0">
+                <a:solidFill>
+                  <a:schemeClr val="bg1">
+                    <a:lumMod val="95000"/>
+                  </a:schemeClr>
+                </a:solidFill>
+                <a:latin typeface="Noto Sans KR Medium" panose="020B0200000000000000" pitchFamily="34" charset="-128"/>
+                <a:ea typeface="Noto Sans KR Medium" panose="020B0200000000000000" pitchFamily="34" charset="-128"/>
+              </a:rPr>
+              <a:t>nullptr</a:t>
+            </a:r>
+            <a:r>
+              <a:rPr lang="ko-KR" altLang="en-US" sz="1000" dirty="0" smtClean="0">
+                <a:solidFill>
+                  <a:schemeClr val="bg1">
+                    <a:lumMod val="95000"/>
+                  </a:schemeClr>
+                </a:solidFill>
+                <a:latin typeface="Noto Sans KR Medium" panose="020B0200000000000000" pitchFamily="34" charset="-128"/>
+                <a:ea typeface="Noto Sans KR Medium" panose="020B0200000000000000" pitchFamily="34" charset="-128"/>
+              </a:rPr>
+              <a:t>이 반환된 것</a:t>
+            </a:r>
+            <a:endParaRPr lang="en-US" altLang="ko-KR" sz="1000" dirty="0" smtClean="0">
+              <a:solidFill>
+                <a:schemeClr val="bg1">
+                  <a:lumMod val="95000"/>
+                </a:schemeClr>
+              </a:solidFill>
+              <a:latin typeface="Noto Sans KR Medium" panose="020B0200000000000000" pitchFamily="34" charset="-128"/>
+              <a:ea typeface="Noto Sans KR Medium" panose="020B0200000000000000" pitchFamily="34" charset="-128"/>
+            </a:endParaRPr>
+          </a:p>
+        </p:txBody>
+      </p:sp>
+      <p:sp>
+        <p:nvSpPr>
+          <p:cNvPr id="13" name="직사각형 12"/>
+          <p:cNvSpPr/>
+          <p:nvPr/>
+        </p:nvSpPr>
+        <p:spPr>
+          <a:xfrm>
+            <a:off x="454274" y="4096447"/>
+            <a:ext cx="8755039" cy="400110"/>
+          </a:xfrm>
+          <a:prstGeom prst="rect">
+            <a:avLst/>
+          </a:prstGeom>
+        </p:spPr>
+        <p:txBody>
+          <a:bodyPr wrap="square">
+            <a:spAutoFit/>
+          </a:bodyPr>
+          <a:lstStyle/>
+          <a:p>
+            <a:r>
+              <a:rPr lang="ko-KR" altLang="en-US" sz="1000" dirty="0" err="1">
+                <a:solidFill>
+                  <a:schemeClr val="bg1">
+                    <a:lumMod val="95000"/>
+                  </a:schemeClr>
+                </a:solidFill>
+                <a:latin typeface="Noto Sans KR Medium" panose="020B0200000000000000" pitchFamily="34" charset="-128"/>
+                <a:ea typeface="Noto Sans KR Medium" panose="020B0200000000000000" pitchFamily="34" charset="-128"/>
+              </a:rPr>
+              <a:t>액터</a:t>
+            </a:r>
+            <a:r>
+              <a:rPr lang="ko-KR" altLang="en-US" sz="1000" dirty="0">
+                <a:solidFill>
+                  <a:schemeClr val="bg1">
+                    <a:lumMod val="95000"/>
+                  </a:schemeClr>
+                </a:solidFill>
+                <a:latin typeface="Noto Sans KR Medium" panose="020B0200000000000000" pitchFamily="34" charset="-128"/>
+                <a:ea typeface="Noto Sans KR Medium" panose="020B0200000000000000" pitchFamily="34" charset="-128"/>
+              </a:rPr>
+              <a:t> </a:t>
+            </a:r>
+            <a:r>
+              <a:rPr lang="ko-KR" altLang="en-US" sz="1000" dirty="0" err="1">
+                <a:solidFill>
+                  <a:schemeClr val="bg1">
+                    <a:lumMod val="95000"/>
+                  </a:schemeClr>
+                </a:solidFill>
+                <a:latin typeface="Noto Sans KR Medium" panose="020B0200000000000000" pitchFamily="34" charset="-128"/>
+                <a:ea typeface="Noto Sans KR Medium" panose="020B0200000000000000" pitchFamily="34" charset="-128"/>
+              </a:rPr>
+              <a:t>스폰</a:t>
+            </a:r>
+            <a:r>
+              <a:rPr lang="ko-KR" altLang="en-US" sz="1000" dirty="0">
+                <a:solidFill>
+                  <a:schemeClr val="bg1">
+                    <a:lumMod val="95000"/>
+                  </a:schemeClr>
+                </a:solidFill>
+                <a:latin typeface="Noto Sans KR Medium" panose="020B0200000000000000" pitchFamily="34" charset="-128"/>
+                <a:ea typeface="Noto Sans KR Medium" panose="020B0200000000000000" pitchFamily="34" charset="-128"/>
+              </a:rPr>
+              <a:t> 시</a:t>
+            </a:r>
+            <a:r>
+              <a:rPr lang="en-US" altLang="ko-KR" sz="1000" dirty="0">
+                <a:solidFill>
+                  <a:schemeClr val="bg1">
+                    <a:lumMod val="95000"/>
+                  </a:schemeClr>
+                </a:solidFill>
+                <a:latin typeface="Noto Sans KR Medium" panose="020B0200000000000000" pitchFamily="34" charset="-128"/>
+                <a:ea typeface="Noto Sans KR Medium" panose="020B0200000000000000" pitchFamily="34" charset="-128"/>
+              </a:rPr>
+              <a:t>, </a:t>
+            </a:r>
+            <a:r>
+              <a:rPr lang="en-US" altLang="ko-KR" sz="1000" dirty="0" err="1">
+                <a:solidFill>
+                  <a:schemeClr val="bg1">
+                    <a:lumMod val="95000"/>
+                  </a:schemeClr>
+                </a:solidFill>
+                <a:latin typeface="Noto Sans KR Medium" panose="020B0200000000000000" pitchFamily="34" charset="-128"/>
+                <a:ea typeface="Noto Sans KR Medium" panose="020B0200000000000000" pitchFamily="34" charset="-128"/>
+              </a:rPr>
+              <a:t>FActorSpawnParameters</a:t>
+            </a:r>
+            <a:r>
+              <a:rPr lang="ko-KR" altLang="en-US" sz="1000" dirty="0">
+                <a:solidFill>
+                  <a:schemeClr val="bg1">
+                    <a:lumMod val="95000"/>
+                  </a:schemeClr>
+                </a:solidFill>
+                <a:latin typeface="Noto Sans KR Medium" panose="020B0200000000000000" pitchFamily="34" charset="-128"/>
+                <a:ea typeface="Noto Sans KR Medium" panose="020B0200000000000000" pitchFamily="34" charset="-128"/>
+              </a:rPr>
+              <a:t>에 </a:t>
+            </a:r>
+            <a:r>
+              <a:rPr lang="en-US" altLang="ko-KR" sz="1000" dirty="0" err="1">
+                <a:solidFill>
+                  <a:schemeClr val="bg1">
+                    <a:lumMod val="95000"/>
+                  </a:schemeClr>
+                </a:solidFill>
+                <a:latin typeface="Noto Sans KR Medium" panose="020B0200000000000000" pitchFamily="34" charset="-128"/>
+                <a:ea typeface="Noto Sans KR Medium" panose="020B0200000000000000" pitchFamily="34" charset="-128"/>
+              </a:rPr>
+              <a:t>SpawnCollisionHandlingOverride</a:t>
+            </a:r>
+            <a:r>
+              <a:rPr lang="en-US" altLang="ko-KR" sz="1000" dirty="0">
+                <a:solidFill>
+                  <a:schemeClr val="bg1">
+                    <a:lumMod val="95000"/>
+                  </a:schemeClr>
+                </a:solidFill>
+                <a:latin typeface="Noto Sans KR Medium" panose="020B0200000000000000" pitchFamily="34" charset="-128"/>
+                <a:ea typeface="Noto Sans KR Medium" panose="020B0200000000000000" pitchFamily="34" charset="-128"/>
+              </a:rPr>
+              <a:t> </a:t>
+            </a:r>
+            <a:r>
+              <a:rPr lang="ko-KR" altLang="en-US" sz="1000" dirty="0">
+                <a:solidFill>
+                  <a:schemeClr val="bg1">
+                    <a:lumMod val="95000"/>
+                  </a:schemeClr>
+                </a:solidFill>
+                <a:latin typeface="Noto Sans KR Medium" panose="020B0200000000000000" pitchFamily="34" charset="-128"/>
+                <a:ea typeface="Noto Sans KR Medium" panose="020B0200000000000000" pitchFamily="34" charset="-128"/>
+              </a:rPr>
+              <a:t>설정을 </a:t>
+            </a:r>
+            <a:r>
+              <a:rPr lang="en-US" altLang="ko-KR" sz="1000" dirty="0" err="1">
+                <a:solidFill>
+                  <a:schemeClr val="bg1">
+                    <a:lumMod val="95000"/>
+                  </a:schemeClr>
+                </a:solidFill>
+                <a:latin typeface="Noto Sans KR Medium" panose="020B0200000000000000" pitchFamily="34" charset="-128"/>
+                <a:ea typeface="Noto Sans KR Medium" panose="020B0200000000000000" pitchFamily="34" charset="-128"/>
+              </a:rPr>
+              <a:t>AlwaysSpawn</a:t>
+            </a:r>
+            <a:r>
+              <a:rPr lang="ko-KR" altLang="en-US" sz="1000" dirty="0">
+                <a:solidFill>
+                  <a:schemeClr val="bg1">
+                    <a:lumMod val="95000"/>
+                  </a:schemeClr>
+                </a:solidFill>
+                <a:latin typeface="Noto Sans KR Medium" panose="020B0200000000000000" pitchFamily="34" charset="-128"/>
+                <a:ea typeface="Noto Sans KR Medium" panose="020B0200000000000000" pitchFamily="34" charset="-128"/>
+              </a:rPr>
+              <a:t>을 변경 후 해결</a:t>
+            </a:r>
+            <a:endParaRPr lang="en-US" altLang="ko-KR" sz="1000" dirty="0">
+              <a:solidFill>
+                <a:schemeClr val="bg1">
+                  <a:lumMod val="95000"/>
+                </a:schemeClr>
+              </a:solidFill>
+              <a:latin typeface="Noto Sans KR Medium" panose="020B0200000000000000" pitchFamily="34" charset="-128"/>
+              <a:ea typeface="Noto Sans KR Medium" panose="020B0200000000000000" pitchFamily="34" charset="-128"/>
+            </a:endParaRPr>
+          </a:p>
+          <a:p>
+            <a:r>
+              <a:rPr lang="ko-KR" altLang="en-US" sz="1000" dirty="0" err="1">
+                <a:solidFill>
+                  <a:schemeClr val="bg1">
+                    <a:lumMod val="95000"/>
+                  </a:schemeClr>
+                </a:solidFill>
+                <a:latin typeface="Noto Sans KR Medium" panose="020B0200000000000000" pitchFamily="34" charset="-128"/>
+                <a:ea typeface="Noto Sans KR Medium" panose="020B0200000000000000" pitchFamily="34" charset="-128"/>
+              </a:rPr>
+              <a:t>스폰</a:t>
+            </a:r>
+            <a:r>
+              <a:rPr lang="ko-KR" altLang="en-US" sz="1000" dirty="0">
+                <a:solidFill>
+                  <a:schemeClr val="bg1">
+                    <a:lumMod val="95000"/>
+                  </a:schemeClr>
+                </a:solidFill>
+                <a:latin typeface="Noto Sans KR Medium" panose="020B0200000000000000" pitchFamily="34" charset="-128"/>
+                <a:ea typeface="Noto Sans KR Medium" panose="020B0200000000000000" pitchFamily="34" charset="-128"/>
+              </a:rPr>
+              <a:t> 시</a:t>
+            </a:r>
+            <a:r>
+              <a:rPr lang="en-US" altLang="ko-KR" sz="1000" dirty="0">
+                <a:solidFill>
+                  <a:schemeClr val="bg1">
+                    <a:lumMod val="95000"/>
+                  </a:schemeClr>
+                </a:solidFill>
+                <a:latin typeface="Noto Sans KR Medium" panose="020B0200000000000000" pitchFamily="34" charset="-128"/>
+                <a:ea typeface="Noto Sans KR Medium" panose="020B0200000000000000" pitchFamily="34" charset="-128"/>
+              </a:rPr>
+              <a:t>, </a:t>
+            </a:r>
+            <a:r>
+              <a:rPr lang="ko-KR" altLang="en-US" sz="1000" dirty="0">
+                <a:solidFill>
+                  <a:schemeClr val="bg1">
+                    <a:lumMod val="95000"/>
+                  </a:schemeClr>
+                </a:solidFill>
+                <a:latin typeface="Noto Sans KR Medium" panose="020B0200000000000000" pitchFamily="34" charset="-128"/>
+                <a:ea typeface="Noto Sans KR Medium" panose="020B0200000000000000" pitchFamily="34" charset="-128"/>
+              </a:rPr>
+              <a:t>충돌하거나 겹치더라도 </a:t>
+            </a:r>
+            <a:r>
+              <a:rPr lang="ko-KR" altLang="en-US" sz="1000" dirty="0" err="1">
+                <a:solidFill>
+                  <a:schemeClr val="bg1">
+                    <a:lumMod val="95000"/>
+                  </a:schemeClr>
+                </a:solidFill>
+                <a:latin typeface="Noto Sans KR Medium" panose="020B0200000000000000" pitchFamily="34" charset="-128"/>
+                <a:ea typeface="Noto Sans KR Medium" panose="020B0200000000000000" pitchFamily="34" charset="-128"/>
+              </a:rPr>
+              <a:t>스폰하도록</a:t>
+            </a:r>
+            <a:r>
+              <a:rPr lang="ko-KR" altLang="en-US" sz="1000" dirty="0">
+                <a:solidFill>
+                  <a:schemeClr val="bg1">
+                    <a:lumMod val="95000"/>
+                  </a:schemeClr>
+                </a:solidFill>
+                <a:latin typeface="Noto Sans KR Medium" panose="020B0200000000000000" pitchFamily="34" charset="-128"/>
+                <a:ea typeface="Noto Sans KR Medium" panose="020B0200000000000000" pitchFamily="34" charset="-128"/>
+              </a:rPr>
+              <a:t> 설정</a:t>
+            </a:r>
+            <a:r>
+              <a:rPr lang="ko-KR" altLang="en-US" sz="1000" dirty="0"/>
+              <a:t>인</a:t>
+            </a:r>
+            <a:endParaRPr lang="en-US" altLang="ko-KR" sz="1000" dirty="0"/>
+          </a:p>
+        </p:txBody>
+      </p:sp>
+    </p:spTree>
+    <p:extLst>
+      <p:ext uri="{BB962C8B-B14F-4D97-AF65-F5344CB8AC3E}">
+        <p14:creationId xmlns:p14="http://schemas.microsoft.com/office/powerpoint/2010/main" val="1674360491"/>
+      </p:ext>
+    </p:extLst>
+  </p:cSld>
+  <p:clrMapOvr>
+    <a:masterClrMapping/>
+  </p:clrMapOvr>
+  <p:timing>
+    <p:tnLst>
+      <p:par>
+        <p:cTn id="1" dur="indefinite" restart="never" nodeType="tmRoot"/>
+      </p:par>
+    </p:tnLst>
+  </p:timing>
+</p:sld>
+</file>
+
+<file path=ppt/slides/slide16.xml><?xml version="1.0" encoding="utf-8"?>
+<p:sld xmlns:a="http://schemas.openxmlformats.org/drawingml/2006/main" xmlns:r="http://schemas.openxmlformats.org/officeDocument/2006/relationships" xmlns:p="http://schemas.openxmlformats.org/presentationml/2006/main">
+  <p:cSld>
+    <p:spTree>
+      <p:nvGrpSpPr>
+        <p:cNvPr id="1" name=""/>
+        <p:cNvGrpSpPr/>
+        <p:nvPr/>
+      </p:nvGrpSpPr>
+      <p:grpSpPr>
+        <a:xfrm>
+          <a:off x="0" y="0"/>
+          <a:ext cx="0" cy="0"/>
+          <a:chOff x="0" y="0"/>
+          <a:chExt cx="0" cy="0"/>
+        </a:xfrm>
+      </p:grpSpPr>
+      <p:sp>
+        <p:nvSpPr>
+          <p:cNvPr id="12" name="직사각형 11"/>
+          <p:cNvSpPr/>
+          <p:nvPr/>
+        </p:nvSpPr>
+        <p:spPr>
+          <a:xfrm>
+            <a:off x="454275" y="315047"/>
+            <a:ext cx="3152775" cy="395859"/>
+          </a:xfrm>
+          <a:prstGeom prst="rect">
+            <a:avLst/>
+          </a:prstGeom>
+          <a:noFill/>
+          <a:ln w="6350">
+            <a:noFill/>
+          </a:ln>
+        </p:spPr>
+        <p:style>
+          <a:lnRef idx="2">
+            <a:schemeClr val="accent1">
+              <a:shade val="50000"/>
+            </a:schemeClr>
+          </a:lnRef>
+          <a:fillRef idx="1">
+            <a:schemeClr val="accent1"/>
+          </a:fillRef>
+          <a:effectRef idx="0">
+            <a:schemeClr val="accent1"/>
+          </a:effectRef>
+          <a:fontRef idx="minor">
+            <a:schemeClr val="lt1"/>
+          </a:fontRef>
+        </p:style>
+        <p:txBody>
+          <a:bodyPr rtlCol="0" anchor="ctr"/>
+          <a:lstStyle/>
+          <a:p>
+            <a:r>
+              <a:rPr lang="ko-KR" altLang="en-US" sz="1200" dirty="0" smtClean="0">
+                <a:solidFill>
+                  <a:schemeClr val="bg1">
+                    <a:lumMod val="95000"/>
+                  </a:schemeClr>
+                </a:solidFill>
+                <a:latin typeface="Noto Sans KR Medium" panose="020B0200000000000000" pitchFamily="34" charset="-128"/>
+                <a:ea typeface="Noto Sans KR Medium" panose="020B0200000000000000" pitchFamily="34" charset="-128"/>
+              </a:rPr>
+              <a:t>트러블슈팅</a:t>
+            </a:r>
+            <a:endParaRPr lang="ko-KR" altLang="en-US" sz="1200" dirty="0">
+              <a:solidFill>
+                <a:schemeClr val="bg1">
+                  <a:lumMod val="95000"/>
+                </a:schemeClr>
+              </a:solidFill>
+              <a:latin typeface="Noto Sans KR Medium" panose="020B0200000000000000" pitchFamily="34" charset="-128"/>
+              <a:ea typeface="Noto Sans KR Medium" panose="020B0200000000000000" pitchFamily="34" charset="-128"/>
+            </a:endParaRPr>
+          </a:p>
+        </p:txBody>
+      </p:sp>
       <p:cxnSp>
         <p:nvCxnSpPr>
           <p:cNvPr id="19" name="직선 연결선 18"/>
@@ -13918,10 +15049,10 @@
                 <a:latin typeface="Noto Sans KR ExtraBold" panose="020B0200000000000000" pitchFamily="34" charset="-128"/>
                 <a:ea typeface="Noto Sans KR ExtraBold" panose="020B0200000000000000" pitchFamily="34" charset="-128"/>
               </a:rPr>
-              <a:t>레벨 시퀀스 적용 후</a:t>
-            </a:r>
-            <a:r>
-              <a:rPr lang="en-US" altLang="ko-KR" dirty="0" smtClean="0">
+              <a:t>레벨 시퀀스 적용 </a:t>
+            </a:r>
+            <a:r>
+              <a:rPr lang="ko-KR" altLang="en-US" dirty="0" smtClean="0">
                 <a:solidFill>
                   <a:schemeClr val="bg1">
                     <a:lumMod val="95000"/>
@@ -13930,7 +15061,19 @@
                 <a:latin typeface="Noto Sans KR ExtraBold" panose="020B0200000000000000" pitchFamily="34" charset="-128"/>
                 <a:ea typeface="Noto Sans KR ExtraBold" panose="020B0200000000000000" pitchFamily="34" charset="-128"/>
               </a:rPr>
-              <a:t>, </a:t>
+              <a:t>후</a:t>
+            </a:r>
+            <a:r>
+              <a:rPr lang="en-US" altLang="ko-KR" dirty="0" smtClean="0">
+                <a:solidFill>
+                  <a:schemeClr val="bg1">
+                    <a:lumMod val="95000"/>
+                  </a:schemeClr>
+                </a:solidFill>
+                <a:latin typeface="Noto Sans KR ExtraBold" panose="020B0200000000000000" pitchFamily="34" charset="-128"/>
+                <a:ea typeface="Noto Sans KR ExtraBold" panose="020B0200000000000000" pitchFamily="34" charset="-128"/>
+              </a:rPr>
+              <a:t> </a:t>
             </a:r>
             <a:r>
               <a:rPr lang="ko-KR" altLang="en-US" dirty="0" err="1" smtClean="0">
@@ -15126,7 +16269,7 @@
 </p:sld>
 </file>
 
-<file path=ppt/slides/slide16.xml><?xml version="1.0" encoding="utf-8"?>
+<file path=ppt/slides/slide17.xml><?xml version="1.0" encoding="utf-8"?>
 <p:sld xmlns:a="http://schemas.openxmlformats.org/drawingml/2006/main" xmlns:r="http://schemas.openxmlformats.org/officeDocument/2006/relationships" xmlns:p="http://schemas.openxmlformats.org/presentationml/2006/main">
   <p:cSld>
     <p:spTree>

--- a/Docs/UnrealEngine_문서_김정환.pptx
+++ b/Docs/UnrealEngine_문서_김정환.pptx
@@ -7355,15 +7355,6 @@
               </a:rPr>
               <a:t>)</a:t>
             </a:r>
-            <a:endParaRPr lang="en-US" altLang="ko-KR" sz="1000" dirty="0" smtClean="0">
-              <a:solidFill>
-                <a:schemeClr val="bg1">
-                  <a:lumMod val="95000"/>
-                </a:schemeClr>
-              </a:solidFill>
-              <a:latin typeface="Noto Sans KR Medium" panose="020B0200000000000000" pitchFamily="34" charset="-128"/>
-              <a:ea typeface="Noto Sans KR Medium" panose="020B0200000000000000" pitchFamily="34" charset="-128"/>
-            </a:endParaRPr>
           </a:p>
         </p:txBody>
       </p:sp>
@@ -8750,15 +8741,6 @@
               </a:rPr>
               <a:t>)</a:t>
             </a:r>
-            <a:endParaRPr lang="en-US" altLang="ko-KR" sz="1000" dirty="0" smtClean="0">
-              <a:solidFill>
-                <a:schemeClr val="bg1">
-                  <a:lumMod val="95000"/>
-                </a:schemeClr>
-              </a:solidFill>
-              <a:latin typeface="Noto Sans KR Medium" panose="020B0200000000000000" pitchFamily="34" charset="-128"/>
-              <a:ea typeface="Noto Sans KR Medium" panose="020B0200000000000000" pitchFamily="34" charset="-128"/>
-            </a:endParaRPr>
           </a:p>
         </p:txBody>
       </p:sp>
@@ -10145,15 +10127,6 @@
               </a:rPr>
               <a:t>)</a:t>
             </a:r>
-            <a:endParaRPr lang="en-US" altLang="ko-KR" sz="1000" dirty="0" smtClean="0">
-              <a:solidFill>
-                <a:schemeClr val="bg1">
-                  <a:lumMod val="95000"/>
-                </a:schemeClr>
-              </a:solidFill>
-              <a:latin typeface="Noto Sans KR Medium" panose="020B0200000000000000" pitchFamily="34" charset="-128"/>
-              <a:ea typeface="Noto Sans KR Medium" panose="020B0200000000000000" pitchFamily="34" charset="-128"/>
-            </a:endParaRPr>
           </a:p>
         </p:txBody>
       </p:sp>
@@ -13379,7 +13352,7 @@
         <p:spPr>
           <a:xfrm>
             <a:off x="454275" y="1106765"/>
-            <a:ext cx="5651249" cy="2400657"/>
+            <a:ext cx="5651249" cy="861774"/>
           </a:xfrm>
           <a:prstGeom prst="rect">
             <a:avLst/>
@@ -13392,6 +13365,30 @@
           <a:lstStyle/>
           <a:p>
             <a:r>
+              <a:rPr lang="ko-KR" altLang="en-US" sz="1000" dirty="0" smtClean="0">
+                <a:solidFill>
+                  <a:schemeClr val="bg1">
+                    <a:lumMod val="95000"/>
+                  </a:schemeClr>
+                </a:solidFill>
+                <a:latin typeface="Noto Sans KR Medium" panose="020B0200000000000000" pitchFamily="34" charset="-128"/>
+                <a:ea typeface="Noto Sans KR Medium" panose="020B0200000000000000" pitchFamily="34" charset="-128"/>
+              </a:rPr>
+              <a:t>효과 값을 설정해두기 위한 </a:t>
+            </a:r>
+            <a:r>
+              <a:rPr lang="ko-KR" altLang="en-US" sz="1000" dirty="0">
+                <a:solidFill>
+                  <a:schemeClr val="bg1">
+                    <a:lumMod val="95000"/>
+                  </a:schemeClr>
+                </a:solidFill>
+                <a:latin typeface="Noto Sans KR Medium" panose="020B0200000000000000" pitchFamily="34" charset="-128"/>
+                <a:ea typeface="Noto Sans KR Medium" panose="020B0200000000000000" pitchFamily="34" charset="-128"/>
+              </a:rPr>
+              <a:t>데이터 </a:t>
+            </a:r>
+            <a:r>
               <a:rPr lang="ko-KR" altLang="en-US" sz="1000" dirty="0" err="1" smtClean="0">
                 <a:solidFill>
                   <a:schemeClr val="bg1">
@@ -13401,907 +13398,7 @@
                 <a:latin typeface="Noto Sans KR Medium" panose="020B0200000000000000" pitchFamily="34" charset="-128"/>
                 <a:ea typeface="Noto Sans KR Medium" panose="020B0200000000000000" pitchFamily="34" charset="-128"/>
               </a:rPr>
-              <a:t>버프</a:t>
-            </a:r>
-            <a:r>
-              <a:rPr lang="en-US" altLang="ko-KR" sz="1000" dirty="0">
-                <a:solidFill>
-                  <a:schemeClr val="bg1">
-                    <a:lumMod val="95000"/>
-                  </a:schemeClr>
-                </a:solidFill>
-                <a:latin typeface="Noto Sans KR Medium" panose="020B0200000000000000" pitchFamily="34" charset="-128"/>
-                <a:ea typeface="Noto Sans KR Medium" panose="020B0200000000000000" pitchFamily="34" charset="-128"/>
-              </a:rPr>
-              <a:t>, </a:t>
-            </a:r>
-            <a:r>
-              <a:rPr lang="ko-KR" altLang="en-US" sz="1000" dirty="0" err="1">
-                <a:solidFill>
-                  <a:schemeClr val="bg1">
-                    <a:lumMod val="95000"/>
-                  </a:schemeClr>
-                </a:solidFill>
-                <a:latin typeface="Noto Sans KR Medium" panose="020B0200000000000000" pitchFamily="34" charset="-128"/>
-                <a:ea typeface="Noto Sans KR Medium" panose="020B0200000000000000" pitchFamily="34" charset="-128"/>
-              </a:rPr>
-              <a:t>디버프</a:t>
-            </a:r>
-            <a:r>
-              <a:rPr lang="ko-KR" altLang="en-US" sz="1000" dirty="0">
-                <a:solidFill>
-                  <a:schemeClr val="bg1">
-                    <a:lumMod val="95000"/>
-                  </a:schemeClr>
-                </a:solidFill>
-                <a:latin typeface="Noto Sans KR Medium" panose="020B0200000000000000" pitchFamily="34" charset="-128"/>
-                <a:ea typeface="Noto Sans KR Medium" panose="020B0200000000000000" pitchFamily="34" charset="-128"/>
-              </a:rPr>
-              <a:t> 등의 </a:t>
-            </a:r>
-            <a:r>
-              <a:rPr lang="ko-KR" altLang="en-US" sz="1000" dirty="0" smtClean="0">
-                <a:solidFill>
-                  <a:schemeClr val="bg1">
-                    <a:lumMod val="95000"/>
-                  </a:schemeClr>
-                </a:solidFill>
-                <a:latin typeface="Noto Sans KR Medium" panose="020B0200000000000000" pitchFamily="34" charset="-128"/>
-                <a:ea typeface="Noto Sans KR Medium" panose="020B0200000000000000" pitchFamily="34" charset="-128"/>
-              </a:rPr>
-              <a:t>효과를 적용하는 </a:t>
-            </a:r>
-            <a:r>
-              <a:rPr lang="ko-KR" altLang="en-US" sz="1000" dirty="0">
-                <a:solidFill>
-                  <a:schemeClr val="bg1">
-                    <a:lumMod val="95000"/>
-                  </a:schemeClr>
-                </a:solidFill>
-                <a:latin typeface="Noto Sans KR Medium" panose="020B0200000000000000" pitchFamily="34" charset="-128"/>
-                <a:ea typeface="Noto Sans KR Medium" panose="020B0200000000000000" pitchFamily="34" charset="-128"/>
-              </a:rPr>
-              <a:t>클래스</a:t>
-            </a:r>
-            <a:endParaRPr lang="en-US" altLang="ko-KR" sz="1000" dirty="0">
-              <a:solidFill>
-                <a:schemeClr val="bg1">
-                  <a:lumMod val="95000"/>
-                </a:schemeClr>
-              </a:solidFill>
-              <a:latin typeface="Noto Sans KR Medium" panose="020B0200000000000000" pitchFamily="34" charset="-128"/>
-              <a:ea typeface="Noto Sans KR Medium" panose="020B0200000000000000" pitchFamily="34" charset="-128"/>
-            </a:endParaRPr>
-          </a:p>
-          <a:p>
-            <a:pPr marL="171450" indent="-171450">
-              <a:buFontTx/>
-              <a:buChar char="-"/>
-            </a:pPr>
-            <a:r>
-              <a:rPr lang="ko-KR" altLang="en-US" sz="1000" dirty="0">
-                <a:solidFill>
-                  <a:schemeClr val="bg1">
-                    <a:lumMod val="95000"/>
-                  </a:schemeClr>
-                </a:solidFill>
-                <a:latin typeface="Noto Sans KR Medium" panose="020B0200000000000000" pitchFamily="34" charset="-128"/>
-                <a:ea typeface="Noto Sans KR Medium" panose="020B0200000000000000" pitchFamily="34" charset="-128"/>
-              </a:rPr>
-              <a:t>필요한 </a:t>
-            </a:r>
-            <a:r>
-              <a:rPr lang="ko-KR" altLang="en-US" sz="1000" dirty="0" err="1">
-                <a:solidFill>
-                  <a:schemeClr val="bg1">
-                    <a:lumMod val="95000"/>
-                  </a:schemeClr>
-                </a:solidFill>
-                <a:latin typeface="Noto Sans KR Medium" panose="020B0200000000000000" pitchFamily="34" charset="-128"/>
-                <a:ea typeface="Noto Sans KR Medium" panose="020B0200000000000000" pitchFamily="34" charset="-128"/>
-              </a:rPr>
-              <a:t>버프</a:t>
-            </a:r>
-            <a:r>
-              <a:rPr lang="en-US" altLang="ko-KR" sz="1000" dirty="0">
-                <a:solidFill>
-                  <a:schemeClr val="bg1">
-                    <a:lumMod val="95000"/>
-                  </a:schemeClr>
-                </a:solidFill>
-                <a:latin typeface="Noto Sans KR Medium" panose="020B0200000000000000" pitchFamily="34" charset="-128"/>
-                <a:ea typeface="Noto Sans KR Medium" panose="020B0200000000000000" pitchFamily="34" charset="-128"/>
-              </a:rPr>
-              <a:t>, </a:t>
-            </a:r>
-            <a:r>
-              <a:rPr lang="ko-KR" altLang="en-US" sz="1000" dirty="0" err="1">
-                <a:solidFill>
-                  <a:schemeClr val="bg1">
-                    <a:lumMod val="95000"/>
-                  </a:schemeClr>
-                </a:solidFill>
-                <a:latin typeface="Noto Sans KR Medium" panose="020B0200000000000000" pitchFamily="34" charset="-128"/>
-                <a:ea typeface="Noto Sans KR Medium" panose="020B0200000000000000" pitchFamily="34" charset="-128"/>
-              </a:rPr>
-              <a:t>디버프의</a:t>
-            </a:r>
-            <a:r>
-              <a:rPr lang="ko-KR" altLang="en-US" sz="1000" dirty="0">
-                <a:solidFill>
-                  <a:schemeClr val="bg1">
-                    <a:lumMod val="95000"/>
-                  </a:schemeClr>
-                </a:solidFill>
-                <a:latin typeface="Noto Sans KR Medium" panose="020B0200000000000000" pitchFamily="34" charset="-128"/>
-                <a:ea typeface="Noto Sans KR Medium" panose="020B0200000000000000" pitchFamily="34" charset="-128"/>
-              </a:rPr>
-              <a:t> 기능을 살펴보니 거의 대부분이 </a:t>
-            </a:r>
-            <a:r>
-              <a:rPr lang="ko-KR" altLang="en-US" sz="1000" dirty="0" err="1">
-                <a:solidFill>
-                  <a:schemeClr val="bg1">
-                    <a:lumMod val="95000"/>
-                  </a:schemeClr>
-                </a:solidFill>
-                <a:latin typeface="Noto Sans KR Medium" panose="020B0200000000000000" pitchFamily="34" charset="-128"/>
-                <a:ea typeface="Noto Sans KR Medium" panose="020B0200000000000000" pitchFamily="34" charset="-128"/>
-              </a:rPr>
-              <a:t>스탯에</a:t>
-            </a:r>
-            <a:r>
-              <a:rPr lang="ko-KR" altLang="en-US" sz="1000" dirty="0">
-                <a:solidFill>
-                  <a:schemeClr val="bg1">
-                    <a:lumMod val="95000"/>
-                  </a:schemeClr>
-                </a:solidFill>
-                <a:latin typeface="Noto Sans KR Medium" panose="020B0200000000000000" pitchFamily="34" charset="-128"/>
-                <a:ea typeface="Noto Sans KR Medium" panose="020B0200000000000000" pitchFamily="34" charset="-128"/>
-              </a:rPr>
-              <a:t> 영향을 준다는 공통점을 발견</a:t>
-            </a:r>
-            <a:r>
-              <a:rPr lang="en-US" altLang="ko-KR" sz="1000" dirty="0">
-                <a:solidFill>
-                  <a:schemeClr val="bg1">
-                    <a:lumMod val="95000"/>
-                  </a:schemeClr>
-                </a:solidFill>
-                <a:latin typeface="Noto Sans KR Medium" panose="020B0200000000000000" pitchFamily="34" charset="-128"/>
-                <a:ea typeface="Noto Sans KR Medium" panose="020B0200000000000000" pitchFamily="34" charset="-128"/>
-              </a:rPr>
-              <a:t>,</a:t>
-            </a:r>
-            <a:br>
-              <a:rPr lang="en-US" altLang="ko-KR" sz="1000" dirty="0">
-                <a:solidFill>
-                  <a:schemeClr val="bg1">
-                    <a:lumMod val="95000"/>
-                  </a:schemeClr>
-                </a:solidFill>
-                <a:latin typeface="Noto Sans KR Medium" panose="020B0200000000000000" pitchFamily="34" charset="-128"/>
-                <a:ea typeface="Noto Sans KR Medium" panose="020B0200000000000000" pitchFamily="34" charset="-128"/>
-              </a:rPr>
-            </a:br>
-            <a:r>
-              <a:rPr lang="ko-KR" altLang="en-US" sz="1000" dirty="0">
-                <a:solidFill>
-                  <a:schemeClr val="bg1">
-                    <a:lumMod val="95000"/>
-                  </a:schemeClr>
-                </a:solidFill>
-                <a:latin typeface="Noto Sans KR Medium" panose="020B0200000000000000" pitchFamily="34" charset="-128"/>
-                <a:ea typeface="Noto Sans KR Medium" panose="020B0200000000000000" pitchFamily="34" charset="-128"/>
-              </a:rPr>
-              <a:t>그에 따라 </a:t>
-            </a:r>
-            <a:r>
-              <a:rPr lang="en-US" altLang="ko-KR" sz="1000" dirty="0" err="1">
-                <a:solidFill>
-                  <a:schemeClr val="bg1">
-                    <a:lumMod val="95000"/>
-                  </a:schemeClr>
-                </a:solidFill>
-                <a:latin typeface="Noto Sans KR Medium" panose="020B0200000000000000" pitchFamily="34" charset="-128"/>
-                <a:ea typeface="Noto Sans KR Medium" panose="020B0200000000000000" pitchFamily="34" charset="-128"/>
-              </a:rPr>
-              <a:t>UStatComponent</a:t>
-            </a:r>
-            <a:r>
-              <a:rPr lang="ko-KR" altLang="en-US" sz="1000" dirty="0">
-                <a:solidFill>
-                  <a:schemeClr val="bg1">
-                    <a:lumMod val="95000"/>
-                  </a:schemeClr>
-                </a:solidFill>
-                <a:latin typeface="Noto Sans KR Medium" panose="020B0200000000000000" pitchFamily="34" charset="-128"/>
-                <a:ea typeface="Noto Sans KR Medium" panose="020B0200000000000000" pitchFamily="34" charset="-128"/>
-              </a:rPr>
-              <a:t>에 효과를 등록</a:t>
-            </a:r>
-            <a:r>
-              <a:rPr lang="en-US" altLang="ko-KR" sz="1000" dirty="0">
-                <a:solidFill>
-                  <a:schemeClr val="bg1">
-                    <a:lumMod val="95000"/>
-                  </a:schemeClr>
-                </a:solidFill>
-                <a:latin typeface="Noto Sans KR Medium" panose="020B0200000000000000" pitchFamily="34" charset="-128"/>
-                <a:ea typeface="Noto Sans KR Medium" panose="020B0200000000000000" pitchFamily="34" charset="-128"/>
-              </a:rPr>
-              <a:t>, </a:t>
-            </a:r>
-            <a:r>
-              <a:rPr lang="ko-KR" altLang="en-US" sz="1000" dirty="0">
-                <a:solidFill>
-                  <a:schemeClr val="bg1">
-                    <a:lumMod val="95000"/>
-                  </a:schemeClr>
-                </a:solidFill>
-                <a:latin typeface="Noto Sans KR Medium" panose="020B0200000000000000" pitchFamily="34" charset="-128"/>
-                <a:ea typeface="Noto Sans KR Medium" panose="020B0200000000000000" pitchFamily="34" charset="-128"/>
-              </a:rPr>
-              <a:t>해제하고 관리하는 기능을 구현</a:t>
-            </a:r>
-            <a:endParaRPr lang="en-US" altLang="ko-KR" sz="1000" dirty="0">
-              <a:solidFill>
-                <a:schemeClr val="bg1">
-                  <a:lumMod val="95000"/>
-                </a:schemeClr>
-              </a:solidFill>
-              <a:latin typeface="Noto Sans KR Medium" panose="020B0200000000000000" pitchFamily="34" charset="-128"/>
-              <a:ea typeface="Noto Sans KR Medium" panose="020B0200000000000000" pitchFamily="34" charset="-128"/>
-            </a:endParaRPr>
-          </a:p>
-          <a:p>
-            <a:pPr marL="171450" indent="-171450">
-              <a:buFontTx/>
-              <a:buChar char="-"/>
-            </a:pPr>
-            <a:r>
-              <a:rPr lang="ko-KR" altLang="en-US" sz="1000" dirty="0">
-                <a:solidFill>
-                  <a:schemeClr val="bg1">
-                    <a:lumMod val="95000"/>
-                  </a:schemeClr>
-                </a:solidFill>
-                <a:latin typeface="Noto Sans KR Medium" panose="020B0200000000000000" pitchFamily="34" charset="-128"/>
-                <a:ea typeface="Noto Sans KR Medium" panose="020B0200000000000000" pitchFamily="34" charset="-128"/>
-              </a:rPr>
-              <a:t>단</a:t>
-            </a:r>
-            <a:r>
-              <a:rPr lang="en-US" altLang="ko-KR" sz="1000" dirty="0">
-                <a:solidFill>
-                  <a:schemeClr val="bg1">
-                    <a:lumMod val="95000"/>
-                  </a:schemeClr>
-                </a:solidFill>
-                <a:latin typeface="Noto Sans KR Medium" panose="020B0200000000000000" pitchFamily="34" charset="-128"/>
-                <a:ea typeface="Noto Sans KR Medium" panose="020B0200000000000000" pitchFamily="34" charset="-128"/>
-              </a:rPr>
-              <a:t>, </a:t>
-            </a:r>
-            <a:r>
-              <a:rPr lang="ko-KR" altLang="en-US" sz="1000" dirty="0">
-                <a:solidFill>
-                  <a:schemeClr val="bg1">
-                    <a:lumMod val="95000"/>
-                  </a:schemeClr>
-                </a:solidFill>
-                <a:latin typeface="Noto Sans KR Medium" panose="020B0200000000000000" pitchFamily="34" charset="-128"/>
-                <a:ea typeface="Noto Sans KR Medium" panose="020B0200000000000000" pitchFamily="34" charset="-128"/>
-              </a:rPr>
-              <a:t>이때 </a:t>
-            </a:r>
-            <a:r>
-              <a:rPr lang="en-US" altLang="ko-KR" sz="1000" dirty="0" err="1">
-                <a:solidFill>
-                  <a:schemeClr val="bg1">
-                    <a:lumMod val="95000"/>
-                  </a:schemeClr>
-                </a:solidFill>
-                <a:latin typeface="Noto Sans KR Medium" panose="020B0200000000000000" pitchFamily="34" charset="-128"/>
-                <a:ea typeface="Noto Sans KR Medium" panose="020B0200000000000000" pitchFamily="34" charset="-128"/>
-              </a:rPr>
-              <a:t>UStatComponent</a:t>
-            </a:r>
-            <a:r>
-              <a:rPr lang="ko-KR" altLang="en-US" sz="1000" dirty="0">
-                <a:solidFill>
-                  <a:schemeClr val="bg1">
-                    <a:lumMod val="95000"/>
-                  </a:schemeClr>
-                </a:solidFill>
-                <a:latin typeface="Noto Sans KR Medium" panose="020B0200000000000000" pitchFamily="34" charset="-128"/>
-                <a:ea typeface="Noto Sans KR Medium" panose="020B0200000000000000" pitchFamily="34" charset="-128"/>
-              </a:rPr>
-              <a:t>를 외부에서 직접 접근하기엔 특정 </a:t>
-            </a:r>
-            <a:r>
-              <a:rPr lang="ko-KR" altLang="en-US" sz="1000" dirty="0" err="1">
-                <a:solidFill>
-                  <a:schemeClr val="bg1">
-                    <a:lumMod val="95000"/>
-                  </a:schemeClr>
-                </a:solidFill>
-                <a:latin typeface="Noto Sans KR Medium" panose="020B0200000000000000" pitchFamily="34" charset="-128"/>
-                <a:ea typeface="Noto Sans KR Medium" panose="020B0200000000000000" pitchFamily="34" charset="-128"/>
-              </a:rPr>
-              <a:t>액터들에</a:t>
-            </a:r>
-            <a:r>
-              <a:rPr lang="ko-KR" altLang="en-US" sz="1000" dirty="0">
-                <a:solidFill>
-                  <a:schemeClr val="bg1">
-                    <a:lumMod val="95000"/>
-                  </a:schemeClr>
-                </a:solidFill>
-                <a:latin typeface="Noto Sans KR Medium" panose="020B0200000000000000" pitchFamily="34" charset="-128"/>
-                <a:ea typeface="Noto Sans KR Medium" panose="020B0200000000000000" pitchFamily="34" charset="-128"/>
-              </a:rPr>
-              <a:t> 대한 의존성이 발생할 것을 고려하여 </a:t>
-            </a:r>
-            <a:r>
-              <a:rPr lang="en-US" altLang="ko-KR" sz="1000" dirty="0" err="1">
-                <a:solidFill>
-                  <a:schemeClr val="bg1">
-                    <a:lumMod val="95000"/>
-                  </a:schemeClr>
-                </a:solidFill>
-                <a:latin typeface="Noto Sans KR Medium" panose="020B0200000000000000" pitchFamily="34" charset="-128"/>
-                <a:ea typeface="Noto Sans KR Medium" panose="020B0200000000000000" pitchFamily="34" charset="-128"/>
-              </a:rPr>
-              <a:t>IEffectHandler</a:t>
-            </a:r>
-            <a:r>
-              <a:rPr lang="en-US" altLang="ko-KR" sz="1000" dirty="0">
-                <a:solidFill>
-                  <a:schemeClr val="bg1">
-                    <a:lumMod val="95000"/>
-                  </a:schemeClr>
-                </a:solidFill>
-                <a:latin typeface="Noto Sans KR Medium" panose="020B0200000000000000" pitchFamily="34" charset="-128"/>
-                <a:ea typeface="Noto Sans KR Medium" panose="020B0200000000000000" pitchFamily="34" charset="-128"/>
-              </a:rPr>
-              <a:t> </a:t>
-            </a:r>
-            <a:r>
-              <a:rPr lang="ko-KR" altLang="en-US" sz="1000" dirty="0">
-                <a:solidFill>
-                  <a:schemeClr val="bg1">
-                    <a:lumMod val="95000"/>
-                  </a:schemeClr>
-                </a:solidFill>
-                <a:latin typeface="Noto Sans KR Medium" panose="020B0200000000000000" pitchFamily="34" charset="-128"/>
-                <a:ea typeface="Noto Sans KR Medium" panose="020B0200000000000000" pitchFamily="34" charset="-128"/>
-              </a:rPr>
-              <a:t>인터페이스를 만들어 </a:t>
-            </a:r>
-            <a:r>
-              <a:rPr lang="en-US" altLang="ko-KR" sz="1000" dirty="0" err="1">
-                <a:solidFill>
-                  <a:schemeClr val="bg1">
-                    <a:lumMod val="95000"/>
-                  </a:schemeClr>
-                </a:solidFill>
-                <a:latin typeface="Noto Sans KR Medium" panose="020B0200000000000000" pitchFamily="34" charset="-128"/>
-                <a:ea typeface="Noto Sans KR Medium" panose="020B0200000000000000" pitchFamily="34" charset="-128"/>
-              </a:rPr>
-              <a:t>ApplyEffect</a:t>
-            </a:r>
-            <a:r>
-              <a:rPr lang="en-US" altLang="ko-KR" sz="1000" dirty="0">
-                <a:solidFill>
-                  <a:schemeClr val="bg1">
-                    <a:lumMod val="95000"/>
-                  </a:schemeClr>
-                </a:solidFill>
-                <a:latin typeface="Noto Sans KR Medium" panose="020B0200000000000000" pitchFamily="34" charset="-128"/>
-                <a:ea typeface="Noto Sans KR Medium" panose="020B0200000000000000" pitchFamily="34" charset="-128"/>
-              </a:rPr>
-              <a:t> </a:t>
-            </a:r>
-            <a:r>
-              <a:rPr lang="ko-KR" altLang="en-US" sz="1000" dirty="0" err="1">
-                <a:solidFill>
-                  <a:schemeClr val="bg1">
-                    <a:lumMod val="95000"/>
-                  </a:schemeClr>
-                </a:solidFill>
-                <a:latin typeface="Noto Sans KR Medium" panose="020B0200000000000000" pitchFamily="34" charset="-128"/>
-                <a:ea typeface="Noto Sans KR Medium" panose="020B0200000000000000" pitchFamily="34" charset="-128"/>
-              </a:rPr>
-              <a:t>메서드를</a:t>
-            </a:r>
-            <a:r>
-              <a:rPr lang="ko-KR" altLang="en-US" sz="1000" dirty="0">
-                <a:solidFill>
-                  <a:schemeClr val="bg1">
-                    <a:lumMod val="95000"/>
-                  </a:schemeClr>
-                </a:solidFill>
-                <a:latin typeface="Noto Sans KR Medium" panose="020B0200000000000000" pitchFamily="34" charset="-128"/>
-                <a:ea typeface="Noto Sans KR Medium" panose="020B0200000000000000" pitchFamily="34" charset="-128"/>
-              </a:rPr>
-              <a:t> 작성하도록 함</a:t>
-            </a:r>
-            <a:endParaRPr lang="en-US" altLang="ko-KR" sz="1000" dirty="0">
-              <a:solidFill>
-                <a:schemeClr val="bg1">
-                  <a:lumMod val="95000"/>
-                </a:schemeClr>
-              </a:solidFill>
-              <a:latin typeface="Noto Sans KR Medium" panose="020B0200000000000000" pitchFamily="34" charset="-128"/>
-              <a:ea typeface="Noto Sans KR Medium" panose="020B0200000000000000" pitchFamily="34" charset="-128"/>
-            </a:endParaRPr>
-          </a:p>
-          <a:p>
-            <a:pPr marL="171450" indent="-171450">
-              <a:buFontTx/>
-              <a:buChar char="-"/>
-            </a:pPr>
-            <a:r>
-              <a:rPr lang="en-US" altLang="ko-KR" sz="1000" dirty="0">
-                <a:solidFill>
-                  <a:schemeClr val="bg1">
-                    <a:lumMod val="95000"/>
-                  </a:schemeClr>
-                </a:solidFill>
-                <a:latin typeface="Noto Sans KR Medium" panose="020B0200000000000000" pitchFamily="34" charset="-128"/>
-                <a:ea typeface="Noto Sans KR Medium" panose="020B0200000000000000" pitchFamily="34" charset="-128"/>
-              </a:rPr>
-              <a:t>Activate </a:t>
-            </a:r>
-            <a:r>
-              <a:rPr lang="ko-KR" altLang="en-US" sz="1000" dirty="0" err="1">
-                <a:solidFill>
-                  <a:schemeClr val="bg1">
-                    <a:lumMod val="95000"/>
-                  </a:schemeClr>
-                </a:solidFill>
-                <a:latin typeface="Noto Sans KR Medium" panose="020B0200000000000000" pitchFamily="34" charset="-128"/>
-                <a:ea typeface="Noto Sans KR Medium" panose="020B0200000000000000" pitchFamily="34" charset="-128"/>
-              </a:rPr>
-              <a:t>메서드를</a:t>
-            </a:r>
-            <a:r>
-              <a:rPr lang="ko-KR" altLang="en-US" sz="1000" dirty="0">
-                <a:solidFill>
-                  <a:schemeClr val="bg1">
-                    <a:lumMod val="95000"/>
-                  </a:schemeClr>
-                </a:solidFill>
-                <a:latin typeface="Noto Sans KR Medium" panose="020B0200000000000000" pitchFamily="34" charset="-128"/>
-                <a:ea typeface="Noto Sans KR Medium" panose="020B0200000000000000" pitchFamily="34" charset="-128"/>
-              </a:rPr>
-              <a:t> 사용해서 구현한 효과 작동</a:t>
-            </a:r>
-            <a:r>
-              <a:rPr lang="en-US" altLang="ko-KR" sz="1000" dirty="0">
-                <a:solidFill>
-                  <a:schemeClr val="bg1">
-                    <a:lumMod val="95000"/>
-                  </a:schemeClr>
-                </a:solidFill>
-                <a:latin typeface="Noto Sans KR Medium" panose="020B0200000000000000" pitchFamily="34" charset="-128"/>
-                <a:ea typeface="Noto Sans KR Medium" panose="020B0200000000000000" pitchFamily="34" charset="-128"/>
-              </a:rPr>
-              <a:t> (</a:t>
-            </a:r>
-            <a:r>
-              <a:rPr lang="ko-KR" altLang="en-US" sz="1000" dirty="0" err="1">
-                <a:solidFill>
-                  <a:schemeClr val="bg1">
-                    <a:lumMod val="95000"/>
-                  </a:schemeClr>
-                </a:solidFill>
-                <a:latin typeface="Noto Sans KR Medium" panose="020B0200000000000000" pitchFamily="34" charset="-128"/>
-                <a:ea typeface="Noto Sans KR Medium" panose="020B0200000000000000" pitchFamily="34" charset="-128"/>
-              </a:rPr>
-              <a:t>다형성</a:t>
-            </a:r>
-            <a:r>
-              <a:rPr lang="en-US" altLang="ko-KR" sz="1000" dirty="0">
-                <a:solidFill>
-                  <a:schemeClr val="bg1">
-                    <a:lumMod val="95000"/>
-                  </a:schemeClr>
-                </a:solidFill>
-                <a:latin typeface="Noto Sans KR Medium" panose="020B0200000000000000" pitchFamily="34" charset="-128"/>
-                <a:ea typeface="Noto Sans KR Medium" panose="020B0200000000000000" pitchFamily="34" charset="-128"/>
-              </a:rPr>
-              <a:t>)</a:t>
-            </a:r>
-          </a:p>
-          <a:p>
-            <a:endParaRPr lang="en-US" altLang="ko-KR" sz="1000" dirty="0">
-              <a:solidFill>
-                <a:schemeClr val="bg1">
-                  <a:lumMod val="95000"/>
-                </a:schemeClr>
-              </a:solidFill>
-              <a:latin typeface="Noto Sans KR Medium" panose="020B0200000000000000" pitchFamily="34" charset="-128"/>
-              <a:ea typeface="Noto Sans KR Medium" panose="020B0200000000000000" pitchFamily="34" charset="-128"/>
-            </a:endParaRPr>
-          </a:p>
-          <a:p>
-            <a:r>
-              <a:rPr lang="ko-KR" altLang="en-US" sz="1000" dirty="0">
-                <a:solidFill>
-                  <a:schemeClr val="bg1">
-                    <a:lumMod val="95000"/>
-                  </a:schemeClr>
-                </a:solidFill>
-                <a:latin typeface="Noto Sans KR Medium" panose="020B0200000000000000" pitchFamily="34" charset="-128"/>
-                <a:ea typeface="Noto Sans KR Medium" panose="020B0200000000000000" pitchFamily="34" charset="-128"/>
-              </a:rPr>
-              <a:t>하위 클래스</a:t>
-            </a:r>
-            <a:endParaRPr lang="en-US" altLang="ko-KR" sz="1000" dirty="0">
-              <a:solidFill>
-                <a:schemeClr val="bg1">
-                  <a:lumMod val="95000"/>
-                </a:schemeClr>
-              </a:solidFill>
-              <a:latin typeface="Noto Sans KR Medium" panose="020B0200000000000000" pitchFamily="34" charset="-128"/>
-              <a:ea typeface="Noto Sans KR Medium" panose="020B0200000000000000" pitchFamily="34" charset="-128"/>
-            </a:endParaRPr>
-          </a:p>
-          <a:p>
-            <a:pPr marL="628650" lvl="1" indent="-171450">
-              <a:buFontTx/>
-              <a:buChar char="-"/>
-            </a:pPr>
-            <a:r>
-              <a:rPr lang="en-US" altLang="ko-KR" sz="1000" dirty="0" err="1">
-                <a:solidFill>
-                  <a:schemeClr val="bg1">
-                    <a:lumMod val="95000"/>
-                  </a:schemeClr>
-                </a:solidFill>
-                <a:latin typeface="Noto Sans KR Medium" panose="020B0200000000000000" pitchFamily="34" charset="-128"/>
-                <a:ea typeface="Noto Sans KR Medium" panose="020B0200000000000000" pitchFamily="34" charset="-128"/>
-              </a:rPr>
-              <a:t>TermEffect</a:t>
-            </a:r>
-            <a:r>
-              <a:rPr lang="en-US" altLang="ko-KR" sz="1000" dirty="0">
-                <a:solidFill>
-                  <a:schemeClr val="bg1">
-                    <a:lumMod val="95000"/>
-                  </a:schemeClr>
-                </a:solidFill>
-                <a:latin typeface="Noto Sans KR Medium" panose="020B0200000000000000" pitchFamily="34" charset="-128"/>
-                <a:ea typeface="Noto Sans KR Medium" panose="020B0200000000000000" pitchFamily="34" charset="-128"/>
-              </a:rPr>
-              <a:t> : </a:t>
-            </a:r>
-            <a:r>
-              <a:rPr lang="ko-KR" altLang="en-US" sz="1000" dirty="0">
-                <a:solidFill>
-                  <a:schemeClr val="bg1">
-                    <a:lumMod val="95000"/>
-                  </a:schemeClr>
-                </a:solidFill>
-                <a:latin typeface="Noto Sans KR Medium" panose="020B0200000000000000" pitchFamily="34" charset="-128"/>
-                <a:ea typeface="Noto Sans KR Medium" panose="020B0200000000000000" pitchFamily="34" charset="-128"/>
-              </a:rPr>
-              <a:t>일정 기간 동안 유지되어 효과를 부여 </a:t>
-            </a:r>
-            <a:r>
-              <a:rPr lang="en-US" altLang="ko-KR" sz="1000" dirty="0">
-                <a:solidFill>
-                  <a:schemeClr val="bg1">
-                    <a:lumMod val="95000"/>
-                  </a:schemeClr>
-                </a:solidFill>
-                <a:latin typeface="Noto Sans KR Medium" panose="020B0200000000000000" pitchFamily="34" charset="-128"/>
-                <a:ea typeface="Noto Sans KR Medium" panose="020B0200000000000000" pitchFamily="34" charset="-128"/>
-              </a:rPr>
-              <a:t>(</a:t>
-            </a:r>
-            <a:r>
-              <a:rPr lang="ko-KR" altLang="en-US" sz="1000" dirty="0">
-                <a:solidFill>
-                  <a:schemeClr val="bg1">
-                    <a:lumMod val="95000"/>
-                  </a:schemeClr>
-                </a:solidFill>
-                <a:latin typeface="Noto Sans KR Medium" panose="020B0200000000000000" pitchFamily="34" charset="-128"/>
-                <a:ea typeface="Noto Sans KR Medium" panose="020B0200000000000000" pitchFamily="34" charset="-128"/>
-              </a:rPr>
-              <a:t>예</a:t>
-            </a:r>
-            <a:r>
-              <a:rPr lang="en-US" altLang="ko-KR" sz="1000" dirty="0">
-                <a:solidFill>
-                  <a:schemeClr val="bg1">
-                    <a:lumMod val="95000"/>
-                  </a:schemeClr>
-                </a:solidFill>
-                <a:latin typeface="Noto Sans KR Medium" panose="020B0200000000000000" pitchFamily="34" charset="-128"/>
-                <a:ea typeface="Noto Sans KR Medium" panose="020B0200000000000000" pitchFamily="34" charset="-128"/>
-              </a:rPr>
-              <a:t>, 10</a:t>
-            </a:r>
-            <a:r>
-              <a:rPr lang="ko-KR" altLang="en-US" sz="1000" dirty="0">
-                <a:solidFill>
-                  <a:schemeClr val="bg1">
-                    <a:lumMod val="95000"/>
-                  </a:schemeClr>
-                </a:solidFill>
-                <a:latin typeface="Noto Sans KR Medium" panose="020B0200000000000000" pitchFamily="34" charset="-128"/>
-                <a:ea typeface="Noto Sans KR Medium" panose="020B0200000000000000" pitchFamily="34" charset="-128"/>
-              </a:rPr>
-              <a:t>초 동안</a:t>
-            </a:r>
-            <a:r>
-              <a:rPr lang="en-US" altLang="ko-KR" sz="1000" dirty="0">
-                <a:solidFill>
-                  <a:schemeClr val="bg1">
-                    <a:lumMod val="95000"/>
-                  </a:schemeClr>
-                </a:solidFill>
-                <a:latin typeface="Noto Sans KR Medium" panose="020B0200000000000000" pitchFamily="34" charset="-128"/>
-                <a:ea typeface="Noto Sans KR Medium" panose="020B0200000000000000" pitchFamily="34" charset="-128"/>
-              </a:rPr>
-              <a:t>)</a:t>
-            </a:r>
-          </a:p>
-          <a:p>
-            <a:pPr marL="628650" lvl="1" indent="-171450">
-              <a:buFontTx/>
-              <a:buChar char="-"/>
-            </a:pPr>
-            <a:r>
-              <a:rPr lang="en-US" altLang="ko-KR" sz="1000" dirty="0" err="1">
-                <a:solidFill>
-                  <a:schemeClr val="bg1">
-                    <a:lumMod val="95000"/>
-                  </a:schemeClr>
-                </a:solidFill>
-                <a:latin typeface="Noto Sans KR Medium" panose="020B0200000000000000" pitchFamily="34" charset="-128"/>
-                <a:ea typeface="Noto Sans KR Medium" panose="020B0200000000000000" pitchFamily="34" charset="-128"/>
-              </a:rPr>
-              <a:t>PeriodicalEffect</a:t>
-            </a:r>
-            <a:r>
-              <a:rPr lang="en-US" altLang="ko-KR" sz="1000" dirty="0">
-                <a:solidFill>
-                  <a:schemeClr val="bg1">
-                    <a:lumMod val="95000"/>
-                  </a:schemeClr>
-                </a:solidFill>
-                <a:latin typeface="Noto Sans KR Medium" panose="020B0200000000000000" pitchFamily="34" charset="-128"/>
-                <a:ea typeface="Noto Sans KR Medium" panose="020B0200000000000000" pitchFamily="34" charset="-128"/>
-              </a:rPr>
-              <a:t> : </a:t>
-            </a:r>
-            <a:r>
-              <a:rPr lang="ko-KR" altLang="en-US" sz="1000" dirty="0">
-                <a:solidFill>
-                  <a:schemeClr val="bg1">
-                    <a:lumMod val="95000"/>
-                  </a:schemeClr>
-                </a:solidFill>
-                <a:latin typeface="Noto Sans KR Medium" panose="020B0200000000000000" pitchFamily="34" charset="-128"/>
-                <a:ea typeface="Noto Sans KR Medium" panose="020B0200000000000000" pitchFamily="34" charset="-128"/>
-              </a:rPr>
-              <a:t>일정 기간 동안</a:t>
-            </a:r>
-            <a:r>
-              <a:rPr lang="en-US" altLang="ko-KR" sz="1000" dirty="0">
-                <a:solidFill>
-                  <a:schemeClr val="bg1">
-                    <a:lumMod val="95000"/>
-                  </a:schemeClr>
-                </a:solidFill>
-                <a:latin typeface="Noto Sans KR Medium" panose="020B0200000000000000" pitchFamily="34" charset="-128"/>
-                <a:ea typeface="Noto Sans KR Medium" panose="020B0200000000000000" pitchFamily="34" charset="-128"/>
-              </a:rPr>
-              <a:t>, </a:t>
-            </a:r>
-            <a:r>
-              <a:rPr lang="ko-KR" altLang="en-US" sz="1000" dirty="0">
-                <a:solidFill>
-                  <a:schemeClr val="bg1">
-                    <a:lumMod val="95000"/>
-                  </a:schemeClr>
-                </a:solidFill>
-                <a:latin typeface="Noto Sans KR Medium" panose="020B0200000000000000" pitchFamily="34" charset="-128"/>
-                <a:ea typeface="Noto Sans KR Medium" panose="020B0200000000000000" pitchFamily="34" charset="-128"/>
-              </a:rPr>
-              <a:t>특정 주기마다 효과를 부여 </a:t>
-            </a:r>
-            <a:r>
-              <a:rPr lang="en-US" altLang="ko-KR" sz="1000" dirty="0">
-                <a:solidFill>
-                  <a:schemeClr val="bg1">
-                    <a:lumMod val="95000"/>
-                  </a:schemeClr>
-                </a:solidFill>
-                <a:latin typeface="Noto Sans KR Medium" panose="020B0200000000000000" pitchFamily="34" charset="-128"/>
-                <a:ea typeface="Noto Sans KR Medium" panose="020B0200000000000000" pitchFamily="34" charset="-128"/>
-              </a:rPr>
-              <a:t>(</a:t>
-            </a:r>
-            <a:r>
-              <a:rPr lang="ko-KR" altLang="en-US" sz="1000" dirty="0">
-                <a:solidFill>
-                  <a:schemeClr val="bg1">
-                    <a:lumMod val="95000"/>
-                  </a:schemeClr>
-                </a:solidFill>
-                <a:latin typeface="Noto Sans KR Medium" panose="020B0200000000000000" pitchFamily="34" charset="-128"/>
-                <a:ea typeface="Noto Sans KR Medium" panose="020B0200000000000000" pitchFamily="34" charset="-128"/>
-              </a:rPr>
-              <a:t>예</a:t>
-            </a:r>
-            <a:r>
-              <a:rPr lang="en-US" altLang="ko-KR" sz="1000" dirty="0">
-                <a:solidFill>
-                  <a:schemeClr val="bg1">
-                    <a:lumMod val="95000"/>
-                  </a:schemeClr>
-                </a:solidFill>
-                <a:latin typeface="Noto Sans KR Medium" panose="020B0200000000000000" pitchFamily="34" charset="-128"/>
-                <a:ea typeface="Noto Sans KR Medium" panose="020B0200000000000000" pitchFamily="34" charset="-128"/>
-              </a:rPr>
-              <a:t>, 10</a:t>
-            </a:r>
-            <a:r>
-              <a:rPr lang="ko-KR" altLang="en-US" sz="1000" dirty="0">
-                <a:solidFill>
-                  <a:schemeClr val="bg1">
-                    <a:lumMod val="95000"/>
-                  </a:schemeClr>
-                </a:solidFill>
-                <a:latin typeface="Noto Sans KR Medium" panose="020B0200000000000000" pitchFamily="34" charset="-128"/>
-                <a:ea typeface="Noto Sans KR Medium" panose="020B0200000000000000" pitchFamily="34" charset="-128"/>
-              </a:rPr>
-              <a:t>초 동안 </a:t>
-            </a:r>
-            <a:r>
-              <a:rPr lang="en-US" altLang="ko-KR" sz="1000" dirty="0">
-                <a:solidFill>
-                  <a:schemeClr val="bg1">
-                    <a:lumMod val="95000"/>
-                  </a:schemeClr>
-                </a:solidFill>
-                <a:latin typeface="Noto Sans KR Medium" panose="020B0200000000000000" pitchFamily="34" charset="-128"/>
-                <a:ea typeface="Noto Sans KR Medium" panose="020B0200000000000000" pitchFamily="34" charset="-128"/>
-              </a:rPr>
-              <a:t>1</a:t>
-            </a:r>
-            <a:r>
-              <a:rPr lang="ko-KR" altLang="en-US" sz="1000" dirty="0">
-                <a:solidFill>
-                  <a:schemeClr val="bg1">
-                    <a:lumMod val="95000"/>
-                  </a:schemeClr>
-                </a:solidFill>
-                <a:latin typeface="Noto Sans KR Medium" panose="020B0200000000000000" pitchFamily="34" charset="-128"/>
-                <a:ea typeface="Noto Sans KR Medium" panose="020B0200000000000000" pitchFamily="34" charset="-128"/>
-              </a:rPr>
-              <a:t>초마다</a:t>
-            </a:r>
-            <a:r>
-              <a:rPr lang="en-US" altLang="ko-KR" sz="1000" dirty="0">
-                <a:solidFill>
-                  <a:schemeClr val="bg1">
-                    <a:lumMod val="95000"/>
-                  </a:schemeClr>
-                </a:solidFill>
-                <a:latin typeface="Noto Sans KR Medium" panose="020B0200000000000000" pitchFamily="34" charset="-128"/>
-                <a:ea typeface="Noto Sans KR Medium" panose="020B0200000000000000" pitchFamily="34" charset="-128"/>
-              </a:rPr>
-              <a:t>)</a:t>
-            </a:r>
-          </a:p>
-          <a:p>
-            <a:pPr marL="628650" lvl="1" indent="-171450">
-              <a:buFontTx/>
-              <a:buChar char="-"/>
-            </a:pPr>
-            <a:r>
-              <a:rPr lang="en-US" altLang="ko-KR" sz="1000" dirty="0" err="1">
-                <a:solidFill>
-                  <a:schemeClr val="bg1">
-                    <a:lumMod val="95000"/>
-                  </a:schemeClr>
-                </a:solidFill>
-                <a:latin typeface="Noto Sans KR Medium" panose="020B0200000000000000" pitchFamily="34" charset="-128"/>
-                <a:ea typeface="Noto Sans KR Medium" panose="020B0200000000000000" pitchFamily="34" charset="-128"/>
-              </a:rPr>
-              <a:t>EventEffect</a:t>
-            </a:r>
-            <a:r>
-              <a:rPr lang="en-US" altLang="ko-KR" sz="1000" dirty="0">
-                <a:solidFill>
-                  <a:schemeClr val="bg1">
-                    <a:lumMod val="95000"/>
-                  </a:schemeClr>
-                </a:solidFill>
-                <a:latin typeface="Noto Sans KR Medium" panose="020B0200000000000000" pitchFamily="34" charset="-128"/>
-                <a:ea typeface="Noto Sans KR Medium" panose="020B0200000000000000" pitchFamily="34" charset="-128"/>
-              </a:rPr>
-              <a:t> : </a:t>
-            </a:r>
-            <a:r>
-              <a:rPr lang="ko-KR" altLang="en-US" sz="1000" dirty="0" err="1">
-                <a:solidFill>
-                  <a:schemeClr val="bg1">
-                    <a:lumMod val="95000"/>
-                  </a:schemeClr>
-                </a:solidFill>
-                <a:latin typeface="Noto Sans KR Medium" panose="020B0200000000000000" pitchFamily="34" charset="-128"/>
-                <a:ea typeface="Noto Sans KR Medium" panose="020B0200000000000000" pitchFamily="34" charset="-128"/>
-              </a:rPr>
-              <a:t>액터가</a:t>
-            </a:r>
-            <a:r>
-              <a:rPr lang="ko-KR" altLang="en-US" sz="1000" dirty="0">
-                <a:solidFill>
-                  <a:schemeClr val="bg1">
-                    <a:lumMod val="95000"/>
-                  </a:schemeClr>
-                </a:solidFill>
-                <a:latin typeface="Noto Sans KR Medium" panose="020B0200000000000000" pitchFamily="34" charset="-128"/>
-                <a:ea typeface="Noto Sans KR Medium" panose="020B0200000000000000" pitchFamily="34" charset="-128"/>
-              </a:rPr>
-              <a:t> 특정한 조건을 만족할 때 효과를 부여 </a:t>
-            </a:r>
-            <a:r>
-              <a:rPr lang="en-US" altLang="ko-KR" sz="1000" dirty="0">
-                <a:solidFill>
-                  <a:schemeClr val="bg1">
-                    <a:lumMod val="95000"/>
-                  </a:schemeClr>
-                </a:solidFill>
-                <a:latin typeface="Noto Sans KR Medium" panose="020B0200000000000000" pitchFamily="34" charset="-128"/>
-                <a:ea typeface="Noto Sans KR Medium" panose="020B0200000000000000" pitchFamily="34" charset="-128"/>
-              </a:rPr>
-              <a:t>(</a:t>
-            </a:r>
-            <a:r>
-              <a:rPr lang="ko-KR" altLang="en-US" sz="1000" dirty="0">
-                <a:solidFill>
-                  <a:schemeClr val="bg1">
-                    <a:lumMod val="95000"/>
-                  </a:schemeClr>
-                </a:solidFill>
-                <a:latin typeface="Noto Sans KR Medium" panose="020B0200000000000000" pitchFamily="34" charset="-128"/>
-                <a:ea typeface="Noto Sans KR Medium" panose="020B0200000000000000" pitchFamily="34" charset="-128"/>
-              </a:rPr>
-              <a:t>예</a:t>
-            </a:r>
-            <a:r>
-              <a:rPr lang="en-US" altLang="ko-KR" sz="1000" dirty="0">
-                <a:solidFill>
-                  <a:schemeClr val="bg1">
-                    <a:lumMod val="95000"/>
-                  </a:schemeClr>
-                </a:solidFill>
-                <a:latin typeface="Noto Sans KR Medium" panose="020B0200000000000000" pitchFamily="34" charset="-128"/>
-                <a:ea typeface="Noto Sans KR Medium" panose="020B0200000000000000" pitchFamily="34" charset="-128"/>
-              </a:rPr>
-              <a:t>, </a:t>
-            </a:r>
-            <a:r>
-              <a:rPr lang="ko-KR" altLang="en-US" sz="1000" dirty="0">
-                <a:solidFill>
-                  <a:schemeClr val="bg1">
-                    <a:lumMod val="95000"/>
-                  </a:schemeClr>
-                </a:solidFill>
-                <a:latin typeface="Noto Sans KR Medium" panose="020B0200000000000000" pitchFamily="34" charset="-128"/>
-                <a:ea typeface="Noto Sans KR Medium" panose="020B0200000000000000" pitchFamily="34" charset="-128"/>
-              </a:rPr>
-              <a:t>피격 시 발동</a:t>
+              <a:t>에셋입니다</a:t>
             </a:r>
             <a:r>
               <a:rPr lang="en-US" altLang="ko-KR" sz="1000" dirty="0" smtClean="0">
@@ -14313,7 +13410,81 @@
                 <a:latin typeface="Noto Sans KR Medium" panose="020B0200000000000000" pitchFamily="34" charset="-128"/>
                 <a:ea typeface="Noto Sans KR Medium" panose="020B0200000000000000" pitchFamily="34" charset="-128"/>
               </a:rPr>
-              <a:t>)</a:t>
+              <a:t>.</a:t>
+            </a:r>
+          </a:p>
+          <a:p>
+            <a:r>
+              <a:rPr lang="ko-KR" altLang="en-US" sz="1000" dirty="0" smtClean="0">
+                <a:solidFill>
+                  <a:schemeClr val="bg1">
+                    <a:lumMod val="95000"/>
+                  </a:schemeClr>
+                </a:solidFill>
+                <a:latin typeface="Noto Sans KR Medium" panose="020B0200000000000000" pitchFamily="34" charset="-128"/>
+                <a:ea typeface="Noto Sans KR Medium" panose="020B0200000000000000" pitchFamily="34" charset="-128"/>
+              </a:rPr>
+              <a:t>설정해둔 데이터 </a:t>
+            </a:r>
+            <a:r>
+              <a:rPr lang="ko-KR" altLang="en-US" sz="1000" dirty="0" err="1" smtClean="0">
+                <a:solidFill>
+                  <a:schemeClr val="bg1">
+                    <a:lumMod val="95000"/>
+                  </a:schemeClr>
+                </a:solidFill>
+                <a:latin typeface="Noto Sans KR Medium" panose="020B0200000000000000" pitchFamily="34" charset="-128"/>
+                <a:ea typeface="Noto Sans KR Medium" panose="020B0200000000000000" pitchFamily="34" charset="-128"/>
+              </a:rPr>
+              <a:t>에셋을</a:t>
+            </a:r>
+            <a:r>
+              <a:rPr lang="ko-KR" altLang="en-US" sz="1000" dirty="0" smtClean="0">
+                <a:solidFill>
+                  <a:schemeClr val="bg1">
+                    <a:lumMod val="95000"/>
+                  </a:schemeClr>
+                </a:solidFill>
+                <a:latin typeface="Noto Sans KR Medium" panose="020B0200000000000000" pitchFamily="34" charset="-128"/>
+                <a:ea typeface="Noto Sans KR Medium" panose="020B0200000000000000" pitchFamily="34" charset="-128"/>
+              </a:rPr>
+              <a:t> 액션 </a:t>
+            </a:r>
+            <a:r>
+              <a:rPr lang="ko-KR" altLang="en-US" sz="1000" dirty="0" err="1" smtClean="0">
+                <a:solidFill>
+                  <a:schemeClr val="bg1">
+                    <a:lumMod val="95000"/>
+                  </a:schemeClr>
+                </a:solidFill>
+                <a:latin typeface="Noto Sans KR Medium" panose="020B0200000000000000" pitchFamily="34" charset="-128"/>
+                <a:ea typeface="Noto Sans KR Medium" panose="020B0200000000000000" pitchFamily="34" charset="-128"/>
+              </a:rPr>
+              <a:t>에셋이나</a:t>
+            </a:r>
+            <a:r>
+              <a:rPr lang="ko-KR" altLang="en-US" sz="1000" dirty="0" smtClean="0">
+                <a:solidFill>
+                  <a:schemeClr val="bg1">
+                    <a:lumMod val="95000"/>
+                  </a:schemeClr>
+                </a:solidFill>
+                <a:latin typeface="Noto Sans KR Medium" panose="020B0200000000000000" pitchFamily="34" charset="-128"/>
+                <a:ea typeface="Noto Sans KR Medium" panose="020B0200000000000000" pitchFamily="34" charset="-128"/>
+              </a:rPr>
+              <a:t> 아이템에 유연하게 할당할 수 있습니다</a:t>
+            </a:r>
+            <a:r>
+              <a:rPr lang="en-US" altLang="ko-KR" sz="1000" dirty="0" smtClean="0">
+                <a:solidFill>
+                  <a:schemeClr val="bg1">
+                    <a:lumMod val="95000"/>
+                  </a:schemeClr>
+                </a:solidFill>
+                <a:latin typeface="Noto Sans KR Medium" panose="020B0200000000000000" pitchFamily="34" charset="-128"/>
+                <a:ea typeface="Noto Sans KR Medium" panose="020B0200000000000000" pitchFamily="34" charset="-128"/>
+              </a:rPr>
+              <a:t>.</a:t>
             </a:r>
           </a:p>
           <a:p>
@@ -14329,16 +13500,88 @@
           </a:p>
           <a:p>
             <a:r>
-              <a:rPr lang="en-US" altLang="ko-KR" sz="1000" dirty="0" err="1" smtClean="0">
-                <a:solidFill>
-                  <a:schemeClr val="bg1">
-                    <a:lumMod val="95000"/>
-                  </a:schemeClr>
-                </a:solidFill>
-                <a:latin typeface="Noto Sans KR Medium" panose="020B0200000000000000" pitchFamily="34" charset="-128"/>
-                <a:ea typeface="Noto Sans KR Medium" panose="020B0200000000000000" pitchFamily="34" charset="-128"/>
-              </a:rPr>
-              <a:t>UEffectData</a:t>
+              <a:rPr lang="ko-KR" altLang="en-US" sz="1000" dirty="0" smtClean="0">
+                <a:solidFill>
+                  <a:schemeClr val="bg1">
+                    <a:lumMod val="95000"/>
+                  </a:schemeClr>
+                </a:solidFill>
+                <a:latin typeface="Noto Sans KR Medium" panose="020B0200000000000000" pitchFamily="34" charset="-128"/>
+                <a:ea typeface="Noto Sans KR Medium" panose="020B0200000000000000" pitchFamily="34" charset="-128"/>
+              </a:rPr>
+              <a:t>특히</a:t>
+            </a:r>
+            <a:r>
+              <a:rPr lang="en-US" altLang="ko-KR" sz="1000" dirty="0" smtClean="0">
+                <a:solidFill>
+                  <a:schemeClr val="bg1">
+                    <a:lumMod val="95000"/>
+                  </a:schemeClr>
+                </a:solidFill>
+                <a:latin typeface="Noto Sans KR Medium" panose="020B0200000000000000" pitchFamily="34" charset="-128"/>
+                <a:ea typeface="Noto Sans KR Medium" panose="020B0200000000000000" pitchFamily="34" charset="-128"/>
+              </a:rPr>
+              <a:t>, </a:t>
+            </a:r>
+            <a:r>
+              <a:rPr lang="ko-KR" altLang="en-US" sz="1000" dirty="0" smtClean="0">
+                <a:solidFill>
+                  <a:schemeClr val="bg1">
+                    <a:lumMod val="95000"/>
+                  </a:schemeClr>
+                </a:solidFill>
+                <a:latin typeface="Noto Sans KR Medium" panose="020B0200000000000000" pitchFamily="34" charset="-128"/>
+                <a:ea typeface="Noto Sans KR Medium" panose="020B0200000000000000" pitchFamily="34" charset="-128"/>
+              </a:rPr>
+              <a:t>캐릭터 무기의 </a:t>
+            </a:r>
+            <a:r>
+              <a:rPr lang="ko-KR" altLang="en-US" sz="1000" dirty="0" err="1" smtClean="0">
+                <a:solidFill>
+                  <a:schemeClr val="bg1">
+                    <a:lumMod val="95000"/>
+                  </a:schemeClr>
+                </a:solidFill>
+                <a:latin typeface="Noto Sans KR Medium" panose="020B0200000000000000" pitchFamily="34" charset="-128"/>
+                <a:ea typeface="Noto Sans KR Medium" panose="020B0200000000000000" pitchFamily="34" charset="-128"/>
+              </a:rPr>
+              <a:t>컨셉에</a:t>
+            </a:r>
+            <a:r>
+              <a:rPr lang="ko-KR" altLang="en-US" sz="1000" dirty="0" smtClean="0">
+                <a:solidFill>
+                  <a:schemeClr val="bg1">
+                    <a:lumMod val="95000"/>
+                  </a:schemeClr>
+                </a:solidFill>
+                <a:latin typeface="Noto Sans KR Medium" panose="020B0200000000000000" pitchFamily="34" charset="-128"/>
+                <a:ea typeface="Noto Sans KR Medium" panose="020B0200000000000000" pitchFamily="34" charset="-128"/>
+              </a:rPr>
+              <a:t> 맞게 동일한 유형의 효과를 데이터 </a:t>
+            </a:r>
+            <a:r>
+              <a:rPr lang="ko-KR" altLang="en-US" sz="1000" dirty="0" err="1" smtClean="0">
+                <a:solidFill>
+                  <a:schemeClr val="bg1">
+                    <a:lumMod val="95000"/>
+                  </a:schemeClr>
+                </a:solidFill>
+                <a:latin typeface="Noto Sans KR Medium" panose="020B0200000000000000" pitchFamily="34" charset="-128"/>
+                <a:ea typeface="Noto Sans KR Medium" panose="020B0200000000000000" pitchFamily="34" charset="-128"/>
+              </a:rPr>
+              <a:t>에셋으로</a:t>
+            </a:r>
+            <a:r>
+              <a:rPr lang="ko-KR" altLang="en-US" sz="1000" dirty="0" smtClean="0">
+                <a:solidFill>
+                  <a:schemeClr val="bg1">
+                    <a:lumMod val="95000"/>
+                  </a:schemeClr>
+                </a:solidFill>
+                <a:latin typeface="Noto Sans KR Medium" panose="020B0200000000000000" pitchFamily="34" charset="-128"/>
+                <a:ea typeface="Noto Sans KR Medium" panose="020B0200000000000000" pitchFamily="34" charset="-128"/>
+              </a:rPr>
+              <a:t> 모듈화하고</a:t>
             </a:r>
             <a:endParaRPr lang="en-US" altLang="ko-KR" sz="1000" dirty="0" smtClean="0">
               <a:solidFill>
@@ -14351,21 +13594,17 @@
             </a:endParaRPr>
           </a:p>
           <a:p>
-            <a:pPr marL="171450" indent="-171450">
-              <a:buFontTx/>
-              <a:buChar char="-"/>
-            </a:pPr>
-            <a:r>
-              <a:rPr lang="ko-KR" altLang="en-US" sz="1000" dirty="0" smtClean="0">
-                <a:solidFill>
-                  <a:schemeClr val="bg1">
-                    <a:lumMod val="95000"/>
-                  </a:schemeClr>
-                </a:solidFill>
-                <a:latin typeface="Noto Sans KR Medium" panose="020B0200000000000000" pitchFamily="34" charset="-128"/>
-                <a:ea typeface="Noto Sans KR Medium" panose="020B0200000000000000" pitchFamily="34" charset="-128"/>
-              </a:rPr>
-              <a:t>액션</a:t>
+            <a:r>
+              <a:rPr lang="ko-KR" altLang="en-US" sz="1000" dirty="0" smtClean="0">
+                <a:solidFill>
+                  <a:schemeClr val="bg1">
+                    <a:lumMod val="95000"/>
+                  </a:schemeClr>
+                </a:solidFill>
+                <a:latin typeface="Noto Sans KR Medium" panose="020B0200000000000000" pitchFamily="34" charset="-128"/>
+                <a:ea typeface="Noto Sans KR Medium" panose="020B0200000000000000" pitchFamily="34" charset="-128"/>
+              </a:rPr>
+              <a:t>이 효과를 여러 액션에서 할당하여 재사용하는 방식으로 사용할 수 있습니다</a:t>
             </a:r>
             <a:r>
               <a:rPr lang="en-US" altLang="ko-KR" sz="1000" dirty="0" smtClean="0">
@@ -14377,164 +13616,8 @@
                 <a:latin typeface="Noto Sans KR Medium" panose="020B0200000000000000" pitchFamily="34" charset="-128"/>
                 <a:ea typeface="Noto Sans KR Medium" panose="020B0200000000000000" pitchFamily="34" charset="-128"/>
               </a:rPr>
-              <a:t>, </a:t>
-            </a:r>
-            <a:r>
-              <a:rPr lang="ko-KR" altLang="en-US" sz="1000" dirty="0" err="1" smtClean="0">
-                <a:solidFill>
-                  <a:schemeClr val="bg1">
-                    <a:lumMod val="95000"/>
-                  </a:schemeClr>
-                </a:solidFill>
-                <a:latin typeface="Noto Sans KR Medium" panose="020B0200000000000000" pitchFamily="34" charset="-128"/>
-                <a:ea typeface="Noto Sans KR Medium" panose="020B0200000000000000" pitchFamily="34" charset="-128"/>
-              </a:rPr>
-              <a:t>스킬에서</a:t>
-            </a:r>
-            <a:r>
-              <a:rPr lang="ko-KR" altLang="en-US" sz="1000" dirty="0" smtClean="0">
-                <a:solidFill>
-                  <a:schemeClr val="bg1">
-                    <a:lumMod val="95000"/>
-                  </a:schemeClr>
-                </a:solidFill>
-                <a:latin typeface="Noto Sans KR Medium" panose="020B0200000000000000" pitchFamily="34" charset="-128"/>
-                <a:ea typeface="Noto Sans KR Medium" panose="020B0200000000000000" pitchFamily="34" charset="-128"/>
-              </a:rPr>
-              <a:t> 재사용할 수 있도록 적용 </a:t>
-            </a:r>
-            <a:r>
-              <a:rPr lang="ko-KR" altLang="en-US" sz="1000" dirty="0" err="1" smtClean="0">
-                <a:solidFill>
-                  <a:schemeClr val="bg1">
-                    <a:lumMod val="95000"/>
-                  </a:schemeClr>
-                </a:solidFill>
-                <a:latin typeface="Noto Sans KR Medium" panose="020B0200000000000000" pitchFamily="34" charset="-128"/>
-                <a:ea typeface="Noto Sans KR Medium" panose="020B0200000000000000" pitchFamily="34" charset="-128"/>
-              </a:rPr>
-              <a:t>값등을</a:t>
-            </a:r>
-            <a:r>
-              <a:rPr lang="ko-KR" altLang="en-US" sz="1000" dirty="0">
-                <a:solidFill>
-                  <a:schemeClr val="bg1">
-                    <a:lumMod val="95000"/>
-                  </a:schemeClr>
-                </a:solidFill>
-                <a:latin typeface="Noto Sans KR Medium" panose="020B0200000000000000" pitchFamily="34" charset="-128"/>
-                <a:ea typeface="Noto Sans KR Medium" panose="020B0200000000000000" pitchFamily="34" charset="-128"/>
-              </a:rPr>
-              <a:t> </a:t>
-            </a:r>
-            <a:r>
-              <a:rPr lang="ko-KR" altLang="en-US" sz="1000" dirty="0" smtClean="0">
-                <a:solidFill>
-                  <a:schemeClr val="bg1">
-                    <a:lumMod val="95000"/>
-                  </a:schemeClr>
-                </a:solidFill>
-                <a:latin typeface="Noto Sans KR Medium" panose="020B0200000000000000" pitchFamily="34" charset="-128"/>
-                <a:ea typeface="Noto Sans KR Medium" panose="020B0200000000000000" pitchFamily="34" charset="-128"/>
-              </a:rPr>
-              <a:t>저장한 데이터 </a:t>
-            </a:r>
-            <a:r>
-              <a:rPr lang="ko-KR" altLang="en-US" sz="1000" dirty="0" err="1" smtClean="0">
-                <a:solidFill>
-                  <a:schemeClr val="bg1">
-                    <a:lumMod val="95000"/>
-                  </a:schemeClr>
-                </a:solidFill>
-                <a:latin typeface="Noto Sans KR Medium" panose="020B0200000000000000" pitchFamily="34" charset="-128"/>
-                <a:ea typeface="Noto Sans KR Medium" panose="020B0200000000000000" pitchFamily="34" charset="-128"/>
-              </a:rPr>
-              <a:t>에셋</a:t>
-            </a:r>
-            <a:endParaRPr lang="en-US" altLang="ko-KR" sz="1000" dirty="0" smtClean="0">
-              <a:solidFill>
-                <a:schemeClr val="bg1">
-                  <a:lumMod val="95000"/>
-                </a:schemeClr>
-              </a:solidFill>
-              <a:latin typeface="Noto Sans KR Medium" panose="020B0200000000000000" pitchFamily="34" charset="-128"/>
-              <a:ea typeface="Noto Sans KR Medium" panose="020B0200000000000000" pitchFamily="34" charset="-128"/>
-            </a:endParaRPr>
-          </a:p>
-          <a:p>
-            <a:pPr marL="171450" indent="-171450">
-              <a:buFontTx/>
-              <a:buChar char="-"/>
-            </a:pPr>
-            <a:r>
-              <a:rPr lang="ko-KR" altLang="en-US" sz="1000" dirty="0" smtClean="0">
-                <a:solidFill>
-                  <a:schemeClr val="bg1">
-                    <a:lumMod val="95000"/>
-                  </a:schemeClr>
-                </a:solidFill>
-                <a:latin typeface="Noto Sans KR Medium" panose="020B0200000000000000" pitchFamily="34" charset="-128"/>
-                <a:ea typeface="Noto Sans KR Medium" panose="020B0200000000000000" pitchFamily="34" charset="-128"/>
-              </a:rPr>
-              <a:t>만들어둔 데이터 </a:t>
-            </a:r>
-            <a:r>
-              <a:rPr lang="ko-KR" altLang="en-US" sz="1000" dirty="0" err="1" smtClean="0">
-                <a:solidFill>
-                  <a:schemeClr val="bg1">
-                    <a:lumMod val="95000"/>
-                  </a:schemeClr>
-                </a:solidFill>
-                <a:latin typeface="Noto Sans KR Medium" panose="020B0200000000000000" pitchFamily="34" charset="-128"/>
-                <a:ea typeface="Noto Sans KR Medium" panose="020B0200000000000000" pitchFamily="34" charset="-128"/>
-              </a:rPr>
-              <a:t>애셋은</a:t>
-            </a:r>
-            <a:r>
-              <a:rPr lang="ko-KR" altLang="en-US" sz="1000" dirty="0" smtClean="0">
-                <a:solidFill>
-                  <a:schemeClr val="bg1">
-                    <a:lumMod val="95000"/>
-                  </a:schemeClr>
-                </a:solidFill>
-                <a:latin typeface="Noto Sans KR Medium" panose="020B0200000000000000" pitchFamily="34" charset="-128"/>
-                <a:ea typeface="Noto Sans KR Medium" panose="020B0200000000000000" pitchFamily="34" charset="-128"/>
-              </a:rPr>
-              <a:t> 아이템과 액션 </a:t>
-            </a:r>
-            <a:r>
-              <a:rPr lang="ko-KR" altLang="en-US" sz="1000" dirty="0" err="1" smtClean="0">
-                <a:solidFill>
-                  <a:schemeClr val="bg1">
-                    <a:lumMod val="95000"/>
-                  </a:schemeClr>
-                </a:solidFill>
-                <a:latin typeface="Noto Sans KR Medium" panose="020B0200000000000000" pitchFamily="34" charset="-128"/>
-                <a:ea typeface="Noto Sans KR Medium" panose="020B0200000000000000" pitchFamily="34" charset="-128"/>
-              </a:rPr>
-              <a:t>에셋에</a:t>
-            </a:r>
-            <a:r>
-              <a:rPr lang="ko-KR" altLang="en-US" sz="1000" dirty="0" smtClean="0">
-                <a:solidFill>
-                  <a:schemeClr val="bg1">
-                    <a:lumMod val="95000"/>
-                  </a:schemeClr>
-                </a:solidFill>
-                <a:latin typeface="Noto Sans KR Medium" panose="020B0200000000000000" pitchFamily="34" charset="-128"/>
-                <a:ea typeface="Noto Sans KR Medium" panose="020B0200000000000000" pitchFamily="34" charset="-128"/>
-              </a:rPr>
-              <a:t> 등록해서 사용</a:t>
-            </a:r>
-            <a:endParaRPr lang="en-US" altLang="ko-KR" sz="1000" dirty="0" smtClean="0">
-              <a:solidFill>
-                <a:schemeClr val="bg1">
-                  <a:lumMod val="95000"/>
-                </a:schemeClr>
-              </a:solidFill>
-              <a:latin typeface="Noto Sans KR Medium" panose="020B0200000000000000" pitchFamily="34" charset="-128"/>
-              <a:ea typeface="Noto Sans KR Medium" panose="020B0200000000000000" pitchFamily="34" charset="-128"/>
-            </a:endParaRPr>
+              <a:t>.</a:t>
+            </a:r>
           </a:p>
         </p:txBody>
       </p:sp>
@@ -14569,7 +13652,7 @@
                 <a:latin typeface="Noto Sans KR ExtraBold" panose="020B0200000000000000" pitchFamily="34" charset="-128"/>
                 <a:ea typeface="Noto Sans KR ExtraBold" panose="020B0200000000000000" pitchFamily="34" charset="-128"/>
               </a:rPr>
-              <a:t>UEffect</a:t>
+              <a:t>UEffectData</a:t>
             </a:r>
             <a:endParaRPr lang="en-US" altLang="ko-KR" sz="1000" dirty="0" smtClean="0">
               <a:solidFill>
@@ -14591,8 +13674,8 @@
         </p:nvSpPr>
         <p:spPr>
           <a:xfrm>
-            <a:off x="6666333" y="2649594"/>
-            <a:ext cx="5179769" cy="1715656"/>
+            <a:off x="6666333" y="315047"/>
+            <a:ext cx="5179769" cy="3437768"/>
           </a:xfrm>
           <a:prstGeom prst="rect">
             <a:avLst/>
@@ -14635,8 +13718,8 @@
         </p:nvSpPr>
         <p:spPr>
           <a:xfrm>
-            <a:off x="6666333" y="4539594"/>
-            <a:ext cx="5179769" cy="1715656"/>
+            <a:off x="6666333" y="3865389"/>
+            <a:ext cx="5179769" cy="2648817"/>
           </a:xfrm>
           <a:prstGeom prst="rect">
             <a:avLst/>
@@ -14687,8 +13770,8 @@
         </p:nvSpPr>
         <p:spPr>
           <a:xfrm>
-            <a:off x="454275" y="3753644"/>
-            <a:ext cx="5833509" cy="1270420"/>
+            <a:off x="540001" y="3865389"/>
+            <a:ext cx="5565524" cy="1270420"/>
           </a:xfrm>
           <a:prstGeom prst="rect">
             <a:avLst/>
@@ -14731,8 +13814,8 @@
         </p:nvSpPr>
         <p:spPr>
           <a:xfrm>
-            <a:off x="454274" y="5248383"/>
-            <a:ext cx="5833509" cy="1006867"/>
+            <a:off x="540001" y="5248383"/>
+            <a:ext cx="5565524" cy="1265823"/>
           </a:xfrm>
           <a:prstGeom prst="rect">
             <a:avLst/>
@@ -14777,14 +13860,14 @@
       </p:sp>
       <p:sp>
         <p:nvSpPr>
-          <p:cNvPr id="19" name="직사각형 18"/>
+          <p:cNvPr id="12" name="직사각형 11"/>
           <p:cNvSpPr/>
           <p:nvPr/>
         </p:nvSpPr>
         <p:spPr>
           <a:xfrm>
-            <a:off x="6666333" y="480220"/>
-            <a:ext cx="5179769" cy="1965029"/>
+            <a:off x="540001" y="2270589"/>
+            <a:ext cx="5565524" cy="1482226"/>
           </a:xfrm>
           <a:prstGeom prst="rect">
             <a:avLst/>
@@ -14817,15 +13900,7 @@
             </a:r>
             <a:r>
               <a:rPr lang="ko-KR" altLang="en-US" dirty="0" smtClean="0"/>
-              <a:t> 발동</a:t>
-            </a:r>
-            <a:r>
-              <a:rPr lang="en-US" altLang="ko-KR" dirty="0" smtClean="0"/>
-              <a:t>, </a:t>
-            </a:r>
-            <a:r>
-              <a:rPr lang="ko-KR" altLang="en-US" dirty="0" smtClean="0"/>
-              <a:t>발동 해제 코드</a:t>
+              <a:t> 데이터 객체</a:t>
             </a:r>
             <a:endParaRPr lang="ko-KR" altLang="en-US" dirty="0"/>
           </a:p>
@@ -14964,7 +14039,7 @@
         <p:spPr>
           <a:xfrm>
             <a:off x="454275" y="710906"/>
-            <a:ext cx="3013967" cy="523220"/>
+            <a:ext cx="3278462" cy="523220"/>
           </a:xfrm>
           <a:prstGeom prst="rect">
             <a:avLst/>
@@ -15033,7 +14108,43 @@
                 <a:latin typeface="Noto Sans KR ExtraBold" panose="020B0200000000000000" pitchFamily="34" charset="-128"/>
                 <a:ea typeface="Noto Sans KR ExtraBold" panose="020B0200000000000000" pitchFamily="34" charset="-128"/>
               </a:rPr>
-              <a:t> 액션 컴포넌트</a:t>
+              <a:t> </a:t>
+            </a:r>
+            <a:r>
+              <a:rPr lang="ko-KR" altLang="en-US" dirty="0" smtClean="0">
+                <a:solidFill>
+                  <a:schemeClr val="bg1">
+                    <a:lumMod val="95000"/>
+                  </a:schemeClr>
+                </a:solidFill>
+                <a:latin typeface="Noto Sans KR ExtraBold" panose="020B0200000000000000" pitchFamily="34" charset="-128"/>
+                <a:ea typeface="Noto Sans KR ExtraBold" panose="020B0200000000000000" pitchFamily="34" charset="-128"/>
+              </a:rPr>
+              <a:t>액션과 </a:t>
+            </a:r>
+            <a:r>
+              <a:rPr lang="ko-KR" altLang="en-US" dirty="0" err="1" smtClean="0">
+                <a:solidFill>
+                  <a:schemeClr val="bg1">
+                    <a:lumMod val="95000"/>
+                  </a:schemeClr>
+                </a:solidFill>
+                <a:latin typeface="Noto Sans KR ExtraBold" panose="020B0200000000000000" pitchFamily="34" charset="-128"/>
+                <a:ea typeface="Noto Sans KR ExtraBold" panose="020B0200000000000000" pitchFamily="34" charset="-128"/>
+              </a:rPr>
+              <a:t>콤보</a:t>
+            </a:r>
+            <a:r>
+              <a:rPr lang="ko-KR" altLang="en-US" dirty="0" smtClean="0">
+                <a:solidFill>
+                  <a:schemeClr val="bg1">
+                    <a:lumMod val="95000"/>
+                  </a:schemeClr>
+                </a:solidFill>
+                <a:latin typeface="Noto Sans KR ExtraBold" panose="020B0200000000000000" pitchFamily="34" charset="-128"/>
+                <a:ea typeface="Noto Sans KR ExtraBold" panose="020B0200000000000000" pitchFamily="34" charset="-128"/>
+              </a:rPr>
+              <a:t> 연계</a:t>
             </a:r>
             <a:endParaRPr lang="ko-KR" altLang="en-US" dirty="0">
               <a:solidFill>
@@ -15093,7 +14204,7 @@
         <p:spPr>
           <a:xfrm>
             <a:off x="454275" y="1480347"/>
-            <a:ext cx="5651249" cy="1015663"/>
+            <a:ext cx="5651249" cy="400110"/>
           </a:xfrm>
           <a:prstGeom prst="rect">
             <a:avLst/>
@@ -15106,43 +14217,16 @@
           <a:lstStyle/>
           <a:p>
             <a:r>
-              <a:rPr lang="en-US" altLang="ko-KR" sz="1000" dirty="0" err="1" smtClean="0">
-                <a:solidFill>
-                  <a:schemeClr val="bg1">
-                    <a:lumMod val="95000"/>
-                  </a:schemeClr>
-                </a:solidFill>
-                <a:latin typeface="Noto Sans KR Medium" panose="020B0200000000000000" pitchFamily="34" charset="-128"/>
-                <a:ea typeface="Noto Sans KR Medium" panose="020B0200000000000000" pitchFamily="34" charset="-128"/>
-              </a:rPr>
-              <a:t>UAction</a:t>
-            </a:r>
-            <a:endParaRPr lang="en-US" altLang="ko-KR" sz="1000" dirty="0" smtClean="0">
-              <a:solidFill>
-                <a:schemeClr val="bg1">
-                  <a:lumMod val="95000"/>
-                </a:schemeClr>
-              </a:solidFill>
-              <a:latin typeface="Noto Sans KR Medium" panose="020B0200000000000000" pitchFamily="34" charset="-128"/>
-              <a:ea typeface="Noto Sans KR Medium" panose="020B0200000000000000" pitchFamily="34" charset="-128"/>
-            </a:endParaRPr>
-          </a:p>
-          <a:p>
-            <a:pPr marL="171450" indent="-171450">
-              <a:buFontTx/>
-              <a:buChar char="-"/>
-            </a:pPr>
-            <a:r>
-              <a:rPr lang="en-US" altLang="ko-KR" sz="1000" dirty="0" err="1" smtClean="0">
-                <a:solidFill>
-                  <a:schemeClr val="bg1">
-                    <a:lumMod val="95000"/>
-                  </a:schemeClr>
-                </a:solidFill>
-                <a:latin typeface="Noto Sans KR Medium" panose="020B0200000000000000" pitchFamily="34" charset="-128"/>
-                <a:ea typeface="Noto Sans KR Medium" panose="020B0200000000000000" pitchFamily="34" charset="-128"/>
-              </a:rPr>
-              <a:t>AnimMontage</a:t>
+              <a:rPr lang="ko-KR" altLang="en-US" sz="1000" dirty="0" smtClean="0">
+                <a:solidFill>
+                  <a:schemeClr val="bg1">
+                    <a:lumMod val="95000"/>
+                  </a:schemeClr>
+                </a:solidFill>
+                <a:latin typeface="Noto Sans KR Medium" panose="020B0200000000000000" pitchFamily="34" charset="-128"/>
+                <a:ea typeface="Noto Sans KR Medium" panose="020B0200000000000000" pitchFamily="34" charset="-128"/>
+              </a:rPr>
+              <a:t>플레이어의 실질적인 동작을 처리하는 컴포넌트입니다</a:t>
             </a:r>
             <a:r>
               <a:rPr lang="en-US" altLang="ko-KR" sz="1000" dirty="0" smtClean="0">
@@ -15154,153 +14238,46 @@
                 <a:latin typeface="Noto Sans KR Medium" panose="020B0200000000000000" pitchFamily="34" charset="-128"/>
                 <a:ea typeface="Noto Sans KR Medium" panose="020B0200000000000000" pitchFamily="34" charset="-128"/>
               </a:rPr>
-              <a:t>, </a:t>
-            </a:r>
-            <a:r>
-              <a:rPr lang="en-US" altLang="ko-KR" sz="1000" dirty="0" err="1" smtClean="0">
-                <a:solidFill>
-                  <a:schemeClr val="bg1">
-                    <a:lumMod val="95000"/>
-                  </a:schemeClr>
-                </a:solidFill>
-                <a:latin typeface="Noto Sans KR Medium" panose="020B0200000000000000" pitchFamily="34" charset="-128"/>
-                <a:ea typeface="Noto Sans KR Medium" panose="020B0200000000000000" pitchFamily="34" charset="-128"/>
-              </a:rPr>
-              <a:t>AnimNotify</a:t>
-            </a:r>
-            <a:r>
-              <a:rPr lang="ko-KR" altLang="en-US" sz="1000" dirty="0" smtClean="0">
-                <a:solidFill>
-                  <a:schemeClr val="bg1">
-                    <a:lumMod val="95000"/>
-                  </a:schemeClr>
-                </a:solidFill>
-                <a:latin typeface="Noto Sans KR Medium" panose="020B0200000000000000" pitchFamily="34" charset="-128"/>
-                <a:ea typeface="Noto Sans KR Medium" panose="020B0200000000000000" pitchFamily="34" charset="-128"/>
-              </a:rPr>
-              <a:t>를 이용한 액션 구성</a:t>
-            </a:r>
-            <a:endParaRPr lang="en-US" altLang="ko-KR" sz="1000" dirty="0" smtClean="0">
-              <a:solidFill>
-                <a:schemeClr val="bg1">
-                  <a:lumMod val="95000"/>
-                </a:schemeClr>
-              </a:solidFill>
-              <a:latin typeface="Noto Sans KR Medium" panose="020B0200000000000000" pitchFamily="34" charset="-128"/>
-              <a:ea typeface="Noto Sans KR Medium" panose="020B0200000000000000" pitchFamily="34" charset="-128"/>
-            </a:endParaRPr>
-          </a:p>
-          <a:p>
-            <a:r>
-              <a:rPr lang="en-US" altLang="ko-KR" sz="1000" dirty="0" err="1" smtClean="0">
-                <a:solidFill>
-                  <a:schemeClr val="bg1">
-                    <a:lumMod val="95000"/>
-                  </a:schemeClr>
-                </a:solidFill>
-                <a:latin typeface="Noto Sans KR Medium" panose="020B0200000000000000" pitchFamily="34" charset="-128"/>
-                <a:ea typeface="Noto Sans KR Medium" panose="020B0200000000000000" pitchFamily="34" charset="-128"/>
-              </a:rPr>
-              <a:t>UActionComboData</a:t>
-            </a:r>
-            <a:endParaRPr lang="en-US" altLang="ko-KR" sz="1000" dirty="0" smtClean="0">
-              <a:solidFill>
-                <a:schemeClr val="bg1">
-                  <a:lumMod val="95000"/>
-                </a:schemeClr>
-              </a:solidFill>
-              <a:latin typeface="Noto Sans KR Medium" panose="020B0200000000000000" pitchFamily="34" charset="-128"/>
-              <a:ea typeface="Noto Sans KR Medium" panose="020B0200000000000000" pitchFamily="34" charset="-128"/>
-            </a:endParaRPr>
-          </a:p>
-          <a:p>
-            <a:pPr marL="171450" indent="-171450">
-              <a:buFontTx/>
-              <a:buChar char="-"/>
-            </a:pPr>
-            <a:r>
-              <a:rPr lang="en-US" altLang="ko-KR" sz="1000" dirty="0" err="1" smtClean="0">
-                <a:solidFill>
-                  <a:schemeClr val="bg1">
-                    <a:lumMod val="95000"/>
-                  </a:schemeClr>
-                </a:solidFill>
-                <a:latin typeface="Noto Sans KR Medium" panose="020B0200000000000000" pitchFamily="34" charset="-128"/>
-                <a:ea typeface="Noto Sans KR Medium" panose="020B0200000000000000" pitchFamily="34" charset="-128"/>
-              </a:rPr>
-              <a:t>UAction</a:t>
-            </a:r>
-            <a:r>
-              <a:rPr lang="ko-KR" altLang="en-US" sz="1000" dirty="0" smtClean="0">
-                <a:solidFill>
-                  <a:schemeClr val="bg1">
-                    <a:lumMod val="95000"/>
-                  </a:schemeClr>
-                </a:solidFill>
-                <a:latin typeface="Noto Sans KR Medium" panose="020B0200000000000000" pitchFamily="34" charset="-128"/>
-                <a:ea typeface="Noto Sans KR Medium" panose="020B0200000000000000" pitchFamily="34" charset="-128"/>
-              </a:rPr>
-              <a:t>을 그래프 형태로 이어 연계 동작을 설정</a:t>
-            </a:r>
-            <a:endParaRPr lang="en-US" altLang="ko-KR" sz="1000" dirty="0" smtClean="0">
-              <a:solidFill>
-                <a:schemeClr val="bg1">
-                  <a:lumMod val="95000"/>
-                </a:schemeClr>
-              </a:solidFill>
-              <a:latin typeface="Noto Sans KR Medium" panose="020B0200000000000000" pitchFamily="34" charset="-128"/>
-              <a:ea typeface="Noto Sans KR Medium" panose="020B0200000000000000" pitchFamily="34" charset="-128"/>
-            </a:endParaRPr>
-          </a:p>
-          <a:p>
-            <a:r>
-              <a:rPr lang="en-US" altLang="ko-KR" sz="1000" dirty="0" err="1" smtClean="0">
-                <a:solidFill>
-                  <a:schemeClr val="bg1">
-                    <a:lumMod val="95000"/>
-                  </a:schemeClr>
-                </a:solidFill>
-                <a:latin typeface="Noto Sans KR Medium" panose="020B0200000000000000" pitchFamily="34" charset="-128"/>
-                <a:ea typeface="Noto Sans KR Medium" panose="020B0200000000000000" pitchFamily="34" charset="-128"/>
-              </a:rPr>
-              <a:t>UPlayerActionComponent</a:t>
-            </a:r>
-            <a:endParaRPr lang="en-US" altLang="ko-KR" sz="1000" dirty="0" smtClean="0">
-              <a:solidFill>
-                <a:schemeClr val="bg1">
-                  <a:lumMod val="95000"/>
-                </a:schemeClr>
-              </a:solidFill>
-              <a:latin typeface="Noto Sans KR Medium" panose="020B0200000000000000" pitchFamily="34" charset="-128"/>
-              <a:ea typeface="Noto Sans KR Medium" panose="020B0200000000000000" pitchFamily="34" charset="-128"/>
-            </a:endParaRPr>
-          </a:p>
-          <a:p>
-            <a:pPr marL="171450" indent="-171450">
-              <a:buFontTx/>
-              <a:buChar char="-"/>
-            </a:pPr>
-            <a:r>
-              <a:rPr lang="ko-KR" altLang="en-US" sz="1000" dirty="0" smtClean="0">
-                <a:solidFill>
-                  <a:schemeClr val="bg1">
-                    <a:lumMod val="95000"/>
-                  </a:schemeClr>
-                </a:solidFill>
-                <a:latin typeface="Noto Sans KR Medium" panose="020B0200000000000000" pitchFamily="34" charset="-128"/>
-                <a:ea typeface="Noto Sans KR Medium" panose="020B0200000000000000" pitchFamily="34" charset="-128"/>
-              </a:rPr>
-              <a:t>플레이어의 공격 입력에 따라 설정한 그래프의 연결을 따라 액션을 수행하도록 작동</a:t>
-            </a:r>
-            <a:endParaRPr lang="en-US" altLang="ko-KR" sz="1000" dirty="0" smtClean="0">
-              <a:solidFill>
-                <a:schemeClr val="bg1">
-                  <a:lumMod val="95000"/>
-                </a:schemeClr>
-              </a:solidFill>
-              <a:latin typeface="Noto Sans KR Medium" panose="020B0200000000000000" pitchFamily="34" charset="-128"/>
-              <a:ea typeface="Noto Sans KR Medium" panose="020B0200000000000000" pitchFamily="34" charset="-128"/>
-            </a:endParaRPr>
+              <a:t>.</a:t>
+            </a:r>
+          </a:p>
+          <a:p>
+            <a:r>
+              <a:rPr lang="ko-KR" altLang="en-US" sz="1000" dirty="0" smtClean="0">
+                <a:solidFill>
+                  <a:schemeClr val="bg1">
+                    <a:lumMod val="95000"/>
+                  </a:schemeClr>
+                </a:solidFill>
+                <a:latin typeface="Noto Sans KR Medium" panose="020B0200000000000000" pitchFamily="34" charset="-128"/>
+                <a:ea typeface="Noto Sans KR Medium" panose="020B0200000000000000" pitchFamily="34" charset="-128"/>
+              </a:rPr>
+              <a:t>동작 실행 기능과 함께</a:t>
+            </a:r>
+            <a:r>
+              <a:rPr lang="ko-KR" altLang="en-US" sz="1000" dirty="0" smtClean="0">
+                <a:solidFill>
+                  <a:schemeClr val="bg1">
+                    <a:lumMod val="95000"/>
+                  </a:schemeClr>
+                </a:solidFill>
+                <a:latin typeface="Noto Sans KR Medium" panose="020B0200000000000000" pitchFamily="34" charset="-128"/>
+                <a:ea typeface="Noto Sans KR Medium" panose="020B0200000000000000" pitchFamily="34" charset="-128"/>
+              </a:rPr>
+              <a:t> 현재 동작과 이어진 다음 동작을 확인하고 실행합니다</a:t>
+            </a:r>
+            <a:r>
+              <a:rPr lang="en-US" altLang="ko-KR" sz="1000" dirty="0" smtClean="0">
+                <a:solidFill>
+                  <a:schemeClr val="bg1">
+                    <a:lumMod val="95000"/>
+                  </a:schemeClr>
+                </a:solidFill>
+                <a:latin typeface="Noto Sans KR Medium" panose="020B0200000000000000" pitchFamily="34" charset="-128"/>
+                <a:ea typeface="Noto Sans KR Medium" panose="020B0200000000000000" pitchFamily="34" charset="-128"/>
+              </a:rPr>
+              <a:t>.</a:t>
+            </a:r>
           </a:p>
         </p:txBody>
       </p:sp>
@@ -16230,19 +15207,7 @@
                 <a:latin typeface="Noto Sans KR ExtraBold" panose="020B0200000000000000" pitchFamily="34" charset="-128"/>
                 <a:ea typeface="Noto Sans KR ExtraBold" panose="020B0200000000000000" pitchFamily="34" charset="-128"/>
               </a:rPr>
-              <a:t>플레이어 </a:t>
-            </a:r>
-            <a:r>
-              <a:rPr lang="ko-KR" altLang="en-US" dirty="0" smtClean="0">
-                <a:solidFill>
-                  <a:schemeClr val="bg1">
-                    <a:lumMod val="95000"/>
-                  </a:schemeClr>
-                </a:solidFill>
-                <a:latin typeface="Noto Sans KR ExtraBold" panose="020B0200000000000000" pitchFamily="34" charset="-128"/>
-                <a:ea typeface="Noto Sans KR ExtraBold" panose="020B0200000000000000" pitchFamily="34" charset="-128"/>
-              </a:rPr>
-              <a:t>기능 </a:t>
+              <a:t>플레이어 기능 </a:t>
             </a:r>
             <a:r>
               <a:rPr lang="en-US" altLang="ko-KR" dirty="0" smtClean="0">
@@ -28485,15 +27450,6 @@
               </a:rPr>
               <a:t>.</a:t>
             </a:r>
-            <a:endParaRPr lang="en-US" altLang="ko-KR" sz="1000" dirty="0" smtClean="0">
-              <a:solidFill>
-                <a:schemeClr val="bg1">
-                  <a:lumMod val="95000"/>
-                </a:schemeClr>
-              </a:solidFill>
-              <a:latin typeface="Noto Sans KR Medium" panose="020B0200000000000000" pitchFamily="34" charset="-128"/>
-              <a:ea typeface="Noto Sans KR Medium" panose="020B0200000000000000" pitchFamily="34" charset="-128"/>
-            </a:endParaRPr>
           </a:p>
         </p:txBody>
       </p:sp>
@@ -28762,15 +27718,6 @@
               </a:rPr>
               <a:t>.</a:t>
             </a:r>
-            <a:endParaRPr lang="en-US" altLang="ko-KR" sz="1000" dirty="0" smtClean="0">
-              <a:solidFill>
-                <a:schemeClr val="bg1">
-                  <a:lumMod val="95000"/>
-                </a:schemeClr>
-              </a:solidFill>
-              <a:latin typeface="Noto Sans KR Medium" panose="020B0200000000000000" pitchFamily="34" charset="-128"/>
-              <a:ea typeface="Noto Sans KR Medium" panose="020B0200000000000000" pitchFamily="34" charset="-128"/>
-            </a:endParaRPr>
           </a:p>
         </p:txBody>
       </p:sp>
@@ -29039,15 +27986,6 @@
               </a:rPr>
               <a:t>.</a:t>
             </a:r>
-            <a:endParaRPr lang="en-US" altLang="ko-KR" sz="1000" dirty="0" smtClean="0">
-              <a:solidFill>
-                <a:schemeClr val="bg1">
-                  <a:lumMod val="95000"/>
-                </a:schemeClr>
-              </a:solidFill>
-              <a:latin typeface="Noto Sans KR Medium" panose="020B0200000000000000" pitchFamily="34" charset="-128"/>
-              <a:ea typeface="Noto Sans KR Medium" panose="020B0200000000000000" pitchFamily="34" charset="-128"/>
-            </a:endParaRPr>
           </a:p>
         </p:txBody>
       </p:sp>
@@ -29347,31 +28285,7 @@
                 <a:latin typeface="Noto Sans KR Medium" panose="020B0200000000000000" pitchFamily="34" charset="-128"/>
                 <a:ea typeface="Noto Sans KR Medium" panose="020B0200000000000000" pitchFamily="34" charset="-128"/>
               </a:rPr>
-              <a:t>을 </a:t>
-            </a:r>
-            <a:r>
-              <a:rPr lang="ko-KR" altLang="en-US" sz="1000" dirty="0" smtClean="0">
-                <a:solidFill>
-                  <a:schemeClr val="bg1">
-                    <a:lumMod val="95000"/>
-                  </a:schemeClr>
-                </a:solidFill>
-                <a:latin typeface="Noto Sans KR Medium" panose="020B0200000000000000" pitchFamily="34" charset="-128"/>
-                <a:ea typeface="Noto Sans KR Medium" panose="020B0200000000000000" pitchFamily="34" charset="-128"/>
-              </a:rPr>
-              <a:t>이용하여</a:t>
-            </a:r>
-            <a:r>
-              <a:rPr lang="ko-KR" altLang="en-US" sz="1000" dirty="0" smtClean="0">
-                <a:solidFill>
-                  <a:schemeClr val="bg1">
-                    <a:lumMod val="95000"/>
-                  </a:schemeClr>
-                </a:solidFill>
-                <a:latin typeface="Noto Sans KR Medium" panose="020B0200000000000000" pitchFamily="34" charset="-128"/>
-                <a:ea typeface="Noto Sans KR Medium" panose="020B0200000000000000" pitchFamily="34" charset="-128"/>
-              </a:rPr>
-              <a:t> </a:t>
+              <a:t>을 이용하여 </a:t>
             </a:r>
             <a:r>
               <a:rPr lang="en-US" altLang="ko-KR" sz="1000" dirty="0" smtClean="0">
@@ -29785,8 +28699,8 @@
         </p:nvSpPr>
         <p:spPr>
           <a:xfrm>
-            <a:off x="3318000" y="4364074"/>
-            <a:ext cx="2501151" cy="1944258"/>
+            <a:off x="3463646" y="4364074"/>
+            <a:ext cx="2632353" cy="1944258"/>
           </a:xfrm>
           <a:prstGeom prst="rect">
             <a:avLst/>
@@ -29871,7 +28785,7 @@
         </p:nvSpPr>
         <p:spPr>
           <a:xfrm>
-            <a:off x="3974155" y="4117852"/>
+            <a:off x="4119801" y="4117852"/>
             <a:ext cx="1188840" cy="246221"/>
           </a:xfrm>
           <a:prstGeom prst="rect">
@@ -29929,8 +28843,8 @@
         </p:nvSpPr>
         <p:spPr>
           <a:xfrm>
-            <a:off x="541481" y="2730876"/>
-            <a:ext cx="5277670" cy="1193852"/>
+            <a:off x="541480" y="2730876"/>
+            <a:ext cx="5554519" cy="1193852"/>
           </a:xfrm>
           <a:prstGeom prst="rect">
             <a:avLst/>
@@ -30164,7 +29078,7 @@
         <p:spPr>
           <a:xfrm>
             <a:off x="454275" y="710906"/>
-            <a:ext cx="3013967" cy="523220"/>
+            <a:ext cx="2802370" cy="523220"/>
           </a:xfrm>
           <a:prstGeom prst="rect">
             <a:avLst/>
@@ -30236,7 +29150,7 @@
               <a:t>스탯</a:t>
             </a:r>
             <a:r>
-              <a:rPr lang="ko-KR" altLang="en-US" dirty="0" smtClean="0">
+              <a:rPr lang="ko-KR" altLang="en-US" dirty="0" err="1" smtClean="0">
                 <a:solidFill>
                   <a:schemeClr val="bg1">
                     <a:lumMod val="95000"/>
@@ -30245,7 +29159,19 @@
                 <a:latin typeface="Noto Sans KR ExtraBold" panose="020B0200000000000000" pitchFamily="34" charset="-128"/>
                 <a:ea typeface="Noto Sans KR ExtraBold" panose="020B0200000000000000" pitchFamily="34" charset="-128"/>
               </a:rPr>
-              <a:t> 컴포넌트</a:t>
+              <a:t>과</a:t>
+            </a:r>
+            <a:r>
+              <a:rPr lang="ko-KR" altLang="en-US" dirty="0" smtClean="0">
+                <a:solidFill>
+                  <a:schemeClr val="bg1">
+                    <a:lumMod val="95000"/>
+                  </a:schemeClr>
+                </a:solidFill>
+                <a:latin typeface="Noto Sans KR ExtraBold" panose="020B0200000000000000" pitchFamily="34" charset="-128"/>
+                <a:ea typeface="Noto Sans KR ExtraBold" panose="020B0200000000000000" pitchFamily="34" charset="-128"/>
+              </a:rPr>
+              <a:t> 효과</a:t>
             </a:r>
             <a:endParaRPr lang="ko-KR" altLang="en-US" dirty="0">
               <a:solidFill>
@@ -30305,7 +29231,7 @@
         <p:spPr>
           <a:xfrm>
             <a:off x="454275" y="1480347"/>
-            <a:ext cx="5651249" cy="1015663"/>
+            <a:ext cx="5651249" cy="1631216"/>
           </a:xfrm>
           <a:prstGeom prst="rect">
             <a:avLst/>
@@ -30317,33 +29243,17 @@
           </a:bodyPr>
           <a:lstStyle/>
           <a:p>
-            <a:pPr marL="171450" indent="-171450">
-              <a:buFontTx/>
-              <a:buChar char="-"/>
-            </a:pPr>
-            <a:r>
-              <a:rPr lang="ko-KR" altLang="en-US" sz="1000" dirty="0" smtClean="0">
-                <a:solidFill>
-                  <a:schemeClr val="bg1">
-                    <a:lumMod val="95000"/>
-                  </a:schemeClr>
-                </a:solidFill>
-                <a:latin typeface="Noto Sans KR Medium" panose="020B0200000000000000" pitchFamily="34" charset="-128"/>
-                <a:ea typeface="Noto Sans KR Medium" panose="020B0200000000000000" pitchFamily="34" charset="-128"/>
-              </a:rPr>
-              <a:t>캐릭터의 </a:t>
-            </a:r>
-            <a:r>
-              <a:rPr lang="ko-KR" altLang="en-US" sz="1000" dirty="0" smtClean="0">
-                <a:solidFill>
-                  <a:schemeClr val="bg1">
-                    <a:lumMod val="95000"/>
-                  </a:schemeClr>
-                </a:solidFill>
-                <a:latin typeface="Noto Sans KR Medium" panose="020B0200000000000000" pitchFamily="34" charset="-128"/>
-                <a:ea typeface="Noto Sans KR Medium" panose="020B0200000000000000" pitchFamily="34" charset="-128"/>
-              </a:rPr>
-              <a:t>체력</a:t>
+            <a:r>
+              <a:rPr lang="ko-KR" altLang="en-US" sz="1000" dirty="0" smtClean="0">
+                <a:solidFill>
+                  <a:schemeClr val="bg1">
+                    <a:lumMod val="95000"/>
+                  </a:schemeClr>
+                </a:solidFill>
+                <a:latin typeface="Noto Sans KR Medium" panose="020B0200000000000000" pitchFamily="34" charset="-128"/>
+                <a:ea typeface="Noto Sans KR Medium" panose="020B0200000000000000" pitchFamily="34" charset="-128"/>
+              </a:rPr>
+              <a:t>캐릭터의 체력</a:t>
             </a:r>
             <a:r>
               <a:rPr lang="en-US" altLang="ko-KR" sz="1000" dirty="0" smtClean="0">
@@ -30391,7 +29301,7 @@
                 <a:latin typeface="Noto Sans KR Medium" panose="020B0200000000000000" pitchFamily="34" charset="-128"/>
                 <a:ea typeface="Noto Sans KR Medium" panose="020B0200000000000000" pitchFamily="34" charset="-128"/>
               </a:rPr>
-              <a:t>공격력 등 </a:t>
+              <a:t>공격력 같은 </a:t>
             </a:r>
             <a:r>
               <a:rPr lang="ko-KR" altLang="en-US" sz="1000" dirty="0" err="1" smtClean="0">
@@ -30403,19 +29313,7 @@
                 <a:latin typeface="Noto Sans KR Medium" panose="020B0200000000000000" pitchFamily="34" charset="-128"/>
                 <a:ea typeface="Noto Sans KR Medium" panose="020B0200000000000000" pitchFamily="34" charset="-128"/>
               </a:rPr>
-              <a:t>스탯을</a:t>
-            </a:r>
-            <a:r>
-              <a:rPr lang="ko-KR" altLang="en-US" sz="1000" dirty="0" smtClean="0">
-                <a:solidFill>
-                  <a:schemeClr val="bg1">
-                    <a:lumMod val="95000"/>
-                  </a:schemeClr>
-                </a:solidFill>
-                <a:latin typeface="Noto Sans KR Medium" panose="020B0200000000000000" pitchFamily="34" charset="-128"/>
-                <a:ea typeface="Noto Sans KR Medium" panose="020B0200000000000000" pitchFamily="34" charset="-128"/>
-              </a:rPr>
-              <a:t> 반영하여 플레이어 캐릭터 </a:t>
+              <a:t>스탯</a:t>
             </a:r>
             <a:r>
               <a:rPr lang="ko-KR" altLang="en-US" sz="1000" dirty="0" err="1" smtClean="0">
@@ -30427,58 +29325,19 @@
                 <a:latin typeface="Noto Sans KR Medium" panose="020B0200000000000000" pitchFamily="34" charset="-128"/>
                 <a:ea typeface="Noto Sans KR Medium" panose="020B0200000000000000" pitchFamily="34" charset="-128"/>
               </a:rPr>
-              <a:t>액터에</a:t>
-            </a:r>
-            <a:r>
-              <a:rPr lang="ko-KR" altLang="en-US" sz="1000" dirty="0" smtClean="0">
-                <a:solidFill>
-                  <a:schemeClr val="bg1">
-                    <a:lumMod val="95000"/>
-                  </a:schemeClr>
-                </a:solidFill>
-                <a:latin typeface="Noto Sans KR Medium" panose="020B0200000000000000" pitchFamily="34" charset="-128"/>
-                <a:ea typeface="Noto Sans KR Medium" panose="020B0200000000000000" pitchFamily="34" charset="-128"/>
-              </a:rPr>
-              <a:t> 반영하는 </a:t>
-            </a:r>
-            <a:r>
-              <a:rPr lang="ko-KR" altLang="en-US" sz="1000" dirty="0" smtClean="0">
-                <a:solidFill>
-                  <a:schemeClr val="bg1">
-                    <a:lumMod val="95000"/>
-                  </a:schemeClr>
-                </a:solidFill>
-                <a:latin typeface="Noto Sans KR Medium" panose="020B0200000000000000" pitchFamily="34" charset="-128"/>
-                <a:ea typeface="Noto Sans KR Medium" panose="020B0200000000000000" pitchFamily="34" charset="-128"/>
-              </a:rPr>
-              <a:t>컴포넌트</a:t>
-            </a:r>
-            <a:endParaRPr lang="en-US" altLang="ko-KR" sz="1000" dirty="0">
-              <a:solidFill>
-                <a:schemeClr val="bg1">
-                  <a:lumMod val="95000"/>
-                </a:schemeClr>
-              </a:solidFill>
-              <a:latin typeface="Noto Sans KR Medium" panose="020B0200000000000000" pitchFamily="34" charset="-128"/>
-              <a:ea typeface="Noto Sans KR Medium" panose="020B0200000000000000" pitchFamily="34" charset="-128"/>
-            </a:endParaRPr>
-          </a:p>
-          <a:p>
-            <a:pPr marL="171450" indent="-171450">
-              <a:buFontTx/>
-              <a:buChar char="-"/>
-            </a:pPr>
-            <a:r>
-              <a:rPr lang="ko-KR" altLang="en-US" sz="1000" dirty="0" smtClean="0">
-                <a:solidFill>
-                  <a:schemeClr val="bg1">
-                    <a:lumMod val="95000"/>
-                  </a:schemeClr>
-                </a:solidFill>
-                <a:latin typeface="Noto Sans KR Medium" panose="020B0200000000000000" pitchFamily="34" charset="-128"/>
-                <a:ea typeface="Noto Sans KR Medium" panose="020B0200000000000000" pitchFamily="34" charset="-128"/>
-              </a:rPr>
-              <a:t>기본 캐릭터의 </a:t>
+              <a:t>을</a:t>
+            </a:r>
+            <a:r>
+              <a:rPr lang="ko-KR" altLang="en-US" sz="1000" dirty="0" smtClean="0">
+                <a:solidFill>
+                  <a:schemeClr val="bg1">
+                    <a:lumMod val="95000"/>
+                  </a:schemeClr>
+                </a:solidFill>
+                <a:latin typeface="Noto Sans KR Medium" panose="020B0200000000000000" pitchFamily="34" charset="-128"/>
+                <a:ea typeface="Noto Sans KR Medium" panose="020B0200000000000000" pitchFamily="34" charset="-128"/>
+              </a:rPr>
+              <a:t> 관리하는 </a:t>
             </a:r>
             <a:r>
               <a:rPr lang="ko-KR" altLang="en-US" sz="1000" dirty="0" err="1" smtClean="0">
@@ -30490,7 +29349,45 @@
                 <a:latin typeface="Noto Sans KR Medium" panose="020B0200000000000000" pitchFamily="34" charset="-128"/>
                 <a:ea typeface="Noto Sans KR Medium" panose="020B0200000000000000" pitchFamily="34" charset="-128"/>
               </a:rPr>
-              <a:t>스탯</a:t>
+              <a:t>액터</a:t>
+            </a:r>
+            <a:r>
+              <a:rPr lang="ko-KR" altLang="en-US" sz="1000" dirty="0" smtClean="0">
+                <a:solidFill>
+                  <a:schemeClr val="bg1">
+                    <a:lumMod val="95000"/>
+                  </a:schemeClr>
+                </a:solidFill>
+                <a:latin typeface="Noto Sans KR Medium" panose="020B0200000000000000" pitchFamily="34" charset="-128"/>
+                <a:ea typeface="Noto Sans KR Medium" panose="020B0200000000000000" pitchFamily="34" charset="-128"/>
+              </a:rPr>
+              <a:t> 컴포넌트입니다</a:t>
+            </a:r>
+            <a:r>
+              <a:rPr lang="en-US" altLang="ko-KR" sz="1000" dirty="0" smtClean="0">
+                <a:solidFill>
+                  <a:schemeClr val="bg1">
+                    <a:lumMod val="95000"/>
+                  </a:schemeClr>
+                </a:solidFill>
+                <a:latin typeface="Noto Sans KR Medium" panose="020B0200000000000000" pitchFamily="34" charset="-128"/>
+                <a:ea typeface="Noto Sans KR Medium" panose="020B0200000000000000" pitchFamily="34" charset="-128"/>
+              </a:rPr>
+              <a:t>.</a:t>
+            </a:r>
+          </a:p>
+          <a:p>
+            <a:r>
+              <a:rPr lang="ko-KR" altLang="en-US" sz="1000" dirty="0" smtClean="0">
+                <a:solidFill>
+                  <a:schemeClr val="bg1">
+                    <a:lumMod val="95000"/>
+                  </a:schemeClr>
+                </a:solidFill>
+                <a:latin typeface="Noto Sans KR Medium" panose="020B0200000000000000" pitchFamily="34" charset="-128"/>
+                <a:ea typeface="Noto Sans KR Medium" panose="020B0200000000000000" pitchFamily="34" charset="-128"/>
+              </a:rPr>
+              <a:t>캐릭터가 가진 기본 </a:t>
             </a:r>
             <a:r>
               <a:rPr lang="ko-KR" altLang="en-US" sz="1000" dirty="0" err="1" smtClean="0">
@@ -30502,19 +29399,55 @@
                 <a:latin typeface="Noto Sans KR Medium" panose="020B0200000000000000" pitchFamily="34" charset="-128"/>
                 <a:ea typeface="Noto Sans KR Medium" panose="020B0200000000000000" pitchFamily="34" charset="-128"/>
               </a:rPr>
-              <a:t>과</a:t>
-            </a:r>
-            <a:r>
-              <a:rPr lang="ko-KR" altLang="en-US" sz="1000" dirty="0" smtClean="0">
-                <a:solidFill>
-                  <a:schemeClr val="bg1">
-                    <a:lumMod val="95000"/>
-                  </a:schemeClr>
-                </a:solidFill>
-                <a:latin typeface="Noto Sans KR Medium" panose="020B0200000000000000" pitchFamily="34" charset="-128"/>
-                <a:ea typeface="Noto Sans KR Medium" panose="020B0200000000000000" pitchFamily="34" charset="-128"/>
-              </a:rPr>
-              <a:t> 장비</a:t>
+              <a:t>스택뿐만</a:t>
+            </a:r>
+            <a:r>
+              <a:rPr lang="ko-KR" altLang="en-US" sz="1000" dirty="0" smtClean="0">
+                <a:solidFill>
+                  <a:schemeClr val="bg1">
+                    <a:lumMod val="95000"/>
+                  </a:schemeClr>
+                </a:solidFill>
+                <a:latin typeface="Noto Sans KR Medium" panose="020B0200000000000000" pitchFamily="34" charset="-128"/>
+                <a:ea typeface="Noto Sans KR Medium" panose="020B0200000000000000" pitchFamily="34" charset="-128"/>
+              </a:rPr>
+              <a:t> 아니라 장비와 </a:t>
+            </a:r>
+            <a:r>
+              <a:rPr lang="ko-KR" altLang="en-US" sz="1000" dirty="0" smtClean="0">
+                <a:solidFill>
+                  <a:schemeClr val="bg1">
+                    <a:lumMod val="95000"/>
+                  </a:schemeClr>
+                </a:solidFill>
+                <a:latin typeface="Noto Sans KR Medium" panose="020B0200000000000000" pitchFamily="34" charset="-128"/>
+                <a:ea typeface="Noto Sans KR Medium" panose="020B0200000000000000" pitchFamily="34" charset="-128"/>
+              </a:rPr>
+              <a:t>효과로 얻은 </a:t>
+            </a:r>
+            <a:r>
+              <a:rPr lang="ko-KR" altLang="en-US" sz="1000" dirty="0" err="1" smtClean="0">
+                <a:solidFill>
+                  <a:schemeClr val="bg1">
+                    <a:lumMod val="95000"/>
+                  </a:schemeClr>
+                </a:solidFill>
+                <a:latin typeface="Noto Sans KR Medium" panose="020B0200000000000000" pitchFamily="34" charset="-128"/>
+                <a:ea typeface="Noto Sans KR Medium" panose="020B0200000000000000" pitchFamily="34" charset="-128"/>
+              </a:rPr>
+              <a:t>스탯도</a:t>
+            </a:r>
+            <a:r>
+              <a:rPr lang="ko-KR" altLang="en-US" sz="1000" dirty="0" smtClean="0">
+                <a:solidFill>
+                  <a:schemeClr val="bg1">
+                    <a:lumMod val="95000"/>
+                  </a:schemeClr>
+                </a:solidFill>
+                <a:latin typeface="Noto Sans KR Medium" panose="020B0200000000000000" pitchFamily="34" charset="-128"/>
+                <a:ea typeface="Noto Sans KR Medium" panose="020B0200000000000000" pitchFamily="34" charset="-128"/>
+              </a:rPr>
+              <a:t> 반영할 수 있습니다</a:t>
             </a:r>
             <a:r>
               <a:rPr lang="en-US" altLang="ko-KR" sz="1000" dirty="0" smtClean="0">
@@ -30526,68 +29459,10 @@
                 <a:latin typeface="Noto Sans KR Medium" panose="020B0200000000000000" pitchFamily="34" charset="-128"/>
                 <a:ea typeface="Noto Sans KR Medium" panose="020B0200000000000000" pitchFamily="34" charset="-128"/>
               </a:rPr>
-              <a:t>, </a:t>
-            </a:r>
-            <a:r>
-              <a:rPr lang="ko-KR" altLang="en-US" sz="1000" dirty="0" smtClean="0">
-                <a:solidFill>
-                  <a:schemeClr val="bg1">
-                    <a:lumMod val="95000"/>
-                  </a:schemeClr>
-                </a:solidFill>
-                <a:latin typeface="Noto Sans KR Medium" panose="020B0200000000000000" pitchFamily="34" charset="-128"/>
-                <a:ea typeface="Noto Sans KR Medium" panose="020B0200000000000000" pitchFamily="34" charset="-128"/>
-              </a:rPr>
-              <a:t>효과로 얻은 </a:t>
-            </a:r>
-            <a:r>
-              <a:rPr lang="ko-KR" altLang="en-US" sz="1000" dirty="0" err="1" smtClean="0">
-                <a:solidFill>
-                  <a:schemeClr val="bg1">
-                    <a:lumMod val="95000"/>
-                  </a:schemeClr>
-                </a:solidFill>
-                <a:latin typeface="Noto Sans KR Medium" panose="020B0200000000000000" pitchFamily="34" charset="-128"/>
-                <a:ea typeface="Noto Sans KR Medium" panose="020B0200000000000000" pitchFamily="34" charset="-128"/>
-              </a:rPr>
-              <a:t>스탯을</a:t>
-            </a:r>
-            <a:r>
-              <a:rPr lang="ko-KR" altLang="en-US" sz="1000" dirty="0" smtClean="0">
-                <a:solidFill>
-                  <a:schemeClr val="bg1">
-                    <a:lumMod val="95000"/>
-                  </a:schemeClr>
-                </a:solidFill>
-                <a:latin typeface="Noto Sans KR Medium" panose="020B0200000000000000" pitchFamily="34" charset="-128"/>
-                <a:ea typeface="Noto Sans KR Medium" panose="020B0200000000000000" pitchFamily="34" charset="-128"/>
-              </a:rPr>
-              <a:t> 관리하여 종합적으로 계산한 </a:t>
-            </a:r>
-            <a:r>
-              <a:rPr lang="ko-KR" altLang="en-US" sz="1000" dirty="0" err="1" smtClean="0">
-                <a:solidFill>
-                  <a:schemeClr val="bg1">
-                    <a:lumMod val="95000"/>
-                  </a:schemeClr>
-                </a:solidFill>
-                <a:latin typeface="Noto Sans KR Medium" panose="020B0200000000000000" pitchFamily="34" charset="-128"/>
-                <a:ea typeface="Noto Sans KR Medium" panose="020B0200000000000000" pitchFamily="34" charset="-128"/>
-              </a:rPr>
-              <a:t>스탯을</a:t>
-            </a:r>
-            <a:r>
-              <a:rPr lang="ko-KR" altLang="en-US" sz="1000" dirty="0" smtClean="0">
-                <a:solidFill>
-                  <a:schemeClr val="bg1">
-                    <a:lumMod val="95000"/>
-                  </a:schemeClr>
-                </a:solidFill>
-                <a:latin typeface="Noto Sans KR Medium" panose="020B0200000000000000" pitchFamily="34" charset="-128"/>
-                <a:ea typeface="Noto Sans KR Medium" panose="020B0200000000000000" pitchFamily="34" charset="-128"/>
-              </a:rPr>
-              <a:t> 받을 수 있음</a:t>
-            </a:r>
+              <a:t>.</a:t>
+            </a:r>
+          </a:p>
+          <a:p>
             <a:endParaRPr lang="en-US" altLang="ko-KR" sz="1000" dirty="0" smtClean="0">
               <a:solidFill>
                 <a:schemeClr val="bg1">
@@ -30599,10 +29474,30 @@
             </a:endParaRPr>
           </a:p>
           <a:p>
-            <a:pPr marL="171450" indent="-171450">
-              <a:buFontTx/>
-              <a:buChar char="-"/>
-            </a:pPr>
+            <a:r>
+              <a:rPr lang="ko-KR" altLang="en-US" sz="1000" dirty="0" smtClean="0">
+                <a:solidFill>
+                  <a:schemeClr val="bg1">
+                    <a:lumMod val="95000"/>
+                  </a:schemeClr>
+                </a:solidFill>
+                <a:latin typeface="Noto Sans KR Medium" panose="020B0200000000000000" pitchFamily="34" charset="-128"/>
+                <a:ea typeface="Noto Sans KR Medium" panose="020B0200000000000000" pitchFamily="34" charset="-128"/>
+              </a:rPr>
+              <a:t>체력</a:t>
+            </a:r>
+            <a:r>
+              <a:rPr lang="en-US" altLang="ko-KR" sz="1000" dirty="0" smtClean="0">
+                <a:solidFill>
+                  <a:schemeClr val="bg1">
+                    <a:lumMod val="95000"/>
+                  </a:schemeClr>
+                </a:solidFill>
+                <a:latin typeface="Noto Sans KR Medium" panose="020B0200000000000000" pitchFamily="34" charset="-128"/>
+                <a:ea typeface="Noto Sans KR Medium" panose="020B0200000000000000" pitchFamily="34" charset="-128"/>
+              </a:rPr>
+              <a:t>, </a:t>
+            </a:r>
             <a:r>
               <a:rPr lang="ko-KR" altLang="en-US" sz="1000" dirty="0" err="1" smtClean="0">
                 <a:solidFill>
@@ -30616,18 +29511,6 @@
               <a:t>스태미너</a:t>
             </a:r>
             <a:r>
-              <a:rPr lang="ko-KR" altLang="en-US" sz="1000" dirty="0" smtClean="0">
-                <a:solidFill>
-                  <a:schemeClr val="bg1">
-                    <a:lumMod val="95000"/>
-                  </a:schemeClr>
-                </a:solidFill>
-                <a:latin typeface="Noto Sans KR Medium" panose="020B0200000000000000" pitchFamily="34" charset="-128"/>
-                <a:ea typeface="Noto Sans KR Medium" panose="020B0200000000000000" pitchFamily="34" charset="-128"/>
-              </a:rPr>
-              <a:t> 자원으로 소모해서 공격</a:t>
-            </a:r>
-            <a:r>
               <a:rPr lang="en-US" altLang="ko-KR" sz="1000" dirty="0" smtClean="0">
                 <a:solidFill>
                   <a:schemeClr val="bg1">
@@ -30649,8 +29532,129 @@
                 <a:latin typeface="Noto Sans KR Medium" panose="020B0200000000000000" pitchFamily="34" charset="-128"/>
                 <a:ea typeface="Noto Sans KR Medium" panose="020B0200000000000000" pitchFamily="34" charset="-128"/>
               </a:rPr>
-              <a:t>회피 등의 액션을 수행할 수 있음</a:t>
-            </a:r>
+              <a:t>스킬 </a:t>
+            </a:r>
+            <a:r>
+              <a:rPr lang="ko-KR" altLang="en-US" sz="1000" dirty="0" err="1" smtClean="0">
+                <a:solidFill>
+                  <a:schemeClr val="bg1">
+                    <a:lumMod val="95000"/>
+                  </a:schemeClr>
+                </a:solidFill>
+                <a:latin typeface="Noto Sans KR Medium" panose="020B0200000000000000" pitchFamily="34" charset="-128"/>
+                <a:ea typeface="Noto Sans KR Medium" panose="020B0200000000000000" pitchFamily="34" charset="-128"/>
+              </a:rPr>
+              <a:t>게이지과</a:t>
+            </a:r>
+            <a:r>
+              <a:rPr lang="ko-KR" altLang="en-US" sz="1000" dirty="0" smtClean="0">
+                <a:solidFill>
+                  <a:schemeClr val="bg1">
+                    <a:lumMod val="95000"/>
+                  </a:schemeClr>
+                </a:solidFill>
+                <a:latin typeface="Noto Sans KR Medium" panose="020B0200000000000000" pitchFamily="34" charset="-128"/>
+                <a:ea typeface="Noto Sans KR Medium" panose="020B0200000000000000" pitchFamily="34" charset="-128"/>
+              </a:rPr>
+              <a:t> 같은 요소는 일종의 자원으로 처리합니다</a:t>
+            </a:r>
+            <a:r>
+              <a:rPr lang="en-US" altLang="ko-KR" sz="1000" dirty="0" smtClean="0">
+                <a:solidFill>
+                  <a:schemeClr val="bg1">
+                    <a:lumMod val="95000"/>
+                  </a:schemeClr>
+                </a:solidFill>
+                <a:latin typeface="Noto Sans KR Medium" panose="020B0200000000000000" pitchFamily="34" charset="-128"/>
+                <a:ea typeface="Noto Sans KR Medium" panose="020B0200000000000000" pitchFamily="34" charset="-128"/>
+              </a:rPr>
+              <a:t>.</a:t>
+            </a:r>
+            <a:br>
+              <a:rPr lang="en-US" altLang="ko-KR" sz="1000" dirty="0" smtClean="0">
+                <a:solidFill>
+                  <a:schemeClr val="bg1">
+                    <a:lumMod val="95000"/>
+                  </a:schemeClr>
+                </a:solidFill>
+                <a:latin typeface="Noto Sans KR Medium" panose="020B0200000000000000" pitchFamily="34" charset="-128"/>
+                <a:ea typeface="Noto Sans KR Medium" panose="020B0200000000000000" pitchFamily="34" charset="-128"/>
+              </a:rPr>
+            </a:br>
+            <a:r>
+              <a:rPr lang="ko-KR" altLang="en-US" sz="1000" dirty="0" smtClean="0">
+                <a:solidFill>
+                  <a:schemeClr val="bg1">
+                    <a:lumMod val="95000"/>
+                  </a:schemeClr>
+                </a:solidFill>
+                <a:latin typeface="Noto Sans KR Medium" panose="020B0200000000000000" pitchFamily="34" charset="-128"/>
+                <a:ea typeface="Noto Sans KR Medium" panose="020B0200000000000000" pitchFamily="34" charset="-128"/>
+              </a:rPr>
+              <a:t>자원 요소들은 값 변동과 고갈 시</a:t>
+            </a:r>
+            <a:r>
+              <a:rPr lang="en-US" altLang="ko-KR" sz="1000" dirty="0" smtClean="0">
+                <a:solidFill>
+                  <a:schemeClr val="bg1">
+                    <a:lumMod val="95000"/>
+                  </a:schemeClr>
+                </a:solidFill>
+                <a:latin typeface="Noto Sans KR Medium" panose="020B0200000000000000" pitchFamily="34" charset="-128"/>
+                <a:ea typeface="Noto Sans KR Medium" panose="020B0200000000000000" pitchFamily="34" charset="-128"/>
+              </a:rPr>
+              <a:t>, </a:t>
+            </a:r>
+            <a:r>
+              <a:rPr lang="ko-KR" altLang="en-US" sz="1000" dirty="0" smtClean="0">
+                <a:solidFill>
+                  <a:schemeClr val="bg1">
+                    <a:lumMod val="95000"/>
+                  </a:schemeClr>
+                </a:solidFill>
+                <a:latin typeface="Noto Sans KR Medium" panose="020B0200000000000000" pitchFamily="34" charset="-128"/>
+                <a:ea typeface="Noto Sans KR Medium" panose="020B0200000000000000" pitchFamily="34" charset="-128"/>
+              </a:rPr>
+              <a:t>이벤트를 발행하여 </a:t>
+            </a:r>
+            <a:r>
+              <a:rPr lang="en-US" altLang="ko-KR" sz="1000" dirty="0" smtClean="0">
+                <a:solidFill>
+                  <a:schemeClr val="bg1">
+                    <a:lumMod val="95000"/>
+                  </a:schemeClr>
+                </a:solidFill>
+                <a:latin typeface="Noto Sans KR Medium" panose="020B0200000000000000" pitchFamily="34" charset="-128"/>
+                <a:ea typeface="Noto Sans KR Medium" panose="020B0200000000000000" pitchFamily="34" charset="-128"/>
+              </a:rPr>
+              <a:t>UI </a:t>
+            </a:r>
+            <a:r>
+              <a:rPr lang="ko-KR" altLang="en-US" sz="1000" dirty="0" smtClean="0">
+                <a:solidFill>
+                  <a:schemeClr val="bg1">
+                    <a:lumMod val="95000"/>
+                  </a:schemeClr>
+                </a:solidFill>
+                <a:latin typeface="Noto Sans KR Medium" panose="020B0200000000000000" pitchFamily="34" charset="-128"/>
+                <a:ea typeface="Noto Sans KR Medium" panose="020B0200000000000000" pitchFamily="34" charset="-128"/>
+              </a:rPr>
+              <a:t>연동하는 등의 용도로 사용했습니다</a:t>
+            </a:r>
+            <a:r>
+              <a:rPr lang="en-US" altLang="ko-KR" sz="1000" dirty="0" smtClean="0">
+                <a:solidFill>
+                  <a:schemeClr val="bg1">
+                    <a:lumMod val="95000"/>
+                  </a:schemeClr>
+                </a:solidFill>
+                <a:latin typeface="Noto Sans KR Medium" panose="020B0200000000000000" pitchFamily="34" charset="-128"/>
+                <a:ea typeface="Noto Sans KR Medium" panose="020B0200000000000000" pitchFamily="34" charset="-128"/>
+              </a:rPr>
+              <a:t>.</a:t>
+            </a:r>
+          </a:p>
+          <a:p>
             <a:endParaRPr lang="en-US" altLang="ko-KR" sz="1000" dirty="0" smtClean="0">
               <a:solidFill>
                 <a:schemeClr val="bg1">
@@ -30662,48 +29666,17 @@
             </a:endParaRPr>
           </a:p>
           <a:p>
-            <a:pPr marL="171450" indent="-171450">
-              <a:buFontTx/>
-              <a:buChar char="-"/>
-            </a:pPr>
-            <a:r>
-              <a:rPr lang="ko-KR" altLang="en-US" sz="1000" dirty="0" smtClean="0">
-                <a:solidFill>
-                  <a:schemeClr val="bg1">
-                    <a:lumMod val="95000"/>
-                  </a:schemeClr>
-                </a:solidFill>
-                <a:latin typeface="Noto Sans KR Medium" panose="020B0200000000000000" pitchFamily="34" charset="-128"/>
-                <a:ea typeface="Noto Sans KR Medium" panose="020B0200000000000000" pitchFamily="34" charset="-128"/>
-              </a:rPr>
-              <a:t>스킬 게이지 자원을 소모해서 특정 액션의 효과를 얻을 수 있음</a:t>
-            </a:r>
-            <a:endParaRPr lang="en-US" altLang="ko-KR" sz="1000" dirty="0" smtClean="0">
-              <a:solidFill>
-                <a:schemeClr val="bg1">
-                  <a:lumMod val="95000"/>
-                </a:schemeClr>
-              </a:solidFill>
-              <a:latin typeface="Noto Sans KR Medium" panose="020B0200000000000000" pitchFamily="34" charset="-128"/>
-              <a:ea typeface="Noto Sans KR Medium" panose="020B0200000000000000" pitchFamily="34" charset="-128"/>
-            </a:endParaRPr>
-          </a:p>
-          <a:p>
-            <a:pPr marL="171450" indent="-171450">
-              <a:buFontTx/>
-              <a:buChar char="-"/>
-            </a:pPr>
-            <a:r>
-              <a:rPr lang="ko-KR" altLang="en-US" sz="1000" dirty="0" smtClean="0">
-                <a:solidFill>
-                  <a:schemeClr val="bg1">
-                    <a:lumMod val="95000"/>
-                  </a:schemeClr>
-                </a:solidFill>
-                <a:latin typeface="Noto Sans KR Medium" panose="020B0200000000000000" pitchFamily="34" charset="-128"/>
-                <a:ea typeface="Noto Sans KR Medium" panose="020B0200000000000000" pitchFamily="34" charset="-128"/>
-              </a:rPr>
-              <a:t>체력</a:t>
+            <a:r>
+              <a:rPr lang="ko-KR" altLang="en-US" sz="1000" dirty="0" smtClean="0">
+                <a:solidFill>
+                  <a:schemeClr val="bg1">
+                    <a:lumMod val="95000"/>
+                  </a:schemeClr>
+                </a:solidFill>
+                <a:latin typeface="Noto Sans KR Medium" panose="020B0200000000000000" pitchFamily="34" charset="-128"/>
+                <a:ea typeface="Noto Sans KR Medium" panose="020B0200000000000000" pitchFamily="34" charset="-128"/>
+              </a:rPr>
+              <a:t>자원 중에서</a:t>
             </a:r>
             <a:r>
               <a:rPr lang="en-US" altLang="ko-KR" sz="1000" dirty="0" smtClean="0">
@@ -30715,9 +29688,95 @@
                 <a:latin typeface="Noto Sans KR Medium" panose="020B0200000000000000" pitchFamily="34" charset="-128"/>
                 <a:ea typeface="Noto Sans KR Medium" panose="020B0200000000000000" pitchFamily="34" charset="-128"/>
               </a:rPr>
+              <a:t> </a:t>
+            </a:r>
+            <a:r>
+              <a:rPr lang="ko-KR" altLang="en-US" sz="1000" dirty="0" err="1" smtClean="0">
+                <a:solidFill>
+                  <a:schemeClr val="bg1">
+                    <a:lumMod val="95000"/>
+                  </a:schemeClr>
+                </a:solidFill>
+                <a:latin typeface="Noto Sans KR Medium" panose="020B0200000000000000" pitchFamily="34" charset="-128"/>
+                <a:ea typeface="Noto Sans KR Medium" panose="020B0200000000000000" pitchFamily="34" charset="-128"/>
+              </a:rPr>
+              <a:t>스태미너와</a:t>
+            </a:r>
+            <a:r>
+              <a:rPr lang="ko-KR" altLang="en-US" sz="1000" dirty="0" smtClean="0">
+                <a:solidFill>
+                  <a:schemeClr val="bg1">
+                    <a:lumMod val="95000"/>
+                  </a:schemeClr>
+                </a:solidFill>
+                <a:latin typeface="Noto Sans KR Medium" panose="020B0200000000000000" pitchFamily="34" charset="-128"/>
+                <a:ea typeface="Noto Sans KR Medium" panose="020B0200000000000000" pitchFamily="34" charset="-128"/>
+              </a:rPr>
+              <a:t> 스킬 게이지는 캐릭터의 액션과 함께 사용됩니다</a:t>
+            </a:r>
+            <a:r>
+              <a:rPr lang="en-US" altLang="ko-KR" sz="1000" dirty="0" smtClean="0">
+                <a:solidFill>
+                  <a:schemeClr val="bg1">
+                    <a:lumMod val="95000"/>
+                  </a:schemeClr>
+                </a:solidFill>
+                <a:latin typeface="Noto Sans KR Medium" panose="020B0200000000000000" pitchFamily="34" charset="-128"/>
+                <a:ea typeface="Noto Sans KR Medium" panose="020B0200000000000000" pitchFamily="34" charset="-128"/>
+              </a:rPr>
+              <a:t>.</a:t>
+            </a:r>
+          </a:p>
+          <a:p>
+            <a:r>
+              <a:rPr lang="ko-KR" altLang="en-US" sz="1000" dirty="0" err="1" smtClean="0">
+                <a:solidFill>
+                  <a:schemeClr val="bg1">
+                    <a:lumMod val="95000"/>
+                  </a:schemeClr>
+                </a:solidFill>
+                <a:latin typeface="Noto Sans KR Medium" panose="020B0200000000000000" pitchFamily="34" charset="-128"/>
+                <a:ea typeface="Noto Sans KR Medium" panose="020B0200000000000000" pitchFamily="34" charset="-128"/>
+              </a:rPr>
+              <a:t>스태미너는</a:t>
+            </a:r>
+            <a:r>
+              <a:rPr lang="ko-KR" altLang="en-US" sz="1000" dirty="0" smtClean="0">
+                <a:solidFill>
+                  <a:schemeClr val="bg1">
+                    <a:lumMod val="95000"/>
+                  </a:schemeClr>
+                </a:solidFill>
+                <a:latin typeface="Noto Sans KR Medium" panose="020B0200000000000000" pitchFamily="34" charset="-128"/>
+                <a:ea typeface="Noto Sans KR Medium" panose="020B0200000000000000" pitchFamily="34" charset="-128"/>
+              </a:rPr>
+              <a:t> 액션을 중이지 않다면 천천히 회복되고</a:t>
+            </a:r>
+            <a:r>
+              <a:rPr lang="en-US" altLang="ko-KR" sz="1000" dirty="0" smtClean="0">
+                <a:solidFill>
+                  <a:schemeClr val="bg1">
+                    <a:lumMod val="95000"/>
+                  </a:schemeClr>
+                </a:solidFill>
+                <a:latin typeface="Noto Sans KR Medium" panose="020B0200000000000000" pitchFamily="34" charset="-128"/>
+                <a:ea typeface="Noto Sans KR Medium" panose="020B0200000000000000" pitchFamily="34" charset="-128"/>
+              </a:rPr>
               <a:t>, </a:t>
             </a:r>
             <a:r>
+              <a:rPr lang="ko-KR" altLang="en-US" sz="1000" dirty="0" smtClean="0">
+                <a:solidFill>
+                  <a:schemeClr val="bg1">
+                    <a:lumMod val="95000"/>
+                  </a:schemeClr>
+                </a:solidFill>
+                <a:latin typeface="Noto Sans KR Medium" panose="020B0200000000000000" pitchFamily="34" charset="-128"/>
+                <a:ea typeface="Noto Sans KR Medium" panose="020B0200000000000000" pitchFamily="34" charset="-128"/>
+              </a:rPr>
+              <a:t>모든 액션은 </a:t>
+            </a:r>
+            <a:r>
               <a:rPr lang="ko-KR" altLang="en-US" sz="1000" dirty="0" err="1" smtClean="0">
                 <a:solidFill>
                   <a:schemeClr val="bg1">
@@ -30727,7 +29786,19 @@
                 <a:latin typeface="Noto Sans KR Medium" panose="020B0200000000000000" pitchFamily="34" charset="-128"/>
                 <a:ea typeface="Noto Sans KR Medium" panose="020B0200000000000000" pitchFamily="34" charset="-128"/>
               </a:rPr>
-              <a:t>스태머니</a:t>
+              <a:t>스태미너를</a:t>
+            </a:r>
+            <a:r>
+              <a:rPr lang="ko-KR" altLang="en-US" sz="1000" dirty="0" smtClean="0">
+                <a:solidFill>
+                  <a:schemeClr val="bg1">
+                    <a:lumMod val="95000"/>
+                  </a:schemeClr>
+                </a:solidFill>
+                <a:latin typeface="Noto Sans KR Medium" panose="020B0200000000000000" pitchFamily="34" charset="-128"/>
+                <a:ea typeface="Noto Sans KR Medium" panose="020B0200000000000000" pitchFamily="34" charset="-128"/>
+              </a:rPr>
+              <a:t> 소모하여 작동합니다</a:t>
             </a:r>
             <a:r>
               <a:rPr lang="en-US" altLang="ko-KR" sz="1000" dirty="0" smtClean="0">
@@ -30739,6 +29810,154 @@
                 <a:latin typeface="Noto Sans KR Medium" panose="020B0200000000000000" pitchFamily="34" charset="-128"/>
                 <a:ea typeface="Noto Sans KR Medium" panose="020B0200000000000000" pitchFamily="34" charset="-128"/>
               </a:rPr>
+              <a:t>.</a:t>
+            </a:r>
+          </a:p>
+          <a:p>
+            <a:r>
+              <a:rPr lang="ko-KR" altLang="en-US" sz="1000" dirty="0" smtClean="0">
+                <a:solidFill>
+                  <a:schemeClr val="bg1">
+                    <a:lumMod val="95000"/>
+                  </a:schemeClr>
+                </a:solidFill>
+                <a:latin typeface="Noto Sans KR Medium" panose="020B0200000000000000" pitchFamily="34" charset="-128"/>
+                <a:ea typeface="Noto Sans KR Medium" panose="020B0200000000000000" pitchFamily="34" charset="-128"/>
+              </a:rPr>
+              <a:t>액션 중 </a:t>
+            </a:r>
+            <a:r>
+              <a:rPr lang="ko-KR" altLang="en-US" sz="1000" dirty="0" err="1" smtClean="0">
+                <a:solidFill>
+                  <a:schemeClr val="bg1">
+                    <a:lumMod val="95000"/>
+                  </a:schemeClr>
+                </a:solidFill>
+                <a:latin typeface="Noto Sans KR Medium" panose="020B0200000000000000" pitchFamily="34" charset="-128"/>
+                <a:ea typeface="Noto Sans KR Medium" panose="020B0200000000000000" pitchFamily="34" charset="-128"/>
+              </a:rPr>
+              <a:t>스태미너가</a:t>
+            </a:r>
+            <a:r>
+              <a:rPr lang="ko-KR" altLang="en-US" sz="1000" dirty="0" smtClean="0">
+                <a:solidFill>
+                  <a:schemeClr val="bg1">
+                    <a:lumMod val="95000"/>
+                  </a:schemeClr>
+                </a:solidFill>
+                <a:latin typeface="Noto Sans KR Medium" panose="020B0200000000000000" pitchFamily="34" charset="-128"/>
+                <a:ea typeface="Noto Sans KR Medium" panose="020B0200000000000000" pitchFamily="34" charset="-128"/>
+              </a:rPr>
+              <a:t> </a:t>
+            </a:r>
+            <a:r>
+              <a:rPr lang="en-US" altLang="ko-KR" sz="1000" dirty="0" smtClean="0">
+                <a:solidFill>
+                  <a:schemeClr val="bg1">
+                    <a:lumMod val="95000"/>
+                  </a:schemeClr>
+                </a:solidFill>
+                <a:latin typeface="Noto Sans KR Medium" panose="020B0200000000000000" pitchFamily="34" charset="-128"/>
+                <a:ea typeface="Noto Sans KR Medium" panose="020B0200000000000000" pitchFamily="34" charset="-128"/>
+              </a:rPr>
+              <a:t>0</a:t>
+            </a:r>
+            <a:r>
+              <a:rPr lang="ko-KR" altLang="en-US" sz="1000" dirty="0" smtClean="0">
+                <a:solidFill>
+                  <a:schemeClr val="bg1">
+                    <a:lumMod val="95000"/>
+                  </a:schemeClr>
+                </a:solidFill>
+                <a:latin typeface="Noto Sans KR Medium" panose="020B0200000000000000" pitchFamily="34" charset="-128"/>
+                <a:ea typeface="Noto Sans KR Medium" panose="020B0200000000000000" pitchFamily="34" charset="-128"/>
+              </a:rPr>
+              <a:t>이 되면 </a:t>
+            </a:r>
+            <a:r>
+              <a:rPr lang="en-US" altLang="ko-KR" sz="1000" dirty="0" smtClean="0">
+                <a:solidFill>
+                  <a:schemeClr val="bg1">
+                    <a:lumMod val="95000"/>
+                  </a:schemeClr>
+                </a:solidFill>
+                <a:latin typeface="Noto Sans KR Medium" panose="020B0200000000000000" pitchFamily="34" charset="-128"/>
+                <a:ea typeface="Noto Sans KR Medium" panose="020B0200000000000000" pitchFamily="34" charset="-128"/>
+              </a:rPr>
+              <a:t>5</a:t>
+            </a:r>
+            <a:r>
+              <a:rPr lang="ko-KR" altLang="en-US" sz="1000" dirty="0" smtClean="0">
+                <a:solidFill>
+                  <a:schemeClr val="bg1">
+                    <a:lumMod val="95000"/>
+                  </a:schemeClr>
+                </a:solidFill>
+                <a:latin typeface="Noto Sans KR Medium" panose="020B0200000000000000" pitchFamily="34" charset="-128"/>
+                <a:ea typeface="Noto Sans KR Medium" panose="020B0200000000000000" pitchFamily="34" charset="-128"/>
+              </a:rPr>
+              <a:t>초간 천천히 걸으며 </a:t>
+            </a:r>
+            <a:r>
+              <a:rPr lang="ko-KR" altLang="en-US" sz="1000" dirty="0" err="1" smtClean="0">
+                <a:solidFill>
+                  <a:schemeClr val="bg1">
+                    <a:lumMod val="95000"/>
+                  </a:schemeClr>
+                </a:solidFill>
+                <a:latin typeface="Noto Sans KR Medium" panose="020B0200000000000000" pitchFamily="34" charset="-128"/>
+                <a:ea typeface="Noto Sans KR Medium" panose="020B0200000000000000" pitchFamily="34" charset="-128"/>
+              </a:rPr>
+              <a:t>스태미너가</a:t>
+            </a:r>
+            <a:r>
+              <a:rPr lang="ko-KR" altLang="en-US" sz="1000" dirty="0" smtClean="0">
+                <a:solidFill>
+                  <a:schemeClr val="bg1">
+                    <a:lumMod val="95000"/>
+                  </a:schemeClr>
+                </a:solidFill>
+                <a:latin typeface="Noto Sans KR Medium" panose="020B0200000000000000" pitchFamily="34" charset="-128"/>
+                <a:ea typeface="Noto Sans KR Medium" panose="020B0200000000000000" pitchFamily="34" charset="-128"/>
+              </a:rPr>
+              <a:t> 회복되지 않는 페널티 기능을 구현했습니다</a:t>
+            </a:r>
+            <a:r>
+              <a:rPr lang="en-US" altLang="ko-KR" sz="1000" dirty="0" smtClean="0">
+                <a:solidFill>
+                  <a:schemeClr val="bg1">
+                    <a:lumMod val="95000"/>
+                  </a:schemeClr>
+                </a:solidFill>
+                <a:latin typeface="Noto Sans KR Medium" panose="020B0200000000000000" pitchFamily="34" charset="-128"/>
+                <a:ea typeface="Noto Sans KR Medium" panose="020B0200000000000000" pitchFamily="34" charset="-128"/>
+              </a:rPr>
+              <a:t>.</a:t>
+            </a:r>
+          </a:p>
+          <a:p>
+            <a:r>
+              <a:rPr lang="ko-KR" altLang="en-US" sz="1000" dirty="0" smtClean="0">
+                <a:solidFill>
+                  <a:schemeClr val="bg1">
+                    <a:lumMod val="95000"/>
+                  </a:schemeClr>
+                </a:solidFill>
+                <a:latin typeface="Noto Sans KR Medium" panose="020B0200000000000000" pitchFamily="34" charset="-128"/>
+                <a:ea typeface="Noto Sans KR Medium" panose="020B0200000000000000" pitchFamily="34" charset="-128"/>
+              </a:rPr>
+              <a:t>스킬 게이지는 전투 중 획득 가능하고</a:t>
+            </a:r>
+            <a:r>
+              <a:rPr lang="en-US" altLang="ko-KR" sz="1000" dirty="0" smtClean="0">
+                <a:solidFill>
+                  <a:schemeClr val="bg1">
+                    <a:lumMod val="95000"/>
+                  </a:schemeClr>
+                </a:solidFill>
+                <a:latin typeface="Noto Sans KR Medium" panose="020B0200000000000000" pitchFamily="34" charset="-128"/>
+                <a:ea typeface="Noto Sans KR Medium" panose="020B0200000000000000" pitchFamily="34" charset="-128"/>
+              </a:rPr>
               <a:t>, </a:t>
             </a:r>
             <a:r>
@@ -30751,7 +29970,7 @@
                 <a:latin typeface="Noto Sans KR Medium" panose="020B0200000000000000" pitchFamily="34" charset="-128"/>
                 <a:ea typeface="Noto Sans KR Medium" panose="020B0200000000000000" pitchFamily="34" charset="-128"/>
               </a:rPr>
-              <a:t>스킬 게이지의 자원 변화 시</a:t>
+              <a:t>액션에 부여된 효과가 스킬 게이지를 소모하여 발동합니다</a:t>
             </a:r>
             <a:r>
               <a:rPr lang="en-US" altLang="ko-KR" sz="1000" dirty="0" smtClean="0">
@@ -30763,126 +29982,7 @@
                 <a:latin typeface="Noto Sans KR Medium" panose="020B0200000000000000" pitchFamily="34" charset="-128"/>
                 <a:ea typeface="Noto Sans KR Medium" panose="020B0200000000000000" pitchFamily="34" charset="-128"/>
               </a:rPr>
-              <a:t>, </a:t>
-            </a:r>
-            <a:r>
-              <a:rPr lang="ko-KR" altLang="en-US" sz="1000" dirty="0" smtClean="0">
-                <a:solidFill>
-                  <a:schemeClr val="bg1">
-                    <a:lumMod val="95000"/>
-                  </a:schemeClr>
-                </a:solidFill>
-                <a:latin typeface="Noto Sans KR Medium" panose="020B0200000000000000" pitchFamily="34" charset="-128"/>
-                <a:ea typeface="Noto Sans KR Medium" panose="020B0200000000000000" pitchFamily="34" charset="-128"/>
-              </a:rPr>
-              <a:t>이벤트를 발행하여 </a:t>
-            </a:r>
-            <a:r>
-              <a:rPr lang="en-US" altLang="ko-KR" sz="1000" dirty="0" smtClean="0">
-                <a:solidFill>
-                  <a:schemeClr val="bg1">
-                    <a:lumMod val="95000"/>
-                  </a:schemeClr>
-                </a:solidFill>
-                <a:latin typeface="Noto Sans KR Medium" panose="020B0200000000000000" pitchFamily="34" charset="-128"/>
-                <a:ea typeface="Noto Sans KR Medium" panose="020B0200000000000000" pitchFamily="34" charset="-128"/>
-              </a:rPr>
-              <a:t>UI</a:t>
-            </a:r>
-            <a:r>
-              <a:rPr lang="ko-KR" altLang="en-US" sz="1000" dirty="0" smtClean="0">
-                <a:solidFill>
-                  <a:schemeClr val="bg1">
-                    <a:lumMod val="95000"/>
-                  </a:schemeClr>
-                </a:solidFill>
-                <a:latin typeface="Noto Sans KR Medium" panose="020B0200000000000000" pitchFamily="34" charset="-128"/>
-                <a:ea typeface="Noto Sans KR Medium" panose="020B0200000000000000" pitchFamily="34" charset="-128"/>
-              </a:rPr>
-              <a:t>에 변화를 반영할 수 있도록 함</a:t>
-            </a:r>
-            <a:r>
-              <a:rPr lang="en-US" altLang="ko-KR" sz="1000" dirty="0" smtClean="0">
-                <a:solidFill>
-                  <a:schemeClr val="bg1">
-                    <a:lumMod val="95000"/>
-                  </a:schemeClr>
-                </a:solidFill>
-                <a:latin typeface="Noto Sans KR Medium" panose="020B0200000000000000" pitchFamily="34" charset="-128"/>
-                <a:ea typeface="Noto Sans KR Medium" panose="020B0200000000000000" pitchFamily="34" charset="-128"/>
-              </a:rPr>
-              <a:t/>
-            </a:r>
-            <a:br>
-              <a:rPr lang="en-US" altLang="ko-KR" sz="1000" dirty="0" smtClean="0">
-                <a:solidFill>
-                  <a:schemeClr val="bg1">
-                    <a:lumMod val="95000"/>
-                  </a:schemeClr>
-                </a:solidFill>
-                <a:latin typeface="Noto Sans KR Medium" panose="020B0200000000000000" pitchFamily="34" charset="-128"/>
-                <a:ea typeface="Noto Sans KR Medium" panose="020B0200000000000000" pitchFamily="34" charset="-128"/>
-              </a:rPr>
-            </a:br>
-            <a:r>
-              <a:rPr lang="en-US" altLang="ko-KR" sz="1000" dirty="0" smtClean="0">
-                <a:solidFill>
-                  <a:schemeClr val="bg1">
-                    <a:lumMod val="95000"/>
-                  </a:schemeClr>
-                </a:solidFill>
-                <a:latin typeface="Noto Sans KR Medium" panose="020B0200000000000000" pitchFamily="34" charset="-128"/>
-                <a:ea typeface="Noto Sans KR Medium" panose="020B0200000000000000" pitchFamily="34" charset="-128"/>
-              </a:rPr>
-              <a:t>(</a:t>
-            </a:r>
-            <a:r>
-              <a:rPr lang="ko-KR" altLang="en-US" sz="1000" dirty="0">
-                <a:solidFill>
-                  <a:schemeClr val="bg1">
-                    <a:lumMod val="95000"/>
-                  </a:schemeClr>
-                </a:solidFill>
-                <a:latin typeface="Noto Sans KR Medium" panose="020B0200000000000000" pitchFamily="34" charset="-128"/>
-                <a:ea typeface="Noto Sans KR Medium" panose="020B0200000000000000" pitchFamily="34" charset="-128"/>
-              </a:rPr>
-              <a:t>구독</a:t>
-            </a:r>
-            <a:r>
-              <a:rPr lang="en-US" altLang="ko-KR" sz="1000" dirty="0">
-                <a:solidFill>
-                  <a:schemeClr val="bg1">
-                    <a:lumMod val="95000"/>
-                  </a:schemeClr>
-                </a:solidFill>
-                <a:latin typeface="Noto Sans KR Medium" panose="020B0200000000000000" pitchFamily="34" charset="-128"/>
-                <a:ea typeface="Noto Sans KR Medium" panose="020B0200000000000000" pitchFamily="34" charset="-128"/>
-              </a:rPr>
-              <a:t>-</a:t>
-            </a:r>
-            <a:r>
-              <a:rPr lang="ko-KR" altLang="en-US" sz="1000" dirty="0">
-                <a:solidFill>
-                  <a:schemeClr val="bg1">
-                    <a:lumMod val="95000"/>
-                  </a:schemeClr>
-                </a:solidFill>
-                <a:latin typeface="Noto Sans KR Medium" panose="020B0200000000000000" pitchFamily="34" charset="-128"/>
-                <a:ea typeface="Noto Sans KR Medium" panose="020B0200000000000000" pitchFamily="34" charset="-128"/>
-              </a:rPr>
-              <a:t>발행 모델</a:t>
-            </a:r>
-            <a:r>
-              <a:rPr lang="en-US" altLang="ko-KR" sz="1000" dirty="0" smtClean="0">
-                <a:solidFill>
-                  <a:schemeClr val="bg1">
-                    <a:lumMod val="95000"/>
-                  </a:schemeClr>
-                </a:solidFill>
-                <a:latin typeface="Noto Sans KR Medium" panose="020B0200000000000000" pitchFamily="34" charset="-128"/>
-                <a:ea typeface="Noto Sans KR Medium" panose="020B0200000000000000" pitchFamily="34" charset="-128"/>
-              </a:rPr>
-              <a:t>)</a:t>
+              <a:t>.</a:t>
             </a:r>
           </a:p>
         </p:txBody>
@@ -30940,7 +30040,7 @@
         </p:nvSpPr>
         <p:spPr>
           <a:xfrm>
-            <a:off x="454275" y="3390472"/>
+            <a:off x="540000" y="3390472"/>
             <a:ext cx="2669069" cy="2948683"/>
           </a:xfrm>
           <a:prstGeom prst="rect">
@@ -31059,8 +30159,8 @@
         </p:nvSpPr>
         <p:spPr>
           <a:xfrm>
-            <a:off x="6666334" y="513836"/>
-            <a:ext cx="5179769" cy="2876635"/>
+            <a:off x="6666334" y="513837"/>
+            <a:ext cx="5179769" cy="2061726"/>
           </a:xfrm>
           <a:prstGeom prst="rect">
             <a:avLst/>
@@ -31111,8 +30211,8 @@
         </p:nvSpPr>
         <p:spPr>
           <a:xfrm>
-            <a:off x="6666333" y="3543000"/>
-            <a:ext cx="5179769" cy="2796155"/>
+            <a:off x="6666333" y="2885455"/>
+            <a:ext cx="5179769" cy="2004045"/>
           </a:xfrm>
           <a:prstGeom prst="rect">
             <a:avLst/>
@@ -31146,6 +30246,58 @@
             <a:r>
               <a:rPr lang="ko-KR" altLang="en-US" dirty="0" smtClean="0"/>
               <a:t> 구독 코드</a:t>
+            </a:r>
+            <a:endParaRPr lang="ko-KR" altLang="en-US" dirty="0"/>
+          </a:p>
+        </p:txBody>
+      </p:sp>
+      <p:sp>
+        <p:nvSpPr>
+          <p:cNvPr id="15" name="직사각형 14"/>
+          <p:cNvSpPr/>
+          <p:nvPr/>
+        </p:nvSpPr>
+        <p:spPr>
+          <a:xfrm>
+            <a:off x="6666333" y="5067300"/>
+            <a:ext cx="5179769" cy="1271855"/>
+          </a:xfrm>
+          <a:prstGeom prst="rect">
+            <a:avLst/>
+          </a:prstGeom>
+        </p:spPr>
+        <p:style>
+          <a:lnRef idx="2">
+            <a:schemeClr val="accent1">
+              <a:shade val="50000"/>
+            </a:schemeClr>
+          </a:lnRef>
+          <a:fillRef idx="1">
+            <a:schemeClr val="accent1"/>
+          </a:fillRef>
+          <a:effectRef idx="0">
+            <a:schemeClr val="accent1"/>
+          </a:effectRef>
+          <a:fontRef idx="minor">
+            <a:schemeClr val="lt1"/>
+          </a:fontRef>
+        </p:style>
+        <p:txBody>
+          <a:bodyPr rtlCol="0" anchor="ctr"/>
+          <a:lstStyle/>
+          <a:p>
+            <a:pPr algn="ctr"/>
+            <a:r>
+              <a:rPr lang="ko-KR" altLang="en-US" dirty="0" smtClean="0"/>
+              <a:t>자원 </a:t>
+            </a:r>
+            <a:r>
+              <a:rPr lang="ko-KR" altLang="en-US" dirty="0" err="1" smtClean="0"/>
+              <a:t>스탯</a:t>
+            </a:r>
+            <a:r>
+              <a:rPr lang="ko-KR" altLang="en-US" dirty="0" smtClean="0"/>
+              <a:t> 사용 코드</a:t>
             </a:r>
             <a:endParaRPr lang="ko-KR" altLang="en-US" dirty="0"/>
           </a:p>
@@ -31358,6 +30510,92 @@
               <a:t>, </a:t>
             </a:r>
             <a:r>
+              <a:rPr lang="ko-KR" altLang="en-US" sz="1000" dirty="0" err="1" smtClean="0">
+                <a:solidFill>
+                  <a:schemeClr val="bg1">
+                    <a:lumMod val="95000"/>
+                  </a:schemeClr>
+                </a:solidFill>
+                <a:latin typeface="Noto Sans KR Medium" panose="020B0200000000000000" pitchFamily="34" charset="-128"/>
+                <a:ea typeface="Noto Sans KR Medium" panose="020B0200000000000000" pitchFamily="34" charset="-128"/>
+              </a:rPr>
+              <a:t>디버프를</a:t>
+            </a:r>
+            <a:r>
+              <a:rPr lang="ko-KR" altLang="en-US" sz="1000" dirty="0" smtClean="0">
+                <a:solidFill>
+                  <a:schemeClr val="bg1">
+                    <a:lumMod val="95000"/>
+                  </a:schemeClr>
+                </a:solidFill>
+                <a:latin typeface="Noto Sans KR Medium" panose="020B0200000000000000" pitchFamily="34" charset="-128"/>
+                <a:ea typeface="Noto Sans KR Medium" panose="020B0200000000000000" pitchFamily="34" charset="-128"/>
+              </a:rPr>
+              <a:t> </a:t>
+            </a:r>
+            <a:r>
+              <a:rPr lang="ko-KR" altLang="en-US" sz="1000" dirty="0" smtClean="0">
+                <a:solidFill>
+                  <a:schemeClr val="bg1">
+                    <a:lumMod val="95000"/>
+                  </a:schemeClr>
+                </a:solidFill>
+                <a:latin typeface="Noto Sans KR Medium" panose="020B0200000000000000" pitchFamily="34" charset="-128"/>
+                <a:ea typeface="Noto Sans KR Medium" panose="020B0200000000000000" pitchFamily="34" charset="-128"/>
+              </a:rPr>
+              <a:t>적용하는 </a:t>
+            </a:r>
+            <a:r>
+              <a:rPr lang="ko-KR" altLang="en-US" sz="1000" dirty="0" smtClean="0">
+                <a:solidFill>
+                  <a:schemeClr val="bg1">
+                    <a:lumMod val="95000"/>
+                  </a:schemeClr>
+                </a:solidFill>
+                <a:latin typeface="Noto Sans KR Medium" panose="020B0200000000000000" pitchFamily="34" charset="-128"/>
+                <a:ea typeface="Noto Sans KR Medium" panose="020B0200000000000000" pitchFamily="34" charset="-128"/>
+              </a:rPr>
+              <a:t>효과 클래스입니다</a:t>
+            </a:r>
+            <a:r>
+              <a:rPr lang="en-US" altLang="ko-KR" sz="1000" dirty="0" smtClean="0">
+                <a:solidFill>
+                  <a:schemeClr val="bg1">
+                    <a:lumMod val="95000"/>
+                  </a:schemeClr>
+                </a:solidFill>
+                <a:latin typeface="Noto Sans KR Medium" panose="020B0200000000000000" pitchFamily="34" charset="-128"/>
+                <a:ea typeface="Noto Sans KR Medium" panose="020B0200000000000000" pitchFamily="34" charset="-128"/>
+              </a:rPr>
+              <a:t>.</a:t>
+            </a:r>
+          </a:p>
+          <a:p>
+            <a:r>
+              <a:rPr lang="ko-KR" altLang="en-US" sz="1000" dirty="0" smtClean="0">
+                <a:solidFill>
+                  <a:schemeClr val="bg1">
+                    <a:lumMod val="95000"/>
+                  </a:schemeClr>
+                </a:solidFill>
+                <a:latin typeface="Noto Sans KR Medium" panose="020B0200000000000000" pitchFamily="34" charset="-128"/>
+                <a:ea typeface="Noto Sans KR Medium" panose="020B0200000000000000" pitchFamily="34" charset="-128"/>
+              </a:rPr>
+              <a:t>효과 </a:t>
+            </a:r>
+            <a:r>
+              <a:rPr lang="ko-KR" altLang="en-US" sz="1000" dirty="0" smtClean="0">
+                <a:solidFill>
+                  <a:schemeClr val="bg1">
+                    <a:lumMod val="95000"/>
+                  </a:schemeClr>
+                </a:solidFill>
+                <a:latin typeface="Noto Sans KR Medium" panose="020B0200000000000000" pitchFamily="34" charset="-128"/>
+                <a:ea typeface="Noto Sans KR Medium" panose="020B0200000000000000" pitchFamily="34" charset="-128"/>
+              </a:rPr>
+              <a:t>기능들이 </a:t>
+            </a:r>
+            <a:r>
               <a:rPr lang="ko-KR" altLang="en-US" sz="1000" dirty="0" err="1">
                 <a:solidFill>
                   <a:schemeClr val="bg1">
@@ -31367,7 +30605,7 @@
                 <a:latin typeface="Noto Sans KR Medium" panose="020B0200000000000000" pitchFamily="34" charset="-128"/>
                 <a:ea typeface="Noto Sans KR Medium" panose="020B0200000000000000" pitchFamily="34" charset="-128"/>
               </a:rPr>
-              <a:t>디버프</a:t>
+              <a:t>스탯에</a:t>
             </a:r>
             <a:r>
               <a:rPr lang="ko-KR" altLang="en-US" sz="1000" dirty="0">
@@ -31379,19 +30617,54 @@
                 <a:latin typeface="Noto Sans KR Medium" panose="020B0200000000000000" pitchFamily="34" charset="-128"/>
                 <a:ea typeface="Noto Sans KR Medium" panose="020B0200000000000000" pitchFamily="34" charset="-128"/>
               </a:rPr>
-              <a:t> 등의 </a:t>
-            </a:r>
-            <a:r>
-              <a:rPr lang="ko-KR" altLang="en-US" sz="1000" dirty="0" smtClean="0">
-                <a:solidFill>
-                  <a:schemeClr val="bg1">
-                    <a:lumMod val="95000"/>
-                  </a:schemeClr>
-                </a:solidFill>
-                <a:latin typeface="Noto Sans KR Medium" panose="020B0200000000000000" pitchFamily="34" charset="-128"/>
-                <a:ea typeface="Noto Sans KR Medium" panose="020B0200000000000000" pitchFamily="34" charset="-128"/>
-              </a:rPr>
-              <a:t>효과를 적용하는 </a:t>
+              <a:t> 영향을 준다는 </a:t>
+            </a:r>
+            <a:r>
+              <a:rPr lang="ko-KR" altLang="en-US" sz="1000" dirty="0" smtClean="0">
+                <a:solidFill>
+                  <a:schemeClr val="bg1">
+                    <a:lumMod val="95000"/>
+                  </a:schemeClr>
+                </a:solidFill>
+                <a:latin typeface="Noto Sans KR Medium" panose="020B0200000000000000" pitchFamily="34" charset="-128"/>
+                <a:ea typeface="Noto Sans KR Medium" panose="020B0200000000000000" pitchFamily="34" charset="-128"/>
+              </a:rPr>
+              <a:t>공통점에 착안하여</a:t>
+            </a:r>
+            <a:endParaRPr lang="en-US" altLang="ko-KR" sz="1000" dirty="0" smtClean="0">
+              <a:solidFill>
+                <a:schemeClr val="bg1">
+                  <a:lumMod val="95000"/>
+                </a:schemeClr>
+              </a:solidFill>
+              <a:latin typeface="Noto Sans KR Medium" panose="020B0200000000000000" pitchFamily="34" charset="-128"/>
+              <a:ea typeface="Noto Sans KR Medium" panose="020B0200000000000000" pitchFamily="34" charset="-128"/>
+            </a:endParaRPr>
+          </a:p>
+          <a:p>
+            <a:r>
+              <a:rPr lang="en-US" altLang="ko-KR" sz="1000" dirty="0" err="1" smtClean="0">
+                <a:solidFill>
+                  <a:schemeClr val="bg1">
+                    <a:lumMod val="95000"/>
+                  </a:schemeClr>
+                </a:solidFill>
+                <a:latin typeface="Noto Sans KR Medium" panose="020B0200000000000000" pitchFamily="34" charset="-128"/>
+                <a:ea typeface="Noto Sans KR Medium" panose="020B0200000000000000" pitchFamily="34" charset="-128"/>
+              </a:rPr>
+              <a:t>UStatComponent</a:t>
+            </a:r>
+            <a:r>
+              <a:rPr lang="ko-KR" altLang="en-US" sz="1000" dirty="0" smtClean="0">
+                <a:solidFill>
+                  <a:schemeClr val="bg1">
+                    <a:lumMod val="95000"/>
+                  </a:schemeClr>
+                </a:solidFill>
+                <a:latin typeface="Noto Sans KR Medium" panose="020B0200000000000000" pitchFamily="34" charset="-128"/>
+                <a:ea typeface="Noto Sans KR Medium" panose="020B0200000000000000" pitchFamily="34" charset="-128"/>
+              </a:rPr>
+              <a:t>에서 모든 </a:t>
             </a:r>
             <a:r>
               <a:rPr lang="ko-KR" altLang="en-US" sz="1000" dirty="0">
@@ -31403,8 +30676,58 @@
                 <a:latin typeface="Noto Sans KR Medium" panose="020B0200000000000000" pitchFamily="34" charset="-128"/>
                 <a:ea typeface="Noto Sans KR Medium" panose="020B0200000000000000" pitchFamily="34" charset="-128"/>
               </a:rPr>
-              <a:t>클래스</a:t>
-            </a:r>
+              <a:t>효과를 등록</a:t>
+            </a:r>
+            <a:r>
+              <a:rPr lang="en-US" altLang="ko-KR" sz="1000" dirty="0">
+                <a:solidFill>
+                  <a:schemeClr val="bg1">
+                    <a:lumMod val="95000"/>
+                  </a:schemeClr>
+                </a:solidFill>
+                <a:latin typeface="Noto Sans KR Medium" panose="020B0200000000000000" pitchFamily="34" charset="-128"/>
+                <a:ea typeface="Noto Sans KR Medium" panose="020B0200000000000000" pitchFamily="34" charset="-128"/>
+              </a:rPr>
+              <a:t>, </a:t>
+            </a:r>
+            <a:r>
+              <a:rPr lang="ko-KR" altLang="en-US" sz="1000" dirty="0">
+                <a:solidFill>
+                  <a:schemeClr val="bg1">
+                    <a:lumMod val="95000"/>
+                  </a:schemeClr>
+                </a:solidFill>
+                <a:latin typeface="Noto Sans KR Medium" panose="020B0200000000000000" pitchFamily="34" charset="-128"/>
+                <a:ea typeface="Noto Sans KR Medium" panose="020B0200000000000000" pitchFamily="34" charset="-128"/>
+              </a:rPr>
+              <a:t>해제하고 </a:t>
+            </a:r>
+            <a:r>
+              <a:rPr lang="ko-KR" altLang="en-US" sz="1000" dirty="0" smtClean="0">
+                <a:solidFill>
+                  <a:schemeClr val="bg1">
+                    <a:lumMod val="95000"/>
+                  </a:schemeClr>
+                </a:solidFill>
+                <a:latin typeface="Noto Sans KR Medium" panose="020B0200000000000000" pitchFamily="34" charset="-128"/>
+                <a:ea typeface="Noto Sans KR Medium" panose="020B0200000000000000" pitchFamily="34" charset="-128"/>
+              </a:rPr>
+              <a:t>관리하도록 구현했습니다</a:t>
+            </a:r>
+            <a:r>
+              <a:rPr lang="en-US" altLang="ko-KR" sz="1000" dirty="0" smtClean="0">
+                <a:solidFill>
+                  <a:schemeClr val="bg1">
+                    <a:lumMod val="95000"/>
+                  </a:schemeClr>
+                </a:solidFill>
+                <a:latin typeface="Noto Sans KR Medium" panose="020B0200000000000000" pitchFamily="34" charset="-128"/>
+                <a:ea typeface="Noto Sans KR Medium" panose="020B0200000000000000" pitchFamily="34" charset="-128"/>
+              </a:rPr>
+              <a:t>.</a:t>
+            </a:r>
+          </a:p>
+          <a:p>
             <a:endParaRPr lang="en-US" altLang="ko-KR" sz="1000" dirty="0">
               <a:solidFill>
                 <a:schemeClr val="bg1">
@@ -31416,10 +30739,18 @@
             </a:endParaRPr>
           </a:p>
           <a:p>
-            <a:pPr marL="171450" indent="-171450">
-              <a:buFontTx/>
-              <a:buChar char="-"/>
-            </a:pPr>
+            <a:r>
+              <a:rPr lang="en-US" altLang="ko-KR" sz="1000" dirty="0" err="1" smtClean="0">
+                <a:solidFill>
+                  <a:schemeClr val="bg1">
+                    <a:lumMod val="95000"/>
+                  </a:schemeClr>
+                </a:solidFill>
+                <a:latin typeface="Noto Sans KR Medium" panose="020B0200000000000000" pitchFamily="34" charset="-128"/>
+                <a:ea typeface="Noto Sans KR Medium" panose="020B0200000000000000" pitchFamily="34" charset="-128"/>
+              </a:rPr>
+              <a:t>UStatComponent</a:t>
+            </a:r>
             <a:r>
               <a:rPr lang="ko-KR" altLang="en-US" sz="1000" dirty="0">
                 <a:solidFill>
@@ -31430,19 +30761,79 @@
                 <a:latin typeface="Noto Sans KR Medium" panose="020B0200000000000000" pitchFamily="34" charset="-128"/>
                 <a:ea typeface="Noto Sans KR Medium" panose="020B0200000000000000" pitchFamily="34" charset="-128"/>
               </a:rPr>
-              <a:t>필요한 </a:t>
-            </a:r>
-            <a:r>
-              <a:rPr lang="ko-KR" altLang="en-US" sz="1000" dirty="0" err="1">
-                <a:solidFill>
-                  <a:schemeClr val="bg1">
-                    <a:lumMod val="95000"/>
-                  </a:schemeClr>
-                </a:solidFill>
-                <a:latin typeface="Noto Sans KR Medium" panose="020B0200000000000000" pitchFamily="34" charset="-128"/>
-                <a:ea typeface="Noto Sans KR Medium" panose="020B0200000000000000" pitchFamily="34" charset="-128"/>
-              </a:rPr>
-              <a:t>버프</a:t>
+              <a:t>를 외부에서 직접 </a:t>
+            </a:r>
+            <a:r>
+              <a:rPr lang="ko-KR" altLang="en-US" sz="1000" dirty="0" smtClean="0">
+                <a:solidFill>
+                  <a:schemeClr val="bg1">
+                    <a:lumMod val="95000"/>
+                  </a:schemeClr>
+                </a:solidFill>
+                <a:latin typeface="Noto Sans KR Medium" panose="020B0200000000000000" pitchFamily="34" charset="-128"/>
+                <a:ea typeface="Noto Sans KR Medium" panose="020B0200000000000000" pitchFamily="34" charset="-128"/>
+              </a:rPr>
+              <a:t>접근하는 과정에서 특정 </a:t>
+            </a:r>
+            <a:r>
+              <a:rPr lang="ko-KR" altLang="en-US" sz="1000" dirty="0" err="1" smtClean="0">
+                <a:solidFill>
+                  <a:schemeClr val="bg1">
+                    <a:lumMod val="95000"/>
+                  </a:schemeClr>
+                </a:solidFill>
+                <a:latin typeface="Noto Sans KR Medium" panose="020B0200000000000000" pitchFamily="34" charset="-128"/>
+                <a:ea typeface="Noto Sans KR Medium" panose="020B0200000000000000" pitchFamily="34" charset="-128"/>
+              </a:rPr>
+              <a:t>액터에</a:t>
+            </a:r>
+            <a:r>
+              <a:rPr lang="ko-KR" altLang="en-US" sz="1000" dirty="0" smtClean="0">
+                <a:solidFill>
+                  <a:schemeClr val="bg1">
+                    <a:lumMod val="95000"/>
+                  </a:schemeClr>
+                </a:solidFill>
+                <a:latin typeface="Noto Sans KR Medium" panose="020B0200000000000000" pitchFamily="34" charset="-128"/>
+                <a:ea typeface="Noto Sans KR Medium" panose="020B0200000000000000" pitchFamily="34" charset="-128"/>
+              </a:rPr>
+              <a:t> </a:t>
+            </a:r>
+            <a:r>
+              <a:rPr lang="ko-KR" altLang="en-US" sz="1000" dirty="0">
+                <a:solidFill>
+                  <a:schemeClr val="bg1">
+                    <a:lumMod val="95000"/>
+                  </a:schemeClr>
+                </a:solidFill>
+                <a:latin typeface="Noto Sans KR Medium" panose="020B0200000000000000" pitchFamily="34" charset="-128"/>
+                <a:ea typeface="Noto Sans KR Medium" panose="020B0200000000000000" pitchFamily="34" charset="-128"/>
+              </a:rPr>
+              <a:t>대한 의존성이 </a:t>
+            </a:r>
+            <a:r>
+              <a:rPr lang="ko-KR" altLang="en-US" sz="1000" dirty="0" smtClean="0">
+                <a:solidFill>
+                  <a:schemeClr val="bg1">
+                    <a:lumMod val="95000"/>
+                  </a:schemeClr>
+                </a:solidFill>
+                <a:latin typeface="Noto Sans KR Medium" panose="020B0200000000000000" pitchFamily="34" charset="-128"/>
+                <a:ea typeface="Noto Sans KR Medium" panose="020B0200000000000000" pitchFamily="34" charset="-128"/>
+              </a:rPr>
+              <a:t>발생하지 않도록  </a:t>
+            </a:r>
+            <a:r>
+              <a:rPr lang="en-US" altLang="ko-KR" sz="1000" dirty="0" err="1">
+                <a:solidFill>
+                  <a:schemeClr val="bg1">
+                    <a:lumMod val="95000"/>
+                  </a:schemeClr>
+                </a:solidFill>
+                <a:latin typeface="Noto Sans KR Medium" panose="020B0200000000000000" pitchFamily="34" charset="-128"/>
+                <a:ea typeface="Noto Sans KR Medium" panose="020B0200000000000000" pitchFamily="34" charset="-128"/>
+              </a:rPr>
+              <a:t>IEffectHandler</a:t>
             </a:r>
             <a:r>
               <a:rPr lang="en-US" altLang="ko-KR" sz="1000" dirty="0">
@@ -31454,19 +30845,7 @@
                 <a:latin typeface="Noto Sans KR Medium" panose="020B0200000000000000" pitchFamily="34" charset="-128"/>
                 <a:ea typeface="Noto Sans KR Medium" panose="020B0200000000000000" pitchFamily="34" charset="-128"/>
               </a:rPr>
-              <a:t>, </a:t>
-            </a:r>
-            <a:r>
-              <a:rPr lang="ko-KR" altLang="en-US" sz="1000" dirty="0" err="1">
-                <a:solidFill>
-                  <a:schemeClr val="bg1">
-                    <a:lumMod val="95000"/>
-                  </a:schemeClr>
-                </a:solidFill>
-                <a:latin typeface="Noto Sans KR Medium" panose="020B0200000000000000" pitchFamily="34" charset="-128"/>
-                <a:ea typeface="Noto Sans KR Medium" panose="020B0200000000000000" pitchFamily="34" charset="-128"/>
-              </a:rPr>
-              <a:t>디버프의</a:t>
+              <a:t> </a:t>
             </a:r>
             <a:r>
               <a:rPr lang="ko-KR" altLang="en-US" sz="1000" dirty="0">
@@ -31478,114 +30857,91 @@
                 <a:latin typeface="Noto Sans KR Medium" panose="020B0200000000000000" pitchFamily="34" charset="-128"/>
                 <a:ea typeface="Noto Sans KR Medium" panose="020B0200000000000000" pitchFamily="34" charset="-128"/>
               </a:rPr>
-              <a:t> 기능을 살펴보니 거의 대부분이 </a:t>
-            </a:r>
-            <a:r>
-              <a:rPr lang="ko-KR" altLang="en-US" sz="1000" dirty="0" err="1">
-                <a:solidFill>
-                  <a:schemeClr val="bg1">
-                    <a:lumMod val="95000"/>
-                  </a:schemeClr>
-                </a:solidFill>
-                <a:latin typeface="Noto Sans KR Medium" panose="020B0200000000000000" pitchFamily="34" charset="-128"/>
-                <a:ea typeface="Noto Sans KR Medium" panose="020B0200000000000000" pitchFamily="34" charset="-128"/>
-              </a:rPr>
-              <a:t>스탯에</a:t>
-            </a:r>
-            <a:r>
-              <a:rPr lang="ko-KR" altLang="en-US" sz="1000" dirty="0">
-                <a:solidFill>
-                  <a:schemeClr val="bg1">
-                    <a:lumMod val="95000"/>
-                  </a:schemeClr>
-                </a:solidFill>
-                <a:latin typeface="Noto Sans KR Medium" panose="020B0200000000000000" pitchFamily="34" charset="-128"/>
-                <a:ea typeface="Noto Sans KR Medium" panose="020B0200000000000000" pitchFamily="34" charset="-128"/>
-              </a:rPr>
-              <a:t> 영향을 준다는 공통점을 발견</a:t>
-            </a:r>
-            <a:r>
-              <a:rPr lang="en-US" altLang="ko-KR" sz="1000" dirty="0">
-                <a:solidFill>
-                  <a:schemeClr val="bg1">
-                    <a:lumMod val="95000"/>
-                  </a:schemeClr>
-                </a:solidFill>
-                <a:latin typeface="Noto Sans KR Medium" panose="020B0200000000000000" pitchFamily="34" charset="-128"/>
-                <a:ea typeface="Noto Sans KR Medium" panose="020B0200000000000000" pitchFamily="34" charset="-128"/>
-              </a:rPr>
-              <a:t>,</a:t>
-            </a:r>
-            <a:br>
-              <a:rPr lang="en-US" altLang="ko-KR" sz="1000" dirty="0">
-                <a:solidFill>
-                  <a:schemeClr val="bg1">
-                    <a:lumMod val="95000"/>
-                  </a:schemeClr>
-                </a:solidFill>
-                <a:latin typeface="Noto Sans KR Medium" panose="020B0200000000000000" pitchFamily="34" charset="-128"/>
-                <a:ea typeface="Noto Sans KR Medium" panose="020B0200000000000000" pitchFamily="34" charset="-128"/>
-              </a:rPr>
-            </a:br>
-            <a:r>
-              <a:rPr lang="ko-KR" altLang="en-US" sz="1000" dirty="0">
-                <a:solidFill>
-                  <a:schemeClr val="bg1">
-                    <a:lumMod val="95000"/>
-                  </a:schemeClr>
-                </a:solidFill>
-                <a:latin typeface="Noto Sans KR Medium" panose="020B0200000000000000" pitchFamily="34" charset="-128"/>
-                <a:ea typeface="Noto Sans KR Medium" panose="020B0200000000000000" pitchFamily="34" charset="-128"/>
-              </a:rPr>
-              <a:t>그에 따라 </a:t>
-            </a:r>
-            <a:r>
-              <a:rPr lang="en-US" altLang="ko-KR" sz="1000" dirty="0" err="1">
-                <a:solidFill>
-                  <a:schemeClr val="bg1">
-                    <a:lumMod val="95000"/>
-                  </a:schemeClr>
-                </a:solidFill>
-                <a:latin typeface="Noto Sans KR Medium" panose="020B0200000000000000" pitchFamily="34" charset="-128"/>
-                <a:ea typeface="Noto Sans KR Medium" panose="020B0200000000000000" pitchFamily="34" charset="-128"/>
-              </a:rPr>
-              <a:t>UStatComponent</a:t>
-            </a:r>
-            <a:r>
-              <a:rPr lang="ko-KR" altLang="en-US" sz="1000" dirty="0">
-                <a:solidFill>
-                  <a:schemeClr val="bg1">
-                    <a:lumMod val="95000"/>
-                  </a:schemeClr>
-                </a:solidFill>
-                <a:latin typeface="Noto Sans KR Medium" panose="020B0200000000000000" pitchFamily="34" charset="-128"/>
-                <a:ea typeface="Noto Sans KR Medium" panose="020B0200000000000000" pitchFamily="34" charset="-128"/>
-              </a:rPr>
-              <a:t>에 효과를 등록</a:t>
-            </a:r>
-            <a:r>
-              <a:rPr lang="en-US" altLang="ko-KR" sz="1000" dirty="0">
-                <a:solidFill>
-                  <a:schemeClr val="bg1">
-                    <a:lumMod val="95000"/>
-                  </a:schemeClr>
-                </a:solidFill>
-                <a:latin typeface="Noto Sans KR Medium" panose="020B0200000000000000" pitchFamily="34" charset="-128"/>
-                <a:ea typeface="Noto Sans KR Medium" panose="020B0200000000000000" pitchFamily="34" charset="-128"/>
-              </a:rPr>
-              <a:t>, </a:t>
-            </a:r>
-            <a:r>
-              <a:rPr lang="ko-KR" altLang="en-US" sz="1000" dirty="0">
-                <a:solidFill>
-                  <a:schemeClr val="bg1">
-                    <a:lumMod val="95000"/>
-                  </a:schemeClr>
-                </a:solidFill>
-                <a:latin typeface="Noto Sans KR Medium" panose="020B0200000000000000" pitchFamily="34" charset="-128"/>
-                <a:ea typeface="Noto Sans KR Medium" panose="020B0200000000000000" pitchFamily="34" charset="-128"/>
-              </a:rPr>
-              <a:t>해제하고 관리하는 기능을 구현</a:t>
+              <a:t>인터페이스를 만들어 </a:t>
+            </a:r>
+            <a:r>
+              <a:rPr lang="en-US" altLang="ko-KR" sz="1000" dirty="0" err="1" smtClean="0">
+                <a:solidFill>
+                  <a:schemeClr val="bg1">
+                    <a:lumMod val="95000"/>
+                  </a:schemeClr>
+                </a:solidFill>
+                <a:latin typeface="Noto Sans KR Medium" panose="020B0200000000000000" pitchFamily="34" charset="-128"/>
+                <a:ea typeface="Noto Sans KR Medium" panose="020B0200000000000000" pitchFamily="34" charset="-128"/>
+              </a:rPr>
+              <a:t>ApplyEffect</a:t>
+            </a:r>
+            <a:r>
+              <a:rPr lang="en-US" altLang="ko-KR" sz="1000" dirty="0" smtClean="0">
+                <a:solidFill>
+                  <a:schemeClr val="bg1">
+                    <a:lumMod val="95000"/>
+                  </a:schemeClr>
+                </a:solidFill>
+                <a:latin typeface="Noto Sans KR Medium" panose="020B0200000000000000" pitchFamily="34" charset="-128"/>
+                <a:ea typeface="Noto Sans KR Medium" panose="020B0200000000000000" pitchFamily="34" charset="-128"/>
+              </a:rPr>
+              <a:t>()</a:t>
+            </a:r>
+            <a:r>
+              <a:rPr lang="ko-KR" altLang="en-US" sz="1000" dirty="0" smtClean="0">
+                <a:solidFill>
+                  <a:schemeClr val="bg1">
+                    <a:lumMod val="95000"/>
+                  </a:schemeClr>
+                </a:solidFill>
+                <a:latin typeface="Noto Sans KR Medium" panose="020B0200000000000000" pitchFamily="34" charset="-128"/>
+                <a:ea typeface="Noto Sans KR Medium" panose="020B0200000000000000" pitchFamily="34" charset="-128"/>
+              </a:rPr>
+              <a:t>를</a:t>
+            </a:r>
+            <a:r>
+              <a:rPr lang="ko-KR" altLang="en-US" sz="1000" dirty="0" smtClean="0">
+                <a:solidFill>
+                  <a:schemeClr val="bg1">
+                    <a:lumMod val="95000"/>
+                  </a:schemeClr>
+                </a:solidFill>
+                <a:latin typeface="Noto Sans KR Medium" panose="020B0200000000000000" pitchFamily="34" charset="-128"/>
+                <a:ea typeface="Noto Sans KR Medium" panose="020B0200000000000000" pitchFamily="34" charset="-128"/>
+              </a:rPr>
+              <a:t> 구현</a:t>
+            </a:r>
+            <a:r>
+              <a:rPr lang="ko-KR" altLang="en-US" sz="1000" dirty="0" smtClean="0">
+                <a:solidFill>
+                  <a:schemeClr val="bg1">
+                    <a:lumMod val="95000"/>
+                  </a:schemeClr>
+                </a:solidFill>
+                <a:latin typeface="Noto Sans KR Medium" panose="020B0200000000000000" pitchFamily="34" charset="-128"/>
+                <a:ea typeface="Noto Sans KR Medium" panose="020B0200000000000000" pitchFamily="34" charset="-128"/>
+              </a:rPr>
+              <a:t>하도록 </a:t>
+            </a:r>
+            <a:r>
+              <a:rPr lang="ko-KR" altLang="en-US" sz="1000" dirty="0" smtClean="0">
+                <a:solidFill>
+                  <a:schemeClr val="bg1">
+                    <a:lumMod val="95000"/>
+                  </a:schemeClr>
+                </a:solidFill>
+                <a:latin typeface="Noto Sans KR Medium" panose="020B0200000000000000" pitchFamily="34" charset="-128"/>
+                <a:ea typeface="Noto Sans KR Medium" panose="020B0200000000000000" pitchFamily="34" charset="-128"/>
+              </a:rPr>
+              <a:t>했습니다</a:t>
+            </a:r>
+            <a:r>
+              <a:rPr lang="en-US" altLang="ko-KR" sz="1000" dirty="0" smtClean="0">
+                <a:solidFill>
+                  <a:schemeClr val="bg1">
+                    <a:lumMod val="95000"/>
+                  </a:schemeClr>
+                </a:solidFill>
+                <a:latin typeface="Noto Sans KR Medium" panose="020B0200000000000000" pitchFamily="34" charset="-128"/>
+                <a:ea typeface="Noto Sans KR Medium" panose="020B0200000000000000" pitchFamily="34" charset="-128"/>
+              </a:rPr>
+              <a:t>.</a:t>
             </a:r>
             <a:endParaRPr lang="en-US" altLang="ko-KR" sz="1000" dirty="0">
               <a:solidFill>
@@ -31598,24 +30954,114 @@
             </a:endParaRPr>
           </a:p>
           <a:p>
-            <a:pPr marL="171450" indent="-171450">
-              <a:buFontTx/>
-              <a:buChar char="-"/>
-            </a:pPr>
-            <a:r>
-              <a:rPr lang="ko-KR" altLang="en-US" sz="1000" dirty="0">
-                <a:solidFill>
-                  <a:schemeClr val="bg1">
-                    <a:lumMod val="95000"/>
-                  </a:schemeClr>
-                </a:solidFill>
-                <a:latin typeface="Noto Sans KR Medium" panose="020B0200000000000000" pitchFamily="34" charset="-128"/>
-                <a:ea typeface="Noto Sans KR Medium" panose="020B0200000000000000" pitchFamily="34" charset="-128"/>
-              </a:rPr>
-              <a:t>단</a:t>
-            </a:r>
-            <a:r>
-              <a:rPr lang="en-US" altLang="ko-KR" sz="1000" dirty="0">
+            <a:endParaRPr lang="en-US" altLang="ko-KR" sz="1000" dirty="0" smtClean="0">
+              <a:solidFill>
+                <a:schemeClr val="bg1">
+                  <a:lumMod val="95000"/>
+                </a:schemeClr>
+              </a:solidFill>
+              <a:latin typeface="Noto Sans KR Medium" panose="020B0200000000000000" pitchFamily="34" charset="-128"/>
+              <a:ea typeface="Noto Sans KR Medium" panose="020B0200000000000000" pitchFamily="34" charset="-128"/>
+            </a:endParaRPr>
+          </a:p>
+          <a:p>
+            <a:r>
+              <a:rPr lang="ko-KR" altLang="en-US" sz="1000" dirty="0" smtClean="0">
+                <a:solidFill>
+                  <a:schemeClr val="bg1">
+                    <a:lumMod val="95000"/>
+                  </a:schemeClr>
+                </a:solidFill>
+                <a:latin typeface="Noto Sans KR Medium" panose="020B0200000000000000" pitchFamily="34" charset="-128"/>
+                <a:ea typeface="Noto Sans KR Medium" panose="020B0200000000000000" pitchFamily="34" charset="-128"/>
+              </a:rPr>
+              <a:t>그리고 새로운 효과를 추가하기 쉽도록 </a:t>
+            </a:r>
+            <a:r>
+              <a:rPr lang="ko-KR" altLang="en-US" sz="1000" dirty="0" err="1" smtClean="0">
+                <a:solidFill>
+                  <a:schemeClr val="bg1">
+                    <a:lumMod val="95000"/>
+                  </a:schemeClr>
+                </a:solidFill>
+                <a:latin typeface="Noto Sans KR Medium" panose="020B0200000000000000" pitchFamily="34" charset="-128"/>
+                <a:ea typeface="Noto Sans KR Medium" panose="020B0200000000000000" pitchFamily="34" charset="-128"/>
+              </a:rPr>
+              <a:t>다형성을</a:t>
+            </a:r>
+            <a:r>
+              <a:rPr lang="ko-KR" altLang="en-US" sz="1000" dirty="0" smtClean="0">
+                <a:solidFill>
+                  <a:schemeClr val="bg1">
+                    <a:lumMod val="95000"/>
+                  </a:schemeClr>
+                </a:solidFill>
+                <a:latin typeface="Noto Sans KR Medium" panose="020B0200000000000000" pitchFamily="34" charset="-128"/>
+                <a:ea typeface="Noto Sans KR Medium" panose="020B0200000000000000" pitchFamily="34" charset="-128"/>
+              </a:rPr>
+              <a:t> 활용했습니다</a:t>
+            </a:r>
+            <a:r>
+              <a:rPr lang="en-US" altLang="ko-KR" sz="1000" dirty="0" smtClean="0">
+                <a:solidFill>
+                  <a:schemeClr val="bg1">
+                    <a:lumMod val="95000"/>
+                  </a:schemeClr>
+                </a:solidFill>
+                <a:latin typeface="Noto Sans KR Medium" panose="020B0200000000000000" pitchFamily="34" charset="-128"/>
+                <a:ea typeface="Noto Sans KR Medium" panose="020B0200000000000000" pitchFamily="34" charset="-128"/>
+              </a:rPr>
+              <a:t>.</a:t>
+            </a:r>
+            <a:endParaRPr lang="en-US" altLang="ko-KR" sz="1000" dirty="0" smtClean="0">
+              <a:solidFill>
+                <a:schemeClr val="bg1">
+                  <a:lumMod val="95000"/>
+                </a:schemeClr>
+              </a:solidFill>
+              <a:latin typeface="Noto Sans KR Medium" panose="020B0200000000000000" pitchFamily="34" charset="-128"/>
+              <a:ea typeface="Noto Sans KR Medium" panose="020B0200000000000000" pitchFamily="34" charset="-128"/>
+            </a:endParaRPr>
+          </a:p>
+          <a:p>
+            <a:r>
+              <a:rPr lang="ko-KR" altLang="en-US" sz="1000" dirty="0" smtClean="0">
+                <a:solidFill>
+                  <a:schemeClr val="bg1">
+                    <a:lumMod val="95000"/>
+                  </a:schemeClr>
+                </a:solidFill>
+                <a:latin typeface="Noto Sans KR Medium" panose="020B0200000000000000" pitchFamily="34" charset="-128"/>
+                <a:ea typeface="Noto Sans KR Medium" panose="020B0200000000000000" pitchFamily="34" charset="-128"/>
+              </a:rPr>
+              <a:t>상위 클래스의 </a:t>
+            </a:r>
+            <a:r>
+              <a:rPr lang="en-US" altLang="ko-KR" sz="1000" dirty="0" smtClean="0">
+                <a:solidFill>
+                  <a:schemeClr val="bg1">
+                    <a:lumMod val="95000"/>
+                  </a:schemeClr>
+                </a:solidFill>
+                <a:latin typeface="Noto Sans KR Medium" panose="020B0200000000000000" pitchFamily="34" charset="-128"/>
+                <a:ea typeface="Noto Sans KR Medium" panose="020B0200000000000000" pitchFamily="34" charset="-128"/>
+              </a:rPr>
+              <a:t>Activate()</a:t>
+            </a:r>
+            <a:r>
+              <a:rPr lang="ko-KR" altLang="en-US" sz="1000" dirty="0" smtClean="0">
+                <a:solidFill>
+                  <a:schemeClr val="bg1">
+                    <a:lumMod val="95000"/>
+                  </a:schemeClr>
+                </a:solidFill>
+                <a:latin typeface="Noto Sans KR Medium" panose="020B0200000000000000" pitchFamily="34" charset="-128"/>
+                <a:ea typeface="Noto Sans KR Medium" panose="020B0200000000000000" pitchFamily="34" charset="-128"/>
+              </a:rPr>
+              <a:t>를 호출하면</a:t>
+            </a:r>
+            <a:r>
+              <a:rPr lang="en-US" altLang="ko-KR" sz="1000" dirty="0" smtClean="0">
                 <a:solidFill>
                   <a:schemeClr val="bg1">
                     <a:lumMod val="95000"/>
@@ -31627,148 +31073,28 @@
               <a:t>, </a:t>
             </a:r>
             <a:r>
-              <a:rPr lang="ko-KR" altLang="en-US" sz="1000" dirty="0">
-                <a:solidFill>
-                  <a:schemeClr val="bg1">
-                    <a:lumMod val="95000"/>
-                  </a:schemeClr>
-                </a:solidFill>
-                <a:latin typeface="Noto Sans KR Medium" panose="020B0200000000000000" pitchFamily="34" charset="-128"/>
-                <a:ea typeface="Noto Sans KR Medium" panose="020B0200000000000000" pitchFamily="34" charset="-128"/>
-              </a:rPr>
-              <a:t>이때 </a:t>
-            </a:r>
-            <a:r>
-              <a:rPr lang="en-US" altLang="ko-KR" sz="1000" dirty="0" err="1">
-                <a:solidFill>
-                  <a:schemeClr val="bg1">
-                    <a:lumMod val="95000"/>
-                  </a:schemeClr>
-                </a:solidFill>
-                <a:latin typeface="Noto Sans KR Medium" panose="020B0200000000000000" pitchFamily="34" charset="-128"/>
-                <a:ea typeface="Noto Sans KR Medium" panose="020B0200000000000000" pitchFamily="34" charset="-128"/>
-              </a:rPr>
-              <a:t>UStatComponent</a:t>
-            </a:r>
-            <a:r>
-              <a:rPr lang="ko-KR" altLang="en-US" sz="1000" dirty="0">
-                <a:solidFill>
-                  <a:schemeClr val="bg1">
-                    <a:lumMod val="95000"/>
-                  </a:schemeClr>
-                </a:solidFill>
-                <a:latin typeface="Noto Sans KR Medium" panose="020B0200000000000000" pitchFamily="34" charset="-128"/>
-                <a:ea typeface="Noto Sans KR Medium" panose="020B0200000000000000" pitchFamily="34" charset="-128"/>
-              </a:rPr>
-              <a:t>를 외부에서 직접 접근하기엔 특정 </a:t>
-            </a:r>
-            <a:r>
-              <a:rPr lang="ko-KR" altLang="en-US" sz="1000" dirty="0" err="1">
-                <a:solidFill>
-                  <a:schemeClr val="bg1">
-                    <a:lumMod val="95000"/>
-                  </a:schemeClr>
-                </a:solidFill>
-                <a:latin typeface="Noto Sans KR Medium" panose="020B0200000000000000" pitchFamily="34" charset="-128"/>
-                <a:ea typeface="Noto Sans KR Medium" panose="020B0200000000000000" pitchFamily="34" charset="-128"/>
-              </a:rPr>
-              <a:t>액터들에</a:t>
-            </a:r>
-            <a:r>
-              <a:rPr lang="ko-KR" altLang="en-US" sz="1000" dirty="0">
-                <a:solidFill>
-                  <a:schemeClr val="bg1">
-                    <a:lumMod val="95000"/>
-                  </a:schemeClr>
-                </a:solidFill>
-                <a:latin typeface="Noto Sans KR Medium" panose="020B0200000000000000" pitchFamily="34" charset="-128"/>
-                <a:ea typeface="Noto Sans KR Medium" panose="020B0200000000000000" pitchFamily="34" charset="-128"/>
-              </a:rPr>
-              <a:t> 대한 의존성이 발생할 것을 고려하여 </a:t>
-            </a:r>
-            <a:r>
-              <a:rPr lang="en-US" altLang="ko-KR" sz="1000" dirty="0" err="1">
-                <a:solidFill>
-                  <a:schemeClr val="bg1">
-                    <a:lumMod val="95000"/>
-                  </a:schemeClr>
-                </a:solidFill>
-                <a:latin typeface="Noto Sans KR Medium" panose="020B0200000000000000" pitchFamily="34" charset="-128"/>
-                <a:ea typeface="Noto Sans KR Medium" panose="020B0200000000000000" pitchFamily="34" charset="-128"/>
-              </a:rPr>
-              <a:t>IEffectHandler</a:t>
-            </a:r>
-            <a:r>
-              <a:rPr lang="en-US" altLang="ko-KR" sz="1000" dirty="0">
-                <a:solidFill>
-                  <a:schemeClr val="bg1">
-                    <a:lumMod val="95000"/>
-                  </a:schemeClr>
-                </a:solidFill>
-                <a:latin typeface="Noto Sans KR Medium" panose="020B0200000000000000" pitchFamily="34" charset="-128"/>
-                <a:ea typeface="Noto Sans KR Medium" panose="020B0200000000000000" pitchFamily="34" charset="-128"/>
-              </a:rPr>
-              <a:t> </a:t>
-            </a:r>
-            <a:r>
-              <a:rPr lang="ko-KR" altLang="en-US" sz="1000" dirty="0">
-                <a:solidFill>
-                  <a:schemeClr val="bg1">
-                    <a:lumMod val="95000"/>
-                  </a:schemeClr>
-                </a:solidFill>
-                <a:latin typeface="Noto Sans KR Medium" panose="020B0200000000000000" pitchFamily="34" charset="-128"/>
-                <a:ea typeface="Noto Sans KR Medium" panose="020B0200000000000000" pitchFamily="34" charset="-128"/>
-              </a:rPr>
-              <a:t>인터페이스를 만들어 </a:t>
-            </a:r>
-            <a:r>
-              <a:rPr lang="en-US" altLang="ko-KR" sz="1000" dirty="0" err="1">
-                <a:solidFill>
-                  <a:schemeClr val="bg1">
-                    <a:lumMod val="95000"/>
-                  </a:schemeClr>
-                </a:solidFill>
-                <a:latin typeface="Noto Sans KR Medium" panose="020B0200000000000000" pitchFamily="34" charset="-128"/>
-                <a:ea typeface="Noto Sans KR Medium" panose="020B0200000000000000" pitchFamily="34" charset="-128"/>
-              </a:rPr>
-              <a:t>ApplyEffect</a:t>
-            </a:r>
-            <a:r>
-              <a:rPr lang="en-US" altLang="ko-KR" sz="1000" dirty="0">
-                <a:solidFill>
-                  <a:schemeClr val="bg1">
-                    <a:lumMod val="95000"/>
-                  </a:schemeClr>
-                </a:solidFill>
-                <a:latin typeface="Noto Sans KR Medium" panose="020B0200000000000000" pitchFamily="34" charset="-128"/>
-                <a:ea typeface="Noto Sans KR Medium" panose="020B0200000000000000" pitchFamily="34" charset="-128"/>
-              </a:rPr>
-              <a:t> </a:t>
-            </a:r>
-            <a:r>
-              <a:rPr lang="ko-KR" altLang="en-US" sz="1000" dirty="0" err="1">
-                <a:solidFill>
-                  <a:schemeClr val="bg1">
-                    <a:lumMod val="95000"/>
-                  </a:schemeClr>
-                </a:solidFill>
-                <a:latin typeface="Noto Sans KR Medium" panose="020B0200000000000000" pitchFamily="34" charset="-128"/>
-                <a:ea typeface="Noto Sans KR Medium" panose="020B0200000000000000" pitchFamily="34" charset="-128"/>
-              </a:rPr>
-              <a:t>메서드를</a:t>
-            </a:r>
-            <a:r>
-              <a:rPr lang="ko-KR" altLang="en-US" sz="1000" dirty="0">
-                <a:solidFill>
-                  <a:schemeClr val="bg1">
-                    <a:lumMod val="95000"/>
-                  </a:schemeClr>
-                </a:solidFill>
-                <a:latin typeface="Noto Sans KR Medium" panose="020B0200000000000000" pitchFamily="34" charset="-128"/>
-                <a:ea typeface="Noto Sans KR Medium" panose="020B0200000000000000" pitchFamily="34" charset="-128"/>
-              </a:rPr>
-              <a:t> 작성하도록 함</a:t>
+              <a:rPr lang="ko-KR" altLang="en-US" sz="1000" dirty="0" smtClean="0">
+                <a:solidFill>
+                  <a:schemeClr val="bg1">
+                    <a:lumMod val="95000"/>
+                  </a:schemeClr>
+                </a:solidFill>
+                <a:latin typeface="Noto Sans KR Medium" panose="020B0200000000000000" pitchFamily="34" charset="-128"/>
+                <a:ea typeface="Noto Sans KR Medium" panose="020B0200000000000000" pitchFamily="34" charset="-128"/>
+              </a:rPr>
+              <a:t>하위 클래스에서 재정의한 구체적인 효과가 실행되도록 구조를 잡았습니다</a:t>
+            </a:r>
+            <a:r>
+              <a:rPr lang="en-US" altLang="ko-KR" sz="1000" dirty="0" smtClean="0">
+                <a:solidFill>
+                  <a:schemeClr val="bg1">
+                    <a:lumMod val="95000"/>
+                  </a:schemeClr>
+                </a:solidFill>
+                <a:latin typeface="Noto Sans KR Medium" panose="020B0200000000000000" pitchFamily="34" charset="-128"/>
+                <a:ea typeface="Noto Sans KR Medium" panose="020B0200000000000000" pitchFamily="34" charset="-128"/>
+              </a:rPr>
+              <a:t>.</a:t>
             </a:r>
             <a:endParaRPr lang="en-US" altLang="ko-KR" sz="1000" dirty="0">
               <a:solidFill>
@@ -31781,84 +31107,29 @@
             </a:endParaRPr>
           </a:p>
           <a:p>
-            <a:pPr marL="171450" indent="-171450">
-              <a:buFontTx/>
-              <a:buChar char="-"/>
-            </a:pPr>
-            <a:r>
-              <a:rPr lang="en-US" altLang="ko-KR" sz="1000" dirty="0">
-                <a:solidFill>
-                  <a:schemeClr val="bg1">
-                    <a:lumMod val="95000"/>
-                  </a:schemeClr>
-                </a:solidFill>
-                <a:latin typeface="Noto Sans KR Medium" panose="020B0200000000000000" pitchFamily="34" charset="-128"/>
-                <a:ea typeface="Noto Sans KR Medium" panose="020B0200000000000000" pitchFamily="34" charset="-128"/>
-              </a:rPr>
-              <a:t>Activate </a:t>
-            </a:r>
-            <a:r>
-              <a:rPr lang="ko-KR" altLang="en-US" sz="1000" dirty="0" err="1">
-                <a:solidFill>
-                  <a:schemeClr val="bg1">
-                    <a:lumMod val="95000"/>
-                  </a:schemeClr>
-                </a:solidFill>
-                <a:latin typeface="Noto Sans KR Medium" panose="020B0200000000000000" pitchFamily="34" charset="-128"/>
-                <a:ea typeface="Noto Sans KR Medium" panose="020B0200000000000000" pitchFamily="34" charset="-128"/>
-              </a:rPr>
-              <a:t>메서드를</a:t>
-            </a:r>
-            <a:r>
-              <a:rPr lang="ko-KR" altLang="en-US" sz="1000" dirty="0">
-                <a:solidFill>
-                  <a:schemeClr val="bg1">
-                    <a:lumMod val="95000"/>
-                  </a:schemeClr>
-                </a:solidFill>
-                <a:latin typeface="Noto Sans KR Medium" panose="020B0200000000000000" pitchFamily="34" charset="-128"/>
-                <a:ea typeface="Noto Sans KR Medium" panose="020B0200000000000000" pitchFamily="34" charset="-128"/>
-              </a:rPr>
-              <a:t> 사용해서 구현한 효과 작동</a:t>
-            </a:r>
-            <a:r>
-              <a:rPr lang="en-US" altLang="ko-KR" sz="1000" dirty="0">
-                <a:solidFill>
-                  <a:schemeClr val="bg1">
-                    <a:lumMod val="95000"/>
-                  </a:schemeClr>
-                </a:solidFill>
-                <a:latin typeface="Noto Sans KR Medium" panose="020B0200000000000000" pitchFamily="34" charset="-128"/>
-                <a:ea typeface="Noto Sans KR Medium" panose="020B0200000000000000" pitchFamily="34" charset="-128"/>
-              </a:rPr>
-              <a:t> (</a:t>
-            </a:r>
-            <a:r>
-              <a:rPr lang="ko-KR" altLang="en-US" sz="1000" dirty="0" err="1">
-                <a:solidFill>
-                  <a:schemeClr val="bg1">
-                    <a:lumMod val="95000"/>
-                  </a:schemeClr>
-                </a:solidFill>
-                <a:latin typeface="Noto Sans KR Medium" panose="020B0200000000000000" pitchFamily="34" charset="-128"/>
-                <a:ea typeface="Noto Sans KR Medium" panose="020B0200000000000000" pitchFamily="34" charset="-128"/>
-              </a:rPr>
-              <a:t>다형성</a:t>
-            </a:r>
-            <a:r>
-              <a:rPr lang="en-US" altLang="ko-KR" sz="1000" dirty="0">
-                <a:solidFill>
-                  <a:schemeClr val="bg1">
-                    <a:lumMod val="95000"/>
-                  </a:schemeClr>
-                </a:solidFill>
-                <a:latin typeface="Noto Sans KR Medium" panose="020B0200000000000000" pitchFamily="34" charset="-128"/>
-                <a:ea typeface="Noto Sans KR Medium" panose="020B0200000000000000" pitchFamily="34" charset="-128"/>
-              </a:rPr>
-              <a:t>)</a:t>
-            </a:r>
-          </a:p>
-          <a:p>
+            <a:endParaRPr lang="en-US" altLang="ko-KR" sz="1000" dirty="0" smtClean="0">
+              <a:solidFill>
+                <a:schemeClr val="bg1">
+                  <a:lumMod val="95000"/>
+                </a:schemeClr>
+              </a:solidFill>
+              <a:latin typeface="Noto Sans KR Medium" panose="020B0200000000000000" pitchFamily="34" charset="-128"/>
+              <a:ea typeface="Noto Sans KR Medium" panose="020B0200000000000000" pitchFamily="34" charset="-128"/>
+            </a:endParaRPr>
+          </a:p>
+          <a:p>
+            <a:r>
+              <a:rPr lang="ko-KR" altLang="en-US" sz="1000" dirty="0" smtClean="0">
+                <a:solidFill>
+                  <a:schemeClr val="bg1">
+                    <a:lumMod val="95000"/>
+                  </a:schemeClr>
+                </a:solidFill>
+                <a:latin typeface="Noto Sans KR Medium" panose="020B0200000000000000" pitchFamily="34" charset="-128"/>
+                <a:ea typeface="Noto Sans KR Medium" panose="020B0200000000000000" pitchFamily="34" charset="-128"/>
+              </a:rPr>
+              <a:t>주요 하위 클래스</a:t>
+            </a:r>
             <a:endParaRPr lang="en-US" altLang="ko-KR" sz="1000" dirty="0">
               <a:solidFill>
                 <a:schemeClr val="bg1">
@@ -31871,6 +31142,42 @@
           </a:p>
           <a:p>
             <a:r>
+              <a:rPr lang="en-US" altLang="ko-KR" sz="1000" dirty="0" err="1" smtClean="0">
+                <a:solidFill>
+                  <a:schemeClr val="bg1">
+                    <a:lumMod val="95000"/>
+                  </a:schemeClr>
+                </a:solidFill>
+                <a:latin typeface="Noto Sans KR Medium" panose="020B0200000000000000" pitchFamily="34" charset="-128"/>
+                <a:ea typeface="Noto Sans KR Medium" panose="020B0200000000000000" pitchFamily="34" charset="-128"/>
+              </a:rPr>
+              <a:t>TermEffect</a:t>
+            </a:r>
+            <a:r>
+              <a:rPr lang="en-US" altLang="ko-KR" sz="1000" dirty="0" smtClean="0">
+                <a:solidFill>
+                  <a:schemeClr val="bg1">
+                    <a:lumMod val="95000"/>
+                  </a:schemeClr>
+                </a:solidFill>
+                <a:latin typeface="Noto Sans KR Medium" panose="020B0200000000000000" pitchFamily="34" charset="-128"/>
+                <a:ea typeface="Noto Sans KR Medium" panose="020B0200000000000000" pitchFamily="34" charset="-128"/>
+              </a:rPr>
+              <a:t> </a:t>
+            </a:r>
+            <a:r>
+              <a:rPr lang="en-US" altLang="ko-KR" sz="1000" dirty="0">
+                <a:solidFill>
+                  <a:schemeClr val="bg1">
+                    <a:lumMod val="95000"/>
+                  </a:schemeClr>
+                </a:solidFill>
+                <a:latin typeface="Noto Sans KR Medium" panose="020B0200000000000000" pitchFamily="34" charset="-128"/>
+                <a:ea typeface="Noto Sans KR Medium" panose="020B0200000000000000" pitchFamily="34" charset="-128"/>
+              </a:rPr>
+              <a:t>: </a:t>
+            </a:r>
+            <a:r>
               <a:rPr lang="ko-KR" altLang="en-US" sz="1000" dirty="0">
                 <a:solidFill>
                   <a:schemeClr val="bg1">
@@ -31880,34 +31187,7 @@
                 <a:latin typeface="Noto Sans KR Medium" panose="020B0200000000000000" pitchFamily="34" charset="-128"/>
                 <a:ea typeface="Noto Sans KR Medium" panose="020B0200000000000000" pitchFamily="34" charset="-128"/>
               </a:rPr>
-              <a:t>하위 클래스</a:t>
-            </a:r>
-            <a:endParaRPr lang="en-US" altLang="ko-KR" sz="1000" dirty="0">
-              <a:solidFill>
-                <a:schemeClr val="bg1">
-                  <a:lumMod val="95000"/>
-                </a:schemeClr>
-              </a:solidFill>
-              <a:latin typeface="Noto Sans KR Medium" panose="020B0200000000000000" pitchFamily="34" charset="-128"/>
-              <a:ea typeface="Noto Sans KR Medium" panose="020B0200000000000000" pitchFamily="34" charset="-128"/>
-            </a:endParaRPr>
-          </a:p>
-          <a:p>
-            <a:pPr marL="628650" lvl="1" indent="-171450">
-              <a:buFontTx/>
-              <a:buChar char="-"/>
-            </a:pPr>
-            <a:r>
-              <a:rPr lang="en-US" altLang="ko-KR" sz="1000" dirty="0" err="1">
-                <a:solidFill>
-                  <a:schemeClr val="bg1">
-                    <a:lumMod val="95000"/>
-                  </a:schemeClr>
-                </a:solidFill>
-                <a:latin typeface="Noto Sans KR Medium" panose="020B0200000000000000" pitchFamily="34" charset="-128"/>
-                <a:ea typeface="Noto Sans KR Medium" panose="020B0200000000000000" pitchFamily="34" charset="-128"/>
-              </a:rPr>
-              <a:t>TermEffect</a:t>
+              <a:t>일정 기간 동안 유지되어 효과를 부여 </a:t>
             </a:r>
             <a:r>
               <a:rPr lang="en-US" altLang="ko-KR" sz="1000" dirty="0">
@@ -31919,7 +31199,7 @@
                 <a:latin typeface="Noto Sans KR Medium" panose="020B0200000000000000" pitchFamily="34" charset="-128"/>
                 <a:ea typeface="Noto Sans KR Medium" panose="020B0200000000000000" pitchFamily="34" charset="-128"/>
               </a:rPr>
-              <a:t> : </a:t>
+              <a:t>(</a:t>
             </a:r>
             <a:r>
               <a:rPr lang="ko-KR" altLang="en-US" sz="1000" dirty="0">
@@ -31931,7 +31211,7 @@
                 <a:latin typeface="Noto Sans KR Medium" panose="020B0200000000000000" pitchFamily="34" charset="-128"/>
                 <a:ea typeface="Noto Sans KR Medium" panose="020B0200000000000000" pitchFamily="34" charset="-128"/>
               </a:rPr>
-              <a:t>일정 기간 동안 유지되어 효과를 부여 </a:t>
+              <a:t>예</a:t>
             </a:r>
             <a:r>
               <a:rPr lang="en-US" altLang="ko-KR" sz="1000" dirty="0">
@@ -31943,6 +31223,116 @@
                 <a:latin typeface="Noto Sans KR Medium" panose="020B0200000000000000" pitchFamily="34" charset="-128"/>
                 <a:ea typeface="Noto Sans KR Medium" panose="020B0200000000000000" pitchFamily="34" charset="-128"/>
               </a:rPr>
+              <a:t>, 10</a:t>
+            </a:r>
+            <a:r>
+              <a:rPr lang="ko-KR" altLang="en-US" sz="1000" dirty="0">
+                <a:solidFill>
+                  <a:schemeClr val="bg1">
+                    <a:lumMod val="95000"/>
+                  </a:schemeClr>
+                </a:solidFill>
+                <a:latin typeface="Noto Sans KR Medium" panose="020B0200000000000000" pitchFamily="34" charset="-128"/>
+                <a:ea typeface="Noto Sans KR Medium" panose="020B0200000000000000" pitchFamily="34" charset="-128"/>
+              </a:rPr>
+              <a:t>초 동안</a:t>
+            </a:r>
+            <a:r>
+              <a:rPr lang="en-US" altLang="ko-KR" sz="1000" dirty="0" smtClean="0">
+                <a:solidFill>
+                  <a:schemeClr val="bg1">
+                    <a:lumMod val="95000"/>
+                  </a:schemeClr>
+                </a:solidFill>
+                <a:latin typeface="Noto Sans KR Medium" panose="020B0200000000000000" pitchFamily="34" charset="-128"/>
+                <a:ea typeface="Noto Sans KR Medium" panose="020B0200000000000000" pitchFamily="34" charset="-128"/>
+              </a:rPr>
+              <a:t>)</a:t>
+            </a:r>
+          </a:p>
+          <a:p>
+            <a:r>
+              <a:rPr lang="en-US" altLang="ko-KR" sz="1000" dirty="0" err="1" smtClean="0">
+                <a:solidFill>
+                  <a:schemeClr val="bg1">
+                    <a:lumMod val="95000"/>
+                  </a:schemeClr>
+                </a:solidFill>
+                <a:latin typeface="Noto Sans KR Medium" panose="020B0200000000000000" pitchFamily="34" charset="-128"/>
+                <a:ea typeface="Noto Sans KR Medium" panose="020B0200000000000000" pitchFamily="34" charset="-128"/>
+              </a:rPr>
+              <a:t>PeriodicalEffect</a:t>
+            </a:r>
+            <a:r>
+              <a:rPr lang="en-US" altLang="ko-KR" sz="1000" dirty="0" smtClean="0">
+                <a:solidFill>
+                  <a:schemeClr val="bg1">
+                    <a:lumMod val="95000"/>
+                  </a:schemeClr>
+                </a:solidFill>
+                <a:latin typeface="Noto Sans KR Medium" panose="020B0200000000000000" pitchFamily="34" charset="-128"/>
+                <a:ea typeface="Noto Sans KR Medium" panose="020B0200000000000000" pitchFamily="34" charset="-128"/>
+              </a:rPr>
+              <a:t> </a:t>
+            </a:r>
+            <a:r>
+              <a:rPr lang="en-US" altLang="ko-KR" sz="1000" dirty="0">
+                <a:solidFill>
+                  <a:schemeClr val="bg1">
+                    <a:lumMod val="95000"/>
+                  </a:schemeClr>
+                </a:solidFill>
+                <a:latin typeface="Noto Sans KR Medium" panose="020B0200000000000000" pitchFamily="34" charset="-128"/>
+                <a:ea typeface="Noto Sans KR Medium" panose="020B0200000000000000" pitchFamily="34" charset="-128"/>
+              </a:rPr>
+              <a:t>: </a:t>
+            </a:r>
+            <a:r>
+              <a:rPr lang="ko-KR" altLang="en-US" sz="1000" dirty="0">
+                <a:solidFill>
+                  <a:schemeClr val="bg1">
+                    <a:lumMod val="95000"/>
+                  </a:schemeClr>
+                </a:solidFill>
+                <a:latin typeface="Noto Sans KR Medium" panose="020B0200000000000000" pitchFamily="34" charset="-128"/>
+                <a:ea typeface="Noto Sans KR Medium" panose="020B0200000000000000" pitchFamily="34" charset="-128"/>
+              </a:rPr>
+              <a:t>일정 기간 동안</a:t>
+            </a:r>
+            <a:r>
+              <a:rPr lang="en-US" altLang="ko-KR" sz="1000" dirty="0">
+                <a:solidFill>
+                  <a:schemeClr val="bg1">
+                    <a:lumMod val="95000"/>
+                  </a:schemeClr>
+                </a:solidFill>
+                <a:latin typeface="Noto Sans KR Medium" panose="020B0200000000000000" pitchFamily="34" charset="-128"/>
+                <a:ea typeface="Noto Sans KR Medium" panose="020B0200000000000000" pitchFamily="34" charset="-128"/>
+              </a:rPr>
+              <a:t>, </a:t>
+            </a:r>
+            <a:r>
+              <a:rPr lang="ko-KR" altLang="en-US" sz="1000" dirty="0">
+                <a:solidFill>
+                  <a:schemeClr val="bg1">
+                    <a:lumMod val="95000"/>
+                  </a:schemeClr>
+                </a:solidFill>
+                <a:latin typeface="Noto Sans KR Medium" panose="020B0200000000000000" pitchFamily="34" charset="-128"/>
+                <a:ea typeface="Noto Sans KR Medium" panose="020B0200000000000000" pitchFamily="34" charset="-128"/>
+              </a:rPr>
+              <a:t>특정 주기마다 효과를 부여 </a:t>
+            </a:r>
+            <a:r>
+              <a:rPr lang="en-US" altLang="ko-KR" sz="1000" dirty="0">
+                <a:solidFill>
+                  <a:schemeClr val="bg1">
+                    <a:lumMod val="95000"/>
+                  </a:schemeClr>
+                </a:solidFill>
+                <a:latin typeface="Noto Sans KR Medium" panose="020B0200000000000000" pitchFamily="34" charset="-128"/>
+                <a:ea typeface="Noto Sans KR Medium" panose="020B0200000000000000" pitchFamily="34" charset="-128"/>
+              </a:rPr>
               <a:t>(</a:t>
             </a:r>
             <a:r>
@@ -31979,7 +31369,7 @@
                 <a:latin typeface="Noto Sans KR Medium" panose="020B0200000000000000" pitchFamily="34" charset="-128"/>
                 <a:ea typeface="Noto Sans KR Medium" panose="020B0200000000000000" pitchFamily="34" charset="-128"/>
               </a:rPr>
-              <a:t>초 동안</a:t>
+              <a:t>초 동안 </a:t>
             </a:r>
             <a:r>
               <a:rPr lang="en-US" altLang="ko-KR" sz="1000" dirty="0">
@@ -31991,25 +31381,57 @@
                 <a:latin typeface="Noto Sans KR Medium" panose="020B0200000000000000" pitchFamily="34" charset="-128"/>
                 <a:ea typeface="Noto Sans KR Medium" panose="020B0200000000000000" pitchFamily="34" charset="-128"/>
               </a:rPr>
+              <a:t>1</a:t>
+            </a:r>
+            <a:r>
+              <a:rPr lang="ko-KR" altLang="en-US" sz="1000" dirty="0">
+                <a:solidFill>
+                  <a:schemeClr val="bg1">
+                    <a:lumMod val="95000"/>
+                  </a:schemeClr>
+                </a:solidFill>
+                <a:latin typeface="Noto Sans KR Medium" panose="020B0200000000000000" pitchFamily="34" charset="-128"/>
+                <a:ea typeface="Noto Sans KR Medium" panose="020B0200000000000000" pitchFamily="34" charset="-128"/>
+              </a:rPr>
+              <a:t>초마다</a:t>
+            </a:r>
+            <a:r>
+              <a:rPr lang="en-US" altLang="ko-KR" sz="1000" dirty="0" smtClean="0">
+                <a:solidFill>
+                  <a:schemeClr val="bg1">
+                    <a:lumMod val="95000"/>
+                  </a:schemeClr>
+                </a:solidFill>
+                <a:latin typeface="Noto Sans KR Medium" panose="020B0200000000000000" pitchFamily="34" charset="-128"/>
+                <a:ea typeface="Noto Sans KR Medium" panose="020B0200000000000000" pitchFamily="34" charset="-128"/>
+              </a:rPr>
               <a:t>)</a:t>
             </a:r>
           </a:p>
           <a:p>
-            <a:pPr marL="628650" lvl="1" indent="-171450">
-              <a:buFontTx/>
-              <a:buChar char="-"/>
-            </a:pPr>
-            <a:r>
-              <a:rPr lang="en-US" altLang="ko-KR" sz="1000" dirty="0" err="1">
-                <a:solidFill>
-                  <a:schemeClr val="bg1">
-                    <a:lumMod val="95000"/>
-                  </a:schemeClr>
-                </a:solidFill>
-                <a:latin typeface="Noto Sans KR Medium" panose="020B0200000000000000" pitchFamily="34" charset="-128"/>
-                <a:ea typeface="Noto Sans KR Medium" panose="020B0200000000000000" pitchFamily="34" charset="-128"/>
-              </a:rPr>
-              <a:t>PeriodicalEffect</a:t>
+            <a:r>
+              <a:rPr lang="en-US" altLang="ko-KR" sz="1000" dirty="0" err="1" smtClean="0">
+                <a:solidFill>
+                  <a:schemeClr val="bg1">
+                    <a:lumMod val="95000"/>
+                  </a:schemeClr>
+                </a:solidFill>
+                <a:latin typeface="Noto Sans KR Medium" panose="020B0200000000000000" pitchFamily="34" charset="-128"/>
+                <a:ea typeface="Noto Sans KR Medium" panose="020B0200000000000000" pitchFamily="34" charset="-128"/>
+              </a:rPr>
+              <a:t>EventEffect</a:t>
+            </a:r>
+            <a:r>
+              <a:rPr lang="en-US" altLang="ko-KR" sz="1000" dirty="0" smtClean="0">
+                <a:solidFill>
+                  <a:schemeClr val="bg1">
+                    <a:lumMod val="95000"/>
+                  </a:schemeClr>
+                </a:solidFill>
+                <a:latin typeface="Noto Sans KR Medium" panose="020B0200000000000000" pitchFamily="34" charset="-128"/>
+                <a:ea typeface="Noto Sans KR Medium" panose="020B0200000000000000" pitchFamily="34" charset="-128"/>
+              </a:rPr>
+              <a:t> </a:t>
             </a:r>
             <a:r>
               <a:rPr lang="en-US" altLang="ko-KR" sz="1000" dirty="0">
@@ -32021,7 +31443,19 @@
                 <a:latin typeface="Noto Sans KR Medium" panose="020B0200000000000000" pitchFamily="34" charset="-128"/>
                 <a:ea typeface="Noto Sans KR Medium" panose="020B0200000000000000" pitchFamily="34" charset="-128"/>
               </a:rPr>
-              <a:t> : </a:t>
+              <a:t>: </a:t>
+            </a:r>
+            <a:r>
+              <a:rPr lang="ko-KR" altLang="en-US" sz="1000" dirty="0" err="1">
+                <a:solidFill>
+                  <a:schemeClr val="bg1">
+                    <a:lumMod val="95000"/>
+                  </a:schemeClr>
+                </a:solidFill>
+                <a:latin typeface="Noto Sans KR Medium" panose="020B0200000000000000" pitchFamily="34" charset="-128"/>
+                <a:ea typeface="Noto Sans KR Medium" panose="020B0200000000000000" pitchFamily="34" charset="-128"/>
+              </a:rPr>
+              <a:t>액터가</a:t>
             </a:r>
             <a:r>
               <a:rPr lang="ko-KR" altLang="en-US" sz="1000" dirty="0">
@@ -32033,7 +31467,7 @@
                 <a:latin typeface="Noto Sans KR Medium" panose="020B0200000000000000" pitchFamily="34" charset="-128"/>
                 <a:ea typeface="Noto Sans KR Medium" panose="020B0200000000000000" pitchFamily="34" charset="-128"/>
               </a:rPr>
-              <a:t>일정 기간 동안</a:t>
+              <a:t> 특정한 조건을 만족할 때 효과를 부여 </a:t>
             </a:r>
             <a:r>
               <a:rPr lang="en-US" altLang="ko-KR" sz="1000" dirty="0">
@@ -32045,6 +31479,30 @@
                 <a:latin typeface="Noto Sans KR Medium" panose="020B0200000000000000" pitchFamily="34" charset="-128"/>
                 <a:ea typeface="Noto Sans KR Medium" panose="020B0200000000000000" pitchFamily="34" charset="-128"/>
               </a:rPr>
+              <a:t>(</a:t>
+            </a:r>
+            <a:r>
+              <a:rPr lang="ko-KR" altLang="en-US" sz="1000" dirty="0">
+                <a:solidFill>
+                  <a:schemeClr val="bg1">
+                    <a:lumMod val="95000"/>
+                  </a:schemeClr>
+                </a:solidFill>
+                <a:latin typeface="Noto Sans KR Medium" panose="020B0200000000000000" pitchFamily="34" charset="-128"/>
+                <a:ea typeface="Noto Sans KR Medium" panose="020B0200000000000000" pitchFamily="34" charset="-128"/>
+              </a:rPr>
+              <a:t>예</a:t>
+            </a:r>
+            <a:r>
+              <a:rPr lang="en-US" altLang="ko-KR" sz="1000" dirty="0">
+                <a:solidFill>
+                  <a:schemeClr val="bg1">
+                    <a:lumMod val="95000"/>
+                  </a:schemeClr>
+                </a:solidFill>
+                <a:latin typeface="Noto Sans KR Medium" panose="020B0200000000000000" pitchFamily="34" charset="-128"/>
+                <a:ea typeface="Noto Sans KR Medium" panose="020B0200000000000000" pitchFamily="34" charset="-128"/>
+              </a:rPr>
               <a:t>, </a:t>
             </a:r>
             <a:r>
@@ -32057,82 +31515,10 @@
                 <a:latin typeface="Noto Sans KR Medium" panose="020B0200000000000000" pitchFamily="34" charset="-128"/>
                 <a:ea typeface="Noto Sans KR Medium" panose="020B0200000000000000" pitchFamily="34" charset="-128"/>
               </a:rPr>
-              <a:t>특정 주기마다 효과를 부여 </a:t>
-            </a:r>
-            <a:r>
-              <a:rPr lang="en-US" altLang="ko-KR" sz="1000" dirty="0">
-                <a:solidFill>
-                  <a:schemeClr val="bg1">
-                    <a:lumMod val="95000"/>
-                  </a:schemeClr>
-                </a:solidFill>
-                <a:latin typeface="Noto Sans KR Medium" panose="020B0200000000000000" pitchFamily="34" charset="-128"/>
-                <a:ea typeface="Noto Sans KR Medium" panose="020B0200000000000000" pitchFamily="34" charset="-128"/>
-              </a:rPr>
-              <a:t>(</a:t>
-            </a:r>
-            <a:r>
-              <a:rPr lang="ko-KR" altLang="en-US" sz="1000" dirty="0">
-                <a:solidFill>
-                  <a:schemeClr val="bg1">
-                    <a:lumMod val="95000"/>
-                  </a:schemeClr>
-                </a:solidFill>
-                <a:latin typeface="Noto Sans KR Medium" panose="020B0200000000000000" pitchFamily="34" charset="-128"/>
-                <a:ea typeface="Noto Sans KR Medium" panose="020B0200000000000000" pitchFamily="34" charset="-128"/>
-              </a:rPr>
-              <a:t>예</a:t>
-            </a:r>
-            <a:r>
-              <a:rPr lang="en-US" altLang="ko-KR" sz="1000" dirty="0">
-                <a:solidFill>
-                  <a:schemeClr val="bg1">
-                    <a:lumMod val="95000"/>
-                  </a:schemeClr>
-                </a:solidFill>
-                <a:latin typeface="Noto Sans KR Medium" panose="020B0200000000000000" pitchFamily="34" charset="-128"/>
-                <a:ea typeface="Noto Sans KR Medium" panose="020B0200000000000000" pitchFamily="34" charset="-128"/>
-              </a:rPr>
-              <a:t>, 10</a:t>
-            </a:r>
-            <a:r>
-              <a:rPr lang="ko-KR" altLang="en-US" sz="1000" dirty="0">
-                <a:solidFill>
-                  <a:schemeClr val="bg1">
-                    <a:lumMod val="95000"/>
-                  </a:schemeClr>
-                </a:solidFill>
-                <a:latin typeface="Noto Sans KR Medium" panose="020B0200000000000000" pitchFamily="34" charset="-128"/>
-                <a:ea typeface="Noto Sans KR Medium" panose="020B0200000000000000" pitchFamily="34" charset="-128"/>
-              </a:rPr>
-              <a:t>초 동안 </a:t>
-            </a:r>
-            <a:r>
-              <a:rPr lang="en-US" altLang="ko-KR" sz="1000" dirty="0">
-                <a:solidFill>
-                  <a:schemeClr val="bg1">
-                    <a:lumMod val="95000"/>
-                  </a:schemeClr>
-                </a:solidFill>
-                <a:latin typeface="Noto Sans KR Medium" panose="020B0200000000000000" pitchFamily="34" charset="-128"/>
-                <a:ea typeface="Noto Sans KR Medium" panose="020B0200000000000000" pitchFamily="34" charset="-128"/>
-              </a:rPr>
-              <a:t>1</a:t>
-            </a:r>
-            <a:r>
-              <a:rPr lang="ko-KR" altLang="en-US" sz="1000" dirty="0">
-                <a:solidFill>
-                  <a:schemeClr val="bg1">
-                    <a:lumMod val="95000"/>
-                  </a:schemeClr>
-                </a:solidFill>
-                <a:latin typeface="Noto Sans KR Medium" panose="020B0200000000000000" pitchFamily="34" charset="-128"/>
-                <a:ea typeface="Noto Sans KR Medium" panose="020B0200000000000000" pitchFamily="34" charset="-128"/>
-              </a:rPr>
-              <a:t>초마다</a:t>
-            </a:r>
-            <a:r>
-              <a:rPr lang="en-US" altLang="ko-KR" sz="1000" dirty="0">
+              <a:t>피격 시 발동</a:t>
+            </a:r>
+            <a:r>
+              <a:rPr lang="en-US" altLang="ko-KR" sz="1000" dirty="0" smtClean="0">
                 <a:solidFill>
                   <a:schemeClr val="bg1">
                     <a:lumMod val="95000"/>
@@ -32142,331 +31528,6 @@
                 <a:ea typeface="Noto Sans KR Medium" panose="020B0200000000000000" pitchFamily="34" charset="-128"/>
               </a:rPr>
               <a:t>)</a:t>
-            </a:r>
-          </a:p>
-          <a:p>
-            <a:pPr marL="628650" lvl="1" indent="-171450">
-              <a:buFontTx/>
-              <a:buChar char="-"/>
-            </a:pPr>
-            <a:r>
-              <a:rPr lang="en-US" altLang="ko-KR" sz="1000" dirty="0" err="1">
-                <a:solidFill>
-                  <a:schemeClr val="bg1">
-                    <a:lumMod val="95000"/>
-                  </a:schemeClr>
-                </a:solidFill>
-                <a:latin typeface="Noto Sans KR Medium" panose="020B0200000000000000" pitchFamily="34" charset="-128"/>
-                <a:ea typeface="Noto Sans KR Medium" panose="020B0200000000000000" pitchFamily="34" charset="-128"/>
-              </a:rPr>
-              <a:t>EventEffect</a:t>
-            </a:r>
-            <a:r>
-              <a:rPr lang="en-US" altLang="ko-KR" sz="1000" dirty="0">
-                <a:solidFill>
-                  <a:schemeClr val="bg1">
-                    <a:lumMod val="95000"/>
-                  </a:schemeClr>
-                </a:solidFill>
-                <a:latin typeface="Noto Sans KR Medium" panose="020B0200000000000000" pitchFamily="34" charset="-128"/>
-                <a:ea typeface="Noto Sans KR Medium" panose="020B0200000000000000" pitchFamily="34" charset="-128"/>
-              </a:rPr>
-              <a:t> : </a:t>
-            </a:r>
-            <a:r>
-              <a:rPr lang="ko-KR" altLang="en-US" sz="1000" dirty="0" err="1">
-                <a:solidFill>
-                  <a:schemeClr val="bg1">
-                    <a:lumMod val="95000"/>
-                  </a:schemeClr>
-                </a:solidFill>
-                <a:latin typeface="Noto Sans KR Medium" panose="020B0200000000000000" pitchFamily="34" charset="-128"/>
-                <a:ea typeface="Noto Sans KR Medium" panose="020B0200000000000000" pitchFamily="34" charset="-128"/>
-              </a:rPr>
-              <a:t>액터가</a:t>
-            </a:r>
-            <a:r>
-              <a:rPr lang="ko-KR" altLang="en-US" sz="1000" dirty="0">
-                <a:solidFill>
-                  <a:schemeClr val="bg1">
-                    <a:lumMod val="95000"/>
-                  </a:schemeClr>
-                </a:solidFill>
-                <a:latin typeface="Noto Sans KR Medium" panose="020B0200000000000000" pitchFamily="34" charset="-128"/>
-                <a:ea typeface="Noto Sans KR Medium" panose="020B0200000000000000" pitchFamily="34" charset="-128"/>
-              </a:rPr>
-              <a:t> 특정한 조건을 만족할 때 효과를 부여 </a:t>
-            </a:r>
-            <a:r>
-              <a:rPr lang="en-US" altLang="ko-KR" sz="1000" dirty="0">
-                <a:solidFill>
-                  <a:schemeClr val="bg1">
-                    <a:lumMod val="95000"/>
-                  </a:schemeClr>
-                </a:solidFill>
-                <a:latin typeface="Noto Sans KR Medium" panose="020B0200000000000000" pitchFamily="34" charset="-128"/>
-                <a:ea typeface="Noto Sans KR Medium" panose="020B0200000000000000" pitchFamily="34" charset="-128"/>
-              </a:rPr>
-              <a:t>(</a:t>
-            </a:r>
-            <a:r>
-              <a:rPr lang="ko-KR" altLang="en-US" sz="1000" dirty="0">
-                <a:solidFill>
-                  <a:schemeClr val="bg1">
-                    <a:lumMod val="95000"/>
-                  </a:schemeClr>
-                </a:solidFill>
-                <a:latin typeface="Noto Sans KR Medium" panose="020B0200000000000000" pitchFamily="34" charset="-128"/>
-                <a:ea typeface="Noto Sans KR Medium" panose="020B0200000000000000" pitchFamily="34" charset="-128"/>
-              </a:rPr>
-              <a:t>예</a:t>
-            </a:r>
-            <a:r>
-              <a:rPr lang="en-US" altLang="ko-KR" sz="1000" dirty="0">
-                <a:solidFill>
-                  <a:schemeClr val="bg1">
-                    <a:lumMod val="95000"/>
-                  </a:schemeClr>
-                </a:solidFill>
-                <a:latin typeface="Noto Sans KR Medium" panose="020B0200000000000000" pitchFamily="34" charset="-128"/>
-                <a:ea typeface="Noto Sans KR Medium" panose="020B0200000000000000" pitchFamily="34" charset="-128"/>
-              </a:rPr>
-              <a:t>, </a:t>
-            </a:r>
-            <a:r>
-              <a:rPr lang="ko-KR" altLang="en-US" sz="1000" dirty="0">
-                <a:solidFill>
-                  <a:schemeClr val="bg1">
-                    <a:lumMod val="95000"/>
-                  </a:schemeClr>
-                </a:solidFill>
-                <a:latin typeface="Noto Sans KR Medium" panose="020B0200000000000000" pitchFamily="34" charset="-128"/>
-                <a:ea typeface="Noto Sans KR Medium" panose="020B0200000000000000" pitchFamily="34" charset="-128"/>
-              </a:rPr>
-              <a:t>피격 시 발동</a:t>
-            </a:r>
-            <a:r>
-              <a:rPr lang="en-US" altLang="ko-KR" sz="1000" dirty="0" smtClean="0">
-                <a:solidFill>
-                  <a:schemeClr val="bg1">
-                    <a:lumMod val="95000"/>
-                  </a:schemeClr>
-                </a:solidFill>
-                <a:latin typeface="Noto Sans KR Medium" panose="020B0200000000000000" pitchFamily="34" charset="-128"/>
-                <a:ea typeface="Noto Sans KR Medium" panose="020B0200000000000000" pitchFamily="34" charset="-128"/>
-              </a:rPr>
-              <a:t>)</a:t>
-            </a:r>
-          </a:p>
-          <a:p>
-            <a:endParaRPr lang="en-US" altLang="ko-KR" sz="1000" dirty="0" smtClean="0">
-              <a:solidFill>
-                <a:schemeClr val="bg1">
-                  <a:lumMod val="95000"/>
-                </a:schemeClr>
-              </a:solidFill>
-              <a:latin typeface="Noto Sans KR Medium" panose="020B0200000000000000" pitchFamily="34" charset="-128"/>
-              <a:ea typeface="Noto Sans KR Medium" panose="020B0200000000000000" pitchFamily="34" charset="-128"/>
-            </a:endParaRPr>
-          </a:p>
-          <a:p>
-            <a:r>
-              <a:rPr lang="en-US" altLang="ko-KR" sz="1000" dirty="0" err="1" smtClean="0">
-                <a:solidFill>
-                  <a:schemeClr val="bg1">
-                    <a:lumMod val="95000"/>
-                  </a:schemeClr>
-                </a:solidFill>
-                <a:latin typeface="Noto Sans KR Medium" panose="020B0200000000000000" pitchFamily="34" charset="-128"/>
-                <a:ea typeface="Noto Sans KR Medium" panose="020B0200000000000000" pitchFamily="34" charset="-128"/>
-              </a:rPr>
-              <a:t>UEffectData</a:t>
-            </a:r>
-            <a:endParaRPr lang="en-US" altLang="ko-KR" sz="1000" dirty="0" smtClean="0">
-              <a:solidFill>
-                <a:schemeClr val="bg1">
-                  <a:lumMod val="95000"/>
-                </a:schemeClr>
-              </a:solidFill>
-              <a:latin typeface="Noto Sans KR Medium" panose="020B0200000000000000" pitchFamily="34" charset="-128"/>
-              <a:ea typeface="Noto Sans KR Medium" panose="020B0200000000000000" pitchFamily="34" charset="-128"/>
-            </a:endParaRPr>
-          </a:p>
-          <a:p>
-            <a:pPr marL="171450" indent="-171450">
-              <a:buFontTx/>
-              <a:buChar char="-"/>
-            </a:pPr>
-            <a:r>
-              <a:rPr lang="ko-KR" altLang="en-US" sz="1000" dirty="0" smtClean="0">
-                <a:solidFill>
-                  <a:schemeClr val="bg1">
-                    <a:lumMod val="95000"/>
-                  </a:schemeClr>
-                </a:solidFill>
-                <a:latin typeface="Noto Sans KR Medium" panose="020B0200000000000000" pitchFamily="34" charset="-128"/>
-                <a:ea typeface="Noto Sans KR Medium" panose="020B0200000000000000" pitchFamily="34" charset="-128"/>
-              </a:rPr>
-              <a:t>액션</a:t>
-            </a:r>
-            <a:r>
-              <a:rPr lang="en-US" altLang="ko-KR" sz="1000" dirty="0" smtClean="0">
-                <a:solidFill>
-                  <a:schemeClr val="bg1">
-                    <a:lumMod val="95000"/>
-                  </a:schemeClr>
-                </a:solidFill>
-                <a:latin typeface="Noto Sans KR Medium" panose="020B0200000000000000" pitchFamily="34" charset="-128"/>
-                <a:ea typeface="Noto Sans KR Medium" panose="020B0200000000000000" pitchFamily="34" charset="-128"/>
-              </a:rPr>
-              <a:t>, </a:t>
-            </a:r>
-            <a:r>
-              <a:rPr lang="ko-KR" altLang="en-US" sz="1000" dirty="0" err="1" smtClean="0">
-                <a:solidFill>
-                  <a:schemeClr val="bg1">
-                    <a:lumMod val="95000"/>
-                  </a:schemeClr>
-                </a:solidFill>
-                <a:latin typeface="Noto Sans KR Medium" panose="020B0200000000000000" pitchFamily="34" charset="-128"/>
-                <a:ea typeface="Noto Sans KR Medium" panose="020B0200000000000000" pitchFamily="34" charset="-128"/>
-              </a:rPr>
-              <a:t>스킬에서</a:t>
-            </a:r>
-            <a:r>
-              <a:rPr lang="ko-KR" altLang="en-US" sz="1000" dirty="0" smtClean="0">
-                <a:solidFill>
-                  <a:schemeClr val="bg1">
-                    <a:lumMod val="95000"/>
-                  </a:schemeClr>
-                </a:solidFill>
-                <a:latin typeface="Noto Sans KR Medium" panose="020B0200000000000000" pitchFamily="34" charset="-128"/>
-                <a:ea typeface="Noto Sans KR Medium" panose="020B0200000000000000" pitchFamily="34" charset="-128"/>
-              </a:rPr>
-              <a:t> 재사용할 수 있도록 적용 </a:t>
-            </a:r>
-            <a:r>
-              <a:rPr lang="ko-KR" altLang="en-US" sz="1000" dirty="0" err="1" smtClean="0">
-                <a:solidFill>
-                  <a:schemeClr val="bg1">
-                    <a:lumMod val="95000"/>
-                  </a:schemeClr>
-                </a:solidFill>
-                <a:latin typeface="Noto Sans KR Medium" panose="020B0200000000000000" pitchFamily="34" charset="-128"/>
-                <a:ea typeface="Noto Sans KR Medium" panose="020B0200000000000000" pitchFamily="34" charset="-128"/>
-              </a:rPr>
-              <a:t>값등을</a:t>
-            </a:r>
-            <a:r>
-              <a:rPr lang="ko-KR" altLang="en-US" sz="1000" dirty="0">
-                <a:solidFill>
-                  <a:schemeClr val="bg1">
-                    <a:lumMod val="95000"/>
-                  </a:schemeClr>
-                </a:solidFill>
-                <a:latin typeface="Noto Sans KR Medium" panose="020B0200000000000000" pitchFamily="34" charset="-128"/>
-                <a:ea typeface="Noto Sans KR Medium" panose="020B0200000000000000" pitchFamily="34" charset="-128"/>
-              </a:rPr>
-              <a:t> </a:t>
-            </a:r>
-            <a:r>
-              <a:rPr lang="ko-KR" altLang="en-US" sz="1000" dirty="0" smtClean="0">
-                <a:solidFill>
-                  <a:schemeClr val="bg1">
-                    <a:lumMod val="95000"/>
-                  </a:schemeClr>
-                </a:solidFill>
-                <a:latin typeface="Noto Sans KR Medium" panose="020B0200000000000000" pitchFamily="34" charset="-128"/>
-                <a:ea typeface="Noto Sans KR Medium" panose="020B0200000000000000" pitchFamily="34" charset="-128"/>
-              </a:rPr>
-              <a:t>저장한 데이터 </a:t>
-            </a:r>
-            <a:r>
-              <a:rPr lang="ko-KR" altLang="en-US" sz="1000" dirty="0" err="1" smtClean="0">
-                <a:solidFill>
-                  <a:schemeClr val="bg1">
-                    <a:lumMod val="95000"/>
-                  </a:schemeClr>
-                </a:solidFill>
-                <a:latin typeface="Noto Sans KR Medium" panose="020B0200000000000000" pitchFamily="34" charset="-128"/>
-                <a:ea typeface="Noto Sans KR Medium" panose="020B0200000000000000" pitchFamily="34" charset="-128"/>
-              </a:rPr>
-              <a:t>에셋</a:t>
-            </a:r>
-            <a:endParaRPr lang="en-US" altLang="ko-KR" sz="1000" dirty="0" smtClean="0">
-              <a:solidFill>
-                <a:schemeClr val="bg1">
-                  <a:lumMod val="95000"/>
-                </a:schemeClr>
-              </a:solidFill>
-              <a:latin typeface="Noto Sans KR Medium" panose="020B0200000000000000" pitchFamily="34" charset="-128"/>
-              <a:ea typeface="Noto Sans KR Medium" panose="020B0200000000000000" pitchFamily="34" charset="-128"/>
-            </a:endParaRPr>
-          </a:p>
-          <a:p>
-            <a:pPr marL="171450" indent="-171450">
-              <a:buFontTx/>
-              <a:buChar char="-"/>
-            </a:pPr>
-            <a:r>
-              <a:rPr lang="ko-KR" altLang="en-US" sz="1000" dirty="0" smtClean="0">
-                <a:solidFill>
-                  <a:schemeClr val="bg1">
-                    <a:lumMod val="95000"/>
-                  </a:schemeClr>
-                </a:solidFill>
-                <a:latin typeface="Noto Sans KR Medium" panose="020B0200000000000000" pitchFamily="34" charset="-128"/>
-                <a:ea typeface="Noto Sans KR Medium" panose="020B0200000000000000" pitchFamily="34" charset="-128"/>
-              </a:rPr>
-              <a:t>만들어둔 데이터 </a:t>
-            </a:r>
-            <a:r>
-              <a:rPr lang="ko-KR" altLang="en-US" sz="1000" dirty="0" err="1" smtClean="0">
-                <a:solidFill>
-                  <a:schemeClr val="bg1">
-                    <a:lumMod val="95000"/>
-                  </a:schemeClr>
-                </a:solidFill>
-                <a:latin typeface="Noto Sans KR Medium" panose="020B0200000000000000" pitchFamily="34" charset="-128"/>
-                <a:ea typeface="Noto Sans KR Medium" panose="020B0200000000000000" pitchFamily="34" charset="-128"/>
-              </a:rPr>
-              <a:t>애셋은</a:t>
-            </a:r>
-            <a:r>
-              <a:rPr lang="ko-KR" altLang="en-US" sz="1000" dirty="0" smtClean="0">
-                <a:solidFill>
-                  <a:schemeClr val="bg1">
-                    <a:lumMod val="95000"/>
-                  </a:schemeClr>
-                </a:solidFill>
-                <a:latin typeface="Noto Sans KR Medium" panose="020B0200000000000000" pitchFamily="34" charset="-128"/>
-                <a:ea typeface="Noto Sans KR Medium" panose="020B0200000000000000" pitchFamily="34" charset="-128"/>
-              </a:rPr>
-              <a:t> 아이템과 액션 </a:t>
-            </a:r>
-            <a:r>
-              <a:rPr lang="ko-KR" altLang="en-US" sz="1000" dirty="0" err="1" smtClean="0">
-                <a:solidFill>
-                  <a:schemeClr val="bg1">
-                    <a:lumMod val="95000"/>
-                  </a:schemeClr>
-                </a:solidFill>
-                <a:latin typeface="Noto Sans KR Medium" panose="020B0200000000000000" pitchFamily="34" charset="-128"/>
-                <a:ea typeface="Noto Sans KR Medium" panose="020B0200000000000000" pitchFamily="34" charset="-128"/>
-              </a:rPr>
-              <a:t>에셋에</a:t>
-            </a:r>
-            <a:r>
-              <a:rPr lang="ko-KR" altLang="en-US" sz="1000" dirty="0" smtClean="0">
-                <a:solidFill>
-                  <a:schemeClr val="bg1">
-                    <a:lumMod val="95000"/>
-                  </a:schemeClr>
-                </a:solidFill>
-                <a:latin typeface="Noto Sans KR Medium" panose="020B0200000000000000" pitchFamily="34" charset="-128"/>
-                <a:ea typeface="Noto Sans KR Medium" panose="020B0200000000000000" pitchFamily="34" charset="-128"/>
-              </a:rPr>
-              <a:t> 등록해서 사용</a:t>
             </a:r>
             <a:endParaRPr lang="en-US" altLang="ko-KR" sz="1000" dirty="0" smtClean="0">
               <a:solidFill>
@@ -32533,8 +31594,8 @@
         </p:nvSpPr>
         <p:spPr>
           <a:xfrm>
-            <a:off x="6666334" y="2342636"/>
-            <a:ext cx="5179769" cy="3768217"/>
+            <a:off x="6666334" y="1707802"/>
+            <a:ext cx="5179769" cy="2545699"/>
           </a:xfrm>
           <a:prstGeom prst="rect">
             <a:avLst/>
@@ -32590,7 +31651,7 @@
         <p:spPr>
           <a:xfrm>
             <a:off x="6666333" y="433872"/>
-            <a:ext cx="5179769" cy="1715656"/>
+            <a:ext cx="5179769" cy="1138074"/>
           </a:xfrm>
           <a:prstGeom prst="rect">
             <a:avLst/>
@@ -32633,8 +31694,8 @@
         </p:nvSpPr>
         <p:spPr>
           <a:xfrm>
-            <a:off x="454275" y="3903280"/>
-            <a:ext cx="5833509" cy="2207574"/>
+            <a:off x="540000" y="3753643"/>
+            <a:ext cx="5565524" cy="2680675"/>
           </a:xfrm>
           <a:prstGeom prst="rect">
             <a:avLst/>
@@ -32667,7 +31728,63 @@
             </a:r>
             <a:r>
               <a:rPr lang="ko-KR" altLang="en-US" dirty="0" smtClean="0"/>
-              <a:t> 데이터 객체</a:t>
+              <a:t> 클래스 상속 구조</a:t>
+            </a:r>
+            <a:endParaRPr lang="ko-KR" altLang="en-US" dirty="0"/>
+          </a:p>
+        </p:txBody>
+      </p:sp>
+      <p:sp>
+        <p:nvSpPr>
+          <p:cNvPr id="12" name="직사각형 11"/>
+          <p:cNvSpPr/>
+          <p:nvPr/>
+        </p:nvSpPr>
+        <p:spPr>
+          <a:xfrm>
+            <a:off x="6666333" y="4389357"/>
+            <a:ext cx="5179769" cy="2044961"/>
+          </a:xfrm>
+          <a:prstGeom prst="rect">
+            <a:avLst/>
+          </a:prstGeom>
+        </p:spPr>
+        <p:style>
+          <a:lnRef idx="2">
+            <a:schemeClr val="accent1">
+              <a:shade val="50000"/>
+            </a:schemeClr>
+          </a:lnRef>
+          <a:fillRef idx="1">
+            <a:schemeClr val="accent1"/>
+          </a:fillRef>
+          <a:effectRef idx="0">
+            <a:schemeClr val="accent1"/>
+          </a:effectRef>
+          <a:fontRef idx="minor">
+            <a:schemeClr val="lt1"/>
+          </a:fontRef>
+        </p:style>
+        <p:txBody>
+          <a:bodyPr rtlCol="0" anchor="ctr"/>
+          <a:lstStyle/>
+          <a:p>
+            <a:pPr algn="ctr"/>
+            <a:r>
+              <a:rPr lang="ko-KR" altLang="en-US" dirty="0" err="1" smtClean="0"/>
+              <a:t>이펙트</a:t>
+            </a:r>
+            <a:r>
+              <a:rPr lang="ko-KR" altLang="en-US" dirty="0" smtClean="0"/>
+              <a:t> 발동</a:t>
+            </a:r>
+            <a:r>
+              <a:rPr lang="en-US" altLang="ko-KR" dirty="0" smtClean="0"/>
+              <a:t>, </a:t>
+            </a:r>
+            <a:r>
+              <a:rPr lang="ko-KR" altLang="en-US" dirty="0" smtClean="0"/>
+              <a:t>발동 해제 코드</a:t>
             </a:r>
             <a:endParaRPr lang="ko-KR" altLang="en-US" dirty="0"/>
           </a:p>

--- a/Docs/UnrealEngine_문서_김정환.pptx
+++ b/Docs/UnrealEngine_문서_김정환.pptx
@@ -229,7 +229,7 @@
           <a:p>
             <a:fld id="{C180C216-7AC4-482D-A25B-339B4E373C44}" type="datetimeFigureOut">
               <a:rPr lang="ko-KR" altLang="en-US" smtClean="0"/>
-              <a:t>2026-03-20</a:t>
+              <a:t>2026-03-21</a:t>
             </a:fld>
             <a:endParaRPr lang="ko-KR" altLang="en-US"/>
           </a:p>
@@ -10297,7 +10297,7 @@
           <a:p>
             <a:fld id="{2056477C-5364-4FAF-AB24-F59E083ADCD2}" type="datetimeFigureOut">
               <a:rPr lang="ko-KR" altLang="en-US" smtClean="0"/>
-              <a:t>2026-03-20</a:t>
+              <a:t>2026-03-21</a:t>
             </a:fld>
             <a:endParaRPr lang="ko-KR" altLang="en-US"/>
           </a:p>
@@ -10467,7 +10467,7 @@
           <a:p>
             <a:fld id="{2056477C-5364-4FAF-AB24-F59E083ADCD2}" type="datetimeFigureOut">
               <a:rPr lang="ko-KR" altLang="en-US" smtClean="0"/>
-              <a:t>2026-03-20</a:t>
+              <a:t>2026-03-21</a:t>
             </a:fld>
             <a:endParaRPr lang="ko-KR" altLang="en-US"/>
           </a:p>
@@ -10647,7 +10647,7 @@
           <a:p>
             <a:fld id="{2056477C-5364-4FAF-AB24-F59E083ADCD2}" type="datetimeFigureOut">
               <a:rPr lang="ko-KR" altLang="en-US" smtClean="0"/>
-              <a:t>2026-03-20</a:t>
+              <a:t>2026-03-21</a:t>
             </a:fld>
             <a:endParaRPr lang="ko-KR" altLang="en-US"/>
           </a:p>
@@ -10817,7 +10817,7 @@
           <a:p>
             <a:fld id="{2056477C-5364-4FAF-AB24-F59E083ADCD2}" type="datetimeFigureOut">
               <a:rPr lang="ko-KR" altLang="en-US" smtClean="0"/>
-              <a:t>2026-03-20</a:t>
+              <a:t>2026-03-21</a:t>
             </a:fld>
             <a:endParaRPr lang="ko-KR" altLang="en-US"/>
           </a:p>
@@ -11063,7 +11063,7 @@
           <a:p>
             <a:fld id="{2056477C-5364-4FAF-AB24-F59E083ADCD2}" type="datetimeFigureOut">
               <a:rPr lang="ko-KR" altLang="en-US" smtClean="0"/>
-              <a:t>2026-03-20</a:t>
+              <a:t>2026-03-21</a:t>
             </a:fld>
             <a:endParaRPr lang="ko-KR" altLang="en-US"/>
           </a:p>
@@ -11295,7 +11295,7 @@
           <a:p>
             <a:fld id="{2056477C-5364-4FAF-AB24-F59E083ADCD2}" type="datetimeFigureOut">
               <a:rPr lang="ko-KR" altLang="en-US" smtClean="0"/>
-              <a:t>2026-03-20</a:t>
+              <a:t>2026-03-21</a:t>
             </a:fld>
             <a:endParaRPr lang="ko-KR" altLang="en-US"/>
           </a:p>
@@ -11662,7 +11662,7 @@
           <a:p>
             <a:fld id="{2056477C-5364-4FAF-AB24-F59E083ADCD2}" type="datetimeFigureOut">
               <a:rPr lang="ko-KR" altLang="en-US" smtClean="0"/>
-              <a:t>2026-03-20</a:t>
+              <a:t>2026-03-21</a:t>
             </a:fld>
             <a:endParaRPr lang="ko-KR" altLang="en-US"/>
           </a:p>
@@ -11780,7 +11780,7 @@
           <a:p>
             <a:fld id="{2056477C-5364-4FAF-AB24-F59E083ADCD2}" type="datetimeFigureOut">
               <a:rPr lang="ko-KR" altLang="en-US" smtClean="0"/>
-              <a:t>2026-03-20</a:t>
+              <a:t>2026-03-21</a:t>
             </a:fld>
             <a:endParaRPr lang="ko-KR" altLang="en-US"/>
           </a:p>
@@ -11875,7 +11875,7 @@
           <a:p>
             <a:fld id="{2056477C-5364-4FAF-AB24-F59E083ADCD2}" type="datetimeFigureOut">
               <a:rPr lang="ko-KR" altLang="en-US" smtClean="0"/>
-              <a:t>2026-03-20</a:t>
+              <a:t>2026-03-21</a:t>
             </a:fld>
             <a:endParaRPr lang="ko-KR" altLang="en-US"/>
           </a:p>
@@ -12152,7 +12152,7 @@
           <a:p>
             <a:fld id="{2056477C-5364-4FAF-AB24-F59E083ADCD2}" type="datetimeFigureOut">
               <a:rPr lang="ko-KR" altLang="en-US" smtClean="0"/>
-              <a:t>2026-03-20</a:t>
+              <a:t>2026-03-21</a:t>
             </a:fld>
             <a:endParaRPr lang="ko-KR" altLang="en-US"/>
           </a:p>
@@ -12405,7 +12405,7 @@
           <a:p>
             <a:fld id="{2056477C-5364-4FAF-AB24-F59E083ADCD2}" type="datetimeFigureOut">
               <a:rPr lang="ko-KR" altLang="en-US" smtClean="0"/>
-              <a:t>2026-03-20</a:t>
+              <a:t>2026-03-21</a:t>
             </a:fld>
             <a:endParaRPr lang="ko-KR" altLang="en-US"/>
           </a:p>
@@ -12624,7 +12624,7 @@
           <a:p>
             <a:fld id="{2056477C-5364-4FAF-AB24-F59E083ADCD2}" type="datetimeFigureOut">
               <a:rPr lang="ko-KR" altLang="en-US" smtClean="0"/>
-              <a:t>2026-03-20</a:t>
+              <a:t>2026-03-21</a:t>
             </a:fld>
             <a:endParaRPr lang="ko-KR" altLang="en-US"/>
           </a:p>
@@ -14108,19 +14108,7 @@
                 <a:latin typeface="Noto Sans KR ExtraBold" panose="020B0200000000000000" pitchFamily="34" charset="-128"/>
                 <a:ea typeface="Noto Sans KR ExtraBold" panose="020B0200000000000000" pitchFamily="34" charset="-128"/>
               </a:rPr>
-              <a:t> </a:t>
-            </a:r>
-            <a:r>
-              <a:rPr lang="ko-KR" altLang="en-US" dirty="0" smtClean="0">
-                <a:solidFill>
-                  <a:schemeClr val="bg1">
-                    <a:lumMod val="95000"/>
-                  </a:schemeClr>
-                </a:solidFill>
-                <a:latin typeface="Noto Sans KR ExtraBold" panose="020B0200000000000000" pitchFamily="34" charset="-128"/>
-                <a:ea typeface="Noto Sans KR ExtraBold" panose="020B0200000000000000" pitchFamily="34" charset="-128"/>
-              </a:rPr>
-              <a:t>액션과 </a:t>
+              <a:t> 액션과 </a:t>
             </a:r>
             <a:r>
               <a:rPr lang="ko-KR" altLang="en-US" dirty="0" err="1" smtClean="0">
@@ -14204,7 +14192,7 @@
         <p:spPr>
           <a:xfrm>
             <a:off x="454275" y="1480347"/>
-            <a:ext cx="5651249" cy="400110"/>
+            <a:ext cx="5651249" cy="553998"/>
           </a:xfrm>
           <a:prstGeom prst="rect">
             <a:avLst/>
@@ -14226,7 +14214,91 @@
                 <a:latin typeface="Noto Sans KR Medium" panose="020B0200000000000000" pitchFamily="34" charset="-128"/>
                 <a:ea typeface="Noto Sans KR Medium" panose="020B0200000000000000" pitchFamily="34" charset="-128"/>
               </a:rPr>
-              <a:t>플레이어의 실질적인 동작을 처리하는 컴포넌트입니다</a:t>
+              <a:t>플레이어의 </a:t>
+            </a:r>
+            <a:r>
+              <a:rPr lang="ko-KR" altLang="en-US" sz="1000" dirty="0" smtClean="0">
+                <a:solidFill>
+                  <a:schemeClr val="bg1">
+                    <a:lumMod val="95000"/>
+                  </a:schemeClr>
+                </a:solidFill>
+                <a:latin typeface="Noto Sans KR Medium" panose="020B0200000000000000" pitchFamily="34" charset="-128"/>
+                <a:ea typeface="Noto Sans KR Medium" panose="020B0200000000000000" pitchFamily="34" charset="-128"/>
+              </a:rPr>
+              <a:t>회</a:t>
+            </a:r>
+            <a:r>
+              <a:rPr lang="ko-KR" altLang="en-US" sz="1000" dirty="0" smtClean="0">
+                <a:solidFill>
+                  <a:schemeClr val="bg1">
+                    <a:lumMod val="95000"/>
+                  </a:schemeClr>
+                </a:solidFill>
+                <a:latin typeface="Noto Sans KR Medium" panose="020B0200000000000000" pitchFamily="34" charset="-128"/>
+                <a:ea typeface="Noto Sans KR Medium" panose="020B0200000000000000" pitchFamily="34" charset="-128"/>
+              </a:rPr>
+              <a:t>피</a:t>
+            </a:r>
+            <a:r>
+              <a:rPr lang="en-US" altLang="ko-KR" sz="1000" dirty="0">
+                <a:solidFill>
+                  <a:schemeClr val="bg1">
+                    <a:lumMod val="95000"/>
+                  </a:schemeClr>
+                </a:solidFill>
+                <a:latin typeface="Noto Sans KR Medium" panose="020B0200000000000000" pitchFamily="34" charset="-128"/>
+                <a:ea typeface="Noto Sans KR Medium" panose="020B0200000000000000" pitchFamily="34" charset="-128"/>
+              </a:rPr>
+              <a:t>, </a:t>
+            </a:r>
+            <a:r>
+              <a:rPr lang="ko-KR" altLang="en-US" sz="1000" dirty="0">
+                <a:solidFill>
+                  <a:schemeClr val="bg1">
+                    <a:lumMod val="95000"/>
+                  </a:schemeClr>
+                </a:solidFill>
+                <a:latin typeface="Noto Sans KR Medium" panose="020B0200000000000000" pitchFamily="34" charset="-128"/>
+                <a:ea typeface="Noto Sans KR Medium" panose="020B0200000000000000" pitchFamily="34" charset="-128"/>
+              </a:rPr>
+              <a:t>상호작용</a:t>
+            </a:r>
+            <a:r>
+              <a:rPr lang="en-US" altLang="ko-KR" sz="1000" dirty="0">
+                <a:solidFill>
+                  <a:schemeClr val="bg1">
+                    <a:lumMod val="95000"/>
+                  </a:schemeClr>
+                </a:solidFill>
+                <a:latin typeface="Noto Sans KR Medium" panose="020B0200000000000000" pitchFamily="34" charset="-128"/>
+                <a:ea typeface="Noto Sans KR Medium" panose="020B0200000000000000" pitchFamily="34" charset="-128"/>
+              </a:rPr>
+              <a:t>, </a:t>
+            </a:r>
+            <a:r>
+              <a:rPr lang="ko-KR" altLang="en-US" sz="1000" dirty="0">
+                <a:solidFill>
+                  <a:schemeClr val="bg1">
+                    <a:lumMod val="95000"/>
+                  </a:schemeClr>
+                </a:solidFill>
+                <a:latin typeface="Noto Sans KR Medium" panose="020B0200000000000000" pitchFamily="34" charset="-128"/>
+                <a:ea typeface="Noto Sans KR Medium" panose="020B0200000000000000" pitchFamily="34" charset="-128"/>
+              </a:rPr>
+              <a:t>공격 등의 애니메이션을 </a:t>
+            </a:r>
+            <a:r>
+              <a:rPr lang="ko-KR" altLang="en-US" sz="1000" dirty="0" smtClean="0">
+                <a:solidFill>
+                  <a:schemeClr val="bg1">
+                    <a:lumMod val="95000"/>
+                  </a:schemeClr>
+                </a:solidFill>
+                <a:latin typeface="Noto Sans KR Medium" panose="020B0200000000000000" pitchFamily="34" charset="-128"/>
+                <a:ea typeface="Noto Sans KR Medium" panose="020B0200000000000000" pitchFamily="34" charset="-128"/>
+              </a:rPr>
+              <a:t>처리하는 컴포넌트입니다</a:t>
             </a:r>
             <a:r>
               <a:rPr lang="en-US" altLang="ko-KR" sz="1000" dirty="0" smtClean="0">
@@ -14240,31 +14312,64 @@
               </a:rPr>
               <a:t>.</a:t>
             </a:r>
-          </a:p>
-          <a:p>
-            <a:r>
-              <a:rPr lang="ko-KR" altLang="en-US" sz="1000" dirty="0" smtClean="0">
-                <a:solidFill>
-                  <a:schemeClr val="bg1">
-                    <a:lumMod val="95000"/>
-                  </a:schemeClr>
-                </a:solidFill>
-                <a:latin typeface="Noto Sans KR Medium" panose="020B0200000000000000" pitchFamily="34" charset="-128"/>
-                <a:ea typeface="Noto Sans KR Medium" panose="020B0200000000000000" pitchFamily="34" charset="-128"/>
-              </a:rPr>
-              <a:t>동작 실행 기능과 함께</a:t>
-            </a:r>
-            <a:r>
-              <a:rPr lang="ko-KR" altLang="en-US" sz="1000" dirty="0" smtClean="0">
-                <a:solidFill>
-                  <a:schemeClr val="bg1">
-                    <a:lumMod val="95000"/>
-                  </a:schemeClr>
-                </a:solidFill>
-                <a:latin typeface="Noto Sans KR Medium" panose="020B0200000000000000" pitchFamily="34" charset="-128"/>
-                <a:ea typeface="Noto Sans KR Medium" panose="020B0200000000000000" pitchFamily="34" charset="-128"/>
-              </a:rPr>
-              <a:t> 현재 동작과 이어진 다음 동작을 확인하고 실행합니다</a:t>
+            <a:endParaRPr lang="en-US" altLang="ko-KR" sz="1000" dirty="0" smtClean="0">
+              <a:solidFill>
+                <a:schemeClr val="bg1">
+                  <a:lumMod val="95000"/>
+                </a:schemeClr>
+              </a:solidFill>
+              <a:latin typeface="Noto Sans KR Medium" panose="020B0200000000000000" pitchFamily="34" charset="-128"/>
+              <a:ea typeface="Noto Sans KR Medium" panose="020B0200000000000000" pitchFamily="34" charset="-128"/>
+            </a:endParaRPr>
+          </a:p>
+          <a:p>
+            <a:r>
+              <a:rPr lang="ko-KR" altLang="en-US" sz="1000" dirty="0" smtClean="0">
+                <a:solidFill>
+                  <a:schemeClr val="bg1">
+                    <a:lumMod val="95000"/>
+                  </a:schemeClr>
+                </a:solidFill>
+                <a:latin typeface="Noto Sans KR Medium" panose="020B0200000000000000" pitchFamily="34" charset="-128"/>
+                <a:ea typeface="Noto Sans KR Medium" panose="020B0200000000000000" pitchFamily="34" charset="-128"/>
+              </a:rPr>
+              <a:t>하나의 동작을 하나의 액션으로 단위를 잡고</a:t>
+            </a:r>
+            <a:r>
+              <a:rPr lang="ko-KR" altLang="en-US" sz="1000" dirty="0" smtClean="0">
+                <a:solidFill>
+                  <a:schemeClr val="bg1">
+                    <a:lumMod val="95000"/>
+                  </a:schemeClr>
+                </a:solidFill>
+                <a:latin typeface="Noto Sans KR Medium" panose="020B0200000000000000" pitchFamily="34" charset="-128"/>
+                <a:ea typeface="Noto Sans KR Medium" panose="020B0200000000000000" pitchFamily="34" charset="-128"/>
+              </a:rPr>
+              <a:t> </a:t>
+            </a:r>
+            <a:r>
+              <a:rPr lang="ko-KR" altLang="en-US" sz="1000" smtClean="0">
+                <a:solidFill>
+                  <a:schemeClr val="bg1">
+                    <a:lumMod val="95000"/>
+                  </a:schemeClr>
+                </a:solidFill>
+                <a:latin typeface="Noto Sans KR Medium" panose="020B0200000000000000" pitchFamily="34" charset="-128"/>
+                <a:ea typeface="Noto Sans KR Medium" panose="020B0200000000000000" pitchFamily="34" charset="-128"/>
+              </a:rPr>
+              <a:t>실행하고 현재 액션과 연결된 다음 액션을 </a:t>
+            </a:r>
+            <a:r>
+              <a:rPr lang="ko-KR" altLang="en-US" sz="1000" dirty="0" smtClean="0">
+                <a:solidFill>
+                  <a:schemeClr val="bg1">
+                    <a:lumMod val="95000"/>
+                  </a:schemeClr>
+                </a:solidFill>
+                <a:latin typeface="Noto Sans KR Medium" panose="020B0200000000000000" pitchFamily="34" charset="-128"/>
+                <a:ea typeface="Noto Sans KR Medium" panose="020B0200000000000000" pitchFamily="34" charset="-128"/>
+              </a:rPr>
+              <a:t>확인하고 실행합니다</a:t>
             </a:r>
             <a:r>
               <a:rPr lang="en-US" altLang="ko-KR" sz="1000" dirty="0" smtClean="0">
@@ -14313,6 +14418,233 @@
                 <a:ea typeface="Noto Sans KR ExtraBold" panose="020B0200000000000000" pitchFamily="34" charset="-128"/>
               </a:rPr>
               <a:t>UPlayerActionComponent</a:t>
+            </a:r>
+            <a:endParaRPr lang="en-US" altLang="ko-KR" sz="1000" dirty="0" smtClean="0">
+              <a:solidFill>
+                <a:schemeClr val="bg1">
+                  <a:lumMod val="95000"/>
+                </a:schemeClr>
+              </a:solidFill>
+              <a:latin typeface="Noto Sans KR ExtraBold" panose="020B0200000000000000" pitchFamily="34" charset="-128"/>
+              <a:ea typeface="Noto Sans KR ExtraBold" panose="020B0200000000000000" pitchFamily="34" charset="-128"/>
+            </a:endParaRPr>
+          </a:p>
+        </p:txBody>
+      </p:sp>
+      <p:sp>
+        <p:nvSpPr>
+          <p:cNvPr id="7" name="직사각형 6"/>
+          <p:cNvSpPr/>
+          <p:nvPr/>
+        </p:nvSpPr>
+        <p:spPr>
+          <a:xfrm>
+            <a:off x="463799" y="2280566"/>
+            <a:ext cx="5651249" cy="400110"/>
+          </a:xfrm>
+          <a:prstGeom prst="rect">
+            <a:avLst/>
+          </a:prstGeom>
+        </p:spPr>
+        <p:txBody>
+          <a:bodyPr wrap="square">
+            <a:spAutoFit/>
+          </a:bodyPr>
+          <a:lstStyle/>
+          <a:p>
+            <a:r>
+              <a:rPr lang="ko-KR" altLang="en-US" sz="1000" dirty="0" smtClean="0">
+                <a:solidFill>
+                  <a:schemeClr val="bg1">
+                    <a:lumMod val="95000"/>
+                  </a:schemeClr>
+                </a:solidFill>
+                <a:latin typeface="Noto Sans KR Medium" panose="020B0200000000000000" pitchFamily="34" charset="-128"/>
+                <a:ea typeface="Noto Sans KR Medium" panose="020B0200000000000000" pitchFamily="34" charset="-128"/>
+              </a:rPr>
+              <a:t>공격 액션은 총 </a:t>
+            </a:r>
+            <a:r>
+              <a:rPr lang="en-US" altLang="ko-KR" sz="1000" dirty="0" smtClean="0">
+                <a:solidFill>
+                  <a:schemeClr val="bg1">
+                    <a:lumMod val="95000"/>
+                  </a:schemeClr>
+                </a:solidFill>
+                <a:latin typeface="Noto Sans KR Medium" panose="020B0200000000000000" pitchFamily="34" charset="-128"/>
+                <a:ea typeface="Noto Sans KR Medium" panose="020B0200000000000000" pitchFamily="34" charset="-128"/>
+              </a:rPr>
+              <a:t>3</a:t>
+            </a:r>
+            <a:r>
+              <a:rPr lang="ko-KR" altLang="en-US" sz="1000" dirty="0" smtClean="0">
+                <a:solidFill>
+                  <a:schemeClr val="bg1">
+                    <a:lumMod val="95000"/>
+                  </a:schemeClr>
+                </a:solidFill>
+                <a:latin typeface="Noto Sans KR Medium" panose="020B0200000000000000" pitchFamily="34" charset="-128"/>
+                <a:ea typeface="Noto Sans KR Medium" panose="020B0200000000000000" pitchFamily="34" charset="-128"/>
+              </a:rPr>
+              <a:t>가지 유형으로 정의하여</a:t>
+            </a:r>
+            <a:r>
+              <a:rPr lang="en-US" altLang="ko-KR" sz="1000" dirty="0" smtClean="0">
+                <a:solidFill>
+                  <a:schemeClr val="bg1">
+                    <a:lumMod val="95000"/>
+                  </a:schemeClr>
+                </a:solidFill>
+                <a:latin typeface="Noto Sans KR Medium" panose="020B0200000000000000" pitchFamily="34" charset="-128"/>
+                <a:ea typeface="Noto Sans KR Medium" panose="020B0200000000000000" pitchFamily="34" charset="-128"/>
+              </a:rPr>
+              <a:t>(</a:t>
+            </a:r>
+            <a:r>
+              <a:rPr lang="ko-KR" altLang="en-US" sz="1000" dirty="0" smtClean="0">
+                <a:solidFill>
+                  <a:schemeClr val="bg1">
+                    <a:lumMod val="95000"/>
+                  </a:schemeClr>
+                </a:solidFill>
+                <a:latin typeface="Noto Sans KR Medium" panose="020B0200000000000000" pitchFamily="34" charset="-128"/>
+                <a:ea typeface="Noto Sans KR Medium" panose="020B0200000000000000" pitchFamily="34" charset="-128"/>
+              </a:rPr>
+              <a:t>일반 공격</a:t>
+            </a:r>
+            <a:r>
+              <a:rPr lang="en-US" altLang="ko-KR" sz="1000" dirty="0" smtClean="0">
+                <a:solidFill>
+                  <a:schemeClr val="bg1">
+                    <a:lumMod val="95000"/>
+                  </a:schemeClr>
+                </a:solidFill>
+                <a:latin typeface="Noto Sans KR Medium" panose="020B0200000000000000" pitchFamily="34" charset="-128"/>
+                <a:ea typeface="Noto Sans KR Medium" panose="020B0200000000000000" pitchFamily="34" charset="-128"/>
+              </a:rPr>
+              <a:t>, </a:t>
+            </a:r>
+            <a:r>
+              <a:rPr lang="ko-KR" altLang="en-US" sz="1000" dirty="0" err="1" smtClean="0">
+                <a:solidFill>
+                  <a:schemeClr val="bg1">
+                    <a:lumMod val="95000"/>
+                  </a:schemeClr>
+                </a:solidFill>
+                <a:latin typeface="Noto Sans KR Medium" panose="020B0200000000000000" pitchFamily="34" charset="-128"/>
+                <a:ea typeface="Noto Sans KR Medium" panose="020B0200000000000000" pitchFamily="34" charset="-128"/>
+              </a:rPr>
+              <a:t>강공격</a:t>
+            </a:r>
+            <a:r>
+              <a:rPr lang="en-US" altLang="ko-KR" sz="1000" dirty="0" smtClean="0">
+                <a:solidFill>
+                  <a:schemeClr val="bg1">
+                    <a:lumMod val="95000"/>
+                  </a:schemeClr>
+                </a:solidFill>
+                <a:latin typeface="Noto Sans KR Medium" panose="020B0200000000000000" pitchFamily="34" charset="-128"/>
+                <a:ea typeface="Noto Sans KR Medium" panose="020B0200000000000000" pitchFamily="34" charset="-128"/>
+              </a:rPr>
+              <a:t>, </a:t>
+            </a:r>
+            <a:r>
+              <a:rPr lang="ko-KR" altLang="en-US" sz="1000" dirty="0" smtClean="0">
+                <a:solidFill>
+                  <a:schemeClr val="bg1">
+                    <a:lumMod val="95000"/>
+                  </a:schemeClr>
+                </a:solidFill>
+                <a:latin typeface="Noto Sans KR Medium" panose="020B0200000000000000" pitchFamily="34" charset="-128"/>
+                <a:ea typeface="Noto Sans KR Medium" panose="020B0200000000000000" pitchFamily="34" charset="-128"/>
+              </a:rPr>
+              <a:t>스킬</a:t>
+            </a:r>
+            <a:r>
+              <a:rPr lang="en-US" altLang="ko-KR" sz="1000" dirty="0" smtClean="0">
+                <a:solidFill>
+                  <a:schemeClr val="bg1">
+                    <a:lumMod val="95000"/>
+                  </a:schemeClr>
+                </a:solidFill>
+                <a:latin typeface="Noto Sans KR Medium" panose="020B0200000000000000" pitchFamily="34" charset="-128"/>
+                <a:ea typeface="Noto Sans KR Medium" panose="020B0200000000000000" pitchFamily="34" charset="-128"/>
+              </a:rPr>
+              <a:t>) </a:t>
+            </a:r>
+          </a:p>
+          <a:p>
+            <a:r>
+              <a:rPr lang="ko-KR" altLang="en-US" sz="1000" dirty="0" smtClean="0">
+                <a:solidFill>
+                  <a:schemeClr val="bg1">
+                    <a:lumMod val="95000"/>
+                  </a:schemeClr>
+                </a:solidFill>
+                <a:latin typeface="Noto Sans KR Medium" panose="020B0200000000000000" pitchFamily="34" charset="-128"/>
+                <a:ea typeface="Noto Sans KR Medium" panose="020B0200000000000000" pitchFamily="34" charset="-128"/>
+              </a:rPr>
+              <a:t>각각의 공격 유형을 입력 받아 처리합니다</a:t>
+            </a:r>
+            <a:r>
+              <a:rPr lang="en-US" altLang="ko-KR" sz="1000" dirty="0" smtClean="0">
+                <a:solidFill>
+                  <a:schemeClr val="bg1">
+                    <a:lumMod val="95000"/>
+                  </a:schemeClr>
+                </a:solidFill>
+                <a:latin typeface="Noto Sans KR Medium" panose="020B0200000000000000" pitchFamily="34" charset="-128"/>
+                <a:ea typeface="Noto Sans KR Medium" panose="020B0200000000000000" pitchFamily="34" charset="-128"/>
+              </a:rPr>
+              <a:t>.</a:t>
+            </a:r>
+          </a:p>
+        </p:txBody>
+      </p:sp>
+      <p:sp>
+        <p:nvSpPr>
+          <p:cNvPr id="10" name="직사각형 9"/>
+          <p:cNvSpPr/>
+          <p:nvPr/>
+        </p:nvSpPr>
+        <p:spPr>
+          <a:xfrm>
+            <a:off x="454275" y="2034345"/>
+            <a:ext cx="3317952" cy="246221"/>
+          </a:xfrm>
+          <a:prstGeom prst="rect">
+            <a:avLst/>
+          </a:prstGeom>
+        </p:spPr>
+        <p:txBody>
+          <a:bodyPr wrap="square">
+            <a:spAutoFit/>
+          </a:bodyPr>
+          <a:lstStyle/>
+          <a:p>
+            <a:r>
+              <a:rPr lang="ko-KR" altLang="en-US" sz="1000" dirty="0" err="1" smtClean="0">
+                <a:solidFill>
+                  <a:schemeClr val="bg1">
+                    <a:lumMod val="95000"/>
+                  </a:schemeClr>
+                </a:solidFill>
+                <a:latin typeface="Noto Sans KR ExtraBold" panose="020B0200000000000000" pitchFamily="34" charset="-128"/>
+                <a:ea typeface="Noto Sans KR ExtraBold" panose="020B0200000000000000" pitchFamily="34" charset="-128"/>
+              </a:rPr>
+              <a:t>콤보</a:t>
+            </a:r>
+            <a:r>
+              <a:rPr lang="ko-KR" altLang="en-US" sz="1000" dirty="0" smtClean="0">
+                <a:solidFill>
+                  <a:schemeClr val="bg1">
+                    <a:lumMod val="95000"/>
+                  </a:schemeClr>
+                </a:solidFill>
+                <a:latin typeface="Noto Sans KR ExtraBold" panose="020B0200000000000000" pitchFamily="34" charset="-128"/>
+                <a:ea typeface="Noto Sans KR ExtraBold" panose="020B0200000000000000" pitchFamily="34" charset="-128"/>
+              </a:rPr>
+              <a:t> 연계</a:t>
             </a:r>
             <a:endParaRPr lang="en-US" altLang="ko-KR" sz="1000" dirty="0" smtClean="0">
               <a:solidFill>
@@ -29147,19 +29479,7 @@
                 <a:latin typeface="Noto Sans KR ExtraBold" panose="020B0200000000000000" pitchFamily="34" charset="-128"/>
                 <a:ea typeface="Noto Sans KR ExtraBold" panose="020B0200000000000000" pitchFamily="34" charset="-128"/>
               </a:rPr>
-              <a:t>스탯</a:t>
-            </a:r>
-            <a:r>
-              <a:rPr lang="ko-KR" altLang="en-US" dirty="0" err="1" smtClean="0">
-                <a:solidFill>
-                  <a:schemeClr val="bg1">
-                    <a:lumMod val="95000"/>
-                  </a:schemeClr>
-                </a:solidFill>
-                <a:latin typeface="Noto Sans KR ExtraBold" panose="020B0200000000000000" pitchFamily="34" charset="-128"/>
-                <a:ea typeface="Noto Sans KR ExtraBold" panose="020B0200000000000000" pitchFamily="34" charset="-128"/>
-              </a:rPr>
-              <a:t>과</a:t>
+              <a:t>스탯과</a:t>
             </a:r>
             <a:r>
               <a:rPr lang="ko-KR" altLang="en-US" dirty="0" smtClean="0">
@@ -29313,7 +29633,19 @@
                 <a:latin typeface="Noto Sans KR Medium" panose="020B0200000000000000" pitchFamily="34" charset="-128"/>
                 <a:ea typeface="Noto Sans KR Medium" panose="020B0200000000000000" pitchFamily="34" charset="-128"/>
               </a:rPr>
-              <a:t>스탯</a:t>
+              <a:t>스탯을</a:t>
+            </a:r>
+            <a:r>
+              <a:rPr lang="ko-KR" altLang="en-US" sz="1000" dirty="0" smtClean="0">
+                <a:solidFill>
+                  <a:schemeClr val="bg1">
+                    <a:lumMod val="95000"/>
+                  </a:schemeClr>
+                </a:solidFill>
+                <a:latin typeface="Noto Sans KR Medium" panose="020B0200000000000000" pitchFamily="34" charset="-128"/>
+                <a:ea typeface="Noto Sans KR Medium" panose="020B0200000000000000" pitchFamily="34" charset="-128"/>
+              </a:rPr>
+              <a:t> 관리하는 </a:t>
             </a:r>
             <a:r>
               <a:rPr lang="ko-KR" altLang="en-US" sz="1000" dirty="0" err="1" smtClean="0">
@@ -29325,19 +29657,45 @@
                 <a:latin typeface="Noto Sans KR Medium" panose="020B0200000000000000" pitchFamily="34" charset="-128"/>
                 <a:ea typeface="Noto Sans KR Medium" panose="020B0200000000000000" pitchFamily="34" charset="-128"/>
               </a:rPr>
-              <a:t>을</a:t>
-            </a:r>
-            <a:r>
-              <a:rPr lang="ko-KR" altLang="en-US" sz="1000" dirty="0" smtClean="0">
-                <a:solidFill>
-                  <a:schemeClr val="bg1">
-                    <a:lumMod val="95000"/>
-                  </a:schemeClr>
-                </a:solidFill>
-                <a:latin typeface="Noto Sans KR Medium" panose="020B0200000000000000" pitchFamily="34" charset="-128"/>
-                <a:ea typeface="Noto Sans KR Medium" panose="020B0200000000000000" pitchFamily="34" charset="-128"/>
-              </a:rPr>
-              <a:t> 관리하는 </a:t>
+              <a:t>액터</a:t>
+            </a:r>
+            <a:r>
+              <a:rPr lang="ko-KR" altLang="en-US" sz="1000" dirty="0" smtClean="0">
+                <a:solidFill>
+                  <a:schemeClr val="bg1">
+                    <a:lumMod val="95000"/>
+                  </a:schemeClr>
+                </a:solidFill>
+                <a:latin typeface="Noto Sans KR Medium" panose="020B0200000000000000" pitchFamily="34" charset="-128"/>
+                <a:ea typeface="Noto Sans KR Medium" panose="020B0200000000000000" pitchFamily="34" charset="-128"/>
+              </a:rPr>
+              <a:t> 컴포넌트입니다</a:t>
+            </a:r>
+            <a:r>
+              <a:rPr lang="en-US" altLang="ko-KR" sz="1000" dirty="0" smtClean="0">
+                <a:solidFill>
+                  <a:schemeClr val="bg1">
+                    <a:lumMod val="95000"/>
+                  </a:schemeClr>
+                </a:solidFill>
+                <a:latin typeface="Noto Sans KR Medium" panose="020B0200000000000000" pitchFamily="34" charset="-128"/>
+                <a:ea typeface="Noto Sans KR Medium" panose="020B0200000000000000" pitchFamily="34" charset="-128"/>
+              </a:rPr>
+              <a:t>.</a:t>
+            </a:r>
+          </a:p>
+          <a:p>
+            <a:r>
+              <a:rPr lang="ko-KR" altLang="en-US" sz="1000" dirty="0" smtClean="0">
+                <a:solidFill>
+                  <a:schemeClr val="bg1">
+                    <a:lumMod val="95000"/>
+                  </a:schemeClr>
+                </a:solidFill>
+                <a:latin typeface="Noto Sans KR Medium" panose="020B0200000000000000" pitchFamily="34" charset="-128"/>
+                <a:ea typeface="Noto Sans KR Medium" panose="020B0200000000000000" pitchFamily="34" charset="-128"/>
+              </a:rPr>
+              <a:t>캐릭터가 가진 기본 </a:t>
             </a:r>
             <a:r>
               <a:rPr lang="ko-KR" altLang="en-US" sz="1000" dirty="0" err="1" smtClean="0">
@@ -29349,56 +29707,6 @@
                 <a:latin typeface="Noto Sans KR Medium" panose="020B0200000000000000" pitchFamily="34" charset="-128"/>
                 <a:ea typeface="Noto Sans KR Medium" panose="020B0200000000000000" pitchFamily="34" charset="-128"/>
               </a:rPr>
-              <a:t>액터</a:t>
-            </a:r>
-            <a:r>
-              <a:rPr lang="ko-KR" altLang="en-US" sz="1000" dirty="0" smtClean="0">
-                <a:solidFill>
-                  <a:schemeClr val="bg1">
-                    <a:lumMod val="95000"/>
-                  </a:schemeClr>
-                </a:solidFill>
-                <a:latin typeface="Noto Sans KR Medium" panose="020B0200000000000000" pitchFamily="34" charset="-128"/>
-                <a:ea typeface="Noto Sans KR Medium" panose="020B0200000000000000" pitchFamily="34" charset="-128"/>
-              </a:rPr>
-              <a:t> 컴포넌트입니다</a:t>
-            </a:r>
-            <a:r>
-              <a:rPr lang="en-US" altLang="ko-KR" sz="1000" dirty="0" smtClean="0">
-                <a:solidFill>
-                  <a:schemeClr val="bg1">
-                    <a:lumMod val="95000"/>
-                  </a:schemeClr>
-                </a:solidFill>
-                <a:latin typeface="Noto Sans KR Medium" panose="020B0200000000000000" pitchFamily="34" charset="-128"/>
-                <a:ea typeface="Noto Sans KR Medium" panose="020B0200000000000000" pitchFamily="34" charset="-128"/>
-              </a:rPr>
-              <a:t>.</a:t>
-            </a:r>
-          </a:p>
-          <a:p>
-            <a:r>
-              <a:rPr lang="ko-KR" altLang="en-US" sz="1000" dirty="0" smtClean="0">
-                <a:solidFill>
-                  <a:schemeClr val="bg1">
-                    <a:lumMod val="95000"/>
-                  </a:schemeClr>
-                </a:solidFill>
-                <a:latin typeface="Noto Sans KR Medium" panose="020B0200000000000000" pitchFamily="34" charset="-128"/>
-                <a:ea typeface="Noto Sans KR Medium" panose="020B0200000000000000" pitchFamily="34" charset="-128"/>
-              </a:rPr>
-              <a:t>캐릭터가 가진 기본 </a:t>
-            </a:r>
-            <a:r>
-              <a:rPr lang="ko-KR" altLang="en-US" sz="1000" dirty="0" err="1" smtClean="0">
-                <a:solidFill>
-                  <a:schemeClr val="bg1">
-                    <a:lumMod val="95000"/>
-                  </a:schemeClr>
-                </a:solidFill>
-                <a:latin typeface="Noto Sans KR Medium" panose="020B0200000000000000" pitchFamily="34" charset="-128"/>
-                <a:ea typeface="Noto Sans KR Medium" panose="020B0200000000000000" pitchFamily="34" charset="-128"/>
-              </a:rPr>
               <a:t>스택뿐만</a:t>
             </a:r>
             <a:r>
@@ -29411,19 +29719,7 @@
                 <a:latin typeface="Noto Sans KR Medium" panose="020B0200000000000000" pitchFamily="34" charset="-128"/>
                 <a:ea typeface="Noto Sans KR Medium" panose="020B0200000000000000" pitchFamily="34" charset="-128"/>
               </a:rPr>
-              <a:t> 아니라 장비와 </a:t>
-            </a:r>
-            <a:r>
-              <a:rPr lang="ko-KR" altLang="en-US" sz="1000" dirty="0" smtClean="0">
-                <a:solidFill>
-                  <a:schemeClr val="bg1">
-                    <a:lumMod val="95000"/>
-                  </a:schemeClr>
-                </a:solidFill>
-                <a:latin typeface="Noto Sans KR Medium" panose="020B0200000000000000" pitchFamily="34" charset="-128"/>
-                <a:ea typeface="Noto Sans KR Medium" panose="020B0200000000000000" pitchFamily="34" charset="-128"/>
-              </a:rPr>
-              <a:t>효과로 얻은 </a:t>
+              <a:t> 아니라 장비와 효과로 얻은 </a:t>
             </a:r>
             <a:r>
               <a:rPr lang="ko-KR" altLang="en-US" sz="1000" dirty="0" err="1" smtClean="0">
@@ -30531,31 +30827,7 @@
                 <a:latin typeface="Noto Sans KR Medium" panose="020B0200000000000000" pitchFamily="34" charset="-128"/>
                 <a:ea typeface="Noto Sans KR Medium" panose="020B0200000000000000" pitchFamily="34" charset="-128"/>
               </a:rPr>
-              <a:t> </a:t>
-            </a:r>
-            <a:r>
-              <a:rPr lang="ko-KR" altLang="en-US" sz="1000" dirty="0" smtClean="0">
-                <a:solidFill>
-                  <a:schemeClr val="bg1">
-                    <a:lumMod val="95000"/>
-                  </a:schemeClr>
-                </a:solidFill>
-                <a:latin typeface="Noto Sans KR Medium" panose="020B0200000000000000" pitchFamily="34" charset="-128"/>
-                <a:ea typeface="Noto Sans KR Medium" panose="020B0200000000000000" pitchFamily="34" charset="-128"/>
-              </a:rPr>
-              <a:t>적용하는 </a:t>
-            </a:r>
-            <a:r>
-              <a:rPr lang="ko-KR" altLang="en-US" sz="1000" dirty="0" smtClean="0">
-                <a:solidFill>
-                  <a:schemeClr val="bg1">
-                    <a:lumMod val="95000"/>
-                  </a:schemeClr>
-                </a:solidFill>
-                <a:latin typeface="Noto Sans KR Medium" panose="020B0200000000000000" pitchFamily="34" charset="-128"/>
-                <a:ea typeface="Noto Sans KR Medium" panose="020B0200000000000000" pitchFamily="34" charset="-128"/>
-              </a:rPr>
-              <a:t>효과 클래스입니다</a:t>
+              <a:t> 적용하는 효과 클래스입니다</a:t>
             </a:r>
             <a:r>
               <a:rPr lang="en-US" altLang="ko-KR" sz="1000" dirty="0" smtClean="0">
@@ -30581,19 +30853,7 @@
                 <a:latin typeface="Noto Sans KR Medium" panose="020B0200000000000000" pitchFamily="34" charset="-128"/>
                 <a:ea typeface="Noto Sans KR Medium" panose="020B0200000000000000" pitchFamily="34" charset="-128"/>
               </a:rPr>
-              <a:t>효과 </a:t>
-            </a:r>
-            <a:r>
-              <a:rPr lang="ko-KR" altLang="en-US" sz="1000" dirty="0" smtClean="0">
-                <a:solidFill>
-                  <a:schemeClr val="bg1">
-                    <a:lumMod val="95000"/>
-                  </a:schemeClr>
-                </a:solidFill>
-                <a:latin typeface="Noto Sans KR Medium" panose="020B0200000000000000" pitchFamily="34" charset="-128"/>
-                <a:ea typeface="Noto Sans KR Medium" panose="020B0200000000000000" pitchFamily="34" charset="-128"/>
-              </a:rPr>
-              <a:t>기능들이 </a:t>
+              <a:t>효과 기능들이 </a:t>
             </a:r>
             <a:r>
               <a:rPr lang="ko-KR" altLang="en-US" sz="1000" dirty="0" err="1">
@@ -30893,43 +31153,7 @@
                 <a:latin typeface="Noto Sans KR Medium" panose="020B0200000000000000" pitchFamily="34" charset="-128"/>
                 <a:ea typeface="Noto Sans KR Medium" panose="020B0200000000000000" pitchFamily="34" charset="-128"/>
               </a:rPr>
-              <a:t>를</a:t>
-            </a:r>
-            <a:r>
-              <a:rPr lang="ko-KR" altLang="en-US" sz="1000" dirty="0" smtClean="0">
-                <a:solidFill>
-                  <a:schemeClr val="bg1">
-                    <a:lumMod val="95000"/>
-                  </a:schemeClr>
-                </a:solidFill>
-                <a:latin typeface="Noto Sans KR Medium" panose="020B0200000000000000" pitchFamily="34" charset="-128"/>
-                <a:ea typeface="Noto Sans KR Medium" panose="020B0200000000000000" pitchFamily="34" charset="-128"/>
-              </a:rPr>
-              <a:t> 구현</a:t>
-            </a:r>
-            <a:r>
-              <a:rPr lang="ko-KR" altLang="en-US" sz="1000" dirty="0" smtClean="0">
-                <a:solidFill>
-                  <a:schemeClr val="bg1">
-                    <a:lumMod val="95000"/>
-                  </a:schemeClr>
-                </a:solidFill>
-                <a:latin typeface="Noto Sans KR Medium" panose="020B0200000000000000" pitchFamily="34" charset="-128"/>
-                <a:ea typeface="Noto Sans KR Medium" panose="020B0200000000000000" pitchFamily="34" charset="-128"/>
-              </a:rPr>
-              <a:t>하도록 </a:t>
-            </a:r>
-            <a:r>
-              <a:rPr lang="ko-KR" altLang="en-US" sz="1000" dirty="0" smtClean="0">
-                <a:solidFill>
-                  <a:schemeClr val="bg1">
-                    <a:lumMod val="95000"/>
-                  </a:schemeClr>
-                </a:solidFill>
-                <a:latin typeface="Noto Sans KR Medium" panose="020B0200000000000000" pitchFamily="34" charset="-128"/>
-                <a:ea typeface="Noto Sans KR Medium" panose="020B0200000000000000" pitchFamily="34" charset="-128"/>
-              </a:rPr>
-              <a:t>했습니다</a:t>
+              <a:t>를 구현하도록 했습니다</a:t>
             </a:r>
             <a:r>
               <a:rPr lang="en-US" altLang="ko-KR" sz="1000" dirty="0" smtClean="0">
@@ -31013,6 +31237,91 @@
               </a:rPr>
               <a:t>.</a:t>
             </a:r>
+          </a:p>
+          <a:p>
+            <a:r>
+              <a:rPr lang="ko-KR" altLang="en-US" sz="1000" dirty="0" smtClean="0">
+                <a:solidFill>
+                  <a:schemeClr val="bg1">
+                    <a:lumMod val="95000"/>
+                  </a:schemeClr>
+                </a:solidFill>
+                <a:latin typeface="Noto Sans KR Medium" panose="020B0200000000000000" pitchFamily="34" charset="-128"/>
+                <a:ea typeface="Noto Sans KR Medium" panose="020B0200000000000000" pitchFamily="34" charset="-128"/>
+              </a:rPr>
+              <a:t>상위 클래스의 </a:t>
+            </a:r>
+            <a:r>
+              <a:rPr lang="en-US" altLang="ko-KR" sz="1000" dirty="0" smtClean="0">
+                <a:solidFill>
+                  <a:schemeClr val="bg1">
+                    <a:lumMod val="95000"/>
+                  </a:schemeClr>
+                </a:solidFill>
+                <a:latin typeface="Noto Sans KR Medium" panose="020B0200000000000000" pitchFamily="34" charset="-128"/>
+                <a:ea typeface="Noto Sans KR Medium" panose="020B0200000000000000" pitchFamily="34" charset="-128"/>
+              </a:rPr>
+              <a:t>Activate()</a:t>
+            </a:r>
+            <a:r>
+              <a:rPr lang="ko-KR" altLang="en-US" sz="1000" dirty="0" smtClean="0">
+                <a:solidFill>
+                  <a:schemeClr val="bg1">
+                    <a:lumMod val="95000"/>
+                  </a:schemeClr>
+                </a:solidFill>
+                <a:latin typeface="Noto Sans KR Medium" panose="020B0200000000000000" pitchFamily="34" charset="-128"/>
+                <a:ea typeface="Noto Sans KR Medium" panose="020B0200000000000000" pitchFamily="34" charset="-128"/>
+              </a:rPr>
+              <a:t>를 호출하면</a:t>
+            </a:r>
+            <a:r>
+              <a:rPr lang="en-US" altLang="ko-KR" sz="1000" dirty="0" smtClean="0">
+                <a:solidFill>
+                  <a:schemeClr val="bg1">
+                    <a:lumMod val="95000"/>
+                  </a:schemeClr>
+                </a:solidFill>
+                <a:latin typeface="Noto Sans KR Medium" panose="020B0200000000000000" pitchFamily="34" charset="-128"/>
+                <a:ea typeface="Noto Sans KR Medium" panose="020B0200000000000000" pitchFamily="34" charset="-128"/>
+              </a:rPr>
+              <a:t>, </a:t>
+            </a:r>
+            <a:r>
+              <a:rPr lang="ko-KR" altLang="en-US" sz="1000" dirty="0" smtClean="0">
+                <a:solidFill>
+                  <a:schemeClr val="bg1">
+                    <a:lumMod val="95000"/>
+                  </a:schemeClr>
+                </a:solidFill>
+                <a:latin typeface="Noto Sans KR Medium" panose="020B0200000000000000" pitchFamily="34" charset="-128"/>
+                <a:ea typeface="Noto Sans KR Medium" panose="020B0200000000000000" pitchFamily="34" charset="-128"/>
+              </a:rPr>
+              <a:t>하위 클래스에서 재정의한 구체적인 효과가 실행되도록 구조를 잡았습니다</a:t>
+            </a:r>
+            <a:r>
+              <a:rPr lang="en-US" altLang="ko-KR" sz="1000" dirty="0" smtClean="0">
+                <a:solidFill>
+                  <a:schemeClr val="bg1">
+                    <a:lumMod val="95000"/>
+                  </a:schemeClr>
+                </a:solidFill>
+                <a:latin typeface="Noto Sans KR Medium" panose="020B0200000000000000" pitchFamily="34" charset="-128"/>
+                <a:ea typeface="Noto Sans KR Medium" panose="020B0200000000000000" pitchFamily="34" charset="-128"/>
+              </a:rPr>
+              <a:t>.</a:t>
+            </a:r>
+            <a:endParaRPr lang="en-US" altLang="ko-KR" sz="1000" dirty="0">
+              <a:solidFill>
+                <a:schemeClr val="bg1">
+                  <a:lumMod val="95000"/>
+                </a:schemeClr>
+              </a:solidFill>
+              <a:latin typeface="Noto Sans KR Medium" panose="020B0200000000000000" pitchFamily="34" charset="-128"/>
+              <a:ea typeface="Noto Sans KR Medium" panose="020B0200000000000000" pitchFamily="34" charset="-128"/>
+            </a:endParaRPr>
+          </a:p>
+          <a:p>
             <a:endParaRPr lang="en-US" altLang="ko-KR" sz="1000" dirty="0" smtClean="0">
               <a:solidFill>
                 <a:schemeClr val="bg1">
@@ -31034,67 +31343,7 @@
                 <a:latin typeface="Noto Sans KR Medium" panose="020B0200000000000000" pitchFamily="34" charset="-128"/>
                 <a:ea typeface="Noto Sans KR Medium" panose="020B0200000000000000" pitchFamily="34" charset="-128"/>
               </a:rPr>
-              <a:t>상위 클래스의 </a:t>
-            </a:r>
-            <a:r>
-              <a:rPr lang="en-US" altLang="ko-KR" sz="1000" dirty="0" smtClean="0">
-                <a:solidFill>
-                  <a:schemeClr val="bg1">
-                    <a:lumMod val="95000"/>
-                  </a:schemeClr>
-                </a:solidFill>
-                <a:latin typeface="Noto Sans KR Medium" panose="020B0200000000000000" pitchFamily="34" charset="-128"/>
-                <a:ea typeface="Noto Sans KR Medium" panose="020B0200000000000000" pitchFamily="34" charset="-128"/>
-              </a:rPr>
-              <a:t>Activate()</a:t>
-            </a:r>
-            <a:r>
-              <a:rPr lang="ko-KR" altLang="en-US" sz="1000" dirty="0" smtClean="0">
-                <a:solidFill>
-                  <a:schemeClr val="bg1">
-                    <a:lumMod val="95000"/>
-                  </a:schemeClr>
-                </a:solidFill>
-                <a:latin typeface="Noto Sans KR Medium" panose="020B0200000000000000" pitchFamily="34" charset="-128"/>
-                <a:ea typeface="Noto Sans KR Medium" panose="020B0200000000000000" pitchFamily="34" charset="-128"/>
-              </a:rPr>
-              <a:t>를 호출하면</a:t>
-            </a:r>
-            <a:r>
-              <a:rPr lang="en-US" altLang="ko-KR" sz="1000" dirty="0" smtClean="0">
-                <a:solidFill>
-                  <a:schemeClr val="bg1">
-                    <a:lumMod val="95000"/>
-                  </a:schemeClr>
-                </a:solidFill>
-                <a:latin typeface="Noto Sans KR Medium" panose="020B0200000000000000" pitchFamily="34" charset="-128"/>
-                <a:ea typeface="Noto Sans KR Medium" panose="020B0200000000000000" pitchFamily="34" charset="-128"/>
-              </a:rPr>
-              <a:t>, </a:t>
-            </a:r>
-            <a:r>
-              <a:rPr lang="ko-KR" altLang="en-US" sz="1000" dirty="0" smtClean="0">
-                <a:solidFill>
-                  <a:schemeClr val="bg1">
-                    <a:lumMod val="95000"/>
-                  </a:schemeClr>
-                </a:solidFill>
-                <a:latin typeface="Noto Sans KR Medium" panose="020B0200000000000000" pitchFamily="34" charset="-128"/>
-                <a:ea typeface="Noto Sans KR Medium" panose="020B0200000000000000" pitchFamily="34" charset="-128"/>
-              </a:rPr>
-              <a:t>하위 클래스에서 재정의한 구체적인 효과가 실행되도록 구조를 잡았습니다</a:t>
-            </a:r>
-            <a:r>
-              <a:rPr lang="en-US" altLang="ko-KR" sz="1000" dirty="0" smtClean="0">
-                <a:solidFill>
-                  <a:schemeClr val="bg1">
-                    <a:lumMod val="95000"/>
-                  </a:schemeClr>
-                </a:solidFill>
-                <a:latin typeface="Noto Sans KR Medium" panose="020B0200000000000000" pitchFamily="34" charset="-128"/>
-                <a:ea typeface="Noto Sans KR Medium" panose="020B0200000000000000" pitchFamily="34" charset="-128"/>
-              </a:rPr>
-              <a:t>.</a:t>
+              <a:t>주요 하위 클래스</a:t>
             </a:r>
             <a:endParaRPr lang="en-US" altLang="ko-KR" sz="1000" dirty="0">
               <a:solidFill>
@@ -31107,40 +31356,6 @@
             </a:endParaRPr>
           </a:p>
           <a:p>
-            <a:endParaRPr lang="en-US" altLang="ko-KR" sz="1000" dirty="0" smtClean="0">
-              <a:solidFill>
-                <a:schemeClr val="bg1">
-                  <a:lumMod val="95000"/>
-                </a:schemeClr>
-              </a:solidFill>
-              <a:latin typeface="Noto Sans KR Medium" panose="020B0200000000000000" pitchFamily="34" charset="-128"/>
-              <a:ea typeface="Noto Sans KR Medium" panose="020B0200000000000000" pitchFamily="34" charset="-128"/>
-            </a:endParaRPr>
-          </a:p>
-          <a:p>
-            <a:r>
-              <a:rPr lang="ko-KR" altLang="en-US" sz="1000" dirty="0" smtClean="0">
-                <a:solidFill>
-                  <a:schemeClr val="bg1">
-                    <a:lumMod val="95000"/>
-                  </a:schemeClr>
-                </a:solidFill>
-                <a:latin typeface="Noto Sans KR Medium" panose="020B0200000000000000" pitchFamily="34" charset="-128"/>
-                <a:ea typeface="Noto Sans KR Medium" panose="020B0200000000000000" pitchFamily="34" charset="-128"/>
-              </a:rPr>
-              <a:t>주요 하위 클래스</a:t>
-            </a:r>
-            <a:endParaRPr lang="en-US" altLang="ko-KR" sz="1000" dirty="0">
-              <a:solidFill>
-                <a:schemeClr val="bg1">
-                  <a:lumMod val="95000"/>
-                </a:schemeClr>
-              </a:solidFill>
-              <a:latin typeface="Noto Sans KR Medium" panose="020B0200000000000000" pitchFamily="34" charset="-128"/>
-              <a:ea typeface="Noto Sans KR Medium" panose="020B0200000000000000" pitchFamily="34" charset="-128"/>
-            </a:endParaRPr>
-          </a:p>
-          <a:p>
             <a:r>
               <a:rPr lang="en-US" altLang="ko-KR" sz="1000" dirty="0" err="1" smtClean="0">
                 <a:solidFill>
@@ -31529,15 +31744,6 @@
               </a:rPr>
               <a:t>)</a:t>
             </a:r>
-            <a:endParaRPr lang="en-US" altLang="ko-KR" sz="1000" dirty="0" smtClean="0">
-              <a:solidFill>
-                <a:schemeClr val="bg1">
-                  <a:lumMod val="95000"/>
-                </a:schemeClr>
-              </a:solidFill>
-              <a:latin typeface="Noto Sans KR Medium" panose="020B0200000000000000" pitchFamily="34" charset="-128"/>
-              <a:ea typeface="Noto Sans KR Medium" panose="020B0200000000000000" pitchFamily="34" charset="-128"/>
-            </a:endParaRPr>
           </a:p>
         </p:txBody>
       </p:sp>

--- a/Docs/UnrealEngine_문서_김정환.pptx
+++ b/Docs/UnrealEngine_문서_김정환.pptx
@@ -6845,12 +6845,620 @@
           <a:lstStyle/>
           <a:p>
             <a:r>
-              <a:rPr lang="ko-KR" altLang="en-US" dirty="0" err="1" smtClean="0"/>
-              <a:t>랜드스케이프</a:t>
-            </a:r>
-            <a:r>
-              <a:rPr lang="ko-KR" altLang="en-US" dirty="0" smtClean="0"/>
-              <a:t> 적용 후 에러 확</a:t>
+              <a:rPr lang="ko-KR" altLang="en-US" sz="1200" dirty="0" smtClean="0">
+                <a:solidFill>
+                  <a:schemeClr val="bg1">
+                    <a:lumMod val="95000"/>
+                  </a:schemeClr>
+                </a:solidFill>
+                <a:latin typeface="Noto Sans KR Medium" panose="020B0200000000000000" pitchFamily="34" charset="-128"/>
+                <a:ea typeface="Noto Sans KR Medium" panose="020B0200000000000000" pitchFamily="34" charset="-128"/>
+              </a:rPr>
+              <a:t>원인 분석</a:t>
+            </a:r>
+            <a:endParaRPr lang="en-US" altLang="ko-KR" sz="1200" dirty="0" smtClean="0">
+              <a:solidFill>
+                <a:schemeClr val="bg1">
+                  <a:lumMod val="95000"/>
+                </a:schemeClr>
+              </a:solidFill>
+              <a:latin typeface="Noto Sans KR Medium" panose="020B0200000000000000" pitchFamily="34" charset="-128"/>
+              <a:ea typeface="Noto Sans KR Medium" panose="020B0200000000000000" pitchFamily="34" charset="-128"/>
+            </a:endParaRPr>
+          </a:p>
+          <a:p>
+            <a:r>
+              <a:rPr lang="ko-KR" altLang="en-US" sz="1200" dirty="0" err="1" smtClean="0">
+                <a:solidFill>
+                  <a:schemeClr val="bg1">
+                    <a:lumMod val="95000"/>
+                  </a:schemeClr>
+                </a:solidFill>
+                <a:latin typeface="Noto Sans KR Medium" panose="020B0200000000000000" pitchFamily="34" charset="-128"/>
+                <a:ea typeface="Noto Sans KR Medium" panose="020B0200000000000000" pitchFamily="34" charset="-128"/>
+              </a:rPr>
+              <a:t>몬스터</a:t>
+            </a:r>
+            <a:r>
+              <a:rPr lang="ko-KR" altLang="en-US" sz="1200" dirty="0" smtClean="0">
+                <a:solidFill>
+                  <a:schemeClr val="bg1">
+                    <a:lumMod val="95000"/>
+                  </a:schemeClr>
+                </a:solidFill>
+                <a:latin typeface="Noto Sans KR Medium" panose="020B0200000000000000" pitchFamily="34" charset="-128"/>
+                <a:ea typeface="Noto Sans KR Medium" panose="020B0200000000000000" pitchFamily="34" charset="-128"/>
+              </a:rPr>
+              <a:t> </a:t>
+            </a:r>
+            <a:r>
+              <a:rPr lang="ko-KR" altLang="en-US" sz="1200" dirty="0" err="1" smtClean="0">
+                <a:solidFill>
+                  <a:schemeClr val="bg1">
+                    <a:lumMod val="95000"/>
+                  </a:schemeClr>
+                </a:solidFill>
+                <a:latin typeface="Noto Sans KR Medium" panose="020B0200000000000000" pitchFamily="34" charset="-128"/>
+                <a:ea typeface="Noto Sans KR Medium" panose="020B0200000000000000" pitchFamily="34" charset="-128"/>
+              </a:rPr>
+              <a:t>액터를</a:t>
+            </a:r>
+            <a:r>
+              <a:rPr lang="ko-KR" altLang="en-US" sz="1200" dirty="0" smtClean="0">
+                <a:solidFill>
+                  <a:schemeClr val="bg1">
+                    <a:lumMod val="95000"/>
+                  </a:schemeClr>
+                </a:solidFill>
+                <a:latin typeface="Noto Sans KR Medium" panose="020B0200000000000000" pitchFamily="34" charset="-128"/>
+                <a:ea typeface="Noto Sans KR Medium" panose="020B0200000000000000" pitchFamily="34" charset="-128"/>
+              </a:rPr>
+              <a:t> </a:t>
+            </a:r>
+            <a:r>
+              <a:rPr lang="ko-KR" altLang="en-US" sz="1200" dirty="0" err="1" smtClean="0">
+                <a:solidFill>
+                  <a:schemeClr val="bg1">
+                    <a:lumMod val="95000"/>
+                  </a:schemeClr>
+                </a:solidFill>
+                <a:latin typeface="Noto Sans KR Medium" panose="020B0200000000000000" pitchFamily="34" charset="-128"/>
+                <a:ea typeface="Noto Sans KR Medium" panose="020B0200000000000000" pitchFamily="34" charset="-128"/>
+              </a:rPr>
+              <a:t>스폰</a:t>
+            </a:r>
+            <a:r>
+              <a:rPr lang="ko-KR" altLang="en-US" sz="1200" dirty="0" smtClean="0">
+                <a:solidFill>
+                  <a:schemeClr val="bg1">
+                    <a:lumMod val="95000"/>
+                  </a:schemeClr>
+                </a:solidFill>
+                <a:latin typeface="Noto Sans KR Medium" panose="020B0200000000000000" pitchFamily="34" charset="-128"/>
+                <a:ea typeface="Noto Sans KR Medium" panose="020B0200000000000000" pitchFamily="34" charset="-128"/>
+              </a:rPr>
+              <a:t> 시</a:t>
+            </a:r>
+            <a:r>
+              <a:rPr lang="en-US" altLang="ko-KR" sz="1200" dirty="0" smtClean="0">
+                <a:solidFill>
+                  <a:schemeClr val="bg1">
+                    <a:lumMod val="95000"/>
+                  </a:schemeClr>
+                </a:solidFill>
+                <a:latin typeface="Noto Sans KR Medium" panose="020B0200000000000000" pitchFamily="34" charset="-128"/>
+                <a:ea typeface="Noto Sans KR Medium" panose="020B0200000000000000" pitchFamily="34" charset="-128"/>
+              </a:rPr>
+              <a:t>, </a:t>
+            </a:r>
+            <a:r>
+              <a:rPr lang="en-US" altLang="ko-KR" sz="1200" dirty="0" err="1" smtClean="0">
+                <a:solidFill>
+                  <a:schemeClr val="bg1">
+                    <a:lumMod val="95000"/>
+                  </a:schemeClr>
+                </a:solidFill>
+                <a:latin typeface="Noto Sans KR Medium" panose="020B0200000000000000" pitchFamily="34" charset="-128"/>
+                <a:ea typeface="Noto Sans KR Medium" panose="020B0200000000000000" pitchFamily="34" charset="-128"/>
+              </a:rPr>
+              <a:t>nullptr</a:t>
+            </a:r>
+            <a:r>
+              <a:rPr lang="en-US" altLang="ko-KR" sz="1200" dirty="0" smtClean="0">
+                <a:solidFill>
+                  <a:schemeClr val="bg1">
+                    <a:lumMod val="95000"/>
+                  </a:schemeClr>
+                </a:solidFill>
+                <a:latin typeface="Noto Sans KR Medium" panose="020B0200000000000000" pitchFamily="34" charset="-128"/>
+                <a:ea typeface="Noto Sans KR Medium" panose="020B0200000000000000" pitchFamily="34" charset="-128"/>
+              </a:rPr>
+              <a:t> </a:t>
+            </a:r>
+            <a:r>
+              <a:rPr lang="ko-KR" altLang="en-US" sz="1200" dirty="0" smtClean="0">
+                <a:solidFill>
+                  <a:schemeClr val="bg1">
+                    <a:lumMod val="95000"/>
+                  </a:schemeClr>
+                </a:solidFill>
+                <a:latin typeface="Noto Sans KR Medium" panose="020B0200000000000000" pitchFamily="34" charset="-128"/>
+                <a:ea typeface="Noto Sans KR Medium" panose="020B0200000000000000" pitchFamily="34" charset="-128"/>
+              </a:rPr>
+              <a:t>반환으로 인한 에러</a:t>
+            </a:r>
+            <a:r>
+              <a:rPr lang="en-US" altLang="ko-KR" sz="1200" dirty="0" smtClean="0">
+                <a:solidFill>
+                  <a:schemeClr val="bg1">
+                    <a:lumMod val="95000"/>
+                  </a:schemeClr>
+                </a:solidFill>
+                <a:latin typeface="Noto Sans KR Medium" panose="020B0200000000000000" pitchFamily="34" charset="-128"/>
+                <a:ea typeface="Noto Sans KR Medium" panose="020B0200000000000000" pitchFamily="34" charset="-128"/>
+              </a:rPr>
+              <a:t>.</a:t>
+            </a:r>
+          </a:p>
+          <a:p>
+            <a:r>
+              <a:rPr lang="ko-KR" altLang="en-US" sz="1200" dirty="0" smtClean="0">
+                <a:solidFill>
+                  <a:schemeClr val="bg1">
+                    <a:lumMod val="95000"/>
+                  </a:schemeClr>
+                </a:solidFill>
+                <a:latin typeface="Noto Sans KR Medium" panose="020B0200000000000000" pitchFamily="34" charset="-128"/>
+                <a:ea typeface="Noto Sans KR Medium" panose="020B0200000000000000" pitchFamily="34" charset="-128"/>
+              </a:rPr>
+              <a:t>기존 테스트에 쓰던 레벨에선 발생하지 않는 것을 확인</a:t>
+            </a:r>
+            <a:r>
+              <a:rPr lang="en-US" altLang="ko-KR" sz="1200" dirty="0" smtClean="0">
+                <a:solidFill>
+                  <a:schemeClr val="bg1">
+                    <a:lumMod val="95000"/>
+                  </a:schemeClr>
+                </a:solidFill>
+                <a:latin typeface="Noto Sans KR Medium" panose="020B0200000000000000" pitchFamily="34" charset="-128"/>
+                <a:ea typeface="Noto Sans KR Medium" panose="020B0200000000000000" pitchFamily="34" charset="-128"/>
+              </a:rPr>
+              <a:t>.</a:t>
+            </a:r>
+          </a:p>
+          <a:p>
+            <a:r>
+              <a:rPr lang="ko-KR" altLang="en-US" sz="1200" dirty="0" smtClean="0">
+                <a:solidFill>
+                  <a:schemeClr val="bg1">
+                    <a:lumMod val="95000"/>
+                  </a:schemeClr>
+                </a:solidFill>
+                <a:latin typeface="Noto Sans KR Medium" panose="020B0200000000000000" pitchFamily="34" charset="-128"/>
+                <a:ea typeface="Noto Sans KR Medium" panose="020B0200000000000000" pitchFamily="34" charset="-128"/>
+              </a:rPr>
+              <a:t>새로 작업 중인 레벨과의 차이점이 </a:t>
+            </a:r>
+            <a:r>
+              <a:rPr lang="ko-KR" altLang="en-US" sz="1200" dirty="0" err="1" smtClean="0">
+                <a:solidFill>
+                  <a:schemeClr val="bg1">
+                    <a:lumMod val="95000"/>
+                  </a:schemeClr>
+                </a:solidFill>
+                <a:latin typeface="Noto Sans KR Medium" panose="020B0200000000000000" pitchFamily="34" charset="-128"/>
+                <a:ea typeface="Noto Sans KR Medium" panose="020B0200000000000000" pitchFamily="34" charset="-128"/>
+              </a:rPr>
+              <a:t>랜드</a:t>
+            </a:r>
+            <a:r>
+              <a:rPr lang="ko-KR" altLang="en-US" sz="1200" dirty="0" smtClean="0">
+                <a:solidFill>
+                  <a:schemeClr val="bg1">
+                    <a:lumMod val="95000"/>
+                  </a:schemeClr>
+                </a:solidFill>
+                <a:latin typeface="Noto Sans KR Medium" panose="020B0200000000000000" pitchFamily="34" charset="-128"/>
+                <a:ea typeface="Noto Sans KR Medium" panose="020B0200000000000000" pitchFamily="34" charset="-128"/>
+              </a:rPr>
+              <a:t> </a:t>
+            </a:r>
+            <a:r>
+              <a:rPr lang="ko-KR" altLang="en-US" sz="1200" dirty="0" err="1" smtClean="0">
+                <a:solidFill>
+                  <a:schemeClr val="bg1">
+                    <a:lumMod val="95000"/>
+                  </a:schemeClr>
+                </a:solidFill>
+                <a:latin typeface="Noto Sans KR Medium" panose="020B0200000000000000" pitchFamily="34" charset="-128"/>
+                <a:ea typeface="Noto Sans KR Medium" panose="020B0200000000000000" pitchFamily="34" charset="-128"/>
+              </a:rPr>
+              <a:t>스케이프</a:t>
+            </a:r>
+            <a:r>
+              <a:rPr lang="ko-KR" altLang="en-US" sz="1200" dirty="0" smtClean="0">
+                <a:solidFill>
+                  <a:schemeClr val="bg1">
+                    <a:lumMod val="95000"/>
+                  </a:schemeClr>
+                </a:solidFill>
+                <a:latin typeface="Noto Sans KR Medium" panose="020B0200000000000000" pitchFamily="34" charset="-128"/>
+                <a:ea typeface="Noto Sans KR Medium" panose="020B0200000000000000" pitchFamily="34" charset="-128"/>
+              </a:rPr>
+              <a:t> 사용 여부</a:t>
+            </a:r>
+            <a:r>
+              <a:rPr lang="en-US" altLang="ko-KR" sz="1200" dirty="0" smtClean="0">
+                <a:solidFill>
+                  <a:schemeClr val="bg1">
+                    <a:lumMod val="95000"/>
+                  </a:schemeClr>
+                </a:solidFill>
+                <a:latin typeface="Noto Sans KR Medium" panose="020B0200000000000000" pitchFamily="34" charset="-128"/>
+                <a:ea typeface="Noto Sans KR Medium" panose="020B0200000000000000" pitchFamily="34" charset="-128"/>
+              </a:rPr>
+              <a:t>.</a:t>
+            </a:r>
+          </a:p>
+          <a:p>
+            <a:endParaRPr lang="en-US" altLang="ko-KR" sz="1200" dirty="0" smtClean="0">
+              <a:solidFill>
+                <a:schemeClr val="bg1">
+                  <a:lumMod val="95000"/>
+                </a:schemeClr>
+              </a:solidFill>
+              <a:latin typeface="Noto Sans KR Medium" panose="020B0200000000000000" pitchFamily="34" charset="-128"/>
+              <a:ea typeface="Noto Sans KR Medium" panose="020B0200000000000000" pitchFamily="34" charset="-128"/>
+            </a:endParaRPr>
+          </a:p>
+          <a:p>
+            <a:r>
+              <a:rPr lang="ko-KR" altLang="en-US" sz="1200" dirty="0" smtClean="0">
+                <a:solidFill>
+                  <a:schemeClr val="bg1">
+                    <a:lumMod val="95000"/>
+                  </a:schemeClr>
+                </a:solidFill>
+                <a:latin typeface="Noto Sans KR Medium" panose="020B0200000000000000" pitchFamily="34" charset="-128"/>
+                <a:ea typeface="Noto Sans KR Medium" panose="020B0200000000000000" pitchFamily="34" charset="-128"/>
+              </a:rPr>
+              <a:t>기존 테스트 레벨에서 바닥은 넓은 </a:t>
+            </a:r>
+            <a:r>
+              <a:rPr lang="ko-KR" altLang="en-US" sz="1200" dirty="0" err="1" smtClean="0">
+                <a:solidFill>
+                  <a:schemeClr val="bg1">
+                    <a:lumMod val="95000"/>
+                  </a:schemeClr>
+                </a:solidFill>
+                <a:latin typeface="Noto Sans KR Medium" panose="020B0200000000000000" pitchFamily="34" charset="-128"/>
+                <a:ea typeface="Noto Sans KR Medium" panose="020B0200000000000000" pitchFamily="34" charset="-128"/>
+              </a:rPr>
+              <a:t>큐브를</a:t>
+            </a:r>
+            <a:r>
+              <a:rPr lang="ko-KR" altLang="en-US" sz="1200" dirty="0" smtClean="0">
+                <a:solidFill>
+                  <a:schemeClr val="bg1">
+                    <a:lumMod val="95000"/>
+                  </a:schemeClr>
+                </a:solidFill>
+                <a:latin typeface="Noto Sans KR Medium" panose="020B0200000000000000" pitchFamily="34" charset="-128"/>
+                <a:ea typeface="Noto Sans KR Medium" panose="020B0200000000000000" pitchFamily="34" charset="-128"/>
+              </a:rPr>
+              <a:t> 사용</a:t>
+            </a:r>
+            <a:r>
+              <a:rPr lang="en-US" altLang="ko-KR" sz="1200" dirty="0" smtClean="0">
+                <a:solidFill>
+                  <a:schemeClr val="bg1">
+                    <a:lumMod val="95000"/>
+                  </a:schemeClr>
+                </a:solidFill>
+                <a:latin typeface="Noto Sans KR Medium" panose="020B0200000000000000" pitchFamily="34" charset="-128"/>
+                <a:ea typeface="Noto Sans KR Medium" panose="020B0200000000000000" pitchFamily="34" charset="-128"/>
+              </a:rPr>
+              <a:t>.</a:t>
+            </a:r>
+          </a:p>
+          <a:p>
+            <a:r>
+              <a:rPr lang="ko-KR" altLang="en-US" sz="1200" dirty="0" err="1" smtClean="0">
+                <a:solidFill>
+                  <a:schemeClr val="bg1">
+                    <a:lumMod val="95000"/>
+                  </a:schemeClr>
+                </a:solidFill>
+                <a:latin typeface="Noto Sans KR Medium" panose="020B0200000000000000" pitchFamily="34" charset="-128"/>
+                <a:ea typeface="Noto Sans KR Medium" panose="020B0200000000000000" pitchFamily="34" charset="-128"/>
+              </a:rPr>
+              <a:t>랜드</a:t>
+            </a:r>
+            <a:r>
+              <a:rPr lang="ko-KR" altLang="en-US" sz="1200" dirty="0" smtClean="0">
+                <a:solidFill>
+                  <a:schemeClr val="bg1">
+                    <a:lumMod val="95000"/>
+                  </a:schemeClr>
+                </a:solidFill>
+                <a:latin typeface="Noto Sans KR Medium" panose="020B0200000000000000" pitchFamily="34" charset="-128"/>
+                <a:ea typeface="Noto Sans KR Medium" panose="020B0200000000000000" pitchFamily="34" charset="-128"/>
+              </a:rPr>
+              <a:t> </a:t>
+            </a:r>
+            <a:r>
+              <a:rPr lang="ko-KR" altLang="en-US" sz="1200" dirty="0" err="1" smtClean="0">
+                <a:solidFill>
+                  <a:schemeClr val="bg1">
+                    <a:lumMod val="95000"/>
+                  </a:schemeClr>
+                </a:solidFill>
+                <a:latin typeface="Noto Sans KR Medium" panose="020B0200000000000000" pitchFamily="34" charset="-128"/>
+                <a:ea typeface="Noto Sans KR Medium" panose="020B0200000000000000" pitchFamily="34" charset="-128"/>
+              </a:rPr>
+              <a:t>스케이프는</a:t>
+            </a:r>
+            <a:r>
+              <a:rPr lang="ko-KR" altLang="en-US" sz="1200" dirty="0" smtClean="0">
+                <a:solidFill>
+                  <a:schemeClr val="bg1">
+                    <a:lumMod val="95000"/>
+                  </a:schemeClr>
+                </a:solidFill>
+                <a:latin typeface="Noto Sans KR Medium" panose="020B0200000000000000" pitchFamily="34" charset="-128"/>
+                <a:ea typeface="Noto Sans KR Medium" panose="020B0200000000000000" pitchFamily="34" charset="-128"/>
+              </a:rPr>
+              <a:t> 일반 </a:t>
+            </a:r>
+            <a:r>
+              <a:rPr lang="ko-KR" altLang="en-US" sz="1200" dirty="0" err="1" smtClean="0">
+                <a:solidFill>
+                  <a:schemeClr val="bg1">
+                    <a:lumMod val="95000"/>
+                  </a:schemeClr>
+                </a:solidFill>
+                <a:latin typeface="Noto Sans KR Medium" panose="020B0200000000000000" pitchFamily="34" charset="-128"/>
+                <a:ea typeface="Noto Sans KR Medium" panose="020B0200000000000000" pitchFamily="34" charset="-128"/>
+              </a:rPr>
+              <a:t>스태틱</a:t>
+            </a:r>
+            <a:r>
+              <a:rPr lang="ko-KR" altLang="en-US" sz="1200" dirty="0" smtClean="0">
+                <a:solidFill>
+                  <a:schemeClr val="bg1">
+                    <a:lumMod val="95000"/>
+                  </a:schemeClr>
+                </a:solidFill>
+                <a:latin typeface="Noto Sans KR Medium" panose="020B0200000000000000" pitchFamily="34" charset="-128"/>
+                <a:ea typeface="Noto Sans KR Medium" panose="020B0200000000000000" pitchFamily="34" charset="-128"/>
+              </a:rPr>
+              <a:t> </a:t>
+            </a:r>
+            <a:r>
+              <a:rPr lang="ko-KR" altLang="en-US" sz="1200" dirty="0" err="1" smtClean="0">
+                <a:solidFill>
+                  <a:schemeClr val="bg1">
+                    <a:lumMod val="95000"/>
+                  </a:schemeClr>
+                </a:solidFill>
+                <a:latin typeface="Noto Sans KR Medium" panose="020B0200000000000000" pitchFamily="34" charset="-128"/>
+                <a:ea typeface="Noto Sans KR Medium" panose="020B0200000000000000" pitchFamily="34" charset="-128"/>
+              </a:rPr>
+              <a:t>메쉬와</a:t>
+            </a:r>
+            <a:r>
+              <a:rPr lang="ko-KR" altLang="en-US" sz="1200" dirty="0" smtClean="0">
+                <a:solidFill>
+                  <a:schemeClr val="bg1">
+                    <a:lumMod val="95000"/>
+                  </a:schemeClr>
+                </a:solidFill>
+                <a:latin typeface="Noto Sans KR Medium" panose="020B0200000000000000" pitchFamily="34" charset="-128"/>
+                <a:ea typeface="Noto Sans KR Medium" panose="020B0200000000000000" pitchFamily="34" charset="-128"/>
+              </a:rPr>
+              <a:t> 달리 충돌 설정과 </a:t>
+            </a:r>
+            <a:r>
+              <a:rPr lang="en-US" altLang="ko-KR" sz="1200" dirty="0" smtClean="0">
+                <a:solidFill>
+                  <a:schemeClr val="bg1">
+                    <a:lumMod val="95000"/>
+                  </a:schemeClr>
+                </a:solidFill>
+                <a:latin typeface="Noto Sans KR Medium" panose="020B0200000000000000" pitchFamily="34" charset="-128"/>
+                <a:ea typeface="Noto Sans KR Medium" panose="020B0200000000000000" pitchFamily="34" charset="-128"/>
+              </a:rPr>
+              <a:t>Z</a:t>
+            </a:r>
+            <a:r>
+              <a:rPr lang="ko-KR" altLang="en-US" sz="1200" dirty="0" smtClean="0">
+                <a:solidFill>
+                  <a:schemeClr val="bg1">
+                    <a:lumMod val="95000"/>
+                  </a:schemeClr>
+                </a:solidFill>
+                <a:latin typeface="Noto Sans KR Medium" panose="020B0200000000000000" pitchFamily="34" charset="-128"/>
+                <a:ea typeface="Noto Sans KR Medium" panose="020B0200000000000000" pitchFamily="34" charset="-128"/>
+              </a:rPr>
+              <a:t>축 높이 문제가 있었음</a:t>
+            </a:r>
+            <a:endParaRPr lang="en-US" altLang="ko-KR" sz="1200" dirty="0" smtClean="0">
+              <a:solidFill>
+                <a:schemeClr val="bg1">
+                  <a:lumMod val="95000"/>
+                </a:schemeClr>
+              </a:solidFill>
+              <a:latin typeface="Noto Sans KR Medium" panose="020B0200000000000000" pitchFamily="34" charset="-128"/>
+              <a:ea typeface="Noto Sans KR Medium" panose="020B0200000000000000" pitchFamily="34" charset="-128"/>
+            </a:endParaRPr>
+          </a:p>
+          <a:p>
+            <a:endParaRPr lang="en-US" altLang="ko-KR" sz="1200" dirty="0" smtClean="0">
+              <a:solidFill>
+                <a:schemeClr val="bg1">
+                  <a:lumMod val="95000"/>
+                </a:schemeClr>
+              </a:solidFill>
+              <a:latin typeface="Noto Sans KR Medium" panose="020B0200000000000000" pitchFamily="34" charset="-128"/>
+              <a:ea typeface="Noto Sans KR Medium" panose="020B0200000000000000" pitchFamily="34" charset="-128"/>
+            </a:endParaRPr>
+          </a:p>
+          <a:p>
+            <a:r>
+              <a:rPr lang="ko-KR" altLang="en-US" sz="1200" dirty="0" err="1" smtClean="0">
+                <a:solidFill>
+                  <a:schemeClr val="bg1">
+                    <a:lumMod val="95000"/>
+                  </a:schemeClr>
+                </a:solidFill>
+                <a:latin typeface="Noto Sans KR Medium" panose="020B0200000000000000" pitchFamily="34" charset="-128"/>
+                <a:ea typeface="Noto Sans KR Medium" panose="020B0200000000000000" pitchFamily="34" charset="-128"/>
+              </a:rPr>
+              <a:t>몬스터</a:t>
+            </a:r>
+            <a:r>
+              <a:rPr lang="ko-KR" altLang="en-US" sz="1200" dirty="0" smtClean="0">
+                <a:solidFill>
+                  <a:schemeClr val="bg1">
+                    <a:lumMod val="95000"/>
+                  </a:schemeClr>
+                </a:solidFill>
+                <a:latin typeface="Noto Sans KR Medium" panose="020B0200000000000000" pitchFamily="34" charset="-128"/>
+                <a:ea typeface="Noto Sans KR Medium" panose="020B0200000000000000" pitchFamily="34" charset="-128"/>
+              </a:rPr>
+              <a:t> </a:t>
+            </a:r>
+            <a:r>
+              <a:rPr lang="ko-KR" altLang="en-US" sz="1200" dirty="0" err="1" smtClean="0">
+                <a:solidFill>
+                  <a:schemeClr val="bg1">
+                    <a:lumMod val="95000"/>
+                  </a:schemeClr>
+                </a:solidFill>
+                <a:latin typeface="Noto Sans KR Medium" panose="020B0200000000000000" pitchFamily="34" charset="-128"/>
+                <a:ea typeface="Noto Sans KR Medium" panose="020B0200000000000000" pitchFamily="34" charset="-128"/>
+              </a:rPr>
+              <a:t>액터</a:t>
+            </a:r>
+            <a:r>
+              <a:rPr lang="ko-KR" altLang="en-US" sz="1200" dirty="0" smtClean="0">
+                <a:solidFill>
+                  <a:schemeClr val="bg1">
+                    <a:lumMod val="95000"/>
+                  </a:schemeClr>
+                </a:solidFill>
+                <a:latin typeface="Noto Sans KR Medium" panose="020B0200000000000000" pitchFamily="34" charset="-128"/>
+                <a:ea typeface="Noto Sans KR Medium" panose="020B0200000000000000" pitchFamily="34" charset="-128"/>
+              </a:rPr>
+              <a:t> </a:t>
+            </a:r>
+            <a:r>
+              <a:rPr lang="ko-KR" altLang="en-US" sz="1200" dirty="0" err="1" smtClean="0">
+                <a:solidFill>
+                  <a:schemeClr val="bg1">
+                    <a:lumMod val="95000"/>
+                  </a:schemeClr>
+                </a:solidFill>
+                <a:latin typeface="Noto Sans KR Medium" panose="020B0200000000000000" pitchFamily="34" charset="-128"/>
+                <a:ea typeface="Noto Sans KR Medium" panose="020B0200000000000000" pitchFamily="34" charset="-128"/>
+              </a:rPr>
+              <a:t>스폰</a:t>
+            </a:r>
+            <a:r>
+              <a:rPr lang="ko-KR" altLang="en-US" sz="1200" dirty="0" smtClean="0">
+                <a:solidFill>
+                  <a:schemeClr val="bg1">
+                    <a:lumMod val="95000"/>
+                  </a:schemeClr>
+                </a:solidFill>
+                <a:latin typeface="Noto Sans KR Medium" panose="020B0200000000000000" pitchFamily="34" charset="-128"/>
+                <a:ea typeface="Noto Sans KR Medium" panose="020B0200000000000000" pitchFamily="34" charset="-128"/>
+              </a:rPr>
+              <a:t> 시</a:t>
+            </a:r>
+            <a:r>
+              <a:rPr lang="en-US" altLang="ko-KR" sz="1200" dirty="0" smtClean="0">
+                <a:solidFill>
+                  <a:schemeClr val="bg1">
+                    <a:lumMod val="95000"/>
+                  </a:schemeClr>
+                </a:solidFill>
+                <a:latin typeface="Noto Sans KR Medium" panose="020B0200000000000000" pitchFamily="34" charset="-128"/>
+                <a:ea typeface="Noto Sans KR Medium" panose="020B0200000000000000" pitchFamily="34" charset="-128"/>
+              </a:rPr>
+              <a:t>, </a:t>
+            </a:r>
+            <a:r>
+              <a:rPr lang="ko-KR" altLang="en-US" sz="1200" dirty="0" err="1" smtClean="0">
+                <a:solidFill>
+                  <a:schemeClr val="bg1">
+                    <a:lumMod val="95000"/>
+                  </a:schemeClr>
+                </a:solidFill>
+                <a:latin typeface="Noto Sans KR Medium" panose="020B0200000000000000" pitchFamily="34" charset="-128"/>
+                <a:ea typeface="Noto Sans KR Medium" panose="020B0200000000000000" pitchFamily="34" charset="-128"/>
+              </a:rPr>
+              <a:t>랜드</a:t>
+            </a:r>
+            <a:r>
+              <a:rPr lang="ko-KR" altLang="en-US" sz="1200" dirty="0" smtClean="0">
+                <a:solidFill>
+                  <a:schemeClr val="bg1">
+                    <a:lumMod val="95000"/>
+                  </a:schemeClr>
+                </a:solidFill>
+                <a:latin typeface="Noto Sans KR Medium" panose="020B0200000000000000" pitchFamily="34" charset="-128"/>
+                <a:ea typeface="Noto Sans KR Medium" panose="020B0200000000000000" pitchFamily="34" charset="-128"/>
+              </a:rPr>
+              <a:t> </a:t>
+            </a:r>
+            <a:r>
+              <a:rPr lang="ko-KR" altLang="en-US" sz="1200" dirty="0" err="1" smtClean="0">
+                <a:solidFill>
+                  <a:schemeClr val="bg1">
+                    <a:lumMod val="95000"/>
+                  </a:schemeClr>
+                </a:solidFill>
+                <a:latin typeface="Noto Sans KR Medium" panose="020B0200000000000000" pitchFamily="34" charset="-128"/>
+                <a:ea typeface="Noto Sans KR Medium" panose="020B0200000000000000" pitchFamily="34" charset="-128"/>
+              </a:rPr>
+              <a:t>스케이프와</a:t>
+            </a:r>
+            <a:r>
+              <a:rPr lang="ko-KR" altLang="en-US" sz="1200" dirty="0" smtClean="0">
+                <a:solidFill>
+                  <a:schemeClr val="bg1">
+                    <a:lumMod val="95000"/>
+                  </a:schemeClr>
+                </a:solidFill>
+                <a:latin typeface="Noto Sans KR Medium" panose="020B0200000000000000" pitchFamily="34" charset="-128"/>
+                <a:ea typeface="Noto Sans KR Medium" panose="020B0200000000000000" pitchFamily="34" charset="-128"/>
+              </a:rPr>
+              <a:t> 충돌하며 실패 처리되어 </a:t>
+            </a:r>
+            <a:r>
+              <a:rPr lang="en-US" altLang="ko-KR" sz="1200" dirty="0" err="1" smtClean="0">
+                <a:solidFill>
+                  <a:schemeClr val="bg1">
+                    <a:lumMod val="95000"/>
+                  </a:schemeClr>
+                </a:solidFill>
+                <a:latin typeface="Noto Sans KR Medium" panose="020B0200000000000000" pitchFamily="34" charset="-128"/>
+                <a:ea typeface="Noto Sans KR Medium" panose="020B0200000000000000" pitchFamily="34" charset="-128"/>
+              </a:rPr>
+              <a:t>nullptr</a:t>
+            </a:r>
+            <a:r>
+              <a:rPr lang="ko-KR" altLang="en-US" sz="1200" dirty="0" smtClean="0">
+                <a:solidFill>
+                  <a:schemeClr val="bg1">
+                    <a:lumMod val="95000"/>
+                  </a:schemeClr>
+                </a:solidFill>
+                <a:latin typeface="Noto Sans KR Medium" panose="020B0200000000000000" pitchFamily="34" charset="-128"/>
+                <a:ea typeface="Noto Sans KR Medium" panose="020B0200000000000000" pitchFamily="34" charset="-128"/>
+              </a:rPr>
+              <a:t>이 반환된 것</a:t>
             </a:r>
             <a:endParaRPr lang="en-US" altLang="ko-KR" sz="1200" dirty="0" smtClean="0">
               <a:solidFill>
@@ -23817,19 +24425,7 @@
                 <a:latin typeface="Noto Sans KR Medium" panose="020B0200000000000000" pitchFamily="34" charset="-128"/>
                 <a:ea typeface="Noto Sans KR Medium" panose="020B0200000000000000" pitchFamily="34" charset="-128"/>
               </a:rPr>
-              <a:t> </a:t>
-            </a:r>
-            <a:r>
-              <a:rPr lang="ko-KR" altLang="en-US" sz="1000" dirty="0" smtClean="0">
-                <a:solidFill>
-                  <a:schemeClr val="bg1">
-                    <a:lumMod val="95000"/>
-                  </a:schemeClr>
-                </a:solidFill>
-                <a:latin typeface="Noto Sans KR Medium" panose="020B0200000000000000" pitchFamily="34" charset="-128"/>
-                <a:ea typeface="Noto Sans KR Medium" panose="020B0200000000000000" pitchFamily="34" charset="-128"/>
-              </a:rPr>
-              <a:t>기능과 </a:t>
+              <a:t> 기능과 </a:t>
             </a:r>
             <a:r>
               <a:rPr lang="ko-KR" altLang="en-US" sz="1000" dirty="0" err="1" smtClean="0">
@@ -23853,31 +24449,7 @@
                 <a:latin typeface="Noto Sans KR Medium" panose="020B0200000000000000" pitchFamily="34" charset="-128"/>
                 <a:ea typeface="Noto Sans KR Medium" panose="020B0200000000000000" pitchFamily="34" charset="-128"/>
               </a:rPr>
-              <a:t> </a:t>
-            </a:r>
-            <a:r>
-              <a:rPr lang="ko-KR" altLang="en-US" sz="1000" dirty="0" smtClean="0">
-                <a:solidFill>
-                  <a:schemeClr val="bg1">
-                    <a:lumMod val="95000"/>
-                  </a:schemeClr>
-                </a:solidFill>
-                <a:latin typeface="Noto Sans KR Medium" panose="020B0200000000000000" pitchFamily="34" charset="-128"/>
-                <a:ea typeface="Noto Sans KR Medium" panose="020B0200000000000000" pitchFamily="34" charset="-128"/>
-              </a:rPr>
-              <a:t>영향을 받을 수 있도록 </a:t>
-            </a:r>
-            <a:r>
-              <a:rPr lang="ko-KR" altLang="en-US" sz="1000" dirty="0" smtClean="0">
-                <a:solidFill>
-                  <a:schemeClr val="bg1">
-                    <a:lumMod val="95000"/>
-                  </a:schemeClr>
-                </a:solidFill>
-                <a:latin typeface="Noto Sans KR Medium" panose="020B0200000000000000" pitchFamily="34" charset="-128"/>
-                <a:ea typeface="Noto Sans KR Medium" panose="020B0200000000000000" pitchFamily="34" charset="-128"/>
-              </a:rPr>
-              <a:t>했습니다</a:t>
+              <a:t> 영향을 받을 수 있도록 했습니다</a:t>
             </a:r>
             <a:r>
               <a:rPr lang="en-US" altLang="ko-KR" sz="1000" dirty="0" smtClean="0">
@@ -23891,6 +24463,8 @@
               </a:rPr>
               <a:t>.</a:t>
             </a:r>
+          </a:p>
+          <a:p>
             <a:endParaRPr lang="en-US" altLang="ko-KR" sz="1000" dirty="0" smtClean="0">
               <a:solidFill>
                 <a:schemeClr val="bg1">
@@ -23902,6 +24476,165 @@
             </a:endParaRPr>
           </a:p>
           <a:p>
+            <a:r>
+              <a:rPr lang="en-US" altLang="ko-KR" sz="1000" dirty="0" err="1" smtClean="0">
+                <a:solidFill>
+                  <a:schemeClr val="bg1">
+                    <a:lumMod val="95000"/>
+                  </a:schemeClr>
+                </a:solidFill>
+                <a:latin typeface="Noto Sans KR Medium" panose="020B0200000000000000" pitchFamily="34" charset="-128"/>
+                <a:ea typeface="Noto Sans KR Medium" panose="020B0200000000000000" pitchFamily="34" charset="-128"/>
+              </a:rPr>
+              <a:t>MonsterActionComponent</a:t>
+            </a:r>
+            <a:endParaRPr lang="en-US" altLang="ko-KR" sz="1000" dirty="0">
+              <a:solidFill>
+                <a:schemeClr val="bg1">
+                  <a:lumMod val="95000"/>
+                </a:schemeClr>
+              </a:solidFill>
+              <a:latin typeface="Noto Sans KR Medium" panose="020B0200000000000000" pitchFamily="34" charset="-128"/>
+              <a:ea typeface="Noto Sans KR Medium" panose="020B0200000000000000" pitchFamily="34" charset="-128"/>
+            </a:endParaRPr>
+          </a:p>
+          <a:p>
+            <a:r>
+              <a:rPr lang="ko-KR" altLang="en-US" sz="1000" dirty="0" err="1" smtClean="0">
+                <a:solidFill>
+                  <a:schemeClr val="bg1">
+                    <a:lumMod val="95000"/>
+                  </a:schemeClr>
+                </a:solidFill>
+                <a:latin typeface="Noto Sans KR Medium" panose="020B0200000000000000" pitchFamily="34" charset="-128"/>
+                <a:ea typeface="Noto Sans KR Medium" panose="020B0200000000000000" pitchFamily="34" charset="-128"/>
+              </a:rPr>
+              <a:t>몬스터의</a:t>
+            </a:r>
+            <a:r>
+              <a:rPr lang="ko-KR" altLang="en-US" sz="1000" dirty="0" smtClean="0">
+                <a:solidFill>
+                  <a:schemeClr val="bg1">
+                    <a:lumMod val="95000"/>
+                  </a:schemeClr>
+                </a:solidFill>
+                <a:latin typeface="Noto Sans KR Medium" panose="020B0200000000000000" pitchFamily="34" charset="-128"/>
+                <a:ea typeface="Noto Sans KR Medium" panose="020B0200000000000000" pitchFamily="34" charset="-128"/>
+              </a:rPr>
+              <a:t> 경우</a:t>
+            </a:r>
+            <a:r>
+              <a:rPr lang="en-US" altLang="ko-KR" sz="1000" dirty="0" smtClean="0">
+                <a:solidFill>
+                  <a:schemeClr val="bg1">
+                    <a:lumMod val="95000"/>
+                  </a:schemeClr>
+                </a:solidFill>
+                <a:latin typeface="Noto Sans KR Medium" panose="020B0200000000000000" pitchFamily="34" charset="-128"/>
+                <a:ea typeface="Noto Sans KR Medium" panose="020B0200000000000000" pitchFamily="34" charset="-128"/>
+              </a:rPr>
+              <a:t>, </a:t>
+            </a:r>
+            <a:r>
+              <a:rPr lang="ko-KR" altLang="en-US" sz="1000" dirty="0" smtClean="0">
+                <a:solidFill>
+                  <a:schemeClr val="bg1">
+                    <a:lumMod val="95000"/>
+                  </a:schemeClr>
+                </a:solidFill>
+                <a:latin typeface="Noto Sans KR Medium" panose="020B0200000000000000" pitchFamily="34" charset="-128"/>
+                <a:ea typeface="Noto Sans KR Medium" panose="020B0200000000000000" pitchFamily="34" charset="-128"/>
+              </a:rPr>
+              <a:t>플레이어와 다르게 </a:t>
+            </a:r>
+            <a:r>
+              <a:rPr lang="ko-KR" altLang="en-US" sz="1000" dirty="0" err="1" smtClean="0">
+                <a:solidFill>
+                  <a:schemeClr val="bg1">
+                    <a:lumMod val="95000"/>
+                  </a:schemeClr>
+                </a:solidFill>
+                <a:latin typeface="Noto Sans KR Medium" panose="020B0200000000000000" pitchFamily="34" charset="-128"/>
+                <a:ea typeface="Noto Sans KR Medium" panose="020B0200000000000000" pitchFamily="34" charset="-128"/>
+              </a:rPr>
+              <a:t>콤보</a:t>
+            </a:r>
+            <a:r>
+              <a:rPr lang="ko-KR" altLang="en-US" sz="1000" dirty="0" smtClean="0">
+                <a:solidFill>
+                  <a:schemeClr val="bg1">
+                    <a:lumMod val="95000"/>
+                  </a:schemeClr>
+                </a:solidFill>
+                <a:latin typeface="Noto Sans KR Medium" panose="020B0200000000000000" pitchFamily="34" charset="-128"/>
+                <a:ea typeface="Noto Sans KR Medium" panose="020B0200000000000000" pitchFamily="34" charset="-128"/>
+              </a:rPr>
+              <a:t> 연계의 기능이 필요 없으므로 간략한 형태로 구현했습니다</a:t>
+            </a:r>
+            <a:r>
+              <a:rPr lang="en-US" altLang="ko-KR" sz="1000" dirty="0" smtClean="0">
+                <a:solidFill>
+                  <a:schemeClr val="bg1">
+                    <a:lumMod val="95000"/>
+                  </a:schemeClr>
+                </a:solidFill>
+                <a:latin typeface="Noto Sans KR Medium" panose="020B0200000000000000" pitchFamily="34" charset="-128"/>
+                <a:ea typeface="Noto Sans KR Medium" panose="020B0200000000000000" pitchFamily="34" charset="-128"/>
+              </a:rPr>
+              <a:t>.</a:t>
+            </a:r>
+          </a:p>
+          <a:p>
+            <a:r>
+              <a:rPr lang="en-US" altLang="ko-KR" sz="1000" dirty="0" smtClean="0">
+                <a:solidFill>
+                  <a:schemeClr val="bg1">
+                    <a:lumMod val="95000"/>
+                  </a:schemeClr>
+                </a:solidFill>
+                <a:latin typeface="Noto Sans KR Medium" panose="020B0200000000000000" pitchFamily="34" charset="-128"/>
+                <a:ea typeface="Noto Sans KR Medium" panose="020B0200000000000000" pitchFamily="34" charset="-128"/>
+              </a:rPr>
+              <a:t>BT</a:t>
+            </a:r>
+            <a:r>
+              <a:rPr lang="ko-KR" altLang="en-US" sz="1000" dirty="0" err="1" smtClean="0">
+                <a:solidFill>
+                  <a:schemeClr val="bg1">
+                    <a:lumMod val="95000"/>
+                  </a:schemeClr>
+                </a:solidFill>
+                <a:latin typeface="Noto Sans KR Medium" panose="020B0200000000000000" pitchFamily="34" charset="-128"/>
+                <a:ea typeface="Noto Sans KR Medium" panose="020B0200000000000000" pitchFamily="34" charset="-128"/>
+              </a:rPr>
+              <a:t>릁</a:t>
+            </a:r>
+            <a:r>
+              <a:rPr lang="ko-KR" altLang="en-US" sz="1000" dirty="0" smtClean="0">
+                <a:solidFill>
+                  <a:schemeClr val="bg1">
+                    <a:lumMod val="95000"/>
+                  </a:schemeClr>
+                </a:solidFill>
+                <a:latin typeface="Noto Sans KR Medium" panose="020B0200000000000000" pitchFamily="34" charset="-128"/>
+                <a:ea typeface="Noto Sans KR Medium" panose="020B0200000000000000" pitchFamily="34" charset="-128"/>
+              </a:rPr>
+              <a:t> 통해서 입력된 공격 액션을 수행합니다</a:t>
+            </a:r>
+            <a:r>
+              <a:rPr lang="en-US" altLang="ko-KR" sz="1000" dirty="0" smtClean="0">
+                <a:solidFill>
+                  <a:schemeClr val="bg1">
+                    <a:lumMod val="95000"/>
+                  </a:schemeClr>
+                </a:solidFill>
+                <a:latin typeface="Noto Sans KR Medium" panose="020B0200000000000000" pitchFamily="34" charset="-128"/>
+                <a:ea typeface="Noto Sans KR Medium" panose="020B0200000000000000" pitchFamily="34" charset="-128"/>
+              </a:rPr>
+              <a:t>.</a:t>
+            </a:r>
+          </a:p>
+          <a:p>
             <a:endParaRPr lang="en-US" altLang="ko-KR" sz="1000" dirty="0" smtClean="0">
               <a:solidFill>
                 <a:schemeClr val="bg1">
@@ -23923,42 +24656,7 @@
                 <a:latin typeface="Noto Sans KR Medium" panose="020B0200000000000000" pitchFamily="34" charset="-128"/>
                 <a:ea typeface="Noto Sans KR Medium" panose="020B0200000000000000" pitchFamily="34" charset="-128"/>
               </a:rPr>
-              <a:t>MonsterActionComponent</a:t>
-            </a:r>
-            <a:endParaRPr lang="en-US" altLang="ko-KR" sz="1000" dirty="0">
-              <a:solidFill>
-                <a:schemeClr val="bg1">
-                  <a:lumMod val="95000"/>
-                </a:schemeClr>
-              </a:solidFill>
-              <a:latin typeface="Noto Sans KR Medium" panose="020B0200000000000000" pitchFamily="34" charset="-128"/>
-              <a:ea typeface="Noto Sans KR Medium" panose="020B0200000000000000" pitchFamily="34" charset="-128"/>
-            </a:endParaRPr>
-          </a:p>
-          <a:p>
-            <a:r>
-              <a:rPr lang="ko-KR" altLang="en-US" sz="1000" dirty="0" err="1" smtClean="0">
-                <a:solidFill>
-                  <a:schemeClr val="bg1">
-                    <a:lumMod val="95000"/>
-                  </a:schemeClr>
-                </a:solidFill>
-                <a:latin typeface="Noto Sans KR Medium" panose="020B0200000000000000" pitchFamily="34" charset="-128"/>
-                <a:ea typeface="Noto Sans KR Medium" panose="020B0200000000000000" pitchFamily="34" charset="-128"/>
-              </a:rPr>
-              <a:t>몬스터의</a:t>
-            </a:r>
-            <a:r>
-              <a:rPr lang="ko-KR" altLang="en-US" sz="1000" dirty="0" smtClean="0">
-                <a:solidFill>
-                  <a:schemeClr val="bg1">
-                    <a:lumMod val="95000"/>
-                  </a:schemeClr>
-                </a:solidFill>
-                <a:latin typeface="Noto Sans KR Medium" panose="020B0200000000000000" pitchFamily="34" charset="-128"/>
-                <a:ea typeface="Noto Sans KR Medium" panose="020B0200000000000000" pitchFamily="34" charset="-128"/>
-              </a:rPr>
-              <a:t> 경우</a:t>
+              <a:t>MonsterConfig</a:t>
             </a:r>
             <a:r>
               <a:rPr lang="en-US" altLang="ko-KR" sz="1000" dirty="0" smtClean="0">
@@ -23973,88 +24671,16 @@
               <a:t>, </a:t>
             </a:r>
             <a:r>
-              <a:rPr lang="ko-KR" altLang="en-US" sz="1000" dirty="0" smtClean="0">
-                <a:solidFill>
-                  <a:schemeClr val="bg1">
-                    <a:lumMod val="95000"/>
-                  </a:schemeClr>
-                </a:solidFill>
-                <a:latin typeface="Noto Sans KR Medium" panose="020B0200000000000000" pitchFamily="34" charset="-128"/>
-                <a:ea typeface="Noto Sans KR Medium" panose="020B0200000000000000" pitchFamily="34" charset="-128"/>
-              </a:rPr>
-              <a:t>플레이어와 다르게 </a:t>
-            </a:r>
-            <a:r>
-              <a:rPr lang="ko-KR" altLang="en-US" sz="1000" dirty="0" err="1" smtClean="0">
-                <a:solidFill>
-                  <a:schemeClr val="bg1">
-                    <a:lumMod val="95000"/>
-                  </a:schemeClr>
-                </a:solidFill>
-                <a:latin typeface="Noto Sans KR Medium" panose="020B0200000000000000" pitchFamily="34" charset="-128"/>
-                <a:ea typeface="Noto Sans KR Medium" panose="020B0200000000000000" pitchFamily="34" charset="-128"/>
-              </a:rPr>
-              <a:t>콤보</a:t>
-            </a:r>
-            <a:r>
-              <a:rPr lang="ko-KR" altLang="en-US" sz="1000" dirty="0" smtClean="0">
-                <a:solidFill>
-                  <a:schemeClr val="bg1">
-                    <a:lumMod val="95000"/>
-                  </a:schemeClr>
-                </a:solidFill>
-                <a:latin typeface="Noto Sans KR Medium" panose="020B0200000000000000" pitchFamily="34" charset="-128"/>
-                <a:ea typeface="Noto Sans KR Medium" panose="020B0200000000000000" pitchFamily="34" charset="-128"/>
-              </a:rPr>
-              <a:t> 연계의 기능이 </a:t>
-            </a:r>
-            <a:r>
-              <a:rPr lang="ko-KR" altLang="en-US" sz="1000" dirty="0" smtClean="0">
-                <a:solidFill>
-                  <a:schemeClr val="bg1">
-                    <a:lumMod val="95000"/>
-                  </a:schemeClr>
-                </a:solidFill>
-                <a:latin typeface="Noto Sans KR Medium" panose="020B0200000000000000" pitchFamily="34" charset="-128"/>
-                <a:ea typeface="Noto Sans KR Medium" panose="020B0200000000000000" pitchFamily="34" charset="-128"/>
-              </a:rPr>
-              <a:t>필요 없으므로 간략한 </a:t>
-            </a:r>
-            <a:r>
-              <a:rPr lang="ko-KR" altLang="en-US" sz="1000" dirty="0" smtClean="0">
-                <a:solidFill>
-                  <a:schemeClr val="bg1">
-                    <a:lumMod val="95000"/>
-                  </a:schemeClr>
-                </a:solidFill>
-                <a:latin typeface="Noto Sans KR Medium" panose="020B0200000000000000" pitchFamily="34" charset="-128"/>
-                <a:ea typeface="Noto Sans KR Medium" panose="020B0200000000000000" pitchFamily="34" charset="-128"/>
-              </a:rPr>
-              <a:t>형태로 </a:t>
-            </a:r>
-            <a:r>
-              <a:rPr lang="ko-KR" altLang="en-US" sz="1000" dirty="0" smtClean="0">
-                <a:solidFill>
-                  <a:schemeClr val="bg1">
-                    <a:lumMod val="95000"/>
-                  </a:schemeClr>
-                </a:solidFill>
-                <a:latin typeface="Noto Sans KR Medium" panose="020B0200000000000000" pitchFamily="34" charset="-128"/>
-                <a:ea typeface="Noto Sans KR Medium" panose="020B0200000000000000" pitchFamily="34" charset="-128"/>
-              </a:rPr>
-              <a:t>구현했습니다</a:t>
-            </a:r>
-            <a:r>
-              <a:rPr lang="en-US" altLang="ko-KR" sz="1000" dirty="0" smtClean="0">
-                <a:solidFill>
-                  <a:schemeClr val="bg1">
-                    <a:lumMod val="95000"/>
-                  </a:schemeClr>
-                </a:solidFill>
-                <a:latin typeface="Noto Sans KR Medium" panose="020B0200000000000000" pitchFamily="34" charset="-128"/>
-                <a:ea typeface="Noto Sans KR Medium" panose="020B0200000000000000" pitchFamily="34" charset="-128"/>
-              </a:rPr>
-              <a:t>.</a:t>
+              <a:rPr lang="en-US" altLang="ko-KR" sz="1000" dirty="0" err="1" smtClean="0">
+                <a:solidFill>
+                  <a:schemeClr val="bg1">
+                    <a:lumMod val="95000"/>
+                  </a:schemeClr>
+                </a:solidFill>
+                <a:latin typeface="Noto Sans KR Medium" panose="020B0200000000000000" pitchFamily="34" charset="-128"/>
+                <a:ea typeface="Noto Sans KR Medium" panose="020B0200000000000000" pitchFamily="34" charset="-128"/>
+              </a:rPr>
+              <a:t>MonsterData</a:t>
             </a:r>
             <a:endParaRPr lang="en-US" altLang="ko-KR" sz="1000" dirty="0" smtClean="0">
               <a:solidFill>
@@ -24068,18 +24694,6 @@
           </a:p>
           <a:p>
             <a:r>
-              <a:rPr lang="en-US" altLang="ko-KR" sz="1000" dirty="0" smtClean="0">
-                <a:solidFill>
-                  <a:schemeClr val="bg1">
-                    <a:lumMod val="95000"/>
-                  </a:schemeClr>
-                </a:solidFill>
-                <a:latin typeface="Noto Sans KR Medium" panose="020B0200000000000000" pitchFamily="34" charset="-128"/>
-                <a:ea typeface="Noto Sans KR Medium" panose="020B0200000000000000" pitchFamily="34" charset="-128"/>
-              </a:rPr>
-              <a:t>BT</a:t>
-            </a:r>
-            <a:r>
               <a:rPr lang="ko-KR" altLang="en-US" sz="1000" dirty="0" err="1" smtClean="0">
                 <a:solidFill>
                   <a:schemeClr val="bg1">
@@ -24089,34 +24703,118 @@
                 <a:latin typeface="Noto Sans KR Medium" panose="020B0200000000000000" pitchFamily="34" charset="-128"/>
                 <a:ea typeface="Noto Sans KR Medium" panose="020B0200000000000000" pitchFamily="34" charset="-128"/>
               </a:rPr>
-              <a:t>릁</a:t>
-            </a:r>
-            <a:r>
-              <a:rPr lang="ko-KR" altLang="en-US" sz="1000" dirty="0" smtClean="0">
-                <a:solidFill>
-                  <a:schemeClr val="bg1">
-                    <a:lumMod val="95000"/>
-                  </a:schemeClr>
-                </a:solidFill>
-                <a:latin typeface="Noto Sans KR Medium" panose="020B0200000000000000" pitchFamily="34" charset="-128"/>
-                <a:ea typeface="Noto Sans KR Medium" panose="020B0200000000000000" pitchFamily="34" charset="-128"/>
-              </a:rPr>
-              <a:t> 통해서 입력된 공격 액션을 </a:t>
-            </a:r>
-            <a:r>
-              <a:rPr lang="ko-KR" altLang="en-US" sz="1000" dirty="0" smtClean="0">
-                <a:solidFill>
-                  <a:schemeClr val="bg1">
-                    <a:lumMod val="95000"/>
-                  </a:schemeClr>
-                </a:solidFill>
-                <a:latin typeface="Noto Sans KR Medium" panose="020B0200000000000000" pitchFamily="34" charset="-128"/>
-                <a:ea typeface="Noto Sans KR Medium" panose="020B0200000000000000" pitchFamily="34" charset="-128"/>
-              </a:rPr>
-              <a:t>수행합니다</a:t>
-            </a:r>
-            <a:r>
-              <a:rPr lang="en-US" altLang="ko-KR" sz="1000" dirty="0" smtClean="0">
+              <a:t>몬스터의</a:t>
+            </a:r>
+            <a:r>
+              <a:rPr lang="ko-KR" altLang="en-US" sz="1000" dirty="0" smtClean="0">
+                <a:solidFill>
+                  <a:schemeClr val="bg1">
+                    <a:lumMod val="95000"/>
+                  </a:schemeClr>
+                </a:solidFill>
+                <a:latin typeface="Noto Sans KR Medium" panose="020B0200000000000000" pitchFamily="34" charset="-128"/>
+                <a:ea typeface="Noto Sans KR Medium" panose="020B0200000000000000" pitchFamily="34" charset="-128"/>
+              </a:rPr>
+              <a:t> 경우</a:t>
+            </a:r>
+            <a:r>
+              <a:rPr lang="en-US" altLang="ko-KR" sz="1000" dirty="0" smtClean="0">
+                <a:solidFill>
+                  <a:schemeClr val="bg1">
+                    <a:lumMod val="95000"/>
+                  </a:schemeClr>
+                </a:solidFill>
+                <a:latin typeface="Noto Sans KR Medium" panose="020B0200000000000000" pitchFamily="34" charset="-128"/>
+                <a:ea typeface="Noto Sans KR Medium" panose="020B0200000000000000" pitchFamily="34" charset="-128"/>
+              </a:rPr>
+              <a:t>, </a:t>
+            </a:r>
+            <a:r>
+              <a:rPr lang="ko-KR" altLang="en-US" sz="1000" dirty="0" smtClean="0">
+                <a:solidFill>
+                  <a:schemeClr val="bg1">
+                    <a:lumMod val="95000"/>
+                  </a:schemeClr>
+                </a:solidFill>
+                <a:latin typeface="Noto Sans KR Medium" panose="020B0200000000000000" pitchFamily="34" charset="-128"/>
+                <a:ea typeface="Noto Sans KR Medium" panose="020B0200000000000000" pitchFamily="34" charset="-128"/>
+              </a:rPr>
+              <a:t>외형</a:t>
+            </a:r>
+            <a:r>
+              <a:rPr lang="en-US" altLang="ko-KR" sz="1000" dirty="0" smtClean="0">
+                <a:solidFill>
+                  <a:schemeClr val="bg1">
+                    <a:lumMod val="95000"/>
+                  </a:schemeClr>
+                </a:solidFill>
+                <a:latin typeface="Noto Sans KR Medium" panose="020B0200000000000000" pitchFamily="34" charset="-128"/>
+                <a:ea typeface="Noto Sans KR Medium" panose="020B0200000000000000" pitchFamily="34" charset="-128"/>
+              </a:rPr>
+              <a:t>, </a:t>
+            </a:r>
+            <a:r>
+              <a:rPr lang="ko-KR" altLang="en-US" sz="1000" dirty="0" smtClean="0">
+                <a:solidFill>
+                  <a:schemeClr val="bg1">
+                    <a:lumMod val="95000"/>
+                  </a:schemeClr>
+                </a:solidFill>
+                <a:latin typeface="Noto Sans KR Medium" panose="020B0200000000000000" pitchFamily="34" charset="-128"/>
+                <a:ea typeface="Noto Sans KR Medium" panose="020B0200000000000000" pitchFamily="34" charset="-128"/>
+              </a:rPr>
+              <a:t>액션은 </a:t>
+            </a:r>
+            <a:r>
+              <a:rPr lang="ko-KR" altLang="en-US" sz="1000" dirty="0" err="1" smtClean="0">
+                <a:solidFill>
+                  <a:schemeClr val="bg1">
+                    <a:lumMod val="95000"/>
+                  </a:schemeClr>
+                </a:solidFill>
+                <a:latin typeface="Noto Sans KR Medium" panose="020B0200000000000000" pitchFamily="34" charset="-128"/>
+                <a:ea typeface="Noto Sans KR Medium" panose="020B0200000000000000" pitchFamily="34" charset="-128"/>
+              </a:rPr>
+              <a:t>데이터에셋으로</a:t>
+            </a:r>
+            <a:r>
+              <a:rPr lang="en-US" altLang="ko-KR" sz="1000" dirty="0" smtClean="0">
+                <a:solidFill>
+                  <a:schemeClr val="bg1">
+                    <a:lumMod val="95000"/>
+                  </a:schemeClr>
+                </a:solidFill>
+                <a:latin typeface="Noto Sans KR Medium" panose="020B0200000000000000" pitchFamily="34" charset="-128"/>
+                <a:ea typeface="Noto Sans KR Medium" panose="020B0200000000000000" pitchFamily="34" charset="-128"/>
+              </a:rPr>
+              <a:t>, </a:t>
+            </a:r>
+            <a:r>
+              <a:rPr lang="ko-KR" altLang="en-US" sz="1000" dirty="0" err="1" smtClean="0">
+                <a:solidFill>
+                  <a:schemeClr val="bg1">
+                    <a:lumMod val="95000"/>
+                  </a:schemeClr>
+                </a:solidFill>
+                <a:latin typeface="Noto Sans KR Medium" panose="020B0200000000000000" pitchFamily="34" charset="-128"/>
+                <a:ea typeface="Noto Sans KR Medium" panose="020B0200000000000000" pitchFamily="34" charset="-128"/>
+              </a:rPr>
+              <a:t>스탯은</a:t>
+            </a:r>
+            <a:r>
+              <a:rPr lang="ko-KR" altLang="en-US" sz="1000" dirty="0" smtClean="0">
+                <a:solidFill>
+                  <a:schemeClr val="bg1">
+                    <a:lumMod val="95000"/>
+                  </a:schemeClr>
+                </a:solidFill>
+                <a:latin typeface="Noto Sans KR Medium" panose="020B0200000000000000" pitchFamily="34" charset="-128"/>
+                <a:ea typeface="Noto Sans KR Medium" panose="020B0200000000000000" pitchFamily="34" charset="-128"/>
+              </a:rPr>
+              <a:t> 데이터테이블을 통해서 구성하도록 구조화했습니다</a:t>
+            </a:r>
+            <a:r>
+              <a:rPr lang="en-US" altLang="ko-KR" sz="1000" dirty="0">
                 <a:solidFill>
                   <a:schemeClr val="bg1">
                     <a:lumMod val="95000"/>
@@ -24127,8 +24825,6 @@
               </a:rPr>
               <a:t>.</a:t>
             </a:r>
-          </a:p>
-          <a:p>
             <a:endParaRPr lang="en-US" altLang="ko-KR" sz="1000" dirty="0" smtClean="0">
               <a:solidFill>
                 <a:schemeClr val="bg1">
@@ -24141,53 +24837,6 @@
           </a:p>
           <a:p>
             <a:r>
-              <a:rPr lang="en-US" altLang="ko-KR" sz="1000" dirty="0" err="1" smtClean="0">
-                <a:solidFill>
-                  <a:schemeClr val="bg1">
-                    <a:lumMod val="95000"/>
-                  </a:schemeClr>
-                </a:solidFill>
-                <a:latin typeface="Noto Sans KR Medium" panose="020B0200000000000000" pitchFamily="34" charset="-128"/>
-                <a:ea typeface="Noto Sans KR Medium" panose="020B0200000000000000" pitchFamily="34" charset="-128"/>
-              </a:rPr>
-              <a:t>MonsterConfig</a:t>
-            </a:r>
-            <a:r>
-              <a:rPr lang="en-US" altLang="ko-KR" sz="1000" dirty="0" smtClean="0">
-                <a:solidFill>
-                  <a:schemeClr val="bg1">
-                    <a:lumMod val="95000"/>
-                  </a:schemeClr>
-                </a:solidFill>
-                <a:latin typeface="Noto Sans KR Medium" panose="020B0200000000000000" pitchFamily="34" charset="-128"/>
-                <a:ea typeface="Noto Sans KR Medium" panose="020B0200000000000000" pitchFamily="34" charset="-128"/>
-              </a:rPr>
-              <a:t>, </a:t>
-            </a:r>
-            <a:r>
-              <a:rPr lang="en-US" altLang="ko-KR" sz="1000" dirty="0" err="1" smtClean="0">
-                <a:solidFill>
-                  <a:schemeClr val="bg1">
-                    <a:lumMod val="95000"/>
-                  </a:schemeClr>
-                </a:solidFill>
-                <a:latin typeface="Noto Sans KR Medium" panose="020B0200000000000000" pitchFamily="34" charset="-128"/>
-                <a:ea typeface="Noto Sans KR Medium" panose="020B0200000000000000" pitchFamily="34" charset="-128"/>
-              </a:rPr>
-              <a:t>MonsterData</a:t>
-            </a:r>
-            <a:endParaRPr lang="en-US" altLang="ko-KR" sz="1000" dirty="0" smtClean="0">
-              <a:solidFill>
-                <a:schemeClr val="bg1">
-                  <a:lumMod val="95000"/>
-                </a:schemeClr>
-              </a:solidFill>
-              <a:latin typeface="Noto Sans KR Medium" panose="020B0200000000000000" pitchFamily="34" charset="-128"/>
-              <a:ea typeface="Noto Sans KR Medium" panose="020B0200000000000000" pitchFamily="34" charset="-128"/>
-            </a:endParaRPr>
-          </a:p>
-          <a:p>
-            <a:r>
               <a:rPr lang="ko-KR" altLang="en-US" sz="1000" dirty="0" err="1" smtClean="0">
                 <a:solidFill>
                   <a:schemeClr val="bg1">
@@ -24197,67 +24846,43 @@
                 <a:latin typeface="Noto Sans KR Medium" panose="020B0200000000000000" pitchFamily="34" charset="-128"/>
                 <a:ea typeface="Noto Sans KR Medium" panose="020B0200000000000000" pitchFamily="34" charset="-128"/>
               </a:rPr>
-              <a:t>몬스터의</a:t>
-            </a:r>
-            <a:r>
-              <a:rPr lang="ko-KR" altLang="en-US" sz="1000" dirty="0" smtClean="0">
-                <a:solidFill>
-                  <a:schemeClr val="bg1">
-                    <a:lumMod val="95000"/>
-                  </a:schemeClr>
-                </a:solidFill>
-                <a:latin typeface="Noto Sans KR Medium" panose="020B0200000000000000" pitchFamily="34" charset="-128"/>
-                <a:ea typeface="Noto Sans KR Medium" panose="020B0200000000000000" pitchFamily="34" charset="-128"/>
-              </a:rPr>
-              <a:t> 경우</a:t>
-            </a:r>
-            <a:r>
-              <a:rPr lang="en-US" altLang="ko-KR" sz="1000" dirty="0" smtClean="0">
-                <a:solidFill>
-                  <a:schemeClr val="bg1">
-                    <a:lumMod val="95000"/>
-                  </a:schemeClr>
-                </a:solidFill>
-                <a:latin typeface="Noto Sans KR Medium" panose="020B0200000000000000" pitchFamily="34" charset="-128"/>
-                <a:ea typeface="Noto Sans KR Medium" panose="020B0200000000000000" pitchFamily="34" charset="-128"/>
-              </a:rPr>
-              <a:t>, </a:t>
-            </a:r>
-            <a:r>
-              <a:rPr lang="ko-KR" altLang="en-US" sz="1000" dirty="0" smtClean="0">
-                <a:solidFill>
-                  <a:schemeClr val="bg1">
-                    <a:lumMod val="95000"/>
-                  </a:schemeClr>
-                </a:solidFill>
-                <a:latin typeface="Noto Sans KR Medium" panose="020B0200000000000000" pitchFamily="34" charset="-128"/>
-                <a:ea typeface="Noto Sans KR Medium" panose="020B0200000000000000" pitchFamily="34" charset="-128"/>
-              </a:rPr>
-              <a:t>외형</a:t>
-            </a:r>
-            <a:r>
-              <a:rPr lang="en-US" altLang="ko-KR" sz="1000" dirty="0" smtClean="0">
-                <a:solidFill>
-                  <a:schemeClr val="bg1">
-                    <a:lumMod val="95000"/>
-                  </a:schemeClr>
-                </a:solidFill>
-                <a:latin typeface="Noto Sans KR Medium" panose="020B0200000000000000" pitchFamily="34" charset="-128"/>
-                <a:ea typeface="Noto Sans KR Medium" panose="020B0200000000000000" pitchFamily="34" charset="-128"/>
-              </a:rPr>
-              <a:t>, </a:t>
-            </a:r>
-            <a:r>
-              <a:rPr lang="ko-KR" altLang="en-US" sz="1000" dirty="0" smtClean="0">
-                <a:solidFill>
-                  <a:schemeClr val="bg1">
-                    <a:lumMod val="95000"/>
-                  </a:schemeClr>
-                </a:solidFill>
-                <a:latin typeface="Noto Sans KR Medium" panose="020B0200000000000000" pitchFamily="34" charset="-128"/>
-                <a:ea typeface="Noto Sans KR Medium" panose="020B0200000000000000" pitchFamily="34" charset="-128"/>
-              </a:rPr>
-              <a:t>액션은 </a:t>
+              <a:t>몬스터</a:t>
+            </a:r>
+            <a:r>
+              <a:rPr lang="ko-KR" altLang="en-US" sz="1000" dirty="0" smtClean="0">
+                <a:solidFill>
+                  <a:schemeClr val="bg1">
+                    <a:lumMod val="95000"/>
+                  </a:schemeClr>
+                </a:solidFill>
+                <a:latin typeface="Noto Sans KR Medium" panose="020B0200000000000000" pitchFamily="34" charset="-128"/>
+                <a:ea typeface="Noto Sans KR Medium" panose="020B0200000000000000" pitchFamily="34" charset="-128"/>
+              </a:rPr>
+              <a:t> 데이터테이블의 </a:t>
+            </a:r>
+            <a:r>
+              <a:rPr lang="en-US" altLang="ko-KR" sz="1000" dirty="0" smtClean="0">
+                <a:solidFill>
+                  <a:schemeClr val="bg1">
+                    <a:lumMod val="95000"/>
+                  </a:schemeClr>
+                </a:solidFill>
+                <a:latin typeface="Noto Sans KR Medium" panose="020B0200000000000000" pitchFamily="34" charset="-128"/>
+                <a:ea typeface="Noto Sans KR Medium" panose="020B0200000000000000" pitchFamily="34" charset="-128"/>
+              </a:rPr>
+              <a:t>ID</a:t>
+            </a:r>
+            <a:r>
+              <a:rPr lang="ko-KR" altLang="en-US" sz="1000" dirty="0" smtClean="0">
+                <a:solidFill>
+                  <a:schemeClr val="bg1">
+                    <a:lumMod val="95000"/>
+                  </a:schemeClr>
+                </a:solidFill>
+                <a:latin typeface="Noto Sans KR Medium" panose="020B0200000000000000" pitchFamily="34" charset="-128"/>
+                <a:ea typeface="Noto Sans KR Medium" panose="020B0200000000000000" pitchFamily="34" charset="-128"/>
+              </a:rPr>
+              <a:t>를 가지고 </a:t>
             </a:r>
             <a:r>
               <a:rPr lang="ko-KR" altLang="en-US" sz="1000" dirty="0" err="1" smtClean="0">
@@ -24269,19 +24894,19 @@
                 <a:latin typeface="Noto Sans KR Medium" panose="020B0200000000000000" pitchFamily="34" charset="-128"/>
                 <a:ea typeface="Noto Sans KR Medium" panose="020B0200000000000000" pitchFamily="34" charset="-128"/>
               </a:rPr>
-              <a:t>데이터에셋으로</a:t>
-            </a:r>
-            <a:r>
-              <a:rPr lang="en-US" altLang="ko-KR" sz="1000" dirty="0" smtClean="0">
-                <a:solidFill>
-                  <a:schemeClr val="bg1">
-                    <a:lumMod val="95000"/>
-                  </a:schemeClr>
-                </a:solidFill>
-                <a:latin typeface="Noto Sans KR Medium" panose="020B0200000000000000" pitchFamily="34" charset="-128"/>
-                <a:ea typeface="Noto Sans KR Medium" panose="020B0200000000000000" pitchFamily="34" charset="-128"/>
-              </a:rPr>
-              <a:t>, </a:t>
+              <a:t>던전</a:t>
+            </a:r>
+            <a:r>
+              <a:rPr lang="ko-KR" altLang="en-US" sz="1000" dirty="0" smtClean="0">
+                <a:solidFill>
+                  <a:schemeClr val="bg1">
+                    <a:lumMod val="95000"/>
+                  </a:schemeClr>
+                </a:solidFill>
+                <a:latin typeface="Noto Sans KR Medium" panose="020B0200000000000000" pitchFamily="34" charset="-128"/>
+                <a:ea typeface="Noto Sans KR Medium" panose="020B0200000000000000" pitchFamily="34" charset="-128"/>
+              </a:rPr>
+              <a:t> 스테이지에 사용할 </a:t>
             </a:r>
             <a:r>
               <a:rPr lang="ko-KR" altLang="en-US" sz="1000" dirty="0" err="1" smtClean="0">
@@ -24293,46 +24918,22 @@
                 <a:latin typeface="Noto Sans KR Medium" panose="020B0200000000000000" pitchFamily="34" charset="-128"/>
                 <a:ea typeface="Noto Sans KR Medium" panose="020B0200000000000000" pitchFamily="34" charset="-128"/>
               </a:rPr>
-              <a:t>스탯은</a:t>
-            </a:r>
-            <a:r>
-              <a:rPr lang="ko-KR" altLang="en-US" sz="1000" dirty="0" smtClean="0">
-                <a:solidFill>
-                  <a:schemeClr val="bg1">
-                    <a:lumMod val="95000"/>
-                  </a:schemeClr>
-                </a:solidFill>
-                <a:latin typeface="Noto Sans KR Medium" panose="020B0200000000000000" pitchFamily="34" charset="-128"/>
-                <a:ea typeface="Noto Sans KR Medium" panose="020B0200000000000000" pitchFamily="34" charset="-128"/>
-              </a:rPr>
-              <a:t> </a:t>
-            </a:r>
-            <a:r>
-              <a:rPr lang="ko-KR" altLang="en-US" sz="1000" dirty="0" smtClean="0">
-                <a:solidFill>
-                  <a:schemeClr val="bg1">
-                    <a:lumMod val="95000"/>
-                  </a:schemeClr>
-                </a:solidFill>
-                <a:latin typeface="Noto Sans KR Medium" panose="020B0200000000000000" pitchFamily="34" charset="-128"/>
-                <a:ea typeface="Noto Sans KR Medium" panose="020B0200000000000000" pitchFamily="34" charset="-128"/>
-              </a:rPr>
-              <a:t>데이터테이블을 통해서 구성하도록 </a:t>
-            </a:r>
-            <a:r>
-              <a:rPr lang="ko-KR" altLang="en-US" sz="1000" dirty="0" smtClean="0">
-                <a:solidFill>
-                  <a:schemeClr val="bg1">
-                    <a:lumMod val="95000"/>
-                  </a:schemeClr>
-                </a:solidFill>
-                <a:latin typeface="Noto Sans KR Medium" panose="020B0200000000000000" pitchFamily="34" charset="-128"/>
-                <a:ea typeface="Noto Sans KR Medium" panose="020B0200000000000000" pitchFamily="34" charset="-128"/>
-              </a:rPr>
-              <a:t>구조화했습니다</a:t>
-            </a:r>
-            <a:r>
-              <a:rPr lang="en-US" altLang="ko-KR" sz="1000" dirty="0">
+              <a:t>몬스터들을</a:t>
+            </a:r>
+            <a:r>
+              <a:rPr lang="ko-KR" altLang="en-US" sz="1000" dirty="0" smtClean="0">
+                <a:solidFill>
+                  <a:schemeClr val="bg1">
+                    <a:lumMod val="95000"/>
+                  </a:schemeClr>
+                </a:solidFill>
+                <a:latin typeface="Noto Sans KR Medium" panose="020B0200000000000000" pitchFamily="34" charset="-128"/>
+                <a:ea typeface="Noto Sans KR Medium" panose="020B0200000000000000" pitchFamily="34" charset="-128"/>
+              </a:rPr>
+              <a:t> 구성할 수 있도록 했습니다</a:t>
+            </a:r>
+            <a:r>
+              <a:rPr lang="en-US" altLang="ko-KR" sz="1000" dirty="0" smtClean="0">
                 <a:solidFill>
                   <a:schemeClr val="bg1">
                     <a:lumMod val="95000"/>
@@ -24343,170 +24944,6 @@
               </a:rPr>
               <a:t>.</a:t>
             </a:r>
-            <a:endParaRPr lang="en-US" altLang="ko-KR" sz="1000" dirty="0" smtClean="0">
-              <a:solidFill>
-                <a:schemeClr val="bg1">
-                  <a:lumMod val="95000"/>
-                </a:schemeClr>
-              </a:solidFill>
-              <a:latin typeface="Noto Sans KR Medium" panose="020B0200000000000000" pitchFamily="34" charset="-128"/>
-              <a:ea typeface="Noto Sans KR Medium" panose="020B0200000000000000" pitchFamily="34" charset="-128"/>
-            </a:endParaRPr>
-          </a:p>
-          <a:p>
-            <a:r>
-              <a:rPr lang="ko-KR" altLang="en-US" sz="1000" dirty="0" err="1" smtClean="0">
-                <a:solidFill>
-                  <a:schemeClr val="bg1">
-                    <a:lumMod val="95000"/>
-                  </a:schemeClr>
-                </a:solidFill>
-                <a:latin typeface="Noto Sans KR Medium" panose="020B0200000000000000" pitchFamily="34" charset="-128"/>
-                <a:ea typeface="Noto Sans KR Medium" panose="020B0200000000000000" pitchFamily="34" charset="-128"/>
-              </a:rPr>
-              <a:t>몬스터</a:t>
-            </a:r>
-            <a:r>
-              <a:rPr lang="ko-KR" altLang="en-US" sz="1000" dirty="0" smtClean="0">
-                <a:solidFill>
-                  <a:schemeClr val="bg1">
-                    <a:lumMod val="95000"/>
-                  </a:schemeClr>
-                </a:solidFill>
-                <a:latin typeface="Noto Sans KR Medium" panose="020B0200000000000000" pitchFamily="34" charset="-128"/>
-                <a:ea typeface="Noto Sans KR Medium" panose="020B0200000000000000" pitchFamily="34" charset="-128"/>
-              </a:rPr>
-              <a:t> </a:t>
-            </a:r>
-            <a:r>
-              <a:rPr lang="ko-KR" altLang="en-US" sz="1000" dirty="0" smtClean="0">
-                <a:solidFill>
-                  <a:schemeClr val="bg1">
-                    <a:lumMod val="95000"/>
-                  </a:schemeClr>
-                </a:solidFill>
-                <a:latin typeface="Noto Sans KR Medium" panose="020B0200000000000000" pitchFamily="34" charset="-128"/>
-                <a:ea typeface="Noto Sans KR Medium" panose="020B0200000000000000" pitchFamily="34" charset="-128"/>
-              </a:rPr>
-              <a:t>데이터테이블의 </a:t>
-            </a:r>
-            <a:r>
-              <a:rPr lang="en-US" altLang="ko-KR" sz="1000" dirty="0" smtClean="0">
-                <a:solidFill>
-                  <a:schemeClr val="bg1">
-                    <a:lumMod val="95000"/>
-                  </a:schemeClr>
-                </a:solidFill>
-                <a:latin typeface="Noto Sans KR Medium" panose="020B0200000000000000" pitchFamily="34" charset="-128"/>
-                <a:ea typeface="Noto Sans KR Medium" panose="020B0200000000000000" pitchFamily="34" charset="-128"/>
-              </a:rPr>
-              <a:t>ID</a:t>
-            </a:r>
-            <a:r>
-              <a:rPr lang="ko-KR" altLang="en-US" sz="1000" dirty="0" smtClean="0">
-                <a:solidFill>
-                  <a:schemeClr val="bg1">
-                    <a:lumMod val="95000"/>
-                  </a:schemeClr>
-                </a:solidFill>
-                <a:latin typeface="Noto Sans KR Medium" panose="020B0200000000000000" pitchFamily="34" charset="-128"/>
-                <a:ea typeface="Noto Sans KR Medium" panose="020B0200000000000000" pitchFamily="34" charset="-128"/>
-              </a:rPr>
-              <a:t>를 가지고 </a:t>
-            </a:r>
-            <a:r>
-              <a:rPr lang="ko-KR" altLang="en-US" sz="1000" dirty="0" err="1" smtClean="0">
-                <a:solidFill>
-                  <a:schemeClr val="bg1">
-                    <a:lumMod val="95000"/>
-                  </a:schemeClr>
-                </a:solidFill>
-                <a:latin typeface="Noto Sans KR Medium" panose="020B0200000000000000" pitchFamily="34" charset="-128"/>
-                <a:ea typeface="Noto Sans KR Medium" panose="020B0200000000000000" pitchFamily="34" charset="-128"/>
-              </a:rPr>
-              <a:t>던전</a:t>
-            </a:r>
-            <a:r>
-              <a:rPr lang="ko-KR" altLang="en-US" sz="1000" dirty="0" smtClean="0">
-                <a:solidFill>
-                  <a:schemeClr val="bg1">
-                    <a:lumMod val="95000"/>
-                  </a:schemeClr>
-                </a:solidFill>
-                <a:latin typeface="Noto Sans KR Medium" panose="020B0200000000000000" pitchFamily="34" charset="-128"/>
-                <a:ea typeface="Noto Sans KR Medium" panose="020B0200000000000000" pitchFamily="34" charset="-128"/>
-              </a:rPr>
-              <a:t> 스테이지에 사용할 </a:t>
-            </a:r>
-            <a:r>
-              <a:rPr lang="ko-KR" altLang="en-US" sz="1000" dirty="0" err="1" smtClean="0">
-                <a:solidFill>
-                  <a:schemeClr val="bg1">
-                    <a:lumMod val="95000"/>
-                  </a:schemeClr>
-                </a:solidFill>
-                <a:latin typeface="Noto Sans KR Medium" panose="020B0200000000000000" pitchFamily="34" charset="-128"/>
-                <a:ea typeface="Noto Sans KR Medium" panose="020B0200000000000000" pitchFamily="34" charset="-128"/>
-              </a:rPr>
-              <a:t>몬스터들을</a:t>
-            </a:r>
-            <a:r>
-              <a:rPr lang="ko-KR" altLang="en-US" sz="1000" dirty="0" smtClean="0">
-                <a:solidFill>
-                  <a:schemeClr val="bg1">
-                    <a:lumMod val="95000"/>
-                  </a:schemeClr>
-                </a:solidFill>
-                <a:latin typeface="Noto Sans KR Medium" panose="020B0200000000000000" pitchFamily="34" charset="-128"/>
-                <a:ea typeface="Noto Sans KR Medium" panose="020B0200000000000000" pitchFamily="34" charset="-128"/>
-              </a:rPr>
-              <a:t> </a:t>
-            </a:r>
-            <a:r>
-              <a:rPr lang="ko-KR" altLang="en-US" sz="1000" dirty="0" smtClean="0">
-                <a:solidFill>
-                  <a:schemeClr val="bg1">
-                    <a:lumMod val="95000"/>
-                  </a:schemeClr>
-                </a:solidFill>
-                <a:latin typeface="Noto Sans KR Medium" panose="020B0200000000000000" pitchFamily="34" charset="-128"/>
-                <a:ea typeface="Noto Sans KR Medium" panose="020B0200000000000000" pitchFamily="34" charset="-128"/>
-              </a:rPr>
-              <a:t>구성할 수 있도록 </a:t>
-            </a:r>
-            <a:r>
-              <a:rPr lang="ko-KR" altLang="en-US" sz="1000" dirty="0" smtClean="0">
-                <a:solidFill>
-                  <a:schemeClr val="bg1">
-                    <a:lumMod val="95000"/>
-                  </a:schemeClr>
-                </a:solidFill>
-                <a:latin typeface="Noto Sans KR Medium" panose="020B0200000000000000" pitchFamily="34" charset="-128"/>
-                <a:ea typeface="Noto Sans KR Medium" panose="020B0200000000000000" pitchFamily="34" charset="-128"/>
-              </a:rPr>
-              <a:t>했습니다</a:t>
-            </a:r>
-            <a:r>
-              <a:rPr lang="en-US" altLang="ko-KR" sz="1000" dirty="0" smtClean="0">
-                <a:solidFill>
-                  <a:schemeClr val="bg1">
-                    <a:lumMod val="95000"/>
-                  </a:schemeClr>
-                </a:solidFill>
-                <a:latin typeface="Noto Sans KR Medium" panose="020B0200000000000000" pitchFamily="34" charset="-128"/>
-                <a:ea typeface="Noto Sans KR Medium" panose="020B0200000000000000" pitchFamily="34" charset="-128"/>
-              </a:rPr>
-              <a:t>.</a:t>
-            </a:r>
-            <a:endParaRPr lang="en-US" altLang="ko-KR" sz="1000" dirty="0" smtClean="0">
-              <a:solidFill>
-                <a:schemeClr val="bg1">
-                  <a:lumMod val="95000"/>
-                </a:schemeClr>
-              </a:solidFill>
-              <a:latin typeface="Noto Sans KR Medium" panose="020B0200000000000000" pitchFamily="34" charset="-128"/>
-              <a:ea typeface="Noto Sans KR Medium" panose="020B0200000000000000" pitchFamily="34" charset="-128"/>
-            </a:endParaRPr>
           </a:p>
         </p:txBody>
       </p:sp>
@@ -24993,7 +25430,7 @@
         <p:spPr>
           <a:xfrm>
             <a:off x="454275" y="1480347"/>
-            <a:ext cx="5651249" cy="2246769"/>
+            <a:ext cx="5651249" cy="2092881"/>
           </a:xfrm>
           <a:prstGeom prst="rect">
             <a:avLst/>
@@ -25064,19 +25501,164 @@
                 <a:latin typeface="Noto Sans KR Medium" panose="020B0200000000000000" pitchFamily="34" charset="-128"/>
                 <a:ea typeface="Noto Sans KR Medium" panose="020B0200000000000000" pitchFamily="34" charset="-128"/>
               </a:rPr>
-              <a:t>일반 상태 </a:t>
-            </a:r>
-            <a:r>
-              <a:rPr lang="en-US" altLang="ko-KR" sz="1000" dirty="0" smtClean="0">
-                <a:solidFill>
-                  <a:schemeClr val="bg1">
-                    <a:lumMod val="95000"/>
-                  </a:schemeClr>
-                </a:solidFill>
-                <a:latin typeface="Noto Sans KR Medium" panose="020B0200000000000000" pitchFamily="34" charset="-128"/>
-                <a:ea typeface="Noto Sans KR Medium" panose="020B0200000000000000" pitchFamily="34" charset="-128"/>
-              </a:rPr>
-              <a:t>:</a:t>
+              <a:t>일반 </a:t>
+            </a:r>
+            <a:r>
+              <a:rPr lang="ko-KR" altLang="en-US" sz="1000" dirty="0" smtClean="0">
+                <a:solidFill>
+                  <a:schemeClr val="bg1">
+                    <a:lumMod val="95000"/>
+                  </a:schemeClr>
+                </a:solidFill>
+                <a:latin typeface="Noto Sans KR Medium" panose="020B0200000000000000" pitchFamily="34" charset="-128"/>
+                <a:ea typeface="Noto Sans KR Medium" panose="020B0200000000000000" pitchFamily="34" charset="-128"/>
+              </a:rPr>
+              <a:t>상태</a:t>
+            </a:r>
+            <a:endParaRPr lang="en-US" altLang="ko-KR" sz="1000" dirty="0" smtClean="0">
+              <a:solidFill>
+                <a:schemeClr val="bg1">
+                  <a:lumMod val="95000"/>
+                </a:schemeClr>
+              </a:solidFill>
+              <a:latin typeface="Noto Sans KR Medium" panose="020B0200000000000000" pitchFamily="34" charset="-128"/>
+              <a:ea typeface="Noto Sans KR Medium" panose="020B0200000000000000" pitchFamily="34" charset="-128"/>
+            </a:endParaRPr>
+          </a:p>
+          <a:p>
+            <a:r>
+              <a:rPr lang="ko-KR" altLang="en-US" sz="1000" dirty="0" smtClean="0">
+                <a:solidFill>
+                  <a:schemeClr val="bg1">
+                    <a:lumMod val="95000"/>
+                  </a:schemeClr>
+                </a:solidFill>
+                <a:latin typeface="Noto Sans KR Medium" panose="020B0200000000000000" pitchFamily="34" charset="-128"/>
+                <a:ea typeface="Noto Sans KR Medium" panose="020B0200000000000000" pitchFamily="34" charset="-128"/>
+              </a:rPr>
+              <a:t>주변을 돌아다니며 탐색합니다</a:t>
+            </a:r>
+            <a:r>
+              <a:rPr lang="en-US" altLang="ko-KR" sz="1000" dirty="0" smtClean="0">
+                <a:solidFill>
+                  <a:schemeClr val="bg1">
+                    <a:lumMod val="95000"/>
+                  </a:schemeClr>
+                </a:solidFill>
+                <a:latin typeface="Noto Sans KR Medium" panose="020B0200000000000000" pitchFamily="34" charset="-128"/>
+                <a:ea typeface="Noto Sans KR Medium" panose="020B0200000000000000" pitchFamily="34" charset="-128"/>
+              </a:rPr>
+              <a:t>.</a:t>
+            </a:r>
+          </a:p>
+          <a:p>
+            <a:r>
+              <a:rPr lang="en-US" altLang="ko-KR" sz="1000" dirty="0" err="1" smtClean="0">
+                <a:solidFill>
+                  <a:schemeClr val="bg1">
+                    <a:lumMod val="95000"/>
+                  </a:schemeClr>
+                </a:solidFill>
+                <a:latin typeface="Noto Sans KR Medium" panose="020B0200000000000000" pitchFamily="34" charset="-128"/>
+                <a:ea typeface="Noto Sans KR Medium" panose="020B0200000000000000" pitchFamily="34" charset="-128"/>
+              </a:rPr>
+              <a:t>UBTService</a:t>
+            </a:r>
+            <a:r>
+              <a:rPr lang="ko-KR" altLang="en-US" sz="1000" dirty="0" smtClean="0">
+                <a:solidFill>
+                  <a:schemeClr val="bg1">
+                    <a:lumMod val="95000"/>
+                  </a:schemeClr>
+                </a:solidFill>
+                <a:latin typeface="Noto Sans KR Medium" panose="020B0200000000000000" pitchFamily="34" charset="-128"/>
+                <a:ea typeface="Noto Sans KR Medium" panose="020B0200000000000000" pitchFamily="34" charset="-128"/>
+              </a:rPr>
+              <a:t>를 상속한 </a:t>
+            </a:r>
+            <a:r>
+              <a:rPr lang="en-US" altLang="ko-KR" sz="1000" dirty="0" err="1" smtClean="0">
+                <a:solidFill>
+                  <a:schemeClr val="bg1">
+                    <a:lumMod val="95000"/>
+                  </a:schemeClr>
+                </a:solidFill>
+                <a:latin typeface="Noto Sans KR Medium" panose="020B0200000000000000" pitchFamily="34" charset="-128"/>
+                <a:ea typeface="Noto Sans KR Medium" panose="020B0200000000000000" pitchFamily="34" charset="-128"/>
+              </a:rPr>
+              <a:t>UFindPlayerService</a:t>
+            </a:r>
+            <a:r>
+              <a:rPr lang="ko-KR" altLang="en-US" sz="1000" dirty="0" smtClean="0">
+                <a:solidFill>
+                  <a:schemeClr val="bg1">
+                    <a:lumMod val="95000"/>
+                  </a:schemeClr>
+                </a:solidFill>
+                <a:latin typeface="Noto Sans KR Medium" panose="020B0200000000000000" pitchFamily="34" charset="-128"/>
+                <a:ea typeface="Noto Sans KR Medium" panose="020B0200000000000000" pitchFamily="34" charset="-128"/>
+              </a:rPr>
+              <a:t>에서 </a:t>
+            </a:r>
+            <a:r>
+              <a:rPr lang="en-US" altLang="ko-KR" sz="1000" dirty="0" smtClean="0">
+                <a:solidFill>
+                  <a:schemeClr val="bg1">
+                    <a:lumMod val="95000"/>
+                  </a:schemeClr>
+                </a:solidFill>
+                <a:latin typeface="Noto Sans KR Medium" panose="020B0200000000000000" pitchFamily="34" charset="-128"/>
+                <a:ea typeface="Noto Sans KR Medium" panose="020B0200000000000000" pitchFamily="34" charset="-128"/>
+              </a:rPr>
+              <a:t>1</a:t>
+            </a:r>
+            <a:r>
+              <a:rPr lang="ko-KR" altLang="en-US" sz="1000" dirty="0" smtClean="0">
+                <a:solidFill>
+                  <a:schemeClr val="bg1">
+                    <a:lumMod val="95000"/>
+                  </a:schemeClr>
+                </a:solidFill>
+                <a:latin typeface="Noto Sans KR Medium" panose="020B0200000000000000" pitchFamily="34" charset="-128"/>
+                <a:ea typeface="Noto Sans KR Medium" panose="020B0200000000000000" pitchFamily="34" charset="-128"/>
+              </a:rPr>
+              <a:t>초 마다 </a:t>
+            </a:r>
+            <a:r>
+              <a:rPr lang="en-US" altLang="ko-KR" sz="1000" dirty="0" err="1" smtClean="0">
+                <a:solidFill>
+                  <a:schemeClr val="bg1">
+                    <a:lumMod val="95000"/>
+                  </a:schemeClr>
+                </a:solidFill>
+                <a:latin typeface="Noto Sans KR Medium" panose="020B0200000000000000" pitchFamily="34" charset="-128"/>
+                <a:ea typeface="Noto Sans KR Medium" panose="020B0200000000000000" pitchFamily="34" charset="-128"/>
+              </a:rPr>
+              <a:t>SphereTrace</a:t>
+            </a:r>
+            <a:r>
+              <a:rPr lang="ko-KR" altLang="en-US" sz="1000" dirty="0" smtClean="0">
+                <a:solidFill>
+                  <a:schemeClr val="bg1">
+                    <a:lumMod val="95000"/>
+                  </a:schemeClr>
+                </a:solidFill>
+                <a:latin typeface="Noto Sans KR Medium" panose="020B0200000000000000" pitchFamily="34" charset="-128"/>
+                <a:ea typeface="Noto Sans KR Medium" panose="020B0200000000000000" pitchFamily="34" charset="-128"/>
+              </a:rPr>
+              <a:t>로 주변을 탐색합니다</a:t>
+            </a:r>
+            <a:r>
+              <a:rPr lang="en-US" altLang="ko-KR" sz="1000" dirty="0" smtClean="0">
+                <a:solidFill>
+                  <a:schemeClr val="bg1">
+                    <a:lumMod val="95000"/>
+                  </a:schemeClr>
+                </a:solidFill>
+                <a:latin typeface="Noto Sans KR Medium" panose="020B0200000000000000" pitchFamily="34" charset="-128"/>
+                <a:ea typeface="Noto Sans KR Medium" panose="020B0200000000000000" pitchFamily="34" charset="-128"/>
+              </a:rPr>
+              <a:t>.</a:t>
             </a:r>
             <a:endParaRPr lang="en-US" altLang="ko-KR" sz="1000" dirty="0">
               <a:solidFill>
@@ -25089,45 +25671,17 @@
             </a:endParaRPr>
           </a:p>
           <a:p>
-            <a:pPr marL="171450" indent="-171450">
-              <a:buFontTx/>
-              <a:buChar char="-"/>
-            </a:pPr>
-            <a:r>
-              <a:rPr lang="ko-KR" altLang="en-US" sz="1000" dirty="0" smtClean="0">
-                <a:solidFill>
-                  <a:schemeClr val="bg1">
-                    <a:lumMod val="95000"/>
-                  </a:schemeClr>
-                </a:solidFill>
-                <a:latin typeface="Noto Sans KR Medium" panose="020B0200000000000000" pitchFamily="34" charset="-128"/>
-                <a:ea typeface="Noto Sans KR Medium" panose="020B0200000000000000" pitchFamily="34" charset="-128"/>
-              </a:rPr>
-              <a:t>주변을 </a:t>
-            </a:r>
-            <a:r>
-              <a:rPr lang="ko-KR" altLang="en-US" sz="1000" dirty="0" smtClean="0">
-                <a:solidFill>
-                  <a:schemeClr val="bg1">
-                    <a:lumMod val="95000"/>
-                  </a:schemeClr>
-                </a:solidFill>
-                <a:latin typeface="Noto Sans KR Medium" panose="020B0200000000000000" pitchFamily="34" charset="-128"/>
-                <a:ea typeface="Noto Sans KR Medium" panose="020B0200000000000000" pitchFamily="34" charset="-128"/>
-              </a:rPr>
-              <a:t>돌아다니며 </a:t>
-            </a:r>
-            <a:r>
-              <a:rPr lang="ko-KR" altLang="en-US" sz="1000" dirty="0" smtClean="0">
-                <a:solidFill>
-                  <a:schemeClr val="bg1">
-                    <a:lumMod val="95000"/>
-                  </a:schemeClr>
-                </a:solidFill>
-                <a:latin typeface="Noto Sans KR Medium" panose="020B0200000000000000" pitchFamily="34" charset="-128"/>
-                <a:ea typeface="Noto Sans KR Medium" panose="020B0200000000000000" pitchFamily="34" charset="-128"/>
-              </a:rPr>
-              <a:t>탐색합니다</a:t>
+            <a:r>
+              <a:rPr lang="ko-KR" altLang="en-US" sz="1000" dirty="0" smtClean="0">
+                <a:solidFill>
+                  <a:schemeClr val="bg1">
+                    <a:lumMod val="95000"/>
+                  </a:schemeClr>
+                </a:solidFill>
+                <a:latin typeface="Noto Sans KR Medium" panose="020B0200000000000000" pitchFamily="34" charset="-128"/>
+                <a:ea typeface="Noto Sans KR Medium" panose="020B0200000000000000" pitchFamily="34" charset="-128"/>
+              </a:rPr>
+              <a:t>적을 발견하면 공격 상태로 전환합니다</a:t>
             </a:r>
             <a:r>
               <a:rPr lang="en-US" altLang="ko-KR" sz="1000" dirty="0" smtClean="0">
@@ -25141,225 +25695,6 @@
               </a:rPr>
               <a:t>.</a:t>
             </a:r>
-            <a:endParaRPr lang="en-US" altLang="ko-KR" sz="1000" dirty="0">
-              <a:solidFill>
-                <a:schemeClr val="bg1">
-                  <a:lumMod val="95000"/>
-                </a:schemeClr>
-              </a:solidFill>
-              <a:latin typeface="Noto Sans KR Medium" panose="020B0200000000000000" pitchFamily="34" charset="-128"/>
-              <a:ea typeface="Noto Sans KR Medium" panose="020B0200000000000000" pitchFamily="34" charset="-128"/>
-            </a:endParaRPr>
-          </a:p>
-          <a:p>
-            <a:pPr marL="171450" indent="-171450">
-              <a:buFontTx/>
-              <a:buChar char="-"/>
-            </a:pPr>
-            <a:r>
-              <a:rPr lang="en-US" altLang="ko-KR" sz="1000" dirty="0" err="1" smtClean="0">
-                <a:solidFill>
-                  <a:schemeClr val="bg1">
-                    <a:lumMod val="95000"/>
-                  </a:schemeClr>
-                </a:solidFill>
-                <a:latin typeface="Noto Sans KR Medium" panose="020B0200000000000000" pitchFamily="34" charset="-128"/>
-                <a:ea typeface="Noto Sans KR Medium" panose="020B0200000000000000" pitchFamily="34" charset="-128"/>
-              </a:rPr>
-              <a:t>UBTService</a:t>
-            </a:r>
-            <a:r>
-              <a:rPr lang="ko-KR" altLang="en-US" sz="1000" dirty="0" smtClean="0">
-                <a:solidFill>
-                  <a:schemeClr val="bg1">
-                    <a:lumMod val="95000"/>
-                  </a:schemeClr>
-                </a:solidFill>
-                <a:latin typeface="Noto Sans KR Medium" panose="020B0200000000000000" pitchFamily="34" charset="-128"/>
-                <a:ea typeface="Noto Sans KR Medium" panose="020B0200000000000000" pitchFamily="34" charset="-128"/>
-              </a:rPr>
-              <a:t>를 </a:t>
-            </a:r>
-            <a:r>
-              <a:rPr lang="ko-KR" altLang="en-US" sz="1000" dirty="0" smtClean="0">
-                <a:solidFill>
-                  <a:schemeClr val="bg1">
-                    <a:lumMod val="95000"/>
-                  </a:schemeClr>
-                </a:solidFill>
-                <a:latin typeface="Noto Sans KR Medium" panose="020B0200000000000000" pitchFamily="34" charset="-128"/>
-                <a:ea typeface="Noto Sans KR Medium" panose="020B0200000000000000" pitchFamily="34" charset="-128"/>
-              </a:rPr>
-              <a:t>상속한 </a:t>
-            </a:r>
-            <a:r>
-              <a:rPr lang="en-US" altLang="ko-KR" sz="1000" dirty="0" err="1" smtClean="0">
-                <a:solidFill>
-                  <a:schemeClr val="bg1">
-                    <a:lumMod val="95000"/>
-                  </a:schemeClr>
-                </a:solidFill>
-                <a:latin typeface="Noto Sans KR Medium" panose="020B0200000000000000" pitchFamily="34" charset="-128"/>
-                <a:ea typeface="Noto Sans KR Medium" panose="020B0200000000000000" pitchFamily="34" charset="-128"/>
-              </a:rPr>
-              <a:t>UFindPlayerService</a:t>
-            </a:r>
-            <a:r>
-              <a:rPr lang="ko-KR" altLang="en-US" sz="1000" dirty="0" smtClean="0">
-                <a:solidFill>
-                  <a:schemeClr val="bg1">
-                    <a:lumMod val="95000"/>
-                  </a:schemeClr>
-                </a:solidFill>
-                <a:latin typeface="Noto Sans KR Medium" panose="020B0200000000000000" pitchFamily="34" charset="-128"/>
-                <a:ea typeface="Noto Sans KR Medium" panose="020B0200000000000000" pitchFamily="34" charset="-128"/>
-              </a:rPr>
-              <a:t>에서 </a:t>
-            </a:r>
-            <a:r>
-              <a:rPr lang="en-US" altLang="ko-KR" sz="1000" dirty="0" smtClean="0">
-                <a:solidFill>
-                  <a:schemeClr val="bg1">
-                    <a:lumMod val="95000"/>
-                  </a:schemeClr>
-                </a:solidFill>
-                <a:latin typeface="Noto Sans KR Medium" panose="020B0200000000000000" pitchFamily="34" charset="-128"/>
-                <a:ea typeface="Noto Sans KR Medium" panose="020B0200000000000000" pitchFamily="34" charset="-128"/>
-              </a:rPr>
-              <a:t>1</a:t>
-            </a:r>
-            <a:r>
-              <a:rPr lang="ko-KR" altLang="en-US" sz="1000" dirty="0" smtClean="0">
-                <a:solidFill>
-                  <a:schemeClr val="bg1">
-                    <a:lumMod val="95000"/>
-                  </a:schemeClr>
-                </a:solidFill>
-                <a:latin typeface="Noto Sans KR Medium" panose="020B0200000000000000" pitchFamily="34" charset="-128"/>
-                <a:ea typeface="Noto Sans KR Medium" panose="020B0200000000000000" pitchFamily="34" charset="-128"/>
-              </a:rPr>
-              <a:t>초 </a:t>
-            </a:r>
-            <a:r>
-              <a:rPr lang="ko-KR" altLang="en-US" sz="1000" dirty="0" smtClean="0">
-                <a:solidFill>
-                  <a:schemeClr val="bg1">
-                    <a:lumMod val="95000"/>
-                  </a:schemeClr>
-                </a:solidFill>
-                <a:latin typeface="Noto Sans KR Medium" panose="020B0200000000000000" pitchFamily="34" charset="-128"/>
-                <a:ea typeface="Noto Sans KR Medium" panose="020B0200000000000000" pitchFamily="34" charset="-128"/>
-              </a:rPr>
-              <a:t>마다 </a:t>
-            </a:r>
-            <a:r>
-              <a:rPr lang="en-US" altLang="ko-KR" sz="1000" dirty="0" err="1" smtClean="0">
-                <a:solidFill>
-                  <a:schemeClr val="bg1">
-                    <a:lumMod val="95000"/>
-                  </a:schemeClr>
-                </a:solidFill>
-                <a:latin typeface="Noto Sans KR Medium" panose="020B0200000000000000" pitchFamily="34" charset="-128"/>
-                <a:ea typeface="Noto Sans KR Medium" panose="020B0200000000000000" pitchFamily="34" charset="-128"/>
-              </a:rPr>
-              <a:t>SphereTrace</a:t>
-            </a:r>
-            <a:r>
-              <a:rPr lang="ko-KR" altLang="en-US" sz="1000" dirty="0" smtClean="0">
-                <a:solidFill>
-                  <a:schemeClr val="bg1">
-                    <a:lumMod val="95000"/>
-                  </a:schemeClr>
-                </a:solidFill>
-                <a:latin typeface="Noto Sans KR Medium" panose="020B0200000000000000" pitchFamily="34" charset="-128"/>
-                <a:ea typeface="Noto Sans KR Medium" panose="020B0200000000000000" pitchFamily="34" charset="-128"/>
-              </a:rPr>
-              <a:t>로 주변을 탐색합니다</a:t>
-            </a:r>
-            <a:r>
-              <a:rPr lang="en-US" altLang="ko-KR" sz="1000" dirty="0" smtClean="0">
-                <a:solidFill>
-                  <a:schemeClr val="bg1">
-                    <a:lumMod val="95000"/>
-                  </a:schemeClr>
-                </a:solidFill>
-                <a:latin typeface="Noto Sans KR Medium" panose="020B0200000000000000" pitchFamily="34" charset="-128"/>
-                <a:ea typeface="Noto Sans KR Medium" panose="020B0200000000000000" pitchFamily="34" charset="-128"/>
-              </a:rPr>
-              <a:t>.</a:t>
-            </a:r>
-            <a:endParaRPr lang="en-US" altLang="ko-KR" sz="1000" dirty="0">
-              <a:solidFill>
-                <a:schemeClr val="bg1">
-                  <a:lumMod val="95000"/>
-                </a:schemeClr>
-              </a:solidFill>
-              <a:latin typeface="Noto Sans KR Medium" panose="020B0200000000000000" pitchFamily="34" charset="-128"/>
-              <a:ea typeface="Noto Sans KR Medium" panose="020B0200000000000000" pitchFamily="34" charset="-128"/>
-            </a:endParaRPr>
-          </a:p>
-          <a:p>
-            <a:pPr marL="171450" indent="-171450">
-              <a:buFontTx/>
-              <a:buChar char="-"/>
-            </a:pPr>
-            <a:r>
-              <a:rPr lang="ko-KR" altLang="en-US" sz="1000" dirty="0" smtClean="0">
-                <a:solidFill>
-                  <a:schemeClr val="bg1">
-                    <a:lumMod val="95000"/>
-                  </a:schemeClr>
-                </a:solidFill>
-                <a:latin typeface="Noto Sans KR Medium" panose="020B0200000000000000" pitchFamily="34" charset="-128"/>
-                <a:ea typeface="Noto Sans KR Medium" panose="020B0200000000000000" pitchFamily="34" charset="-128"/>
-              </a:rPr>
-              <a:t>적을 </a:t>
-            </a:r>
-            <a:r>
-              <a:rPr lang="ko-KR" altLang="en-US" sz="1000" dirty="0" smtClean="0">
-                <a:solidFill>
-                  <a:schemeClr val="bg1">
-                    <a:lumMod val="95000"/>
-                  </a:schemeClr>
-                </a:solidFill>
-                <a:latin typeface="Noto Sans KR Medium" panose="020B0200000000000000" pitchFamily="34" charset="-128"/>
-                <a:ea typeface="Noto Sans KR Medium" panose="020B0200000000000000" pitchFamily="34" charset="-128"/>
-              </a:rPr>
-              <a:t>발견하면 공격 상태로 </a:t>
-            </a:r>
-            <a:r>
-              <a:rPr lang="ko-KR" altLang="en-US" sz="1000" dirty="0" smtClean="0">
-                <a:solidFill>
-                  <a:schemeClr val="bg1">
-                    <a:lumMod val="95000"/>
-                  </a:schemeClr>
-                </a:solidFill>
-                <a:latin typeface="Noto Sans KR Medium" panose="020B0200000000000000" pitchFamily="34" charset="-128"/>
-                <a:ea typeface="Noto Sans KR Medium" panose="020B0200000000000000" pitchFamily="34" charset="-128"/>
-              </a:rPr>
-              <a:t>전환합니다</a:t>
-            </a:r>
-            <a:r>
-              <a:rPr lang="en-US" altLang="ko-KR" sz="1000" dirty="0" smtClean="0">
-                <a:solidFill>
-                  <a:schemeClr val="bg1">
-                    <a:lumMod val="95000"/>
-                  </a:schemeClr>
-                </a:solidFill>
-                <a:latin typeface="Noto Sans KR Medium" panose="020B0200000000000000" pitchFamily="34" charset="-128"/>
-                <a:ea typeface="Noto Sans KR Medium" panose="020B0200000000000000" pitchFamily="34" charset="-128"/>
-              </a:rPr>
-              <a:t>.</a:t>
-            </a:r>
-            <a:endParaRPr lang="en-US" altLang="ko-KR" sz="1000" dirty="0" smtClean="0">
-              <a:solidFill>
-                <a:schemeClr val="bg1">
-                  <a:lumMod val="95000"/>
-                </a:schemeClr>
-              </a:solidFill>
-              <a:latin typeface="Noto Sans KR Medium" panose="020B0200000000000000" pitchFamily="34" charset="-128"/>
-              <a:ea typeface="Noto Sans KR Medium" panose="020B0200000000000000" pitchFamily="34" charset="-128"/>
-            </a:endParaRPr>
           </a:p>
           <a:p>
             <a:pPr marL="171450" indent="-171450">
@@ -25387,26 +25722,31 @@
                 <a:latin typeface="Noto Sans KR Medium" panose="020B0200000000000000" pitchFamily="34" charset="-128"/>
                 <a:ea typeface="Noto Sans KR Medium" panose="020B0200000000000000" pitchFamily="34" charset="-128"/>
               </a:rPr>
-              <a:t>공격 상태 </a:t>
-            </a:r>
-            <a:r>
-              <a:rPr lang="en-US" altLang="ko-KR" sz="1000" dirty="0" smtClean="0">
-                <a:solidFill>
-                  <a:schemeClr val="bg1">
-                    <a:lumMod val="95000"/>
-                  </a:schemeClr>
-                </a:solidFill>
-                <a:latin typeface="Noto Sans KR Medium" panose="020B0200000000000000" pitchFamily="34" charset="-128"/>
-                <a:ea typeface="Noto Sans KR Medium" panose="020B0200000000000000" pitchFamily="34" charset="-128"/>
-              </a:rPr>
-              <a:t>:</a:t>
-            </a:r>
-          </a:p>
-          <a:p>
-            <a:pPr marL="171450" indent="-171450">
-              <a:buFontTx/>
-              <a:buChar char="-"/>
-            </a:pPr>
+              <a:t>공격 </a:t>
+            </a:r>
+            <a:r>
+              <a:rPr lang="ko-KR" altLang="en-US" sz="1000" dirty="0" smtClean="0">
+                <a:solidFill>
+                  <a:schemeClr val="bg1">
+                    <a:lumMod val="95000"/>
+                  </a:schemeClr>
+                </a:solidFill>
+                <a:latin typeface="Noto Sans KR Medium" panose="020B0200000000000000" pitchFamily="34" charset="-128"/>
+                <a:ea typeface="Noto Sans KR Medium" panose="020B0200000000000000" pitchFamily="34" charset="-128"/>
+              </a:rPr>
+              <a:t>상태</a:t>
+            </a:r>
+            <a:endParaRPr lang="en-US" altLang="ko-KR" sz="1000" dirty="0" smtClean="0">
+              <a:solidFill>
+                <a:schemeClr val="bg1">
+                  <a:lumMod val="95000"/>
+                </a:schemeClr>
+              </a:solidFill>
+              <a:latin typeface="Noto Sans KR Medium" panose="020B0200000000000000" pitchFamily="34" charset="-128"/>
+              <a:ea typeface="Noto Sans KR Medium" panose="020B0200000000000000" pitchFamily="34" charset="-128"/>
+            </a:endParaRPr>
+          </a:p>
+          <a:p>
             <a:r>
               <a:rPr lang="ko-KR" altLang="en-US" sz="1000" dirty="0" err="1" smtClean="0">
                 <a:solidFill>
@@ -25453,19 +25793,7 @@
                 <a:latin typeface="Noto Sans KR Medium" panose="020B0200000000000000" pitchFamily="34" charset="-128"/>
                 <a:ea typeface="Noto Sans KR Medium" panose="020B0200000000000000" pitchFamily="34" charset="-128"/>
               </a:rPr>
-              <a:t>공격 범위 내일 </a:t>
-            </a:r>
-            <a:r>
-              <a:rPr lang="ko-KR" altLang="en-US" sz="1000" dirty="0" smtClean="0">
-                <a:solidFill>
-                  <a:schemeClr val="bg1">
-                    <a:lumMod val="95000"/>
-                  </a:schemeClr>
-                </a:solidFill>
-                <a:latin typeface="Noto Sans KR Medium" panose="020B0200000000000000" pitchFamily="34" charset="-128"/>
-                <a:ea typeface="Noto Sans KR Medium" panose="020B0200000000000000" pitchFamily="34" charset="-128"/>
-              </a:rPr>
-              <a:t>때 공격합니다</a:t>
+              <a:t>공격 범위 내일 때 공격합니다</a:t>
             </a:r>
             <a:r>
               <a:rPr lang="en-US" altLang="ko-KR" sz="1000" dirty="0" smtClean="0">
@@ -25490,10 +25818,6 @@
             </a:endParaRPr>
           </a:p>
           <a:p>
-            <a:pPr marL="171450" indent="-171450">
-              <a:buFontTx/>
-              <a:buChar char="-"/>
-            </a:pPr>
             <a:r>
               <a:rPr lang="en-US" altLang="ko-KR" sz="1000" dirty="0" err="1" smtClean="0">
                 <a:solidFill>
@@ -25516,19 +25840,7 @@
                 <a:latin typeface="Noto Sans KR Medium" panose="020B0200000000000000" pitchFamily="34" charset="-128"/>
                 <a:ea typeface="Noto Sans KR Medium" panose="020B0200000000000000" pitchFamily="34" charset="-128"/>
               </a:rPr>
-              <a:t>를 </a:t>
-            </a:r>
-            <a:r>
-              <a:rPr lang="ko-KR" altLang="en-US" sz="1000" dirty="0" smtClean="0">
-                <a:solidFill>
-                  <a:schemeClr val="bg1">
-                    <a:lumMod val="95000"/>
-                  </a:schemeClr>
-                </a:solidFill>
-                <a:latin typeface="Noto Sans KR Medium" panose="020B0200000000000000" pitchFamily="34" charset="-128"/>
-                <a:ea typeface="Noto Sans KR Medium" panose="020B0200000000000000" pitchFamily="34" charset="-128"/>
-              </a:rPr>
-              <a:t>상속한 </a:t>
+              <a:t>를 상속한 </a:t>
             </a:r>
             <a:r>
               <a:rPr lang="en-US" altLang="ko-KR" sz="1000" dirty="0" err="1" smtClean="0">
@@ -25576,31 +25888,7 @@
                 <a:latin typeface="Noto Sans KR Medium" panose="020B0200000000000000" pitchFamily="34" charset="-128"/>
                 <a:ea typeface="Noto Sans KR Medium" panose="020B0200000000000000" pitchFamily="34" charset="-128"/>
               </a:rPr>
-              <a:t> </a:t>
-            </a:r>
-            <a:r>
-              <a:rPr lang="ko-KR" altLang="en-US" sz="1000" dirty="0" smtClean="0">
-                <a:solidFill>
-                  <a:schemeClr val="bg1">
-                    <a:lumMod val="95000"/>
-                  </a:schemeClr>
-                </a:solidFill>
-                <a:latin typeface="Noto Sans KR Medium" panose="020B0200000000000000" pitchFamily="34" charset="-128"/>
-                <a:ea typeface="Noto Sans KR Medium" panose="020B0200000000000000" pitchFamily="34" charset="-128"/>
-              </a:rPr>
-              <a:t>가진 액션 중 랜덤으로 공격 액션을 수행하도록 </a:t>
-            </a:r>
-            <a:r>
-              <a:rPr lang="ko-KR" altLang="en-US" sz="1000" dirty="0" smtClean="0">
-                <a:solidFill>
-                  <a:schemeClr val="bg1">
-                    <a:lumMod val="95000"/>
-                  </a:schemeClr>
-                </a:solidFill>
-                <a:latin typeface="Noto Sans KR Medium" panose="020B0200000000000000" pitchFamily="34" charset="-128"/>
-                <a:ea typeface="Noto Sans KR Medium" panose="020B0200000000000000" pitchFamily="34" charset="-128"/>
-              </a:rPr>
-              <a:t>구현했습니다</a:t>
+              <a:t> 가진 액션 중 랜덤으로 공격 액션을 수행하도록 구현했습니다</a:t>
             </a:r>
             <a:r>
               <a:rPr lang="en-US" altLang="ko-KR" sz="1000" dirty="0" smtClean="0">
@@ -25614,6 +25902,8 @@
               </a:rPr>
               <a:t>.</a:t>
             </a:r>
+          </a:p>
+          <a:p>
             <a:endParaRPr lang="en-US" altLang="ko-KR" sz="1000" dirty="0" smtClean="0">
               <a:solidFill>
                 <a:schemeClr val="bg1">
@@ -25625,70 +25915,29 @@
             </a:endParaRPr>
           </a:p>
           <a:p>
-            <a:endParaRPr lang="en-US" altLang="ko-KR" sz="1000" dirty="0" smtClean="0">
-              <a:solidFill>
-                <a:schemeClr val="bg1">
-                  <a:lumMod val="95000"/>
-                </a:schemeClr>
-              </a:solidFill>
-              <a:latin typeface="Noto Sans KR Medium" panose="020B0200000000000000" pitchFamily="34" charset="-128"/>
-              <a:ea typeface="Noto Sans KR Medium" panose="020B0200000000000000" pitchFamily="34" charset="-128"/>
-            </a:endParaRPr>
-          </a:p>
-          <a:p>
-            <a:r>
-              <a:rPr lang="ko-KR" altLang="en-US" sz="1000" dirty="0" smtClean="0">
-                <a:solidFill>
-                  <a:schemeClr val="bg1">
-                    <a:lumMod val="95000"/>
-                  </a:schemeClr>
-                </a:solidFill>
-                <a:latin typeface="Noto Sans KR Medium" panose="020B0200000000000000" pitchFamily="34" charset="-128"/>
-                <a:ea typeface="Noto Sans KR Medium" panose="020B0200000000000000" pitchFamily="34" charset="-128"/>
-              </a:rPr>
-              <a:t>추적 불</a:t>
-            </a:r>
-            <a:r>
-              <a:rPr lang="ko-KR" altLang="en-US" sz="1000" dirty="0" smtClean="0">
-                <a:solidFill>
-                  <a:schemeClr val="bg1">
-                    <a:lumMod val="95000"/>
-                  </a:schemeClr>
-                </a:solidFill>
-                <a:latin typeface="Noto Sans KR Medium" panose="020B0200000000000000" pitchFamily="34" charset="-128"/>
-                <a:ea typeface="Noto Sans KR Medium" panose="020B0200000000000000" pitchFamily="34" charset="-128"/>
-              </a:rPr>
-              <a:t>가한 경우 </a:t>
-            </a:r>
-            <a:r>
-              <a:rPr lang="en-US" altLang="ko-KR" sz="1000" dirty="0" smtClean="0">
-                <a:solidFill>
-                  <a:schemeClr val="bg1">
-                    <a:lumMod val="95000"/>
-                  </a:schemeClr>
-                </a:solidFill>
-                <a:latin typeface="Noto Sans KR Medium" panose="020B0200000000000000" pitchFamily="34" charset="-128"/>
-                <a:ea typeface="Noto Sans KR Medium" panose="020B0200000000000000" pitchFamily="34" charset="-128"/>
-              </a:rPr>
-              <a:t>:</a:t>
-            </a:r>
-          </a:p>
-          <a:p>
-            <a:pPr marL="171450" indent="-171450">
-              <a:buFontTx/>
-              <a:buChar char="-"/>
-            </a:pPr>
-            <a:r>
-              <a:rPr lang="ko-KR" altLang="en-US" sz="1000" dirty="0" smtClean="0">
-                <a:solidFill>
-                  <a:schemeClr val="bg1">
-                    <a:lumMod val="95000"/>
-                  </a:schemeClr>
-                </a:solidFill>
-                <a:latin typeface="Noto Sans KR Medium" panose="020B0200000000000000" pitchFamily="34" charset="-128"/>
-                <a:ea typeface="Noto Sans KR Medium" panose="020B0200000000000000" pitchFamily="34" charset="-128"/>
-              </a:rPr>
-              <a:t>일정 </a:t>
+            <a:r>
+              <a:rPr lang="ko-KR" altLang="en-US" sz="1000" dirty="0" smtClean="0">
+                <a:solidFill>
+                  <a:schemeClr val="bg1">
+                    <a:lumMod val="95000"/>
+                  </a:schemeClr>
+                </a:solidFill>
+                <a:latin typeface="Noto Sans KR Medium" panose="020B0200000000000000" pitchFamily="34" charset="-128"/>
+                <a:ea typeface="Noto Sans KR Medium" panose="020B0200000000000000" pitchFamily="34" charset="-128"/>
+              </a:rPr>
+              <a:t>추적 불가한 </a:t>
+            </a:r>
+            <a:r>
+              <a:rPr lang="ko-KR" altLang="en-US" sz="1000" dirty="0" smtClean="0">
+                <a:solidFill>
+                  <a:schemeClr val="bg1">
+                    <a:lumMod val="95000"/>
+                  </a:schemeClr>
+                </a:solidFill>
+                <a:latin typeface="Noto Sans KR Medium" panose="020B0200000000000000" pitchFamily="34" charset="-128"/>
+                <a:ea typeface="Noto Sans KR Medium" panose="020B0200000000000000" pitchFamily="34" charset="-128"/>
+              </a:rPr>
+              <a:t>경우 일정 </a:t>
             </a:r>
             <a:r>
               <a:rPr lang="ko-KR" altLang="en-US" sz="1000" dirty="0" smtClean="0">
@@ -25724,19 +25973,7 @@
                 <a:latin typeface="Noto Sans KR Medium" panose="020B0200000000000000" pitchFamily="34" charset="-128"/>
                 <a:ea typeface="Noto Sans KR Medium" panose="020B0200000000000000" pitchFamily="34" charset="-128"/>
               </a:rPr>
-              <a:t>다시 일반 상태로 </a:t>
-            </a:r>
-            <a:r>
-              <a:rPr lang="ko-KR" altLang="en-US" sz="1000" dirty="0" smtClean="0">
-                <a:solidFill>
-                  <a:schemeClr val="bg1">
-                    <a:lumMod val="95000"/>
-                  </a:schemeClr>
-                </a:solidFill>
-                <a:latin typeface="Noto Sans KR Medium" panose="020B0200000000000000" pitchFamily="34" charset="-128"/>
-                <a:ea typeface="Noto Sans KR Medium" panose="020B0200000000000000" pitchFamily="34" charset="-128"/>
-              </a:rPr>
-              <a:t>복귀합니다</a:t>
+              <a:t>다시 일반 상태로 복귀합니다</a:t>
             </a:r>
             <a:r>
               <a:rPr lang="en-US" altLang="ko-KR" sz="1000" dirty="0" smtClean="0">
@@ -26130,19 +26367,7 @@
                 <a:latin typeface="Noto Sans KR Medium" panose="020B0200000000000000" pitchFamily="34" charset="-128"/>
                 <a:ea typeface="Noto Sans KR Medium" panose="020B0200000000000000" pitchFamily="34" charset="-128"/>
               </a:rPr>
-              <a:t> 수행할 수 있도록 </a:t>
-            </a:r>
-            <a:r>
-              <a:rPr lang="ko-KR" altLang="en-US" sz="1000" dirty="0" smtClean="0">
-                <a:solidFill>
-                  <a:schemeClr val="bg1">
-                    <a:lumMod val="95000"/>
-                  </a:schemeClr>
-                </a:solidFill>
-                <a:latin typeface="Noto Sans KR Medium" panose="020B0200000000000000" pitchFamily="34" charset="-128"/>
-                <a:ea typeface="Noto Sans KR Medium" panose="020B0200000000000000" pitchFamily="34" charset="-128"/>
-              </a:rPr>
-              <a:t>구현했습니다</a:t>
+              <a:t> 수행할 수 있도록 구현했습니다</a:t>
             </a:r>
             <a:r>
               <a:rPr lang="en-US" altLang="ko-KR" sz="1000" dirty="0" smtClean="0">
@@ -26156,6 +26381,180 @@
               </a:rPr>
               <a:t>.</a:t>
             </a:r>
+          </a:p>
+          <a:p>
+            <a:r>
+              <a:rPr lang="ko-KR" altLang="en-US" sz="1000" dirty="0" smtClean="0">
+                <a:solidFill>
+                  <a:schemeClr val="bg1">
+                    <a:lumMod val="95000"/>
+                  </a:schemeClr>
+                </a:solidFill>
+                <a:latin typeface="Noto Sans KR Medium" panose="020B0200000000000000" pitchFamily="34" charset="-128"/>
+                <a:ea typeface="Noto Sans KR Medium" panose="020B0200000000000000" pitchFamily="34" charset="-128"/>
+              </a:rPr>
+              <a:t>일반 액션마다 </a:t>
+            </a:r>
+            <a:r>
+              <a:rPr lang="en-US" altLang="ko-KR" sz="1000" dirty="0">
+                <a:solidFill>
+                  <a:schemeClr val="bg1">
+                    <a:lumMod val="95000"/>
+                  </a:schemeClr>
+                </a:solidFill>
+                <a:latin typeface="Noto Sans KR Medium" panose="020B0200000000000000" pitchFamily="34" charset="-128"/>
+                <a:ea typeface="Noto Sans KR Medium" panose="020B0200000000000000" pitchFamily="34" charset="-128"/>
+              </a:rPr>
+              <a:t>1</a:t>
+            </a:r>
+            <a:r>
+              <a:rPr lang="ko-KR" altLang="en-US" sz="1000" dirty="0" smtClean="0">
+                <a:solidFill>
+                  <a:schemeClr val="bg1">
+                    <a:lumMod val="95000"/>
+                  </a:schemeClr>
+                </a:solidFill>
+                <a:latin typeface="Noto Sans KR Medium" panose="020B0200000000000000" pitchFamily="34" charset="-128"/>
+                <a:ea typeface="Noto Sans KR Medium" panose="020B0200000000000000" pitchFamily="34" charset="-128"/>
+              </a:rPr>
+              <a:t>씩 스킬 포인트를 얻고</a:t>
+            </a:r>
+            <a:r>
+              <a:rPr lang="en-US" altLang="ko-KR" sz="1000" dirty="0" smtClean="0">
+                <a:solidFill>
+                  <a:schemeClr val="bg1">
+                    <a:lumMod val="95000"/>
+                  </a:schemeClr>
+                </a:solidFill>
+                <a:latin typeface="Noto Sans KR Medium" panose="020B0200000000000000" pitchFamily="34" charset="-128"/>
+                <a:ea typeface="Noto Sans KR Medium" panose="020B0200000000000000" pitchFamily="34" charset="-128"/>
+              </a:rPr>
+              <a:t>, 10 </a:t>
+            </a:r>
+            <a:r>
+              <a:rPr lang="ko-KR" altLang="en-US" sz="1000" dirty="0" smtClean="0">
+                <a:solidFill>
+                  <a:schemeClr val="bg1">
+                    <a:lumMod val="95000"/>
+                  </a:schemeClr>
+                </a:solidFill>
+                <a:latin typeface="Noto Sans KR Medium" panose="020B0200000000000000" pitchFamily="34" charset="-128"/>
+                <a:ea typeface="Noto Sans KR Medium" panose="020B0200000000000000" pitchFamily="34" charset="-128"/>
+              </a:rPr>
+              <a:t>이상 스킬 포인트가 모이면 </a:t>
+            </a:r>
+            <a:r>
+              <a:rPr lang="ko-KR" altLang="en-US" sz="1000" dirty="0" err="1" smtClean="0">
+                <a:solidFill>
+                  <a:schemeClr val="bg1">
+                    <a:lumMod val="95000"/>
+                  </a:schemeClr>
+                </a:solidFill>
+                <a:latin typeface="Noto Sans KR Medium" panose="020B0200000000000000" pitchFamily="34" charset="-128"/>
+                <a:ea typeface="Noto Sans KR Medium" panose="020B0200000000000000" pitchFamily="34" charset="-128"/>
+              </a:rPr>
+              <a:t>기믹</a:t>
+            </a:r>
+            <a:r>
+              <a:rPr lang="ko-KR" altLang="en-US" sz="1000" dirty="0" smtClean="0">
+                <a:solidFill>
+                  <a:schemeClr val="bg1">
+                    <a:lumMod val="95000"/>
+                  </a:schemeClr>
+                </a:solidFill>
+                <a:latin typeface="Noto Sans KR Medium" panose="020B0200000000000000" pitchFamily="34" charset="-128"/>
+                <a:ea typeface="Noto Sans KR Medium" panose="020B0200000000000000" pitchFamily="34" charset="-128"/>
+              </a:rPr>
+              <a:t> 액션을 수행합니다</a:t>
+            </a:r>
+            <a:r>
+              <a:rPr lang="en-US" altLang="ko-KR" sz="1000" dirty="0" smtClean="0">
+                <a:solidFill>
+                  <a:schemeClr val="bg1">
+                    <a:lumMod val="95000"/>
+                  </a:schemeClr>
+                </a:solidFill>
+                <a:latin typeface="Noto Sans KR Medium" panose="020B0200000000000000" pitchFamily="34" charset="-128"/>
+                <a:ea typeface="Noto Sans KR Medium" panose="020B0200000000000000" pitchFamily="34" charset="-128"/>
+              </a:rPr>
+              <a:t>.</a:t>
+            </a:r>
+          </a:p>
+          <a:p>
+            <a:r>
+              <a:rPr lang="ko-KR" altLang="en-US" sz="1000" dirty="0" smtClean="0">
+                <a:solidFill>
+                  <a:schemeClr val="bg1">
+                    <a:lumMod val="95000"/>
+                  </a:schemeClr>
+                </a:solidFill>
+                <a:latin typeface="Noto Sans KR Medium" panose="020B0200000000000000" pitchFamily="34" charset="-128"/>
+                <a:ea typeface="Noto Sans KR Medium" panose="020B0200000000000000" pitchFamily="34" charset="-128"/>
+              </a:rPr>
+              <a:t>각 </a:t>
+            </a:r>
+            <a:r>
+              <a:rPr lang="ko-KR" altLang="en-US" sz="1000" dirty="0" err="1" smtClean="0">
+                <a:solidFill>
+                  <a:schemeClr val="bg1">
+                    <a:lumMod val="95000"/>
+                  </a:schemeClr>
+                </a:solidFill>
+                <a:latin typeface="Noto Sans KR Medium" panose="020B0200000000000000" pitchFamily="34" charset="-128"/>
+                <a:ea typeface="Noto Sans KR Medium" panose="020B0200000000000000" pitchFamily="34" charset="-128"/>
+              </a:rPr>
+              <a:t>기믹</a:t>
+            </a:r>
+            <a:r>
+              <a:rPr lang="ko-KR" altLang="en-US" sz="1000" dirty="0" smtClean="0">
+                <a:solidFill>
+                  <a:schemeClr val="bg1">
+                    <a:lumMod val="95000"/>
+                  </a:schemeClr>
+                </a:solidFill>
+                <a:latin typeface="Noto Sans KR Medium" panose="020B0200000000000000" pitchFamily="34" charset="-128"/>
+                <a:ea typeface="Noto Sans KR Medium" panose="020B0200000000000000" pitchFamily="34" charset="-128"/>
+              </a:rPr>
+              <a:t> 액션을 파훼하면 보스 </a:t>
+            </a:r>
+            <a:r>
+              <a:rPr lang="ko-KR" altLang="en-US" sz="1000" dirty="0" err="1" smtClean="0">
+                <a:solidFill>
+                  <a:schemeClr val="bg1">
+                    <a:lumMod val="95000"/>
+                  </a:schemeClr>
+                </a:solidFill>
+                <a:latin typeface="Noto Sans KR Medium" panose="020B0200000000000000" pitchFamily="34" charset="-128"/>
+                <a:ea typeface="Noto Sans KR Medium" panose="020B0200000000000000" pitchFamily="34" charset="-128"/>
+              </a:rPr>
+              <a:t>몬스터는</a:t>
+            </a:r>
+            <a:r>
+              <a:rPr lang="ko-KR" altLang="en-US" sz="1000" dirty="0" smtClean="0">
+                <a:solidFill>
+                  <a:schemeClr val="bg1">
+                    <a:lumMod val="95000"/>
+                  </a:schemeClr>
+                </a:solidFill>
+                <a:latin typeface="Noto Sans KR Medium" panose="020B0200000000000000" pitchFamily="34" charset="-128"/>
+                <a:ea typeface="Noto Sans KR Medium" panose="020B0200000000000000" pitchFamily="34" charset="-128"/>
+              </a:rPr>
+              <a:t> 일시적으로 그로기 상태가 됩니다</a:t>
+            </a:r>
+            <a:r>
+              <a:rPr lang="en-US" altLang="ko-KR" sz="1000" dirty="0" smtClean="0">
+                <a:solidFill>
+                  <a:schemeClr val="bg1">
+                    <a:lumMod val="95000"/>
+                  </a:schemeClr>
+                </a:solidFill>
+                <a:latin typeface="Noto Sans KR Medium" panose="020B0200000000000000" pitchFamily="34" charset="-128"/>
+                <a:ea typeface="Noto Sans KR Medium" panose="020B0200000000000000" pitchFamily="34" charset="-128"/>
+              </a:rPr>
+              <a:t>.</a:t>
+            </a:r>
+          </a:p>
+          <a:p>
             <a:endParaRPr lang="en-US" altLang="ko-KR" sz="1000" dirty="0" smtClean="0">
               <a:solidFill>
                 <a:schemeClr val="bg1">
@@ -26168,66 +26567,6 @@
           </a:p>
           <a:p>
             <a:r>
-              <a:rPr lang="ko-KR" altLang="en-US" sz="1000" dirty="0" smtClean="0">
-                <a:solidFill>
-                  <a:schemeClr val="bg1">
-                    <a:lumMod val="95000"/>
-                  </a:schemeClr>
-                </a:solidFill>
-                <a:latin typeface="Noto Sans KR Medium" panose="020B0200000000000000" pitchFamily="34" charset="-128"/>
-                <a:ea typeface="Noto Sans KR Medium" panose="020B0200000000000000" pitchFamily="34" charset="-128"/>
-              </a:rPr>
-              <a:t>일반 액션마다 </a:t>
-            </a:r>
-            <a:r>
-              <a:rPr lang="en-US" altLang="ko-KR" sz="1000" dirty="0">
-                <a:solidFill>
-                  <a:schemeClr val="bg1">
-                    <a:lumMod val="95000"/>
-                  </a:schemeClr>
-                </a:solidFill>
-                <a:latin typeface="Noto Sans KR Medium" panose="020B0200000000000000" pitchFamily="34" charset="-128"/>
-                <a:ea typeface="Noto Sans KR Medium" panose="020B0200000000000000" pitchFamily="34" charset="-128"/>
-              </a:rPr>
-              <a:t>1</a:t>
-            </a:r>
-            <a:r>
-              <a:rPr lang="ko-KR" altLang="en-US" sz="1000" dirty="0" smtClean="0">
-                <a:solidFill>
-                  <a:schemeClr val="bg1">
-                    <a:lumMod val="95000"/>
-                  </a:schemeClr>
-                </a:solidFill>
-                <a:latin typeface="Noto Sans KR Medium" panose="020B0200000000000000" pitchFamily="34" charset="-128"/>
-                <a:ea typeface="Noto Sans KR Medium" panose="020B0200000000000000" pitchFamily="34" charset="-128"/>
-              </a:rPr>
-              <a:t>씩 스킬 포인트를 얻고</a:t>
-            </a:r>
-            <a:r>
-              <a:rPr lang="en-US" altLang="ko-KR" sz="1000" dirty="0" smtClean="0">
-                <a:solidFill>
-                  <a:schemeClr val="bg1">
-                    <a:lumMod val="95000"/>
-                  </a:schemeClr>
-                </a:solidFill>
-                <a:latin typeface="Noto Sans KR Medium" panose="020B0200000000000000" pitchFamily="34" charset="-128"/>
-                <a:ea typeface="Noto Sans KR Medium" panose="020B0200000000000000" pitchFamily="34" charset="-128"/>
-              </a:rPr>
-              <a:t>, 10 </a:t>
-            </a:r>
-            <a:r>
-              <a:rPr lang="ko-KR" altLang="en-US" sz="1000" dirty="0" smtClean="0">
-                <a:solidFill>
-                  <a:schemeClr val="bg1">
-                    <a:lumMod val="95000"/>
-                  </a:schemeClr>
-                </a:solidFill>
-                <a:latin typeface="Noto Sans KR Medium" panose="020B0200000000000000" pitchFamily="34" charset="-128"/>
-                <a:ea typeface="Noto Sans KR Medium" panose="020B0200000000000000" pitchFamily="34" charset="-128"/>
-              </a:rPr>
-              <a:t>이상 스킬 포인트가 모이면 </a:t>
-            </a:r>
-            <a:r>
               <a:rPr lang="ko-KR" altLang="en-US" sz="1000" dirty="0" err="1" smtClean="0">
                 <a:solidFill>
                   <a:schemeClr val="bg1">
@@ -26249,105 +26588,7 @@
                 <a:latin typeface="Noto Sans KR Medium" panose="020B0200000000000000" pitchFamily="34" charset="-128"/>
                 <a:ea typeface="Noto Sans KR Medium" panose="020B0200000000000000" pitchFamily="34" charset="-128"/>
               </a:rPr>
-              <a:t> 액션을 </a:t>
-            </a:r>
-            <a:r>
-              <a:rPr lang="ko-KR" altLang="en-US" sz="1000" dirty="0" smtClean="0">
-                <a:solidFill>
-                  <a:schemeClr val="bg1">
-                    <a:lumMod val="95000"/>
-                  </a:schemeClr>
-                </a:solidFill>
-                <a:latin typeface="Noto Sans KR Medium" panose="020B0200000000000000" pitchFamily="34" charset="-128"/>
-                <a:ea typeface="Noto Sans KR Medium" panose="020B0200000000000000" pitchFamily="34" charset="-128"/>
-              </a:rPr>
-              <a:t>수행합니다</a:t>
-            </a:r>
-            <a:r>
-              <a:rPr lang="en-US" altLang="ko-KR" sz="1000" dirty="0" smtClean="0">
-                <a:solidFill>
-                  <a:schemeClr val="bg1">
-                    <a:lumMod val="95000"/>
-                  </a:schemeClr>
-                </a:solidFill>
-                <a:latin typeface="Noto Sans KR Medium" panose="020B0200000000000000" pitchFamily="34" charset="-128"/>
-                <a:ea typeface="Noto Sans KR Medium" panose="020B0200000000000000" pitchFamily="34" charset="-128"/>
-              </a:rPr>
-              <a:t>.</a:t>
-            </a:r>
-          </a:p>
-          <a:p>
-            <a:r>
-              <a:rPr lang="ko-KR" altLang="en-US" sz="1000" dirty="0" smtClean="0">
-                <a:solidFill>
-                  <a:schemeClr val="bg1">
-                    <a:lumMod val="95000"/>
-                  </a:schemeClr>
-                </a:solidFill>
-                <a:latin typeface="Noto Sans KR Medium" panose="020B0200000000000000" pitchFamily="34" charset="-128"/>
-                <a:ea typeface="Noto Sans KR Medium" panose="020B0200000000000000" pitchFamily="34" charset="-128"/>
-              </a:rPr>
-              <a:t>각 </a:t>
-            </a:r>
-            <a:r>
-              <a:rPr lang="ko-KR" altLang="en-US" sz="1000" dirty="0" err="1" smtClean="0">
-                <a:solidFill>
-                  <a:schemeClr val="bg1">
-                    <a:lumMod val="95000"/>
-                  </a:schemeClr>
-                </a:solidFill>
-                <a:latin typeface="Noto Sans KR Medium" panose="020B0200000000000000" pitchFamily="34" charset="-128"/>
-                <a:ea typeface="Noto Sans KR Medium" panose="020B0200000000000000" pitchFamily="34" charset="-128"/>
-              </a:rPr>
-              <a:t>기믹</a:t>
-            </a:r>
-            <a:r>
-              <a:rPr lang="ko-KR" altLang="en-US" sz="1000" dirty="0" smtClean="0">
-                <a:solidFill>
-                  <a:schemeClr val="bg1">
-                    <a:lumMod val="95000"/>
-                  </a:schemeClr>
-                </a:solidFill>
-                <a:latin typeface="Noto Sans KR Medium" panose="020B0200000000000000" pitchFamily="34" charset="-128"/>
-                <a:ea typeface="Noto Sans KR Medium" panose="020B0200000000000000" pitchFamily="34" charset="-128"/>
-              </a:rPr>
-              <a:t> 액션을 파훼하면 보스 </a:t>
-            </a:r>
-            <a:r>
-              <a:rPr lang="ko-KR" altLang="en-US" sz="1000" dirty="0" err="1" smtClean="0">
-                <a:solidFill>
-                  <a:schemeClr val="bg1">
-                    <a:lumMod val="95000"/>
-                  </a:schemeClr>
-                </a:solidFill>
-                <a:latin typeface="Noto Sans KR Medium" panose="020B0200000000000000" pitchFamily="34" charset="-128"/>
-                <a:ea typeface="Noto Sans KR Medium" panose="020B0200000000000000" pitchFamily="34" charset="-128"/>
-              </a:rPr>
-              <a:t>몬스터는</a:t>
-            </a:r>
-            <a:r>
-              <a:rPr lang="ko-KR" altLang="en-US" sz="1000" dirty="0" smtClean="0">
-                <a:solidFill>
-                  <a:schemeClr val="bg1">
-                    <a:lumMod val="95000"/>
-                  </a:schemeClr>
-                </a:solidFill>
-                <a:latin typeface="Noto Sans KR Medium" panose="020B0200000000000000" pitchFamily="34" charset="-128"/>
-                <a:ea typeface="Noto Sans KR Medium" panose="020B0200000000000000" pitchFamily="34" charset="-128"/>
-              </a:rPr>
-              <a:t> 일시적으로 그로기 상태가 됩니다</a:t>
-            </a:r>
-            <a:r>
-              <a:rPr lang="en-US" altLang="ko-KR" sz="1000" dirty="0" smtClean="0">
-                <a:solidFill>
-                  <a:schemeClr val="bg1">
-                    <a:lumMod val="95000"/>
-                  </a:schemeClr>
-                </a:solidFill>
-                <a:latin typeface="Noto Sans KR Medium" panose="020B0200000000000000" pitchFamily="34" charset="-128"/>
-                <a:ea typeface="Noto Sans KR Medium" panose="020B0200000000000000" pitchFamily="34" charset="-128"/>
-              </a:rPr>
-              <a:t>.</a:t>
+              <a:t> 액션 종류</a:t>
             </a:r>
             <a:endParaRPr lang="en-US" altLang="ko-KR" sz="1000" dirty="0" smtClean="0">
               <a:solidFill>
@@ -26360,76 +26601,6 @@
             </a:endParaRPr>
           </a:p>
           <a:p>
-            <a:endParaRPr lang="en-US" altLang="ko-KR" sz="1000" dirty="0" smtClean="0">
-              <a:solidFill>
-                <a:schemeClr val="bg1">
-                  <a:lumMod val="95000"/>
-                </a:schemeClr>
-              </a:solidFill>
-              <a:latin typeface="Noto Sans KR Medium" panose="020B0200000000000000" pitchFamily="34" charset="-128"/>
-              <a:ea typeface="Noto Sans KR Medium" panose="020B0200000000000000" pitchFamily="34" charset="-128"/>
-            </a:endParaRPr>
-          </a:p>
-          <a:p>
-            <a:r>
-              <a:rPr lang="ko-KR" altLang="en-US" sz="1000" dirty="0" err="1" smtClean="0">
-                <a:solidFill>
-                  <a:schemeClr val="bg1">
-                    <a:lumMod val="95000"/>
-                  </a:schemeClr>
-                </a:solidFill>
-                <a:latin typeface="Noto Sans KR Medium" panose="020B0200000000000000" pitchFamily="34" charset="-128"/>
-                <a:ea typeface="Noto Sans KR Medium" panose="020B0200000000000000" pitchFamily="34" charset="-128"/>
-              </a:rPr>
-              <a:t>기믹</a:t>
-            </a:r>
-            <a:r>
-              <a:rPr lang="ko-KR" altLang="en-US" sz="1000" dirty="0" smtClean="0">
-                <a:solidFill>
-                  <a:schemeClr val="bg1">
-                    <a:lumMod val="95000"/>
-                  </a:schemeClr>
-                </a:solidFill>
-                <a:latin typeface="Noto Sans KR Medium" panose="020B0200000000000000" pitchFamily="34" charset="-128"/>
-                <a:ea typeface="Noto Sans KR Medium" panose="020B0200000000000000" pitchFamily="34" charset="-128"/>
-              </a:rPr>
-              <a:t> </a:t>
-            </a:r>
-            <a:r>
-              <a:rPr lang="ko-KR" altLang="en-US" sz="1000" dirty="0" smtClean="0">
-                <a:solidFill>
-                  <a:schemeClr val="bg1">
-                    <a:lumMod val="95000"/>
-                  </a:schemeClr>
-                </a:solidFill>
-                <a:latin typeface="Noto Sans KR Medium" panose="020B0200000000000000" pitchFamily="34" charset="-128"/>
-                <a:ea typeface="Noto Sans KR Medium" panose="020B0200000000000000" pitchFamily="34" charset="-128"/>
-              </a:rPr>
-              <a:t>액션 </a:t>
-            </a:r>
-            <a:r>
-              <a:rPr lang="ko-KR" altLang="en-US" sz="1000" dirty="0" smtClean="0">
-                <a:solidFill>
-                  <a:schemeClr val="bg1">
-                    <a:lumMod val="95000"/>
-                  </a:schemeClr>
-                </a:solidFill>
-                <a:latin typeface="Noto Sans KR Medium" panose="020B0200000000000000" pitchFamily="34" charset="-128"/>
-                <a:ea typeface="Noto Sans KR Medium" panose="020B0200000000000000" pitchFamily="34" charset="-128"/>
-              </a:rPr>
-              <a:t>종류</a:t>
-            </a:r>
-            <a:endParaRPr lang="en-US" altLang="ko-KR" sz="1000" dirty="0" smtClean="0">
-              <a:solidFill>
-                <a:schemeClr val="bg1">
-                  <a:lumMod val="95000"/>
-                </a:schemeClr>
-              </a:solidFill>
-              <a:latin typeface="Noto Sans KR Medium" panose="020B0200000000000000" pitchFamily="34" charset="-128"/>
-              <a:ea typeface="Noto Sans KR Medium" panose="020B0200000000000000" pitchFamily="34" charset="-128"/>
-            </a:endParaRPr>
-          </a:p>
-          <a:p>
             <a:pPr marL="171450" indent="-171450">
               <a:buFontTx/>
               <a:buChar char="-"/>
@@ -26468,19 +26639,7 @@
                 <a:latin typeface="Noto Sans KR Medium" panose="020B0200000000000000" pitchFamily="34" charset="-128"/>
                 <a:ea typeface="Noto Sans KR Medium" panose="020B0200000000000000" pitchFamily="34" charset="-128"/>
               </a:rPr>
-              <a:t>보스가 정면으로 이동하며 </a:t>
-            </a:r>
-            <a:r>
-              <a:rPr lang="ko-KR" altLang="en-US" sz="1000" dirty="0" smtClean="0">
-                <a:solidFill>
-                  <a:schemeClr val="bg1">
-                    <a:lumMod val="95000"/>
-                  </a:schemeClr>
-                </a:solidFill>
-                <a:latin typeface="Noto Sans KR Medium" panose="020B0200000000000000" pitchFamily="34" charset="-128"/>
-                <a:ea typeface="Noto Sans KR Medium" panose="020B0200000000000000" pitchFamily="34" charset="-128"/>
-              </a:rPr>
-              <a:t>공격합니다</a:t>
+              <a:t>보스가 정면으로 이동하며 공격합니다</a:t>
             </a:r>
             <a:r>
               <a:rPr lang="en-US" altLang="ko-KR" sz="1000" dirty="0" smtClean="0">
@@ -26515,19 +26674,7 @@
                 <a:latin typeface="Noto Sans KR Medium" panose="020B0200000000000000" pitchFamily="34" charset="-128"/>
                 <a:ea typeface="Noto Sans KR Medium" panose="020B0200000000000000" pitchFamily="34" charset="-128"/>
               </a:rPr>
-              <a:t>보스 </a:t>
-            </a:r>
-            <a:r>
-              <a:rPr lang="ko-KR" altLang="en-US" sz="1000" dirty="0" smtClean="0">
-                <a:solidFill>
-                  <a:schemeClr val="bg1">
-                    <a:lumMod val="95000"/>
-                  </a:schemeClr>
-                </a:solidFill>
-                <a:latin typeface="Noto Sans KR Medium" panose="020B0200000000000000" pitchFamily="34" charset="-128"/>
-                <a:ea typeface="Noto Sans KR Medium" panose="020B0200000000000000" pitchFamily="34" charset="-128"/>
-              </a:rPr>
-              <a:t>정면 </a:t>
+              <a:t>보스 정면 </a:t>
             </a:r>
             <a:r>
               <a:rPr lang="en-US" altLang="ko-KR" sz="1000" dirty="0" smtClean="0">
@@ -26623,19 +26770,7 @@
                 <a:latin typeface="Noto Sans KR Medium" panose="020B0200000000000000" pitchFamily="34" charset="-128"/>
                 <a:ea typeface="Noto Sans KR Medium" panose="020B0200000000000000" pitchFamily="34" charset="-128"/>
               </a:rPr>
-              <a:t>스킬 공격 시 파훼 </a:t>
-            </a:r>
-            <a:r>
-              <a:rPr lang="ko-KR" altLang="en-US" sz="1000" dirty="0" smtClean="0">
-                <a:solidFill>
-                  <a:schemeClr val="bg1">
-                    <a:lumMod val="95000"/>
-                  </a:schemeClr>
-                </a:solidFill>
-                <a:latin typeface="Noto Sans KR Medium" panose="020B0200000000000000" pitchFamily="34" charset="-128"/>
-                <a:ea typeface="Noto Sans KR Medium" panose="020B0200000000000000" pitchFamily="34" charset="-128"/>
-              </a:rPr>
-              <a:t>가능합니다</a:t>
+              <a:t>스킬 공격 시 파훼 가능합니다</a:t>
             </a:r>
             <a:r>
               <a:rPr lang="en-US" altLang="ko-KR" sz="1000" dirty="0" smtClean="0">
@@ -26698,19 +26833,7 @@
                 <a:latin typeface="Noto Sans KR Medium" panose="020B0200000000000000" pitchFamily="34" charset="-128"/>
                 <a:ea typeface="Noto Sans KR Medium" panose="020B0200000000000000" pitchFamily="34" charset="-128"/>
               </a:rPr>
-              <a:t>보스가 일정 시간 동안 무력화 가능 상태가 </a:t>
-            </a:r>
-            <a:r>
-              <a:rPr lang="ko-KR" altLang="en-US" sz="1000" dirty="0" smtClean="0">
-                <a:solidFill>
-                  <a:schemeClr val="bg1">
-                    <a:lumMod val="95000"/>
-                  </a:schemeClr>
-                </a:solidFill>
-                <a:latin typeface="Noto Sans KR Medium" panose="020B0200000000000000" pitchFamily="34" charset="-128"/>
-                <a:ea typeface="Noto Sans KR Medium" panose="020B0200000000000000" pitchFamily="34" charset="-128"/>
-              </a:rPr>
-              <a:t>됩니다</a:t>
+              <a:t>보스가 일정 시간 동안 무력화 가능 상태가 됩니다</a:t>
             </a:r>
             <a:r>
               <a:rPr lang="en-US" altLang="ko-KR" sz="1000" dirty="0" smtClean="0">
@@ -26724,18 +26847,6 @@
               </a:rPr>
               <a:t>.</a:t>
             </a:r>
-            <a:r>
-              <a:rPr lang="en-US" altLang="ko-KR" sz="1000" dirty="0" smtClean="0">
-                <a:solidFill>
-                  <a:schemeClr val="bg1">
-                    <a:lumMod val="95000"/>
-                  </a:schemeClr>
-                </a:solidFill>
-                <a:latin typeface="Noto Sans KR Medium" panose="020B0200000000000000" pitchFamily="34" charset="-128"/>
-                <a:ea typeface="Noto Sans KR Medium" panose="020B0200000000000000" pitchFamily="34" charset="-128"/>
-              </a:rPr>
-              <a:t/>
-            </a:r>
             <a:br>
               <a:rPr lang="en-US" altLang="ko-KR" sz="1000" dirty="0" smtClean="0">
                 <a:solidFill>
@@ -26781,19 +26892,7 @@
                 <a:latin typeface="Noto Sans KR Medium" panose="020B0200000000000000" pitchFamily="34" charset="-128"/>
                 <a:ea typeface="Noto Sans KR Medium" panose="020B0200000000000000" pitchFamily="34" charset="-128"/>
               </a:rPr>
-              <a:t>으로 만들지 못하면 일정 시간 후 매우 강력한 공격을 </a:t>
-            </a:r>
-            <a:r>
-              <a:rPr lang="ko-KR" altLang="en-US" sz="1000" dirty="0" smtClean="0">
-                <a:solidFill>
-                  <a:schemeClr val="bg1">
-                    <a:lumMod val="95000"/>
-                  </a:schemeClr>
-                </a:solidFill>
-                <a:latin typeface="Noto Sans KR Medium" panose="020B0200000000000000" pitchFamily="34" charset="-128"/>
-                <a:ea typeface="Noto Sans KR Medium" panose="020B0200000000000000" pitchFamily="34" charset="-128"/>
-              </a:rPr>
-              <a:t>실행합니다</a:t>
+              <a:t>으로 만들지 못하면 일정 시간 후 매우 강력한 공격을 실행합니다</a:t>
             </a:r>
             <a:r>
               <a:rPr lang="en-US" altLang="ko-KR" sz="1000" dirty="0" smtClean="0">
@@ -27375,26 +27474,31 @@
                 <a:latin typeface="Noto Sans KR Medium" panose="020B0200000000000000" pitchFamily="34" charset="-128"/>
                 <a:ea typeface="Noto Sans KR Medium" panose="020B0200000000000000" pitchFamily="34" charset="-128"/>
               </a:rPr>
-              <a:t>일반 상태 </a:t>
-            </a:r>
-            <a:r>
-              <a:rPr lang="en-US" altLang="ko-KR" sz="1000" dirty="0" smtClean="0">
-                <a:solidFill>
-                  <a:schemeClr val="bg1">
-                    <a:lumMod val="95000"/>
-                  </a:schemeClr>
-                </a:solidFill>
-                <a:latin typeface="Noto Sans KR Medium" panose="020B0200000000000000" pitchFamily="34" charset="-128"/>
-                <a:ea typeface="Noto Sans KR Medium" panose="020B0200000000000000" pitchFamily="34" charset="-128"/>
-              </a:rPr>
-              <a:t>:</a:t>
-            </a:r>
-          </a:p>
-          <a:p>
-            <a:pPr marL="171450" indent="-171450">
-              <a:buFontTx/>
-              <a:buChar char="-"/>
-            </a:pPr>
+              <a:t>일반 </a:t>
+            </a:r>
+            <a:r>
+              <a:rPr lang="ko-KR" altLang="en-US" sz="1000" dirty="0" smtClean="0">
+                <a:solidFill>
+                  <a:schemeClr val="bg1">
+                    <a:lumMod val="95000"/>
+                  </a:schemeClr>
+                </a:solidFill>
+                <a:latin typeface="Noto Sans KR Medium" panose="020B0200000000000000" pitchFamily="34" charset="-128"/>
+                <a:ea typeface="Noto Sans KR Medium" panose="020B0200000000000000" pitchFamily="34" charset="-128"/>
+              </a:rPr>
+              <a:t>상태</a:t>
+            </a:r>
+            <a:endParaRPr lang="en-US" altLang="ko-KR" sz="1000" dirty="0" smtClean="0">
+              <a:solidFill>
+                <a:schemeClr val="bg1">
+                  <a:lumMod val="95000"/>
+                </a:schemeClr>
+              </a:solidFill>
+              <a:latin typeface="Noto Sans KR Medium" panose="020B0200000000000000" pitchFamily="34" charset="-128"/>
+              <a:ea typeface="Noto Sans KR Medium" panose="020B0200000000000000" pitchFamily="34" charset="-128"/>
+            </a:endParaRPr>
+          </a:p>
+          <a:p>
             <a:r>
               <a:rPr lang="ko-KR" altLang="en-US" sz="1000" dirty="0" smtClean="0">
                 <a:solidFill>
@@ -27457,10 +27561,6 @@
             </a:r>
           </a:p>
           <a:p>
-            <a:pPr marL="171450" indent="-171450">
-              <a:buFontTx/>
-              <a:buChar char="-"/>
-            </a:pPr>
             <a:r>
               <a:rPr lang="ko-KR" altLang="en-US" sz="1000" dirty="0" smtClean="0">
                 <a:solidFill>
@@ -27637,26 +27737,31 @@
                 <a:latin typeface="Noto Sans KR Medium" panose="020B0200000000000000" pitchFamily="34" charset="-128"/>
                 <a:ea typeface="Noto Sans KR Medium" panose="020B0200000000000000" pitchFamily="34" charset="-128"/>
               </a:rPr>
-              <a:t>공격 상태 </a:t>
-            </a:r>
-            <a:r>
-              <a:rPr lang="en-US" altLang="ko-KR" sz="1000" dirty="0" smtClean="0">
-                <a:solidFill>
-                  <a:schemeClr val="bg1">
-                    <a:lumMod val="95000"/>
-                  </a:schemeClr>
-                </a:solidFill>
-                <a:latin typeface="Noto Sans KR Medium" panose="020B0200000000000000" pitchFamily="34" charset="-128"/>
-                <a:ea typeface="Noto Sans KR Medium" panose="020B0200000000000000" pitchFamily="34" charset="-128"/>
-              </a:rPr>
-              <a:t>:</a:t>
-            </a:r>
-          </a:p>
-          <a:p>
-            <a:pPr marL="171450" indent="-171450">
-              <a:buFontTx/>
-              <a:buChar char="-"/>
-            </a:pPr>
+              <a:t>공격 </a:t>
+            </a:r>
+            <a:r>
+              <a:rPr lang="ko-KR" altLang="en-US" sz="1000" dirty="0" smtClean="0">
+                <a:solidFill>
+                  <a:schemeClr val="bg1">
+                    <a:lumMod val="95000"/>
+                  </a:schemeClr>
+                </a:solidFill>
+                <a:latin typeface="Noto Sans KR Medium" panose="020B0200000000000000" pitchFamily="34" charset="-128"/>
+                <a:ea typeface="Noto Sans KR Medium" panose="020B0200000000000000" pitchFamily="34" charset="-128"/>
+              </a:rPr>
+              <a:t>상태</a:t>
+            </a:r>
+            <a:endParaRPr lang="en-US" altLang="ko-KR" sz="1000" dirty="0" smtClean="0">
+              <a:solidFill>
+                <a:schemeClr val="bg1">
+                  <a:lumMod val="95000"/>
+                </a:schemeClr>
+              </a:solidFill>
+              <a:latin typeface="Noto Sans KR Medium" panose="020B0200000000000000" pitchFamily="34" charset="-128"/>
+              <a:ea typeface="Noto Sans KR Medium" panose="020B0200000000000000" pitchFamily="34" charset="-128"/>
+            </a:endParaRPr>
+          </a:p>
+          <a:p>
             <a:r>
               <a:rPr lang="ko-KR" altLang="en-US" sz="1000" dirty="0" smtClean="0">
                 <a:solidFill>
@@ -27683,10 +27788,6 @@
             </a:r>
           </a:p>
           <a:p>
-            <a:pPr marL="171450" indent="-171450">
-              <a:buFontTx/>
-              <a:buChar char="-"/>
-            </a:pPr>
             <a:r>
               <a:rPr lang="ko-KR" altLang="en-US" sz="1000" dirty="0" smtClean="0">
                 <a:solidFill>
@@ -27748,6 +27849,56 @@
               <a:t> </a:t>
             </a:r>
             <a:r>
+              <a:rPr lang="ko-KR" altLang="en-US" sz="1000" dirty="0" err="1" smtClean="0">
+                <a:solidFill>
+                  <a:schemeClr val="bg1">
+                    <a:lumMod val="95000"/>
+                  </a:schemeClr>
+                </a:solidFill>
+                <a:latin typeface="Noto Sans KR Medium" panose="020B0200000000000000" pitchFamily="34" charset="-128"/>
+                <a:ea typeface="Noto Sans KR Medium" panose="020B0200000000000000" pitchFamily="34" charset="-128"/>
+              </a:rPr>
+              <a:t>타겟에게</a:t>
+            </a:r>
+            <a:r>
+              <a:rPr lang="ko-KR" altLang="en-US" sz="1000" dirty="0" smtClean="0">
+                <a:solidFill>
+                  <a:schemeClr val="bg1">
+                    <a:lumMod val="95000"/>
+                  </a:schemeClr>
+                </a:solidFill>
+                <a:latin typeface="Noto Sans KR Medium" panose="020B0200000000000000" pitchFamily="34" charset="-128"/>
+                <a:ea typeface="Noto Sans KR Medium" panose="020B0200000000000000" pitchFamily="34" charset="-128"/>
+              </a:rPr>
+              <a:t> 다가가며 원거리 공격으로 견제합니다</a:t>
+            </a:r>
+            <a:r>
+              <a:rPr lang="en-US" altLang="ko-KR" sz="1000" dirty="0" smtClean="0">
+                <a:solidFill>
+                  <a:schemeClr val="bg1">
+                    <a:lumMod val="95000"/>
+                  </a:schemeClr>
+                </a:solidFill>
+                <a:latin typeface="Noto Sans KR Medium" panose="020B0200000000000000" pitchFamily="34" charset="-128"/>
+                <a:ea typeface="Noto Sans KR Medium" panose="020B0200000000000000" pitchFamily="34" charset="-128"/>
+              </a:rPr>
+              <a:t>.</a:t>
+            </a:r>
+          </a:p>
+          <a:p>
+            <a:r>
+              <a:rPr lang="ko-KR" altLang="en-US" sz="1000" dirty="0" smtClean="0">
+                <a:solidFill>
+                  <a:schemeClr val="bg1">
+                    <a:lumMod val="95000"/>
+                  </a:schemeClr>
+                </a:solidFill>
+                <a:latin typeface="Noto Sans KR Medium" panose="020B0200000000000000" pitchFamily="34" charset="-128"/>
+                <a:ea typeface="Noto Sans KR Medium" panose="020B0200000000000000" pitchFamily="34" charset="-128"/>
+              </a:rPr>
+              <a:t>근접 </a:t>
+            </a:r>
+            <a:r>
               <a:rPr lang="ko-KR" altLang="en-US" sz="1000" dirty="0">
                 <a:solidFill>
                   <a:schemeClr val="bg1">
@@ -27757,19 +27908,19 @@
                 <a:latin typeface="Noto Sans KR Medium" panose="020B0200000000000000" pitchFamily="34" charset="-128"/>
                 <a:ea typeface="Noto Sans KR Medium" panose="020B0200000000000000" pitchFamily="34" charset="-128"/>
               </a:rPr>
-              <a:t>추적하며 원거리 공격을 </a:t>
-            </a:r>
-            <a:r>
-              <a:rPr lang="ko-KR" altLang="en-US" sz="1000" dirty="0" smtClean="0">
-                <a:solidFill>
-                  <a:schemeClr val="bg1">
-                    <a:lumMod val="95000"/>
-                  </a:schemeClr>
-                </a:solidFill>
-                <a:latin typeface="Noto Sans KR Medium" panose="020B0200000000000000" pitchFamily="34" charset="-128"/>
-                <a:ea typeface="Noto Sans KR Medium" panose="020B0200000000000000" pitchFamily="34" charset="-128"/>
-              </a:rPr>
-              <a:t>수행합니다</a:t>
+              <a:t>공격이 가능하면 일반 공격 중 랜덤으로 한 </a:t>
+            </a:r>
+            <a:r>
+              <a:rPr lang="ko-KR" altLang="en-US" sz="1000" dirty="0" smtClean="0">
+                <a:solidFill>
+                  <a:schemeClr val="bg1">
+                    <a:lumMod val="95000"/>
+                  </a:schemeClr>
+                </a:solidFill>
+                <a:latin typeface="Noto Sans KR Medium" panose="020B0200000000000000" pitchFamily="34" charset="-128"/>
+                <a:ea typeface="Noto Sans KR Medium" panose="020B0200000000000000" pitchFamily="34" charset="-128"/>
+              </a:rPr>
+              <a:t>개를 수행합니다</a:t>
             </a:r>
             <a:r>
               <a:rPr lang="en-US" altLang="ko-KR" sz="1000" dirty="0" smtClean="0">
@@ -27783,23 +27934,28 @@
               </a:rPr>
               <a:t>.</a:t>
             </a:r>
-          </a:p>
-          <a:p>
-            <a:pPr marL="171450" indent="-171450">
-              <a:buFontTx/>
-              <a:buChar char="-"/>
-            </a:pPr>
-            <a:r>
-              <a:rPr lang="ko-KR" altLang="en-US" sz="1000" dirty="0" smtClean="0">
-                <a:solidFill>
-                  <a:schemeClr val="bg1">
-                    <a:lumMod val="95000"/>
-                  </a:schemeClr>
-                </a:solidFill>
-                <a:latin typeface="Noto Sans KR Medium" panose="020B0200000000000000" pitchFamily="34" charset="-128"/>
-                <a:ea typeface="Noto Sans KR Medium" panose="020B0200000000000000" pitchFamily="34" charset="-128"/>
-              </a:rPr>
-              <a:t>근접 </a:t>
+            <a:br>
+              <a:rPr lang="en-US" altLang="ko-KR" sz="1000" dirty="0" smtClean="0">
+                <a:solidFill>
+                  <a:schemeClr val="bg1">
+                    <a:lumMod val="95000"/>
+                  </a:schemeClr>
+                </a:solidFill>
+                <a:latin typeface="Noto Sans KR Medium" panose="020B0200000000000000" pitchFamily="34" charset="-128"/>
+                <a:ea typeface="Noto Sans KR Medium" panose="020B0200000000000000" pitchFamily="34" charset="-128"/>
+              </a:rPr>
+            </a:br>
+            <a:r>
+              <a:rPr lang="ko-KR" altLang="en-US" sz="1000" dirty="0" smtClean="0">
+                <a:solidFill>
+                  <a:schemeClr val="bg1">
+                    <a:lumMod val="95000"/>
+                  </a:schemeClr>
+                </a:solidFill>
+                <a:latin typeface="Noto Sans KR Medium" panose="020B0200000000000000" pitchFamily="34" charset="-128"/>
+                <a:ea typeface="Noto Sans KR Medium" panose="020B0200000000000000" pitchFamily="34" charset="-128"/>
+              </a:rPr>
+              <a:t>스킬 </a:t>
             </a:r>
             <a:r>
               <a:rPr lang="ko-KR" altLang="en-US" sz="1000" dirty="0">
@@ -27811,54 +27967,19 @@
                 <a:latin typeface="Noto Sans KR Medium" panose="020B0200000000000000" pitchFamily="34" charset="-128"/>
                 <a:ea typeface="Noto Sans KR Medium" panose="020B0200000000000000" pitchFamily="34" charset="-128"/>
               </a:rPr>
-              <a:t>공격이 가능하면 일반 공격 중 랜덤으로 한 개 </a:t>
-            </a:r>
-            <a:r>
-              <a:rPr lang="ko-KR" altLang="en-US" sz="1000" dirty="0" smtClean="0">
-                <a:solidFill>
-                  <a:schemeClr val="bg1">
-                    <a:lumMod val="95000"/>
-                  </a:schemeClr>
-                </a:solidFill>
-                <a:latin typeface="Noto Sans KR Medium" panose="020B0200000000000000" pitchFamily="34" charset="-128"/>
-                <a:ea typeface="Noto Sans KR Medium" panose="020B0200000000000000" pitchFamily="34" charset="-128"/>
-              </a:rPr>
-              <a:t>수행합니다</a:t>
-            </a:r>
-            <a:r>
-              <a:rPr lang="en-US" altLang="ko-KR" sz="1000" smtClean="0">
-                <a:solidFill>
-                  <a:schemeClr val="bg1">
-                    <a:lumMod val="95000"/>
-                  </a:schemeClr>
-                </a:solidFill>
-                <a:latin typeface="Noto Sans KR Medium" panose="020B0200000000000000" pitchFamily="34" charset="-128"/>
-                <a:ea typeface="Noto Sans KR Medium" panose="020B0200000000000000" pitchFamily="34" charset="-128"/>
-              </a:rPr>
-              <a:t>.</a:t>
-            </a:r>
-            <a:br>
-              <a:rPr lang="en-US" altLang="ko-KR" sz="1000" smtClean="0">
-                <a:solidFill>
-                  <a:schemeClr val="bg1">
-                    <a:lumMod val="95000"/>
-                  </a:schemeClr>
-                </a:solidFill>
-                <a:latin typeface="Noto Sans KR Medium" panose="020B0200000000000000" pitchFamily="34" charset="-128"/>
-                <a:ea typeface="Noto Sans KR Medium" panose="020B0200000000000000" pitchFamily="34" charset="-128"/>
-              </a:rPr>
-            </a:br>
-            <a:r>
-              <a:rPr lang="ko-KR" altLang="en-US" sz="1000" smtClean="0">
-                <a:solidFill>
-                  <a:schemeClr val="bg1">
-                    <a:lumMod val="95000"/>
-                  </a:schemeClr>
-                </a:solidFill>
-                <a:latin typeface="Noto Sans KR Medium" panose="020B0200000000000000" pitchFamily="34" charset="-128"/>
-                <a:ea typeface="Noto Sans KR Medium" panose="020B0200000000000000" pitchFamily="34" charset="-128"/>
-              </a:rPr>
-              <a:t>스킬 </a:t>
+              <a:t>포인트가 </a:t>
+            </a:r>
+            <a:r>
+              <a:rPr lang="en-US" altLang="ko-KR" sz="1000" dirty="0">
+                <a:solidFill>
+                  <a:schemeClr val="bg1">
+                    <a:lumMod val="95000"/>
+                  </a:schemeClr>
+                </a:solidFill>
+                <a:latin typeface="Noto Sans KR Medium" panose="020B0200000000000000" pitchFamily="34" charset="-128"/>
+                <a:ea typeface="Noto Sans KR Medium" panose="020B0200000000000000" pitchFamily="34" charset="-128"/>
+              </a:rPr>
+              <a:t>10 </a:t>
             </a:r>
             <a:r>
               <a:rPr lang="ko-KR" altLang="en-US" sz="1000" dirty="0">
@@ -27870,70 +27991,34 @@
                 <a:latin typeface="Noto Sans KR Medium" panose="020B0200000000000000" pitchFamily="34" charset="-128"/>
                 <a:ea typeface="Noto Sans KR Medium" panose="020B0200000000000000" pitchFamily="34" charset="-128"/>
               </a:rPr>
-              <a:t>포인트가 </a:t>
-            </a:r>
-            <a:r>
-              <a:rPr lang="en-US" altLang="ko-KR" sz="1000" dirty="0">
-                <a:solidFill>
-                  <a:schemeClr val="bg1">
-                    <a:lumMod val="95000"/>
-                  </a:schemeClr>
-                </a:solidFill>
-                <a:latin typeface="Noto Sans KR Medium" panose="020B0200000000000000" pitchFamily="34" charset="-128"/>
-                <a:ea typeface="Noto Sans KR Medium" panose="020B0200000000000000" pitchFamily="34" charset="-128"/>
-              </a:rPr>
-              <a:t>10 </a:t>
-            </a:r>
-            <a:r>
-              <a:rPr lang="ko-KR" altLang="en-US" sz="1000" dirty="0">
-                <a:solidFill>
-                  <a:schemeClr val="bg1">
-                    <a:lumMod val="95000"/>
-                  </a:schemeClr>
-                </a:solidFill>
-                <a:latin typeface="Noto Sans KR Medium" panose="020B0200000000000000" pitchFamily="34" charset="-128"/>
-                <a:ea typeface="Noto Sans KR Medium" panose="020B0200000000000000" pitchFamily="34" charset="-128"/>
-              </a:rPr>
-              <a:t>이상 모여 </a:t>
-            </a:r>
-            <a:r>
-              <a:rPr lang="ko-KR" altLang="en-US" sz="1000" dirty="0" err="1">
-                <a:solidFill>
-                  <a:schemeClr val="bg1">
-                    <a:lumMod val="95000"/>
-                  </a:schemeClr>
-                </a:solidFill>
-                <a:latin typeface="Noto Sans KR Medium" panose="020B0200000000000000" pitchFamily="34" charset="-128"/>
-                <a:ea typeface="Noto Sans KR Medium" panose="020B0200000000000000" pitchFamily="34" charset="-128"/>
-              </a:rPr>
-              <a:t>기믹</a:t>
-            </a:r>
-            <a:r>
-              <a:rPr lang="ko-KR" altLang="en-US" sz="1000" dirty="0">
-                <a:solidFill>
-                  <a:schemeClr val="bg1">
-                    <a:lumMod val="95000"/>
-                  </a:schemeClr>
-                </a:solidFill>
-                <a:latin typeface="Noto Sans KR Medium" panose="020B0200000000000000" pitchFamily="34" charset="-128"/>
-                <a:ea typeface="Noto Sans KR Medium" panose="020B0200000000000000" pitchFamily="34" charset="-128"/>
-              </a:rPr>
-              <a:t> 행동이 가능하다면 </a:t>
-            </a:r>
-            <a:r>
-              <a:rPr lang="ko-KR" altLang="en-US" sz="1000" dirty="0" err="1">
-                <a:solidFill>
-                  <a:schemeClr val="bg1">
-                    <a:lumMod val="95000"/>
-                  </a:schemeClr>
-                </a:solidFill>
-                <a:latin typeface="Noto Sans KR Medium" panose="020B0200000000000000" pitchFamily="34" charset="-128"/>
-                <a:ea typeface="Noto Sans KR Medium" panose="020B0200000000000000" pitchFamily="34" charset="-128"/>
-              </a:rPr>
-              <a:t>기믹</a:t>
-            </a:r>
-            <a:r>
-              <a:rPr lang="ko-KR" altLang="en-US" sz="1000" dirty="0">
+              <a:t>이상 </a:t>
+            </a:r>
+            <a:r>
+              <a:rPr lang="ko-KR" altLang="en-US" sz="1000" dirty="0" smtClean="0">
+                <a:solidFill>
+                  <a:schemeClr val="bg1">
+                    <a:lumMod val="95000"/>
+                  </a:schemeClr>
+                </a:solidFill>
+                <a:latin typeface="Noto Sans KR Medium" panose="020B0200000000000000" pitchFamily="34" charset="-128"/>
+                <a:ea typeface="Noto Sans KR Medium" panose="020B0200000000000000" pitchFamily="34" charset="-128"/>
+              </a:rPr>
+              <a:t>모이면 </a:t>
+            </a:r>
+            <a:r>
+              <a:rPr lang="ko-KR" altLang="en-US" sz="1000" dirty="0" err="1" smtClean="0">
+                <a:solidFill>
+                  <a:schemeClr val="bg1">
+                    <a:lumMod val="95000"/>
+                  </a:schemeClr>
+                </a:solidFill>
+                <a:latin typeface="Noto Sans KR Medium" panose="020B0200000000000000" pitchFamily="34" charset="-128"/>
+                <a:ea typeface="Noto Sans KR Medium" panose="020B0200000000000000" pitchFamily="34" charset="-128"/>
+              </a:rPr>
+              <a:t>기믹을</a:t>
+            </a:r>
+            <a:r>
+              <a:rPr lang="ko-KR" altLang="en-US" sz="1000" dirty="0" smtClean="0">
                 <a:solidFill>
                   <a:schemeClr val="bg1">
                     <a:lumMod val="95000"/>
@@ -28287,7 +28372,7 @@
         <p:spPr>
           <a:xfrm>
             <a:off x="454275" y="1480347"/>
-            <a:ext cx="5651249" cy="1785104"/>
+            <a:ext cx="5651249" cy="1938992"/>
           </a:xfrm>
           <a:prstGeom prst="rect">
             <a:avLst/>
@@ -28322,93 +28407,101 @@
             </a:endParaRPr>
           </a:p>
           <a:p>
-            <a:pPr marL="171450" indent="-171450">
-              <a:buFontTx/>
-              <a:buChar char="-"/>
-            </a:pPr>
-            <a:r>
-              <a:rPr lang="ko-KR" altLang="en-US" sz="1000" dirty="0">
-                <a:solidFill>
-                  <a:schemeClr val="bg1">
-                    <a:lumMod val="95000"/>
-                  </a:schemeClr>
-                </a:solidFill>
-                <a:latin typeface="Noto Sans KR Medium" panose="020B0200000000000000" pitchFamily="34" charset="-128"/>
-                <a:ea typeface="Noto Sans KR Medium" panose="020B0200000000000000" pitchFamily="34" charset="-128"/>
-              </a:rPr>
-              <a:t>레벨을 구성하는 구역에 </a:t>
-            </a:r>
-            <a:r>
-              <a:rPr lang="ko-KR" altLang="en-US" sz="1000" dirty="0" err="1">
-                <a:solidFill>
-                  <a:schemeClr val="bg1">
-                    <a:lumMod val="95000"/>
-                  </a:schemeClr>
-                </a:solidFill>
-                <a:latin typeface="Noto Sans KR Medium" panose="020B0200000000000000" pitchFamily="34" charset="-128"/>
-                <a:ea typeface="Noto Sans KR Medium" panose="020B0200000000000000" pitchFamily="34" charset="-128"/>
-              </a:rPr>
-              <a:t>스폰될</a:t>
-            </a:r>
-            <a:r>
-              <a:rPr lang="ko-KR" altLang="en-US" sz="1000" dirty="0">
-                <a:solidFill>
-                  <a:schemeClr val="bg1">
-                    <a:lumMod val="95000"/>
-                  </a:schemeClr>
-                </a:solidFill>
-                <a:latin typeface="Noto Sans KR Medium" panose="020B0200000000000000" pitchFamily="34" charset="-128"/>
-                <a:ea typeface="Noto Sans KR Medium" panose="020B0200000000000000" pitchFamily="34" charset="-128"/>
-              </a:rPr>
-              <a:t> </a:t>
-            </a:r>
-            <a:r>
-              <a:rPr lang="ko-KR" altLang="en-US" sz="1000" dirty="0" err="1">
-                <a:solidFill>
-                  <a:schemeClr val="bg1">
-                    <a:lumMod val="95000"/>
-                  </a:schemeClr>
-                </a:solidFill>
-                <a:latin typeface="Noto Sans KR Medium" panose="020B0200000000000000" pitchFamily="34" charset="-128"/>
-                <a:ea typeface="Noto Sans KR Medium" panose="020B0200000000000000" pitchFamily="34" charset="-128"/>
-              </a:rPr>
-              <a:t>몬스터들</a:t>
-            </a:r>
-            <a:r>
-              <a:rPr lang="ko-KR" altLang="en-US" sz="1000" dirty="0">
-                <a:solidFill>
-                  <a:schemeClr val="bg1">
-                    <a:lumMod val="95000"/>
-                  </a:schemeClr>
-                </a:solidFill>
-                <a:latin typeface="Noto Sans KR Medium" panose="020B0200000000000000" pitchFamily="34" charset="-128"/>
-                <a:ea typeface="Noto Sans KR Medium" panose="020B0200000000000000" pitchFamily="34" charset="-128"/>
-              </a:rPr>
-              <a:t> </a:t>
-            </a:r>
-            <a:r>
-              <a:rPr lang="en-US" altLang="ko-KR" sz="1000" dirty="0">
-                <a:solidFill>
-                  <a:schemeClr val="bg1">
-                    <a:lumMod val="95000"/>
-                  </a:schemeClr>
-                </a:solidFill>
-                <a:latin typeface="Noto Sans KR Medium" panose="020B0200000000000000" pitchFamily="34" charset="-128"/>
-                <a:ea typeface="Noto Sans KR Medium" panose="020B0200000000000000" pitchFamily="34" charset="-128"/>
-              </a:rPr>
-              <a:t>ID</a:t>
-            </a:r>
-            <a:r>
-              <a:rPr lang="ko-KR" altLang="en-US" sz="1000" dirty="0">
-                <a:solidFill>
-                  <a:schemeClr val="bg1">
-                    <a:lumMod val="95000"/>
-                  </a:schemeClr>
-                </a:solidFill>
-                <a:latin typeface="Noto Sans KR Medium" panose="020B0200000000000000" pitchFamily="34" charset="-128"/>
-                <a:ea typeface="Noto Sans KR Medium" panose="020B0200000000000000" pitchFamily="34" charset="-128"/>
-              </a:rPr>
-              <a:t>와 개수를 가지고 있음</a:t>
+            <a:r>
+              <a:rPr lang="ko-KR" altLang="en-US" sz="1000" dirty="0" smtClean="0">
+                <a:solidFill>
+                  <a:schemeClr val="bg1">
+                    <a:lumMod val="95000"/>
+                  </a:schemeClr>
+                </a:solidFill>
+                <a:latin typeface="Noto Sans KR Medium" panose="020B0200000000000000" pitchFamily="34" charset="-128"/>
+                <a:ea typeface="Noto Sans KR Medium" panose="020B0200000000000000" pitchFamily="34" charset="-128"/>
+              </a:rPr>
+              <a:t>스테이지에 사용할 </a:t>
+            </a:r>
+            <a:r>
+              <a:rPr lang="ko-KR" altLang="en-US" sz="1000" dirty="0" err="1" smtClean="0">
+                <a:solidFill>
+                  <a:schemeClr val="bg1">
+                    <a:lumMod val="95000"/>
+                  </a:schemeClr>
+                </a:solidFill>
+                <a:latin typeface="Noto Sans KR Medium" panose="020B0200000000000000" pitchFamily="34" charset="-128"/>
+                <a:ea typeface="Noto Sans KR Medium" panose="020B0200000000000000" pitchFamily="34" charset="-128"/>
+              </a:rPr>
+              <a:t>몬스터들의</a:t>
+            </a:r>
+            <a:r>
+              <a:rPr lang="ko-KR" altLang="en-US" sz="1000" dirty="0" smtClean="0">
+                <a:solidFill>
+                  <a:schemeClr val="bg1">
+                    <a:lumMod val="95000"/>
+                  </a:schemeClr>
+                </a:solidFill>
+                <a:latin typeface="Noto Sans KR Medium" panose="020B0200000000000000" pitchFamily="34" charset="-128"/>
+                <a:ea typeface="Noto Sans KR Medium" panose="020B0200000000000000" pitchFamily="34" charset="-128"/>
+              </a:rPr>
+              <a:t> 정보와 </a:t>
+            </a:r>
+            <a:r>
+              <a:rPr lang="ko-KR" altLang="en-US" sz="1000" dirty="0" err="1" smtClean="0">
+                <a:solidFill>
+                  <a:schemeClr val="bg1">
+                    <a:lumMod val="95000"/>
+                  </a:schemeClr>
+                </a:solidFill>
+                <a:latin typeface="Noto Sans KR Medium" panose="020B0200000000000000" pitchFamily="34" charset="-128"/>
+                <a:ea typeface="Noto Sans KR Medium" panose="020B0200000000000000" pitchFamily="34" charset="-128"/>
+              </a:rPr>
+              <a:t>클리어</a:t>
+            </a:r>
+            <a:r>
+              <a:rPr lang="ko-KR" altLang="en-US" sz="1000" dirty="0" smtClean="0">
+                <a:solidFill>
+                  <a:schemeClr val="bg1">
+                    <a:lumMod val="95000"/>
+                  </a:schemeClr>
+                </a:solidFill>
+                <a:latin typeface="Noto Sans KR Medium" panose="020B0200000000000000" pitchFamily="34" charset="-128"/>
+                <a:ea typeface="Noto Sans KR Medium" panose="020B0200000000000000" pitchFamily="34" charset="-128"/>
+              </a:rPr>
+              <a:t> 시</a:t>
+            </a:r>
+            <a:r>
+              <a:rPr lang="en-US" altLang="ko-KR" sz="1000" dirty="0" smtClean="0">
+                <a:solidFill>
+                  <a:schemeClr val="bg1">
+                    <a:lumMod val="95000"/>
+                  </a:schemeClr>
+                </a:solidFill>
+                <a:latin typeface="Noto Sans KR Medium" panose="020B0200000000000000" pitchFamily="34" charset="-128"/>
+                <a:ea typeface="Noto Sans KR Medium" panose="020B0200000000000000" pitchFamily="34" charset="-128"/>
+              </a:rPr>
+              <a:t>, </a:t>
+            </a:r>
+            <a:r>
+              <a:rPr lang="ko-KR" altLang="en-US" sz="1000" dirty="0" smtClean="0">
+                <a:solidFill>
+                  <a:schemeClr val="bg1">
+                    <a:lumMod val="95000"/>
+                  </a:schemeClr>
+                </a:solidFill>
+                <a:latin typeface="Noto Sans KR Medium" panose="020B0200000000000000" pitchFamily="34" charset="-128"/>
+                <a:ea typeface="Noto Sans KR Medium" panose="020B0200000000000000" pitchFamily="34" charset="-128"/>
+              </a:rPr>
+              <a:t>보상 정보를 데이터테이블로 만들어두었습니다</a:t>
+            </a:r>
+            <a:r>
+              <a:rPr lang="en-US" altLang="ko-KR" sz="1000" dirty="0" smtClean="0">
+                <a:solidFill>
+                  <a:schemeClr val="bg1">
+                    <a:lumMod val="95000"/>
+                  </a:schemeClr>
+                </a:solidFill>
+                <a:latin typeface="Noto Sans KR Medium" panose="020B0200000000000000" pitchFamily="34" charset="-128"/>
+                <a:ea typeface="Noto Sans KR Medium" panose="020B0200000000000000" pitchFamily="34" charset="-128"/>
+              </a:rPr>
+              <a:t>.</a:t>
             </a:r>
             <a:endParaRPr lang="en-US" altLang="ko-KR" sz="1000" dirty="0">
               <a:solidFill>
@@ -28421,81 +28514,6 @@
             </a:endParaRPr>
           </a:p>
           <a:p>
-            <a:pPr marL="171450" indent="-171450">
-              <a:buFontTx/>
-              <a:buChar char="-"/>
-            </a:pPr>
-            <a:r>
-              <a:rPr lang="ko-KR" altLang="en-US" sz="1000" dirty="0">
-                <a:solidFill>
-                  <a:schemeClr val="bg1">
-                    <a:lumMod val="95000"/>
-                  </a:schemeClr>
-                </a:solidFill>
-                <a:latin typeface="Noto Sans KR Medium" panose="020B0200000000000000" pitchFamily="34" charset="-128"/>
-                <a:ea typeface="Noto Sans KR Medium" panose="020B0200000000000000" pitchFamily="34" charset="-128"/>
-              </a:rPr>
-              <a:t>레벨 </a:t>
-            </a:r>
-            <a:r>
-              <a:rPr lang="ko-KR" altLang="en-US" sz="1000" dirty="0" err="1">
-                <a:solidFill>
-                  <a:schemeClr val="bg1">
-                    <a:lumMod val="95000"/>
-                  </a:schemeClr>
-                </a:solidFill>
-                <a:latin typeface="Noto Sans KR Medium" panose="020B0200000000000000" pitchFamily="34" charset="-128"/>
-                <a:ea typeface="Noto Sans KR Medium" panose="020B0200000000000000" pitchFamily="34" charset="-128"/>
-              </a:rPr>
-              <a:t>클리어</a:t>
-            </a:r>
-            <a:r>
-              <a:rPr lang="ko-KR" altLang="en-US" sz="1000" dirty="0">
-                <a:solidFill>
-                  <a:schemeClr val="bg1">
-                    <a:lumMod val="95000"/>
-                  </a:schemeClr>
-                </a:solidFill>
-                <a:latin typeface="Noto Sans KR Medium" panose="020B0200000000000000" pitchFamily="34" charset="-128"/>
-                <a:ea typeface="Noto Sans KR Medium" panose="020B0200000000000000" pitchFamily="34" charset="-128"/>
-              </a:rPr>
-              <a:t> 시</a:t>
-            </a:r>
-            <a:r>
-              <a:rPr lang="en-US" altLang="ko-KR" sz="1000" dirty="0">
-                <a:solidFill>
-                  <a:schemeClr val="bg1">
-                    <a:lumMod val="95000"/>
-                  </a:schemeClr>
-                </a:solidFill>
-                <a:latin typeface="Noto Sans KR Medium" panose="020B0200000000000000" pitchFamily="34" charset="-128"/>
-                <a:ea typeface="Noto Sans KR Medium" panose="020B0200000000000000" pitchFamily="34" charset="-128"/>
-              </a:rPr>
-              <a:t> </a:t>
-            </a:r>
-            <a:r>
-              <a:rPr lang="ko-KR" altLang="en-US" sz="1000" dirty="0">
-                <a:solidFill>
-                  <a:schemeClr val="bg1">
-                    <a:lumMod val="95000"/>
-                  </a:schemeClr>
-                </a:solidFill>
-                <a:latin typeface="Noto Sans KR Medium" panose="020B0200000000000000" pitchFamily="34" charset="-128"/>
-                <a:ea typeface="Noto Sans KR Medium" panose="020B0200000000000000" pitchFamily="34" charset="-128"/>
-              </a:rPr>
-              <a:t>보상 아이템 및 재화도 포함됨</a:t>
-            </a:r>
-            <a:endParaRPr lang="en-US" altLang="ko-KR" sz="1000" dirty="0">
-              <a:solidFill>
-                <a:schemeClr val="bg1">
-                  <a:lumMod val="95000"/>
-                </a:schemeClr>
-              </a:solidFill>
-              <a:latin typeface="Noto Sans KR Medium" panose="020B0200000000000000" pitchFamily="34" charset="-128"/>
-              <a:ea typeface="Noto Sans KR Medium" panose="020B0200000000000000" pitchFamily="34" charset="-128"/>
-            </a:endParaRPr>
-          </a:p>
-          <a:p>
             <a:endParaRPr lang="en-US" altLang="ko-KR" sz="1000" dirty="0" smtClean="0">
               <a:solidFill>
                 <a:schemeClr val="bg1">
@@ -28530,33 +28548,53 @@
             </a:endParaRPr>
           </a:p>
           <a:p>
-            <a:pPr marL="171450" indent="-171450">
-              <a:buFontTx/>
-              <a:buChar char="-"/>
-            </a:pPr>
-            <a:r>
-              <a:rPr lang="ko-KR" altLang="en-US" sz="1000" dirty="0" smtClean="0">
-                <a:solidFill>
-                  <a:schemeClr val="bg1">
-                    <a:lumMod val="95000"/>
-                  </a:schemeClr>
-                </a:solidFill>
-                <a:latin typeface="Noto Sans KR Medium" panose="020B0200000000000000" pitchFamily="34" charset="-128"/>
-                <a:ea typeface="Noto Sans KR Medium" panose="020B0200000000000000" pitchFamily="34" charset="-128"/>
-              </a:rPr>
-              <a:t>스테이지는 몇 개의 구역으로 구성되어 있고</a:t>
-            </a:r>
-            <a:r>
-              <a:rPr lang="en-US" altLang="ko-KR" sz="1000" dirty="0" smtClean="0">
-                <a:solidFill>
-                  <a:schemeClr val="bg1">
-                    <a:lumMod val="95000"/>
-                  </a:schemeClr>
-                </a:solidFill>
-                <a:latin typeface="Noto Sans KR Medium" panose="020B0200000000000000" pitchFamily="34" charset="-128"/>
-                <a:ea typeface="Noto Sans KR Medium" panose="020B0200000000000000" pitchFamily="34" charset="-128"/>
-              </a:rPr>
-              <a:t>, </a:t>
+            <a:r>
+              <a:rPr lang="ko-KR" altLang="en-US" sz="1000" dirty="0" smtClean="0">
+                <a:solidFill>
+                  <a:schemeClr val="bg1">
+                    <a:lumMod val="95000"/>
+                  </a:schemeClr>
+                </a:solidFill>
+                <a:latin typeface="Noto Sans KR Medium" panose="020B0200000000000000" pitchFamily="34" charset="-128"/>
+                <a:ea typeface="Noto Sans KR Medium" panose="020B0200000000000000" pitchFamily="34" charset="-128"/>
+              </a:rPr>
+              <a:t>스테이지는 몇 개의 </a:t>
+            </a:r>
+            <a:r>
+              <a:rPr lang="ko-KR" altLang="en-US" sz="1000" dirty="0" smtClean="0">
+                <a:solidFill>
+                  <a:schemeClr val="bg1">
+                    <a:lumMod val="95000"/>
+                  </a:schemeClr>
+                </a:solidFill>
+                <a:latin typeface="Noto Sans KR Medium" panose="020B0200000000000000" pitchFamily="34" charset="-128"/>
+                <a:ea typeface="Noto Sans KR Medium" panose="020B0200000000000000" pitchFamily="34" charset="-128"/>
+              </a:rPr>
+              <a:t>구역으로 구성되어 </a:t>
+            </a:r>
+            <a:r>
+              <a:rPr lang="ko-KR" altLang="en-US" sz="1000" dirty="0" smtClean="0">
+                <a:solidFill>
+                  <a:schemeClr val="bg1">
+                    <a:lumMod val="95000"/>
+                  </a:schemeClr>
+                </a:solidFill>
+                <a:latin typeface="Noto Sans KR Medium" panose="020B0200000000000000" pitchFamily="34" charset="-128"/>
+                <a:ea typeface="Noto Sans KR Medium" panose="020B0200000000000000" pitchFamily="34" charset="-128"/>
+              </a:rPr>
+              <a:t>있고</a:t>
+            </a:r>
+            <a:r>
+              <a:rPr lang="en-US" altLang="ko-KR" sz="1000" dirty="0" smtClean="0">
+                <a:solidFill>
+                  <a:schemeClr val="bg1">
+                    <a:lumMod val="95000"/>
+                  </a:schemeClr>
+                </a:solidFill>
+                <a:latin typeface="Noto Sans KR Medium" panose="020B0200000000000000" pitchFamily="34" charset="-128"/>
+                <a:ea typeface="Noto Sans KR Medium" panose="020B0200000000000000" pitchFamily="34" charset="-128"/>
+              </a:rPr>
+              <a:t> </a:t>
             </a:r>
             <a:r>
               <a:rPr lang="ko-KR" altLang="en-US" sz="1000" dirty="0" smtClean="0">
@@ -28592,7 +28630,19 @@
                 <a:latin typeface="Noto Sans KR Medium" panose="020B0200000000000000" pitchFamily="34" charset="-128"/>
                 <a:ea typeface="Noto Sans KR Medium" panose="020B0200000000000000" pitchFamily="34" charset="-128"/>
               </a:rPr>
-              <a:t> 스테이지 종료됨</a:t>
+              <a:t> 스테이지 </a:t>
+            </a:r>
+            <a:r>
+              <a:rPr lang="ko-KR" altLang="en-US" sz="1000" dirty="0" smtClean="0">
+                <a:solidFill>
+                  <a:schemeClr val="bg1">
+                    <a:lumMod val="95000"/>
+                  </a:schemeClr>
+                </a:solidFill>
+                <a:latin typeface="Noto Sans KR Medium" panose="020B0200000000000000" pitchFamily="34" charset="-128"/>
+                <a:ea typeface="Noto Sans KR Medium" panose="020B0200000000000000" pitchFamily="34" charset="-128"/>
+              </a:rPr>
+              <a:t>종료됩니다</a:t>
             </a:r>
             <a:r>
               <a:rPr lang="en-US" altLang="ko-KR" sz="1000" dirty="0" smtClean="0">
@@ -28608,10 +28658,6 @@
             </a:r>
           </a:p>
           <a:p>
-            <a:pPr marL="171450" indent="-171450">
-              <a:buFontTx/>
-              <a:buChar char="-"/>
-            </a:pPr>
             <a:r>
               <a:rPr lang="en-US" altLang="ko-KR" sz="1000" dirty="0" err="1" smtClean="0">
                 <a:solidFill>
@@ -28658,8 +28704,34 @@
                 <a:latin typeface="Noto Sans KR Medium" panose="020B0200000000000000" pitchFamily="34" charset="-128"/>
                 <a:ea typeface="Noto Sans KR Medium" panose="020B0200000000000000" pitchFamily="34" charset="-128"/>
               </a:rPr>
-              <a:t>를 부여하여 각각의 구역을 표시함</a:t>
-            </a:r>
+              <a:t>를 부여하여 각각의 구역을 </a:t>
+            </a:r>
+            <a:r>
+              <a:rPr lang="ko-KR" altLang="en-US" sz="1000" dirty="0" smtClean="0">
+                <a:solidFill>
+                  <a:schemeClr val="bg1">
+                    <a:lumMod val="95000"/>
+                  </a:schemeClr>
+                </a:solidFill>
+                <a:latin typeface="Noto Sans KR Medium" panose="020B0200000000000000" pitchFamily="34" charset="-128"/>
+                <a:ea typeface="Noto Sans KR Medium" panose="020B0200000000000000" pitchFamily="34" charset="-128"/>
+              </a:rPr>
+              <a:t>표시합니다</a:t>
+            </a:r>
+            <a:r>
+              <a:rPr lang="en-US" altLang="ko-KR" sz="1000" dirty="0" smtClean="0">
+                <a:solidFill>
+                  <a:schemeClr val="bg1">
+                    <a:lumMod val="95000"/>
+                  </a:schemeClr>
+                </a:solidFill>
+                <a:latin typeface="Noto Sans KR Medium" panose="020B0200000000000000" pitchFamily="34" charset="-128"/>
+                <a:ea typeface="Noto Sans KR Medium" panose="020B0200000000000000" pitchFamily="34" charset="-128"/>
+              </a:rPr>
+              <a:t>.</a:t>
+            </a:r>
+          </a:p>
+          <a:p>
             <a:endParaRPr lang="en-US" altLang="ko-KR" sz="1000" dirty="0" smtClean="0">
               <a:solidFill>
                 <a:schemeClr val="bg1">
@@ -28671,10 +28743,6 @@
             </a:endParaRPr>
           </a:p>
           <a:p>
-            <a:pPr marL="171450" indent="-171450">
-              <a:buFontTx/>
-              <a:buChar char="-"/>
-            </a:pPr>
             <a:r>
               <a:rPr lang="ko-KR" altLang="en-US" sz="1000" dirty="0" smtClean="0">
                 <a:solidFill>
@@ -28757,7 +28825,31 @@
                 <a:latin typeface="Noto Sans KR Medium" panose="020B0200000000000000" pitchFamily="34" charset="-128"/>
                 <a:ea typeface="Noto Sans KR Medium" panose="020B0200000000000000" pitchFamily="34" charset="-128"/>
               </a:rPr>
-              <a:t> 생성</a:t>
+              <a:t> </a:t>
+            </a:r>
+            <a:r>
+              <a:rPr lang="ko-KR" altLang="en-US" sz="1000" dirty="0" smtClean="0">
+                <a:solidFill>
+                  <a:schemeClr val="bg1">
+                    <a:lumMod val="95000"/>
+                  </a:schemeClr>
+                </a:solidFill>
+                <a:latin typeface="Noto Sans KR Medium" panose="020B0200000000000000" pitchFamily="34" charset="-128"/>
+                <a:ea typeface="Noto Sans KR Medium" panose="020B0200000000000000" pitchFamily="34" charset="-128"/>
+              </a:rPr>
+              <a:t>생성합니다</a:t>
+            </a:r>
+            <a:r>
+              <a:rPr lang="en-US" altLang="ko-KR" sz="1000" dirty="0" smtClean="0">
+                <a:solidFill>
+                  <a:schemeClr val="bg1">
+                    <a:lumMod val="95000"/>
+                  </a:schemeClr>
+                </a:solidFill>
+                <a:latin typeface="Noto Sans KR Medium" panose="020B0200000000000000" pitchFamily="34" charset="-128"/>
+                <a:ea typeface="Noto Sans KR Medium" panose="020B0200000000000000" pitchFamily="34" charset="-128"/>
+              </a:rPr>
+              <a:t>.</a:t>
             </a:r>
             <a:endParaRPr lang="en-US" altLang="ko-KR" sz="1000" dirty="0" smtClean="0">
               <a:solidFill>
@@ -28770,10 +28862,6 @@
             </a:endParaRPr>
           </a:p>
           <a:p>
-            <a:pPr marL="171450" indent="-171450">
-              <a:buFontTx/>
-              <a:buChar char="-"/>
-            </a:pPr>
             <a:r>
               <a:rPr lang="ko-KR" altLang="en-US" sz="1000" dirty="0" smtClean="0">
                 <a:solidFill>
@@ -28808,8 +28896,34 @@
                 <a:latin typeface="Noto Sans KR Medium" panose="020B0200000000000000" pitchFamily="34" charset="-128"/>
                 <a:ea typeface="Noto Sans KR Medium" panose="020B0200000000000000" pitchFamily="34" charset="-128"/>
               </a:rPr>
-              <a:t> 모두 쓰러뜨리면 해당 구역이 완료됨</a:t>
-            </a:r>
+              <a:t> 모두 쓰러뜨리면 해당 구역이 </a:t>
+            </a:r>
+            <a:r>
+              <a:rPr lang="ko-KR" altLang="en-US" sz="1000" dirty="0" smtClean="0">
+                <a:solidFill>
+                  <a:schemeClr val="bg1">
+                    <a:lumMod val="95000"/>
+                  </a:schemeClr>
+                </a:solidFill>
+                <a:latin typeface="Noto Sans KR Medium" panose="020B0200000000000000" pitchFamily="34" charset="-128"/>
+                <a:ea typeface="Noto Sans KR Medium" panose="020B0200000000000000" pitchFamily="34" charset="-128"/>
+              </a:rPr>
+              <a:t>완료됩니다</a:t>
+            </a:r>
+            <a:r>
+              <a:rPr lang="en-US" altLang="ko-KR" sz="1000" dirty="0" smtClean="0">
+                <a:solidFill>
+                  <a:schemeClr val="bg1">
+                    <a:lumMod val="95000"/>
+                  </a:schemeClr>
+                </a:solidFill>
+                <a:latin typeface="Noto Sans KR Medium" panose="020B0200000000000000" pitchFamily="34" charset="-128"/>
+                <a:ea typeface="Noto Sans KR Medium" panose="020B0200000000000000" pitchFamily="34" charset="-128"/>
+              </a:rPr>
+              <a:t>.</a:t>
+            </a:r>
+          </a:p>
+          <a:p>
             <a:endParaRPr lang="en-US" altLang="ko-KR" sz="1000" dirty="0" smtClean="0">
               <a:solidFill>
                 <a:schemeClr val="bg1">
@@ -28821,21 +28935,29 @@
             </a:endParaRPr>
           </a:p>
           <a:p>
-            <a:pPr marL="171450" indent="-171450">
-              <a:buFontTx/>
-              <a:buChar char="-"/>
-            </a:pPr>
-            <a:r>
-              <a:rPr lang="ko-KR" altLang="en-US" sz="1000" dirty="0" smtClean="0">
-                <a:solidFill>
-                  <a:schemeClr val="bg1">
-                    <a:lumMod val="95000"/>
-                  </a:schemeClr>
-                </a:solidFill>
-                <a:latin typeface="Noto Sans KR Medium" panose="020B0200000000000000" pitchFamily="34" charset="-128"/>
-                <a:ea typeface="Noto Sans KR Medium" panose="020B0200000000000000" pitchFamily="34" charset="-128"/>
-              </a:rPr>
-              <a:t>레벨에서 생성할 </a:t>
+            <a:r>
+              <a:rPr lang="ko-KR" altLang="en-US" sz="1000" dirty="0" smtClean="0">
+                <a:solidFill>
+                  <a:schemeClr val="bg1">
+                    <a:lumMod val="95000"/>
+                  </a:schemeClr>
+                </a:solidFill>
+                <a:latin typeface="Noto Sans KR Medium" panose="020B0200000000000000" pitchFamily="34" charset="-128"/>
+                <a:ea typeface="Noto Sans KR Medium" panose="020B0200000000000000" pitchFamily="34" charset="-128"/>
+              </a:rPr>
+              <a:t>레벨에서 </a:t>
+            </a:r>
+            <a:r>
+              <a:rPr lang="ko-KR" altLang="en-US" sz="1000" dirty="0" smtClean="0">
+                <a:solidFill>
+                  <a:schemeClr val="bg1">
+                    <a:lumMod val="95000"/>
+                  </a:schemeClr>
+                </a:solidFill>
+                <a:latin typeface="Noto Sans KR Medium" panose="020B0200000000000000" pitchFamily="34" charset="-128"/>
+                <a:ea typeface="Noto Sans KR Medium" panose="020B0200000000000000" pitchFamily="34" charset="-128"/>
+              </a:rPr>
+              <a:t>생성할 </a:t>
             </a:r>
             <a:r>
               <a:rPr lang="ko-KR" altLang="en-US" sz="1000" dirty="0" err="1" smtClean="0">
@@ -28871,32 +28993,31 @@
                 <a:latin typeface="Noto Sans KR Medium" panose="020B0200000000000000" pitchFamily="34" charset="-128"/>
                 <a:ea typeface="Noto Sans KR Medium" panose="020B0200000000000000" pitchFamily="34" charset="-128"/>
               </a:rPr>
-              <a:t>스폰하는</a:t>
-            </a:r>
-            <a:r>
-              <a:rPr lang="ko-KR" altLang="en-US" sz="1000" dirty="0" smtClean="0">
-                <a:solidFill>
-                  <a:schemeClr val="bg1">
-                    <a:lumMod val="95000"/>
-                  </a:schemeClr>
-                </a:solidFill>
-                <a:latin typeface="Noto Sans KR Medium" panose="020B0200000000000000" pitchFamily="34" charset="-128"/>
-                <a:ea typeface="Noto Sans KR Medium" panose="020B0200000000000000" pitchFamily="34" charset="-128"/>
-              </a:rPr>
-              <a:t> 것이 아니라</a:t>
-            </a:r>
-            <a:r>
-              <a:rPr lang="en-US" altLang="ko-KR" sz="1000" dirty="0">
-                <a:solidFill>
-                  <a:schemeClr val="bg1">
-                    <a:lumMod val="95000"/>
-                  </a:schemeClr>
-                </a:solidFill>
-                <a:latin typeface="Noto Sans KR Medium" panose="020B0200000000000000" pitchFamily="34" charset="-128"/>
-                <a:ea typeface="Noto Sans KR Medium" panose="020B0200000000000000" pitchFamily="34" charset="-128"/>
-              </a:rPr>
-              <a:t> </a:t>
-            </a:r>
+              <a:t>스폰하지</a:t>
+            </a:r>
+            <a:r>
+              <a:rPr lang="ko-KR" altLang="en-US" sz="1000" dirty="0" smtClean="0">
+                <a:solidFill>
+                  <a:schemeClr val="bg1">
+                    <a:lumMod val="95000"/>
+                  </a:schemeClr>
+                </a:solidFill>
+                <a:latin typeface="Noto Sans KR Medium" panose="020B0200000000000000" pitchFamily="34" charset="-128"/>
+                <a:ea typeface="Noto Sans KR Medium" panose="020B0200000000000000" pitchFamily="34" charset="-128"/>
+              </a:rPr>
+              <a:t> 않고 </a:t>
+            </a:r>
+            <a:endParaRPr lang="en-US" altLang="ko-KR" sz="1000" dirty="0" smtClean="0">
+              <a:solidFill>
+                <a:schemeClr val="bg1">
+                  <a:lumMod val="95000"/>
+                </a:schemeClr>
+              </a:solidFill>
+              <a:latin typeface="Noto Sans KR Medium" panose="020B0200000000000000" pitchFamily="34" charset="-128"/>
+              <a:ea typeface="Noto Sans KR Medium" panose="020B0200000000000000" pitchFamily="34" charset="-128"/>
+            </a:endParaRPr>
+          </a:p>
+          <a:p>
             <a:r>
               <a:rPr lang="en-US" altLang="ko-KR" sz="1000" dirty="0" err="1" smtClean="0">
                 <a:solidFill>
@@ -28907,19 +29028,31 @@
                 <a:latin typeface="Noto Sans KR Medium" panose="020B0200000000000000" pitchFamily="34" charset="-128"/>
                 <a:ea typeface="Noto Sans KR Medium" panose="020B0200000000000000" pitchFamily="34" charset="-128"/>
               </a:rPr>
-              <a:t>ObjectPoolManager</a:t>
-            </a:r>
-            <a:r>
-              <a:rPr lang="ko-KR" altLang="en-US" sz="1000" dirty="0" smtClean="0">
-                <a:solidFill>
-                  <a:schemeClr val="bg1">
-                    <a:lumMod val="95000"/>
-                  </a:schemeClr>
-                </a:solidFill>
-                <a:latin typeface="Noto Sans KR Medium" panose="020B0200000000000000" pitchFamily="34" charset="-128"/>
-                <a:ea typeface="Noto Sans KR Medium" panose="020B0200000000000000" pitchFamily="34" charset="-128"/>
-              </a:rPr>
-              <a:t>에 등록되어 재사용됨</a:t>
+              <a:t>UObjectPoolManager</a:t>
+            </a:r>
+            <a:r>
+              <a:rPr lang="ko-KR" altLang="en-US" sz="1000" dirty="0" smtClean="0">
+                <a:solidFill>
+                  <a:schemeClr val="bg1">
+                    <a:lumMod val="95000"/>
+                  </a:schemeClr>
+                </a:solidFill>
+                <a:latin typeface="Noto Sans KR Medium" panose="020B0200000000000000" pitchFamily="34" charset="-128"/>
+                <a:ea typeface="Noto Sans KR Medium" panose="020B0200000000000000" pitchFamily="34" charset="-128"/>
+              </a:rPr>
+              <a:t>에 </a:t>
+            </a:r>
+            <a:r>
+              <a:rPr lang="ko-KR" altLang="en-US" sz="1000" dirty="0" smtClean="0">
+                <a:solidFill>
+                  <a:schemeClr val="bg1">
+                    <a:lumMod val="95000"/>
+                  </a:schemeClr>
+                </a:solidFill>
+                <a:latin typeface="Noto Sans KR Medium" panose="020B0200000000000000" pitchFamily="34" charset="-128"/>
+                <a:ea typeface="Noto Sans KR Medium" panose="020B0200000000000000" pitchFamily="34" charset="-128"/>
+              </a:rPr>
+              <a:t>등록하여 재사용합니다</a:t>
             </a:r>
             <a:r>
               <a:rPr lang="en-US" altLang="ko-KR" sz="1000" dirty="0" smtClean="0">
@@ -28933,6 +29066,15 @@
               </a:rPr>
               <a:t>.</a:t>
             </a:r>
+            <a:endParaRPr lang="en-US" altLang="ko-KR" sz="1000" dirty="0" smtClean="0">
+              <a:solidFill>
+                <a:schemeClr val="bg1">
+                  <a:lumMod val="95000"/>
+                </a:schemeClr>
+              </a:solidFill>
+              <a:latin typeface="Noto Sans KR Medium" panose="020B0200000000000000" pitchFamily="34" charset="-128"/>
+              <a:ea typeface="Noto Sans KR Medium" panose="020B0200000000000000" pitchFamily="34" charset="-128"/>
+            </a:endParaRPr>
           </a:p>
         </p:txBody>
       </p:sp>
@@ -29231,7 +29373,7 @@
         <p:spPr>
           <a:xfrm>
             <a:off x="454275" y="1480347"/>
-            <a:ext cx="5651249" cy="3323987"/>
+            <a:ext cx="5651249" cy="2400657"/>
           </a:xfrm>
           <a:prstGeom prst="rect">
             <a:avLst/>
@@ -29277,7 +29419,19 @@
                 <a:latin typeface="Noto Sans KR Medium" panose="020B0200000000000000" pitchFamily="34" charset="-128"/>
                 <a:ea typeface="Noto Sans KR Medium" panose="020B0200000000000000" pitchFamily="34" charset="-128"/>
               </a:rPr>
-              <a:t>구독 모델을 확장한 이벤트 버스 방식으로 진행함</a:t>
+              <a:t>구독 모델을 확장한 이벤트 버스 방식으로 </a:t>
+            </a:r>
+            <a:r>
+              <a:rPr lang="ko-KR" altLang="en-US" sz="1000" dirty="0" smtClean="0">
+                <a:solidFill>
+                  <a:schemeClr val="bg1">
+                    <a:lumMod val="95000"/>
+                  </a:schemeClr>
+                </a:solidFill>
+                <a:latin typeface="Noto Sans KR Medium" panose="020B0200000000000000" pitchFamily="34" charset="-128"/>
+                <a:ea typeface="Noto Sans KR Medium" panose="020B0200000000000000" pitchFamily="34" charset="-128"/>
+              </a:rPr>
+              <a:t>구조를 잡았습니다</a:t>
             </a:r>
             <a:r>
               <a:rPr lang="en-US" altLang="ko-KR" sz="1000" dirty="0" smtClean="0">
@@ -29290,94 +29444,6 @@
                 <a:ea typeface="Noto Sans KR Medium" panose="020B0200000000000000" pitchFamily="34" charset="-128"/>
               </a:rPr>
               <a:t>.</a:t>
-            </a:r>
-          </a:p>
-          <a:p>
-            <a:r>
-              <a:rPr lang="ko-KR" altLang="en-US" sz="1000" dirty="0" smtClean="0">
-                <a:solidFill>
-                  <a:schemeClr val="bg1">
-                    <a:lumMod val="95000"/>
-                  </a:schemeClr>
-                </a:solidFill>
-                <a:latin typeface="Noto Sans KR Medium" panose="020B0200000000000000" pitchFamily="34" charset="-128"/>
-                <a:ea typeface="Noto Sans KR Medium" panose="020B0200000000000000" pitchFamily="34" charset="-128"/>
-              </a:rPr>
-              <a:t>각 </a:t>
-            </a:r>
-            <a:r>
-              <a:rPr lang="ko-KR" altLang="en-US" sz="1000" dirty="0" err="1" smtClean="0">
-                <a:solidFill>
-                  <a:schemeClr val="bg1">
-                    <a:lumMod val="95000"/>
-                  </a:schemeClr>
-                </a:solidFill>
-                <a:latin typeface="Noto Sans KR Medium" panose="020B0200000000000000" pitchFamily="34" charset="-128"/>
-                <a:ea typeface="Noto Sans KR Medium" panose="020B0200000000000000" pitchFamily="34" charset="-128"/>
-              </a:rPr>
-              <a:t>액터들이</a:t>
-            </a:r>
-            <a:r>
-              <a:rPr lang="ko-KR" altLang="en-US" sz="1000" dirty="0" smtClean="0">
-                <a:solidFill>
-                  <a:schemeClr val="bg1">
-                    <a:lumMod val="95000"/>
-                  </a:schemeClr>
-                </a:solidFill>
-                <a:latin typeface="Noto Sans KR Medium" panose="020B0200000000000000" pitchFamily="34" charset="-128"/>
-                <a:ea typeface="Noto Sans KR Medium" panose="020B0200000000000000" pitchFamily="34" charset="-128"/>
-              </a:rPr>
-              <a:t> 직접적으로 의존 관계를 맺지 않도록 하기 위해 </a:t>
-            </a:r>
-            <a:r>
-              <a:rPr lang="en-US" altLang="ko-KR" sz="1000" dirty="0" err="1" smtClean="0">
-                <a:solidFill>
-                  <a:schemeClr val="bg1">
-                    <a:lumMod val="95000"/>
-                  </a:schemeClr>
-                </a:solidFill>
-                <a:latin typeface="Noto Sans KR Medium" panose="020B0200000000000000" pitchFamily="34" charset="-128"/>
-                <a:ea typeface="Noto Sans KR Medium" panose="020B0200000000000000" pitchFamily="34" charset="-128"/>
-              </a:rPr>
-              <a:t>GameMode</a:t>
-            </a:r>
-            <a:r>
-              <a:rPr lang="ko-KR" altLang="en-US" sz="1000" dirty="0" smtClean="0">
-                <a:solidFill>
-                  <a:schemeClr val="bg1">
-                    <a:lumMod val="95000"/>
-                  </a:schemeClr>
-                </a:solidFill>
-                <a:latin typeface="Noto Sans KR Medium" panose="020B0200000000000000" pitchFamily="34" charset="-128"/>
-                <a:ea typeface="Noto Sans KR Medium" panose="020B0200000000000000" pitchFamily="34" charset="-128"/>
-              </a:rPr>
-              <a:t>를 통한 이벤트 기반으로 작업</a:t>
-            </a:r>
-            <a:r>
-              <a:rPr lang="en-US" altLang="ko-KR" sz="1000" dirty="0" smtClean="0">
-                <a:solidFill>
-                  <a:schemeClr val="bg1">
-                    <a:lumMod val="95000"/>
-                  </a:schemeClr>
-                </a:solidFill>
-                <a:latin typeface="Noto Sans KR Medium" panose="020B0200000000000000" pitchFamily="34" charset="-128"/>
-                <a:ea typeface="Noto Sans KR Medium" panose="020B0200000000000000" pitchFamily="34" charset="-128"/>
-              </a:rPr>
-              <a:t>.</a:t>
-            </a:r>
-          </a:p>
-          <a:p>
-            <a:r>
-              <a:rPr lang="ko-KR" altLang="en-US" sz="1000" dirty="0" smtClean="0">
-                <a:solidFill>
-                  <a:schemeClr val="bg1">
-                    <a:lumMod val="95000"/>
-                  </a:schemeClr>
-                </a:solidFill>
-                <a:latin typeface="Noto Sans KR Medium" panose="020B0200000000000000" pitchFamily="34" charset="-128"/>
-                <a:ea typeface="Noto Sans KR Medium" panose="020B0200000000000000" pitchFamily="34" charset="-128"/>
-              </a:rPr>
-              <a:t>스테이지 진행에 발생하는 이벤트 종류</a:t>
             </a:r>
             <a:endParaRPr lang="en-US" altLang="ko-KR" sz="1000" dirty="0" smtClean="0">
               <a:solidFill>
@@ -29390,22 +29456,116 @@
             </a:endParaRPr>
           </a:p>
           <a:p>
-            <a:pPr marL="171450" indent="-171450">
-              <a:buFontTx/>
-              <a:buChar char="-"/>
-            </a:pPr>
-            <a:r>
-              <a:rPr lang="ko-KR" altLang="en-US" sz="1000" dirty="0" smtClean="0">
-                <a:solidFill>
-                  <a:schemeClr val="bg1">
-                    <a:lumMod val="95000"/>
-                  </a:schemeClr>
-                </a:solidFill>
-                <a:latin typeface="Noto Sans KR Medium" panose="020B0200000000000000" pitchFamily="34" charset="-128"/>
-                <a:ea typeface="Noto Sans KR Medium" panose="020B0200000000000000" pitchFamily="34" charset="-128"/>
-              </a:rPr>
-              <a:t>플레이어 사망</a:t>
-            </a:r>
+            <a:r>
+              <a:rPr lang="ko-KR" altLang="en-US" sz="1000" dirty="0" err="1" smtClean="0">
+                <a:solidFill>
+                  <a:schemeClr val="bg1">
+                    <a:lumMod val="95000"/>
+                  </a:schemeClr>
+                </a:solidFill>
+                <a:latin typeface="Noto Sans KR Medium" panose="020B0200000000000000" pitchFamily="34" charset="-128"/>
+                <a:ea typeface="Noto Sans KR Medium" panose="020B0200000000000000" pitchFamily="34" charset="-128"/>
+              </a:rPr>
+              <a:t>몬스터와</a:t>
+            </a:r>
+            <a:r>
+              <a:rPr lang="ko-KR" altLang="en-US" sz="1000" dirty="0" smtClean="0">
+                <a:solidFill>
+                  <a:schemeClr val="bg1">
+                    <a:lumMod val="95000"/>
+                  </a:schemeClr>
+                </a:solidFill>
+                <a:latin typeface="Noto Sans KR Medium" panose="020B0200000000000000" pitchFamily="34" charset="-128"/>
+                <a:ea typeface="Noto Sans KR Medium" panose="020B0200000000000000" pitchFamily="34" charset="-128"/>
+              </a:rPr>
+              <a:t> 같은 </a:t>
+            </a:r>
+            <a:r>
+              <a:rPr lang="ko-KR" altLang="en-US" sz="1000" dirty="0" err="1" smtClean="0">
+                <a:solidFill>
+                  <a:schemeClr val="bg1">
+                    <a:lumMod val="95000"/>
+                  </a:schemeClr>
+                </a:solidFill>
+                <a:latin typeface="Noto Sans KR Medium" panose="020B0200000000000000" pitchFamily="34" charset="-128"/>
+                <a:ea typeface="Noto Sans KR Medium" panose="020B0200000000000000" pitchFamily="34" charset="-128"/>
+              </a:rPr>
+              <a:t>액터들이</a:t>
+            </a:r>
+            <a:r>
+              <a:rPr lang="ko-KR" altLang="en-US" sz="1000" dirty="0" smtClean="0">
+                <a:solidFill>
+                  <a:schemeClr val="bg1">
+                    <a:lumMod val="95000"/>
+                  </a:schemeClr>
+                </a:solidFill>
+                <a:latin typeface="Noto Sans KR Medium" panose="020B0200000000000000" pitchFamily="34" charset="-128"/>
+                <a:ea typeface="Noto Sans KR Medium" panose="020B0200000000000000" pitchFamily="34" charset="-128"/>
+              </a:rPr>
+              <a:t> </a:t>
+            </a:r>
+            <a:r>
+              <a:rPr lang="ko-KR" altLang="en-US" sz="1000" dirty="0" smtClean="0">
+                <a:solidFill>
+                  <a:schemeClr val="bg1">
+                    <a:lumMod val="95000"/>
+                  </a:schemeClr>
+                </a:solidFill>
+                <a:latin typeface="Noto Sans KR Medium" panose="020B0200000000000000" pitchFamily="34" charset="-128"/>
+                <a:ea typeface="Noto Sans KR Medium" panose="020B0200000000000000" pitchFamily="34" charset="-128"/>
+              </a:rPr>
+              <a:t>게임 진행에 직접적 관여하지 않도록 </a:t>
+            </a:r>
+            <a:r>
+              <a:rPr lang="en-US" altLang="ko-KR" sz="1000" dirty="0" err="1" smtClean="0">
+                <a:solidFill>
+                  <a:schemeClr val="bg1">
+                    <a:lumMod val="95000"/>
+                  </a:schemeClr>
+                </a:solidFill>
+                <a:latin typeface="Noto Sans KR Medium" panose="020B0200000000000000" pitchFamily="34" charset="-128"/>
+                <a:ea typeface="Noto Sans KR Medium" panose="020B0200000000000000" pitchFamily="34" charset="-128"/>
+              </a:rPr>
+              <a:t>GameMode</a:t>
+            </a:r>
+            <a:r>
+              <a:rPr lang="ko-KR" altLang="en-US" sz="1000" dirty="0" smtClean="0">
+                <a:solidFill>
+                  <a:schemeClr val="bg1">
+                    <a:lumMod val="95000"/>
+                  </a:schemeClr>
+                </a:solidFill>
+                <a:latin typeface="Noto Sans KR Medium" panose="020B0200000000000000" pitchFamily="34" charset="-128"/>
+                <a:ea typeface="Noto Sans KR Medium" panose="020B0200000000000000" pitchFamily="34" charset="-128"/>
+              </a:rPr>
+              <a:t>를 통한 이벤트 기반으로 </a:t>
+            </a:r>
+            <a:r>
+              <a:rPr lang="ko-KR" altLang="en-US" sz="1000" dirty="0" smtClean="0">
+                <a:solidFill>
+                  <a:schemeClr val="bg1">
+                    <a:lumMod val="95000"/>
+                  </a:schemeClr>
+                </a:solidFill>
+                <a:latin typeface="Noto Sans KR Medium" panose="020B0200000000000000" pitchFamily="34" charset="-128"/>
+                <a:ea typeface="Noto Sans KR Medium" panose="020B0200000000000000" pitchFamily="34" charset="-128"/>
+              </a:rPr>
+              <a:t>작업했습니다</a:t>
+            </a:r>
+            <a:r>
+              <a:rPr lang="en-US" altLang="ko-KR" sz="1000" dirty="0" smtClean="0">
+                <a:solidFill>
+                  <a:schemeClr val="bg1">
+                    <a:lumMod val="95000"/>
+                  </a:schemeClr>
+                </a:solidFill>
+                <a:latin typeface="Noto Sans KR Medium" panose="020B0200000000000000" pitchFamily="34" charset="-128"/>
+                <a:ea typeface="Noto Sans KR Medium" panose="020B0200000000000000" pitchFamily="34" charset="-128"/>
+              </a:rPr>
+              <a:t>.</a:t>
+            </a:r>
+          </a:p>
+          <a:p>
             <a:endParaRPr lang="en-US" altLang="ko-KR" sz="1000" dirty="0" smtClean="0">
               <a:solidFill>
                 <a:schemeClr val="bg1">
@@ -29417,33 +29577,17 @@
             </a:endParaRPr>
           </a:p>
           <a:p>
-            <a:pPr marL="171450" indent="-171450">
-              <a:buFontTx/>
-              <a:buChar char="-"/>
-            </a:pPr>
-            <a:r>
-              <a:rPr lang="ko-KR" altLang="en-US" sz="1000" dirty="0" err="1" smtClean="0">
-                <a:solidFill>
-                  <a:schemeClr val="bg1">
-                    <a:lumMod val="95000"/>
-                  </a:schemeClr>
-                </a:solidFill>
-                <a:latin typeface="Noto Sans KR Medium" panose="020B0200000000000000" pitchFamily="34" charset="-128"/>
-                <a:ea typeface="Noto Sans KR Medium" panose="020B0200000000000000" pitchFamily="34" charset="-128"/>
-              </a:rPr>
-              <a:t>몬스터</a:t>
-            </a:r>
-            <a:r>
-              <a:rPr lang="ko-KR" altLang="en-US" sz="1000" dirty="0" smtClean="0">
-                <a:solidFill>
-                  <a:schemeClr val="bg1">
-                    <a:lumMod val="95000"/>
-                  </a:schemeClr>
-                </a:solidFill>
-                <a:latin typeface="Noto Sans KR Medium" panose="020B0200000000000000" pitchFamily="34" charset="-128"/>
-                <a:ea typeface="Noto Sans KR Medium" panose="020B0200000000000000" pitchFamily="34" charset="-128"/>
-              </a:rPr>
-              <a:t> 사망</a:t>
+            <a:r>
+              <a:rPr lang="ko-KR" altLang="en-US" sz="1000" dirty="0" smtClean="0">
+                <a:solidFill>
+                  <a:schemeClr val="bg1">
+                    <a:lumMod val="95000"/>
+                  </a:schemeClr>
+                </a:solidFill>
+                <a:latin typeface="Noto Sans KR Medium" panose="020B0200000000000000" pitchFamily="34" charset="-128"/>
+                <a:ea typeface="Noto Sans KR Medium" panose="020B0200000000000000" pitchFamily="34" charset="-128"/>
+              </a:rPr>
+              <a:t>스테이지 진행에 발생하는 이벤트 종류</a:t>
             </a:r>
             <a:endParaRPr lang="en-US" altLang="ko-KR" sz="1000" dirty="0" smtClean="0">
               <a:solidFill>
@@ -29470,7 +29614,7 @@
                 <a:latin typeface="Noto Sans KR Medium" panose="020B0200000000000000" pitchFamily="34" charset="-128"/>
                 <a:ea typeface="Noto Sans KR Medium" panose="020B0200000000000000" pitchFamily="34" charset="-128"/>
               </a:rPr>
-              <a:t>구역 완료</a:t>
+              <a:t>플레이어 사망</a:t>
             </a:r>
             <a:endParaRPr lang="en-US" altLang="ko-KR" sz="1000" dirty="0" smtClean="0">
               <a:solidFill>
@@ -29483,6 +29627,34 @@
             </a:endParaRPr>
           </a:p>
           <a:p>
+            <a:pPr marL="171450" indent="-171450">
+              <a:buFontTx/>
+              <a:buChar char="-"/>
+            </a:pPr>
+            <a:r>
+              <a:rPr lang="ko-KR" altLang="en-US" sz="1000" dirty="0" err="1" smtClean="0">
+                <a:solidFill>
+                  <a:schemeClr val="bg1">
+                    <a:lumMod val="95000"/>
+                  </a:schemeClr>
+                </a:solidFill>
+                <a:latin typeface="Noto Sans KR Medium" panose="020B0200000000000000" pitchFamily="34" charset="-128"/>
+                <a:ea typeface="Noto Sans KR Medium" panose="020B0200000000000000" pitchFamily="34" charset="-128"/>
+              </a:rPr>
+              <a:t>몬스터</a:t>
+            </a:r>
+            <a:r>
+              <a:rPr lang="ko-KR" altLang="en-US" sz="1000" dirty="0" smtClean="0">
+                <a:solidFill>
+                  <a:schemeClr val="bg1">
+                    <a:lumMod val="95000"/>
+                  </a:schemeClr>
+                </a:solidFill>
+                <a:latin typeface="Noto Sans KR Medium" panose="020B0200000000000000" pitchFamily="34" charset="-128"/>
+                <a:ea typeface="Noto Sans KR Medium" panose="020B0200000000000000" pitchFamily="34" charset="-128"/>
+              </a:rPr>
+              <a:t> 사망</a:t>
+            </a:r>
             <a:endParaRPr lang="en-US" altLang="ko-KR" sz="1000" dirty="0" smtClean="0">
               <a:solidFill>
                 <a:schemeClr val="bg1">
@@ -29494,41 +29666,21 @@
             </a:endParaRPr>
           </a:p>
           <a:p>
-            <a:r>
-              <a:rPr lang="ko-KR" altLang="en-US" sz="1000" dirty="0" smtClean="0">
-                <a:solidFill>
-                  <a:schemeClr val="bg1">
-                    <a:lumMod val="95000"/>
-                  </a:schemeClr>
-                </a:solidFill>
-                <a:latin typeface="Noto Sans KR Medium" panose="020B0200000000000000" pitchFamily="34" charset="-128"/>
-                <a:ea typeface="Noto Sans KR Medium" panose="020B0200000000000000" pitchFamily="34" charset="-128"/>
-              </a:rPr>
-              <a:t>진행에 필요한 주된 데이터는 </a:t>
-            </a:r>
-            <a:r>
-              <a:rPr lang="en-US" altLang="ko-KR" sz="1000" dirty="0" err="1" smtClean="0">
-                <a:solidFill>
-                  <a:schemeClr val="bg1">
-                    <a:lumMod val="95000"/>
-                  </a:schemeClr>
-                </a:solidFill>
-                <a:latin typeface="Noto Sans KR Medium" panose="020B0200000000000000" pitchFamily="34" charset="-128"/>
-                <a:ea typeface="Noto Sans KR Medium" panose="020B0200000000000000" pitchFamily="34" charset="-128"/>
-              </a:rPr>
-              <a:t>GameState</a:t>
-            </a:r>
-            <a:r>
-              <a:rPr lang="ko-KR" altLang="en-US" sz="1000" dirty="0" smtClean="0">
-                <a:solidFill>
-                  <a:schemeClr val="bg1">
-                    <a:lumMod val="95000"/>
-                  </a:schemeClr>
-                </a:solidFill>
-                <a:latin typeface="Noto Sans KR Medium" panose="020B0200000000000000" pitchFamily="34" charset="-128"/>
-                <a:ea typeface="Noto Sans KR Medium" panose="020B0200000000000000" pitchFamily="34" charset="-128"/>
-              </a:rPr>
-              <a:t>에서 관리</a:t>
+            <a:pPr marL="171450" indent="-171450">
+              <a:buFontTx/>
+              <a:buChar char="-"/>
+            </a:pPr>
+            <a:r>
+              <a:rPr lang="ko-KR" altLang="en-US" sz="1000" dirty="0" smtClean="0">
+                <a:solidFill>
+                  <a:schemeClr val="bg1">
+                    <a:lumMod val="95000"/>
+                  </a:schemeClr>
+                </a:solidFill>
+                <a:latin typeface="Noto Sans KR Medium" panose="020B0200000000000000" pitchFamily="34" charset="-128"/>
+                <a:ea typeface="Noto Sans KR Medium" panose="020B0200000000000000" pitchFamily="34" charset="-128"/>
+              </a:rPr>
+              <a:t>구역 완료</a:t>
             </a:r>
             <a:endParaRPr lang="en-US" altLang="ko-KR" sz="1000" dirty="0" smtClean="0">
               <a:solidFill>
@@ -29541,42 +29693,6 @@
             </a:endParaRPr>
           </a:p>
           <a:p>
-            <a:r>
-              <a:rPr lang="ko-KR" altLang="en-US" sz="1000" dirty="0" smtClean="0">
-                <a:solidFill>
-                  <a:schemeClr val="bg1">
-                    <a:lumMod val="95000"/>
-                  </a:schemeClr>
-                </a:solidFill>
-                <a:latin typeface="Noto Sans KR Medium" panose="020B0200000000000000" pitchFamily="34" charset="-128"/>
-                <a:ea typeface="Noto Sans KR Medium" panose="020B0200000000000000" pitchFamily="34" charset="-128"/>
-              </a:rPr>
-              <a:t>각 구역의 </a:t>
-            </a:r>
-            <a:r>
-              <a:rPr lang="ko-KR" altLang="en-US" sz="1000" dirty="0" err="1" smtClean="0">
-                <a:solidFill>
-                  <a:schemeClr val="bg1">
-                    <a:lumMod val="95000"/>
-                  </a:schemeClr>
-                </a:solidFill>
-                <a:latin typeface="Noto Sans KR Medium" panose="020B0200000000000000" pitchFamily="34" charset="-128"/>
-                <a:ea typeface="Noto Sans KR Medium" panose="020B0200000000000000" pitchFamily="34" charset="-128"/>
-              </a:rPr>
-              <a:t>클리어</a:t>
-            </a:r>
-            <a:r>
-              <a:rPr lang="ko-KR" altLang="en-US" sz="1000" dirty="0" smtClean="0">
-                <a:solidFill>
-                  <a:schemeClr val="bg1">
-                    <a:lumMod val="95000"/>
-                  </a:schemeClr>
-                </a:solidFill>
-                <a:latin typeface="Noto Sans KR Medium" panose="020B0200000000000000" pitchFamily="34" charset="-128"/>
-                <a:ea typeface="Noto Sans KR Medium" panose="020B0200000000000000" pitchFamily="34" charset="-128"/>
-              </a:rPr>
-              <a:t> 여부를 보관 중</a:t>
-            </a:r>
             <a:endParaRPr lang="en-US" altLang="ko-KR" sz="1000" dirty="0" smtClean="0">
               <a:solidFill>
                 <a:schemeClr val="bg1">
@@ -29588,6 +29704,322 @@
             </a:endParaRPr>
           </a:p>
           <a:p>
+            <a:r>
+              <a:rPr lang="ko-KR" altLang="en-US" sz="1000" dirty="0" smtClean="0">
+                <a:solidFill>
+                  <a:schemeClr val="bg1">
+                    <a:lumMod val="95000"/>
+                  </a:schemeClr>
+                </a:solidFill>
+                <a:latin typeface="Noto Sans KR Medium" panose="020B0200000000000000" pitchFamily="34" charset="-128"/>
+                <a:ea typeface="Noto Sans KR Medium" panose="020B0200000000000000" pitchFamily="34" charset="-128"/>
+              </a:rPr>
+              <a:t>구역 완료 정보 같이 진행에 </a:t>
+            </a:r>
+            <a:r>
+              <a:rPr lang="ko-KR" altLang="en-US" sz="1000" dirty="0" smtClean="0">
+                <a:solidFill>
+                  <a:schemeClr val="bg1">
+                    <a:lumMod val="95000"/>
+                  </a:schemeClr>
+                </a:solidFill>
+                <a:latin typeface="Noto Sans KR Medium" panose="020B0200000000000000" pitchFamily="34" charset="-128"/>
+                <a:ea typeface="Noto Sans KR Medium" panose="020B0200000000000000" pitchFamily="34" charset="-128"/>
+              </a:rPr>
+              <a:t>필요한 주된 데이터는 </a:t>
+            </a:r>
+            <a:r>
+              <a:rPr lang="en-US" altLang="ko-KR" sz="1000" dirty="0" err="1" smtClean="0">
+                <a:solidFill>
+                  <a:schemeClr val="bg1">
+                    <a:lumMod val="95000"/>
+                  </a:schemeClr>
+                </a:solidFill>
+                <a:latin typeface="Noto Sans KR Medium" panose="020B0200000000000000" pitchFamily="34" charset="-128"/>
+                <a:ea typeface="Noto Sans KR Medium" panose="020B0200000000000000" pitchFamily="34" charset="-128"/>
+              </a:rPr>
+              <a:t>GameState</a:t>
+            </a:r>
+            <a:r>
+              <a:rPr lang="ko-KR" altLang="en-US" sz="1000" dirty="0" smtClean="0">
+                <a:solidFill>
+                  <a:schemeClr val="bg1">
+                    <a:lumMod val="95000"/>
+                  </a:schemeClr>
+                </a:solidFill>
+                <a:latin typeface="Noto Sans KR Medium" panose="020B0200000000000000" pitchFamily="34" charset="-128"/>
+                <a:ea typeface="Noto Sans KR Medium" panose="020B0200000000000000" pitchFamily="34" charset="-128"/>
+              </a:rPr>
+              <a:t>에서 </a:t>
+            </a:r>
+            <a:r>
+              <a:rPr lang="ko-KR" altLang="en-US" sz="1000" dirty="0" smtClean="0">
+                <a:solidFill>
+                  <a:schemeClr val="bg1">
+                    <a:lumMod val="95000"/>
+                  </a:schemeClr>
+                </a:solidFill>
+                <a:latin typeface="Noto Sans KR Medium" panose="020B0200000000000000" pitchFamily="34" charset="-128"/>
+                <a:ea typeface="Noto Sans KR Medium" panose="020B0200000000000000" pitchFamily="34" charset="-128"/>
+              </a:rPr>
+              <a:t>관리합니다</a:t>
+            </a:r>
+            <a:r>
+              <a:rPr lang="en-US" altLang="ko-KR" sz="1000" dirty="0" smtClean="0">
+                <a:solidFill>
+                  <a:schemeClr val="bg1">
+                    <a:lumMod val="95000"/>
+                  </a:schemeClr>
+                </a:solidFill>
+                <a:latin typeface="Noto Sans KR Medium" panose="020B0200000000000000" pitchFamily="34" charset="-128"/>
+                <a:ea typeface="Noto Sans KR Medium" panose="020B0200000000000000" pitchFamily="34" charset="-128"/>
+              </a:rPr>
+              <a:t>.</a:t>
+            </a:r>
+          </a:p>
+          <a:p>
+            <a:r>
+              <a:rPr lang="en-US" altLang="ko-KR" sz="1000" dirty="0" err="1" smtClean="0">
+                <a:solidFill>
+                  <a:schemeClr val="bg1">
+                    <a:lumMod val="95000"/>
+                  </a:schemeClr>
+                </a:solidFill>
+                <a:latin typeface="Noto Sans KR Medium" panose="020B0200000000000000" pitchFamily="34" charset="-128"/>
+                <a:ea typeface="Noto Sans KR Medium" panose="020B0200000000000000" pitchFamily="34" charset="-128"/>
+              </a:rPr>
+              <a:t>StageSection</a:t>
+            </a:r>
+            <a:r>
+              <a:rPr lang="ko-KR" altLang="en-US" sz="1000" dirty="0" smtClean="0">
+                <a:solidFill>
+                  <a:schemeClr val="bg1">
+                    <a:lumMod val="95000"/>
+                  </a:schemeClr>
+                </a:solidFill>
+                <a:latin typeface="Noto Sans KR Medium" panose="020B0200000000000000" pitchFamily="34" charset="-128"/>
+                <a:ea typeface="Noto Sans KR Medium" panose="020B0200000000000000" pitchFamily="34" charset="-128"/>
+              </a:rPr>
+              <a:t>은 </a:t>
+            </a:r>
+            <a:r>
+              <a:rPr lang="ko-KR" altLang="en-US" sz="1000" dirty="0" err="1" smtClean="0">
+                <a:solidFill>
+                  <a:schemeClr val="bg1">
+                    <a:lumMod val="95000"/>
+                  </a:schemeClr>
+                </a:solidFill>
+                <a:latin typeface="Noto Sans KR Medium" panose="020B0200000000000000" pitchFamily="34" charset="-128"/>
+                <a:ea typeface="Noto Sans KR Medium" panose="020B0200000000000000" pitchFamily="34" charset="-128"/>
+              </a:rPr>
+              <a:t>몬스터</a:t>
+            </a:r>
+            <a:r>
+              <a:rPr lang="ko-KR" altLang="en-US" sz="1000" dirty="0" smtClean="0">
+                <a:solidFill>
+                  <a:schemeClr val="bg1">
+                    <a:lumMod val="95000"/>
+                  </a:schemeClr>
+                </a:solidFill>
+                <a:latin typeface="Noto Sans KR Medium" panose="020B0200000000000000" pitchFamily="34" charset="-128"/>
+                <a:ea typeface="Noto Sans KR Medium" panose="020B0200000000000000" pitchFamily="34" charset="-128"/>
+              </a:rPr>
+              <a:t> 사망 이벤트를 구독해두고</a:t>
+            </a:r>
+            <a:r>
+              <a:rPr lang="en-US" altLang="ko-KR" sz="1000" dirty="0" smtClean="0">
+                <a:solidFill>
+                  <a:schemeClr val="bg1">
+                    <a:lumMod val="95000"/>
+                  </a:schemeClr>
+                </a:solidFill>
+                <a:latin typeface="Noto Sans KR Medium" panose="020B0200000000000000" pitchFamily="34" charset="-128"/>
+                <a:ea typeface="Noto Sans KR Medium" panose="020B0200000000000000" pitchFamily="34" charset="-128"/>
+              </a:rPr>
+              <a:t>, </a:t>
+            </a:r>
+            <a:r>
+              <a:rPr lang="ko-KR" altLang="en-US" sz="1000" dirty="0" err="1" smtClean="0">
+                <a:solidFill>
+                  <a:schemeClr val="bg1">
+                    <a:lumMod val="95000"/>
+                  </a:schemeClr>
+                </a:solidFill>
+                <a:latin typeface="Noto Sans KR Medium" panose="020B0200000000000000" pitchFamily="34" charset="-128"/>
+                <a:ea typeface="Noto Sans KR Medium" panose="020B0200000000000000" pitchFamily="34" charset="-128"/>
+              </a:rPr>
+              <a:t>스폰된</a:t>
+            </a:r>
+            <a:r>
+              <a:rPr lang="ko-KR" altLang="en-US" sz="1000" dirty="0" smtClean="0">
+                <a:solidFill>
+                  <a:schemeClr val="bg1">
+                    <a:lumMod val="95000"/>
+                  </a:schemeClr>
+                </a:solidFill>
+                <a:latin typeface="Noto Sans KR Medium" panose="020B0200000000000000" pitchFamily="34" charset="-128"/>
+                <a:ea typeface="Noto Sans KR Medium" panose="020B0200000000000000" pitchFamily="34" charset="-128"/>
+              </a:rPr>
+              <a:t> </a:t>
+            </a:r>
+            <a:r>
+              <a:rPr lang="ko-KR" altLang="en-US" sz="1000" dirty="0" err="1" smtClean="0">
+                <a:solidFill>
+                  <a:schemeClr val="bg1">
+                    <a:lumMod val="95000"/>
+                  </a:schemeClr>
+                </a:solidFill>
+                <a:latin typeface="Noto Sans KR Medium" panose="020B0200000000000000" pitchFamily="34" charset="-128"/>
+                <a:ea typeface="Noto Sans KR Medium" panose="020B0200000000000000" pitchFamily="34" charset="-128"/>
+              </a:rPr>
+              <a:t>몬스터가</a:t>
+            </a:r>
+            <a:r>
+              <a:rPr lang="ko-KR" altLang="en-US" sz="1000" dirty="0" smtClean="0">
+                <a:solidFill>
+                  <a:schemeClr val="bg1">
+                    <a:lumMod val="95000"/>
+                  </a:schemeClr>
+                </a:solidFill>
+                <a:latin typeface="Noto Sans KR Medium" panose="020B0200000000000000" pitchFamily="34" charset="-128"/>
+                <a:ea typeface="Noto Sans KR Medium" panose="020B0200000000000000" pitchFamily="34" charset="-128"/>
+              </a:rPr>
+              <a:t> 죽으면 </a:t>
+            </a:r>
+            <a:r>
+              <a:rPr lang="ko-KR" altLang="en-US" sz="1000" dirty="0" err="1" smtClean="0">
+                <a:solidFill>
+                  <a:schemeClr val="bg1">
+                    <a:lumMod val="95000"/>
+                  </a:schemeClr>
+                </a:solidFill>
+                <a:latin typeface="Noto Sans KR Medium" panose="020B0200000000000000" pitchFamily="34" charset="-128"/>
+                <a:ea typeface="Noto Sans KR Medium" panose="020B0200000000000000" pitchFamily="34" charset="-128"/>
+              </a:rPr>
+              <a:t>몬스터</a:t>
+            </a:r>
+            <a:r>
+              <a:rPr lang="ko-KR" altLang="en-US" sz="1000" dirty="0" smtClean="0">
+                <a:solidFill>
+                  <a:schemeClr val="bg1">
+                    <a:lumMod val="95000"/>
+                  </a:schemeClr>
+                </a:solidFill>
+                <a:latin typeface="Noto Sans KR Medium" panose="020B0200000000000000" pitchFamily="34" charset="-128"/>
+                <a:ea typeface="Noto Sans KR Medium" panose="020B0200000000000000" pitchFamily="34" charset="-128"/>
+              </a:rPr>
+              <a:t> 카운트를 낮춥니다</a:t>
+            </a:r>
+            <a:r>
+              <a:rPr lang="en-US" altLang="ko-KR" sz="1000" dirty="0" smtClean="0">
+                <a:solidFill>
+                  <a:schemeClr val="bg1">
+                    <a:lumMod val="95000"/>
+                  </a:schemeClr>
+                </a:solidFill>
+                <a:latin typeface="Noto Sans KR Medium" panose="020B0200000000000000" pitchFamily="34" charset="-128"/>
+                <a:ea typeface="Noto Sans KR Medium" panose="020B0200000000000000" pitchFamily="34" charset="-128"/>
+              </a:rPr>
+              <a:t>.</a:t>
+            </a:r>
+          </a:p>
+          <a:p>
+            <a:r>
+              <a:rPr lang="ko-KR" altLang="en-US" sz="1000" dirty="0" err="1" smtClean="0">
+                <a:solidFill>
+                  <a:schemeClr val="bg1">
+                    <a:lumMod val="95000"/>
+                  </a:schemeClr>
+                </a:solidFill>
+                <a:latin typeface="Noto Sans KR Medium" panose="020B0200000000000000" pitchFamily="34" charset="-128"/>
+                <a:ea typeface="Noto Sans KR Medium" panose="020B0200000000000000" pitchFamily="34" charset="-128"/>
+              </a:rPr>
+              <a:t>몬스터</a:t>
+            </a:r>
+            <a:r>
+              <a:rPr lang="ko-KR" altLang="en-US" sz="1000" dirty="0" smtClean="0">
+                <a:solidFill>
+                  <a:schemeClr val="bg1">
+                    <a:lumMod val="95000"/>
+                  </a:schemeClr>
+                </a:solidFill>
+                <a:latin typeface="Noto Sans KR Medium" panose="020B0200000000000000" pitchFamily="34" charset="-128"/>
+                <a:ea typeface="Noto Sans KR Medium" panose="020B0200000000000000" pitchFamily="34" charset="-128"/>
+              </a:rPr>
+              <a:t> 카운트가 </a:t>
+            </a:r>
+            <a:r>
+              <a:rPr lang="en-US" altLang="ko-KR" sz="1000" dirty="0" smtClean="0">
+                <a:solidFill>
+                  <a:schemeClr val="bg1">
+                    <a:lumMod val="95000"/>
+                  </a:schemeClr>
+                </a:solidFill>
+                <a:latin typeface="Noto Sans KR Medium" panose="020B0200000000000000" pitchFamily="34" charset="-128"/>
+                <a:ea typeface="Noto Sans KR Medium" panose="020B0200000000000000" pitchFamily="34" charset="-128"/>
+              </a:rPr>
+              <a:t>0</a:t>
+            </a:r>
+            <a:r>
+              <a:rPr lang="ko-KR" altLang="en-US" sz="1000" dirty="0" err="1" smtClean="0">
+                <a:solidFill>
+                  <a:schemeClr val="bg1">
+                    <a:lumMod val="95000"/>
+                  </a:schemeClr>
+                </a:solidFill>
+                <a:latin typeface="Noto Sans KR Medium" panose="020B0200000000000000" pitchFamily="34" charset="-128"/>
+                <a:ea typeface="Noto Sans KR Medium" panose="020B0200000000000000" pitchFamily="34" charset="-128"/>
+              </a:rPr>
+              <a:t>이되면</a:t>
+            </a:r>
+            <a:r>
+              <a:rPr lang="ko-KR" altLang="en-US" sz="1000" dirty="0" smtClean="0">
+                <a:solidFill>
+                  <a:schemeClr val="bg1">
+                    <a:lumMod val="95000"/>
+                  </a:schemeClr>
+                </a:solidFill>
+                <a:latin typeface="Noto Sans KR Medium" panose="020B0200000000000000" pitchFamily="34" charset="-128"/>
+                <a:ea typeface="Noto Sans KR Medium" panose="020B0200000000000000" pitchFamily="34" charset="-128"/>
+              </a:rPr>
+              <a:t> 해당 </a:t>
+            </a:r>
+            <a:r>
+              <a:rPr lang="en-US" altLang="ko-KR" sz="1000" dirty="0" err="1" smtClean="0">
+                <a:solidFill>
+                  <a:schemeClr val="bg1">
+                    <a:lumMod val="95000"/>
+                  </a:schemeClr>
+                </a:solidFill>
+                <a:latin typeface="Noto Sans KR Medium" panose="020B0200000000000000" pitchFamily="34" charset="-128"/>
+                <a:ea typeface="Noto Sans KR Medium" panose="020B0200000000000000" pitchFamily="34" charset="-128"/>
+              </a:rPr>
+              <a:t>StageSection</a:t>
+            </a:r>
+            <a:r>
+              <a:rPr lang="ko-KR" altLang="en-US" sz="1000" dirty="0" smtClean="0">
+                <a:solidFill>
+                  <a:schemeClr val="bg1">
+                    <a:lumMod val="95000"/>
+                  </a:schemeClr>
+                </a:solidFill>
+                <a:latin typeface="Noto Sans KR Medium" panose="020B0200000000000000" pitchFamily="34" charset="-128"/>
+                <a:ea typeface="Noto Sans KR Medium" panose="020B0200000000000000" pitchFamily="34" charset="-128"/>
+              </a:rPr>
+              <a:t>은 구역 완료 이벤트를 발행합니다</a:t>
+            </a:r>
+            <a:r>
+              <a:rPr lang="en-US" altLang="ko-KR" sz="1000" dirty="0" smtClean="0">
+                <a:solidFill>
+                  <a:schemeClr val="bg1">
+                    <a:lumMod val="95000"/>
+                  </a:schemeClr>
+                </a:solidFill>
+                <a:latin typeface="Noto Sans KR Medium" panose="020B0200000000000000" pitchFamily="34" charset="-128"/>
+                <a:ea typeface="Noto Sans KR Medium" panose="020B0200000000000000" pitchFamily="34" charset="-128"/>
+              </a:rPr>
+              <a:t>.</a:t>
+            </a:r>
             <a:endParaRPr lang="en-US" altLang="ko-KR" sz="1000" dirty="0" smtClean="0">
               <a:solidFill>
                 <a:schemeClr val="bg1">
@@ -29599,176 +30031,6 @@
             </a:endParaRPr>
           </a:p>
           <a:p>
-            <a:r>
-              <a:rPr lang="en-US" altLang="ko-KR" sz="1000" dirty="0" err="1" smtClean="0">
-                <a:solidFill>
-                  <a:schemeClr val="bg1">
-                    <a:lumMod val="95000"/>
-                  </a:schemeClr>
-                </a:solidFill>
-                <a:latin typeface="Noto Sans KR Medium" panose="020B0200000000000000" pitchFamily="34" charset="-128"/>
-                <a:ea typeface="Noto Sans KR Medium" panose="020B0200000000000000" pitchFamily="34" charset="-128"/>
-              </a:rPr>
-              <a:t>GameState</a:t>
-            </a:r>
-            <a:r>
-              <a:rPr lang="ko-KR" altLang="en-US" sz="1000" dirty="0" smtClean="0">
-                <a:solidFill>
-                  <a:schemeClr val="bg1">
-                    <a:lumMod val="95000"/>
-                  </a:schemeClr>
-                </a:solidFill>
-                <a:latin typeface="Noto Sans KR Medium" panose="020B0200000000000000" pitchFamily="34" charset="-128"/>
-                <a:ea typeface="Noto Sans KR Medium" panose="020B0200000000000000" pitchFamily="34" charset="-128"/>
-              </a:rPr>
-              <a:t>는 게임 시작 시</a:t>
-            </a:r>
-            <a:r>
-              <a:rPr lang="en-US" altLang="ko-KR" sz="1000" dirty="0" smtClean="0">
-                <a:solidFill>
-                  <a:schemeClr val="bg1">
-                    <a:lumMod val="95000"/>
-                  </a:schemeClr>
-                </a:solidFill>
-                <a:latin typeface="Noto Sans KR Medium" panose="020B0200000000000000" pitchFamily="34" charset="-128"/>
-                <a:ea typeface="Noto Sans KR Medium" panose="020B0200000000000000" pitchFamily="34" charset="-128"/>
-              </a:rPr>
-              <a:t>, </a:t>
-            </a:r>
-            <a:r>
-              <a:rPr lang="en-US" altLang="ko-KR" sz="1000" dirty="0" err="1" smtClean="0">
-                <a:solidFill>
-                  <a:schemeClr val="bg1">
-                    <a:lumMod val="95000"/>
-                  </a:schemeClr>
-                </a:solidFill>
-                <a:latin typeface="Noto Sans KR Medium" panose="020B0200000000000000" pitchFamily="34" charset="-128"/>
-                <a:ea typeface="Noto Sans KR Medium" panose="020B0200000000000000" pitchFamily="34" charset="-128"/>
-              </a:rPr>
-              <a:t>GameMode</a:t>
-            </a:r>
-            <a:r>
-              <a:rPr lang="ko-KR" altLang="en-US" sz="1000" dirty="0" smtClean="0">
-                <a:solidFill>
-                  <a:schemeClr val="bg1">
-                    <a:lumMod val="95000"/>
-                  </a:schemeClr>
-                </a:solidFill>
-                <a:latin typeface="Noto Sans KR Medium" panose="020B0200000000000000" pitchFamily="34" charset="-128"/>
-                <a:ea typeface="Noto Sans KR Medium" panose="020B0200000000000000" pitchFamily="34" charset="-128"/>
-              </a:rPr>
-              <a:t>의 구역 완료 이벤트를 구독함</a:t>
-            </a:r>
-            <a:r>
-              <a:rPr lang="en-US" altLang="ko-KR" sz="1000" dirty="0" smtClean="0">
-                <a:solidFill>
-                  <a:schemeClr val="bg1">
-                    <a:lumMod val="95000"/>
-                  </a:schemeClr>
-                </a:solidFill>
-                <a:latin typeface="Noto Sans KR Medium" panose="020B0200000000000000" pitchFamily="34" charset="-128"/>
-                <a:ea typeface="Noto Sans KR Medium" panose="020B0200000000000000" pitchFamily="34" charset="-128"/>
-              </a:rPr>
-              <a:t>.</a:t>
-            </a:r>
-          </a:p>
-          <a:p>
-            <a:r>
-              <a:rPr lang="en-US" altLang="ko-KR" sz="1000" dirty="0" err="1" smtClean="0">
-                <a:solidFill>
-                  <a:schemeClr val="bg1">
-                    <a:lumMod val="95000"/>
-                  </a:schemeClr>
-                </a:solidFill>
-                <a:latin typeface="Noto Sans KR Medium" panose="020B0200000000000000" pitchFamily="34" charset="-128"/>
-                <a:ea typeface="Noto Sans KR Medium" panose="020B0200000000000000" pitchFamily="34" charset="-128"/>
-              </a:rPr>
-              <a:t>StageSection</a:t>
-            </a:r>
-            <a:r>
-              <a:rPr lang="ko-KR" altLang="en-US" sz="1000" dirty="0" smtClean="0">
-                <a:solidFill>
-                  <a:schemeClr val="bg1">
-                    <a:lumMod val="95000"/>
-                  </a:schemeClr>
-                </a:solidFill>
-                <a:latin typeface="Noto Sans KR Medium" panose="020B0200000000000000" pitchFamily="34" charset="-128"/>
-                <a:ea typeface="Noto Sans KR Medium" panose="020B0200000000000000" pitchFamily="34" charset="-128"/>
-              </a:rPr>
-              <a:t>은 게임 시작 시</a:t>
-            </a:r>
-            <a:r>
-              <a:rPr lang="en-US" altLang="ko-KR" sz="1000" dirty="0" smtClean="0">
-                <a:solidFill>
-                  <a:schemeClr val="bg1">
-                    <a:lumMod val="95000"/>
-                  </a:schemeClr>
-                </a:solidFill>
-                <a:latin typeface="Noto Sans KR Medium" panose="020B0200000000000000" pitchFamily="34" charset="-128"/>
-                <a:ea typeface="Noto Sans KR Medium" panose="020B0200000000000000" pitchFamily="34" charset="-128"/>
-              </a:rPr>
-              <a:t>, </a:t>
-            </a:r>
-            <a:r>
-              <a:rPr lang="en-US" altLang="ko-KR" sz="1000" dirty="0" err="1" smtClean="0">
-                <a:solidFill>
-                  <a:schemeClr val="bg1">
-                    <a:lumMod val="95000"/>
-                  </a:schemeClr>
-                </a:solidFill>
-                <a:latin typeface="Noto Sans KR Medium" panose="020B0200000000000000" pitchFamily="34" charset="-128"/>
-                <a:ea typeface="Noto Sans KR Medium" panose="020B0200000000000000" pitchFamily="34" charset="-128"/>
-              </a:rPr>
-              <a:t>CombatGameMode</a:t>
-            </a:r>
-            <a:r>
-              <a:rPr lang="ko-KR" altLang="en-US" sz="1000" dirty="0" smtClean="0">
-                <a:solidFill>
-                  <a:schemeClr val="bg1">
-                    <a:lumMod val="95000"/>
-                  </a:schemeClr>
-                </a:solidFill>
-                <a:latin typeface="Noto Sans KR Medium" panose="020B0200000000000000" pitchFamily="34" charset="-128"/>
-                <a:ea typeface="Noto Sans KR Medium" panose="020B0200000000000000" pitchFamily="34" charset="-128"/>
-              </a:rPr>
-              <a:t>의</a:t>
-            </a:r>
-            <a:r>
-              <a:rPr lang="en-US" altLang="ko-KR" sz="1000" dirty="0" smtClean="0">
-                <a:solidFill>
-                  <a:schemeClr val="bg1">
-                    <a:lumMod val="95000"/>
-                  </a:schemeClr>
-                </a:solidFill>
-                <a:latin typeface="Noto Sans KR Medium" panose="020B0200000000000000" pitchFamily="34" charset="-128"/>
-                <a:ea typeface="Noto Sans KR Medium" panose="020B0200000000000000" pitchFamily="34" charset="-128"/>
-              </a:rPr>
-              <a:t> </a:t>
-            </a:r>
-            <a:r>
-              <a:rPr lang="ko-KR" altLang="en-US" sz="1000" dirty="0" err="1" smtClean="0">
-                <a:solidFill>
-                  <a:schemeClr val="bg1">
-                    <a:lumMod val="95000"/>
-                  </a:schemeClr>
-                </a:solidFill>
-                <a:latin typeface="Noto Sans KR Medium" panose="020B0200000000000000" pitchFamily="34" charset="-128"/>
-                <a:ea typeface="Noto Sans KR Medium" panose="020B0200000000000000" pitchFamily="34" charset="-128"/>
-              </a:rPr>
-              <a:t>몬스터</a:t>
-            </a:r>
-            <a:r>
-              <a:rPr lang="ko-KR" altLang="en-US" sz="1000" dirty="0" smtClean="0">
-                <a:solidFill>
-                  <a:schemeClr val="bg1">
-                    <a:lumMod val="95000"/>
-                  </a:schemeClr>
-                </a:solidFill>
-                <a:latin typeface="Noto Sans KR Medium" panose="020B0200000000000000" pitchFamily="34" charset="-128"/>
-                <a:ea typeface="Noto Sans KR Medium" panose="020B0200000000000000" pitchFamily="34" charset="-128"/>
-              </a:rPr>
-              <a:t> 사망에 해당하는 이벤트를 구독해둠</a:t>
-            </a:r>
             <a:endParaRPr lang="en-US" altLang="ko-KR" sz="1000" dirty="0">
               <a:solidFill>
                 <a:schemeClr val="bg1">
@@ -29781,52 +30043,16 @@
           </a:p>
           <a:p>
             <a:r>
-              <a:rPr lang="ko-KR" altLang="en-US" sz="1000" dirty="0" err="1" smtClean="0">
-                <a:solidFill>
-                  <a:schemeClr val="bg1">
-                    <a:lumMod val="95000"/>
-                  </a:schemeClr>
-                </a:solidFill>
-                <a:latin typeface="Noto Sans KR Medium" panose="020B0200000000000000" pitchFamily="34" charset="-128"/>
-                <a:ea typeface="Noto Sans KR Medium" panose="020B0200000000000000" pitchFamily="34" charset="-128"/>
-              </a:rPr>
-              <a:t>몬스터는</a:t>
-            </a:r>
-            <a:r>
-              <a:rPr lang="ko-KR" altLang="en-US" sz="1000" dirty="0" smtClean="0">
-                <a:solidFill>
-                  <a:schemeClr val="bg1">
-                    <a:lumMod val="95000"/>
-                  </a:schemeClr>
-                </a:solidFill>
-                <a:latin typeface="Noto Sans KR Medium" panose="020B0200000000000000" pitchFamily="34" charset="-128"/>
-                <a:ea typeface="Noto Sans KR Medium" panose="020B0200000000000000" pitchFamily="34" charset="-128"/>
-              </a:rPr>
-              <a:t> 생성 시</a:t>
-            </a:r>
-            <a:r>
-              <a:rPr lang="en-US" altLang="ko-KR" sz="1000" dirty="0" smtClean="0">
-                <a:solidFill>
-                  <a:schemeClr val="bg1">
-                    <a:lumMod val="95000"/>
-                  </a:schemeClr>
-                </a:solidFill>
-                <a:latin typeface="Noto Sans KR Medium" panose="020B0200000000000000" pitchFamily="34" charset="-128"/>
-                <a:ea typeface="Noto Sans KR Medium" panose="020B0200000000000000" pitchFamily="34" charset="-128"/>
-              </a:rPr>
-              <a:t>, </a:t>
-            </a:r>
-            <a:r>
-              <a:rPr lang="ko-KR" altLang="en-US" sz="1000" dirty="0" smtClean="0">
-                <a:solidFill>
-                  <a:schemeClr val="bg1">
-                    <a:lumMod val="95000"/>
-                  </a:schemeClr>
-                </a:solidFill>
-                <a:latin typeface="Noto Sans KR Medium" panose="020B0200000000000000" pitchFamily="34" charset="-128"/>
-                <a:ea typeface="Noto Sans KR Medium" panose="020B0200000000000000" pitchFamily="34" charset="-128"/>
-              </a:rPr>
-              <a:t>자신이 속한 </a:t>
+              <a:rPr lang="ko-KR" altLang="en-US" sz="1000" dirty="0" smtClean="0">
+                <a:solidFill>
+                  <a:schemeClr val="bg1">
+                    <a:lumMod val="95000"/>
+                  </a:schemeClr>
+                </a:solidFill>
+                <a:latin typeface="Noto Sans KR Medium" panose="020B0200000000000000" pitchFamily="34" charset="-128"/>
+                <a:ea typeface="Noto Sans KR Medium" panose="020B0200000000000000" pitchFamily="34" charset="-128"/>
+              </a:rPr>
+              <a:t>구역 완료 이벤트가 발행되면 </a:t>
             </a:r>
             <a:r>
               <a:rPr lang="en-US" altLang="ko-KR" sz="1000" dirty="0" err="1" smtClean="0">
@@ -29838,55 +30064,55 @@
                 <a:latin typeface="Noto Sans KR Medium" panose="020B0200000000000000" pitchFamily="34" charset="-128"/>
                 <a:ea typeface="Noto Sans KR Medium" panose="020B0200000000000000" pitchFamily="34" charset="-128"/>
               </a:rPr>
-              <a:t>StageSecion</a:t>
-            </a:r>
-            <a:r>
-              <a:rPr lang="ko-KR" altLang="en-US" sz="1000" dirty="0" smtClean="0">
-                <a:solidFill>
-                  <a:schemeClr val="bg1">
-                    <a:lumMod val="95000"/>
-                  </a:schemeClr>
-                </a:solidFill>
-                <a:latin typeface="Noto Sans KR Medium" panose="020B0200000000000000" pitchFamily="34" charset="-128"/>
-                <a:ea typeface="Noto Sans KR Medium" panose="020B0200000000000000" pitchFamily="34" charset="-128"/>
-              </a:rPr>
-              <a:t>의 </a:t>
-            </a:r>
-            <a:r>
-              <a:rPr lang="en-US" altLang="ko-KR" sz="1000" dirty="0" smtClean="0">
-                <a:solidFill>
-                  <a:schemeClr val="bg1">
-                    <a:lumMod val="95000"/>
-                  </a:schemeClr>
-                </a:solidFill>
-                <a:latin typeface="Noto Sans KR Medium" panose="020B0200000000000000" pitchFamily="34" charset="-128"/>
-                <a:ea typeface="Noto Sans KR Medium" panose="020B0200000000000000" pitchFamily="34" charset="-128"/>
-              </a:rPr>
-              <a:t>Index</a:t>
-            </a:r>
-            <a:r>
-              <a:rPr lang="ko-KR" altLang="en-US" sz="1000" dirty="0" smtClean="0">
-                <a:solidFill>
-                  <a:schemeClr val="bg1">
-                    <a:lumMod val="95000"/>
-                  </a:schemeClr>
-                </a:solidFill>
-                <a:latin typeface="Noto Sans KR Medium" panose="020B0200000000000000" pitchFamily="34" charset="-128"/>
-                <a:ea typeface="Noto Sans KR Medium" panose="020B0200000000000000" pitchFamily="34" charset="-128"/>
-              </a:rPr>
-              <a:t>를 전달받아 소속을 </a:t>
-            </a:r>
-            <a:r>
-              <a:rPr lang="ko-KR" altLang="en-US" sz="1000" dirty="0" err="1" smtClean="0">
-                <a:solidFill>
-                  <a:schemeClr val="bg1">
-                    <a:lumMod val="95000"/>
-                  </a:schemeClr>
-                </a:solidFill>
-                <a:latin typeface="Noto Sans KR Medium" panose="020B0200000000000000" pitchFamily="34" charset="-128"/>
-                <a:ea typeface="Noto Sans KR Medium" panose="020B0200000000000000" pitchFamily="34" charset="-128"/>
-              </a:rPr>
-              <a:t>지정받음</a:t>
+              <a:t>GameState</a:t>
+            </a:r>
+            <a:r>
+              <a:rPr lang="ko-KR" altLang="en-US" sz="1000" dirty="0" smtClean="0">
+                <a:solidFill>
+                  <a:schemeClr val="bg1">
+                    <a:lumMod val="95000"/>
+                  </a:schemeClr>
+                </a:solidFill>
+                <a:latin typeface="Noto Sans KR Medium" panose="020B0200000000000000" pitchFamily="34" charset="-128"/>
+                <a:ea typeface="Noto Sans KR Medium" panose="020B0200000000000000" pitchFamily="34" charset="-128"/>
+              </a:rPr>
+              <a:t>에서 해당 구역을 </a:t>
+            </a:r>
+            <a:r>
+              <a:rPr lang="ko-KR" altLang="en-US" sz="1000" dirty="0" smtClean="0">
+                <a:solidFill>
+                  <a:schemeClr val="bg1">
+                    <a:lumMod val="95000"/>
+                  </a:schemeClr>
+                </a:solidFill>
+                <a:latin typeface="Noto Sans KR Medium" panose="020B0200000000000000" pitchFamily="34" charset="-128"/>
+                <a:ea typeface="Noto Sans KR Medium" panose="020B0200000000000000" pitchFamily="34" charset="-128"/>
+              </a:rPr>
+              <a:t>완료처리</a:t>
+            </a:r>
+            <a:r>
+              <a:rPr lang="ko-KR" altLang="en-US" sz="1000" dirty="0" smtClean="0">
+                <a:solidFill>
+                  <a:schemeClr val="bg1">
+                    <a:lumMod val="95000"/>
+                  </a:schemeClr>
+                </a:solidFill>
+                <a:latin typeface="Noto Sans KR Medium" panose="020B0200000000000000" pitchFamily="34" charset="-128"/>
+                <a:ea typeface="Noto Sans KR Medium" panose="020B0200000000000000" pitchFamily="34" charset="-128"/>
+              </a:rPr>
+              <a:t>하고</a:t>
+            </a:r>
+            <a:r>
+              <a:rPr lang="en-US" altLang="ko-KR" sz="1000" dirty="0">
+                <a:solidFill>
+                  <a:schemeClr val="bg1">
+                    <a:lumMod val="95000"/>
+                  </a:schemeClr>
+                </a:solidFill>
+                <a:latin typeface="Noto Sans KR Medium" panose="020B0200000000000000" pitchFamily="34" charset="-128"/>
+                <a:ea typeface="Noto Sans KR Medium" panose="020B0200000000000000" pitchFamily="34" charset="-128"/>
+              </a:rPr>
+              <a:t> </a:t>
             </a:r>
             <a:endParaRPr lang="en-US" altLang="ko-KR" sz="1000" dirty="0" smtClean="0">
               <a:solidFill>
@@ -29909,31 +30135,7 @@
                 <a:latin typeface="Noto Sans KR Medium" panose="020B0200000000000000" pitchFamily="34" charset="-128"/>
                 <a:ea typeface="Noto Sans KR Medium" panose="020B0200000000000000" pitchFamily="34" charset="-128"/>
               </a:rPr>
-              <a:t>그리고 </a:t>
-            </a:r>
-            <a:r>
-              <a:rPr lang="ko-KR" altLang="en-US" sz="1000" dirty="0" err="1" smtClean="0">
-                <a:solidFill>
-                  <a:schemeClr val="bg1">
-                    <a:lumMod val="95000"/>
-                  </a:schemeClr>
-                </a:solidFill>
-                <a:latin typeface="Noto Sans KR Medium" panose="020B0200000000000000" pitchFamily="34" charset="-128"/>
-                <a:ea typeface="Noto Sans KR Medium" panose="020B0200000000000000" pitchFamily="34" charset="-128"/>
-              </a:rPr>
-              <a:t>몬스터가</a:t>
-            </a:r>
-            <a:r>
-              <a:rPr lang="ko-KR" altLang="en-US" sz="1000" dirty="0" smtClean="0">
-                <a:solidFill>
-                  <a:schemeClr val="bg1">
-                    <a:lumMod val="95000"/>
-                  </a:schemeClr>
-                </a:solidFill>
-                <a:latin typeface="Noto Sans KR Medium" panose="020B0200000000000000" pitchFamily="34" charset="-128"/>
-                <a:ea typeface="Noto Sans KR Medium" panose="020B0200000000000000" pitchFamily="34" charset="-128"/>
-              </a:rPr>
-              <a:t> 죽으면 </a:t>
+              <a:t>모든 구역이 완료되면 </a:t>
             </a:r>
             <a:r>
               <a:rPr lang="en-US" altLang="ko-KR" sz="1000" dirty="0" err="1" smtClean="0">
@@ -29945,91 +30147,43 @@
                 <a:latin typeface="Noto Sans KR Medium" panose="020B0200000000000000" pitchFamily="34" charset="-128"/>
                 <a:ea typeface="Noto Sans KR Medium" panose="020B0200000000000000" pitchFamily="34" charset="-128"/>
               </a:rPr>
-              <a:t>CombatGameMode</a:t>
-            </a:r>
-            <a:r>
-              <a:rPr lang="ko-KR" altLang="en-US" sz="1000" dirty="0" smtClean="0">
-                <a:solidFill>
-                  <a:schemeClr val="bg1">
-                    <a:lumMod val="95000"/>
-                  </a:schemeClr>
-                </a:solidFill>
-                <a:latin typeface="Noto Sans KR Medium" panose="020B0200000000000000" pitchFamily="34" charset="-128"/>
-                <a:ea typeface="Noto Sans KR Medium" panose="020B0200000000000000" pitchFamily="34" charset="-128"/>
-              </a:rPr>
-              <a:t>에 </a:t>
-            </a:r>
-            <a:r>
-              <a:rPr lang="ko-KR" altLang="en-US" sz="1000" dirty="0" err="1" smtClean="0">
-                <a:solidFill>
-                  <a:schemeClr val="bg1">
-                    <a:lumMod val="95000"/>
-                  </a:schemeClr>
-                </a:solidFill>
-                <a:latin typeface="Noto Sans KR Medium" panose="020B0200000000000000" pitchFamily="34" charset="-128"/>
-                <a:ea typeface="Noto Sans KR Medium" panose="020B0200000000000000" pitchFamily="34" charset="-128"/>
-              </a:rPr>
-              <a:t>몬스터</a:t>
-            </a:r>
-            <a:r>
-              <a:rPr lang="ko-KR" altLang="en-US" sz="1000" dirty="0" smtClean="0">
-                <a:solidFill>
-                  <a:schemeClr val="bg1">
-                    <a:lumMod val="95000"/>
-                  </a:schemeClr>
-                </a:solidFill>
-                <a:latin typeface="Noto Sans KR Medium" panose="020B0200000000000000" pitchFamily="34" charset="-128"/>
-                <a:ea typeface="Noto Sans KR Medium" panose="020B0200000000000000" pitchFamily="34" charset="-128"/>
-              </a:rPr>
-              <a:t> 사망 이벤트 발행과 함께</a:t>
-            </a:r>
-            <a:r>
-              <a:rPr lang="en-US" altLang="ko-KR" sz="1000" dirty="0" smtClean="0">
-                <a:solidFill>
-                  <a:schemeClr val="bg1">
-                    <a:lumMod val="95000"/>
-                  </a:schemeClr>
-                </a:solidFill>
-                <a:latin typeface="Noto Sans KR Medium" panose="020B0200000000000000" pitchFamily="34" charset="-128"/>
-                <a:ea typeface="Noto Sans KR Medium" panose="020B0200000000000000" pitchFamily="34" charset="-128"/>
-              </a:rPr>
-              <a:t>, </a:t>
-            </a:r>
-            <a:r>
-              <a:rPr lang="ko-KR" altLang="en-US" sz="1000" dirty="0" smtClean="0">
-                <a:solidFill>
-                  <a:schemeClr val="bg1">
-                    <a:lumMod val="95000"/>
-                  </a:schemeClr>
-                </a:solidFill>
-                <a:latin typeface="Noto Sans KR Medium" panose="020B0200000000000000" pitchFamily="34" charset="-128"/>
-                <a:ea typeface="Noto Sans KR Medium" panose="020B0200000000000000" pitchFamily="34" charset="-128"/>
-              </a:rPr>
-              <a:t>소속 구역 </a:t>
-            </a:r>
-            <a:r>
-              <a:rPr lang="en-US" altLang="ko-KR" sz="1000" dirty="0" smtClean="0">
-                <a:solidFill>
-                  <a:schemeClr val="bg1">
-                    <a:lumMod val="95000"/>
-                  </a:schemeClr>
-                </a:solidFill>
-                <a:latin typeface="Noto Sans KR Medium" panose="020B0200000000000000" pitchFamily="34" charset="-128"/>
-                <a:ea typeface="Noto Sans KR Medium" panose="020B0200000000000000" pitchFamily="34" charset="-128"/>
-              </a:rPr>
-              <a:t>Index</a:t>
-            </a:r>
-            <a:r>
-              <a:rPr lang="ko-KR" altLang="en-US" sz="1000" dirty="0" smtClean="0">
-                <a:solidFill>
-                  <a:schemeClr val="bg1">
-                    <a:lumMod val="95000"/>
-                  </a:schemeClr>
-                </a:solidFill>
-                <a:latin typeface="Noto Sans KR Medium" panose="020B0200000000000000" pitchFamily="34" charset="-128"/>
-                <a:ea typeface="Noto Sans KR Medium" panose="020B0200000000000000" pitchFamily="34" charset="-128"/>
-              </a:rPr>
-              <a:t>를 전달</a:t>
+              <a:t>GameMode</a:t>
+            </a:r>
+            <a:r>
+              <a:rPr lang="ko-KR" altLang="en-US" sz="1000" dirty="0" smtClean="0">
+                <a:solidFill>
+                  <a:schemeClr val="bg1">
+                    <a:lumMod val="95000"/>
+                  </a:schemeClr>
+                </a:solidFill>
+                <a:latin typeface="Noto Sans KR Medium" panose="020B0200000000000000" pitchFamily="34" charset="-128"/>
+                <a:ea typeface="Noto Sans KR Medium" panose="020B0200000000000000" pitchFamily="34" charset="-128"/>
+              </a:rPr>
+              <a:t>에서 </a:t>
+            </a:r>
+            <a:r>
+              <a:rPr lang="ko-KR" altLang="en-US" sz="1000" dirty="0" smtClean="0">
+                <a:solidFill>
+                  <a:schemeClr val="bg1">
+                    <a:lumMod val="95000"/>
+                  </a:schemeClr>
+                </a:solidFill>
+                <a:latin typeface="Noto Sans KR Medium" panose="020B0200000000000000" pitchFamily="34" charset="-128"/>
+                <a:ea typeface="Noto Sans KR Medium" panose="020B0200000000000000" pitchFamily="34" charset="-128"/>
+              </a:rPr>
+              <a:t>게임을 완료처리 합니다</a:t>
+            </a:r>
+            <a:r>
+              <a:rPr lang="en-US" altLang="ko-KR" sz="1000" dirty="0" smtClean="0">
+                <a:solidFill>
+                  <a:schemeClr val="bg1">
+                    <a:lumMod val="95000"/>
+                  </a:schemeClr>
+                </a:solidFill>
+                <a:latin typeface="Noto Sans KR Medium" panose="020B0200000000000000" pitchFamily="34" charset="-128"/>
+                <a:ea typeface="Noto Sans KR Medium" panose="020B0200000000000000" pitchFamily="34" charset="-128"/>
+              </a:rPr>
+              <a:t>.</a:t>
             </a:r>
             <a:endParaRPr lang="en-US" altLang="ko-KR" sz="1000" dirty="0" smtClean="0">
               <a:solidFill>
@@ -30040,240 +30194,6 @@
               <a:latin typeface="Noto Sans KR Medium" panose="020B0200000000000000" pitchFamily="34" charset="-128"/>
               <a:ea typeface="Noto Sans KR Medium" panose="020B0200000000000000" pitchFamily="34" charset="-128"/>
             </a:endParaRPr>
-          </a:p>
-          <a:p>
-            <a:endParaRPr lang="en-US" altLang="ko-KR" sz="1000" dirty="0">
-              <a:solidFill>
-                <a:schemeClr val="bg1">
-                  <a:lumMod val="95000"/>
-                </a:schemeClr>
-              </a:solidFill>
-              <a:latin typeface="Noto Sans KR Medium" panose="020B0200000000000000" pitchFamily="34" charset="-128"/>
-              <a:ea typeface="Noto Sans KR Medium" panose="020B0200000000000000" pitchFamily="34" charset="-128"/>
-            </a:endParaRPr>
-          </a:p>
-          <a:p>
-            <a:r>
-              <a:rPr lang="en-US" altLang="ko-KR" sz="1000" dirty="0" err="1" smtClean="0">
-                <a:solidFill>
-                  <a:schemeClr val="bg1">
-                    <a:lumMod val="95000"/>
-                  </a:schemeClr>
-                </a:solidFill>
-                <a:latin typeface="Noto Sans KR Medium" panose="020B0200000000000000" pitchFamily="34" charset="-128"/>
-                <a:ea typeface="Noto Sans KR Medium" panose="020B0200000000000000" pitchFamily="34" charset="-128"/>
-              </a:rPr>
-              <a:t>StageSection</a:t>
-            </a:r>
-            <a:r>
-              <a:rPr lang="ko-KR" altLang="en-US" sz="1000" dirty="0" smtClean="0">
-                <a:solidFill>
-                  <a:schemeClr val="bg1">
-                    <a:lumMod val="95000"/>
-                  </a:schemeClr>
-                </a:solidFill>
-                <a:latin typeface="Noto Sans KR Medium" panose="020B0200000000000000" pitchFamily="34" charset="-128"/>
-                <a:ea typeface="Noto Sans KR Medium" panose="020B0200000000000000" pitchFamily="34" charset="-128"/>
-              </a:rPr>
-              <a:t>을 앞선 구독했던 이벤트를 통해서 </a:t>
-            </a:r>
-            <a:r>
-              <a:rPr lang="ko-KR" altLang="en-US" sz="1000" dirty="0" err="1" smtClean="0">
-                <a:solidFill>
-                  <a:schemeClr val="bg1">
-                    <a:lumMod val="95000"/>
-                  </a:schemeClr>
-                </a:solidFill>
-                <a:latin typeface="Noto Sans KR Medium" panose="020B0200000000000000" pitchFamily="34" charset="-128"/>
-                <a:ea typeface="Noto Sans KR Medium" panose="020B0200000000000000" pitchFamily="34" charset="-128"/>
-              </a:rPr>
-              <a:t>몬스터의</a:t>
-            </a:r>
-            <a:r>
-              <a:rPr lang="ko-KR" altLang="en-US" sz="1000" dirty="0" smtClean="0">
-                <a:solidFill>
-                  <a:schemeClr val="bg1">
-                    <a:lumMod val="95000"/>
-                  </a:schemeClr>
-                </a:solidFill>
-                <a:latin typeface="Noto Sans KR Medium" panose="020B0200000000000000" pitchFamily="34" charset="-128"/>
-                <a:ea typeface="Noto Sans KR Medium" panose="020B0200000000000000" pitchFamily="34" charset="-128"/>
-              </a:rPr>
-              <a:t> 사망을 전달받음</a:t>
-            </a:r>
-            <a:r>
-              <a:rPr lang="en-US" altLang="ko-KR" sz="1000" dirty="0" smtClean="0">
-                <a:solidFill>
-                  <a:schemeClr val="bg1">
-                    <a:lumMod val="95000"/>
-                  </a:schemeClr>
-                </a:solidFill>
-                <a:latin typeface="Noto Sans KR Medium" panose="020B0200000000000000" pitchFamily="34" charset="-128"/>
-                <a:ea typeface="Noto Sans KR Medium" panose="020B0200000000000000" pitchFamily="34" charset="-128"/>
-              </a:rPr>
-              <a:t>.</a:t>
-            </a:r>
-          </a:p>
-          <a:p>
-            <a:r>
-              <a:rPr lang="ko-KR" altLang="en-US" sz="1000" dirty="0" smtClean="0">
-                <a:solidFill>
-                  <a:schemeClr val="bg1">
-                    <a:lumMod val="95000"/>
-                  </a:schemeClr>
-                </a:solidFill>
-                <a:latin typeface="Noto Sans KR Medium" panose="020B0200000000000000" pitchFamily="34" charset="-128"/>
-                <a:ea typeface="Noto Sans KR Medium" panose="020B0200000000000000" pitchFamily="34" charset="-128"/>
-              </a:rPr>
-              <a:t>그리고 구역의 </a:t>
-            </a:r>
-            <a:r>
-              <a:rPr lang="ko-KR" altLang="en-US" sz="1000" dirty="0" err="1" smtClean="0">
-                <a:solidFill>
-                  <a:schemeClr val="bg1">
-                    <a:lumMod val="95000"/>
-                  </a:schemeClr>
-                </a:solidFill>
-                <a:latin typeface="Noto Sans KR Medium" panose="020B0200000000000000" pitchFamily="34" charset="-128"/>
-                <a:ea typeface="Noto Sans KR Medium" panose="020B0200000000000000" pitchFamily="34" charset="-128"/>
-              </a:rPr>
-              <a:t>몬스터가</a:t>
-            </a:r>
-            <a:r>
-              <a:rPr lang="ko-KR" altLang="en-US" sz="1000" dirty="0" smtClean="0">
-                <a:solidFill>
-                  <a:schemeClr val="bg1">
-                    <a:lumMod val="95000"/>
-                  </a:schemeClr>
-                </a:solidFill>
-                <a:latin typeface="Noto Sans KR Medium" panose="020B0200000000000000" pitchFamily="34" charset="-128"/>
-                <a:ea typeface="Noto Sans KR Medium" panose="020B0200000000000000" pitchFamily="34" charset="-128"/>
-              </a:rPr>
-              <a:t> 모두 죽었다면 구역 완료 이벤트를 발행</a:t>
-            </a:r>
-            <a:r>
-              <a:rPr lang="en-US" altLang="ko-KR" sz="1000" dirty="0" smtClean="0">
-                <a:solidFill>
-                  <a:schemeClr val="bg1">
-                    <a:lumMod val="95000"/>
-                  </a:schemeClr>
-                </a:solidFill>
-                <a:latin typeface="Noto Sans KR Medium" panose="020B0200000000000000" pitchFamily="34" charset="-128"/>
-                <a:ea typeface="Noto Sans KR Medium" panose="020B0200000000000000" pitchFamily="34" charset="-128"/>
-              </a:rPr>
-              <a:t>.</a:t>
-            </a:r>
-          </a:p>
-          <a:p>
-            <a:endParaRPr lang="en-US" altLang="ko-KR" sz="1000" dirty="0">
-              <a:solidFill>
-                <a:schemeClr val="bg1">
-                  <a:lumMod val="95000"/>
-                </a:schemeClr>
-              </a:solidFill>
-              <a:latin typeface="Noto Sans KR Medium" panose="020B0200000000000000" pitchFamily="34" charset="-128"/>
-              <a:ea typeface="Noto Sans KR Medium" panose="020B0200000000000000" pitchFamily="34" charset="-128"/>
-            </a:endParaRPr>
-          </a:p>
-          <a:p>
-            <a:r>
-              <a:rPr lang="ko-KR" altLang="en-US" sz="1000" dirty="0" smtClean="0">
-                <a:solidFill>
-                  <a:schemeClr val="bg1">
-                    <a:lumMod val="95000"/>
-                  </a:schemeClr>
-                </a:solidFill>
-                <a:latin typeface="Noto Sans KR Medium" panose="020B0200000000000000" pitchFamily="34" charset="-128"/>
-                <a:ea typeface="Noto Sans KR Medium" panose="020B0200000000000000" pitchFamily="34" charset="-128"/>
-              </a:rPr>
-              <a:t>구역 완료 이벤트가 발행되면 </a:t>
-            </a:r>
-            <a:r>
-              <a:rPr lang="en-US" altLang="ko-KR" sz="1000" dirty="0" err="1" smtClean="0">
-                <a:solidFill>
-                  <a:schemeClr val="bg1">
-                    <a:lumMod val="95000"/>
-                  </a:schemeClr>
-                </a:solidFill>
-                <a:latin typeface="Noto Sans KR Medium" panose="020B0200000000000000" pitchFamily="34" charset="-128"/>
-                <a:ea typeface="Noto Sans KR Medium" panose="020B0200000000000000" pitchFamily="34" charset="-128"/>
-              </a:rPr>
-              <a:t>GameState</a:t>
-            </a:r>
-            <a:r>
-              <a:rPr lang="ko-KR" altLang="en-US" sz="1000" dirty="0" smtClean="0">
-                <a:solidFill>
-                  <a:schemeClr val="bg1">
-                    <a:lumMod val="95000"/>
-                  </a:schemeClr>
-                </a:solidFill>
-                <a:latin typeface="Noto Sans KR Medium" panose="020B0200000000000000" pitchFamily="34" charset="-128"/>
-                <a:ea typeface="Noto Sans KR Medium" panose="020B0200000000000000" pitchFamily="34" charset="-128"/>
-              </a:rPr>
-              <a:t>에서 해당 구역을 완료처리</a:t>
-            </a:r>
-            <a:r>
-              <a:rPr lang="en-US" altLang="ko-KR" sz="1000" dirty="0" smtClean="0">
-                <a:solidFill>
-                  <a:schemeClr val="bg1">
-                    <a:lumMod val="95000"/>
-                  </a:schemeClr>
-                </a:solidFill>
-                <a:latin typeface="Noto Sans KR Medium" panose="020B0200000000000000" pitchFamily="34" charset="-128"/>
-                <a:ea typeface="Noto Sans KR Medium" panose="020B0200000000000000" pitchFamily="34" charset="-128"/>
-              </a:rPr>
-              <a:t>.</a:t>
-            </a:r>
-          </a:p>
-          <a:p>
-            <a:r>
-              <a:rPr lang="ko-KR" altLang="en-US" sz="1000" dirty="0" smtClean="0">
-                <a:solidFill>
-                  <a:schemeClr val="bg1">
-                    <a:lumMod val="95000"/>
-                  </a:schemeClr>
-                </a:solidFill>
-                <a:latin typeface="Noto Sans KR Medium" panose="020B0200000000000000" pitchFamily="34" charset="-128"/>
-                <a:ea typeface="Noto Sans KR Medium" panose="020B0200000000000000" pitchFamily="34" charset="-128"/>
-              </a:rPr>
-              <a:t>모든 구역이 완료되면 </a:t>
-            </a:r>
-            <a:r>
-              <a:rPr lang="en-US" altLang="ko-KR" sz="1000" dirty="0" err="1" smtClean="0">
-                <a:solidFill>
-                  <a:schemeClr val="bg1">
-                    <a:lumMod val="95000"/>
-                  </a:schemeClr>
-                </a:solidFill>
-                <a:latin typeface="Noto Sans KR Medium" panose="020B0200000000000000" pitchFamily="34" charset="-128"/>
-                <a:ea typeface="Noto Sans KR Medium" panose="020B0200000000000000" pitchFamily="34" charset="-128"/>
-              </a:rPr>
-              <a:t>GameMode</a:t>
-            </a:r>
-            <a:r>
-              <a:rPr lang="ko-KR" altLang="en-US" sz="1000" dirty="0" smtClean="0">
-                <a:solidFill>
-                  <a:schemeClr val="bg1">
-                    <a:lumMod val="95000"/>
-                  </a:schemeClr>
-                </a:solidFill>
-                <a:latin typeface="Noto Sans KR Medium" panose="020B0200000000000000" pitchFamily="34" charset="-128"/>
-                <a:ea typeface="Noto Sans KR Medium" panose="020B0200000000000000" pitchFamily="34" charset="-128"/>
-              </a:rPr>
-              <a:t>에서 게임 완료 처리</a:t>
-            </a:r>
-            <a:r>
-              <a:rPr lang="en-US" altLang="ko-KR" sz="1000" dirty="0" smtClean="0">
-                <a:solidFill>
-                  <a:schemeClr val="bg1">
-                    <a:lumMod val="95000"/>
-                  </a:schemeClr>
-                </a:solidFill>
-                <a:latin typeface="Noto Sans KR Medium" panose="020B0200000000000000" pitchFamily="34" charset="-128"/>
-                <a:ea typeface="Noto Sans KR Medium" panose="020B0200000000000000" pitchFamily="34" charset="-128"/>
-              </a:rPr>
-              <a:t>.</a:t>
-            </a:r>
           </a:p>
         </p:txBody>
       </p:sp>
@@ -30431,14 +30351,14 @@
         <p:spPr>
           <a:xfrm>
             <a:off x="454275" y="1234126"/>
-            <a:ext cx="1072730" cy="246221"/>
+            <a:ext cx="4833342" cy="246221"/>
           </a:xfrm>
           <a:prstGeom prst="rect">
             <a:avLst/>
           </a:prstGeom>
         </p:spPr>
         <p:txBody>
-          <a:bodyPr wrap="none">
+          <a:bodyPr wrap="square">
             <a:spAutoFit/>
           </a:bodyPr>
           <a:lstStyle/>
@@ -30453,7 +30373,19 @@
                 <a:latin typeface="Noto Sans KR ExtraBold" panose="020B0200000000000000" pitchFamily="34" charset="-128"/>
                 <a:ea typeface="Noto Sans KR ExtraBold" panose="020B0200000000000000" pitchFamily="34" charset="-128"/>
               </a:rPr>
-              <a:t>문제 발생과 원인</a:t>
+              <a:t>문제 </a:t>
+            </a:r>
+            <a:r>
+              <a:rPr lang="ko-KR" altLang="en-US" sz="1000" dirty="0" smtClean="0">
+                <a:solidFill>
+                  <a:schemeClr val="bg1">
+                    <a:lumMod val="95000"/>
+                  </a:schemeClr>
+                </a:solidFill>
+                <a:latin typeface="Noto Sans KR ExtraBold" panose="020B0200000000000000" pitchFamily="34" charset="-128"/>
+                <a:ea typeface="Noto Sans KR ExtraBold" panose="020B0200000000000000" pitchFamily="34" charset="-128"/>
+              </a:rPr>
+              <a:t>발생</a:t>
             </a:r>
             <a:endParaRPr lang="en-US" altLang="ko-KR" sz="1000" dirty="0">
               <a:solidFill>
@@ -30628,7 +30560,7 @@
         </p:nvSpPr>
         <p:spPr>
           <a:xfrm>
-            <a:off x="454275" y="3850226"/>
+            <a:off x="454275" y="2988450"/>
             <a:ext cx="688009" cy="246221"/>
           </a:xfrm>
           <a:prstGeom prst="rect">
@@ -30674,878 +30606,6 @@
         <p:spPr>
           <a:xfrm>
             <a:off x="454275" y="1480347"/>
-            <a:ext cx="8755039" cy="2246769"/>
-          </a:xfrm>
-          <a:prstGeom prst="rect">
-            <a:avLst/>
-          </a:prstGeom>
-        </p:spPr>
-        <p:txBody>
-          <a:bodyPr wrap="square">
-            <a:spAutoFit/>
-          </a:bodyPr>
-          <a:lstStyle/>
-          <a:p>
-            <a:r>
-              <a:rPr lang="ko-KR" altLang="en-US" sz="1000" dirty="0" smtClean="0">
-                <a:solidFill>
-                  <a:schemeClr val="bg1">
-                    <a:lumMod val="95000"/>
-                  </a:schemeClr>
-                </a:solidFill>
-                <a:latin typeface="Noto Sans KR Medium" panose="020B0200000000000000" pitchFamily="34" charset="-128"/>
-                <a:ea typeface="Noto Sans KR Medium" panose="020B0200000000000000" pitchFamily="34" charset="-128"/>
-              </a:rPr>
-              <a:t>문제 발생 배경</a:t>
-            </a:r>
-            <a:endParaRPr lang="en-US" altLang="ko-KR" sz="1000" dirty="0" smtClean="0">
-              <a:solidFill>
-                <a:schemeClr val="bg1">
-                  <a:lumMod val="95000"/>
-                </a:schemeClr>
-              </a:solidFill>
-              <a:latin typeface="Noto Sans KR Medium" panose="020B0200000000000000" pitchFamily="34" charset="-128"/>
-              <a:ea typeface="Noto Sans KR Medium" panose="020B0200000000000000" pitchFamily="34" charset="-128"/>
-            </a:endParaRPr>
-          </a:p>
-          <a:p>
-            <a:r>
-              <a:rPr lang="ko-KR" altLang="en-US" sz="1000" dirty="0" smtClean="0">
-                <a:solidFill>
-                  <a:schemeClr val="bg1">
-                    <a:lumMod val="95000"/>
-                  </a:schemeClr>
-                </a:solidFill>
-                <a:latin typeface="Noto Sans KR Medium" panose="020B0200000000000000" pitchFamily="34" charset="-128"/>
-                <a:ea typeface="Noto Sans KR Medium" panose="020B0200000000000000" pitchFamily="34" charset="-128"/>
-              </a:rPr>
-              <a:t>플레이어와 </a:t>
-            </a:r>
-            <a:r>
-              <a:rPr lang="ko-KR" altLang="en-US" sz="1000" dirty="0" err="1" smtClean="0">
-                <a:solidFill>
-                  <a:schemeClr val="bg1">
-                    <a:lumMod val="95000"/>
-                  </a:schemeClr>
-                </a:solidFill>
-                <a:latin typeface="Noto Sans KR Medium" panose="020B0200000000000000" pitchFamily="34" charset="-128"/>
-                <a:ea typeface="Noto Sans KR Medium" panose="020B0200000000000000" pitchFamily="34" charset="-128"/>
-              </a:rPr>
-              <a:t>몬스터</a:t>
-            </a:r>
-            <a:r>
-              <a:rPr lang="ko-KR" altLang="en-US" sz="1000" dirty="0" smtClean="0">
-                <a:solidFill>
-                  <a:schemeClr val="bg1">
-                    <a:lumMod val="95000"/>
-                  </a:schemeClr>
-                </a:solidFill>
-                <a:latin typeface="Noto Sans KR Medium" panose="020B0200000000000000" pitchFamily="34" charset="-128"/>
-                <a:ea typeface="Noto Sans KR Medium" panose="020B0200000000000000" pitchFamily="34" charset="-128"/>
-              </a:rPr>
-              <a:t> 기반 기능 구현 후</a:t>
-            </a:r>
-            <a:r>
-              <a:rPr lang="en-US" altLang="ko-KR" sz="1000" dirty="0" smtClean="0">
-                <a:solidFill>
-                  <a:schemeClr val="bg1">
-                    <a:lumMod val="95000"/>
-                  </a:schemeClr>
-                </a:solidFill>
-                <a:latin typeface="Noto Sans KR Medium" panose="020B0200000000000000" pitchFamily="34" charset="-128"/>
-                <a:ea typeface="Noto Sans KR Medium" panose="020B0200000000000000" pitchFamily="34" charset="-128"/>
-              </a:rPr>
-              <a:t>, </a:t>
-            </a:r>
-            <a:r>
-              <a:rPr lang="ko-KR" altLang="en-US" sz="1000" dirty="0" smtClean="0">
-                <a:solidFill>
-                  <a:schemeClr val="bg1">
-                    <a:lumMod val="95000"/>
-                  </a:schemeClr>
-                </a:solidFill>
-                <a:latin typeface="Noto Sans KR Medium" panose="020B0200000000000000" pitchFamily="34" charset="-128"/>
-                <a:ea typeface="Noto Sans KR Medium" panose="020B0200000000000000" pitchFamily="34" charset="-128"/>
-              </a:rPr>
-              <a:t>게임을 진행하기 위한</a:t>
-            </a:r>
-            <a:r>
-              <a:rPr lang="en-US" altLang="ko-KR" sz="1000" dirty="0" smtClean="0">
-                <a:solidFill>
-                  <a:schemeClr val="bg1">
-                    <a:lumMod val="95000"/>
-                  </a:schemeClr>
-                </a:solidFill>
-                <a:latin typeface="Noto Sans KR Medium" panose="020B0200000000000000" pitchFamily="34" charset="-128"/>
-                <a:ea typeface="Noto Sans KR Medium" panose="020B0200000000000000" pitchFamily="34" charset="-128"/>
-              </a:rPr>
-              <a:t> </a:t>
-            </a:r>
-            <a:r>
-              <a:rPr lang="ko-KR" altLang="en-US" sz="1000" dirty="0" smtClean="0">
-                <a:solidFill>
-                  <a:schemeClr val="bg1">
-                    <a:lumMod val="95000"/>
-                  </a:schemeClr>
-                </a:solidFill>
-                <a:latin typeface="Noto Sans KR Medium" panose="020B0200000000000000" pitchFamily="34" charset="-128"/>
-                <a:ea typeface="Noto Sans KR Medium" panose="020B0200000000000000" pitchFamily="34" charset="-128"/>
-              </a:rPr>
-              <a:t>레벨이 필요했고</a:t>
-            </a:r>
-            <a:endParaRPr lang="en-US" altLang="ko-KR" sz="1000" dirty="0" smtClean="0">
-              <a:solidFill>
-                <a:schemeClr val="bg1">
-                  <a:lumMod val="95000"/>
-                </a:schemeClr>
-              </a:solidFill>
-              <a:latin typeface="Noto Sans KR Medium" panose="020B0200000000000000" pitchFamily="34" charset="-128"/>
-              <a:ea typeface="Noto Sans KR Medium" panose="020B0200000000000000" pitchFamily="34" charset="-128"/>
-            </a:endParaRPr>
-          </a:p>
-          <a:p>
-            <a:r>
-              <a:rPr lang="ko-KR" altLang="en-US" sz="1000" dirty="0" err="1" smtClean="0">
-                <a:solidFill>
-                  <a:schemeClr val="bg1">
-                    <a:lumMod val="95000"/>
-                  </a:schemeClr>
-                </a:solidFill>
-                <a:latin typeface="Noto Sans KR Medium" panose="020B0200000000000000" pitchFamily="34" charset="-128"/>
-                <a:ea typeface="Noto Sans KR Medium" panose="020B0200000000000000" pitchFamily="34" charset="-128"/>
-              </a:rPr>
-              <a:t>랜드</a:t>
-            </a:r>
-            <a:r>
-              <a:rPr lang="ko-KR" altLang="en-US" sz="1000" dirty="0" smtClean="0">
-                <a:solidFill>
-                  <a:schemeClr val="bg1">
-                    <a:lumMod val="95000"/>
-                  </a:schemeClr>
-                </a:solidFill>
-                <a:latin typeface="Noto Sans KR Medium" panose="020B0200000000000000" pitchFamily="34" charset="-128"/>
-                <a:ea typeface="Noto Sans KR Medium" panose="020B0200000000000000" pitchFamily="34" charset="-128"/>
-              </a:rPr>
-              <a:t> </a:t>
-            </a:r>
-            <a:r>
-              <a:rPr lang="ko-KR" altLang="en-US" sz="1000" dirty="0" err="1" smtClean="0">
-                <a:solidFill>
-                  <a:schemeClr val="bg1">
-                    <a:lumMod val="95000"/>
-                  </a:schemeClr>
-                </a:solidFill>
-                <a:latin typeface="Noto Sans KR Medium" panose="020B0200000000000000" pitchFamily="34" charset="-128"/>
-                <a:ea typeface="Noto Sans KR Medium" panose="020B0200000000000000" pitchFamily="34" charset="-128"/>
-              </a:rPr>
-              <a:t>스케이프를</a:t>
-            </a:r>
-            <a:r>
-              <a:rPr lang="ko-KR" altLang="en-US" sz="1000" dirty="0" smtClean="0">
-                <a:solidFill>
-                  <a:schemeClr val="bg1">
-                    <a:lumMod val="95000"/>
-                  </a:schemeClr>
-                </a:solidFill>
-                <a:latin typeface="Noto Sans KR Medium" panose="020B0200000000000000" pitchFamily="34" charset="-128"/>
-                <a:ea typeface="Noto Sans KR Medium" panose="020B0200000000000000" pitchFamily="34" charset="-128"/>
-              </a:rPr>
-              <a:t> 가지고 레벨을 만들어 테스트하던 도중 에러 발생</a:t>
-            </a:r>
-            <a:endParaRPr lang="en-US" altLang="ko-KR" sz="1000" dirty="0" smtClean="0">
-              <a:solidFill>
-                <a:schemeClr val="bg1">
-                  <a:lumMod val="95000"/>
-                </a:schemeClr>
-              </a:solidFill>
-              <a:latin typeface="Noto Sans KR Medium" panose="020B0200000000000000" pitchFamily="34" charset="-128"/>
-              <a:ea typeface="Noto Sans KR Medium" panose="020B0200000000000000" pitchFamily="34" charset="-128"/>
-            </a:endParaRPr>
-          </a:p>
-          <a:p>
-            <a:endParaRPr lang="en-US" altLang="ko-KR" sz="1000" dirty="0">
-              <a:solidFill>
-                <a:schemeClr val="bg1">
-                  <a:lumMod val="95000"/>
-                </a:schemeClr>
-              </a:solidFill>
-              <a:latin typeface="Noto Sans KR Medium" panose="020B0200000000000000" pitchFamily="34" charset="-128"/>
-              <a:ea typeface="Noto Sans KR Medium" panose="020B0200000000000000" pitchFamily="34" charset="-128"/>
-            </a:endParaRPr>
-          </a:p>
-          <a:p>
-            <a:endParaRPr lang="en-US" altLang="ko-KR" sz="1000" dirty="0" smtClean="0">
-              <a:solidFill>
-                <a:schemeClr val="bg1">
-                  <a:lumMod val="95000"/>
-                </a:schemeClr>
-              </a:solidFill>
-              <a:latin typeface="Noto Sans KR Medium" panose="020B0200000000000000" pitchFamily="34" charset="-128"/>
-              <a:ea typeface="Noto Sans KR Medium" panose="020B0200000000000000" pitchFamily="34" charset="-128"/>
-            </a:endParaRPr>
-          </a:p>
-          <a:p>
-            <a:r>
-              <a:rPr lang="ko-KR" altLang="en-US" sz="1000" dirty="0" smtClean="0">
-                <a:solidFill>
-                  <a:schemeClr val="bg1">
-                    <a:lumMod val="95000"/>
-                  </a:schemeClr>
-                </a:solidFill>
-                <a:latin typeface="Noto Sans KR Medium" panose="020B0200000000000000" pitchFamily="34" charset="-128"/>
-                <a:ea typeface="Noto Sans KR Medium" panose="020B0200000000000000" pitchFamily="34" charset="-128"/>
-              </a:rPr>
-              <a:t>원인 분석</a:t>
-            </a:r>
-            <a:endParaRPr lang="en-US" altLang="ko-KR" sz="1000" dirty="0" smtClean="0">
-              <a:solidFill>
-                <a:schemeClr val="bg1">
-                  <a:lumMod val="95000"/>
-                </a:schemeClr>
-              </a:solidFill>
-              <a:latin typeface="Noto Sans KR Medium" panose="020B0200000000000000" pitchFamily="34" charset="-128"/>
-              <a:ea typeface="Noto Sans KR Medium" panose="020B0200000000000000" pitchFamily="34" charset="-128"/>
-            </a:endParaRPr>
-          </a:p>
-          <a:p>
-            <a:r>
-              <a:rPr lang="ko-KR" altLang="en-US" sz="1000" dirty="0" err="1" smtClean="0">
-                <a:solidFill>
-                  <a:schemeClr val="bg1">
-                    <a:lumMod val="95000"/>
-                  </a:schemeClr>
-                </a:solidFill>
-                <a:latin typeface="Noto Sans KR Medium" panose="020B0200000000000000" pitchFamily="34" charset="-128"/>
-                <a:ea typeface="Noto Sans KR Medium" panose="020B0200000000000000" pitchFamily="34" charset="-128"/>
-              </a:rPr>
-              <a:t>몬스터</a:t>
-            </a:r>
-            <a:r>
-              <a:rPr lang="ko-KR" altLang="en-US" sz="1000" dirty="0" smtClean="0">
-                <a:solidFill>
-                  <a:schemeClr val="bg1">
-                    <a:lumMod val="95000"/>
-                  </a:schemeClr>
-                </a:solidFill>
-                <a:latin typeface="Noto Sans KR Medium" panose="020B0200000000000000" pitchFamily="34" charset="-128"/>
-                <a:ea typeface="Noto Sans KR Medium" panose="020B0200000000000000" pitchFamily="34" charset="-128"/>
-              </a:rPr>
-              <a:t> </a:t>
-            </a:r>
-            <a:r>
-              <a:rPr lang="ko-KR" altLang="en-US" sz="1000" dirty="0" err="1" smtClean="0">
-                <a:solidFill>
-                  <a:schemeClr val="bg1">
-                    <a:lumMod val="95000"/>
-                  </a:schemeClr>
-                </a:solidFill>
-                <a:latin typeface="Noto Sans KR Medium" panose="020B0200000000000000" pitchFamily="34" charset="-128"/>
-                <a:ea typeface="Noto Sans KR Medium" panose="020B0200000000000000" pitchFamily="34" charset="-128"/>
-              </a:rPr>
-              <a:t>액터를</a:t>
-            </a:r>
-            <a:r>
-              <a:rPr lang="ko-KR" altLang="en-US" sz="1000" dirty="0" smtClean="0">
-                <a:solidFill>
-                  <a:schemeClr val="bg1">
-                    <a:lumMod val="95000"/>
-                  </a:schemeClr>
-                </a:solidFill>
-                <a:latin typeface="Noto Sans KR Medium" panose="020B0200000000000000" pitchFamily="34" charset="-128"/>
-                <a:ea typeface="Noto Sans KR Medium" panose="020B0200000000000000" pitchFamily="34" charset="-128"/>
-              </a:rPr>
-              <a:t> </a:t>
-            </a:r>
-            <a:r>
-              <a:rPr lang="ko-KR" altLang="en-US" sz="1000" dirty="0" err="1" smtClean="0">
-                <a:solidFill>
-                  <a:schemeClr val="bg1">
-                    <a:lumMod val="95000"/>
-                  </a:schemeClr>
-                </a:solidFill>
-                <a:latin typeface="Noto Sans KR Medium" panose="020B0200000000000000" pitchFamily="34" charset="-128"/>
-                <a:ea typeface="Noto Sans KR Medium" panose="020B0200000000000000" pitchFamily="34" charset="-128"/>
-              </a:rPr>
-              <a:t>스폰</a:t>
-            </a:r>
-            <a:r>
-              <a:rPr lang="ko-KR" altLang="en-US" sz="1000" dirty="0" smtClean="0">
-                <a:solidFill>
-                  <a:schemeClr val="bg1">
-                    <a:lumMod val="95000"/>
-                  </a:schemeClr>
-                </a:solidFill>
-                <a:latin typeface="Noto Sans KR Medium" panose="020B0200000000000000" pitchFamily="34" charset="-128"/>
-                <a:ea typeface="Noto Sans KR Medium" panose="020B0200000000000000" pitchFamily="34" charset="-128"/>
-              </a:rPr>
-              <a:t> 시</a:t>
-            </a:r>
-            <a:r>
-              <a:rPr lang="en-US" altLang="ko-KR" sz="1000" dirty="0" smtClean="0">
-                <a:solidFill>
-                  <a:schemeClr val="bg1">
-                    <a:lumMod val="95000"/>
-                  </a:schemeClr>
-                </a:solidFill>
-                <a:latin typeface="Noto Sans KR Medium" panose="020B0200000000000000" pitchFamily="34" charset="-128"/>
-                <a:ea typeface="Noto Sans KR Medium" panose="020B0200000000000000" pitchFamily="34" charset="-128"/>
-              </a:rPr>
-              <a:t>, </a:t>
-            </a:r>
-            <a:r>
-              <a:rPr lang="en-US" altLang="ko-KR" sz="1000" dirty="0" err="1" smtClean="0">
-                <a:solidFill>
-                  <a:schemeClr val="bg1">
-                    <a:lumMod val="95000"/>
-                  </a:schemeClr>
-                </a:solidFill>
-                <a:latin typeface="Noto Sans KR Medium" panose="020B0200000000000000" pitchFamily="34" charset="-128"/>
-                <a:ea typeface="Noto Sans KR Medium" panose="020B0200000000000000" pitchFamily="34" charset="-128"/>
-              </a:rPr>
-              <a:t>nullptr</a:t>
-            </a:r>
-            <a:r>
-              <a:rPr lang="en-US" altLang="ko-KR" sz="1000" dirty="0" smtClean="0">
-                <a:solidFill>
-                  <a:schemeClr val="bg1">
-                    <a:lumMod val="95000"/>
-                  </a:schemeClr>
-                </a:solidFill>
-                <a:latin typeface="Noto Sans KR Medium" panose="020B0200000000000000" pitchFamily="34" charset="-128"/>
-                <a:ea typeface="Noto Sans KR Medium" panose="020B0200000000000000" pitchFamily="34" charset="-128"/>
-              </a:rPr>
-              <a:t> </a:t>
-            </a:r>
-            <a:r>
-              <a:rPr lang="ko-KR" altLang="en-US" sz="1000" dirty="0" smtClean="0">
-                <a:solidFill>
-                  <a:schemeClr val="bg1">
-                    <a:lumMod val="95000"/>
-                  </a:schemeClr>
-                </a:solidFill>
-                <a:latin typeface="Noto Sans KR Medium" panose="020B0200000000000000" pitchFamily="34" charset="-128"/>
-                <a:ea typeface="Noto Sans KR Medium" panose="020B0200000000000000" pitchFamily="34" charset="-128"/>
-              </a:rPr>
-              <a:t>반환으로 인한 에러</a:t>
-            </a:r>
-            <a:r>
-              <a:rPr lang="en-US" altLang="ko-KR" sz="1000" dirty="0" smtClean="0">
-                <a:solidFill>
-                  <a:schemeClr val="bg1">
-                    <a:lumMod val="95000"/>
-                  </a:schemeClr>
-                </a:solidFill>
-                <a:latin typeface="Noto Sans KR Medium" panose="020B0200000000000000" pitchFamily="34" charset="-128"/>
-                <a:ea typeface="Noto Sans KR Medium" panose="020B0200000000000000" pitchFamily="34" charset="-128"/>
-              </a:rPr>
-              <a:t>.</a:t>
-            </a:r>
-          </a:p>
-          <a:p>
-            <a:r>
-              <a:rPr lang="ko-KR" altLang="en-US" sz="1000" dirty="0" smtClean="0">
-                <a:solidFill>
-                  <a:schemeClr val="bg1">
-                    <a:lumMod val="95000"/>
-                  </a:schemeClr>
-                </a:solidFill>
-                <a:latin typeface="Noto Sans KR Medium" panose="020B0200000000000000" pitchFamily="34" charset="-128"/>
-                <a:ea typeface="Noto Sans KR Medium" panose="020B0200000000000000" pitchFamily="34" charset="-128"/>
-              </a:rPr>
-              <a:t>기존 테스트에 쓰던 레벨에선 발생하지 않는 것을 확인</a:t>
-            </a:r>
-            <a:r>
-              <a:rPr lang="en-US" altLang="ko-KR" sz="1000" dirty="0" smtClean="0">
-                <a:solidFill>
-                  <a:schemeClr val="bg1">
-                    <a:lumMod val="95000"/>
-                  </a:schemeClr>
-                </a:solidFill>
-                <a:latin typeface="Noto Sans KR Medium" panose="020B0200000000000000" pitchFamily="34" charset="-128"/>
-                <a:ea typeface="Noto Sans KR Medium" panose="020B0200000000000000" pitchFamily="34" charset="-128"/>
-              </a:rPr>
-              <a:t>.</a:t>
-            </a:r>
-          </a:p>
-          <a:p>
-            <a:r>
-              <a:rPr lang="ko-KR" altLang="en-US" sz="1000" dirty="0" smtClean="0">
-                <a:solidFill>
-                  <a:schemeClr val="bg1">
-                    <a:lumMod val="95000"/>
-                  </a:schemeClr>
-                </a:solidFill>
-                <a:latin typeface="Noto Sans KR Medium" panose="020B0200000000000000" pitchFamily="34" charset="-128"/>
-                <a:ea typeface="Noto Sans KR Medium" panose="020B0200000000000000" pitchFamily="34" charset="-128"/>
-              </a:rPr>
-              <a:t>새로 </a:t>
-            </a:r>
-            <a:r>
-              <a:rPr lang="ko-KR" altLang="en-US" sz="1000" dirty="0">
-                <a:solidFill>
-                  <a:schemeClr val="bg1">
-                    <a:lumMod val="95000"/>
-                  </a:schemeClr>
-                </a:solidFill>
-                <a:latin typeface="Noto Sans KR Medium" panose="020B0200000000000000" pitchFamily="34" charset="-128"/>
-                <a:ea typeface="Noto Sans KR Medium" panose="020B0200000000000000" pitchFamily="34" charset="-128"/>
-              </a:rPr>
-              <a:t>작업 중인 </a:t>
-            </a:r>
-            <a:r>
-              <a:rPr lang="ko-KR" altLang="en-US" sz="1000" dirty="0" smtClean="0">
-                <a:solidFill>
-                  <a:schemeClr val="bg1">
-                    <a:lumMod val="95000"/>
-                  </a:schemeClr>
-                </a:solidFill>
-                <a:latin typeface="Noto Sans KR Medium" panose="020B0200000000000000" pitchFamily="34" charset="-128"/>
-                <a:ea typeface="Noto Sans KR Medium" panose="020B0200000000000000" pitchFamily="34" charset="-128"/>
-              </a:rPr>
-              <a:t>레벨과의 차이점이 </a:t>
-            </a:r>
-            <a:r>
-              <a:rPr lang="ko-KR" altLang="en-US" sz="1000" dirty="0" err="1" smtClean="0">
-                <a:solidFill>
-                  <a:schemeClr val="bg1">
-                    <a:lumMod val="95000"/>
-                  </a:schemeClr>
-                </a:solidFill>
-                <a:latin typeface="Noto Sans KR Medium" panose="020B0200000000000000" pitchFamily="34" charset="-128"/>
-                <a:ea typeface="Noto Sans KR Medium" panose="020B0200000000000000" pitchFamily="34" charset="-128"/>
-              </a:rPr>
-              <a:t>랜드</a:t>
-            </a:r>
-            <a:r>
-              <a:rPr lang="ko-KR" altLang="en-US" sz="1000" dirty="0" smtClean="0">
-                <a:solidFill>
-                  <a:schemeClr val="bg1">
-                    <a:lumMod val="95000"/>
-                  </a:schemeClr>
-                </a:solidFill>
-                <a:latin typeface="Noto Sans KR Medium" panose="020B0200000000000000" pitchFamily="34" charset="-128"/>
-                <a:ea typeface="Noto Sans KR Medium" panose="020B0200000000000000" pitchFamily="34" charset="-128"/>
-              </a:rPr>
-              <a:t> </a:t>
-            </a:r>
-            <a:r>
-              <a:rPr lang="ko-KR" altLang="en-US" sz="1000" dirty="0" err="1" smtClean="0">
-                <a:solidFill>
-                  <a:schemeClr val="bg1">
-                    <a:lumMod val="95000"/>
-                  </a:schemeClr>
-                </a:solidFill>
-                <a:latin typeface="Noto Sans KR Medium" panose="020B0200000000000000" pitchFamily="34" charset="-128"/>
-                <a:ea typeface="Noto Sans KR Medium" panose="020B0200000000000000" pitchFamily="34" charset="-128"/>
-              </a:rPr>
-              <a:t>스케이프</a:t>
-            </a:r>
-            <a:r>
-              <a:rPr lang="ko-KR" altLang="en-US" sz="1000" dirty="0" smtClean="0">
-                <a:solidFill>
-                  <a:schemeClr val="bg1">
-                    <a:lumMod val="95000"/>
-                  </a:schemeClr>
-                </a:solidFill>
-                <a:latin typeface="Noto Sans KR Medium" panose="020B0200000000000000" pitchFamily="34" charset="-128"/>
-                <a:ea typeface="Noto Sans KR Medium" panose="020B0200000000000000" pitchFamily="34" charset="-128"/>
-              </a:rPr>
-              <a:t> 사용 여부</a:t>
-            </a:r>
-            <a:r>
-              <a:rPr lang="en-US" altLang="ko-KR" sz="1000" dirty="0" smtClean="0">
-                <a:solidFill>
-                  <a:schemeClr val="bg1">
-                    <a:lumMod val="95000"/>
-                  </a:schemeClr>
-                </a:solidFill>
-                <a:latin typeface="Noto Sans KR Medium" panose="020B0200000000000000" pitchFamily="34" charset="-128"/>
-                <a:ea typeface="Noto Sans KR Medium" panose="020B0200000000000000" pitchFamily="34" charset="-128"/>
-              </a:rPr>
-              <a:t>.</a:t>
-            </a:r>
-          </a:p>
-          <a:p>
-            <a:endParaRPr lang="en-US" altLang="ko-KR" sz="1000" dirty="0" smtClean="0">
-              <a:solidFill>
-                <a:schemeClr val="bg1">
-                  <a:lumMod val="95000"/>
-                </a:schemeClr>
-              </a:solidFill>
-              <a:latin typeface="Noto Sans KR Medium" panose="020B0200000000000000" pitchFamily="34" charset="-128"/>
-              <a:ea typeface="Noto Sans KR Medium" panose="020B0200000000000000" pitchFamily="34" charset="-128"/>
-            </a:endParaRPr>
-          </a:p>
-          <a:p>
-            <a:r>
-              <a:rPr lang="ko-KR" altLang="en-US" sz="1000" dirty="0" smtClean="0">
-                <a:solidFill>
-                  <a:schemeClr val="bg1">
-                    <a:lumMod val="95000"/>
-                  </a:schemeClr>
-                </a:solidFill>
-                <a:latin typeface="Noto Sans KR Medium" panose="020B0200000000000000" pitchFamily="34" charset="-128"/>
-                <a:ea typeface="Noto Sans KR Medium" panose="020B0200000000000000" pitchFamily="34" charset="-128"/>
-              </a:rPr>
-              <a:t>기존 테스트 레벨에서 바닥은 넓은 </a:t>
-            </a:r>
-            <a:r>
-              <a:rPr lang="ko-KR" altLang="en-US" sz="1000" dirty="0" err="1" smtClean="0">
-                <a:solidFill>
-                  <a:schemeClr val="bg1">
-                    <a:lumMod val="95000"/>
-                  </a:schemeClr>
-                </a:solidFill>
-                <a:latin typeface="Noto Sans KR Medium" panose="020B0200000000000000" pitchFamily="34" charset="-128"/>
-                <a:ea typeface="Noto Sans KR Medium" panose="020B0200000000000000" pitchFamily="34" charset="-128"/>
-              </a:rPr>
-              <a:t>큐브를</a:t>
-            </a:r>
-            <a:r>
-              <a:rPr lang="ko-KR" altLang="en-US" sz="1000" dirty="0" smtClean="0">
-                <a:solidFill>
-                  <a:schemeClr val="bg1">
-                    <a:lumMod val="95000"/>
-                  </a:schemeClr>
-                </a:solidFill>
-                <a:latin typeface="Noto Sans KR Medium" panose="020B0200000000000000" pitchFamily="34" charset="-128"/>
-                <a:ea typeface="Noto Sans KR Medium" panose="020B0200000000000000" pitchFamily="34" charset="-128"/>
-              </a:rPr>
-              <a:t> 사용</a:t>
-            </a:r>
-            <a:r>
-              <a:rPr lang="en-US" altLang="ko-KR" sz="1000" dirty="0" smtClean="0">
-                <a:solidFill>
-                  <a:schemeClr val="bg1">
-                    <a:lumMod val="95000"/>
-                  </a:schemeClr>
-                </a:solidFill>
-                <a:latin typeface="Noto Sans KR Medium" panose="020B0200000000000000" pitchFamily="34" charset="-128"/>
-                <a:ea typeface="Noto Sans KR Medium" panose="020B0200000000000000" pitchFamily="34" charset="-128"/>
-              </a:rPr>
-              <a:t>.</a:t>
-            </a:r>
-          </a:p>
-          <a:p>
-            <a:r>
-              <a:rPr lang="ko-KR" altLang="en-US" sz="1000" dirty="0" err="1" smtClean="0">
-                <a:solidFill>
-                  <a:schemeClr val="bg1">
-                    <a:lumMod val="95000"/>
-                  </a:schemeClr>
-                </a:solidFill>
-                <a:latin typeface="Noto Sans KR Medium" panose="020B0200000000000000" pitchFamily="34" charset="-128"/>
-                <a:ea typeface="Noto Sans KR Medium" panose="020B0200000000000000" pitchFamily="34" charset="-128"/>
-              </a:rPr>
-              <a:t>랜드</a:t>
-            </a:r>
-            <a:r>
-              <a:rPr lang="ko-KR" altLang="en-US" sz="1000" dirty="0" smtClean="0">
-                <a:solidFill>
-                  <a:schemeClr val="bg1">
-                    <a:lumMod val="95000"/>
-                  </a:schemeClr>
-                </a:solidFill>
-                <a:latin typeface="Noto Sans KR Medium" panose="020B0200000000000000" pitchFamily="34" charset="-128"/>
-                <a:ea typeface="Noto Sans KR Medium" panose="020B0200000000000000" pitchFamily="34" charset="-128"/>
-              </a:rPr>
-              <a:t> </a:t>
-            </a:r>
-            <a:r>
-              <a:rPr lang="ko-KR" altLang="en-US" sz="1000" dirty="0" err="1" smtClean="0">
-                <a:solidFill>
-                  <a:schemeClr val="bg1">
-                    <a:lumMod val="95000"/>
-                  </a:schemeClr>
-                </a:solidFill>
-                <a:latin typeface="Noto Sans KR Medium" panose="020B0200000000000000" pitchFamily="34" charset="-128"/>
-                <a:ea typeface="Noto Sans KR Medium" panose="020B0200000000000000" pitchFamily="34" charset="-128"/>
-              </a:rPr>
-              <a:t>스케이프는</a:t>
-            </a:r>
-            <a:r>
-              <a:rPr lang="ko-KR" altLang="en-US" sz="1000" dirty="0" smtClean="0">
-                <a:solidFill>
-                  <a:schemeClr val="bg1">
-                    <a:lumMod val="95000"/>
-                  </a:schemeClr>
-                </a:solidFill>
-                <a:latin typeface="Noto Sans KR Medium" panose="020B0200000000000000" pitchFamily="34" charset="-128"/>
-                <a:ea typeface="Noto Sans KR Medium" panose="020B0200000000000000" pitchFamily="34" charset="-128"/>
-              </a:rPr>
-              <a:t> 일반 </a:t>
-            </a:r>
-            <a:r>
-              <a:rPr lang="ko-KR" altLang="en-US" sz="1000" dirty="0" err="1" smtClean="0">
-                <a:solidFill>
-                  <a:schemeClr val="bg1">
-                    <a:lumMod val="95000"/>
-                  </a:schemeClr>
-                </a:solidFill>
-                <a:latin typeface="Noto Sans KR Medium" panose="020B0200000000000000" pitchFamily="34" charset="-128"/>
-                <a:ea typeface="Noto Sans KR Medium" panose="020B0200000000000000" pitchFamily="34" charset="-128"/>
-              </a:rPr>
-              <a:t>스태틱</a:t>
-            </a:r>
-            <a:r>
-              <a:rPr lang="ko-KR" altLang="en-US" sz="1000" dirty="0" smtClean="0">
-                <a:solidFill>
-                  <a:schemeClr val="bg1">
-                    <a:lumMod val="95000"/>
-                  </a:schemeClr>
-                </a:solidFill>
-                <a:latin typeface="Noto Sans KR Medium" panose="020B0200000000000000" pitchFamily="34" charset="-128"/>
-                <a:ea typeface="Noto Sans KR Medium" panose="020B0200000000000000" pitchFamily="34" charset="-128"/>
-              </a:rPr>
-              <a:t> </a:t>
-            </a:r>
-            <a:r>
-              <a:rPr lang="ko-KR" altLang="en-US" sz="1000" dirty="0" err="1" smtClean="0">
-                <a:solidFill>
-                  <a:schemeClr val="bg1">
-                    <a:lumMod val="95000"/>
-                  </a:schemeClr>
-                </a:solidFill>
-                <a:latin typeface="Noto Sans KR Medium" panose="020B0200000000000000" pitchFamily="34" charset="-128"/>
-                <a:ea typeface="Noto Sans KR Medium" panose="020B0200000000000000" pitchFamily="34" charset="-128"/>
-              </a:rPr>
-              <a:t>메쉬와</a:t>
-            </a:r>
-            <a:r>
-              <a:rPr lang="ko-KR" altLang="en-US" sz="1000" dirty="0" smtClean="0">
-                <a:solidFill>
-                  <a:schemeClr val="bg1">
-                    <a:lumMod val="95000"/>
-                  </a:schemeClr>
-                </a:solidFill>
-                <a:latin typeface="Noto Sans KR Medium" panose="020B0200000000000000" pitchFamily="34" charset="-128"/>
-                <a:ea typeface="Noto Sans KR Medium" panose="020B0200000000000000" pitchFamily="34" charset="-128"/>
-              </a:rPr>
-              <a:t> 달리 충돌 설정과 </a:t>
-            </a:r>
-            <a:r>
-              <a:rPr lang="en-US" altLang="ko-KR" sz="1000" dirty="0" smtClean="0">
-                <a:solidFill>
-                  <a:schemeClr val="bg1">
-                    <a:lumMod val="95000"/>
-                  </a:schemeClr>
-                </a:solidFill>
-                <a:latin typeface="Noto Sans KR Medium" panose="020B0200000000000000" pitchFamily="34" charset="-128"/>
-                <a:ea typeface="Noto Sans KR Medium" panose="020B0200000000000000" pitchFamily="34" charset="-128"/>
-              </a:rPr>
-              <a:t>Z</a:t>
-            </a:r>
-            <a:r>
-              <a:rPr lang="ko-KR" altLang="en-US" sz="1000" dirty="0" smtClean="0">
-                <a:solidFill>
-                  <a:schemeClr val="bg1">
-                    <a:lumMod val="95000"/>
-                  </a:schemeClr>
-                </a:solidFill>
-                <a:latin typeface="Noto Sans KR Medium" panose="020B0200000000000000" pitchFamily="34" charset="-128"/>
-                <a:ea typeface="Noto Sans KR Medium" panose="020B0200000000000000" pitchFamily="34" charset="-128"/>
-              </a:rPr>
-              <a:t>축 높이 문제가 있었음</a:t>
-            </a:r>
-            <a:endParaRPr lang="en-US" altLang="ko-KR" sz="1000" dirty="0" smtClean="0">
-              <a:solidFill>
-                <a:schemeClr val="bg1">
-                  <a:lumMod val="95000"/>
-                </a:schemeClr>
-              </a:solidFill>
-              <a:latin typeface="Noto Sans KR Medium" panose="020B0200000000000000" pitchFamily="34" charset="-128"/>
-              <a:ea typeface="Noto Sans KR Medium" panose="020B0200000000000000" pitchFamily="34" charset="-128"/>
-            </a:endParaRPr>
-          </a:p>
-          <a:p>
-            <a:endParaRPr lang="en-US" altLang="ko-KR" sz="1000" dirty="0">
-              <a:solidFill>
-                <a:schemeClr val="bg1">
-                  <a:lumMod val="95000"/>
-                </a:schemeClr>
-              </a:solidFill>
-              <a:latin typeface="Noto Sans KR Medium" panose="020B0200000000000000" pitchFamily="34" charset="-128"/>
-              <a:ea typeface="Noto Sans KR Medium" panose="020B0200000000000000" pitchFamily="34" charset="-128"/>
-            </a:endParaRPr>
-          </a:p>
-          <a:p>
-            <a:r>
-              <a:rPr lang="ko-KR" altLang="en-US" sz="1000" dirty="0" err="1" smtClean="0">
-                <a:solidFill>
-                  <a:schemeClr val="bg1">
-                    <a:lumMod val="95000"/>
-                  </a:schemeClr>
-                </a:solidFill>
-                <a:latin typeface="Noto Sans KR Medium" panose="020B0200000000000000" pitchFamily="34" charset="-128"/>
-                <a:ea typeface="Noto Sans KR Medium" panose="020B0200000000000000" pitchFamily="34" charset="-128"/>
-              </a:rPr>
-              <a:t>몬스터</a:t>
-            </a:r>
-            <a:r>
-              <a:rPr lang="ko-KR" altLang="en-US" sz="1000" dirty="0" smtClean="0">
-                <a:solidFill>
-                  <a:schemeClr val="bg1">
-                    <a:lumMod val="95000"/>
-                  </a:schemeClr>
-                </a:solidFill>
-                <a:latin typeface="Noto Sans KR Medium" panose="020B0200000000000000" pitchFamily="34" charset="-128"/>
-                <a:ea typeface="Noto Sans KR Medium" panose="020B0200000000000000" pitchFamily="34" charset="-128"/>
-              </a:rPr>
-              <a:t> </a:t>
-            </a:r>
-            <a:r>
-              <a:rPr lang="ko-KR" altLang="en-US" sz="1000" dirty="0" err="1" smtClean="0">
-                <a:solidFill>
-                  <a:schemeClr val="bg1">
-                    <a:lumMod val="95000"/>
-                  </a:schemeClr>
-                </a:solidFill>
-                <a:latin typeface="Noto Sans KR Medium" panose="020B0200000000000000" pitchFamily="34" charset="-128"/>
-                <a:ea typeface="Noto Sans KR Medium" panose="020B0200000000000000" pitchFamily="34" charset="-128"/>
-              </a:rPr>
-              <a:t>액터</a:t>
-            </a:r>
-            <a:r>
-              <a:rPr lang="ko-KR" altLang="en-US" sz="1000" dirty="0" smtClean="0">
-                <a:solidFill>
-                  <a:schemeClr val="bg1">
-                    <a:lumMod val="95000"/>
-                  </a:schemeClr>
-                </a:solidFill>
-                <a:latin typeface="Noto Sans KR Medium" panose="020B0200000000000000" pitchFamily="34" charset="-128"/>
-                <a:ea typeface="Noto Sans KR Medium" panose="020B0200000000000000" pitchFamily="34" charset="-128"/>
-              </a:rPr>
-              <a:t> </a:t>
-            </a:r>
-            <a:r>
-              <a:rPr lang="ko-KR" altLang="en-US" sz="1000" dirty="0" err="1" smtClean="0">
-                <a:solidFill>
-                  <a:schemeClr val="bg1">
-                    <a:lumMod val="95000"/>
-                  </a:schemeClr>
-                </a:solidFill>
-                <a:latin typeface="Noto Sans KR Medium" panose="020B0200000000000000" pitchFamily="34" charset="-128"/>
-                <a:ea typeface="Noto Sans KR Medium" panose="020B0200000000000000" pitchFamily="34" charset="-128"/>
-              </a:rPr>
-              <a:t>스폰</a:t>
-            </a:r>
-            <a:r>
-              <a:rPr lang="ko-KR" altLang="en-US" sz="1000" dirty="0" smtClean="0">
-                <a:solidFill>
-                  <a:schemeClr val="bg1">
-                    <a:lumMod val="95000"/>
-                  </a:schemeClr>
-                </a:solidFill>
-                <a:latin typeface="Noto Sans KR Medium" panose="020B0200000000000000" pitchFamily="34" charset="-128"/>
-                <a:ea typeface="Noto Sans KR Medium" panose="020B0200000000000000" pitchFamily="34" charset="-128"/>
-              </a:rPr>
-              <a:t> 시</a:t>
-            </a:r>
-            <a:r>
-              <a:rPr lang="en-US" altLang="ko-KR" sz="1000" dirty="0" smtClean="0">
-                <a:solidFill>
-                  <a:schemeClr val="bg1">
-                    <a:lumMod val="95000"/>
-                  </a:schemeClr>
-                </a:solidFill>
-                <a:latin typeface="Noto Sans KR Medium" panose="020B0200000000000000" pitchFamily="34" charset="-128"/>
-                <a:ea typeface="Noto Sans KR Medium" panose="020B0200000000000000" pitchFamily="34" charset="-128"/>
-              </a:rPr>
-              <a:t>, </a:t>
-            </a:r>
-            <a:r>
-              <a:rPr lang="ko-KR" altLang="en-US" sz="1000" dirty="0" err="1" smtClean="0">
-                <a:solidFill>
-                  <a:schemeClr val="bg1">
-                    <a:lumMod val="95000"/>
-                  </a:schemeClr>
-                </a:solidFill>
-                <a:latin typeface="Noto Sans KR Medium" panose="020B0200000000000000" pitchFamily="34" charset="-128"/>
-                <a:ea typeface="Noto Sans KR Medium" panose="020B0200000000000000" pitchFamily="34" charset="-128"/>
-              </a:rPr>
-              <a:t>랜드</a:t>
-            </a:r>
-            <a:r>
-              <a:rPr lang="ko-KR" altLang="en-US" sz="1000" dirty="0" smtClean="0">
-                <a:solidFill>
-                  <a:schemeClr val="bg1">
-                    <a:lumMod val="95000"/>
-                  </a:schemeClr>
-                </a:solidFill>
-                <a:latin typeface="Noto Sans KR Medium" panose="020B0200000000000000" pitchFamily="34" charset="-128"/>
-                <a:ea typeface="Noto Sans KR Medium" panose="020B0200000000000000" pitchFamily="34" charset="-128"/>
-              </a:rPr>
-              <a:t> </a:t>
-            </a:r>
-            <a:r>
-              <a:rPr lang="ko-KR" altLang="en-US" sz="1000" dirty="0" err="1" smtClean="0">
-                <a:solidFill>
-                  <a:schemeClr val="bg1">
-                    <a:lumMod val="95000"/>
-                  </a:schemeClr>
-                </a:solidFill>
-                <a:latin typeface="Noto Sans KR Medium" panose="020B0200000000000000" pitchFamily="34" charset="-128"/>
-                <a:ea typeface="Noto Sans KR Medium" panose="020B0200000000000000" pitchFamily="34" charset="-128"/>
-              </a:rPr>
-              <a:t>스케이프와</a:t>
-            </a:r>
-            <a:r>
-              <a:rPr lang="ko-KR" altLang="en-US" sz="1000" dirty="0" smtClean="0">
-                <a:solidFill>
-                  <a:schemeClr val="bg1">
-                    <a:lumMod val="95000"/>
-                  </a:schemeClr>
-                </a:solidFill>
-                <a:latin typeface="Noto Sans KR Medium" panose="020B0200000000000000" pitchFamily="34" charset="-128"/>
-                <a:ea typeface="Noto Sans KR Medium" panose="020B0200000000000000" pitchFamily="34" charset="-128"/>
-              </a:rPr>
-              <a:t> 충돌하며 실패 처리되어 </a:t>
-            </a:r>
-            <a:r>
-              <a:rPr lang="en-US" altLang="ko-KR" sz="1000" dirty="0" err="1" smtClean="0">
-                <a:solidFill>
-                  <a:schemeClr val="bg1">
-                    <a:lumMod val="95000"/>
-                  </a:schemeClr>
-                </a:solidFill>
-                <a:latin typeface="Noto Sans KR Medium" panose="020B0200000000000000" pitchFamily="34" charset="-128"/>
-                <a:ea typeface="Noto Sans KR Medium" panose="020B0200000000000000" pitchFamily="34" charset="-128"/>
-              </a:rPr>
-              <a:t>nullptr</a:t>
-            </a:r>
-            <a:r>
-              <a:rPr lang="ko-KR" altLang="en-US" sz="1000" dirty="0" smtClean="0">
-                <a:solidFill>
-                  <a:schemeClr val="bg1">
-                    <a:lumMod val="95000"/>
-                  </a:schemeClr>
-                </a:solidFill>
-                <a:latin typeface="Noto Sans KR Medium" panose="020B0200000000000000" pitchFamily="34" charset="-128"/>
-                <a:ea typeface="Noto Sans KR Medium" panose="020B0200000000000000" pitchFamily="34" charset="-128"/>
-              </a:rPr>
-              <a:t>이 반환된 것</a:t>
-            </a:r>
-            <a:endParaRPr lang="en-US" altLang="ko-KR" sz="1000" dirty="0" smtClean="0">
-              <a:solidFill>
-                <a:schemeClr val="bg1">
-                  <a:lumMod val="95000"/>
-                </a:schemeClr>
-              </a:solidFill>
-              <a:latin typeface="Noto Sans KR Medium" panose="020B0200000000000000" pitchFamily="34" charset="-128"/>
-              <a:ea typeface="Noto Sans KR Medium" panose="020B0200000000000000" pitchFamily="34" charset="-128"/>
-            </a:endParaRPr>
-          </a:p>
-        </p:txBody>
-      </p:sp>
-      <p:sp>
-        <p:nvSpPr>
-          <p:cNvPr id="13" name="직사각형 12"/>
-          <p:cNvSpPr/>
-          <p:nvPr/>
-        </p:nvSpPr>
-        <p:spPr>
-          <a:xfrm>
-            <a:off x="454274" y="4096447"/>
             <a:ext cx="8755039" cy="400110"/>
           </a:xfrm>
           <a:prstGeom prst="rect">
@@ -31559,6 +30619,161 @@
           <a:lstStyle/>
           <a:p>
             <a:r>
+              <a:rPr lang="ko-KR" altLang="en-US" sz="1000" dirty="0" smtClean="0">
+                <a:solidFill>
+                  <a:schemeClr val="bg1">
+                    <a:lumMod val="95000"/>
+                  </a:schemeClr>
+                </a:solidFill>
+                <a:latin typeface="Noto Sans KR Medium" panose="020B0200000000000000" pitchFamily="34" charset="-128"/>
+                <a:ea typeface="Noto Sans KR Medium" panose="020B0200000000000000" pitchFamily="34" charset="-128"/>
+              </a:rPr>
+              <a:t>플레이어와 </a:t>
+            </a:r>
+            <a:r>
+              <a:rPr lang="ko-KR" altLang="en-US" sz="1000" dirty="0" err="1" smtClean="0">
+                <a:solidFill>
+                  <a:schemeClr val="bg1">
+                    <a:lumMod val="95000"/>
+                  </a:schemeClr>
+                </a:solidFill>
+                <a:latin typeface="Noto Sans KR Medium" panose="020B0200000000000000" pitchFamily="34" charset="-128"/>
+                <a:ea typeface="Noto Sans KR Medium" panose="020B0200000000000000" pitchFamily="34" charset="-128"/>
+              </a:rPr>
+              <a:t>몬스터</a:t>
+            </a:r>
+            <a:r>
+              <a:rPr lang="ko-KR" altLang="en-US" sz="1000" dirty="0" smtClean="0">
+                <a:solidFill>
+                  <a:schemeClr val="bg1">
+                    <a:lumMod val="95000"/>
+                  </a:schemeClr>
+                </a:solidFill>
+                <a:latin typeface="Noto Sans KR Medium" panose="020B0200000000000000" pitchFamily="34" charset="-128"/>
+                <a:ea typeface="Noto Sans KR Medium" panose="020B0200000000000000" pitchFamily="34" charset="-128"/>
+              </a:rPr>
+              <a:t> 기반 기능 구현 </a:t>
+            </a:r>
+            <a:r>
+              <a:rPr lang="ko-KR" altLang="en-US" sz="1000" dirty="0" smtClean="0">
+                <a:solidFill>
+                  <a:schemeClr val="bg1">
+                    <a:lumMod val="95000"/>
+                  </a:schemeClr>
+                </a:solidFill>
+                <a:latin typeface="Noto Sans KR Medium" panose="020B0200000000000000" pitchFamily="34" charset="-128"/>
+                <a:ea typeface="Noto Sans KR Medium" panose="020B0200000000000000" pitchFamily="34" charset="-128"/>
+              </a:rPr>
+              <a:t>후</a:t>
+            </a:r>
+            <a:endParaRPr lang="en-US" altLang="ko-KR" sz="1000" dirty="0" smtClean="0">
+              <a:solidFill>
+                <a:schemeClr val="bg1">
+                  <a:lumMod val="95000"/>
+                </a:schemeClr>
+              </a:solidFill>
+              <a:latin typeface="Noto Sans KR Medium" panose="020B0200000000000000" pitchFamily="34" charset="-128"/>
+              <a:ea typeface="Noto Sans KR Medium" panose="020B0200000000000000" pitchFamily="34" charset="-128"/>
+            </a:endParaRPr>
+          </a:p>
+          <a:p>
+            <a:r>
+              <a:rPr lang="ko-KR" altLang="en-US" sz="1000" dirty="0" err="1" smtClean="0">
+                <a:solidFill>
+                  <a:schemeClr val="bg1">
+                    <a:lumMod val="95000"/>
+                  </a:schemeClr>
+                </a:solidFill>
+                <a:latin typeface="Noto Sans KR Medium" panose="020B0200000000000000" pitchFamily="34" charset="-128"/>
+                <a:ea typeface="Noto Sans KR Medium" panose="020B0200000000000000" pitchFamily="34" charset="-128"/>
+              </a:rPr>
+              <a:t>랜드</a:t>
+            </a:r>
+            <a:r>
+              <a:rPr lang="ko-KR" altLang="en-US" sz="1000" dirty="0" smtClean="0">
+                <a:solidFill>
+                  <a:schemeClr val="bg1">
+                    <a:lumMod val="95000"/>
+                  </a:schemeClr>
+                </a:solidFill>
+                <a:latin typeface="Noto Sans KR Medium" panose="020B0200000000000000" pitchFamily="34" charset="-128"/>
+                <a:ea typeface="Noto Sans KR Medium" panose="020B0200000000000000" pitchFamily="34" charset="-128"/>
+              </a:rPr>
+              <a:t> </a:t>
+            </a:r>
+            <a:r>
+              <a:rPr lang="ko-KR" altLang="en-US" sz="1000" dirty="0" err="1" smtClean="0">
+                <a:solidFill>
+                  <a:schemeClr val="bg1">
+                    <a:lumMod val="95000"/>
+                  </a:schemeClr>
+                </a:solidFill>
+                <a:latin typeface="Noto Sans KR Medium" panose="020B0200000000000000" pitchFamily="34" charset="-128"/>
+                <a:ea typeface="Noto Sans KR Medium" panose="020B0200000000000000" pitchFamily="34" charset="-128"/>
+              </a:rPr>
+              <a:t>스케이프를</a:t>
+            </a:r>
+            <a:r>
+              <a:rPr lang="ko-KR" altLang="en-US" sz="1000" dirty="0" smtClean="0">
+                <a:solidFill>
+                  <a:schemeClr val="bg1">
+                    <a:lumMod val="95000"/>
+                  </a:schemeClr>
+                </a:solidFill>
+                <a:latin typeface="Noto Sans KR Medium" panose="020B0200000000000000" pitchFamily="34" charset="-128"/>
+                <a:ea typeface="Noto Sans KR Medium" panose="020B0200000000000000" pitchFamily="34" charset="-128"/>
+              </a:rPr>
+              <a:t> 가지고 레벨을 만들어 테스트하던 도중 에러 </a:t>
+            </a:r>
+            <a:r>
+              <a:rPr lang="ko-KR" altLang="en-US" sz="1000" dirty="0" smtClean="0">
+                <a:solidFill>
+                  <a:schemeClr val="bg1">
+                    <a:lumMod val="95000"/>
+                  </a:schemeClr>
+                </a:solidFill>
+                <a:latin typeface="Noto Sans KR Medium" panose="020B0200000000000000" pitchFamily="34" charset="-128"/>
+                <a:ea typeface="Noto Sans KR Medium" panose="020B0200000000000000" pitchFamily="34" charset="-128"/>
+              </a:rPr>
+              <a:t>발생했습니다</a:t>
+            </a:r>
+            <a:r>
+              <a:rPr lang="en-US" altLang="ko-KR" sz="1000" dirty="0" smtClean="0">
+                <a:solidFill>
+                  <a:schemeClr val="bg1">
+                    <a:lumMod val="95000"/>
+                  </a:schemeClr>
+                </a:solidFill>
+                <a:latin typeface="Noto Sans KR Medium" panose="020B0200000000000000" pitchFamily="34" charset="-128"/>
+                <a:ea typeface="Noto Sans KR Medium" panose="020B0200000000000000" pitchFamily="34" charset="-128"/>
+              </a:rPr>
+              <a:t>.</a:t>
+            </a:r>
+          </a:p>
+        </p:txBody>
+      </p:sp>
+      <p:sp>
+        <p:nvSpPr>
+          <p:cNvPr id="13" name="직사각형 12"/>
+          <p:cNvSpPr/>
+          <p:nvPr/>
+        </p:nvSpPr>
+        <p:spPr>
+          <a:xfrm>
+            <a:off x="454274" y="3234671"/>
+            <a:ext cx="8755039" cy="246221"/>
+          </a:xfrm>
+          <a:prstGeom prst="rect">
+            <a:avLst/>
+          </a:prstGeom>
+        </p:spPr>
+        <p:txBody>
+          <a:bodyPr wrap="square">
+            <a:spAutoFit/>
+          </a:bodyPr>
+          <a:lstStyle/>
+          <a:p>
+            <a:r>
               <a:rPr lang="ko-KR" altLang="en-US" sz="1000" dirty="0" err="1">
                 <a:solidFill>
                   <a:schemeClr val="bg1">
@@ -31700,7 +30915,232 @@
                 <a:latin typeface="Noto Sans KR Medium" panose="020B0200000000000000" pitchFamily="34" charset="-128"/>
                 <a:ea typeface="Noto Sans KR Medium" panose="020B0200000000000000" pitchFamily="34" charset="-128"/>
               </a:rPr>
-              <a:t>을 변경 후 해결</a:t>
+              <a:t>을 변경 후 </a:t>
+            </a:r>
+            <a:r>
+              <a:rPr lang="ko-KR" altLang="en-US" sz="1000" dirty="0" smtClean="0">
+                <a:solidFill>
+                  <a:schemeClr val="bg1">
+                    <a:lumMod val="95000"/>
+                  </a:schemeClr>
+                </a:solidFill>
+                <a:latin typeface="Noto Sans KR Medium" panose="020B0200000000000000" pitchFamily="34" charset="-128"/>
+                <a:ea typeface="Noto Sans KR Medium" panose="020B0200000000000000" pitchFamily="34" charset="-128"/>
+              </a:rPr>
+              <a:t>해결했습니다</a:t>
+            </a:r>
+            <a:r>
+              <a:rPr lang="en-US" altLang="ko-KR" sz="1000" dirty="0" smtClean="0">
+                <a:solidFill>
+                  <a:schemeClr val="bg1">
+                    <a:lumMod val="95000"/>
+                  </a:schemeClr>
+                </a:solidFill>
+                <a:latin typeface="Noto Sans KR Medium" panose="020B0200000000000000" pitchFamily="34" charset="-128"/>
+                <a:ea typeface="Noto Sans KR Medium" panose="020B0200000000000000" pitchFamily="34" charset="-128"/>
+              </a:rPr>
+              <a:t>.</a:t>
+            </a:r>
+          </a:p>
+        </p:txBody>
+      </p:sp>
+      <p:sp>
+        <p:nvSpPr>
+          <p:cNvPr id="11" name="직사각형 10"/>
+          <p:cNvSpPr/>
+          <p:nvPr/>
+        </p:nvSpPr>
+        <p:spPr>
+          <a:xfrm>
+            <a:off x="454274" y="1880455"/>
+            <a:ext cx="4833342" cy="246221"/>
+          </a:xfrm>
+          <a:prstGeom prst="rect">
+            <a:avLst/>
+          </a:prstGeom>
+        </p:spPr>
+        <p:txBody>
+          <a:bodyPr wrap="square">
+            <a:spAutoFit/>
+          </a:bodyPr>
+          <a:lstStyle/>
+          <a:p>
+            <a:r>
+              <a:rPr lang="ko-KR" altLang="en-US" sz="1000" dirty="0" smtClean="0">
+                <a:solidFill>
+                  <a:schemeClr val="bg1">
+                    <a:lumMod val="95000"/>
+                  </a:schemeClr>
+                </a:solidFill>
+                <a:latin typeface="Noto Sans KR ExtraBold" panose="020B0200000000000000" pitchFamily="34" charset="-128"/>
+                <a:ea typeface="Noto Sans KR ExtraBold" panose="020B0200000000000000" pitchFamily="34" charset="-128"/>
+              </a:rPr>
+              <a:t>원인 분석</a:t>
+            </a:r>
+            <a:endParaRPr lang="en-US" altLang="ko-KR" sz="1000" dirty="0">
+              <a:solidFill>
+                <a:schemeClr val="bg1">
+                  <a:lumMod val="95000"/>
+                </a:schemeClr>
+              </a:solidFill>
+              <a:latin typeface="Noto Sans KR ExtraBold" panose="020B0200000000000000" pitchFamily="34" charset="-128"/>
+              <a:ea typeface="Noto Sans KR ExtraBold" panose="020B0200000000000000" pitchFamily="34" charset="-128"/>
+            </a:endParaRPr>
+          </a:p>
+        </p:txBody>
+      </p:sp>
+      <p:sp>
+        <p:nvSpPr>
+          <p:cNvPr id="14" name="직사각형 13"/>
+          <p:cNvSpPr/>
+          <p:nvPr/>
+        </p:nvSpPr>
+        <p:spPr>
+          <a:xfrm>
+            <a:off x="454274" y="2126676"/>
+            <a:ext cx="8755039" cy="861774"/>
+          </a:xfrm>
+          <a:prstGeom prst="rect">
+            <a:avLst/>
+          </a:prstGeom>
+        </p:spPr>
+        <p:txBody>
+          <a:bodyPr wrap="square">
+            <a:spAutoFit/>
+          </a:bodyPr>
+          <a:lstStyle/>
+          <a:p>
+            <a:r>
+              <a:rPr lang="ko-KR" altLang="en-US" sz="1000" dirty="0" smtClean="0">
+                <a:solidFill>
+                  <a:schemeClr val="bg1">
+                    <a:lumMod val="95000"/>
+                  </a:schemeClr>
+                </a:solidFill>
+                <a:latin typeface="Noto Sans KR Medium" panose="020B0200000000000000" pitchFamily="34" charset="-128"/>
+                <a:ea typeface="Noto Sans KR Medium" panose="020B0200000000000000" pitchFamily="34" charset="-128"/>
+              </a:rPr>
+              <a:t>최초 </a:t>
+            </a:r>
+            <a:r>
+              <a:rPr lang="ko-KR" altLang="en-US" sz="1000" dirty="0" err="1" smtClean="0">
+                <a:solidFill>
+                  <a:schemeClr val="bg1">
+                    <a:lumMod val="95000"/>
+                  </a:schemeClr>
+                </a:solidFill>
+                <a:latin typeface="Noto Sans KR Medium" panose="020B0200000000000000" pitchFamily="34" charset="-128"/>
+                <a:ea typeface="Noto Sans KR Medium" panose="020B0200000000000000" pitchFamily="34" charset="-128"/>
+              </a:rPr>
+              <a:t>몬스터</a:t>
+            </a:r>
+            <a:r>
+              <a:rPr lang="ko-KR" altLang="en-US" sz="1000" dirty="0" smtClean="0">
+                <a:solidFill>
+                  <a:schemeClr val="bg1">
+                    <a:lumMod val="95000"/>
+                  </a:schemeClr>
+                </a:solidFill>
+                <a:latin typeface="Noto Sans KR Medium" panose="020B0200000000000000" pitchFamily="34" charset="-128"/>
+                <a:ea typeface="Noto Sans KR Medium" panose="020B0200000000000000" pitchFamily="34" charset="-128"/>
+              </a:rPr>
+              <a:t> </a:t>
+            </a:r>
+            <a:r>
+              <a:rPr lang="ko-KR" altLang="en-US" sz="1000" dirty="0" err="1">
+                <a:solidFill>
+                  <a:schemeClr val="bg1">
+                    <a:lumMod val="95000"/>
+                  </a:schemeClr>
+                </a:solidFill>
+                <a:latin typeface="Noto Sans KR Medium" panose="020B0200000000000000" pitchFamily="34" charset="-128"/>
+                <a:ea typeface="Noto Sans KR Medium" panose="020B0200000000000000" pitchFamily="34" charset="-128"/>
+              </a:rPr>
+              <a:t>액터를</a:t>
+            </a:r>
+            <a:r>
+              <a:rPr lang="ko-KR" altLang="en-US" sz="1000" dirty="0">
+                <a:solidFill>
+                  <a:schemeClr val="bg1">
+                    <a:lumMod val="95000"/>
+                  </a:schemeClr>
+                </a:solidFill>
+                <a:latin typeface="Noto Sans KR Medium" panose="020B0200000000000000" pitchFamily="34" charset="-128"/>
+                <a:ea typeface="Noto Sans KR Medium" panose="020B0200000000000000" pitchFamily="34" charset="-128"/>
+              </a:rPr>
+              <a:t> </a:t>
+            </a:r>
+            <a:r>
+              <a:rPr lang="ko-KR" altLang="en-US" sz="1000" dirty="0" err="1">
+                <a:solidFill>
+                  <a:schemeClr val="bg1">
+                    <a:lumMod val="95000"/>
+                  </a:schemeClr>
+                </a:solidFill>
+                <a:latin typeface="Noto Sans KR Medium" panose="020B0200000000000000" pitchFamily="34" charset="-128"/>
+                <a:ea typeface="Noto Sans KR Medium" panose="020B0200000000000000" pitchFamily="34" charset="-128"/>
+              </a:rPr>
+              <a:t>스폰</a:t>
+            </a:r>
+            <a:r>
+              <a:rPr lang="ko-KR" altLang="en-US" sz="1000" dirty="0">
+                <a:solidFill>
+                  <a:schemeClr val="bg1">
+                    <a:lumMod val="95000"/>
+                  </a:schemeClr>
+                </a:solidFill>
+                <a:latin typeface="Noto Sans KR Medium" panose="020B0200000000000000" pitchFamily="34" charset="-128"/>
+                <a:ea typeface="Noto Sans KR Medium" panose="020B0200000000000000" pitchFamily="34" charset="-128"/>
+              </a:rPr>
+              <a:t> 시</a:t>
+            </a:r>
+            <a:r>
+              <a:rPr lang="en-US" altLang="ko-KR" sz="1000" dirty="0">
+                <a:solidFill>
+                  <a:schemeClr val="bg1">
+                    <a:lumMod val="95000"/>
+                  </a:schemeClr>
+                </a:solidFill>
+                <a:latin typeface="Noto Sans KR Medium" panose="020B0200000000000000" pitchFamily="34" charset="-128"/>
+                <a:ea typeface="Noto Sans KR Medium" panose="020B0200000000000000" pitchFamily="34" charset="-128"/>
+              </a:rPr>
+              <a:t>, </a:t>
+            </a:r>
+            <a:r>
+              <a:rPr lang="en-US" altLang="ko-KR" sz="1000" dirty="0" err="1" smtClean="0">
+                <a:solidFill>
+                  <a:schemeClr val="bg1">
+                    <a:lumMod val="95000"/>
+                  </a:schemeClr>
+                </a:solidFill>
+                <a:latin typeface="Noto Sans KR Medium" panose="020B0200000000000000" pitchFamily="34" charset="-128"/>
+                <a:ea typeface="Noto Sans KR Medium" panose="020B0200000000000000" pitchFamily="34" charset="-128"/>
+              </a:rPr>
+              <a:t>nullptr</a:t>
+            </a:r>
+            <a:r>
+              <a:rPr lang="ko-KR" altLang="en-US" sz="1000" dirty="0" smtClean="0">
+                <a:solidFill>
+                  <a:schemeClr val="bg1">
+                    <a:lumMod val="95000"/>
+                  </a:schemeClr>
+                </a:solidFill>
+                <a:latin typeface="Noto Sans KR Medium" panose="020B0200000000000000" pitchFamily="34" charset="-128"/>
+                <a:ea typeface="Noto Sans KR Medium" panose="020B0200000000000000" pitchFamily="34" charset="-128"/>
+              </a:rPr>
+              <a:t>이 반환되어 에러가 발생했습니다</a:t>
+            </a:r>
+            <a:r>
+              <a:rPr lang="en-US" altLang="ko-KR" sz="1000" dirty="0" smtClean="0">
+                <a:solidFill>
+                  <a:schemeClr val="bg1">
+                    <a:lumMod val="95000"/>
+                  </a:schemeClr>
+                </a:solidFill>
+                <a:latin typeface="Noto Sans KR Medium" panose="020B0200000000000000" pitchFamily="34" charset="-128"/>
+                <a:ea typeface="Noto Sans KR Medium" panose="020B0200000000000000" pitchFamily="34" charset="-128"/>
+              </a:rPr>
+              <a:t>.</a:t>
             </a:r>
             <a:endParaRPr lang="en-US" altLang="ko-KR" sz="1000" dirty="0">
               <a:solidFill>
@@ -31714,6 +31154,78 @@
           </a:p>
           <a:p>
             <a:r>
+              <a:rPr lang="ko-KR" altLang="en-US" sz="1000" dirty="0">
+                <a:solidFill>
+                  <a:schemeClr val="bg1">
+                    <a:lumMod val="95000"/>
+                  </a:schemeClr>
+                </a:solidFill>
+                <a:latin typeface="Noto Sans KR Medium" panose="020B0200000000000000" pitchFamily="34" charset="-128"/>
+                <a:ea typeface="Noto Sans KR Medium" panose="020B0200000000000000" pitchFamily="34" charset="-128"/>
+              </a:rPr>
+              <a:t>기존 테스트에 쓰던 레벨에선 발생하지 않는 것을 </a:t>
+            </a:r>
+            <a:r>
+              <a:rPr lang="ko-KR" altLang="en-US" sz="1000" dirty="0" smtClean="0">
+                <a:solidFill>
+                  <a:schemeClr val="bg1">
+                    <a:lumMod val="95000"/>
+                  </a:schemeClr>
+                </a:solidFill>
+                <a:latin typeface="Noto Sans KR Medium" panose="020B0200000000000000" pitchFamily="34" charset="-128"/>
+                <a:ea typeface="Noto Sans KR Medium" panose="020B0200000000000000" pitchFamily="34" charset="-128"/>
+              </a:rPr>
+              <a:t>확인했고</a:t>
+            </a:r>
+            <a:r>
+              <a:rPr lang="en-US" altLang="ko-KR" sz="1000" dirty="0" smtClean="0">
+                <a:solidFill>
+                  <a:schemeClr val="bg1">
+                    <a:lumMod val="95000"/>
+                  </a:schemeClr>
+                </a:solidFill>
+                <a:latin typeface="Noto Sans KR Medium" panose="020B0200000000000000" pitchFamily="34" charset="-128"/>
+                <a:ea typeface="Noto Sans KR Medium" panose="020B0200000000000000" pitchFamily="34" charset="-128"/>
+              </a:rPr>
+              <a:t> </a:t>
+            </a:r>
+            <a:r>
+              <a:rPr lang="ko-KR" altLang="en-US" sz="1000" dirty="0" smtClean="0">
+                <a:solidFill>
+                  <a:schemeClr val="bg1">
+                    <a:lumMod val="95000"/>
+                  </a:schemeClr>
+                </a:solidFill>
+                <a:latin typeface="Noto Sans KR Medium" panose="020B0200000000000000" pitchFamily="34" charset="-128"/>
+                <a:ea typeface="Noto Sans KR Medium" panose="020B0200000000000000" pitchFamily="34" charset="-128"/>
+              </a:rPr>
+              <a:t>새로 </a:t>
+            </a:r>
+            <a:r>
+              <a:rPr lang="ko-KR" altLang="en-US" sz="1000" dirty="0">
+                <a:solidFill>
+                  <a:schemeClr val="bg1">
+                    <a:lumMod val="95000"/>
+                  </a:schemeClr>
+                </a:solidFill>
+                <a:latin typeface="Noto Sans KR Medium" panose="020B0200000000000000" pitchFamily="34" charset="-128"/>
+                <a:ea typeface="Noto Sans KR Medium" panose="020B0200000000000000" pitchFamily="34" charset="-128"/>
+              </a:rPr>
+              <a:t>작업 중인 레벨과의 </a:t>
+            </a:r>
+            <a:r>
+              <a:rPr lang="ko-KR" altLang="en-US" sz="1000" dirty="0" smtClean="0">
+                <a:solidFill>
+                  <a:schemeClr val="bg1">
+                    <a:lumMod val="95000"/>
+                  </a:schemeClr>
+                </a:solidFill>
+                <a:latin typeface="Noto Sans KR Medium" panose="020B0200000000000000" pitchFamily="34" charset="-128"/>
+                <a:ea typeface="Noto Sans KR Medium" panose="020B0200000000000000" pitchFamily="34" charset="-128"/>
+              </a:rPr>
+              <a:t>차이점은 </a:t>
+            </a:r>
+            <a:r>
               <a:rPr lang="ko-KR" altLang="en-US" sz="1000" dirty="0" err="1">
                 <a:solidFill>
                   <a:schemeClr val="bg1">
@@ -31723,10 +31235,155 @@
                 <a:latin typeface="Noto Sans KR Medium" panose="020B0200000000000000" pitchFamily="34" charset="-128"/>
                 <a:ea typeface="Noto Sans KR Medium" panose="020B0200000000000000" pitchFamily="34" charset="-128"/>
               </a:rPr>
+              <a:t>랜드</a:t>
+            </a:r>
+            <a:r>
+              <a:rPr lang="ko-KR" altLang="en-US" sz="1000" dirty="0">
+                <a:solidFill>
+                  <a:schemeClr val="bg1">
+                    <a:lumMod val="95000"/>
+                  </a:schemeClr>
+                </a:solidFill>
+                <a:latin typeface="Noto Sans KR Medium" panose="020B0200000000000000" pitchFamily="34" charset="-128"/>
+                <a:ea typeface="Noto Sans KR Medium" panose="020B0200000000000000" pitchFamily="34" charset="-128"/>
+              </a:rPr>
+              <a:t> </a:t>
+            </a:r>
+            <a:r>
+              <a:rPr lang="ko-KR" altLang="en-US" sz="1000" dirty="0" err="1" smtClean="0">
+                <a:solidFill>
+                  <a:schemeClr val="bg1">
+                    <a:lumMod val="95000"/>
+                  </a:schemeClr>
+                </a:solidFill>
+                <a:latin typeface="Noto Sans KR Medium" panose="020B0200000000000000" pitchFamily="34" charset="-128"/>
+                <a:ea typeface="Noto Sans KR Medium" panose="020B0200000000000000" pitchFamily="34" charset="-128"/>
+              </a:rPr>
+              <a:t>스케이프</a:t>
+            </a:r>
+            <a:r>
+              <a:rPr lang="ko-KR" altLang="en-US" sz="1000" dirty="0" smtClean="0">
+                <a:solidFill>
+                  <a:schemeClr val="bg1">
+                    <a:lumMod val="95000"/>
+                  </a:schemeClr>
+                </a:solidFill>
+                <a:latin typeface="Noto Sans KR Medium" panose="020B0200000000000000" pitchFamily="34" charset="-128"/>
+                <a:ea typeface="Noto Sans KR Medium" panose="020B0200000000000000" pitchFamily="34" charset="-128"/>
+              </a:rPr>
+              <a:t> 사용 유무임을 확인했습니다</a:t>
+            </a:r>
+            <a:r>
+              <a:rPr lang="en-US" altLang="ko-KR" sz="1000" dirty="0" smtClean="0">
+                <a:solidFill>
+                  <a:schemeClr val="bg1">
+                    <a:lumMod val="95000"/>
+                  </a:schemeClr>
+                </a:solidFill>
+                <a:latin typeface="Noto Sans KR Medium" panose="020B0200000000000000" pitchFamily="34" charset="-128"/>
+                <a:ea typeface="Noto Sans KR Medium" panose="020B0200000000000000" pitchFamily="34" charset="-128"/>
+              </a:rPr>
+              <a:t>.</a:t>
+            </a:r>
+          </a:p>
+          <a:p>
+            <a:endParaRPr lang="en-US" altLang="ko-KR" sz="1000" dirty="0" smtClean="0">
+              <a:solidFill>
+                <a:schemeClr val="bg1">
+                  <a:lumMod val="95000"/>
+                </a:schemeClr>
+              </a:solidFill>
+              <a:latin typeface="Noto Sans KR Medium" panose="020B0200000000000000" pitchFamily="34" charset="-128"/>
+              <a:ea typeface="Noto Sans KR Medium" panose="020B0200000000000000" pitchFamily="34" charset="-128"/>
+            </a:endParaRPr>
+          </a:p>
+          <a:p>
+            <a:r>
+              <a:rPr lang="ko-KR" altLang="en-US" sz="1000" dirty="0" err="1" smtClean="0">
+                <a:solidFill>
+                  <a:schemeClr val="bg1">
+                    <a:lumMod val="95000"/>
+                  </a:schemeClr>
+                </a:solidFill>
+                <a:latin typeface="Noto Sans KR Medium" panose="020B0200000000000000" pitchFamily="34" charset="-128"/>
+                <a:ea typeface="Noto Sans KR Medium" panose="020B0200000000000000" pitchFamily="34" charset="-128"/>
+              </a:rPr>
+              <a:t>랜드</a:t>
+            </a:r>
+            <a:r>
+              <a:rPr lang="ko-KR" altLang="en-US" sz="1000" dirty="0" smtClean="0">
+                <a:solidFill>
+                  <a:schemeClr val="bg1">
+                    <a:lumMod val="95000"/>
+                  </a:schemeClr>
+                </a:solidFill>
+                <a:latin typeface="Noto Sans KR Medium" panose="020B0200000000000000" pitchFamily="34" charset="-128"/>
+                <a:ea typeface="Noto Sans KR Medium" panose="020B0200000000000000" pitchFamily="34" charset="-128"/>
+              </a:rPr>
+              <a:t> </a:t>
+            </a:r>
+            <a:r>
+              <a:rPr lang="ko-KR" altLang="en-US" sz="1000" dirty="0" err="1" smtClean="0">
+                <a:solidFill>
+                  <a:schemeClr val="bg1">
+                    <a:lumMod val="95000"/>
+                  </a:schemeClr>
+                </a:solidFill>
+                <a:latin typeface="Noto Sans KR Medium" panose="020B0200000000000000" pitchFamily="34" charset="-128"/>
+                <a:ea typeface="Noto Sans KR Medium" panose="020B0200000000000000" pitchFamily="34" charset="-128"/>
+              </a:rPr>
+              <a:t>스케이프에서</a:t>
+            </a:r>
+            <a:r>
+              <a:rPr lang="ko-KR" altLang="en-US" sz="1000" dirty="0" smtClean="0">
+                <a:solidFill>
+                  <a:schemeClr val="bg1">
+                    <a:lumMod val="95000"/>
+                  </a:schemeClr>
+                </a:solidFill>
+                <a:latin typeface="Noto Sans KR Medium" panose="020B0200000000000000" pitchFamily="34" charset="-128"/>
+                <a:ea typeface="Noto Sans KR Medium" panose="020B0200000000000000" pitchFamily="34" charset="-128"/>
+              </a:rPr>
+              <a:t> </a:t>
+            </a:r>
+            <a:r>
+              <a:rPr lang="ko-KR" altLang="en-US" sz="1000" dirty="0" err="1" smtClean="0">
+                <a:solidFill>
+                  <a:schemeClr val="bg1">
+                    <a:lumMod val="95000"/>
+                  </a:schemeClr>
+                </a:solidFill>
+                <a:latin typeface="Noto Sans KR Medium" panose="020B0200000000000000" pitchFamily="34" charset="-128"/>
+                <a:ea typeface="Noto Sans KR Medium" panose="020B0200000000000000" pitchFamily="34" charset="-128"/>
+              </a:rPr>
+              <a:t>액터</a:t>
+            </a:r>
+            <a:r>
+              <a:rPr lang="ko-KR" altLang="en-US" sz="1000" dirty="0" smtClean="0">
+                <a:solidFill>
+                  <a:schemeClr val="bg1">
+                    <a:lumMod val="95000"/>
+                  </a:schemeClr>
+                </a:solidFill>
+                <a:latin typeface="Noto Sans KR Medium" panose="020B0200000000000000" pitchFamily="34" charset="-128"/>
+                <a:ea typeface="Noto Sans KR Medium" panose="020B0200000000000000" pitchFamily="34" charset="-128"/>
+              </a:rPr>
+              <a:t> </a:t>
+            </a:r>
+            <a:r>
+              <a:rPr lang="ko-KR" altLang="en-US" sz="1000" dirty="0" err="1" smtClean="0">
+                <a:solidFill>
+                  <a:schemeClr val="bg1">
+                    <a:lumMod val="95000"/>
+                  </a:schemeClr>
+                </a:solidFill>
+                <a:latin typeface="Noto Sans KR Medium" panose="020B0200000000000000" pitchFamily="34" charset="-128"/>
+                <a:ea typeface="Noto Sans KR Medium" panose="020B0200000000000000" pitchFamily="34" charset="-128"/>
+              </a:rPr>
               <a:t>스폰</a:t>
             </a:r>
             <a:r>
-              <a:rPr lang="ko-KR" altLang="en-US" sz="1000" dirty="0">
+              <a:rPr lang="ko-KR" altLang="en-US" sz="1000" dirty="0" smtClean="0">
                 <a:solidFill>
                   <a:schemeClr val="bg1">
                     <a:lumMod val="95000"/>
@@ -31738,7 +31395,7 @@
               <a:t> 시</a:t>
             </a:r>
             <a:r>
-              <a:rPr lang="en-US" altLang="ko-KR" sz="1000" dirty="0">
+              <a:rPr lang="en-US" altLang="ko-KR" sz="1000" dirty="0" smtClean="0">
                 <a:solidFill>
                   <a:schemeClr val="bg1">
                     <a:lumMod val="95000"/>
@@ -31750,46 +31407,292 @@
               <a:t>, </a:t>
             </a:r>
             <a:r>
-              <a:rPr lang="ko-KR" altLang="en-US" sz="1000" dirty="0">
-                <a:solidFill>
-                  <a:schemeClr val="bg1">
-                    <a:lumMod val="95000"/>
-                  </a:schemeClr>
-                </a:solidFill>
-                <a:latin typeface="Noto Sans KR Medium" panose="020B0200000000000000" pitchFamily="34" charset="-128"/>
-                <a:ea typeface="Noto Sans KR Medium" panose="020B0200000000000000" pitchFamily="34" charset="-128"/>
-              </a:rPr>
-              <a:t>충돌하거나 겹치더라도 </a:t>
-            </a:r>
-            <a:r>
-              <a:rPr lang="ko-KR" altLang="en-US" sz="1000" dirty="0" err="1">
-                <a:solidFill>
-                  <a:schemeClr val="bg1">
-                    <a:lumMod val="95000"/>
-                  </a:schemeClr>
-                </a:solidFill>
-                <a:latin typeface="Noto Sans KR Medium" panose="020B0200000000000000" pitchFamily="34" charset="-128"/>
-                <a:ea typeface="Noto Sans KR Medium" panose="020B0200000000000000" pitchFamily="34" charset="-128"/>
-              </a:rPr>
-              <a:t>스폰하도록</a:t>
-            </a:r>
-            <a:r>
-              <a:rPr lang="ko-KR" altLang="en-US" sz="1000" dirty="0">
-                <a:solidFill>
-                  <a:schemeClr val="bg1">
-                    <a:lumMod val="95000"/>
-                  </a:schemeClr>
-                </a:solidFill>
-                <a:latin typeface="Noto Sans KR Medium" panose="020B0200000000000000" pitchFamily="34" charset="-128"/>
-                <a:ea typeface="Noto Sans KR Medium" panose="020B0200000000000000" pitchFamily="34" charset="-128"/>
-              </a:rPr>
-              <a:t> 설정</a:t>
-            </a:r>
-            <a:r>
-              <a:rPr lang="ko-KR" altLang="en-US" sz="1000" dirty="0"/>
-              <a:t>인</a:t>
-            </a:r>
-            <a:endParaRPr lang="en-US" altLang="ko-KR" sz="1000" dirty="0"/>
+              <a:rPr lang="ko-KR" altLang="en-US" sz="1000" dirty="0" smtClean="0">
+                <a:solidFill>
+                  <a:schemeClr val="bg1">
+                    <a:lumMod val="95000"/>
+                  </a:schemeClr>
+                </a:solidFill>
+                <a:latin typeface="Noto Sans KR Medium" panose="020B0200000000000000" pitchFamily="34" charset="-128"/>
+                <a:ea typeface="Noto Sans KR Medium" panose="020B0200000000000000" pitchFamily="34" charset="-128"/>
+              </a:rPr>
+              <a:t>일반 </a:t>
+            </a:r>
+            <a:r>
+              <a:rPr lang="ko-KR" altLang="en-US" sz="1000" dirty="0" err="1" smtClean="0">
+                <a:solidFill>
+                  <a:schemeClr val="bg1">
+                    <a:lumMod val="95000"/>
+                  </a:schemeClr>
+                </a:solidFill>
+                <a:latin typeface="Noto Sans KR Medium" panose="020B0200000000000000" pitchFamily="34" charset="-128"/>
+                <a:ea typeface="Noto Sans KR Medium" panose="020B0200000000000000" pitchFamily="34" charset="-128"/>
+              </a:rPr>
+              <a:t>스태틱</a:t>
+            </a:r>
+            <a:r>
+              <a:rPr lang="ko-KR" altLang="en-US" sz="1000" dirty="0" smtClean="0">
+                <a:solidFill>
+                  <a:schemeClr val="bg1">
+                    <a:lumMod val="95000"/>
+                  </a:schemeClr>
+                </a:solidFill>
+                <a:latin typeface="Noto Sans KR Medium" panose="020B0200000000000000" pitchFamily="34" charset="-128"/>
+                <a:ea typeface="Noto Sans KR Medium" panose="020B0200000000000000" pitchFamily="34" charset="-128"/>
+              </a:rPr>
+              <a:t> </a:t>
+            </a:r>
+            <a:r>
+              <a:rPr lang="ko-KR" altLang="en-US" sz="1000" dirty="0" err="1" smtClean="0">
+                <a:solidFill>
+                  <a:schemeClr val="bg1">
+                    <a:lumMod val="95000"/>
+                  </a:schemeClr>
+                </a:solidFill>
+                <a:latin typeface="Noto Sans KR Medium" panose="020B0200000000000000" pitchFamily="34" charset="-128"/>
+                <a:ea typeface="Noto Sans KR Medium" panose="020B0200000000000000" pitchFamily="34" charset="-128"/>
+              </a:rPr>
+              <a:t>메쉬와</a:t>
+            </a:r>
+            <a:r>
+              <a:rPr lang="ko-KR" altLang="en-US" sz="1000" dirty="0" smtClean="0">
+                <a:solidFill>
+                  <a:schemeClr val="bg1">
+                    <a:lumMod val="95000"/>
+                  </a:schemeClr>
+                </a:solidFill>
+                <a:latin typeface="Noto Sans KR Medium" panose="020B0200000000000000" pitchFamily="34" charset="-128"/>
+                <a:ea typeface="Noto Sans KR Medium" panose="020B0200000000000000" pitchFamily="34" charset="-128"/>
+              </a:rPr>
+              <a:t> 달리 </a:t>
+            </a:r>
+            <a:r>
+              <a:rPr lang="en-US" altLang="ko-KR" sz="1000" dirty="0" smtClean="0">
+                <a:solidFill>
+                  <a:schemeClr val="bg1">
+                    <a:lumMod val="95000"/>
+                  </a:schemeClr>
+                </a:solidFill>
+                <a:latin typeface="Noto Sans KR Medium" panose="020B0200000000000000" pitchFamily="34" charset="-128"/>
+                <a:ea typeface="Noto Sans KR Medium" panose="020B0200000000000000" pitchFamily="34" charset="-128"/>
+              </a:rPr>
+              <a:t>Z</a:t>
+            </a:r>
+            <a:r>
+              <a:rPr lang="ko-KR" altLang="en-US" sz="1000" dirty="0" smtClean="0">
+                <a:solidFill>
+                  <a:schemeClr val="bg1">
+                    <a:lumMod val="95000"/>
+                  </a:schemeClr>
+                </a:solidFill>
+                <a:latin typeface="Noto Sans KR Medium" panose="020B0200000000000000" pitchFamily="34" charset="-128"/>
+                <a:ea typeface="Noto Sans KR Medium" panose="020B0200000000000000" pitchFamily="34" charset="-128"/>
+              </a:rPr>
+              <a:t>축 높이와 충돌 문제가 있음을 확인했습니다</a:t>
+            </a:r>
+            <a:r>
+              <a:rPr lang="en-US" altLang="ko-KR" sz="1000" dirty="0" smtClean="0">
+                <a:solidFill>
+                  <a:schemeClr val="bg1">
+                    <a:lumMod val="95000"/>
+                  </a:schemeClr>
+                </a:solidFill>
+                <a:latin typeface="Noto Sans KR Medium" panose="020B0200000000000000" pitchFamily="34" charset="-128"/>
+                <a:ea typeface="Noto Sans KR Medium" panose="020B0200000000000000" pitchFamily="34" charset="-128"/>
+              </a:rPr>
+              <a:t>.</a:t>
+            </a:r>
+          </a:p>
+          <a:p>
+            <a:r>
+              <a:rPr lang="ko-KR" altLang="en-US" sz="1000" dirty="0" smtClean="0">
+                <a:solidFill>
+                  <a:schemeClr val="bg1">
+                    <a:lumMod val="95000"/>
+                  </a:schemeClr>
+                </a:solidFill>
+                <a:latin typeface="Noto Sans KR Medium" panose="020B0200000000000000" pitchFamily="34" charset="-128"/>
+                <a:ea typeface="Noto Sans KR Medium" panose="020B0200000000000000" pitchFamily="34" charset="-128"/>
+              </a:rPr>
+              <a:t>기존에 쓰던 평평한 </a:t>
+            </a:r>
+            <a:r>
+              <a:rPr lang="ko-KR" altLang="en-US" sz="1000" dirty="0" err="1" smtClean="0">
+                <a:solidFill>
+                  <a:schemeClr val="bg1">
+                    <a:lumMod val="95000"/>
+                  </a:schemeClr>
+                </a:solidFill>
+                <a:latin typeface="Noto Sans KR Medium" panose="020B0200000000000000" pitchFamily="34" charset="-128"/>
+                <a:ea typeface="Noto Sans KR Medium" panose="020B0200000000000000" pitchFamily="34" charset="-128"/>
+              </a:rPr>
+              <a:t>메시에서와</a:t>
+            </a:r>
+            <a:r>
+              <a:rPr lang="ko-KR" altLang="en-US" sz="1000" dirty="0" smtClean="0">
+                <a:solidFill>
+                  <a:schemeClr val="bg1">
+                    <a:lumMod val="95000"/>
+                  </a:schemeClr>
+                </a:solidFill>
+                <a:latin typeface="Noto Sans KR Medium" panose="020B0200000000000000" pitchFamily="34" charset="-128"/>
+                <a:ea typeface="Noto Sans KR Medium" panose="020B0200000000000000" pitchFamily="34" charset="-128"/>
+              </a:rPr>
+              <a:t> 달리 </a:t>
+            </a:r>
+            <a:r>
+              <a:rPr lang="en-US" altLang="ko-KR" sz="1000" dirty="0" smtClean="0">
+                <a:solidFill>
+                  <a:schemeClr val="bg1">
+                    <a:lumMod val="95000"/>
+                  </a:schemeClr>
+                </a:solidFill>
+                <a:latin typeface="Noto Sans KR Medium" panose="020B0200000000000000" pitchFamily="34" charset="-128"/>
+                <a:ea typeface="Noto Sans KR Medium" panose="020B0200000000000000" pitchFamily="34" charset="-128"/>
+              </a:rPr>
+              <a:t>z</a:t>
+            </a:r>
+            <a:r>
+              <a:rPr lang="ko-KR" altLang="en-US" sz="1000" dirty="0" smtClean="0">
+                <a:solidFill>
+                  <a:schemeClr val="bg1">
+                    <a:lumMod val="95000"/>
+                  </a:schemeClr>
+                </a:solidFill>
+                <a:latin typeface="Noto Sans KR Medium" panose="020B0200000000000000" pitchFamily="34" charset="-128"/>
+                <a:ea typeface="Noto Sans KR Medium" panose="020B0200000000000000" pitchFamily="34" charset="-128"/>
+              </a:rPr>
+              <a:t>축 높이 차이와 </a:t>
+            </a:r>
+            <a:r>
+              <a:rPr lang="ko-KR" altLang="en-US" sz="1000" dirty="0" err="1" smtClean="0">
+                <a:solidFill>
+                  <a:schemeClr val="bg1">
+                    <a:lumMod val="95000"/>
+                  </a:schemeClr>
+                </a:solidFill>
+                <a:latin typeface="Noto Sans KR Medium" panose="020B0200000000000000" pitchFamily="34" charset="-128"/>
+                <a:ea typeface="Noto Sans KR Medium" panose="020B0200000000000000" pitchFamily="34" charset="-128"/>
+              </a:rPr>
+              <a:t>랜드</a:t>
+            </a:r>
+            <a:r>
+              <a:rPr lang="ko-KR" altLang="en-US" sz="1000" dirty="0" smtClean="0">
+                <a:solidFill>
+                  <a:schemeClr val="bg1">
+                    <a:lumMod val="95000"/>
+                  </a:schemeClr>
+                </a:solidFill>
+                <a:latin typeface="Noto Sans KR Medium" panose="020B0200000000000000" pitchFamily="34" charset="-128"/>
+                <a:ea typeface="Noto Sans KR Medium" panose="020B0200000000000000" pitchFamily="34" charset="-128"/>
+              </a:rPr>
+              <a:t> </a:t>
+            </a:r>
+            <a:r>
+              <a:rPr lang="ko-KR" altLang="en-US" sz="1000" dirty="0" err="1" smtClean="0">
+                <a:solidFill>
+                  <a:schemeClr val="bg1">
+                    <a:lumMod val="95000"/>
+                  </a:schemeClr>
+                </a:solidFill>
+                <a:latin typeface="Noto Sans KR Medium" panose="020B0200000000000000" pitchFamily="34" charset="-128"/>
+                <a:ea typeface="Noto Sans KR Medium" panose="020B0200000000000000" pitchFamily="34" charset="-128"/>
+              </a:rPr>
+              <a:t>스케이프와</a:t>
+            </a:r>
+            <a:r>
+              <a:rPr lang="ko-KR" altLang="en-US" sz="1000" dirty="0" smtClean="0">
+                <a:solidFill>
+                  <a:schemeClr val="bg1">
+                    <a:lumMod val="95000"/>
+                  </a:schemeClr>
+                </a:solidFill>
+                <a:latin typeface="Noto Sans KR Medium" panose="020B0200000000000000" pitchFamily="34" charset="-128"/>
+                <a:ea typeface="Noto Sans KR Medium" panose="020B0200000000000000" pitchFamily="34" charset="-128"/>
+              </a:rPr>
+              <a:t> 충돌로 인해서</a:t>
+            </a:r>
+            <a:r>
+              <a:rPr lang="en-US" altLang="ko-KR" sz="1000" dirty="0" smtClean="0">
+                <a:solidFill>
+                  <a:schemeClr val="bg1">
+                    <a:lumMod val="95000"/>
+                  </a:schemeClr>
+                </a:solidFill>
+                <a:latin typeface="Noto Sans KR Medium" panose="020B0200000000000000" pitchFamily="34" charset="-128"/>
+                <a:ea typeface="Noto Sans KR Medium" panose="020B0200000000000000" pitchFamily="34" charset="-128"/>
+              </a:rPr>
+              <a:t>, </a:t>
+            </a:r>
+            <a:r>
+              <a:rPr lang="ko-KR" altLang="en-US" sz="1000" dirty="0" err="1" smtClean="0">
+                <a:solidFill>
+                  <a:schemeClr val="bg1">
+                    <a:lumMod val="95000"/>
+                  </a:schemeClr>
+                </a:solidFill>
+                <a:latin typeface="Noto Sans KR Medium" panose="020B0200000000000000" pitchFamily="34" charset="-128"/>
+                <a:ea typeface="Noto Sans KR Medium" panose="020B0200000000000000" pitchFamily="34" charset="-128"/>
+              </a:rPr>
+              <a:t>스폰이</a:t>
+            </a:r>
+            <a:r>
+              <a:rPr lang="ko-KR" altLang="en-US" sz="1000" dirty="0" smtClean="0">
+                <a:solidFill>
+                  <a:schemeClr val="bg1">
+                    <a:lumMod val="95000"/>
+                  </a:schemeClr>
+                </a:solidFill>
+                <a:latin typeface="Noto Sans KR Medium" panose="020B0200000000000000" pitchFamily="34" charset="-128"/>
+                <a:ea typeface="Noto Sans KR Medium" panose="020B0200000000000000" pitchFamily="34" charset="-128"/>
+              </a:rPr>
+              <a:t> 실패 처리되어 </a:t>
+            </a:r>
+            <a:r>
+              <a:rPr lang="en-US" altLang="ko-KR" sz="1000" dirty="0" err="1" smtClean="0">
+                <a:solidFill>
+                  <a:schemeClr val="bg1">
+                    <a:lumMod val="95000"/>
+                  </a:schemeClr>
+                </a:solidFill>
+                <a:latin typeface="Noto Sans KR Medium" panose="020B0200000000000000" pitchFamily="34" charset="-128"/>
+                <a:ea typeface="Noto Sans KR Medium" panose="020B0200000000000000" pitchFamily="34" charset="-128"/>
+              </a:rPr>
+              <a:t>nullptr</a:t>
+            </a:r>
+            <a:r>
+              <a:rPr lang="ko-KR" altLang="en-US" sz="1000" dirty="0" smtClean="0">
+                <a:solidFill>
+                  <a:schemeClr val="bg1">
+                    <a:lumMod val="95000"/>
+                  </a:schemeClr>
+                </a:solidFill>
+                <a:latin typeface="Noto Sans KR Medium" panose="020B0200000000000000" pitchFamily="34" charset="-128"/>
+                <a:ea typeface="Noto Sans KR Medium" panose="020B0200000000000000" pitchFamily="34" charset="-128"/>
+              </a:rPr>
+              <a:t>이 반환되었습니다</a:t>
+            </a:r>
+            <a:r>
+              <a:rPr lang="en-US" altLang="ko-KR" sz="1000" dirty="0" smtClean="0">
+                <a:solidFill>
+                  <a:schemeClr val="bg1">
+                    <a:lumMod val="95000"/>
+                  </a:schemeClr>
+                </a:solidFill>
+                <a:latin typeface="Noto Sans KR Medium" panose="020B0200000000000000" pitchFamily="34" charset="-128"/>
+                <a:ea typeface="Noto Sans KR Medium" panose="020B0200000000000000" pitchFamily="34" charset="-128"/>
+              </a:rPr>
+              <a:t>.</a:t>
+            </a:r>
+            <a:endParaRPr lang="en-US" altLang="ko-KR" sz="1000" dirty="0">
+              <a:solidFill>
+                <a:schemeClr val="bg1">
+                  <a:lumMod val="95000"/>
+                </a:schemeClr>
+              </a:solidFill>
+              <a:latin typeface="Noto Sans KR Medium" panose="020B0200000000000000" pitchFamily="34" charset="-128"/>
+              <a:ea typeface="Noto Sans KR Medium" panose="020B0200000000000000" pitchFamily="34" charset="-128"/>
+            </a:endParaRPr>
           </a:p>
         </p:txBody>
       </p:sp>
@@ -32227,7 +32130,31 @@
                 <a:latin typeface="Noto Sans KR Medium" panose="020B0200000000000000" pitchFamily="34" charset="-128"/>
                 <a:ea typeface="Noto Sans KR Medium" panose="020B0200000000000000" pitchFamily="34" charset="-128"/>
               </a:rPr>
-              <a:t> 작업 후 발생</a:t>
+              <a:t> 작업 후 </a:t>
+            </a:r>
+            <a:r>
+              <a:rPr lang="ko-KR" altLang="en-US" sz="1000" dirty="0" smtClean="0">
+                <a:solidFill>
+                  <a:schemeClr val="bg1">
+                    <a:lumMod val="95000"/>
+                  </a:schemeClr>
+                </a:solidFill>
+                <a:latin typeface="Noto Sans KR Medium" panose="020B0200000000000000" pitchFamily="34" charset="-128"/>
+                <a:ea typeface="Noto Sans KR Medium" panose="020B0200000000000000" pitchFamily="34" charset="-128"/>
+              </a:rPr>
+              <a:t>발생</a:t>
+            </a:r>
+            <a:r>
+              <a:rPr lang="ko-KR" altLang="en-US" sz="1000" dirty="0" smtClean="0">
+                <a:solidFill>
+                  <a:schemeClr val="bg1">
+                    <a:lumMod val="95000"/>
+                  </a:schemeClr>
+                </a:solidFill>
+                <a:latin typeface="Noto Sans KR Medium" panose="020B0200000000000000" pitchFamily="34" charset="-128"/>
+                <a:ea typeface="Noto Sans KR Medium" panose="020B0200000000000000" pitchFamily="34" charset="-128"/>
+              </a:rPr>
+              <a:t>했습니다</a:t>
             </a:r>
             <a:r>
               <a:rPr lang="en-US" altLang="ko-KR" sz="1000" dirty="0" smtClean="0">
@@ -32241,6 +32168,15 @@
               </a:rPr>
               <a:t>.</a:t>
             </a:r>
+            <a:endParaRPr lang="en-US" altLang="ko-KR" sz="1000" dirty="0" smtClean="0">
+              <a:solidFill>
+                <a:schemeClr val="bg1">
+                  <a:lumMod val="95000"/>
+                </a:schemeClr>
+              </a:solidFill>
+              <a:latin typeface="Noto Sans KR Medium" panose="020B0200000000000000" pitchFamily="34" charset="-128"/>
+              <a:ea typeface="Noto Sans KR Medium" panose="020B0200000000000000" pitchFamily="34" charset="-128"/>
+            </a:endParaRPr>
           </a:p>
           <a:p>
             <a:r>
@@ -32289,7 +32225,31 @@
                 <a:latin typeface="Noto Sans KR Medium" panose="020B0200000000000000" pitchFamily="34" charset="-128"/>
                 <a:ea typeface="Noto Sans KR Medium" panose="020B0200000000000000" pitchFamily="34" charset="-128"/>
               </a:rPr>
-              <a:t> 테스트를 진행하다 에러가 발생</a:t>
+              <a:t> 테스트를 진행하다 </a:t>
+            </a:r>
+            <a:r>
+              <a:rPr lang="ko-KR" altLang="en-US" sz="1000" dirty="0" err="1" smtClean="0">
+                <a:solidFill>
+                  <a:schemeClr val="bg1">
+                    <a:lumMod val="95000"/>
+                  </a:schemeClr>
+                </a:solidFill>
+                <a:latin typeface="Noto Sans KR Medium" panose="020B0200000000000000" pitchFamily="34" charset="-128"/>
+                <a:ea typeface="Noto Sans KR Medium" panose="020B0200000000000000" pitchFamily="34" charset="-128"/>
+              </a:rPr>
+              <a:t>에러을</a:t>
+            </a:r>
+            <a:r>
+              <a:rPr lang="ko-KR" altLang="en-US" sz="1000" dirty="0" smtClean="0">
+                <a:solidFill>
+                  <a:schemeClr val="bg1">
+                    <a:lumMod val="95000"/>
+                  </a:schemeClr>
+                </a:solidFill>
+                <a:latin typeface="Noto Sans KR Medium" panose="020B0200000000000000" pitchFamily="34" charset="-128"/>
+                <a:ea typeface="Noto Sans KR Medium" panose="020B0200000000000000" pitchFamily="34" charset="-128"/>
+              </a:rPr>
+              <a:t> 확인했습니다</a:t>
             </a:r>
             <a:r>
               <a:rPr lang="en-US" altLang="ko-KR" sz="1000" dirty="0" smtClean="0">
@@ -32303,6 +32263,15 @@
               </a:rPr>
               <a:t>.</a:t>
             </a:r>
+            <a:endParaRPr lang="en-US" altLang="ko-KR" sz="1000" dirty="0" smtClean="0">
+              <a:solidFill>
+                <a:schemeClr val="bg1">
+                  <a:lumMod val="95000"/>
+                </a:schemeClr>
+              </a:solidFill>
+              <a:latin typeface="Noto Sans KR Medium" panose="020B0200000000000000" pitchFamily="34" charset="-128"/>
+              <a:ea typeface="Noto Sans KR Medium" panose="020B0200000000000000" pitchFamily="34" charset="-128"/>
+            </a:endParaRPr>
           </a:p>
           <a:p>
             <a:endParaRPr lang="en-US" altLang="ko-KR" sz="1000" dirty="0">
@@ -32362,7 +32331,31 @@
                 <a:latin typeface="Noto Sans KR Medium" panose="020B0200000000000000" pitchFamily="34" charset="-128"/>
                 <a:ea typeface="Noto Sans KR Medium" panose="020B0200000000000000" pitchFamily="34" charset="-128"/>
               </a:rPr>
-              <a:t>초기화 중 스테이지 데이터 테이블을 참조하는 과정에서 문제가 발생</a:t>
+              <a:t>초기화 중 스테이지 데이터 테이블을 참조하는 과정에서 문제가 </a:t>
+            </a:r>
+            <a:r>
+              <a:rPr lang="ko-KR" altLang="en-US" sz="1000" dirty="0" smtClean="0">
+                <a:solidFill>
+                  <a:schemeClr val="bg1">
+                    <a:lumMod val="95000"/>
+                  </a:schemeClr>
+                </a:solidFill>
+                <a:latin typeface="Noto Sans KR Medium" panose="020B0200000000000000" pitchFamily="34" charset="-128"/>
+                <a:ea typeface="Noto Sans KR Medium" panose="020B0200000000000000" pitchFamily="34" charset="-128"/>
+              </a:rPr>
+              <a:t>발생했습니다</a:t>
+            </a:r>
+            <a:r>
+              <a:rPr lang="en-US" altLang="ko-KR" sz="1000" dirty="0" smtClean="0">
+                <a:solidFill>
+                  <a:schemeClr val="bg1">
+                    <a:lumMod val="95000"/>
+                  </a:schemeClr>
+                </a:solidFill>
+                <a:latin typeface="Noto Sans KR Medium" panose="020B0200000000000000" pitchFamily="34" charset="-128"/>
+                <a:ea typeface="Noto Sans KR Medium" panose="020B0200000000000000" pitchFamily="34" charset="-128"/>
+              </a:rPr>
+              <a:t>.</a:t>
             </a:r>
             <a:endParaRPr lang="en-US" altLang="ko-KR" sz="1000" dirty="0" smtClean="0">
               <a:solidFill>
@@ -32385,7 +32378,31 @@
                 <a:latin typeface="Noto Sans KR Medium" panose="020B0200000000000000" pitchFamily="34" charset="-128"/>
                 <a:ea typeface="Noto Sans KR Medium" panose="020B0200000000000000" pitchFamily="34" charset="-128"/>
               </a:rPr>
-              <a:t>스테이지 데이터 테이블에서 레벨 시퀀스를 참조하고 있고</a:t>
+              <a:t>스테이지 </a:t>
+            </a:r>
+            <a:r>
+              <a:rPr lang="ko-KR" altLang="en-US" sz="1000" dirty="0" smtClean="0">
+                <a:solidFill>
+                  <a:schemeClr val="bg1">
+                    <a:lumMod val="95000"/>
+                  </a:schemeClr>
+                </a:solidFill>
+                <a:latin typeface="Noto Sans KR Medium" panose="020B0200000000000000" pitchFamily="34" charset="-128"/>
+                <a:ea typeface="Noto Sans KR Medium" panose="020B0200000000000000" pitchFamily="34" charset="-128"/>
+              </a:rPr>
+              <a:t>데이터테이블에서 </a:t>
+            </a:r>
+            <a:r>
+              <a:rPr lang="ko-KR" altLang="en-US" sz="1000" dirty="0" smtClean="0">
+                <a:solidFill>
+                  <a:schemeClr val="bg1">
+                    <a:lumMod val="95000"/>
+                  </a:schemeClr>
+                </a:solidFill>
+                <a:latin typeface="Noto Sans KR Medium" panose="020B0200000000000000" pitchFamily="34" charset="-128"/>
+                <a:ea typeface="Noto Sans KR Medium" panose="020B0200000000000000" pitchFamily="34" charset="-128"/>
+              </a:rPr>
+              <a:t>레벨 시퀀스를 참조하고 있고</a:t>
             </a:r>
             <a:r>
               <a:rPr lang="en-US" altLang="ko-KR" sz="1000" dirty="0" smtClean="0">
@@ -32433,7 +32450,31 @@
                 <a:latin typeface="Noto Sans KR Medium" panose="020B0200000000000000" pitchFamily="34" charset="-128"/>
                 <a:ea typeface="Noto Sans KR Medium" panose="020B0200000000000000" pitchFamily="34" charset="-128"/>
               </a:rPr>
-              <a:t> 아직 등록되지 않아 문제가 발생</a:t>
+              <a:t> 아직 등록되지 않아 문제가 </a:t>
+            </a:r>
+            <a:r>
+              <a:rPr lang="ko-KR" altLang="en-US" sz="1000" dirty="0" smtClean="0">
+                <a:solidFill>
+                  <a:schemeClr val="bg1">
+                    <a:lumMod val="95000"/>
+                  </a:schemeClr>
+                </a:solidFill>
+                <a:latin typeface="Noto Sans KR Medium" panose="020B0200000000000000" pitchFamily="34" charset="-128"/>
+                <a:ea typeface="Noto Sans KR Medium" panose="020B0200000000000000" pitchFamily="34" charset="-128"/>
+              </a:rPr>
+              <a:t>발생했습니다</a:t>
+            </a:r>
+            <a:r>
+              <a:rPr lang="en-US" altLang="ko-KR" sz="1000" dirty="0" smtClean="0">
+                <a:solidFill>
+                  <a:schemeClr val="bg1">
+                    <a:lumMod val="95000"/>
+                  </a:schemeClr>
+                </a:solidFill>
+                <a:latin typeface="Noto Sans KR Medium" panose="020B0200000000000000" pitchFamily="34" charset="-128"/>
+                <a:ea typeface="Noto Sans KR Medium" panose="020B0200000000000000" pitchFamily="34" charset="-128"/>
+              </a:rPr>
+              <a:t>.</a:t>
             </a:r>
             <a:endParaRPr lang="en-US" altLang="ko-KR" sz="1000" dirty="0" smtClean="0">
               <a:solidFill>
@@ -32456,7 +32497,7 @@
         <p:spPr>
           <a:xfrm>
             <a:off x="454274" y="2834563"/>
-            <a:ext cx="8755039" cy="1323439"/>
+            <a:ext cx="8755039" cy="1477328"/>
           </a:xfrm>
           <a:prstGeom prst="rect">
             <a:avLst/>
@@ -32478,19 +32519,31 @@
                 <a:latin typeface="Noto Sans KR Medium" panose="020B0200000000000000" pitchFamily="34" charset="-128"/>
                 <a:ea typeface="Noto Sans KR Medium" panose="020B0200000000000000" pitchFamily="34" charset="-128"/>
               </a:rPr>
-              <a:t>등록되지 않았다는 로그를 보고</a:t>
-            </a:r>
-            <a:r>
-              <a:rPr lang="en-US" altLang="ko-KR" sz="1000" dirty="0" smtClean="0">
-                <a:solidFill>
-                  <a:schemeClr val="bg1">
-                    <a:lumMod val="95000"/>
-                  </a:schemeClr>
-                </a:solidFill>
-                <a:latin typeface="Noto Sans KR Medium" panose="020B0200000000000000" pitchFamily="34" charset="-128"/>
-                <a:ea typeface="Noto Sans KR Medium" panose="020B0200000000000000" pitchFamily="34" charset="-128"/>
-              </a:rPr>
-              <a:t>, </a:t>
+              <a:t>등록되지 않았다는 로그를 </a:t>
+            </a:r>
+            <a:r>
+              <a:rPr lang="ko-KR" altLang="en-US" sz="1000" dirty="0" smtClean="0">
+                <a:solidFill>
+                  <a:schemeClr val="bg1">
+                    <a:lumMod val="95000"/>
+                  </a:schemeClr>
+                </a:solidFill>
+                <a:latin typeface="Noto Sans KR Medium" panose="020B0200000000000000" pitchFamily="34" charset="-128"/>
+                <a:ea typeface="Noto Sans KR Medium" panose="020B0200000000000000" pitchFamily="34" charset="-128"/>
+              </a:rPr>
+              <a:t>보고</a:t>
+            </a:r>
+            <a:r>
+              <a:rPr lang="en-US" altLang="ko-KR" sz="1000" dirty="0" smtClean="0">
+                <a:solidFill>
+                  <a:schemeClr val="bg1">
+                    <a:lumMod val="95000"/>
+                  </a:schemeClr>
+                </a:solidFill>
+                <a:latin typeface="Noto Sans KR Medium" panose="020B0200000000000000" pitchFamily="34" charset="-128"/>
+                <a:ea typeface="Noto Sans KR Medium" panose="020B0200000000000000" pitchFamily="34" charset="-128"/>
+              </a:rPr>
+              <a:t> </a:t>
             </a:r>
             <a:r>
               <a:rPr lang="ko-KR" altLang="en-US" sz="1000" dirty="0" err="1" smtClean="0">
@@ -32550,20 +32603,34 @@
                 <a:latin typeface="Noto Sans KR Medium" panose="020B0200000000000000" pitchFamily="34" charset="-128"/>
                 <a:ea typeface="Noto Sans KR Medium" panose="020B0200000000000000" pitchFamily="34" charset="-128"/>
               </a:rPr>
-              <a:t> 누락이 발생했다고 생각하여</a:t>
-            </a:r>
-            <a:r>
-              <a:rPr lang="en-US" altLang="ko-KR" sz="1000" dirty="0" smtClean="0">
-                <a:solidFill>
-                  <a:schemeClr val="bg1">
-                    <a:lumMod val="95000"/>
-                  </a:schemeClr>
-                </a:solidFill>
-                <a:latin typeface="Noto Sans KR Medium" panose="020B0200000000000000" pitchFamily="34" charset="-128"/>
-                <a:ea typeface="Noto Sans KR Medium" panose="020B0200000000000000" pitchFamily="34" charset="-128"/>
-              </a:rPr>
-              <a:t>, </a:t>
-            </a:r>
+              <a:t> 누락이 발생했다고 </a:t>
+            </a:r>
+            <a:r>
+              <a:rPr lang="ko-KR" altLang="en-US" sz="1000" dirty="0" smtClean="0">
+                <a:solidFill>
+                  <a:schemeClr val="bg1">
+                    <a:lumMod val="95000"/>
+                  </a:schemeClr>
+                </a:solidFill>
+                <a:latin typeface="Noto Sans KR Medium" panose="020B0200000000000000" pitchFamily="34" charset="-128"/>
+                <a:ea typeface="Noto Sans KR Medium" panose="020B0200000000000000" pitchFamily="34" charset="-128"/>
+              </a:rPr>
+              <a:t>생각했습니다</a:t>
+            </a:r>
+            <a:r>
+              <a:rPr lang="en-US" altLang="ko-KR" sz="1000" dirty="0" smtClean="0">
+                <a:solidFill>
+                  <a:schemeClr val="bg1">
+                    <a:lumMod val="95000"/>
+                  </a:schemeClr>
+                </a:solidFill>
+                <a:latin typeface="Noto Sans KR Medium" panose="020B0200000000000000" pitchFamily="34" charset="-128"/>
+                <a:ea typeface="Noto Sans KR Medium" panose="020B0200000000000000" pitchFamily="34" charset="-128"/>
+              </a:rPr>
+              <a:t>.</a:t>
+            </a:r>
+          </a:p>
+          <a:p>
             <a:r>
               <a:rPr lang="ko-KR" altLang="en-US" sz="1000" dirty="0" smtClean="0">
                 <a:solidFill>
@@ -32610,7 +32677,19 @@
                 <a:latin typeface="Noto Sans KR Medium" panose="020B0200000000000000" pitchFamily="34" charset="-128"/>
                 <a:ea typeface="Noto Sans KR Medium" panose="020B0200000000000000" pitchFamily="34" charset="-128"/>
               </a:rPr>
-              <a:t>패키징</a:t>
+              <a:t>패키</a:t>
+            </a:r>
+            <a:r>
+              <a:rPr lang="ko-KR" altLang="en-US" sz="1000" dirty="0" err="1" smtClean="0">
+                <a:solidFill>
+                  <a:schemeClr val="bg1">
+                    <a:lumMod val="95000"/>
+                  </a:schemeClr>
+                </a:solidFill>
+                <a:latin typeface="Noto Sans KR Medium" panose="020B0200000000000000" pitchFamily="34" charset="-128"/>
+                <a:ea typeface="Noto Sans KR Medium" panose="020B0200000000000000" pitchFamily="34" charset="-128"/>
+              </a:rPr>
+              <a:t>징</a:t>
             </a:r>
             <a:r>
               <a:rPr lang="ko-KR" altLang="en-US" sz="1000" dirty="0" smtClean="0">
@@ -32634,7 +32713,19 @@
                 <a:latin typeface="Noto Sans KR Medium" panose="020B0200000000000000" pitchFamily="34" charset="-128"/>
                 <a:ea typeface="Noto Sans KR Medium" panose="020B0200000000000000" pitchFamily="34" charset="-128"/>
               </a:rPr>
-              <a:t>, </a:t>
+              <a:t>,</a:t>
+            </a:r>
+            <a:r>
+              <a:rPr lang="en-US" altLang="ko-KR" sz="1000" dirty="0" smtClean="0">
+                <a:solidFill>
+                  <a:schemeClr val="bg1">
+                    <a:lumMod val="95000"/>
+                  </a:schemeClr>
+                </a:solidFill>
+                <a:latin typeface="Noto Sans KR Medium" panose="020B0200000000000000" pitchFamily="34" charset="-128"/>
+                <a:ea typeface="Noto Sans KR Medium" panose="020B0200000000000000" pitchFamily="34" charset="-128"/>
+              </a:rPr>
+              <a:t> </a:t>
             </a:r>
             <a:r>
               <a:rPr lang="ko-KR" altLang="en-US" sz="1000" dirty="0" smtClean="0">
@@ -32670,7 +32761,55 @@
                 <a:latin typeface="Noto Sans KR Medium" panose="020B0200000000000000" pitchFamily="34" charset="-128"/>
                 <a:ea typeface="Noto Sans KR Medium" panose="020B0200000000000000" pitchFamily="34" charset="-128"/>
               </a:rPr>
-              <a:t> 반드시 포함하도록 설정</a:t>
+              <a:t> 반드시 포함하도록 </a:t>
+            </a:r>
+            <a:r>
+              <a:rPr lang="ko-KR" altLang="en-US" sz="1000" dirty="0" smtClean="0">
+                <a:solidFill>
+                  <a:schemeClr val="bg1">
+                    <a:lumMod val="95000"/>
+                  </a:schemeClr>
+                </a:solidFill>
+                <a:latin typeface="Noto Sans KR Medium" panose="020B0200000000000000" pitchFamily="34" charset="-128"/>
+                <a:ea typeface="Noto Sans KR Medium" panose="020B0200000000000000" pitchFamily="34" charset="-128"/>
+              </a:rPr>
+              <a:t>설정하고 다시 </a:t>
+            </a:r>
+            <a:r>
+              <a:rPr lang="ko-KR" altLang="en-US" sz="1000" dirty="0" err="1" smtClean="0">
+                <a:solidFill>
+                  <a:schemeClr val="bg1">
+                    <a:lumMod val="95000"/>
+                  </a:schemeClr>
+                </a:solidFill>
+                <a:latin typeface="Noto Sans KR Medium" panose="020B0200000000000000" pitchFamily="34" charset="-128"/>
+                <a:ea typeface="Noto Sans KR Medium" panose="020B0200000000000000" pitchFamily="34" charset="-128"/>
+              </a:rPr>
+              <a:t>빌드를</a:t>
+            </a:r>
+            <a:r>
+              <a:rPr lang="ko-KR" altLang="en-US" sz="1000" dirty="0" smtClean="0">
+                <a:solidFill>
+                  <a:schemeClr val="bg1">
+                    <a:lumMod val="95000"/>
+                  </a:schemeClr>
+                </a:solidFill>
+                <a:latin typeface="Noto Sans KR Medium" panose="020B0200000000000000" pitchFamily="34" charset="-128"/>
+                <a:ea typeface="Noto Sans KR Medium" panose="020B0200000000000000" pitchFamily="34" charset="-128"/>
+              </a:rPr>
+              <a:t> 시도했습니다</a:t>
+            </a:r>
+            <a:r>
+              <a:rPr lang="en-US" altLang="ko-KR" sz="1000" dirty="0" smtClean="0">
+                <a:solidFill>
+                  <a:schemeClr val="bg1">
+                    <a:lumMod val="95000"/>
+                  </a:schemeClr>
+                </a:solidFill>
+                <a:latin typeface="Noto Sans KR Medium" panose="020B0200000000000000" pitchFamily="34" charset="-128"/>
+                <a:ea typeface="Noto Sans KR Medium" panose="020B0200000000000000" pitchFamily="34" charset="-128"/>
+              </a:rPr>
+              <a:t>.</a:t>
             </a:r>
             <a:endParaRPr lang="en-US" altLang="ko-KR" sz="1000" dirty="0" smtClean="0">
               <a:solidFill>
@@ -32717,31 +32856,67 @@
                 <a:latin typeface="Noto Sans KR Medium" panose="020B0200000000000000" pitchFamily="34" charset="-128"/>
                 <a:ea typeface="Noto Sans KR Medium" panose="020B0200000000000000" pitchFamily="34" charset="-128"/>
               </a:rPr>
-              <a:t> 실패했고</a:t>
-            </a:r>
-            <a:r>
-              <a:rPr lang="en-US" altLang="ko-KR" sz="1000" dirty="0" smtClean="0">
-                <a:solidFill>
-                  <a:schemeClr val="bg1">
-                    <a:lumMod val="95000"/>
-                  </a:schemeClr>
-                </a:solidFill>
-                <a:latin typeface="Noto Sans KR Medium" panose="020B0200000000000000" pitchFamily="34" charset="-128"/>
-                <a:ea typeface="Noto Sans KR Medium" panose="020B0200000000000000" pitchFamily="34" charset="-128"/>
-              </a:rPr>
-              <a:t>, </a:t>
-            </a:r>
-            <a:r>
-              <a:rPr lang="ko-KR" altLang="en-US" sz="1000" dirty="0" smtClean="0">
-                <a:solidFill>
-                  <a:schemeClr val="bg1">
-                    <a:lumMod val="95000"/>
-                  </a:schemeClr>
-                </a:solidFill>
-                <a:latin typeface="Noto Sans KR Medium" panose="020B0200000000000000" pitchFamily="34" charset="-128"/>
-                <a:ea typeface="Noto Sans KR Medium" panose="020B0200000000000000" pitchFamily="34" charset="-128"/>
-              </a:rPr>
-              <a:t>동일한 에러 로그가 출력</a:t>
+              <a:t> </a:t>
+            </a:r>
+            <a:r>
+              <a:rPr lang="ko-KR" altLang="en-US" sz="1000" dirty="0" smtClean="0">
+                <a:solidFill>
+                  <a:schemeClr val="bg1">
+                    <a:lumMod val="95000"/>
+                  </a:schemeClr>
+                </a:solidFill>
+                <a:latin typeface="Noto Sans KR Medium" panose="020B0200000000000000" pitchFamily="34" charset="-128"/>
+                <a:ea typeface="Noto Sans KR Medium" panose="020B0200000000000000" pitchFamily="34" charset="-128"/>
+              </a:rPr>
+              <a:t>실패했고</a:t>
+            </a:r>
+            <a:r>
+              <a:rPr lang="en-US" altLang="ko-KR" sz="1000" dirty="0" smtClean="0">
+                <a:solidFill>
+                  <a:schemeClr val="bg1">
+                    <a:lumMod val="95000"/>
+                  </a:schemeClr>
+                </a:solidFill>
+                <a:latin typeface="Noto Sans KR Medium" panose="020B0200000000000000" pitchFamily="34" charset="-128"/>
+                <a:ea typeface="Noto Sans KR Medium" panose="020B0200000000000000" pitchFamily="34" charset="-128"/>
+              </a:rPr>
+              <a:t> </a:t>
+            </a:r>
+            <a:r>
+              <a:rPr lang="ko-KR" altLang="en-US" sz="1000" dirty="0" smtClean="0">
+                <a:solidFill>
+                  <a:schemeClr val="bg1">
+                    <a:lumMod val="95000"/>
+                  </a:schemeClr>
+                </a:solidFill>
+                <a:latin typeface="Noto Sans KR Medium" panose="020B0200000000000000" pitchFamily="34" charset="-128"/>
+                <a:ea typeface="Noto Sans KR Medium" panose="020B0200000000000000" pitchFamily="34" charset="-128"/>
+              </a:rPr>
+              <a:t>동일한 에러 로그가 </a:t>
+            </a:r>
+            <a:r>
+              <a:rPr lang="ko-KR" altLang="en-US" sz="1000" dirty="0" smtClean="0">
+                <a:solidFill>
+                  <a:schemeClr val="bg1">
+                    <a:lumMod val="95000"/>
+                  </a:schemeClr>
+                </a:solidFill>
+                <a:latin typeface="Noto Sans KR Medium" panose="020B0200000000000000" pitchFamily="34" charset="-128"/>
+                <a:ea typeface="Noto Sans KR Medium" panose="020B0200000000000000" pitchFamily="34" charset="-128"/>
+              </a:rPr>
+              <a:t>출력</a:t>
+            </a:r>
+            <a:r>
+              <a:rPr lang="ko-KR" altLang="en-US" sz="1000" dirty="0" smtClean="0">
+                <a:solidFill>
+                  <a:schemeClr val="bg1">
+                    <a:lumMod val="95000"/>
+                  </a:schemeClr>
+                </a:solidFill>
+                <a:latin typeface="Noto Sans KR Medium" panose="020B0200000000000000" pitchFamily="34" charset="-128"/>
+                <a:ea typeface="Noto Sans KR Medium" panose="020B0200000000000000" pitchFamily="34" charset="-128"/>
+              </a:rPr>
+              <a:t>됐습니다</a:t>
             </a:r>
             <a:r>
               <a:rPr lang="en-US" altLang="ko-KR" sz="1000" dirty="0" smtClean="0">
@@ -32755,6 +32930,15 @@
               </a:rPr>
               <a:t>.</a:t>
             </a:r>
+            <a:endParaRPr lang="en-US" altLang="ko-KR" sz="1000" dirty="0" smtClean="0">
+              <a:solidFill>
+                <a:schemeClr val="bg1">
+                  <a:lumMod val="95000"/>
+                </a:schemeClr>
+              </a:solidFill>
+              <a:latin typeface="Noto Sans KR Medium" panose="020B0200000000000000" pitchFamily="34" charset="-128"/>
+              <a:ea typeface="Noto Sans KR Medium" panose="020B0200000000000000" pitchFamily="34" charset="-128"/>
+            </a:endParaRPr>
           </a:p>
           <a:p>
             <a:endParaRPr lang="en-US" altLang="ko-KR" sz="1000" dirty="0">
@@ -32790,7 +32974,332 @@
                 <a:latin typeface="Noto Sans KR Medium" panose="020B0200000000000000" pitchFamily="34" charset="-128"/>
                 <a:ea typeface="Noto Sans KR Medium" panose="020B0200000000000000" pitchFamily="34" charset="-128"/>
               </a:rPr>
-              <a:t> 누락이 아니라 데이터테이블에서 레벨 시퀀스를 직접 참조하기 때문에 발생한 것이라 판단</a:t>
+              <a:t> 누락이 아니라 데이터테이블에서 레벨 시퀀스를 직접 참조하기 때문에 발생한 것이라 </a:t>
+            </a:r>
+            <a:r>
+              <a:rPr lang="ko-KR" altLang="en-US" sz="1000" dirty="0" smtClean="0">
+                <a:solidFill>
+                  <a:schemeClr val="bg1">
+                    <a:lumMod val="95000"/>
+                  </a:schemeClr>
+                </a:solidFill>
+                <a:latin typeface="Noto Sans KR Medium" panose="020B0200000000000000" pitchFamily="34" charset="-128"/>
+                <a:ea typeface="Noto Sans KR Medium" panose="020B0200000000000000" pitchFamily="34" charset="-128"/>
+              </a:rPr>
+              <a:t>판단</a:t>
+            </a:r>
+            <a:r>
+              <a:rPr lang="ko-KR" altLang="en-US" sz="1000" dirty="0" smtClean="0">
+                <a:solidFill>
+                  <a:schemeClr val="bg1">
+                    <a:lumMod val="95000"/>
+                  </a:schemeClr>
+                </a:solidFill>
+                <a:latin typeface="Noto Sans KR Medium" panose="020B0200000000000000" pitchFamily="34" charset="-128"/>
+                <a:ea typeface="Noto Sans KR Medium" panose="020B0200000000000000" pitchFamily="34" charset="-128"/>
+              </a:rPr>
+              <a:t>했고</a:t>
+            </a:r>
+            <a:endParaRPr lang="en-US" altLang="ko-KR" sz="1000" dirty="0" smtClean="0">
+              <a:solidFill>
+                <a:schemeClr val="bg1">
+                  <a:lumMod val="95000"/>
+                </a:schemeClr>
+              </a:solidFill>
+              <a:latin typeface="Noto Sans KR Medium" panose="020B0200000000000000" pitchFamily="34" charset="-128"/>
+              <a:ea typeface="Noto Sans KR Medium" panose="020B0200000000000000" pitchFamily="34" charset="-128"/>
+            </a:endParaRPr>
+          </a:p>
+          <a:p>
+            <a:r>
+              <a:rPr lang="ko-KR" altLang="en-US" sz="1000" dirty="0">
+                <a:solidFill>
+                  <a:schemeClr val="bg1">
+                    <a:lumMod val="95000"/>
+                  </a:schemeClr>
+                </a:solidFill>
+                <a:latin typeface="Noto Sans KR Medium" panose="020B0200000000000000" pitchFamily="34" charset="-128"/>
+                <a:ea typeface="Noto Sans KR Medium" panose="020B0200000000000000" pitchFamily="34" charset="-128"/>
+              </a:rPr>
+              <a:t>검증을 위해서 </a:t>
+            </a:r>
+            <a:r>
+              <a:rPr lang="en-US" altLang="ko-KR" sz="1000" dirty="0" smtClean="0">
+                <a:solidFill>
+                  <a:schemeClr val="bg1">
+                    <a:lumMod val="95000"/>
+                  </a:schemeClr>
+                </a:solidFill>
+                <a:latin typeface="Noto Sans KR Medium" panose="020B0200000000000000" pitchFamily="34" charset="-128"/>
+                <a:ea typeface="Noto Sans KR Medium" panose="020B0200000000000000" pitchFamily="34" charset="-128"/>
+              </a:rPr>
+              <a:t> </a:t>
+            </a:r>
+            <a:r>
+              <a:rPr lang="ko-KR" altLang="en-US" sz="1000" dirty="0" smtClean="0">
+                <a:solidFill>
+                  <a:schemeClr val="bg1">
+                    <a:lumMod val="95000"/>
+                  </a:schemeClr>
+                </a:solidFill>
+                <a:latin typeface="Noto Sans KR Medium" panose="020B0200000000000000" pitchFamily="34" charset="-128"/>
+                <a:ea typeface="Noto Sans KR Medium" panose="020B0200000000000000" pitchFamily="34" charset="-128"/>
+              </a:rPr>
+              <a:t>데이터테이블에서 레벨 시퀀스를 </a:t>
+            </a:r>
+            <a:r>
+              <a:rPr lang="en-US" altLang="ko-KR" sz="1000" dirty="0" err="1" smtClean="0">
+                <a:solidFill>
+                  <a:schemeClr val="bg1">
+                    <a:lumMod val="95000"/>
+                  </a:schemeClr>
+                </a:solidFill>
+                <a:latin typeface="Noto Sans KR Medium" panose="020B0200000000000000" pitchFamily="34" charset="-128"/>
+                <a:ea typeface="Noto Sans KR Medium" panose="020B0200000000000000" pitchFamily="34" charset="-128"/>
+              </a:rPr>
+              <a:t>TObjectPtr</a:t>
+            </a:r>
+            <a:r>
+              <a:rPr lang="ko-KR" altLang="en-US" sz="1000" dirty="0" smtClean="0">
+                <a:solidFill>
+                  <a:schemeClr val="bg1">
+                    <a:lumMod val="95000"/>
+                  </a:schemeClr>
+                </a:solidFill>
+                <a:latin typeface="Noto Sans KR Medium" panose="020B0200000000000000" pitchFamily="34" charset="-128"/>
+                <a:ea typeface="Noto Sans KR Medium" panose="020B0200000000000000" pitchFamily="34" charset="-128"/>
+              </a:rPr>
+              <a:t>이 아닌 </a:t>
+            </a:r>
+            <a:r>
+              <a:rPr lang="en-US" altLang="ko-KR" sz="1000" dirty="0" err="1" smtClean="0">
+                <a:solidFill>
+                  <a:schemeClr val="bg1">
+                    <a:lumMod val="95000"/>
+                  </a:schemeClr>
+                </a:solidFill>
+                <a:latin typeface="Noto Sans KR Medium" panose="020B0200000000000000" pitchFamily="34" charset="-128"/>
+                <a:ea typeface="Noto Sans KR Medium" panose="020B0200000000000000" pitchFamily="34" charset="-128"/>
+              </a:rPr>
+              <a:t>TSoftObjectPtr</a:t>
+            </a:r>
+            <a:r>
+              <a:rPr lang="ko-KR" altLang="en-US" sz="1000" dirty="0" smtClean="0">
+                <a:solidFill>
+                  <a:schemeClr val="bg1">
+                    <a:lumMod val="95000"/>
+                  </a:schemeClr>
+                </a:solidFill>
+                <a:latin typeface="Noto Sans KR Medium" panose="020B0200000000000000" pitchFamily="34" charset="-128"/>
+                <a:ea typeface="Noto Sans KR Medium" panose="020B0200000000000000" pitchFamily="34" charset="-128"/>
+              </a:rPr>
+              <a:t>로 </a:t>
+            </a:r>
+            <a:r>
+              <a:rPr lang="ko-KR" altLang="en-US" sz="1000" dirty="0" smtClean="0">
+                <a:solidFill>
+                  <a:schemeClr val="bg1">
+                    <a:lumMod val="95000"/>
+                  </a:schemeClr>
+                </a:solidFill>
+                <a:latin typeface="Noto Sans KR Medium" panose="020B0200000000000000" pitchFamily="34" charset="-128"/>
+                <a:ea typeface="Noto Sans KR Medium" panose="020B0200000000000000" pitchFamily="34" charset="-128"/>
+              </a:rPr>
+              <a:t>변경했습니다</a:t>
+            </a:r>
+            <a:r>
+              <a:rPr lang="en-US" altLang="ko-KR" sz="1000" dirty="0" smtClean="0">
+                <a:solidFill>
+                  <a:schemeClr val="bg1">
+                    <a:lumMod val="95000"/>
+                  </a:schemeClr>
+                </a:solidFill>
+                <a:latin typeface="Noto Sans KR Medium" panose="020B0200000000000000" pitchFamily="34" charset="-128"/>
+                <a:ea typeface="Noto Sans KR Medium" panose="020B0200000000000000" pitchFamily="34" charset="-128"/>
+              </a:rPr>
+              <a:t>. </a:t>
+            </a:r>
+            <a:r>
+              <a:rPr lang="en-US" altLang="ko-KR" sz="1000" dirty="0" smtClean="0">
+                <a:solidFill>
+                  <a:schemeClr val="bg1">
+                    <a:lumMod val="95000"/>
+                  </a:schemeClr>
+                </a:solidFill>
+                <a:latin typeface="Noto Sans KR Medium" panose="020B0200000000000000" pitchFamily="34" charset="-128"/>
+                <a:ea typeface="Noto Sans KR Medium" panose="020B0200000000000000" pitchFamily="34" charset="-128"/>
+              </a:rPr>
+              <a:t>(</a:t>
+            </a:r>
+            <a:r>
+              <a:rPr lang="ko-KR" altLang="en-US" sz="1000" dirty="0" smtClean="0">
+                <a:solidFill>
+                  <a:schemeClr val="bg1">
+                    <a:lumMod val="95000"/>
+                  </a:schemeClr>
+                </a:solidFill>
+                <a:latin typeface="Noto Sans KR Medium" panose="020B0200000000000000" pitchFamily="34" charset="-128"/>
+                <a:ea typeface="Noto Sans KR Medium" panose="020B0200000000000000" pitchFamily="34" charset="-128"/>
+              </a:rPr>
+              <a:t>하드 </a:t>
+            </a:r>
+            <a:r>
+              <a:rPr lang="ko-KR" altLang="en-US" sz="1000" dirty="0" err="1" smtClean="0">
+                <a:solidFill>
+                  <a:schemeClr val="bg1">
+                    <a:lumMod val="95000"/>
+                  </a:schemeClr>
+                </a:solidFill>
+                <a:latin typeface="Noto Sans KR Medium" panose="020B0200000000000000" pitchFamily="34" charset="-128"/>
+                <a:ea typeface="Noto Sans KR Medium" panose="020B0200000000000000" pitchFamily="34" charset="-128"/>
+              </a:rPr>
+              <a:t>레퍼런스</a:t>
+            </a:r>
+            <a:r>
+              <a:rPr lang="ko-KR" altLang="en-US" sz="1000" dirty="0" smtClean="0">
+                <a:solidFill>
+                  <a:schemeClr val="bg1">
+                    <a:lumMod val="95000"/>
+                  </a:schemeClr>
+                </a:solidFill>
+                <a:latin typeface="Noto Sans KR Medium" panose="020B0200000000000000" pitchFamily="34" charset="-128"/>
+                <a:ea typeface="Noto Sans KR Medium" panose="020B0200000000000000" pitchFamily="34" charset="-128"/>
+              </a:rPr>
+              <a:t> </a:t>
+            </a:r>
+            <a:r>
+              <a:rPr lang="en-US" altLang="ko-KR" sz="1000" dirty="0" smtClean="0">
+                <a:solidFill>
+                  <a:schemeClr val="bg1">
+                    <a:lumMod val="95000"/>
+                  </a:schemeClr>
+                </a:solidFill>
+                <a:latin typeface="Noto Sans KR Medium" panose="020B0200000000000000" pitchFamily="34" charset="-128"/>
+                <a:ea typeface="Noto Sans KR Medium" panose="020B0200000000000000" pitchFamily="34" charset="-128"/>
+              </a:rPr>
+              <a:t>-&gt; </a:t>
+            </a:r>
+            <a:r>
+              <a:rPr lang="ko-KR" altLang="en-US" sz="1000" dirty="0" smtClean="0">
+                <a:solidFill>
+                  <a:schemeClr val="bg1">
+                    <a:lumMod val="95000"/>
+                  </a:schemeClr>
+                </a:solidFill>
+                <a:latin typeface="Noto Sans KR Medium" panose="020B0200000000000000" pitchFamily="34" charset="-128"/>
+                <a:ea typeface="Noto Sans KR Medium" panose="020B0200000000000000" pitchFamily="34" charset="-128"/>
+              </a:rPr>
+              <a:t>소프트 </a:t>
+            </a:r>
+            <a:r>
+              <a:rPr lang="ko-KR" altLang="en-US" sz="1000" dirty="0" err="1" smtClean="0">
+                <a:solidFill>
+                  <a:schemeClr val="bg1">
+                    <a:lumMod val="95000"/>
+                  </a:schemeClr>
+                </a:solidFill>
+                <a:latin typeface="Noto Sans KR Medium" panose="020B0200000000000000" pitchFamily="34" charset="-128"/>
+                <a:ea typeface="Noto Sans KR Medium" panose="020B0200000000000000" pitchFamily="34" charset="-128"/>
+              </a:rPr>
+              <a:t>레퍼런스로</a:t>
+            </a:r>
+            <a:r>
+              <a:rPr lang="ko-KR" altLang="en-US" sz="1000" dirty="0" smtClean="0">
+                <a:solidFill>
+                  <a:schemeClr val="bg1">
+                    <a:lumMod val="95000"/>
+                  </a:schemeClr>
+                </a:solidFill>
+                <a:latin typeface="Noto Sans KR Medium" panose="020B0200000000000000" pitchFamily="34" charset="-128"/>
+                <a:ea typeface="Noto Sans KR Medium" panose="020B0200000000000000" pitchFamily="34" charset="-128"/>
+              </a:rPr>
+              <a:t> 변경</a:t>
+            </a:r>
+            <a:r>
+              <a:rPr lang="en-US" altLang="ko-KR" sz="1000" dirty="0" smtClean="0">
+                <a:solidFill>
+                  <a:schemeClr val="bg1">
+                    <a:lumMod val="95000"/>
+                  </a:schemeClr>
+                </a:solidFill>
+                <a:latin typeface="Noto Sans KR Medium" panose="020B0200000000000000" pitchFamily="34" charset="-128"/>
+                <a:ea typeface="Noto Sans KR Medium" panose="020B0200000000000000" pitchFamily="34" charset="-128"/>
+              </a:rPr>
+              <a:t>)</a:t>
+            </a:r>
+          </a:p>
+          <a:p>
+            <a:r>
+              <a:rPr lang="ko-KR" altLang="en-US" sz="1000" dirty="0" smtClean="0">
+                <a:solidFill>
+                  <a:schemeClr val="bg1">
+                    <a:lumMod val="95000"/>
+                  </a:schemeClr>
+                </a:solidFill>
+                <a:latin typeface="Noto Sans KR Medium" panose="020B0200000000000000" pitchFamily="34" charset="-128"/>
+                <a:ea typeface="Noto Sans KR Medium" panose="020B0200000000000000" pitchFamily="34" charset="-128"/>
+              </a:rPr>
+              <a:t>그 후 </a:t>
+            </a:r>
+            <a:r>
+              <a:rPr lang="ko-KR" altLang="en-US" sz="1000" dirty="0" smtClean="0">
+                <a:solidFill>
+                  <a:schemeClr val="bg1">
+                    <a:lumMod val="95000"/>
+                  </a:schemeClr>
+                </a:solidFill>
+                <a:latin typeface="Noto Sans KR Medium" panose="020B0200000000000000" pitchFamily="34" charset="-128"/>
+                <a:ea typeface="Noto Sans KR Medium" panose="020B0200000000000000" pitchFamily="34" charset="-128"/>
+              </a:rPr>
+              <a:t>다시 </a:t>
+            </a:r>
+            <a:r>
+              <a:rPr lang="ko-KR" altLang="en-US" sz="1000" dirty="0" err="1" smtClean="0">
+                <a:solidFill>
+                  <a:schemeClr val="bg1">
+                    <a:lumMod val="95000"/>
+                  </a:schemeClr>
+                </a:solidFill>
+                <a:latin typeface="Noto Sans KR Medium" panose="020B0200000000000000" pitchFamily="34" charset="-128"/>
+                <a:ea typeface="Noto Sans KR Medium" panose="020B0200000000000000" pitchFamily="34" charset="-128"/>
+              </a:rPr>
+              <a:t>빌드</a:t>
+            </a:r>
+            <a:r>
+              <a:rPr lang="ko-KR" altLang="en-US" sz="1000" dirty="0" smtClean="0">
+                <a:solidFill>
+                  <a:schemeClr val="bg1">
+                    <a:lumMod val="95000"/>
+                  </a:schemeClr>
+                </a:solidFill>
+                <a:latin typeface="Noto Sans KR Medium" panose="020B0200000000000000" pitchFamily="34" charset="-128"/>
+                <a:ea typeface="Noto Sans KR Medium" panose="020B0200000000000000" pitchFamily="34" charset="-128"/>
+              </a:rPr>
+              <a:t> 시도에서 성공한 것을 </a:t>
+            </a:r>
+            <a:r>
+              <a:rPr lang="ko-KR" altLang="en-US" sz="1000" dirty="0" smtClean="0">
+                <a:solidFill>
+                  <a:schemeClr val="bg1">
+                    <a:lumMod val="95000"/>
+                  </a:schemeClr>
+                </a:solidFill>
+                <a:latin typeface="Noto Sans KR Medium" panose="020B0200000000000000" pitchFamily="34" charset="-128"/>
+                <a:ea typeface="Noto Sans KR Medium" panose="020B0200000000000000" pitchFamily="34" charset="-128"/>
+              </a:rPr>
+              <a:t>확인</a:t>
+            </a:r>
+            <a:r>
+              <a:rPr lang="ko-KR" altLang="en-US" sz="1000" dirty="0" smtClean="0">
+                <a:solidFill>
+                  <a:schemeClr val="bg1">
+                    <a:lumMod val="95000"/>
+                  </a:schemeClr>
+                </a:solidFill>
+                <a:latin typeface="Noto Sans KR Medium" panose="020B0200000000000000" pitchFamily="34" charset="-128"/>
+                <a:ea typeface="Noto Sans KR Medium" panose="020B0200000000000000" pitchFamily="34" charset="-128"/>
+              </a:rPr>
+              <a:t>했습니다</a:t>
             </a:r>
             <a:r>
               <a:rPr lang="en-US" altLang="ko-KR" sz="1000" dirty="0" smtClean="0">
@@ -32804,262 +33313,15 @@
               </a:rPr>
               <a:t>.</a:t>
             </a:r>
-          </a:p>
-          <a:p>
-            <a:r>
-              <a:rPr lang="ko-KR" altLang="en-US" sz="1000" dirty="0">
-                <a:solidFill>
-                  <a:schemeClr val="bg1">
-                    <a:lumMod val="95000"/>
-                  </a:schemeClr>
-                </a:solidFill>
-                <a:latin typeface="Noto Sans KR Medium" panose="020B0200000000000000" pitchFamily="34" charset="-128"/>
-                <a:ea typeface="Noto Sans KR Medium" panose="020B0200000000000000" pitchFamily="34" charset="-128"/>
-              </a:rPr>
-              <a:t>검증을 위해서 </a:t>
-            </a:r>
-            <a:r>
-              <a:rPr lang="en-US" altLang="ko-KR" sz="1000" dirty="0" smtClean="0">
-                <a:solidFill>
-                  <a:schemeClr val="bg1">
-                    <a:lumMod val="95000"/>
-                  </a:schemeClr>
-                </a:solidFill>
-                <a:latin typeface="Noto Sans KR Medium" panose="020B0200000000000000" pitchFamily="34" charset="-128"/>
-                <a:ea typeface="Noto Sans KR Medium" panose="020B0200000000000000" pitchFamily="34" charset="-128"/>
-              </a:rPr>
-              <a:t> </a:t>
-            </a:r>
-            <a:r>
-              <a:rPr lang="ko-KR" altLang="en-US" sz="1000" dirty="0" smtClean="0">
-                <a:solidFill>
-                  <a:schemeClr val="bg1">
-                    <a:lumMod val="95000"/>
-                  </a:schemeClr>
-                </a:solidFill>
-                <a:latin typeface="Noto Sans KR Medium" panose="020B0200000000000000" pitchFamily="34" charset="-128"/>
-                <a:ea typeface="Noto Sans KR Medium" panose="020B0200000000000000" pitchFamily="34" charset="-128"/>
-              </a:rPr>
-              <a:t>데이터테이블에서 레벨 시퀀스를 </a:t>
-            </a:r>
-            <a:r>
-              <a:rPr lang="en-US" altLang="ko-KR" sz="1000" dirty="0" err="1" smtClean="0">
-                <a:solidFill>
-                  <a:schemeClr val="bg1">
-                    <a:lumMod val="95000"/>
-                  </a:schemeClr>
-                </a:solidFill>
-                <a:latin typeface="Noto Sans KR Medium" panose="020B0200000000000000" pitchFamily="34" charset="-128"/>
-                <a:ea typeface="Noto Sans KR Medium" panose="020B0200000000000000" pitchFamily="34" charset="-128"/>
-              </a:rPr>
-              <a:t>TObjectPtr</a:t>
-            </a:r>
-            <a:r>
-              <a:rPr lang="ko-KR" altLang="en-US" sz="1000" dirty="0" smtClean="0">
-                <a:solidFill>
-                  <a:schemeClr val="bg1">
-                    <a:lumMod val="95000"/>
-                  </a:schemeClr>
-                </a:solidFill>
-                <a:latin typeface="Noto Sans KR Medium" panose="020B0200000000000000" pitchFamily="34" charset="-128"/>
-                <a:ea typeface="Noto Sans KR Medium" panose="020B0200000000000000" pitchFamily="34" charset="-128"/>
-              </a:rPr>
-              <a:t>이 아닌 </a:t>
-            </a:r>
-            <a:r>
-              <a:rPr lang="en-US" altLang="ko-KR" sz="1000" dirty="0" err="1" smtClean="0">
-                <a:solidFill>
-                  <a:schemeClr val="bg1">
-                    <a:lumMod val="95000"/>
-                  </a:schemeClr>
-                </a:solidFill>
-                <a:latin typeface="Noto Sans KR Medium" panose="020B0200000000000000" pitchFamily="34" charset="-128"/>
-                <a:ea typeface="Noto Sans KR Medium" panose="020B0200000000000000" pitchFamily="34" charset="-128"/>
-              </a:rPr>
-              <a:t>TSoftObjectPtr</a:t>
-            </a:r>
-            <a:r>
-              <a:rPr lang="ko-KR" altLang="en-US" sz="1000" dirty="0" smtClean="0">
-                <a:solidFill>
-                  <a:schemeClr val="bg1">
-                    <a:lumMod val="95000"/>
-                  </a:schemeClr>
-                </a:solidFill>
-                <a:latin typeface="Noto Sans KR Medium" panose="020B0200000000000000" pitchFamily="34" charset="-128"/>
-                <a:ea typeface="Noto Sans KR Medium" panose="020B0200000000000000" pitchFamily="34" charset="-128"/>
-              </a:rPr>
-              <a:t>로 설정</a:t>
-            </a:r>
-            <a:r>
-              <a:rPr lang="en-US" altLang="ko-KR" sz="1000" dirty="0" smtClean="0">
-                <a:solidFill>
-                  <a:schemeClr val="bg1">
-                    <a:lumMod val="95000"/>
-                  </a:schemeClr>
-                </a:solidFill>
-                <a:latin typeface="Noto Sans KR Medium" panose="020B0200000000000000" pitchFamily="34" charset="-128"/>
-                <a:ea typeface="Noto Sans KR Medium" panose="020B0200000000000000" pitchFamily="34" charset="-128"/>
-              </a:rPr>
-              <a:t>. (</a:t>
-            </a:r>
-            <a:r>
-              <a:rPr lang="ko-KR" altLang="en-US" sz="1000" dirty="0" smtClean="0">
-                <a:solidFill>
-                  <a:schemeClr val="bg1">
-                    <a:lumMod val="95000"/>
-                  </a:schemeClr>
-                </a:solidFill>
-                <a:latin typeface="Noto Sans KR Medium" panose="020B0200000000000000" pitchFamily="34" charset="-128"/>
-                <a:ea typeface="Noto Sans KR Medium" panose="020B0200000000000000" pitchFamily="34" charset="-128"/>
-              </a:rPr>
-              <a:t>하드 </a:t>
-            </a:r>
-            <a:r>
-              <a:rPr lang="ko-KR" altLang="en-US" sz="1000" dirty="0" err="1" smtClean="0">
-                <a:solidFill>
-                  <a:schemeClr val="bg1">
-                    <a:lumMod val="95000"/>
-                  </a:schemeClr>
-                </a:solidFill>
-                <a:latin typeface="Noto Sans KR Medium" panose="020B0200000000000000" pitchFamily="34" charset="-128"/>
-                <a:ea typeface="Noto Sans KR Medium" panose="020B0200000000000000" pitchFamily="34" charset="-128"/>
-              </a:rPr>
-              <a:t>레퍼런스</a:t>
-            </a:r>
-            <a:r>
-              <a:rPr lang="ko-KR" altLang="en-US" sz="1000" dirty="0" smtClean="0">
-                <a:solidFill>
-                  <a:schemeClr val="bg1">
-                    <a:lumMod val="95000"/>
-                  </a:schemeClr>
-                </a:solidFill>
-                <a:latin typeface="Noto Sans KR Medium" panose="020B0200000000000000" pitchFamily="34" charset="-128"/>
-                <a:ea typeface="Noto Sans KR Medium" panose="020B0200000000000000" pitchFamily="34" charset="-128"/>
-              </a:rPr>
-              <a:t> </a:t>
-            </a:r>
-            <a:r>
-              <a:rPr lang="en-US" altLang="ko-KR" sz="1000" dirty="0" smtClean="0">
-                <a:solidFill>
-                  <a:schemeClr val="bg1">
-                    <a:lumMod val="95000"/>
-                  </a:schemeClr>
-                </a:solidFill>
-                <a:latin typeface="Noto Sans KR Medium" panose="020B0200000000000000" pitchFamily="34" charset="-128"/>
-                <a:ea typeface="Noto Sans KR Medium" panose="020B0200000000000000" pitchFamily="34" charset="-128"/>
-              </a:rPr>
-              <a:t>-&gt; </a:t>
-            </a:r>
-            <a:r>
-              <a:rPr lang="ko-KR" altLang="en-US" sz="1000" dirty="0" smtClean="0">
-                <a:solidFill>
-                  <a:schemeClr val="bg1">
-                    <a:lumMod val="95000"/>
-                  </a:schemeClr>
-                </a:solidFill>
-                <a:latin typeface="Noto Sans KR Medium" panose="020B0200000000000000" pitchFamily="34" charset="-128"/>
-                <a:ea typeface="Noto Sans KR Medium" panose="020B0200000000000000" pitchFamily="34" charset="-128"/>
-              </a:rPr>
-              <a:t>소프트 </a:t>
-            </a:r>
-            <a:r>
-              <a:rPr lang="ko-KR" altLang="en-US" sz="1000" dirty="0" err="1" smtClean="0">
-                <a:solidFill>
-                  <a:schemeClr val="bg1">
-                    <a:lumMod val="95000"/>
-                  </a:schemeClr>
-                </a:solidFill>
-                <a:latin typeface="Noto Sans KR Medium" panose="020B0200000000000000" pitchFamily="34" charset="-128"/>
-                <a:ea typeface="Noto Sans KR Medium" panose="020B0200000000000000" pitchFamily="34" charset="-128"/>
-              </a:rPr>
-              <a:t>레퍼런스로</a:t>
-            </a:r>
-            <a:r>
-              <a:rPr lang="ko-KR" altLang="en-US" sz="1000" dirty="0" smtClean="0">
-                <a:solidFill>
-                  <a:schemeClr val="bg1">
-                    <a:lumMod val="95000"/>
-                  </a:schemeClr>
-                </a:solidFill>
-                <a:latin typeface="Noto Sans KR Medium" panose="020B0200000000000000" pitchFamily="34" charset="-128"/>
-                <a:ea typeface="Noto Sans KR Medium" panose="020B0200000000000000" pitchFamily="34" charset="-128"/>
-              </a:rPr>
-              <a:t> 변경</a:t>
-            </a:r>
-            <a:r>
-              <a:rPr lang="en-US" altLang="ko-KR" sz="1000" dirty="0" smtClean="0">
-                <a:solidFill>
-                  <a:schemeClr val="bg1">
-                    <a:lumMod val="95000"/>
-                  </a:schemeClr>
-                </a:solidFill>
-                <a:latin typeface="Noto Sans KR Medium" panose="020B0200000000000000" pitchFamily="34" charset="-128"/>
-                <a:ea typeface="Noto Sans KR Medium" panose="020B0200000000000000" pitchFamily="34" charset="-128"/>
-              </a:rPr>
-              <a:t>)</a:t>
-            </a:r>
-          </a:p>
-          <a:p>
-            <a:r>
-              <a:rPr lang="ko-KR" altLang="en-US" sz="1000" dirty="0" err="1" smtClean="0">
-                <a:solidFill>
-                  <a:schemeClr val="bg1">
-                    <a:lumMod val="95000"/>
-                  </a:schemeClr>
-                </a:solidFill>
-                <a:latin typeface="Noto Sans KR Medium" panose="020B0200000000000000" pitchFamily="34" charset="-128"/>
-                <a:ea typeface="Noto Sans KR Medium" panose="020B0200000000000000" pitchFamily="34" charset="-128"/>
-              </a:rPr>
-              <a:t>그후</a:t>
-            </a:r>
-            <a:r>
-              <a:rPr lang="ko-KR" altLang="en-US" sz="1000" dirty="0" smtClean="0">
-                <a:solidFill>
-                  <a:schemeClr val="bg1">
-                    <a:lumMod val="95000"/>
-                  </a:schemeClr>
-                </a:solidFill>
-                <a:latin typeface="Noto Sans KR Medium" panose="020B0200000000000000" pitchFamily="34" charset="-128"/>
-                <a:ea typeface="Noto Sans KR Medium" panose="020B0200000000000000" pitchFamily="34" charset="-128"/>
-              </a:rPr>
-              <a:t> 다시 </a:t>
-            </a:r>
-            <a:r>
-              <a:rPr lang="ko-KR" altLang="en-US" sz="1000" dirty="0" err="1" smtClean="0">
-                <a:solidFill>
-                  <a:schemeClr val="bg1">
-                    <a:lumMod val="95000"/>
-                  </a:schemeClr>
-                </a:solidFill>
-                <a:latin typeface="Noto Sans KR Medium" panose="020B0200000000000000" pitchFamily="34" charset="-128"/>
-                <a:ea typeface="Noto Sans KR Medium" panose="020B0200000000000000" pitchFamily="34" charset="-128"/>
-              </a:rPr>
-              <a:t>빌드</a:t>
-            </a:r>
-            <a:r>
-              <a:rPr lang="ko-KR" altLang="en-US" sz="1000" dirty="0" smtClean="0">
-                <a:solidFill>
-                  <a:schemeClr val="bg1">
-                    <a:lumMod val="95000"/>
-                  </a:schemeClr>
-                </a:solidFill>
-                <a:latin typeface="Noto Sans KR Medium" panose="020B0200000000000000" pitchFamily="34" charset="-128"/>
-                <a:ea typeface="Noto Sans KR Medium" panose="020B0200000000000000" pitchFamily="34" charset="-128"/>
-              </a:rPr>
-              <a:t> 시도에서 성공한 것을 확인</a:t>
-            </a:r>
-            <a:r>
-              <a:rPr lang="en-US" altLang="ko-KR" sz="1000" dirty="0" smtClean="0">
-                <a:solidFill>
-                  <a:schemeClr val="bg1">
-                    <a:lumMod val="95000"/>
-                  </a:schemeClr>
-                </a:solidFill>
-                <a:latin typeface="Noto Sans KR Medium" panose="020B0200000000000000" pitchFamily="34" charset="-128"/>
-                <a:ea typeface="Noto Sans KR Medium" panose="020B0200000000000000" pitchFamily="34" charset="-128"/>
-              </a:rPr>
-              <a:t>.</a:t>
-            </a:r>
+            <a:endParaRPr lang="en-US" altLang="ko-KR" sz="1000" dirty="0" smtClean="0">
+              <a:solidFill>
+                <a:schemeClr val="bg1">
+                  <a:lumMod val="95000"/>
+                </a:schemeClr>
+              </a:solidFill>
+              <a:latin typeface="Noto Sans KR Medium" panose="020B0200000000000000" pitchFamily="34" charset="-128"/>
+              <a:ea typeface="Noto Sans KR Medium" panose="020B0200000000000000" pitchFamily="34" charset="-128"/>
+            </a:endParaRPr>
           </a:p>
           <a:p>
             <a:endParaRPr lang="en-US" altLang="ko-KR" sz="1000" dirty="0">
@@ -33155,10 +33417,46 @@
                 <a:latin typeface="Noto Sans KR Medium" panose="020B0200000000000000" pitchFamily="34" charset="-128"/>
                 <a:ea typeface="Noto Sans KR Medium" panose="020B0200000000000000" pitchFamily="34" charset="-128"/>
               </a:rPr>
-              <a:t> 변경 후 사용</a:t>
-            </a:r>
-            <a:r>
-              <a:rPr lang="en-US" altLang="ko-KR" sz="1000" dirty="0" smtClean="0">
+              <a:t> 변경 </a:t>
+            </a:r>
+            <a:r>
+              <a:rPr lang="ko-KR" altLang="en-US" sz="1000" smtClean="0">
+                <a:solidFill>
+                  <a:schemeClr val="bg1">
+                    <a:lumMod val="95000"/>
+                  </a:schemeClr>
+                </a:solidFill>
+                <a:latin typeface="Noto Sans KR Medium" panose="020B0200000000000000" pitchFamily="34" charset="-128"/>
+                <a:ea typeface="Noto Sans KR Medium" panose="020B0200000000000000" pitchFamily="34" charset="-128"/>
+              </a:rPr>
+              <a:t>후 </a:t>
+            </a:r>
+            <a:r>
+              <a:rPr lang="ko-KR" altLang="en-US" sz="1000" smtClean="0">
+                <a:solidFill>
+                  <a:schemeClr val="bg1">
+                    <a:lumMod val="95000"/>
+                  </a:schemeClr>
+                </a:solidFill>
+                <a:latin typeface="Noto Sans KR Medium" panose="020B0200000000000000" pitchFamily="34" charset="-128"/>
+                <a:ea typeface="Noto Sans KR Medium" panose="020B0200000000000000" pitchFamily="34" charset="-128"/>
+              </a:rPr>
+              <a:t>사용</a:t>
+            </a:r>
+            <a:r>
+              <a:rPr lang="ko-KR" altLang="en-US" sz="1000" smtClean="0">
+                <a:solidFill>
+                  <a:schemeClr val="bg1">
+                    <a:lumMod val="95000"/>
+                  </a:schemeClr>
+                </a:solidFill>
+                <a:latin typeface="Noto Sans KR Medium" panose="020B0200000000000000" pitchFamily="34" charset="-128"/>
+                <a:ea typeface="Noto Sans KR Medium" panose="020B0200000000000000" pitchFamily="34" charset="-128"/>
+              </a:rPr>
+              <a:t>하는 것으로 문제를 해결했습니다</a:t>
+            </a:r>
+            <a:r>
+              <a:rPr lang="en-US" altLang="ko-KR" sz="1000" smtClean="0">
                 <a:solidFill>
                   <a:schemeClr val="bg1">
                     <a:lumMod val="95000"/>
@@ -33169,6 +33467,15 @@
               </a:rPr>
               <a:t>.</a:t>
             </a:r>
+            <a:endParaRPr lang="en-US" altLang="ko-KR" sz="1000" dirty="0" smtClean="0">
+              <a:solidFill>
+                <a:schemeClr val="bg1">
+                  <a:lumMod val="95000"/>
+                </a:schemeClr>
+              </a:solidFill>
+              <a:latin typeface="Noto Sans KR Medium" panose="020B0200000000000000" pitchFamily="34" charset="-128"/>
+              <a:ea typeface="Noto Sans KR Medium" panose="020B0200000000000000" pitchFamily="34" charset="-128"/>
+            </a:endParaRPr>
           </a:p>
         </p:txBody>
       </p:sp>

--- a/Docs/UnrealEngine_문서_김정환.pptx
+++ b/Docs/UnrealEngine_문서_김정환.pptx
@@ -232,7 +232,7 @@
           <a:p>
             <a:fld id="{C180C216-7AC4-482D-A25B-339B4E373C44}" type="datetimeFigureOut">
               <a:rPr lang="ko-KR" altLang="en-US" smtClean="0"/>
-              <a:t>2026-03-22</a:t>
+              <a:t>2026-03-23</a:t>
             </a:fld>
             <a:endParaRPr lang="ko-KR" altLang="en-US"/>
           </a:p>
@@ -14204,7 +14204,7 @@
           <a:p>
             <a:fld id="{2056477C-5364-4FAF-AB24-F59E083ADCD2}" type="datetimeFigureOut">
               <a:rPr lang="ko-KR" altLang="en-US" smtClean="0"/>
-              <a:t>2026-03-22</a:t>
+              <a:t>2026-03-23</a:t>
             </a:fld>
             <a:endParaRPr lang="ko-KR" altLang="en-US"/>
           </a:p>
@@ -14374,7 +14374,7 @@
           <a:p>
             <a:fld id="{2056477C-5364-4FAF-AB24-F59E083ADCD2}" type="datetimeFigureOut">
               <a:rPr lang="ko-KR" altLang="en-US" smtClean="0"/>
-              <a:t>2026-03-22</a:t>
+              <a:t>2026-03-23</a:t>
             </a:fld>
             <a:endParaRPr lang="ko-KR" altLang="en-US"/>
           </a:p>
@@ -14554,7 +14554,7 @@
           <a:p>
             <a:fld id="{2056477C-5364-4FAF-AB24-F59E083ADCD2}" type="datetimeFigureOut">
               <a:rPr lang="ko-KR" altLang="en-US" smtClean="0"/>
-              <a:t>2026-03-22</a:t>
+              <a:t>2026-03-23</a:t>
             </a:fld>
             <a:endParaRPr lang="ko-KR" altLang="en-US"/>
           </a:p>
@@ -14724,7 +14724,7 @@
           <a:p>
             <a:fld id="{2056477C-5364-4FAF-AB24-F59E083ADCD2}" type="datetimeFigureOut">
               <a:rPr lang="ko-KR" altLang="en-US" smtClean="0"/>
-              <a:t>2026-03-22</a:t>
+              <a:t>2026-03-23</a:t>
             </a:fld>
             <a:endParaRPr lang="ko-KR" altLang="en-US"/>
           </a:p>
@@ -14970,7 +14970,7 @@
           <a:p>
             <a:fld id="{2056477C-5364-4FAF-AB24-F59E083ADCD2}" type="datetimeFigureOut">
               <a:rPr lang="ko-KR" altLang="en-US" smtClean="0"/>
-              <a:t>2026-03-22</a:t>
+              <a:t>2026-03-23</a:t>
             </a:fld>
             <a:endParaRPr lang="ko-KR" altLang="en-US"/>
           </a:p>
@@ -15202,7 +15202,7 @@
           <a:p>
             <a:fld id="{2056477C-5364-4FAF-AB24-F59E083ADCD2}" type="datetimeFigureOut">
               <a:rPr lang="ko-KR" altLang="en-US" smtClean="0"/>
-              <a:t>2026-03-22</a:t>
+              <a:t>2026-03-23</a:t>
             </a:fld>
             <a:endParaRPr lang="ko-KR" altLang="en-US"/>
           </a:p>
@@ -15569,7 +15569,7 @@
           <a:p>
             <a:fld id="{2056477C-5364-4FAF-AB24-F59E083ADCD2}" type="datetimeFigureOut">
               <a:rPr lang="ko-KR" altLang="en-US" smtClean="0"/>
-              <a:t>2026-03-22</a:t>
+              <a:t>2026-03-23</a:t>
             </a:fld>
             <a:endParaRPr lang="ko-KR" altLang="en-US"/>
           </a:p>
@@ -15687,7 +15687,7 @@
           <a:p>
             <a:fld id="{2056477C-5364-4FAF-AB24-F59E083ADCD2}" type="datetimeFigureOut">
               <a:rPr lang="ko-KR" altLang="en-US" smtClean="0"/>
-              <a:t>2026-03-22</a:t>
+              <a:t>2026-03-23</a:t>
             </a:fld>
             <a:endParaRPr lang="ko-KR" altLang="en-US"/>
           </a:p>
@@ -15782,7 +15782,7 @@
           <a:p>
             <a:fld id="{2056477C-5364-4FAF-AB24-F59E083ADCD2}" type="datetimeFigureOut">
               <a:rPr lang="ko-KR" altLang="en-US" smtClean="0"/>
-              <a:t>2026-03-22</a:t>
+              <a:t>2026-03-23</a:t>
             </a:fld>
             <a:endParaRPr lang="ko-KR" altLang="en-US"/>
           </a:p>
@@ -16059,7 +16059,7 @@
           <a:p>
             <a:fld id="{2056477C-5364-4FAF-AB24-F59E083ADCD2}" type="datetimeFigureOut">
               <a:rPr lang="ko-KR" altLang="en-US" smtClean="0"/>
-              <a:t>2026-03-22</a:t>
+              <a:t>2026-03-23</a:t>
             </a:fld>
             <a:endParaRPr lang="ko-KR" altLang="en-US"/>
           </a:p>
@@ -16312,7 +16312,7 @@
           <a:p>
             <a:fld id="{2056477C-5364-4FAF-AB24-F59E083ADCD2}" type="datetimeFigureOut">
               <a:rPr lang="ko-KR" altLang="en-US" smtClean="0"/>
-              <a:t>2026-03-22</a:t>
+              <a:t>2026-03-23</a:t>
             </a:fld>
             <a:endParaRPr lang="ko-KR" altLang="en-US"/>
           </a:p>
@@ -16531,7 +16531,7 @@
           <a:p>
             <a:fld id="{2056477C-5364-4FAF-AB24-F59E083ADCD2}" type="datetimeFigureOut">
               <a:rPr lang="ko-KR" altLang="en-US" smtClean="0"/>
-              <a:t>2026-03-22</a:t>
+              <a:t>2026-03-23</a:t>
             </a:fld>
             <a:endParaRPr lang="ko-KR" altLang="en-US"/>
           </a:p>
@@ -17575,102 +17575,6 @@
       </p:sp>
       <p:sp>
         <p:nvSpPr>
-          <p:cNvPr id="15" name="직사각형 14"/>
-          <p:cNvSpPr/>
-          <p:nvPr/>
-        </p:nvSpPr>
-        <p:spPr>
-          <a:xfrm>
-            <a:off x="6666333" y="315047"/>
-            <a:ext cx="5179769" cy="3437768"/>
-          </a:xfrm>
-          <a:prstGeom prst="rect">
-            <a:avLst/>
-          </a:prstGeom>
-        </p:spPr>
-        <p:style>
-          <a:lnRef idx="2">
-            <a:schemeClr val="accent1">
-              <a:shade val="50000"/>
-            </a:schemeClr>
-          </a:lnRef>
-          <a:fillRef idx="1">
-            <a:schemeClr val="accent1"/>
-          </a:fillRef>
-          <a:effectRef idx="0">
-            <a:schemeClr val="accent1"/>
-          </a:effectRef>
-          <a:fontRef idx="minor">
-            <a:schemeClr val="lt1"/>
-          </a:fontRef>
-        </p:style>
-        <p:txBody>
-          <a:bodyPr rtlCol="0" anchor="ctr"/>
-          <a:lstStyle/>
-          <a:p>
-            <a:pPr algn="ctr"/>
-            <a:r>
-              <a:rPr lang="ko-KR" altLang="en-US" dirty="0" smtClean="0"/>
-              <a:t>액션 도중 적용하는 코드</a:t>
-            </a:r>
-            <a:endParaRPr lang="ko-KR" altLang="en-US" dirty="0"/>
-          </a:p>
-        </p:txBody>
-      </p:sp>
-      <p:sp>
-        <p:nvSpPr>
-          <p:cNvPr id="16" name="직사각형 15"/>
-          <p:cNvSpPr/>
-          <p:nvPr/>
-        </p:nvSpPr>
-        <p:spPr>
-          <a:xfrm>
-            <a:off x="6666333" y="3865389"/>
-            <a:ext cx="5179769" cy="2648817"/>
-          </a:xfrm>
-          <a:prstGeom prst="rect">
-            <a:avLst/>
-          </a:prstGeom>
-        </p:spPr>
-        <p:style>
-          <a:lnRef idx="2">
-            <a:schemeClr val="accent1">
-              <a:shade val="50000"/>
-            </a:schemeClr>
-          </a:lnRef>
-          <a:fillRef idx="1">
-            <a:schemeClr val="accent1"/>
-          </a:fillRef>
-          <a:effectRef idx="0">
-            <a:schemeClr val="accent1"/>
-          </a:effectRef>
-          <a:fontRef idx="minor">
-            <a:schemeClr val="lt1"/>
-          </a:fontRef>
-        </p:style>
-        <p:txBody>
-          <a:bodyPr rtlCol="0" anchor="ctr"/>
-          <a:lstStyle/>
-          <a:p>
-            <a:pPr algn="ctr"/>
-            <a:r>
-              <a:rPr lang="ko-KR" altLang="en-US" dirty="0" smtClean="0"/>
-              <a:t>아이템 사용 시</a:t>
-            </a:r>
-            <a:r>
-              <a:rPr lang="en-US" altLang="ko-KR" dirty="0" smtClean="0"/>
-              <a:t>, </a:t>
-            </a:r>
-            <a:r>
-              <a:rPr lang="ko-KR" altLang="en-US" dirty="0" smtClean="0"/>
-              <a:t>적용하는 코드</a:t>
-            </a:r>
-            <a:endParaRPr lang="ko-KR" altLang="en-US" dirty="0"/>
-          </a:p>
-        </p:txBody>
-      </p:sp>
-      <p:sp>
-        <p:nvSpPr>
           <p:cNvPr id="17" name="직사각형 16"/>
           <p:cNvSpPr/>
           <p:nvPr/>
@@ -17813,6 +17717,96 @@
           </a:p>
         </p:txBody>
       </p:sp>
+      <p:pic>
+        <p:nvPicPr>
+          <p:cNvPr id="2" name="그림 1"/>
+          <p:cNvPicPr>
+            <a:picLocks noChangeAspect="1"/>
+          </p:cNvPicPr>
+          <p:nvPr/>
+        </p:nvPicPr>
+        <p:blipFill>
+          <a:blip r:embed="rId3" cstate="print">
+            <a:extLst>
+              <a:ext uri="{28A0092B-C50C-407E-A947-70E740481C1C}">
+                <a14:useLocalDpi xmlns:a14="http://schemas.microsoft.com/office/drawing/2010/main" val="0"/>
+              </a:ext>
+            </a:extLst>
+          </a:blip>
+          <a:stretch>
+            <a:fillRect/>
+          </a:stretch>
+        </p:blipFill>
+        <p:spPr>
+          <a:xfrm>
+            <a:off x="6656808" y="315047"/>
+            <a:ext cx="4511210" cy="1820789"/>
+          </a:xfrm>
+          <a:prstGeom prst="rect">
+            <a:avLst/>
+          </a:prstGeom>
+        </p:spPr>
+      </p:pic>
+      <p:pic>
+        <p:nvPicPr>
+          <p:cNvPr id="3" name="그림 2"/>
+          <p:cNvPicPr>
+            <a:picLocks noChangeAspect="1"/>
+          </p:cNvPicPr>
+          <p:nvPr/>
+        </p:nvPicPr>
+        <p:blipFill>
+          <a:blip r:embed="rId4" cstate="print">
+            <a:extLst>
+              <a:ext uri="{28A0092B-C50C-407E-A947-70E740481C1C}">
+                <a14:useLocalDpi xmlns:a14="http://schemas.microsoft.com/office/drawing/2010/main" val="0"/>
+              </a:ext>
+            </a:extLst>
+          </a:blip>
+          <a:stretch>
+            <a:fillRect/>
+          </a:stretch>
+        </p:blipFill>
+        <p:spPr>
+          <a:xfrm>
+            <a:off x="6656808" y="2270589"/>
+            <a:ext cx="4222975" cy="2175010"/>
+          </a:xfrm>
+          <a:prstGeom prst="rect">
+            <a:avLst/>
+          </a:prstGeom>
+        </p:spPr>
+      </p:pic>
+      <p:pic>
+        <p:nvPicPr>
+          <p:cNvPr id="4" name="그림 3"/>
+          <p:cNvPicPr>
+            <a:picLocks noChangeAspect="1"/>
+          </p:cNvPicPr>
+          <p:nvPr/>
+        </p:nvPicPr>
+        <p:blipFill>
+          <a:blip r:embed="rId5" cstate="print">
+            <a:extLst>
+              <a:ext uri="{28A0092B-C50C-407E-A947-70E740481C1C}">
+                <a14:useLocalDpi xmlns:a14="http://schemas.microsoft.com/office/drawing/2010/main" val="0"/>
+              </a:ext>
+            </a:extLst>
+          </a:blip>
+          <a:stretch>
+            <a:fillRect/>
+          </a:stretch>
+        </p:blipFill>
+        <p:spPr>
+          <a:xfrm>
+            <a:off x="6656808" y="4580352"/>
+            <a:ext cx="5093218" cy="1644685"/>
+          </a:xfrm>
+          <a:prstGeom prst="rect">
+            <a:avLst/>
+          </a:prstGeom>
+        </p:spPr>
+      </p:pic>
     </p:spTree>
     <p:extLst>
       <p:ext uri="{BB962C8B-B14F-4D97-AF65-F5344CB8AC3E}">
@@ -19051,14 +19045,14 @@
       </p:sp>
       <p:sp>
         <p:nvSpPr>
-          <p:cNvPr id="13" name="직사각형 12"/>
+          <p:cNvPr id="15" name="직사각형 14"/>
           <p:cNvSpPr/>
           <p:nvPr/>
         </p:nvSpPr>
         <p:spPr>
           <a:xfrm>
-            <a:off x="6666333" y="315046"/>
-            <a:ext cx="5179769" cy="2334851"/>
+            <a:off x="540001" y="4158001"/>
+            <a:ext cx="2580886" cy="2170879"/>
           </a:xfrm>
           <a:prstGeom prst="rect">
             <a:avLst/>
@@ -19086,117 +19080,73 @@
           <a:p>
             <a:pPr algn="ctr"/>
             <a:r>
-              <a:rPr lang="en-US" altLang="ko-KR" dirty="0" err="1" smtClean="0"/>
-              <a:t>APlayerCharacter</a:t>
-            </a:r>
-            <a:endParaRPr lang="en-US" altLang="ko-KR" dirty="0" smtClean="0"/>
-          </a:p>
-          <a:p>
-            <a:pPr algn="ctr"/>
-            <a:r>
-              <a:rPr lang="en-US" altLang="ko-KR" dirty="0" err="1" smtClean="0"/>
-              <a:t>TryUseStamina</a:t>
-            </a:r>
-            <a:r>
-              <a:rPr lang="en-US" altLang="ko-KR" dirty="0" smtClean="0"/>
-              <a:t> </a:t>
-            </a:r>
-            <a:r>
               <a:rPr lang="ko-KR" altLang="en-US" dirty="0" smtClean="0"/>
-              <a:t>바인딩</a:t>
+              <a:t>공격 입력 종류</a:t>
             </a:r>
             <a:endParaRPr lang="ko-KR" altLang="en-US" dirty="0"/>
           </a:p>
         </p:txBody>
       </p:sp>
-      <p:sp>
-        <p:nvSpPr>
-          <p:cNvPr id="14" name="직사각형 13"/>
-          <p:cNvSpPr/>
+      <p:pic>
+        <p:nvPicPr>
+          <p:cNvPr id="3" name="그림 2"/>
+          <p:cNvPicPr>
+            <a:picLocks noChangeAspect="1"/>
+          </p:cNvPicPr>
           <p:nvPr/>
-        </p:nvSpPr>
+        </p:nvPicPr>
+        <p:blipFill>
+          <a:blip r:embed="rId3" cstate="print">
+            <a:extLst>
+              <a:ext uri="{28A0092B-C50C-407E-A947-70E740481C1C}">
+                <a14:useLocalDpi xmlns:a14="http://schemas.microsoft.com/office/drawing/2010/main" val="0"/>
+              </a:ext>
+            </a:extLst>
+          </a:blip>
+          <a:stretch>
+            <a:fillRect/>
+          </a:stretch>
+        </p:blipFill>
         <p:spPr>
           <a:xfrm>
-            <a:off x="6666333" y="2803786"/>
-            <a:ext cx="5179769" cy="3525094"/>
+            <a:off x="6666333" y="315047"/>
+            <a:ext cx="5184913" cy="2799316"/>
           </a:xfrm>
           <a:prstGeom prst="rect">
             <a:avLst/>
           </a:prstGeom>
         </p:spPr>
-        <p:style>
-          <a:lnRef idx="2">
-            <a:schemeClr val="accent1">
-              <a:shade val="50000"/>
-            </a:schemeClr>
-          </a:lnRef>
-          <a:fillRef idx="1">
-            <a:schemeClr val="accent1"/>
-          </a:fillRef>
-          <a:effectRef idx="0">
-            <a:schemeClr val="accent1"/>
-          </a:effectRef>
-          <a:fontRef idx="minor">
-            <a:schemeClr val="lt1"/>
-          </a:fontRef>
-        </p:style>
-        <p:txBody>
-          <a:bodyPr rtlCol="0" anchor="ctr"/>
-          <a:lstStyle/>
-          <a:p>
-            <a:pPr algn="ctr"/>
-            <a:r>
-              <a:rPr lang="ko-KR" altLang="en-US" dirty="0" smtClean="0"/>
-              <a:t>액션 호출 코드</a:t>
-            </a:r>
-            <a:endParaRPr lang="ko-KR" altLang="en-US" dirty="0"/>
-          </a:p>
-        </p:txBody>
-      </p:sp>
-      <p:sp>
-        <p:nvSpPr>
-          <p:cNvPr id="15" name="직사각형 14"/>
-          <p:cNvSpPr/>
+      </p:pic>
+      <p:pic>
+        <p:nvPicPr>
+          <p:cNvPr id="5" name="그림 4"/>
+          <p:cNvPicPr>
+            <a:picLocks noChangeAspect="1"/>
+          </p:cNvPicPr>
           <p:nvPr/>
-        </p:nvSpPr>
+        </p:nvPicPr>
+        <p:blipFill>
+          <a:blip r:embed="rId4" cstate="print">
+            <a:extLst>
+              <a:ext uri="{28A0092B-C50C-407E-A947-70E740481C1C}">
+                <a14:useLocalDpi xmlns:a14="http://schemas.microsoft.com/office/drawing/2010/main" val="0"/>
+              </a:ext>
+            </a:extLst>
+          </a:blip>
+          <a:stretch>
+            <a:fillRect/>
+          </a:stretch>
+        </p:blipFill>
         <p:spPr>
           <a:xfrm>
-            <a:off x="540001" y="4158001"/>
-            <a:ext cx="2490876" cy="2170879"/>
+            <a:off x="6666333" y="3297445"/>
+            <a:ext cx="4177258" cy="3028871"/>
           </a:xfrm>
           <a:prstGeom prst="rect">
             <a:avLst/>
           </a:prstGeom>
         </p:spPr>
-        <p:style>
-          <a:lnRef idx="2">
-            <a:schemeClr val="accent1">
-              <a:shade val="50000"/>
-            </a:schemeClr>
-          </a:lnRef>
-          <a:fillRef idx="1">
-            <a:schemeClr val="accent1"/>
-          </a:fillRef>
-          <a:effectRef idx="0">
-            <a:schemeClr val="accent1"/>
-          </a:effectRef>
-          <a:fontRef idx="minor">
-            <a:schemeClr val="lt1"/>
-          </a:fontRef>
-        </p:style>
-        <p:txBody>
-          <a:bodyPr rtlCol="0" anchor="ctr"/>
-          <a:lstStyle/>
-          <a:p>
-            <a:pPr algn="ctr"/>
-            <a:r>
-              <a:rPr lang="ko-KR" altLang="en-US" dirty="0" smtClean="0"/>
-              <a:t>공격 입력 종류</a:t>
-            </a:r>
-            <a:endParaRPr lang="ko-KR" altLang="en-US" dirty="0"/>
-          </a:p>
-        </p:txBody>
-      </p:sp>
+      </p:pic>
     </p:spTree>
     <p:extLst>
       <p:ext uri="{BB962C8B-B14F-4D97-AF65-F5344CB8AC3E}">
@@ -20063,14 +20013,14 @@
       </p:sp>
       <p:sp>
         <p:nvSpPr>
-          <p:cNvPr id="14" name="직사각형 13"/>
+          <p:cNvPr id="16" name="직사각형 15"/>
           <p:cNvSpPr/>
           <p:nvPr/>
         </p:nvSpPr>
         <p:spPr>
           <a:xfrm>
-            <a:off x="6666333" y="315046"/>
-            <a:ext cx="5179769" cy="1825481"/>
+            <a:off x="6666333" y="4147128"/>
+            <a:ext cx="5179769" cy="2458294"/>
           </a:xfrm>
           <a:prstGeom prst="rect">
             <a:avLst/>
@@ -20098,105 +20048,103 @@
           <a:p>
             <a:pPr algn="ctr"/>
             <a:r>
-              <a:rPr lang="en-US" altLang="ko-KR" dirty="0" err="1" smtClean="0"/>
-              <a:t>AttackNotify</a:t>
+              <a:rPr lang="ko-KR" altLang="en-US" dirty="0" smtClean="0"/>
+              <a:t>몽타주에 노티파이</a:t>
             </a:r>
             <a:endParaRPr lang="ko-KR" altLang="en-US" dirty="0"/>
           </a:p>
         </p:txBody>
       </p:sp>
-      <p:sp>
-        <p:nvSpPr>
-          <p:cNvPr id="15" name="직사각형 14"/>
-          <p:cNvSpPr/>
+      <p:pic>
+        <p:nvPicPr>
+          <p:cNvPr id="2" name="그림 1"/>
+          <p:cNvPicPr>
+            <a:picLocks noChangeAspect="1"/>
+          </p:cNvPicPr>
           <p:nvPr/>
-        </p:nvSpPr>
+        </p:nvPicPr>
+        <p:blipFill>
+          <a:blip r:embed="rId3" cstate="print">
+            <a:extLst>
+              <a:ext uri="{28A0092B-C50C-407E-A947-70E740481C1C}">
+                <a14:useLocalDpi xmlns:a14="http://schemas.microsoft.com/office/drawing/2010/main" val="0"/>
+              </a:ext>
+            </a:extLst>
+          </a:blip>
+          <a:stretch>
+            <a:fillRect/>
+          </a:stretch>
+        </p:blipFill>
         <p:spPr>
           <a:xfrm>
-            <a:off x="6666333" y="2431474"/>
-            <a:ext cx="5179769" cy="2317172"/>
+            <a:off x="6666333" y="315046"/>
+            <a:ext cx="4177047" cy="1543571"/>
           </a:xfrm>
           <a:prstGeom prst="rect">
             <a:avLst/>
           </a:prstGeom>
         </p:spPr>
-        <p:style>
-          <a:lnRef idx="2">
-            <a:schemeClr val="accent1">
-              <a:shade val="50000"/>
-            </a:schemeClr>
-          </a:lnRef>
-          <a:fillRef idx="1">
-            <a:schemeClr val="accent1"/>
-          </a:fillRef>
-          <a:effectRef idx="0">
-            <a:schemeClr val="accent1"/>
-          </a:effectRef>
-          <a:fontRef idx="minor">
-            <a:schemeClr val="lt1"/>
-          </a:fontRef>
-        </p:style>
-        <p:txBody>
-          <a:bodyPr rtlCol="0" anchor="ctr"/>
-          <a:lstStyle/>
-          <a:p>
-            <a:pPr algn="ctr"/>
-            <a:r>
-              <a:rPr lang="ko-KR" altLang="en-US" dirty="0" smtClean="0"/>
-              <a:t>캐릭터 </a:t>
-            </a:r>
-            <a:r>
-              <a:rPr lang="en-US" altLang="ko-KR" dirty="0" err="1" smtClean="0"/>
-              <a:t>HandleAttackNotify</a:t>
-            </a:r>
-            <a:endParaRPr lang="ko-KR" altLang="en-US" dirty="0"/>
-          </a:p>
-        </p:txBody>
-      </p:sp>
-      <p:sp>
-        <p:nvSpPr>
-          <p:cNvPr id="16" name="직사각형 15"/>
-          <p:cNvSpPr/>
+      </p:pic>
+      <p:pic>
+        <p:nvPicPr>
+          <p:cNvPr id="3" name="그림 2"/>
+          <p:cNvPicPr>
+            <a:picLocks noChangeAspect="1"/>
+          </p:cNvPicPr>
           <p:nvPr/>
-        </p:nvSpPr>
+        </p:nvPicPr>
+        <p:blipFill>
+          <a:blip r:embed="rId4" cstate="print">
+            <a:extLst>
+              <a:ext uri="{28A0092B-C50C-407E-A947-70E740481C1C}">
+                <a14:useLocalDpi xmlns:a14="http://schemas.microsoft.com/office/drawing/2010/main" val="0"/>
+              </a:ext>
+            </a:extLst>
+          </a:blip>
+          <a:stretch>
+            <a:fillRect/>
+          </a:stretch>
+        </p:blipFill>
         <p:spPr>
           <a:xfrm>
-            <a:off x="6666333" y="4904508"/>
-            <a:ext cx="5179769" cy="1700913"/>
+            <a:off x="9182326" y="1946048"/>
+            <a:ext cx="2874831" cy="1716699"/>
           </a:xfrm>
           <a:prstGeom prst="rect">
             <a:avLst/>
           </a:prstGeom>
         </p:spPr>
-        <p:style>
-          <a:lnRef idx="2">
-            <a:schemeClr val="accent1">
-              <a:shade val="50000"/>
-            </a:schemeClr>
-          </a:lnRef>
-          <a:fillRef idx="1">
-            <a:schemeClr val="accent1"/>
-          </a:fillRef>
-          <a:effectRef idx="0">
-            <a:schemeClr val="accent1"/>
-          </a:effectRef>
-          <a:fontRef idx="minor">
-            <a:schemeClr val="lt1"/>
-          </a:fontRef>
-        </p:style>
-        <p:txBody>
-          <a:bodyPr rtlCol="0" anchor="ctr"/>
-          <a:lstStyle/>
-          <a:p>
-            <a:pPr algn="ctr"/>
-            <a:r>
-              <a:rPr lang="ko-KR" altLang="en-US" dirty="0" smtClean="0"/>
-              <a:t>몽타주에 노티파이</a:t>
-            </a:r>
-            <a:endParaRPr lang="ko-KR" altLang="en-US" dirty="0"/>
-          </a:p>
-        </p:txBody>
-      </p:sp>
+      </p:pic>
+      <p:pic>
+        <p:nvPicPr>
+          <p:cNvPr id="7" name="그림 6"/>
+          <p:cNvPicPr>
+            <a:picLocks noChangeAspect="1"/>
+          </p:cNvPicPr>
+          <p:nvPr/>
+        </p:nvPicPr>
+        <p:blipFill>
+          <a:blip r:embed="rId5" cstate="print">
+            <a:extLst>
+              <a:ext uri="{28A0092B-C50C-407E-A947-70E740481C1C}">
+                <a14:useLocalDpi xmlns:a14="http://schemas.microsoft.com/office/drawing/2010/main" val="0"/>
+              </a:ext>
+            </a:extLst>
+          </a:blip>
+          <a:stretch>
+            <a:fillRect/>
+          </a:stretch>
+        </p:blipFill>
+        <p:spPr>
+          <a:xfrm>
+            <a:off x="6666333" y="1948226"/>
+            <a:ext cx="2419987" cy="943643"/>
+          </a:xfrm>
+          <a:prstGeom prst="rect">
+            <a:avLst/>
+          </a:prstGeom>
+        </p:spPr>
+      </p:pic>
     </p:spTree>
     <p:extLst>
       <p:ext uri="{BB962C8B-B14F-4D97-AF65-F5344CB8AC3E}">
@@ -20630,50 +20578,6 @@
       </p:sp>
       <p:sp>
         <p:nvSpPr>
-          <p:cNvPr id="7" name="직사각형 6"/>
-          <p:cNvSpPr/>
-          <p:nvPr/>
-        </p:nvSpPr>
-        <p:spPr>
-          <a:xfrm>
-            <a:off x="6666333" y="315046"/>
-            <a:ext cx="5179769" cy="2983325"/>
-          </a:xfrm>
-          <a:prstGeom prst="rect">
-            <a:avLst/>
-          </a:prstGeom>
-        </p:spPr>
-        <p:style>
-          <a:lnRef idx="2">
-            <a:schemeClr val="accent1">
-              <a:shade val="50000"/>
-            </a:schemeClr>
-          </a:lnRef>
-          <a:fillRef idx="1">
-            <a:schemeClr val="accent1"/>
-          </a:fillRef>
-          <a:effectRef idx="0">
-            <a:schemeClr val="accent1"/>
-          </a:effectRef>
-          <a:fontRef idx="minor">
-            <a:schemeClr val="lt1"/>
-          </a:fontRef>
-        </p:style>
-        <p:txBody>
-          <a:bodyPr rtlCol="0" anchor="ctr"/>
-          <a:lstStyle/>
-          <a:p>
-            <a:pPr algn="ctr"/>
-            <a:r>
-              <a:rPr lang="ko-KR" altLang="en-US" dirty="0" smtClean="0"/>
-              <a:t>효과 적용 코드들</a:t>
-            </a:r>
-            <a:endParaRPr lang="ko-KR" altLang="en-US" dirty="0"/>
-          </a:p>
-        </p:txBody>
-      </p:sp>
-      <p:sp>
-        <p:nvSpPr>
           <p:cNvPr id="10" name="직사각형 9"/>
           <p:cNvSpPr/>
           <p:nvPr/>
@@ -20940,54 +20844,66 @@
           </a:p>
         </p:txBody>
       </p:sp>
-      <p:sp>
-        <p:nvSpPr>
-          <p:cNvPr id="15" name="직사각형 14"/>
-          <p:cNvSpPr/>
+      <p:pic>
+        <p:nvPicPr>
+          <p:cNvPr id="2" name="그림 1"/>
+          <p:cNvPicPr>
+            <a:picLocks noChangeAspect="1"/>
+          </p:cNvPicPr>
           <p:nvPr/>
-        </p:nvSpPr>
+        </p:nvPicPr>
+        <p:blipFill>
+          <a:blip r:embed="rId3" cstate="print">
+            <a:extLst>
+              <a:ext uri="{28A0092B-C50C-407E-A947-70E740481C1C}">
+                <a14:useLocalDpi xmlns:a14="http://schemas.microsoft.com/office/drawing/2010/main" val="0"/>
+              </a:ext>
+            </a:extLst>
+          </a:blip>
+          <a:stretch>
+            <a:fillRect/>
+          </a:stretch>
+        </p:blipFill>
         <p:spPr>
           <a:xfrm>
-            <a:off x="6666332" y="3603171"/>
-            <a:ext cx="5179769" cy="2742625"/>
+            <a:off x="6656809" y="3436563"/>
+            <a:ext cx="4666974" cy="2886788"/>
           </a:xfrm>
           <a:prstGeom prst="rect">
             <a:avLst/>
           </a:prstGeom>
         </p:spPr>
-        <p:style>
-          <a:lnRef idx="2">
-            <a:schemeClr val="accent1">
-              <a:shade val="50000"/>
-            </a:schemeClr>
-          </a:lnRef>
-          <a:fillRef idx="1">
-            <a:schemeClr val="accent1"/>
-          </a:fillRef>
-          <a:effectRef idx="0">
-            <a:schemeClr val="accent1"/>
-          </a:effectRef>
-          <a:fontRef idx="minor">
-            <a:schemeClr val="lt1"/>
-          </a:fontRef>
-        </p:style>
-        <p:txBody>
-          <a:bodyPr rtlCol="0" anchor="ctr"/>
-          <a:lstStyle/>
-          <a:p>
-            <a:pPr algn="ctr"/>
-            <a:r>
-              <a:rPr lang="ko-KR" altLang="en-US" dirty="0" err="1" smtClean="0"/>
-              <a:t>콤보</a:t>
-            </a:r>
-            <a:r>
-              <a:rPr lang="ko-KR" altLang="en-US" dirty="0" smtClean="0"/>
-              <a:t> 구현 코드</a:t>
-            </a:r>
-            <a:endParaRPr lang="ko-KR" altLang="en-US" dirty="0"/>
-          </a:p>
-        </p:txBody>
-      </p:sp>
+      </p:pic>
+      <p:pic>
+        <p:nvPicPr>
+          <p:cNvPr id="16" name="그림 15"/>
+          <p:cNvPicPr>
+            <a:picLocks noChangeAspect="1"/>
+          </p:cNvPicPr>
+          <p:nvPr/>
+        </p:nvPicPr>
+        <p:blipFill>
+          <a:blip r:embed="rId4" cstate="print">
+            <a:extLst>
+              <a:ext uri="{28A0092B-C50C-407E-A947-70E740481C1C}">
+                <a14:useLocalDpi xmlns:a14="http://schemas.microsoft.com/office/drawing/2010/main" val="0"/>
+              </a:ext>
+            </a:extLst>
+          </a:blip>
+          <a:stretch>
+            <a:fillRect/>
+          </a:stretch>
+        </p:blipFill>
+        <p:spPr>
+          <a:xfrm>
+            <a:off x="6666333" y="315047"/>
+            <a:ext cx="4177258" cy="3028871"/>
+          </a:xfrm>
+          <a:prstGeom prst="rect">
+            <a:avLst/>
+          </a:prstGeom>
+        </p:spPr>
+      </p:pic>
     </p:spTree>
     <p:extLst>
       <p:ext uri="{BB962C8B-B14F-4D97-AF65-F5344CB8AC3E}">
@@ -22608,106 +22524,66 @@
           </a:p>
         </p:txBody>
       </p:sp>
-      <p:sp>
-        <p:nvSpPr>
-          <p:cNvPr id="16" name="직사각형 15"/>
-          <p:cNvSpPr/>
+      <p:pic>
+        <p:nvPicPr>
+          <p:cNvPr id="2" name="그림 1"/>
+          <p:cNvPicPr>
+            <a:picLocks noChangeAspect="1"/>
+          </p:cNvPicPr>
           <p:nvPr/>
-        </p:nvSpPr>
+        </p:nvPicPr>
+        <p:blipFill>
+          <a:blip r:embed="rId3" cstate="print">
+            <a:extLst>
+              <a:ext uri="{28A0092B-C50C-407E-A947-70E740481C1C}">
+                <a14:useLocalDpi xmlns:a14="http://schemas.microsoft.com/office/drawing/2010/main" val="0"/>
+              </a:ext>
+            </a:extLst>
+          </a:blip>
+          <a:stretch>
+            <a:fillRect/>
+          </a:stretch>
+        </p:blipFill>
         <p:spPr>
           <a:xfrm>
-            <a:off x="6666333" y="315046"/>
-            <a:ext cx="5179769" cy="2983325"/>
+            <a:off x="6666333" y="314231"/>
+            <a:ext cx="4216071" cy="3565236"/>
           </a:xfrm>
           <a:prstGeom prst="rect">
             <a:avLst/>
           </a:prstGeom>
         </p:spPr>
-        <p:style>
-          <a:lnRef idx="2">
-            <a:schemeClr val="accent1">
-              <a:shade val="50000"/>
-            </a:schemeClr>
-          </a:lnRef>
-          <a:fillRef idx="1">
-            <a:schemeClr val="accent1"/>
-          </a:fillRef>
-          <a:effectRef idx="0">
-            <a:schemeClr val="accent1"/>
-          </a:effectRef>
-          <a:fontRef idx="minor">
-            <a:schemeClr val="lt1"/>
-          </a:fontRef>
-        </p:style>
-        <p:txBody>
-          <a:bodyPr rtlCol="0" anchor="ctr"/>
-          <a:lstStyle/>
-          <a:p>
-            <a:pPr algn="ctr"/>
-            <a:r>
-              <a:rPr lang="en-US" altLang="ko-KR" dirty="0" err="1" smtClean="0"/>
-              <a:t>UActionInstance</a:t>
-            </a:r>
-            <a:r>
-              <a:rPr lang="ko-KR" altLang="en-US" dirty="0" smtClean="0"/>
-              <a:t>에</a:t>
-            </a:r>
-            <a:endParaRPr lang="en-US" altLang="ko-KR" dirty="0" smtClean="0"/>
-          </a:p>
-          <a:p>
-            <a:pPr algn="ctr"/>
-            <a:r>
-              <a:rPr lang="ko-KR" altLang="en-US" dirty="0" smtClean="0"/>
-              <a:t>스킬 적용하는 코드</a:t>
-            </a:r>
-            <a:endParaRPr lang="ko-KR" altLang="en-US" dirty="0"/>
-          </a:p>
-        </p:txBody>
-      </p:sp>
-      <p:sp>
-        <p:nvSpPr>
-          <p:cNvPr id="17" name="직사각형 16"/>
-          <p:cNvSpPr/>
+      </p:pic>
+      <p:pic>
+        <p:nvPicPr>
+          <p:cNvPr id="3" name="그림 2"/>
+          <p:cNvPicPr>
+            <a:picLocks noChangeAspect="1"/>
+          </p:cNvPicPr>
           <p:nvPr/>
-        </p:nvSpPr>
+        </p:nvPicPr>
+        <p:blipFill>
+          <a:blip r:embed="rId4" cstate="print">
+            <a:extLst>
+              <a:ext uri="{28A0092B-C50C-407E-A947-70E740481C1C}">
+                <a14:useLocalDpi xmlns:a14="http://schemas.microsoft.com/office/drawing/2010/main" val="0"/>
+              </a:ext>
+            </a:extLst>
+          </a:blip>
+          <a:stretch>
+            <a:fillRect/>
+          </a:stretch>
+        </p:blipFill>
         <p:spPr>
           <a:xfrm>
-            <a:off x="6666333" y="3488942"/>
-            <a:ext cx="5179769" cy="2856854"/>
+            <a:off x="6654937" y="3957826"/>
+            <a:ext cx="3717499" cy="2501587"/>
           </a:xfrm>
           <a:prstGeom prst="rect">
             <a:avLst/>
           </a:prstGeom>
         </p:spPr>
-        <p:style>
-          <a:lnRef idx="2">
-            <a:schemeClr val="accent1">
-              <a:shade val="50000"/>
-            </a:schemeClr>
-          </a:lnRef>
-          <a:fillRef idx="1">
-            <a:schemeClr val="accent1"/>
-          </a:fillRef>
-          <a:effectRef idx="0">
-            <a:schemeClr val="accent1"/>
-          </a:effectRef>
-          <a:fontRef idx="minor">
-            <a:schemeClr val="lt1"/>
-          </a:fontRef>
-        </p:style>
-        <p:txBody>
-          <a:bodyPr rtlCol="0" anchor="ctr"/>
-          <a:lstStyle/>
-          <a:p>
-            <a:pPr algn="ctr"/>
-            <a:r>
-              <a:rPr lang="ko-KR" altLang="en-US" dirty="0" smtClean="0"/>
-              <a:t>스킬 적용 구현 예시</a:t>
-            </a:r>
-            <a:endParaRPr lang="ko-KR" altLang="en-US" dirty="0"/>
-          </a:p>
-        </p:txBody>
-      </p:sp>
+      </p:pic>
     </p:spTree>
     <p:extLst>
       <p:ext uri="{BB962C8B-B14F-4D97-AF65-F5344CB8AC3E}">
@@ -23239,50 +23115,36 @@
           </a:p>
         </p:txBody>
       </p:sp>
-      <p:sp>
-        <p:nvSpPr>
-          <p:cNvPr id="21" name="직사각형 20"/>
-          <p:cNvSpPr/>
+      <p:pic>
+        <p:nvPicPr>
+          <p:cNvPr id="2" name="그림 1"/>
+          <p:cNvPicPr>
+            <a:picLocks noChangeAspect="1"/>
+          </p:cNvPicPr>
           <p:nvPr/>
-        </p:nvSpPr>
+        </p:nvPicPr>
+        <p:blipFill>
+          <a:blip r:embed="rId3" cstate="print">
+            <a:extLst>
+              <a:ext uri="{28A0092B-C50C-407E-A947-70E740481C1C}">
+                <a14:useLocalDpi xmlns:a14="http://schemas.microsoft.com/office/drawing/2010/main" val="0"/>
+              </a:ext>
+            </a:extLst>
+          </a:blip>
+          <a:stretch>
+            <a:fillRect/>
+          </a:stretch>
+        </p:blipFill>
         <p:spPr>
           <a:xfrm>
-            <a:off x="6666333" y="2221324"/>
-            <a:ext cx="5179769" cy="2856854"/>
+            <a:off x="6656807" y="315047"/>
+            <a:ext cx="4161365" cy="6157822"/>
           </a:xfrm>
           <a:prstGeom prst="rect">
             <a:avLst/>
           </a:prstGeom>
         </p:spPr>
-        <p:style>
-          <a:lnRef idx="2">
-            <a:schemeClr val="accent1">
-              <a:shade val="50000"/>
-            </a:schemeClr>
-          </a:lnRef>
-          <a:fillRef idx="1">
-            <a:schemeClr val="accent1"/>
-          </a:fillRef>
-          <a:effectRef idx="0">
-            <a:schemeClr val="accent1"/>
-          </a:effectRef>
-          <a:fontRef idx="minor">
-            <a:schemeClr val="lt1"/>
-          </a:fontRef>
-        </p:style>
-        <p:txBody>
-          <a:bodyPr rtlCol="0" anchor="ctr"/>
-          <a:lstStyle/>
-          <a:p>
-            <a:pPr algn="ctr"/>
-            <a:r>
-              <a:rPr lang="ko-KR" altLang="en-US" dirty="0" smtClean="0"/>
-              <a:t>구현 코드</a:t>
-            </a:r>
-            <a:endParaRPr lang="ko-KR" altLang="en-US" dirty="0"/>
-          </a:p>
-        </p:txBody>
-      </p:sp>
+      </p:pic>
     </p:spTree>
     <p:extLst>
       <p:ext uri="{BB962C8B-B14F-4D97-AF65-F5344CB8AC3E}">
@@ -23888,6 +23750,178 @@
               <a:latin typeface="Noto Sans KR ExtraBold" panose="020B0200000000000000" pitchFamily="34" charset="-128"/>
               <a:ea typeface="Noto Sans KR ExtraBold" panose="020B0200000000000000" pitchFamily="34" charset="-128"/>
             </a:endParaRPr>
+          </a:p>
+        </p:txBody>
+      </p:sp>
+      <p:pic>
+        <p:nvPicPr>
+          <p:cNvPr id="2" name="그림 1"/>
+          <p:cNvPicPr>
+            <a:picLocks noChangeAspect="1"/>
+          </p:cNvPicPr>
+          <p:nvPr/>
+        </p:nvPicPr>
+        <p:blipFill>
+          <a:blip r:embed="rId3" cstate="print">
+            <a:extLst>
+              <a:ext uri="{28A0092B-C50C-407E-A947-70E740481C1C}">
+                <a14:useLocalDpi xmlns:a14="http://schemas.microsoft.com/office/drawing/2010/main" val="0"/>
+              </a:ext>
+            </a:extLst>
+          </a:blip>
+          <a:stretch>
+            <a:fillRect/>
+          </a:stretch>
+        </p:blipFill>
+        <p:spPr>
+          <a:xfrm>
+            <a:off x="540000" y="4292322"/>
+            <a:ext cx="3013376" cy="1419344"/>
+          </a:xfrm>
+          <a:prstGeom prst="rect">
+            <a:avLst/>
+          </a:prstGeom>
+        </p:spPr>
+      </p:pic>
+      <p:pic>
+        <p:nvPicPr>
+          <p:cNvPr id="16" name="그림 15"/>
+          <p:cNvPicPr>
+            <a:picLocks noChangeAspect="1"/>
+          </p:cNvPicPr>
+          <p:nvPr/>
+        </p:nvPicPr>
+        <p:blipFill>
+          <a:blip r:embed="rId4" cstate="print">
+            <a:extLst>
+              <a:ext uri="{28A0092B-C50C-407E-A947-70E740481C1C}">
+                <a14:useLocalDpi xmlns:a14="http://schemas.microsoft.com/office/drawing/2010/main" val="0"/>
+              </a:ext>
+            </a:extLst>
+          </a:blip>
+          <a:stretch>
+            <a:fillRect/>
+          </a:stretch>
+        </p:blipFill>
+        <p:spPr>
+          <a:xfrm>
+            <a:off x="6675857" y="315047"/>
+            <a:ext cx="4367440" cy="2446576"/>
+          </a:xfrm>
+          <a:prstGeom prst="rect">
+            <a:avLst/>
+          </a:prstGeom>
+        </p:spPr>
+      </p:pic>
+      <p:pic>
+        <p:nvPicPr>
+          <p:cNvPr id="18" name="그림 17"/>
+          <p:cNvPicPr>
+            <a:picLocks noChangeAspect="1"/>
+          </p:cNvPicPr>
+          <p:nvPr/>
+        </p:nvPicPr>
+        <p:blipFill>
+          <a:blip r:embed="rId5" cstate="print">
+            <a:extLst>
+              <a:ext uri="{28A0092B-C50C-407E-A947-70E740481C1C}">
+                <a14:useLocalDpi xmlns:a14="http://schemas.microsoft.com/office/drawing/2010/main" val="0"/>
+              </a:ext>
+            </a:extLst>
+          </a:blip>
+          <a:stretch>
+            <a:fillRect/>
+          </a:stretch>
+        </p:blipFill>
+        <p:spPr>
+          <a:xfrm>
+            <a:off x="6675857" y="4554847"/>
+            <a:ext cx="4946400" cy="1796934"/>
+          </a:xfrm>
+          <a:prstGeom prst="rect">
+            <a:avLst/>
+          </a:prstGeom>
+        </p:spPr>
+      </p:pic>
+      <p:pic>
+        <p:nvPicPr>
+          <p:cNvPr id="19" name="그림 18"/>
+          <p:cNvPicPr>
+            <a:picLocks noChangeAspect="1"/>
+          </p:cNvPicPr>
+          <p:nvPr/>
+        </p:nvPicPr>
+        <p:blipFill>
+          <a:blip r:embed="rId6" cstate="print">
+            <a:extLst>
+              <a:ext uri="{28A0092B-C50C-407E-A947-70E740481C1C}">
+                <a14:useLocalDpi xmlns:a14="http://schemas.microsoft.com/office/drawing/2010/main" val="0"/>
+              </a:ext>
+            </a:extLst>
+          </a:blip>
+          <a:stretch>
+            <a:fillRect/>
+          </a:stretch>
+        </p:blipFill>
+        <p:spPr>
+          <a:xfrm>
+            <a:off x="6675857" y="2858369"/>
+            <a:ext cx="4800600" cy="1563474"/>
+          </a:xfrm>
+          <a:prstGeom prst="rect">
+            <a:avLst/>
+          </a:prstGeom>
+        </p:spPr>
+      </p:pic>
+      <p:sp>
+        <p:nvSpPr>
+          <p:cNvPr id="21" name="직사각형 20"/>
+          <p:cNvSpPr/>
+          <p:nvPr/>
+        </p:nvSpPr>
+        <p:spPr>
+          <a:xfrm>
+            <a:off x="540000" y="2512695"/>
+            <a:ext cx="5555999" cy="1499475"/>
+          </a:xfrm>
+          <a:prstGeom prst="rect">
+            <a:avLst/>
+          </a:prstGeom>
+        </p:spPr>
+        <p:style>
+          <a:lnRef idx="2">
+            <a:schemeClr val="accent1">
+              <a:shade val="50000"/>
+            </a:schemeClr>
+          </a:lnRef>
+          <a:fillRef idx="1">
+            <a:schemeClr val="accent1"/>
+          </a:fillRef>
+          <a:effectRef idx="0">
+            <a:schemeClr val="accent1"/>
+          </a:effectRef>
+          <a:fontRef idx="minor">
+            <a:schemeClr val="lt1"/>
+          </a:fontRef>
+        </p:style>
+        <p:txBody>
+          <a:bodyPr rtlCol="0" anchor="ctr"/>
+          <a:lstStyle/>
+          <a:p>
+            <a:pPr algn="ctr"/>
+            <a:r>
+              <a:rPr lang="en-US" altLang="ko-KR" dirty="0" err="1" smtClean="0"/>
+              <a:t>SaveLoad</a:t>
+            </a:r>
+            <a:r>
+              <a:rPr lang="en-US" altLang="ko-KR" dirty="0" smtClean="0"/>
+              <a:t> </a:t>
+            </a:r>
+            <a:r>
+              <a:rPr lang="ko-KR" altLang="en-US" dirty="0" smtClean="0"/>
+              <a:t>관련 클래스 구조</a:t>
+            </a:r>
+            <a:endParaRPr lang="ko-KR" altLang="en-US" dirty="0"/>
           </a:p>
         </p:txBody>
       </p:sp>
@@ -25501,19 +25535,7 @@
                 <a:latin typeface="Noto Sans KR Medium" panose="020B0200000000000000" pitchFamily="34" charset="-128"/>
                 <a:ea typeface="Noto Sans KR Medium" panose="020B0200000000000000" pitchFamily="34" charset="-128"/>
               </a:rPr>
-              <a:t>일반 </a:t>
-            </a:r>
-            <a:r>
-              <a:rPr lang="ko-KR" altLang="en-US" sz="1000" dirty="0" smtClean="0">
-                <a:solidFill>
-                  <a:schemeClr val="bg1">
-                    <a:lumMod val="95000"/>
-                  </a:schemeClr>
-                </a:solidFill>
-                <a:latin typeface="Noto Sans KR Medium" panose="020B0200000000000000" pitchFamily="34" charset="-128"/>
-                <a:ea typeface="Noto Sans KR Medium" panose="020B0200000000000000" pitchFamily="34" charset="-128"/>
-              </a:rPr>
-              <a:t>상태</a:t>
+              <a:t>일반 상태</a:t>
             </a:r>
             <a:endParaRPr lang="en-US" altLang="ko-KR" sz="1000" dirty="0" smtClean="0">
               <a:solidFill>
@@ -25722,19 +25744,7 @@
                 <a:latin typeface="Noto Sans KR Medium" panose="020B0200000000000000" pitchFamily="34" charset="-128"/>
                 <a:ea typeface="Noto Sans KR Medium" panose="020B0200000000000000" pitchFamily="34" charset="-128"/>
               </a:rPr>
-              <a:t>공격 </a:t>
-            </a:r>
-            <a:r>
-              <a:rPr lang="ko-KR" altLang="en-US" sz="1000" dirty="0" smtClean="0">
-                <a:solidFill>
-                  <a:schemeClr val="bg1">
-                    <a:lumMod val="95000"/>
-                  </a:schemeClr>
-                </a:solidFill>
-                <a:latin typeface="Noto Sans KR Medium" panose="020B0200000000000000" pitchFamily="34" charset="-128"/>
-                <a:ea typeface="Noto Sans KR Medium" panose="020B0200000000000000" pitchFamily="34" charset="-128"/>
-              </a:rPr>
-              <a:t>상태</a:t>
+              <a:t>공격 상태</a:t>
             </a:r>
             <a:endParaRPr lang="en-US" altLang="ko-KR" sz="1000" dirty="0" smtClean="0">
               <a:solidFill>
@@ -25925,31 +25935,7 @@
                 <a:latin typeface="Noto Sans KR Medium" panose="020B0200000000000000" pitchFamily="34" charset="-128"/>
                 <a:ea typeface="Noto Sans KR Medium" panose="020B0200000000000000" pitchFamily="34" charset="-128"/>
               </a:rPr>
-              <a:t>추적 불가한 </a:t>
-            </a:r>
-            <a:r>
-              <a:rPr lang="ko-KR" altLang="en-US" sz="1000" dirty="0" smtClean="0">
-                <a:solidFill>
-                  <a:schemeClr val="bg1">
-                    <a:lumMod val="95000"/>
-                  </a:schemeClr>
-                </a:solidFill>
-                <a:latin typeface="Noto Sans KR Medium" panose="020B0200000000000000" pitchFamily="34" charset="-128"/>
-                <a:ea typeface="Noto Sans KR Medium" panose="020B0200000000000000" pitchFamily="34" charset="-128"/>
-              </a:rPr>
-              <a:t>경우 일정 </a:t>
-            </a:r>
-            <a:r>
-              <a:rPr lang="ko-KR" altLang="en-US" sz="1000" dirty="0" smtClean="0">
-                <a:solidFill>
-                  <a:schemeClr val="bg1">
-                    <a:lumMod val="95000"/>
-                  </a:schemeClr>
-                </a:solidFill>
-                <a:latin typeface="Noto Sans KR Medium" panose="020B0200000000000000" pitchFamily="34" charset="-128"/>
-                <a:ea typeface="Noto Sans KR Medium" panose="020B0200000000000000" pitchFamily="34" charset="-128"/>
-              </a:rPr>
-              <a:t>시간 동안 적에게 다가가지 못하는 상황일 때</a:t>
+              <a:t>추적 불가한 경우 일정 시간 동안 적에게 다가가지 못하는 상황일 때</a:t>
             </a:r>
             <a:r>
               <a:rPr lang="en-US" altLang="ko-KR" sz="1000" dirty="0" smtClean="0">
@@ -27474,19 +27460,7 @@
                 <a:latin typeface="Noto Sans KR Medium" panose="020B0200000000000000" pitchFamily="34" charset="-128"/>
                 <a:ea typeface="Noto Sans KR Medium" panose="020B0200000000000000" pitchFamily="34" charset="-128"/>
               </a:rPr>
-              <a:t>일반 </a:t>
-            </a:r>
-            <a:r>
-              <a:rPr lang="ko-KR" altLang="en-US" sz="1000" dirty="0" smtClean="0">
-                <a:solidFill>
-                  <a:schemeClr val="bg1">
-                    <a:lumMod val="95000"/>
-                  </a:schemeClr>
-                </a:solidFill>
-                <a:latin typeface="Noto Sans KR Medium" panose="020B0200000000000000" pitchFamily="34" charset="-128"/>
-                <a:ea typeface="Noto Sans KR Medium" panose="020B0200000000000000" pitchFamily="34" charset="-128"/>
-              </a:rPr>
-              <a:t>상태</a:t>
+              <a:t>일반 상태</a:t>
             </a:r>
             <a:endParaRPr lang="en-US" altLang="ko-KR" sz="1000" dirty="0" smtClean="0">
               <a:solidFill>
@@ -27737,19 +27711,7 @@
                 <a:latin typeface="Noto Sans KR Medium" panose="020B0200000000000000" pitchFamily="34" charset="-128"/>
                 <a:ea typeface="Noto Sans KR Medium" panose="020B0200000000000000" pitchFamily="34" charset="-128"/>
               </a:rPr>
-              <a:t>공격 </a:t>
-            </a:r>
-            <a:r>
-              <a:rPr lang="ko-KR" altLang="en-US" sz="1000" dirty="0" smtClean="0">
-                <a:solidFill>
-                  <a:schemeClr val="bg1">
-                    <a:lumMod val="95000"/>
-                  </a:schemeClr>
-                </a:solidFill>
-                <a:latin typeface="Noto Sans KR Medium" panose="020B0200000000000000" pitchFamily="34" charset="-128"/>
-                <a:ea typeface="Noto Sans KR Medium" panose="020B0200000000000000" pitchFamily="34" charset="-128"/>
-              </a:rPr>
-              <a:t>상태</a:t>
+              <a:t>공격 상태</a:t>
             </a:r>
             <a:endParaRPr lang="en-US" altLang="ko-KR" sz="1000" dirty="0" smtClean="0">
               <a:solidFill>
@@ -28027,19 +27989,7 @@
                 <a:latin typeface="Noto Sans KR Medium" panose="020B0200000000000000" pitchFamily="34" charset="-128"/>
                 <a:ea typeface="Noto Sans KR Medium" panose="020B0200000000000000" pitchFamily="34" charset="-128"/>
               </a:rPr>
-              <a:t> </a:t>
-            </a:r>
-            <a:r>
-              <a:rPr lang="ko-KR" altLang="en-US" sz="1000" dirty="0" smtClean="0">
-                <a:solidFill>
-                  <a:schemeClr val="bg1">
-                    <a:lumMod val="95000"/>
-                  </a:schemeClr>
-                </a:solidFill>
-                <a:latin typeface="Noto Sans KR Medium" panose="020B0200000000000000" pitchFamily="34" charset="-128"/>
-                <a:ea typeface="Noto Sans KR Medium" panose="020B0200000000000000" pitchFamily="34" charset="-128"/>
-              </a:rPr>
-              <a:t>수행합니다</a:t>
+              <a:t> 수행합니다</a:t>
             </a:r>
             <a:r>
               <a:rPr lang="en-US" altLang="ko-KR" sz="1000" dirty="0" smtClean="0">
@@ -28558,31 +28508,7 @@
                 <a:latin typeface="Noto Sans KR Medium" panose="020B0200000000000000" pitchFamily="34" charset="-128"/>
                 <a:ea typeface="Noto Sans KR Medium" panose="020B0200000000000000" pitchFamily="34" charset="-128"/>
               </a:rPr>
-              <a:t>스테이지는 몇 개의 </a:t>
-            </a:r>
-            <a:r>
-              <a:rPr lang="ko-KR" altLang="en-US" sz="1000" dirty="0" smtClean="0">
-                <a:solidFill>
-                  <a:schemeClr val="bg1">
-                    <a:lumMod val="95000"/>
-                  </a:schemeClr>
-                </a:solidFill>
-                <a:latin typeface="Noto Sans KR Medium" panose="020B0200000000000000" pitchFamily="34" charset="-128"/>
-                <a:ea typeface="Noto Sans KR Medium" panose="020B0200000000000000" pitchFamily="34" charset="-128"/>
-              </a:rPr>
-              <a:t>구역으로 구성되어 </a:t>
-            </a:r>
-            <a:r>
-              <a:rPr lang="ko-KR" altLang="en-US" sz="1000" dirty="0" smtClean="0">
-                <a:solidFill>
-                  <a:schemeClr val="bg1">
-                    <a:lumMod val="95000"/>
-                  </a:schemeClr>
-                </a:solidFill>
-                <a:latin typeface="Noto Sans KR Medium" panose="020B0200000000000000" pitchFamily="34" charset="-128"/>
-                <a:ea typeface="Noto Sans KR Medium" panose="020B0200000000000000" pitchFamily="34" charset="-128"/>
-              </a:rPr>
-              <a:t>있고</a:t>
+              <a:t>스테이지는 몇 개의 구역으로 구성되어 있고</a:t>
             </a:r>
             <a:r>
               <a:rPr lang="en-US" altLang="ko-KR" sz="1000" dirty="0" smtClean="0">
@@ -28630,19 +28556,7 @@
                 <a:latin typeface="Noto Sans KR Medium" panose="020B0200000000000000" pitchFamily="34" charset="-128"/>
                 <a:ea typeface="Noto Sans KR Medium" panose="020B0200000000000000" pitchFamily="34" charset="-128"/>
               </a:rPr>
-              <a:t> 스테이지 </a:t>
-            </a:r>
-            <a:r>
-              <a:rPr lang="ko-KR" altLang="en-US" sz="1000" dirty="0" smtClean="0">
-                <a:solidFill>
-                  <a:schemeClr val="bg1">
-                    <a:lumMod val="95000"/>
-                  </a:schemeClr>
-                </a:solidFill>
-                <a:latin typeface="Noto Sans KR Medium" panose="020B0200000000000000" pitchFamily="34" charset="-128"/>
-                <a:ea typeface="Noto Sans KR Medium" panose="020B0200000000000000" pitchFamily="34" charset="-128"/>
-              </a:rPr>
-              <a:t>종료됩니다</a:t>
+              <a:t> 스테이지 종료됩니다</a:t>
             </a:r>
             <a:r>
               <a:rPr lang="en-US" altLang="ko-KR" sz="1000" dirty="0" smtClean="0">
@@ -28704,19 +28618,7 @@
                 <a:latin typeface="Noto Sans KR Medium" panose="020B0200000000000000" pitchFamily="34" charset="-128"/>
                 <a:ea typeface="Noto Sans KR Medium" panose="020B0200000000000000" pitchFamily="34" charset="-128"/>
               </a:rPr>
-              <a:t>를 부여하여 각각의 구역을 </a:t>
-            </a:r>
-            <a:r>
-              <a:rPr lang="ko-KR" altLang="en-US" sz="1000" dirty="0" smtClean="0">
-                <a:solidFill>
-                  <a:schemeClr val="bg1">
-                    <a:lumMod val="95000"/>
-                  </a:schemeClr>
-                </a:solidFill>
-                <a:latin typeface="Noto Sans KR Medium" panose="020B0200000000000000" pitchFamily="34" charset="-128"/>
-                <a:ea typeface="Noto Sans KR Medium" panose="020B0200000000000000" pitchFamily="34" charset="-128"/>
-              </a:rPr>
-              <a:t>표시합니다</a:t>
+              <a:t>를 부여하여 각각의 구역을 표시합니다</a:t>
             </a:r>
             <a:r>
               <a:rPr lang="en-US" altLang="ko-KR" sz="1000" dirty="0" smtClean="0">
@@ -28825,19 +28727,7 @@
                 <a:latin typeface="Noto Sans KR Medium" panose="020B0200000000000000" pitchFamily="34" charset="-128"/>
                 <a:ea typeface="Noto Sans KR Medium" panose="020B0200000000000000" pitchFamily="34" charset="-128"/>
               </a:rPr>
-              <a:t> </a:t>
-            </a:r>
-            <a:r>
-              <a:rPr lang="ko-KR" altLang="en-US" sz="1000" dirty="0" smtClean="0">
-                <a:solidFill>
-                  <a:schemeClr val="bg1">
-                    <a:lumMod val="95000"/>
-                  </a:schemeClr>
-                </a:solidFill>
-                <a:latin typeface="Noto Sans KR Medium" panose="020B0200000000000000" pitchFamily="34" charset="-128"/>
-                <a:ea typeface="Noto Sans KR Medium" panose="020B0200000000000000" pitchFamily="34" charset="-128"/>
-              </a:rPr>
-              <a:t>생성합니다</a:t>
+              <a:t> 생성합니다</a:t>
             </a:r>
             <a:r>
               <a:rPr lang="en-US" altLang="ko-KR" sz="1000" dirty="0" smtClean="0">
@@ -28851,6 +28741,58 @@
               </a:rPr>
               <a:t>.</a:t>
             </a:r>
+          </a:p>
+          <a:p>
+            <a:r>
+              <a:rPr lang="ko-KR" altLang="en-US" sz="1000" dirty="0" smtClean="0">
+                <a:solidFill>
+                  <a:schemeClr val="bg1">
+                    <a:lumMod val="95000"/>
+                  </a:schemeClr>
+                </a:solidFill>
+                <a:latin typeface="Noto Sans KR Medium" panose="020B0200000000000000" pitchFamily="34" charset="-128"/>
+                <a:ea typeface="Noto Sans KR Medium" panose="020B0200000000000000" pitchFamily="34" charset="-128"/>
+              </a:rPr>
+              <a:t>생성된 </a:t>
+            </a:r>
+            <a:r>
+              <a:rPr lang="ko-KR" altLang="en-US" sz="1000" dirty="0" err="1" smtClean="0">
+                <a:solidFill>
+                  <a:schemeClr val="bg1">
+                    <a:lumMod val="95000"/>
+                  </a:schemeClr>
+                </a:solidFill>
+                <a:latin typeface="Noto Sans KR Medium" panose="020B0200000000000000" pitchFamily="34" charset="-128"/>
+                <a:ea typeface="Noto Sans KR Medium" panose="020B0200000000000000" pitchFamily="34" charset="-128"/>
+              </a:rPr>
+              <a:t>몬스터들을</a:t>
+            </a:r>
+            <a:r>
+              <a:rPr lang="ko-KR" altLang="en-US" sz="1000" dirty="0" smtClean="0">
+                <a:solidFill>
+                  <a:schemeClr val="bg1">
+                    <a:lumMod val="95000"/>
+                  </a:schemeClr>
+                </a:solidFill>
+                <a:latin typeface="Noto Sans KR Medium" panose="020B0200000000000000" pitchFamily="34" charset="-128"/>
+                <a:ea typeface="Noto Sans KR Medium" panose="020B0200000000000000" pitchFamily="34" charset="-128"/>
+              </a:rPr>
+              <a:t> 모두 쓰러뜨리면 해당 구역이 완료됩니다</a:t>
+            </a:r>
+            <a:r>
+              <a:rPr lang="en-US" altLang="ko-KR" sz="1000" dirty="0" smtClean="0">
+                <a:solidFill>
+                  <a:schemeClr val="bg1">
+                    <a:lumMod val="95000"/>
+                  </a:schemeClr>
+                </a:solidFill>
+                <a:latin typeface="Noto Sans KR Medium" panose="020B0200000000000000" pitchFamily="34" charset="-128"/>
+                <a:ea typeface="Noto Sans KR Medium" panose="020B0200000000000000" pitchFamily="34" charset="-128"/>
+              </a:rPr>
+              <a:t>.</a:t>
+            </a:r>
+          </a:p>
+          <a:p>
             <a:endParaRPr lang="en-US" altLang="ko-KR" sz="1000" dirty="0" smtClean="0">
               <a:solidFill>
                 <a:schemeClr val="bg1">
@@ -28872,7 +28814,7 @@
                 <a:latin typeface="Noto Sans KR Medium" panose="020B0200000000000000" pitchFamily="34" charset="-128"/>
                 <a:ea typeface="Noto Sans KR Medium" panose="020B0200000000000000" pitchFamily="34" charset="-128"/>
               </a:rPr>
-              <a:t>생성된 </a:t>
+              <a:t>레벨에서 생성할 </a:t>
             </a:r>
             <a:r>
               <a:rPr lang="ko-KR" altLang="en-US" sz="1000" dirty="0" err="1" smtClean="0">
@@ -28884,46 +28826,44 @@
                 <a:latin typeface="Noto Sans KR Medium" panose="020B0200000000000000" pitchFamily="34" charset="-128"/>
                 <a:ea typeface="Noto Sans KR Medium" panose="020B0200000000000000" pitchFamily="34" charset="-128"/>
               </a:rPr>
-              <a:t>몬스터들을</a:t>
-            </a:r>
-            <a:r>
-              <a:rPr lang="ko-KR" altLang="en-US" sz="1000" dirty="0" smtClean="0">
-                <a:solidFill>
-                  <a:schemeClr val="bg1">
-                    <a:lumMod val="95000"/>
-                  </a:schemeClr>
-                </a:solidFill>
-                <a:latin typeface="Noto Sans KR Medium" panose="020B0200000000000000" pitchFamily="34" charset="-128"/>
-                <a:ea typeface="Noto Sans KR Medium" panose="020B0200000000000000" pitchFamily="34" charset="-128"/>
-              </a:rPr>
-              <a:t> 모두 쓰러뜨리면 해당 구역이 </a:t>
-            </a:r>
-            <a:r>
-              <a:rPr lang="ko-KR" altLang="en-US" sz="1000" dirty="0" smtClean="0">
-                <a:solidFill>
-                  <a:schemeClr val="bg1">
-                    <a:lumMod val="95000"/>
-                  </a:schemeClr>
-                </a:solidFill>
-                <a:latin typeface="Noto Sans KR Medium" panose="020B0200000000000000" pitchFamily="34" charset="-128"/>
-                <a:ea typeface="Noto Sans KR Medium" panose="020B0200000000000000" pitchFamily="34" charset="-128"/>
-              </a:rPr>
-              <a:t>완료됩니다</a:t>
-            </a:r>
-            <a:r>
-              <a:rPr lang="en-US" altLang="ko-KR" sz="1000" dirty="0" smtClean="0">
-                <a:solidFill>
-                  <a:schemeClr val="bg1">
-                    <a:lumMod val="95000"/>
-                  </a:schemeClr>
-                </a:solidFill>
-                <a:latin typeface="Noto Sans KR Medium" panose="020B0200000000000000" pitchFamily="34" charset="-128"/>
-                <a:ea typeface="Noto Sans KR Medium" panose="020B0200000000000000" pitchFamily="34" charset="-128"/>
-              </a:rPr>
-              <a:t>.</a:t>
-            </a:r>
-          </a:p>
-          <a:p>
+              <a:t>몬스터들은</a:t>
+            </a:r>
+            <a:r>
+              <a:rPr lang="ko-KR" altLang="en-US" sz="1000" dirty="0" smtClean="0">
+                <a:solidFill>
+                  <a:schemeClr val="bg1">
+                    <a:lumMod val="95000"/>
+                  </a:schemeClr>
+                </a:solidFill>
+                <a:latin typeface="Noto Sans KR Medium" panose="020B0200000000000000" pitchFamily="34" charset="-128"/>
+                <a:ea typeface="Noto Sans KR Medium" panose="020B0200000000000000" pitchFamily="34" charset="-128"/>
+              </a:rPr>
+              <a:t> 각 구역에서 새로 </a:t>
+            </a:r>
+            <a:r>
+              <a:rPr lang="ko-KR" altLang="en-US" sz="1000" dirty="0" err="1" smtClean="0">
+                <a:solidFill>
+                  <a:schemeClr val="bg1">
+                    <a:lumMod val="95000"/>
+                  </a:schemeClr>
+                </a:solidFill>
+                <a:latin typeface="Noto Sans KR Medium" panose="020B0200000000000000" pitchFamily="34" charset="-128"/>
+                <a:ea typeface="Noto Sans KR Medium" panose="020B0200000000000000" pitchFamily="34" charset="-128"/>
+              </a:rPr>
+              <a:t>스폰하지</a:t>
+            </a:r>
+            <a:r>
+              <a:rPr lang="ko-KR" altLang="en-US" sz="1000" dirty="0" smtClean="0">
+                <a:solidFill>
+                  <a:schemeClr val="bg1">
+                    <a:lumMod val="95000"/>
+                  </a:schemeClr>
+                </a:solidFill>
+                <a:latin typeface="Noto Sans KR Medium" panose="020B0200000000000000" pitchFamily="34" charset="-128"/>
+                <a:ea typeface="Noto Sans KR Medium" panose="020B0200000000000000" pitchFamily="34" charset="-128"/>
+              </a:rPr>
+              <a:t> 않고 </a:t>
+            </a:r>
             <a:endParaRPr lang="en-US" altLang="ko-KR" sz="1000" dirty="0" smtClean="0">
               <a:solidFill>
                 <a:schemeClr val="bg1">
@@ -28936,89 +28876,6 @@
           </a:p>
           <a:p>
             <a:r>
-              <a:rPr lang="ko-KR" altLang="en-US" sz="1000" dirty="0" smtClean="0">
-                <a:solidFill>
-                  <a:schemeClr val="bg1">
-                    <a:lumMod val="95000"/>
-                  </a:schemeClr>
-                </a:solidFill>
-                <a:latin typeface="Noto Sans KR Medium" panose="020B0200000000000000" pitchFamily="34" charset="-128"/>
-                <a:ea typeface="Noto Sans KR Medium" panose="020B0200000000000000" pitchFamily="34" charset="-128"/>
-              </a:rPr>
-              <a:t>레벨에서 </a:t>
-            </a:r>
-            <a:r>
-              <a:rPr lang="ko-KR" altLang="en-US" sz="1000" dirty="0" smtClean="0">
-                <a:solidFill>
-                  <a:schemeClr val="bg1">
-                    <a:lumMod val="95000"/>
-                  </a:schemeClr>
-                </a:solidFill>
-                <a:latin typeface="Noto Sans KR Medium" panose="020B0200000000000000" pitchFamily="34" charset="-128"/>
-                <a:ea typeface="Noto Sans KR Medium" panose="020B0200000000000000" pitchFamily="34" charset="-128"/>
-              </a:rPr>
-              <a:t>생성할 </a:t>
-            </a:r>
-            <a:r>
-              <a:rPr lang="ko-KR" altLang="en-US" sz="1000" dirty="0" err="1" smtClean="0">
-                <a:solidFill>
-                  <a:schemeClr val="bg1">
-                    <a:lumMod val="95000"/>
-                  </a:schemeClr>
-                </a:solidFill>
-                <a:latin typeface="Noto Sans KR Medium" panose="020B0200000000000000" pitchFamily="34" charset="-128"/>
-                <a:ea typeface="Noto Sans KR Medium" panose="020B0200000000000000" pitchFamily="34" charset="-128"/>
-              </a:rPr>
-              <a:t>몬스터들은</a:t>
-            </a:r>
-            <a:r>
-              <a:rPr lang="ko-KR" altLang="en-US" sz="1000" dirty="0" smtClean="0">
-                <a:solidFill>
-                  <a:schemeClr val="bg1">
-                    <a:lumMod val="95000"/>
-                  </a:schemeClr>
-                </a:solidFill>
-                <a:latin typeface="Noto Sans KR Medium" panose="020B0200000000000000" pitchFamily="34" charset="-128"/>
-                <a:ea typeface="Noto Sans KR Medium" panose="020B0200000000000000" pitchFamily="34" charset="-128"/>
-              </a:rPr>
-              <a:t> 각 구역에서 새로 </a:t>
-            </a:r>
-            <a:r>
-              <a:rPr lang="ko-KR" altLang="en-US" sz="1000" dirty="0" err="1" smtClean="0">
-                <a:solidFill>
-                  <a:schemeClr val="bg1">
-                    <a:lumMod val="95000"/>
-                  </a:schemeClr>
-                </a:solidFill>
-                <a:latin typeface="Noto Sans KR Medium" panose="020B0200000000000000" pitchFamily="34" charset="-128"/>
-                <a:ea typeface="Noto Sans KR Medium" panose="020B0200000000000000" pitchFamily="34" charset="-128"/>
-              </a:rPr>
-              <a:t>스폰하지</a:t>
-            </a:r>
-            <a:r>
-              <a:rPr lang="ko-KR" altLang="en-US" sz="1000" dirty="0" smtClean="0">
-                <a:solidFill>
-                  <a:schemeClr val="bg1">
-                    <a:lumMod val="95000"/>
-                  </a:schemeClr>
-                </a:solidFill>
-                <a:latin typeface="Noto Sans KR Medium" panose="020B0200000000000000" pitchFamily="34" charset="-128"/>
-                <a:ea typeface="Noto Sans KR Medium" panose="020B0200000000000000" pitchFamily="34" charset="-128"/>
-              </a:rPr>
-              <a:t> 않고 </a:t>
-            </a:r>
-            <a:endParaRPr lang="en-US" altLang="ko-KR" sz="1000" dirty="0" smtClean="0">
-              <a:solidFill>
-                <a:schemeClr val="bg1">
-                  <a:lumMod val="95000"/>
-                </a:schemeClr>
-              </a:solidFill>
-              <a:latin typeface="Noto Sans KR Medium" panose="020B0200000000000000" pitchFamily="34" charset="-128"/>
-              <a:ea typeface="Noto Sans KR Medium" panose="020B0200000000000000" pitchFamily="34" charset="-128"/>
-            </a:endParaRPr>
-          </a:p>
-          <a:p>
-            <a:r>
               <a:rPr lang="en-US" altLang="ko-KR" sz="1000" dirty="0" err="1" smtClean="0">
                 <a:solidFill>
                   <a:schemeClr val="bg1">
@@ -29040,19 +28897,7 @@
                 <a:latin typeface="Noto Sans KR Medium" panose="020B0200000000000000" pitchFamily="34" charset="-128"/>
                 <a:ea typeface="Noto Sans KR Medium" panose="020B0200000000000000" pitchFamily="34" charset="-128"/>
               </a:rPr>
-              <a:t>에 </a:t>
-            </a:r>
-            <a:r>
-              <a:rPr lang="ko-KR" altLang="en-US" sz="1000" dirty="0" smtClean="0">
-                <a:solidFill>
-                  <a:schemeClr val="bg1">
-                    <a:lumMod val="95000"/>
-                  </a:schemeClr>
-                </a:solidFill>
-                <a:latin typeface="Noto Sans KR Medium" panose="020B0200000000000000" pitchFamily="34" charset="-128"/>
-                <a:ea typeface="Noto Sans KR Medium" panose="020B0200000000000000" pitchFamily="34" charset="-128"/>
-              </a:rPr>
-              <a:t>등록하여 재사용합니다</a:t>
+              <a:t>에 등록하여 재사용합니다</a:t>
             </a:r>
             <a:r>
               <a:rPr lang="en-US" altLang="ko-KR" sz="1000" dirty="0" smtClean="0">
@@ -29066,15 +28911,6 @@
               </a:rPr>
               <a:t>.</a:t>
             </a:r>
-            <a:endParaRPr lang="en-US" altLang="ko-KR" sz="1000" dirty="0" smtClean="0">
-              <a:solidFill>
-                <a:schemeClr val="bg1">
-                  <a:lumMod val="95000"/>
-                </a:schemeClr>
-              </a:solidFill>
-              <a:latin typeface="Noto Sans KR Medium" panose="020B0200000000000000" pitchFamily="34" charset="-128"/>
-              <a:ea typeface="Noto Sans KR Medium" panose="020B0200000000000000" pitchFamily="34" charset="-128"/>
-            </a:endParaRPr>
           </a:p>
         </p:txBody>
       </p:sp>
@@ -29419,19 +29255,7 @@
                 <a:latin typeface="Noto Sans KR Medium" panose="020B0200000000000000" pitchFamily="34" charset="-128"/>
                 <a:ea typeface="Noto Sans KR Medium" panose="020B0200000000000000" pitchFamily="34" charset="-128"/>
               </a:rPr>
-              <a:t>구독 모델을 확장한 이벤트 버스 방식으로 </a:t>
-            </a:r>
-            <a:r>
-              <a:rPr lang="ko-KR" altLang="en-US" sz="1000" dirty="0" smtClean="0">
-                <a:solidFill>
-                  <a:schemeClr val="bg1">
-                    <a:lumMod val="95000"/>
-                  </a:schemeClr>
-                </a:solidFill>
-                <a:latin typeface="Noto Sans KR Medium" panose="020B0200000000000000" pitchFamily="34" charset="-128"/>
-                <a:ea typeface="Noto Sans KR Medium" panose="020B0200000000000000" pitchFamily="34" charset="-128"/>
-              </a:rPr>
-              <a:t>구조를 잡았습니다</a:t>
+              <a:t>구독 모델을 확장한 이벤트 버스 방식으로 구조를 잡았습니다</a:t>
             </a:r>
             <a:r>
               <a:rPr lang="en-US" altLang="ko-KR" sz="1000" dirty="0" smtClean="0">
@@ -29445,6 +29269,94 @@
               </a:rPr>
               <a:t>.</a:t>
             </a:r>
+          </a:p>
+          <a:p>
+            <a:r>
+              <a:rPr lang="ko-KR" altLang="en-US" sz="1000" dirty="0" err="1" smtClean="0">
+                <a:solidFill>
+                  <a:schemeClr val="bg1">
+                    <a:lumMod val="95000"/>
+                  </a:schemeClr>
+                </a:solidFill>
+                <a:latin typeface="Noto Sans KR Medium" panose="020B0200000000000000" pitchFamily="34" charset="-128"/>
+                <a:ea typeface="Noto Sans KR Medium" panose="020B0200000000000000" pitchFamily="34" charset="-128"/>
+              </a:rPr>
+              <a:t>몬스터와</a:t>
+            </a:r>
+            <a:r>
+              <a:rPr lang="ko-KR" altLang="en-US" sz="1000" dirty="0" smtClean="0">
+                <a:solidFill>
+                  <a:schemeClr val="bg1">
+                    <a:lumMod val="95000"/>
+                  </a:schemeClr>
+                </a:solidFill>
+                <a:latin typeface="Noto Sans KR Medium" panose="020B0200000000000000" pitchFamily="34" charset="-128"/>
+                <a:ea typeface="Noto Sans KR Medium" panose="020B0200000000000000" pitchFamily="34" charset="-128"/>
+              </a:rPr>
+              <a:t> 같은 </a:t>
+            </a:r>
+            <a:r>
+              <a:rPr lang="ko-KR" altLang="en-US" sz="1000" dirty="0" err="1" smtClean="0">
+                <a:solidFill>
+                  <a:schemeClr val="bg1">
+                    <a:lumMod val="95000"/>
+                  </a:schemeClr>
+                </a:solidFill>
+                <a:latin typeface="Noto Sans KR Medium" panose="020B0200000000000000" pitchFamily="34" charset="-128"/>
+                <a:ea typeface="Noto Sans KR Medium" panose="020B0200000000000000" pitchFamily="34" charset="-128"/>
+              </a:rPr>
+              <a:t>액터들이</a:t>
+            </a:r>
+            <a:r>
+              <a:rPr lang="ko-KR" altLang="en-US" sz="1000" dirty="0" smtClean="0">
+                <a:solidFill>
+                  <a:schemeClr val="bg1">
+                    <a:lumMod val="95000"/>
+                  </a:schemeClr>
+                </a:solidFill>
+                <a:latin typeface="Noto Sans KR Medium" panose="020B0200000000000000" pitchFamily="34" charset="-128"/>
+                <a:ea typeface="Noto Sans KR Medium" panose="020B0200000000000000" pitchFamily="34" charset="-128"/>
+              </a:rPr>
+              <a:t> 게임 진행에 직접적 관여하지 않도록 </a:t>
+            </a:r>
+            <a:r>
+              <a:rPr lang="en-US" altLang="ko-KR" sz="1000" dirty="0" err="1" smtClean="0">
+                <a:solidFill>
+                  <a:schemeClr val="bg1">
+                    <a:lumMod val="95000"/>
+                  </a:schemeClr>
+                </a:solidFill>
+                <a:latin typeface="Noto Sans KR Medium" panose="020B0200000000000000" pitchFamily="34" charset="-128"/>
+                <a:ea typeface="Noto Sans KR Medium" panose="020B0200000000000000" pitchFamily="34" charset="-128"/>
+              </a:rPr>
+              <a:t>GameMode</a:t>
+            </a:r>
+            <a:r>
+              <a:rPr lang="ko-KR" altLang="en-US" sz="1000" dirty="0" smtClean="0">
+                <a:solidFill>
+                  <a:schemeClr val="bg1">
+                    <a:lumMod val="95000"/>
+                  </a:schemeClr>
+                </a:solidFill>
+                <a:latin typeface="Noto Sans KR Medium" panose="020B0200000000000000" pitchFamily="34" charset="-128"/>
+                <a:ea typeface="Noto Sans KR Medium" panose="020B0200000000000000" pitchFamily="34" charset="-128"/>
+              </a:rPr>
+              <a:t>를 통한 이벤트 기반으로 작업했습니다</a:t>
+            </a:r>
+            <a:r>
+              <a:rPr lang="en-US" altLang="ko-KR" sz="1000" dirty="0" smtClean="0">
+                <a:solidFill>
+                  <a:schemeClr val="bg1">
+                    <a:lumMod val="95000"/>
+                  </a:schemeClr>
+                </a:solidFill>
+                <a:latin typeface="Noto Sans KR Medium" panose="020B0200000000000000" pitchFamily="34" charset="-128"/>
+                <a:ea typeface="Noto Sans KR Medium" panose="020B0200000000000000" pitchFamily="34" charset="-128"/>
+              </a:rPr>
+              <a:t>.</a:t>
+            </a:r>
+          </a:p>
+          <a:p>
             <a:endParaRPr lang="en-US" altLang="ko-KR" sz="1000" dirty="0" smtClean="0">
               <a:solidFill>
                 <a:schemeClr val="bg1">
@@ -29457,115 +29369,17 @@
           </a:p>
           <a:p>
             <a:r>
-              <a:rPr lang="ko-KR" altLang="en-US" sz="1000" dirty="0" err="1" smtClean="0">
-                <a:solidFill>
-                  <a:schemeClr val="bg1">
-                    <a:lumMod val="95000"/>
-                  </a:schemeClr>
-                </a:solidFill>
-                <a:latin typeface="Noto Sans KR Medium" panose="020B0200000000000000" pitchFamily="34" charset="-128"/>
-                <a:ea typeface="Noto Sans KR Medium" panose="020B0200000000000000" pitchFamily="34" charset="-128"/>
-              </a:rPr>
-              <a:t>몬스터와</a:t>
-            </a:r>
-            <a:r>
-              <a:rPr lang="ko-KR" altLang="en-US" sz="1000" dirty="0" smtClean="0">
-                <a:solidFill>
-                  <a:schemeClr val="bg1">
-                    <a:lumMod val="95000"/>
-                  </a:schemeClr>
-                </a:solidFill>
-                <a:latin typeface="Noto Sans KR Medium" panose="020B0200000000000000" pitchFamily="34" charset="-128"/>
-                <a:ea typeface="Noto Sans KR Medium" panose="020B0200000000000000" pitchFamily="34" charset="-128"/>
-              </a:rPr>
-              <a:t> 같은 </a:t>
-            </a:r>
-            <a:r>
-              <a:rPr lang="ko-KR" altLang="en-US" sz="1000" dirty="0" err="1" smtClean="0">
-                <a:solidFill>
-                  <a:schemeClr val="bg1">
-                    <a:lumMod val="95000"/>
-                  </a:schemeClr>
-                </a:solidFill>
-                <a:latin typeface="Noto Sans KR Medium" panose="020B0200000000000000" pitchFamily="34" charset="-128"/>
-                <a:ea typeface="Noto Sans KR Medium" panose="020B0200000000000000" pitchFamily="34" charset="-128"/>
-              </a:rPr>
-              <a:t>액터들이</a:t>
-            </a:r>
-            <a:r>
-              <a:rPr lang="ko-KR" altLang="en-US" sz="1000" dirty="0" smtClean="0">
-                <a:solidFill>
-                  <a:schemeClr val="bg1">
-                    <a:lumMod val="95000"/>
-                  </a:schemeClr>
-                </a:solidFill>
-                <a:latin typeface="Noto Sans KR Medium" panose="020B0200000000000000" pitchFamily="34" charset="-128"/>
-                <a:ea typeface="Noto Sans KR Medium" panose="020B0200000000000000" pitchFamily="34" charset="-128"/>
-              </a:rPr>
-              <a:t> </a:t>
-            </a:r>
-            <a:r>
-              <a:rPr lang="ko-KR" altLang="en-US" sz="1000" dirty="0" smtClean="0">
-                <a:solidFill>
-                  <a:schemeClr val="bg1">
-                    <a:lumMod val="95000"/>
-                  </a:schemeClr>
-                </a:solidFill>
-                <a:latin typeface="Noto Sans KR Medium" panose="020B0200000000000000" pitchFamily="34" charset="-128"/>
-                <a:ea typeface="Noto Sans KR Medium" panose="020B0200000000000000" pitchFamily="34" charset="-128"/>
-              </a:rPr>
-              <a:t>게임 진행에 직접적 관여하지 않도록 </a:t>
-            </a:r>
-            <a:r>
-              <a:rPr lang="en-US" altLang="ko-KR" sz="1000" dirty="0" err="1" smtClean="0">
-                <a:solidFill>
-                  <a:schemeClr val="bg1">
-                    <a:lumMod val="95000"/>
-                  </a:schemeClr>
-                </a:solidFill>
-                <a:latin typeface="Noto Sans KR Medium" panose="020B0200000000000000" pitchFamily="34" charset="-128"/>
-                <a:ea typeface="Noto Sans KR Medium" panose="020B0200000000000000" pitchFamily="34" charset="-128"/>
-              </a:rPr>
-              <a:t>GameMode</a:t>
-            </a:r>
-            <a:r>
-              <a:rPr lang="ko-KR" altLang="en-US" sz="1000" dirty="0" smtClean="0">
-                <a:solidFill>
-                  <a:schemeClr val="bg1">
-                    <a:lumMod val="95000"/>
-                  </a:schemeClr>
-                </a:solidFill>
-                <a:latin typeface="Noto Sans KR Medium" panose="020B0200000000000000" pitchFamily="34" charset="-128"/>
-                <a:ea typeface="Noto Sans KR Medium" panose="020B0200000000000000" pitchFamily="34" charset="-128"/>
-              </a:rPr>
-              <a:t>를 통한 이벤트 기반으로 </a:t>
-            </a:r>
-            <a:r>
-              <a:rPr lang="ko-KR" altLang="en-US" sz="1000" dirty="0" smtClean="0">
-                <a:solidFill>
-                  <a:schemeClr val="bg1">
-                    <a:lumMod val="95000"/>
-                  </a:schemeClr>
-                </a:solidFill>
-                <a:latin typeface="Noto Sans KR Medium" panose="020B0200000000000000" pitchFamily="34" charset="-128"/>
-                <a:ea typeface="Noto Sans KR Medium" panose="020B0200000000000000" pitchFamily="34" charset="-128"/>
-              </a:rPr>
-              <a:t>작업했습니다</a:t>
-            </a:r>
-            <a:r>
-              <a:rPr lang="en-US" altLang="ko-KR" sz="1000" dirty="0" smtClean="0">
-                <a:solidFill>
-                  <a:schemeClr val="bg1">
-                    <a:lumMod val="95000"/>
-                  </a:schemeClr>
-                </a:solidFill>
-                <a:latin typeface="Noto Sans KR Medium" panose="020B0200000000000000" pitchFamily="34" charset="-128"/>
-                <a:ea typeface="Noto Sans KR Medium" panose="020B0200000000000000" pitchFamily="34" charset="-128"/>
-              </a:rPr>
-              <a:t>.</a:t>
-            </a:r>
-          </a:p>
-          <a:p>
+              <a:rPr lang="ko-KR" altLang="en-US" sz="1000" dirty="0" smtClean="0">
+                <a:solidFill>
+                  <a:schemeClr val="bg1">
+                    <a:lumMod val="95000"/>
+                  </a:schemeClr>
+                </a:solidFill>
+                <a:latin typeface="Noto Sans KR Medium" panose="020B0200000000000000" pitchFamily="34" charset="-128"/>
+                <a:ea typeface="Noto Sans KR Medium" panose="020B0200000000000000" pitchFamily="34" charset="-128"/>
+              </a:rPr>
+              <a:t>스테이지 진행에 발생하는 이벤트 종류</a:t>
+            </a:r>
             <a:endParaRPr lang="en-US" altLang="ko-KR" sz="1000" dirty="0" smtClean="0">
               <a:solidFill>
                 <a:schemeClr val="bg1">
@@ -29577,17 +29391,21 @@
             </a:endParaRPr>
           </a:p>
           <a:p>
-            <a:r>
-              <a:rPr lang="ko-KR" altLang="en-US" sz="1000" dirty="0" smtClean="0">
-                <a:solidFill>
-                  <a:schemeClr val="bg1">
-                    <a:lumMod val="95000"/>
-                  </a:schemeClr>
-                </a:solidFill>
-                <a:latin typeface="Noto Sans KR Medium" panose="020B0200000000000000" pitchFamily="34" charset="-128"/>
-                <a:ea typeface="Noto Sans KR Medium" panose="020B0200000000000000" pitchFamily="34" charset="-128"/>
-              </a:rPr>
-              <a:t>스테이지 진행에 발생하는 이벤트 종류</a:t>
+            <a:pPr marL="171450" indent="-171450">
+              <a:buFontTx/>
+              <a:buChar char="-"/>
+            </a:pPr>
+            <a:r>
+              <a:rPr lang="ko-KR" altLang="en-US" sz="1000" dirty="0" smtClean="0">
+                <a:solidFill>
+                  <a:schemeClr val="bg1">
+                    <a:lumMod val="95000"/>
+                  </a:schemeClr>
+                </a:solidFill>
+                <a:latin typeface="Noto Sans KR Medium" panose="020B0200000000000000" pitchFamily="34" charset="-128"/>
+                <a:ea typeface="Noto Sans KR Medium" panose="020B0200000000000000" pitchFamily="34" charset="-128"/>
+              </a:rPr>
+              <a:t>플레이어 사망</a:t>
             </a:r>
             <a:endParaRPr lang="en-US" altLang="ko-KR" sz="1000" dirty="0" smtClean="0">
               <a:solidFill>
@@ -29605,16 +29423,28 @@
               <a:buChar char="-"/>
             </a:pPr>
             <a:r>
-              <a:rPr lang="ko-KR" altLang="en-US" sz="1000" dirty="0" smtClean="0">
-                <a:solidFill>
-                  <a:schemeClr val="bg1">
-                    <a:lumMod val="95000"/>
-                  </a:schemeClr>
-                </a:solidFill>
-                <a:latin typeface="Noto Sans KR Medium" panose="020B0200000000000000" pitchFamily="34" charset="-128"/>
-                <a:ea typeface="Noto Sans KR Medium" panose="020B0200000000000000" pitchFamily="34" charset="-128"/>
-              </a:rPr>
-              <a:t>플레이어 사망</a:t>
+              <a:rPr lang="ko-KR" altLang="en-US" sz="1000" dirty="0" err="1" smtClean="0">
+                <a:solidFill>
+                  <a:schemeClr val="bg1">
+                    <a:lumMod val="95000"/>
+                  </a:schemeClr>
+                </a:solidFill>
+                <a:latin typeface="Noto Sans KR Medium" panose="020B0200000000000000" pitchFamily="34" charset="-128"/>
+                <a:ea typeface="Noto Sans KR Medium" panose="020B0200000000000000" pitchFamily="34" charset="-128"/>
+              </a:rPr>
+              <a:t>몬스터</a:t>
+            </a:r>
+            <a:r>
+              <a:rPr lang="ko-KR" altLang="en-US" sz="1000" dirty="0" smtClean="0">
+                <a:solidFill>
+                  <a:schemeClr val="bg1">
+                    <a:lumMod val="95000"/>
+                  </a:schemeClr>
+                </a:solidFill>
+                <a:latin typeface="Noto Sans KR Medium" panose="020B0200000000000000" pitchFamily="34" charset="-128"/>
+                <a:ea typeface="Noto Sans KR Medium" panose="020B0200000000000000" pitchFamily="34" charset="-128"/>
+              </a:rPr>
+              <a:t> 사망</a:t>
             </a:r>
             <a:endParaRPr lang="en-US" altLang="ko-KR" sz="1000" dirty="0" smtClean="0">
               <a:solidFill>
@@ -29632,28 +29462,16 @@
               <a:buChar char="-"/>
             </a:pPr>
             <a:r>
-              <a:rPr lang="ko-KR" altLang="en-US" sz="1000" dirty="0" err="1" smtClean="0">
-                <a:solidFill>
-                  <a:schemeClr val="bg1">
-                    <a:lumMod val="95000"/>
-                  </a:schemeClr>
-                </a:solidFill>
-                <a:latin typeface="Noto Sans KR Medium" panose="020B0200000000000000" pitchFamily="34" charset="-128"/>
-                <a:ea typeface="Noto Sans KR Medium" panose="020B0200000000000000" pitchFamily="34" charset="-128"/>
-              </a:rPr>
-              <a:t>몬스터</a:t>
-            </a:r>
-            <a:r>
-              <a:rPr lang="ko-KR" altLang="en-US" sz="1000" dirty="0" smtClean="0">
-                <a:solidFill>
-                  <a:schemeClr val="bg1">
-                    <a:lumMod val="95000"/>
-                  </a:schemeClr>
-                </a:solidFill>
-                <a:latin typeface="Noto Sans KR Medium" panose="020B0200000000000000" pitchFamily="34" charset="-128"/>
-                <a:ea typeface="Noto Sans KR Medium" panose="020B0200000000000000" pitchFamily="34" charset="-128"/>
-              </a:rPr>
-              <a:t> 사망</a:t>
+              <a:rPr lang="ko-KR" altLang="en-US" sz="1000" dirty="0" smtClean="0">
+                <a:solidFill>
+                  <a:schemeClr val="bg1">
+                    <a:lumMod val="95000"/>
+                  </a:schemeClr>
+                </a:solidFill>
+                <a:latin typeface="Noto Sans KR Medium" panose="020B0200000000000000" pitchFamily="34" charset="-128"/>
+                <a:ea typeface="Noto Sans KR Medium" panose="020B0200000000000000" pitchFamily="34" charset="-128"/>
+              </a:rPr>
+              <a:t>구역 완료</a:t>
             </a:r>
             <a:endParaRPr lang="en-US" altLang="ko-KR" sz="1000" dirty="0" smtClean="0">
               <a:solidFill>
@@ -29666,22 +29484,6 @@
             </a:endParaRPr>
           </a:p>
           <a:p>
-            <a:pPr marL="171450" indent="-171450">
-              <a:buFontTx/>
-              <a:buChar char="-"/>
-            </a:pPr>
-            <a:r>
-              <a:rPr lang="ko-KR" altLang="en-US" sz="1000" dirty="0" smtClean="0">
-                <a:solidFill>
-                  <a:schemeClr val="bg1">
-                    <a:lumMod val="95000"/>
-                  </a:schemeClr>
-                </a:solidFill>
-                <a:latin typeface="Noto Sans KR Medium" panose="020B0200000000000000" pitchFamily="34" charset="-128"/>
-                <a:ea typeface="Noto Sans KR Medium" panose="020B0200000000000000" pitchFamily="34" charset="-128"/>
-              </a:rPr>
-              <a:t>구역 완료</a:t>
-            </a:r>
             <a:endParaRPr lang="en-US" altLang="ko-KR" sz="1000" dirty="0" smtClean="0">
               <a:solidFill>
                 <a:schemeClr val="bg1">
@@ -29693,6 +29495,359 @@
             </a:endParaRPr>
           </a:p>
           <a:p>
+            <a:r>
+              <a:rPr lang="ko-KR" altLang="en-US" sz="1000" dirty="0" smtClean="0">
+                <a:solidFill>
+                  <a:schemeClr val="bg1">
+                    <a:lumMod val="95000"/>
+                  </a:schemeClr>
+                </a:solidFill>
+                <a:latin typeface="Noto Sans KR Medium" panose="020B0200000000000000" pitchFamily="34" charset="-128"/>
+                <a:ea typeface="Noto Sans KR Medium" panose="020B0200000000000000" pitchFamily="34" charset="-128"/>
+              </a:rPr>
+              <a:t>구역 완료 정보 같이 진행에 필요한 주된 데이터는 </a:t>
+            </a:r>
+            <a:r>
+              <a:rPr lang="en-US" altLang="ko-KR" sz="1000" dirty="0" err="1" smtClean="0">
+                <a:solidFill>
+                  <a:schemeClr val="bg1">
+                    <a:lumMod val="95000"/>
+                  </a:schemeClr>
+                </a:solidFill>
+                <a:latin typeface="Noto Sans KR Medium" panose="020B0200000000000000" pitchFamily="34" charset="-128"/>
+                <a:ea typeface="Noto Sans KR Medium" panose="020B0200000000000000" pitchFamily="34" charset="-128"/>
+              </a:rPr>
+              <a:t>GameState</a:t>
+            </a:r>
+            <a:r>
+              <a:rPr lang="ko-KR" altLang="en-US" sz="1000" dirty="0" smtClean="0">
+                <a:solidFill>
+                  <a:schemeClr val="bg1">
+                    <a:lumMod val="95000"/>
+                  </a:schemeClr>
+                </a:solidFill>
+                <a:latin typeface="Noto Sans KR Medium" panose="020B0200000000000000" pitchFamily="34" charset="-128"/>
+                <a:ea typeface="Noto Sans KR Medium" panose="020B0200000000000000" pitchFamily="34" charset="-128"/>
+              </a:rPr>
+              <a:t>에서 관리합니다</a:t>
+            </a:r>
+            <a:r>
+              <a:rPr lang="en-US" altLang="ko-KR" sz="1000" dirty="0" smtClean="0">
+                <a:solidFill>
+                  <a:schemeClr val="bg1">
+                    <a:lumMod val="95000"/>
+                  </a:schemeClr>
+                </a:solidFill>
+                <a:latin typeface="Noto Sans KR Medium" panose="020B0200000000000000" pitchFamily="34" charset="-128"/>
+                <a:ea typeface="Noto Sans KR Medium" panose="020B0200000000000000" pitchFamily="34" charset="-128"/>
+              </a:rPr>
+              <a:t>.</a:t>
+            </a:r>
+          </a:p>
+          <a:p>
+            <a:r>
+              <a:rPr lang="en-US" altLang="ko-KR" sz="1000" dirty="0" err="1" smtClean="0">
+                <a:solidFill>
+                  <a:schemeClr val="bg1">
+                    <a:lumMod val="95000"/>
+                  </a:schemeClr>
+                </a:solidFill>
+                <a:latin typeface="Noto Sans KR Medium" panose="020B0200000000000000" pitchFamily="34" charset="-128"/>
+                <a:ea typeface="Noto Sans KR Medium" panose="020B0200000000000000" pitchFamily="34" charset="-128"/>
+              </a:rPr>
+              <a:t>StageSection</a:t>
+            </a:r>
+            <a:r>
+              <a:rPr lang="ko-KR" altLang="en-US" sz="1000" dirty="0" smtClean="0">
+                <a:solidFill>
+                  <a:schemeClr val="bg1">
+                    <a:lumMod val="95000"/>
+                  </a:schemeClr>
+                </a:solidFill>
+                <a:latin typeface="Noto Sans KR Medium" panose="020B0200000000000000" pitchFamily="34" charset="-128"/>
+                <a:ea typeface="Noto Sans KR Medium" panose="020B0200000000000000" pitchFamily="34" charset="-128"/>
+              </a:rPr>
+              <a:t>은 </a:t>
+            </a:r>
+            <a:r>
+              <a:rPr lang="ko-KR" altLang="en-US" sz="1000" dirty="0" err="1" smtClean="0">
+                <a:solidFill>
+                  <a:schemeClr val="bg1">
+                    <a:lumMod val="95000"/>
+                  </a:schemeClr>
+                </a:solidFill>
+                <a:latin typeface="Noto Sans KR Medium" panose="020B0200000000000000" pitchFamily="34" charset="-128"/>
+                <a:ea typeface="Noto Sans KR Medium" panose="020B0200000000000000" pitchFamily="34" charset="-128"/>
+              </a:rPr>
+              <a:t>몬스터</a:t>
+            </a:r>
+            <a:r>
+              <a:rPr lang="ko-KR" altLang="en-US" sz="1000" dirty="0" smtClean="0">
+                <a:solidFill>
+                  <a:schemeClr val="bg1">
+                    <a:lumMod val="95000"/>
+                  </a:schemeClr>
+                </a:solidFill>
+                <a:latin typeface="Noto Sans KR Medium" panose="020B0200000000000000" pitchFamily="34" charset="-128"/>
+                <a:ea typeface="Noto Sans KR Medium" panose="020B0200000000000000" pitchFamily="34" charset="-128"/>
+              </a:rPr>
+              <a:t> 사망 이벤트를 구독해두고</a:t>
+            </a:r>
+            <a:r>
+              <a:rPr lang="en-US" altLang="ko-KR" sz="1000" dirty="0" smtClean="0">
+                <a:solidFill>
+                  <a:schemeClr val="bg1">
+                    <a:lumMod val="95000"/>
+                  </a:schemeClr>
+                </a:solidFill>
+                <a:latin typeface="Noto Sans KR Medium" panose="020B0200000000000000" pitchFamily="34" charset="-128"/>
+                <a:ea typeface="Noto Sans KR Medium" panose="020B0200000000000000" pitchFamily="34" charset="-128"/>
+              </a:rPr>
+              <a:t>, </a:t>
+            </a:r>
+            <a:r>
+              <a:rPr lang="ko-KR" altLang="en-US" sz="1000" dirty="0" err="1" smtClean="0">
+                <a:solidFill>
+                  <a:schemeClr val="bg1">
+                    <a:lumMod val="95000"/>
+                  </a:schemeClr>
+                </a:solidFill>
+                <a:latin typeface="Noto Sans KR Medium" panose="020B0200000000000000" pitchFamily="34" charset="-128"/>
+                <a:ea typeface="Noto Sans KR Medium" panose="020B0200000000000000" pitchFamily="34" charset="-128"/>
+              </a:rPr>
+              <a:t>스폰된</a:t>
+            </a:r>
+            <a:r>
+              <a:rPr lang="ko-KR" altLang="en-US" sz="1000" dirty="0" smtClean="0">
+                <a:solidFill>
+                  <a:schemeClr val="bg1">
+                    <a:lumMod val="95000"/>
+                  </a:schemeClr>
+                </a:solidFill>
+                <a:latin typeface="Noto Sans KR Medium" panose="020B0200000000000000" pitchFamily="34" charset="-128"/>
+                <a:ea typeface="Noto Sans KR Medium" panose="020B0200000000000000" pitchFamily="34" charset="-128"/>
+              </a:rPr>
+              <a:t> </a:t>
+            </a:r>
+            <a:r>
+              <a:rPr lang="ko-KR" altLang="en-US" sz="1000" dirty="0" err="1" smtClean="0">
+                <a:solidFill>
+                  <a:schemeClr val="bg1">
+                    <a:lumMod val="95000"/>
+                  </a:schemeClr>
+                </a:solidFill>
+                <a:latin typeface="Noto Sans KR Medium" panose="020B0200000000000000" pitchFamily="34" charset="-128"/>
+                <a:ea typeface="Noto Sans KR Medium" panose="020B0200000000000000" pitchFamily="34" charset="-128"/>
+              </a:rPr>
+              <a:t>몬스터가</a:t>
+            </a:r>
+            <a:r>
+              <a:rPr lang="ko-KR" altLang="en-US" sz="1000" dirty="0" smtClean="0">
+                <a:solidFill>
+                  <a:schemeClr val="bg1">
+                    <a:lumMod val="95000"/>
+                  </a:schemeClr>
+                </a:solidFill>
+                <a:latin typeface="Noto Sans KR Medium" panose="020B0200000000000000" pitchFamily="34" charset="-128"/>
+                <a:ea typeface="Noto Sans KR Medium" panose="020B0200000000000000" pitchFamily="34" charset="-128"/>
+              </a:rPr>
+              <a:t> 죽으면 </a:t>
+            </a:r>
+            <a:r>
+              <a:rPr lang="ko-KR" altLang="en-US" sz="1000" dirty="0" err="1" smtClean="0">
+                <a:solidFill>
+                  <a:schemeClr val="bg1">
+                    <a:lumMod val="95000"/>
+                  </a:schemeClr>
+                </a:solidFill>
+                <a:latin typeface="Noto Sans KR Medium" panose="020B0200000000000000" pitchFamily="34" charset="-128"/>
+                <a:ea typeface="Noto Sans KR Medium" panose="020B0200000000000000" pitchFamily="34" charset="-128"/>
+              </a:rPr>
+              <a:t>몬스터</a:t>
+            </a:r>
+            <a:r>
+              <a:rPr lang="ko-KR" altLang="en-US" sz="1000" dirty="0" smtClean="0">
+                <a:solidFill>
+                  <a:schemeClr val="bg1">
+                    <a:lumMod val="95000"/>
+                  </a:schemeClr>
+                </a:solidFill>
+                <a:latin typeface="Noto Sans KR Medium" panose="020B0200000000000000" pitchFamily="34" charset="-128"/>
+                <a:ea typeface="Noto Sans KR Medium" panose="020B0200000000000000" pitchFamily="34" charset="-128"/>
+              </a:rPr>
+              <a:t> 카운트를 낮춥니다</a:t>
+            </a:r>
+            <a:r>
+              <a:rPr lang="en-US" altLang="ko-KR" sz="1000" dirty="0" smtClean="0">
+                <a:solidFill>
+                  <a:schemeClr val="bg1">
+                    <a:lumMod val="95000"/>
+                  </a:schemeClr>
+                </a:solidFill>
+                <a:latin typeface="Noto Sans KR Medium" panose="020B0200000000000000" pitchFamily="34" charset="-128"/>
+                <a:ea typeface="Noto Sans KR Medium" panose="020B0200000000000000" pitchFamily="34" charset="-128"/>
+              </a:rPr>
+              <a:t>.</a:t>
+            </a:r>
+          </a:p>
+          <a:p>
+            <a:r>
+              <a:rPr lang="ko-KR" altLang="en-US" sz="1000" dirty="0" err="1" smtClean="0">
+                <a:solidFill>
+                  <a:schemeClr val="bg1">
+                    <a:lumMod val="95000"/>
+                  </a:schemeClr>
+                </a:solidFill>
+                <a:latin typeface="Noto Sans KR Medium" panose="020B0200000000000000" pitchFamily="34" charset="-128"/>
+                <a:ea typeface="Noto Sans KR Medium" panose="020B0200000000000000" pitchFamily="34" charset="-128"/>
+              </a:rPr>
+              <a:t>몬스터</a:t>
+            </a:r>
+            <a:r>
+              <a:rPr lang="ko-KR" altLang="en-US" sz="1000" dirty="0" smtClean="0">
+                <a:solidFill>
+                  <a:schemeClr val="bg1">
+                    <a:lumMod val="95000"/>
+                  </a:schemeClr>
+                </a:solidFill>
+                <a:latin typeface="Noto Sans KR Medium" panose="020B0200000000000000" pitchFamily="34" charset="-128"/>
+                <a:ea typeface="Noto Sans KR Medium" panose="020B0200000000000000" pitchFamily="34" charset="-128"/>
+              </a:rPr>
+              <a:t> 카운트가 </a:t>
+            </a:r>
+            <a:r>
+              <a:rPr lang="en-US" altLang="ko-KR" sz="1000" dirty="0" smtClean="0">
+                <a:solidFill>
+                  <a:schemeClr val="bg1">
+                    <a:lumMod val="95000"/>
+                  </a:schemeClr>
+                </a:solidFill>
+                <a:latin typeface="Noto Sans KR Medium" panose="020B0200000000000000" pitchFamily="34" charset="-128"/>
+                <a:ea typeface="Noto Sans KR Medium" panose="020B0200000000000000" pitchFamily="34" charset="-128"/>
+              </a:rPr>
+              <a:t>0</a:t>
+            </a:r>
+            <a:r>
+              <a:rPr lang="ko-KR" altLang="en-US" sz="1000" dirty="0" err="1" smtClean="0">
+                <a:solidFill>
+                  <a:schemeClr val="bg1">
+                    <a:lumMod val="95000"/>
+                  </a:schemeClr>
+                </a:solidFill>
+                <a:latin typeface="Noto Sans KR Medium" panose="020B0200000000000000" pitchFamily="34" charset="-128"/>
+                <a:ea typeface="Noto Sans KR Medium" panose="020B0200000000000000" pitchFamily="34" charset="-128"/>
+              </a:rPr>
+              <a:t>이되면</a:t>
+            </a:r>
+            <a:r>
+              <a:rPr lang="ko-KR" altLang="en-US" sz="1000" dirty="0" smtClean="0">
+                <a:solidFill>
+                  <a:schemeClr val="bg1">
+                    <a:lumMod val="95000"/>
+                  </a:schemeClr>
+                </a:solidFill>
+                <a:latin typeface="Noto Sans KR Medium" panose="020B0200000000000000" pitchFamily="34" charset="-128"/>
+                <a:ea typeface="Noto Sans KR Medium" panose="020B0200000000000000" pitchFamily="34" charset="-128"/>
+              </a:rPr>
+              <a:t> 해당 </a:t>
+            </a:r>
+            <a:r>
+              <a:rPr lang="en-US" altLang="ko-KR" sz="1000" dirty="0" err="1" smtClean="0">
+                <a:solidFill>
+                  <a:schemeClr val="bg1">
+                    <a:lumMod val="95000"/>
+                  </a:schemeClr>
+                </a:solidFill>
+                <a:latin typeface="Noto Sans KR Medium" panose="020B0200000000000000" pitchFamily="34" charset="-128"/>
+                <a:ea typeface="Noto Sans KR Medium" panose="020B0200000000000000" pitchFamily="34" charset="-128"/>
+              </a:rPr>
+              <a:t>StageSection</a:t>
+            </a:r>
+            <a:r>
+              <a:rPr lang="ko-KR" altLang="en-US" sz="1000" dirty="0" smtClean="0">
+                <a:solidFill>
+                  <a:schemeClr val="bg1">
+                    <a:lumMod val="95000"/>
+                  </a:schemeClr>
+                </a:solidFill>
+                <a:latin typeface="Noto Sans KR Medium" panose="020B0200000000000000" pitchFamily="34" charset="-128"/>
+                <a:ea typeface="Noto Sans KR Medium" panose="020B0200000000000000" pitchFamily="34" charset="-128"/>
+              </a:rPr>
+              <a:t>은 구역 완료 이벤트를 발행합니다</a:t>
+            </a:r>
+            <a:r>
+              <a:rPr lang="en-US" altLang="ko-KR" sz="1000" dirty="0" smtClean="0">
+                <a:solidFill>
+                  <a:schemeClr val="bg1">
+                    <a:lumMod val="95000"/>
+                  </a:schemeClr>
+                </a:solidFill>
+                <a:latin typeface="Noto Sans KR Medium" panose="020B0200000000000000" pitchFamily="34" charset="-128"/>
+                <a:ea typeface="Noto Sans KR Medium" panose="020B0200000000000000" pitchFamily="34" charset="-128"/>
+              </a:rPr>
+              <a:t>.</a:t>
+            </a:r>
+          </a:p>
+          <a:p>
+            <a:endParaRPr lang="en-US" altLang="ko-KR" sz="1000" dirty="0">
+              <a:solidFill>
+                <a:schemeClr val="bg1">
+                  <a:lumMod val="95000"/>
+                </a:schemeClr>
+              </a:solidFill>
+              <a:latin typeface="Noto Sans KR Medium" panose="020B0200000000000000" pitchFamily="34" charset="-128"/>
+              <a:ea typeface="Noto Sans KR Medium" panose="020B0200000000000000" pitchFamily="34" charset="-128"/>
+            </a:endParaRPr>
+          </a:p>
+          <a:p>
+            <a:r>
+              <a:rPr lang="ko-KR" altLang="en-US" sz="1000" dirty="0" smtClean="0">
+                <a:solidFill>
+                  <a:schemeClr val="bg1">
+                    <a:lumMod val="95000"/>
+                  </a:schemeClr>
+                </a:solidFill>
+                <a:latin typeface="Noto Sans KR Medium" panose="020B0200000000000000" pitchFamily="34" charset="-128"/>
+                <a:ea typeface="Noto Sans KR Medium" panose="020B0200000000000000" pitchFamily="34" charset="-128"/>
+              </a:rPr>
+              <a:t>구역 완료 이벤트가 발행되면 </a:t>
+            </a:r>
+            <a:r>
+              <a:rPr lang="en-US" altLang="ko-KR" sz="1000" dirty="0" err="1" smtClean="0">
+                <a:solidFill>
+                  <a:schemeClr val="bg1">
+                    <a:lumMod val="95000"/>
+                  </a:schemeClr>
+                </a:solidFill>
+                <a:latin typeface="Noto Sans KR Medium" panose="020B0200000000000000" pitchFamily="34" charset="-128"/>
+                <a:ea typeface="Noto Sans KR Medium" panose="020B0200000000000000" pitchFamily="34" charset="-128"/>
+              </a:rPr>
+              <a:t>GameState</a:t>
+            </a:r>
+            <a:r>
+              <a:rPr lang="ko-KR" altLang="en-US" sz="1000" dirty="0" smtClean="0">
+                <a:solidFill>
+                  <a:schemeClr val="bg1">
+                    <a:lumMod val="95000"/>
+                  </a:schemeClr>
+                </a:solidFill>
+                <a:latin typeface="Noto Sans KR Medium" panose="020B0200000000000000" pitchFamily="34" charset="-128"/>
+                <a:ea typeface="Noto Sans KR Medium" panose="020B0200000000000000" pitchFamily="34" charset="-128"/>
+              </a:rPr>
+              <a:t>에서 해당 구역을 완료처리하고</a:t>
+            </a:r>
+            <a:r>
+              <a:rPr lang="en-US" altLang="ko-KR" sz="1000" dirty="0">
+                <a:solidFill>
+                  <a:schemeClr val="bg1">
+                    <a:lumMod val="95000"/>
+                  </a:schemeClr>
+                </a:solidFill>
+                <a:latin typeface="Noto Sans KR Medium" panose="020B0200000000000000" pitchFamily="34" charset="-128"/>
+                <a:ea typeface="Noto Sans KR Medium" panose="020B0200000000000000" pitchFamily="34" charset="-128"/>
+              </a:rPr>
+              <a:t> </a:t>
+            </a:r>
             <a:endParaRPr lang="en-US" altLang="ko-KR" sz="1000" dirty="0" smtClean="0">
               <a:solidFill>
                 <a:schemeClr val="bg1">
@@ -29714,19 +29869,7 @@
                 <a:latin typeface="Noto Sans KR Medium" panose="020B0200000000000000" pitchFamily="34" charset="-128"/>
                 <a:ea typeface="Noto Sans KR Medium" panose="020B0200000000000000" pitchFamily="34" charset="-128"/>
               </a:rPr>
-              <a:t>구역 완료 정보 같이 진행에 </a:t>
-            </a:r>
-            <a:r>
-              <a:rPr lang="ko-KR" altLang="en-US" sz="1000" dirty="0" smtClean="0">
-                <a:solidFill>
-                  <a:schemeClr val="bg1">
-                    <a:lumMod val="95000"/>
-                  </a:schemeClr>
-                </a:solidFill>
-                <a:latin typeface="Noto Sans KR Medium" panose="020B0200000000000000" pitchFamily="34" charset="-128"/>
-                <a:ea typeface="Noto Sans KR Medium" panose="020B0200000000000000" pitchFamily="34" charset="-128"/>
-              </a:rPr>
-              <a:t>필요한 주된 데이터는 </a:t>
+              <a:t>모든 구역이 완료되면 </a:t>
             </a:r>
             <a:r>
               <a:rPr lang="en-US" altLang="ko-KR" sz="1000" dirty="0" err="1" smtClean="0">
@@ -29738,31 +29881,19 @@
                 <a:latin typeface="Noto Sans KR Medium" panose="020B0200000000000000" pitchFamily="34" charset="-128"/>
                 <a:ea typeface="Noto Sans KR Medium" panose="020B0200000000000000" pitchFamily="34" charset="-128"/>
               </a:rPr>
-              <a:t>GameState</a:t>
-            </a:r>
-            <a:r>
-              <a:rPr lang="ko-KR" altLang="en-US" sz="1000" dirty="0" smtClean="0">
-                <a:solidFill>
-                  <a:schemeClr val="bg1">
-                    <a:lumMod val="95000"/>
-                  </a:schemeClr>
-                </a:solidFill>
-                <a:latin typeface="Noto Sans KR Medium" panose="020B0200000000000000" pitchFamily="34" charset="-128"/>
-                <a:ea typeface="Noto Sans KR Medium" panose="020B0200000000000000" pitchFamily="34" charset="-128"/>
-              </a:rPr>
-              <a:t>에서 </a:t>
-            </a:r>
-            <a:r>
-              <a:rPr lang="ko-KR" altLang="en-US" sz="1000" dirty="0" smtClean="0">
-                <a:solidFill>
-                  <a:schemeClr val="bg1">
-                    <a:lumMod val="95000"/>
-                  </a:schemeClr>
-                </a:solidFill>
-                <a:latin typeface="Noto Sans KR Medium" panose="020B0200000000000000" pitchFamily="34" charset="-128"/>
-                <a:ea typeface="Noto Sans KR Medium" panose="020B0200000000000000" pitchFamily="34" charset="-128"/>
-              </a:rPr>
-              <a:t>관리합니다</a:t>
+              <a:t>GameMode</a:t>
+            </a:r>
+            <a:r>
+              <a:rPr lang="ko-KR" altLang="en-US" sz="1000" dirty="0" smtClean="0">
+                <a:solidFill>
+                  <a:schemeClr val="bg1">
+                    <a:lumMod val="95000"/>
+                  </a:schemeClr>
+                </a:solidFill>
+                <a:latin typeface="Noto Sans KR Medium" panose="020B0200000000000000" pitchFamily="34" charset="-128"/>
+                <a:ea typeface="Noto Sans KR Medium" panose="020B0200000000000000" pitchFamily="34" charset="-128"/>
+              </a:rPr>
+              <a:t>에서 게임을 완료처리 합니다</a:t>
             </a:r>
             <a:r>
               <a:rPr lang="en-US" altLang="ko-KR" sz="1000" dirty="0" smtClean="0">
@@ -29776,424 +29907,6 @@
               </a:rPr>
               <a:t>.</a:t>
             </a:r>
-          </a:p>
-          <a:p>
-            <a:r>
-              <a:rPr lang="en-US" altLang="ko-KR" sz="1000" dirty="0" err="1" smtClean="0">
-                <a:solidFill>
-                  <a:schemeClr val="bg1">
-                    <a:lumMod val="95000"/>
-                  </a:schemeClr>
-                </a:solidFill>
-                <a:latin typeface="Noto Sans KR Medium" panose="020B0200000000000000" pitchFamily="34" charset="-128"/>
-                <a:ea typeface="Noto Sans KR Medium" panose="020B0200000000000000" pitchFamily="34" charset="-128"/>
-              </a:rPr>
-              <a:t>StageSection</a:t>
-            </a:r>
-            <a:r>
-              <a:rPr lang="ko-KR" altLang="en-US" sz="1000" dirty="0" smtClean="0">
-                <a:solidFill>
-                  <a:schemeClr val="bg1">
-                    <a:lumMod val="95000"/>
-                  </a:schemeClr>
-                </a:solidFill>
-                <a:latin typeface="Noto Sans KR Medium" panose="020B0200000000000000" pitchFamily="34" charset="-128"/>
-                <a:ea typeface="Noto Sans KR Medium" panose="020B0200000000000000" pitchFamily="34" charset="-128"/>
-              </a:rPr>
-              <a:t>은 </a:t>
-            </a:r>
-            <a:r>
-              <a:rPr lang="ko-KR" altLang="en-US" sz="1000" dirty="0" err="1" smtClean="0">
-                <a:solidFill>
-                  <a:schemeClr val="bg1">
-                    <a:lumMod val="95000"/>
-                  </a:schemeClr>
-                </a:solidFill>
-                <a:latin typeface="Noto Sans KR Medium" panose="020B0200000000000000" pitchFamily="34" charset="-128"/>
-                <a:ea typeface="Noto Sans KR Medium" panose="020B0200000000000000" pitchFamily="34" charset="-128"/>
-              </a:rPr>
-              <a:t>몬스터</a:t>
-            </a:r>
-            <a:r>
-              <a:rPr lang="ko-KR" altLang="en-US" sz="1000" dirty="0" smtClean="0">
-                <a:solidFill>
-                  <a:schemeClr val="bg1">
-                    <a:lumMod val="95000"/>
-                  </a:schemeClr>
-                </a:solidFill>
-                <a:latin typeface="Noto Sans KR Medium" panose="020B0200000000000000" pitchFamily="34" charset="-128"/>
-                <a:ea typeface="Noto Sans KR Medium" panose="020B0200000000000000" pitchFamily="34" charset="-128"/>
-              </a:rPr>
-              <a:t> 사망 이벤트를 구독해두고</a:t>
-            </a:r>
-            <a:r>
-              <a:rPr lang="en-US" altLang="ko-KR" sz="1000" dirty="0" smtClean="0">
-                <a:solidFill>
-                  <a:schemeClr val="bg1">
-                    <a:lumMod val="95000"/>
-                  </a:schemeClr>
-                </a:solidFill>
-                <a:latin typeface="Noto Sans KR Medium" panose="020B0200000000000000" pitchFamily="34" charset="-128"/>
-                <a:ea typeface="Noto Sans KR Medium" panose="020B0200000000000000" pitchFamily="34" charset="-128"/>
-              </a:rPr>
-              <a:t>, </a:t>
-            </a:r>
-            <a:r>
-              <a:rPr lang="ko-KR" altLang="en-US" sz="1000" dirty="0" err="1" smtClean="0">
-                <a:solidFill>
-                  <a:schemeClr val="bg1">
-                    <a:lumMod val="95000"/>
-                  </a:schemeClr>
-                </a:solidFill>
-                <a:latin typeface="Noto Sans KR Medium" panose="020B0200000000000000" pitchFamily="34" charset="-128"/>
-                <a:ea typeface="Noto Sans KR Medium" panose="020B0200000000000000" pitchFamily="34" charset="-128"/>
-              </a:rPr>
-              <a:t>스폰된</a:t>
-            </a:r>
-            <a:r>
-              <a:rPr lang="ko-KR" altLang="en-US" sz="1000" dirty="0" smtClean="0">
-                <a:solidFill>
-                  <a:schemeClr val="bg1">
-                    <a:lumMod val="95000"/>
-                  </a:schemeClr>
-                </a:solidFill>
-                <a:latin typeface="Noto Sans KR Medium" panose="020B0200000000000000" pitchFamily="34" charset="-128"/>
-                <a:ea typeface="Noto Sans KR Medium" panose="020B0200000000000000" pitchFamily="34" charset="-128"/>
-              </a:rPr>
-              <a:t> </a:t>
-            </a:r>
-            <a:r>
-              <a:rPr lang="ko-KR" altLang="en-US" sz="1000" dirty="0" err="1" smtClean="0">
-                <a:solidFill>
-                  <a:schemeClr val="bg1">
-                    <a:lumMod val="95000"/>
-                  </a:schemeClr>
-                </a:solidFill>
-                <a:latin typeface="Noto Sans KR Medium" panose="020B0200000000000000" pitchFamily="34" charset="-128"/>
-                <a:ea typeface="Noto Sans KR Medium" panose="020B0200000000000000" pitchFamily="34" charset="-128"/>
-              </a:rPr>
-              <a:t>몬스터가</a:t>
-            </a:r>
-            <a:r>
-              <a:rPr lang="ko-KR" altLang="en-US" sz="1000" dirty="0" smtClean="0">
-                <a:solidFill>
-                  <a:schemeClr val="bg1">
-                    <a:lumMod val="95000"/>
-                  </a:schemeClr>
-                </a:solidFill>
-                <a:latin typeface="Noto Sans KR Medium" panose="020B0200000000000000" pitchFamily="34" charset="-128"/>
-                <a:ea typeface="Noto Sans KR Medium" panose="020B0200000000000000" pitchFamily="34" charset="-128"/>
-              </a:rPr>
-              <a:t> 죽으면 </a:t>
-            </a:r>
-            <a:r>
-              <a:rPr lang="ko-KR" altLang="en-US" sz="1000" dirty="0" err="1" smtClean="0">
-                <a:solidFill>
-                  <a:schemeClr val="bg1">
-                    <a:lumMod val="95000"/>
-                  </a:schemeClr>
-                </a:solidFill>
-                <a:latin typeface="Noto Sans KR Medium" panose="020B0200000000000000" pitchFamily="34" charset="-128"/>
-                <a:ea typeface="Noto Sans KR Medium" panose="020B0200000000000000" pitchFamily="34" charset="-128"/>
-              </a:rPr>
-              <a:t>몬스터</a:t>
-            </a:r>
-            <a:r>
-              <a:rPr lang="ko-KR" altLang="en-US" sz="1000" dirty="0" smtClean="0">
-                <a:solidFill>
-                  <a:schemeClr val="bg1">
-                    <a:lumMod val="95000"/>
-                  </a:schemeClr>
-                </a:solidFill>
-                <a:latin typeface="Noto Sans KR Medium" panose="020B0200000000000000" pitchFamily="34" charset="-128"/>
-                <a:ea typeface="Noto Sans KR Medium" panose="020B0200000000000000" pitchFamily="34" charset="-128"/>
-              </a:rPr>
-              <a:t> 카운트를 낮춥니다</a:t>
-            </a:r>
-            <a:r>
-              <a:rPr lang="en-US" altLang="ko-KR" sz="1000" dirty="0" smtClean="0">
-                <a:solidFill>
-                  <a:schemeClr val="bg1">
-                    <a:lumMod val="95000"/>
-                  </a:schemeClr>
-                </a:solidFill>
-                <a:latin typeface="Noto Sans KR Medium" panose="020B0200000000000000" pitchFamily="34" charset="-128"/>
-                <a:ea typeface="Noto Sans KR Medium" panose="020B0200000000000000" pitchFamily="34" charset="-128"/>
-              </a:rPr>
-              <a:t>.</a:t>
-            </a:r>
-          </a:p>
-          <a:p>
-            <a:r>
-              <a:rPr lang="ko-KR" altLang="en-US" sz="1000" dirty="0" err="1" smtClean="0">
-                <a:solidFill>
-                  <a:schemeClr val="bg1">
-                    <a:lumMod val="95000"/>
-                  </a:schemeClr>
-                </a:solidFill>
-                <a:latin typeface="Noto Sans KR Medium" panose="020B0200000000000000" pitchFamily="34" charset="-128"/>
-                <a:ea typeface="Noto Sans KR Medium" panose="020B0200000000000000" pitchFamily="34" charset="-128"/>
-              </a:rPr>
-              <a:t>몬스터</a:t>
-            </a:r>
-            <a:r>
-              <a:rPr lang="ko-KR" altLang="en-US" sz="1000" dirty="0" smtClean="0">
-                <a:solidFill>
-                  <a:schemeClr val="bg1">
-                    <a:lumMod val="95000"/>
-                  </a:schemeClr>
-                </a:solidFill>
-                <a:latin typeface="Noto Sans KR Medium" panose="020B0200000000000000" pitchFamily="34" charset="-128"/>
-                <a:ea typeface="Noto Sans KR Medium" panose="020B0200000000000000" pitchFamily="34" charset="-128"/>
-              </a:rPr>
-              <a:t> 카운트가 </a:t>
-            </a:r>
-            <a:r>
-              <a:rPr lang="en-US" altLang="ko-KR" sz="1000" dirty="0" smtClean="0">
-                <a:solidFill>
-                  <a:schemeClr val="bg1">
-                    <a:lumMod val="95000"/>
-                  </a:schemeClr>
-                </a:solidFill>
-                <a:latin typeface="Noto Sans KR Medium" panose="020B0200000000000000" pitchFamily="34" charset="-128"/>
-                <a:ea typeface="Noto Sans KR Medium" panose="020B0200000000000000" pitchFamily="34" charset="-128"/>
-              </a:rPr>
-              <a:t>0</a:t>
-            </a:r>
-            <a:r>
-              <a:rPr lang="ko-KR" altLang="en-US" sz="1000" dirty="0" err="1" smtClean="0">
-                <a:solidFill>
-                  <a:schemeClr val="bg1">
-                    <a:lumMod val="95000"/>
-                  </a:schemeClr>
-                </a:solidFill>
-                <a:latin typeface="Noto Sans KR Medium" panose="020B0200000000000000" pitchFamily="34" charset="-128"/>
-                <a:ea typeface="Noto Sans KR Medium" panose="020B0200000000000000" pitchFamily="34" charset="-128"/>
-              </a:rPr>
-              <a:t>이되면</a:t>
-            </a:r>
-            <a:r>
-              <a:rPr lang="ko-KR" altLang="en-US" sz="1000" dirty="0" smtClean="0">
-                <a:solidFill>
-                  <a:schemeClr val="bg1">
-                    <a:lumMod val="95000"/>
-                  </a:schemeClr>
-                </a:solidFill>
-                <a:latin typeface="Noto Sans KR Medium" panose="020B0200000000000000" pitchFamily="34" charset="-128"/>
-                <a:ea typeface="Noto Sans KR Medium" panose="020B0200000000000000" pitchFamily="34" charset="-128"/>
-              </a:rPr>
-              <a:t> 해당 </a:t>
-            </a:r>
-            <a:r>
-              <a:rPr lang="en-US" altLang="ko-KR" sz="1000" dirty="0" err="1" smtClean="0">
-                <a:solidFill>
-                  <a:schemeClr val="bg1">
-                    <a:lumMod val="95000"/>
-                  </a:schemeClr>
-                </a:solidFill>
-                <a:latin typeface="Noto Sans KR Medium" panose="020B0200000000000000" pitchFamily="34" charset="-128"/>
-                <a:ea typeface="Noto Sans KR Medium" panose="020B0200000000000000" pitchFamily="34" charset="-128"/>
-              </a:rPr>
-              <a:t>StageSection</a:t>
-            </a:r>
-            <a:r>
-              <a:rPr lang="ko-KR" altLang="en-US" sz="1000" dirty="0" smtClean="0">
-                <a:solidFill>
-                  <a:schemeClr val="bg1">
-                    <a:lumMod val="95000"/>
-                  </a:schemeClr>
-                </a:solidFill>
-                <a:latin typeface="Noto Sans KR Medium" panose="020B0200000000000000" pitchFamily="34" charset="-128"/>
-                <a:ea typeface="Noto Sans KR Medium" panose="020B0200000000000000" pitchFamily="34" charset="-128"/>
-              </a:rPr>
-              <a:t>은 구역 완료 이벤트를 발행합니다</a:t>
-            </a:r>
-            <a:r>
-              <a:rPr lang="en-US" altLang="ko-KR" sz="1000" dirty="0" smtClean="0">
-                <a:solidFill>
-                  <a:schemeClr val="bg1">
-                    <a:lumMod val="95000"/>
-                  </a:schemeClr>
-                </a:solidFill>
-                <a:latin typeface="Noto Sans KR Medium" panose="020B0200000000000000" pitchFamily="34" charset="-128"/>
-                <a:ea typeface="Noto Sans KR Medium" panose="020B0200000000000000" pitchFamily="34" charset="-128"/>
-              </a:rPr>
-              <a:t>.</a:t>
-            </a:r>
-            <a:endParaRPr lang="en-US" altLang="ko-KR" sz="1000" dirty="0" smtClean="0">
-              <a:solidFill>
-                <a:schemeClr val="bg1">
-                  <a:lumMod val="95000"/>
-                </a:schemeClr>
-              </a:solidFill>
-              <a:latin typeface="Noto Sans KR Medium" panose="020B0200000000000000" pitchFamily="34" charset="-128"/>
-              <a:ea typeface="Noto Sans KR Medium" panose="020B0200000000000000" pitchFamily="34" charset="-128"/>
-            </a:endParaRPr>
-          </a:p>
-          <a:p>
-            <a:endParaRPr lang="en-US" altLang="ko-KR" sz="1000" dirty="0">
-              <a:solidFill>
-                <a:schemeClr val="bg1">
-                  <a:lumMod val="95000"/>
-                </a:schemeClr>
-              </a:solidFill>
-              <a:latin typeface="Noto Sans KR Medium" panose="020B0200000000000000" pitchFamily="34" charset="-128"/>
-              <a:ea typeface="Noto Sans KR Medium" panose="020B0200000000000000" pitchFamily="34" charset="-128"/>
-            </a:endParaRPr>
-          </a:p>
-          <a:p>
-            <a:r>
-              <a:rPr lang="ko-KR" altLang="en-US" sz="1000" dirty="0" smtClean="0">
-                <a:solidFill>
-                  <a:schemeClr val="bg1">
-                    <a:lumMod val="95000"/>
-                  </a:schemeClr>
-                </a:solidFill>
-                <a:latin typeface="Noto Sans KR Medium" panose="020B0200000000000000" pitchFamily="34" charset="-128"/>
-                <a:ea typeface="Noto Sans KR Medium" panose="020B0200000000000000" pitchFamily="34" charset="-128"/>
-              </a:rPr>
-              <a:t>구역 완료 이벤트가 발행되면 </a:t>
-            </a:r>
-            <a:r>
-              <a:rPr lang="en-US" altLang="ko-KR" sz="1000" dirty="0" err="1" smtClean="0">
-                <a:solidFill>
-                  <a:schemeClr val="bg1">
-                    <a:lumMod val="95000"/>
-                  </a:schemeClr>
-                </a:solidFill>
-                <a:latin typeface="Noto Sans KR Medium" panose="020B0200000000000000" pitchFamily="34" charset="-128"/>
-                <a:ea typeface="Noto Sans KR Medium" panose="020B0200000000000000" pitchFamily="34" charset="-128"/>
-              </a:rPr>
-              <a:t>GameState</a:t>
-            </a:r>
-            <a:r>
-              <a:rPr lang="ko-KR" altLang="en-US" sz="1000" dirty="0" smtClean="0">
-                <a:solidFill>
-                  <a:schemeClr val="bg1">
-                    <a:lumMod val="95000"/>
-                  </a:schemeClr>
-                </a:solidFill>
-                <a:latin typeface="Noto Sans KR Medium" panose="020B0200000000000000" pitchFamily="34" charset="-128"/>
-                <a:ea typeface="Noto Sans KR Medium" panose="020B0200000000000000" pitchFamily="34" charset="-128"/>
-              </a:rPr>
-              <a:t>에서 해당 구역을 </a:t>
-            </a:r>
-            <a:r>
-              <a:rPr lang="ko-KR" altLang="en-US" sz="1000" dirty="0" smtClean="0">
-                <a:solidFill>
-                  <a:schemeClr val="bg1">
-                    <a:lumMod val="95000"/>
-                  </a:schemeClr>
-                </a:solidFill>
-                <a:latin typeface="Noto Sans KR Medium" panose="020B0200000000000000" pitchFamily="34" charset="-128"/>
-                <a:ea typeface="Noto Sans KR Medium" panose="020B0200000000000000" pitchFamily="34" charset="-128"/>
-              </a:rPr>
-              <a:t>완료처리</a:t>
-            </a:r>
-            <a:r>
-              <a:rPr lang="ko-KR" altLang="en-US" sz="1000" dirty="0" smtClean="0">
-                <a:solidFill>
-                  <a:schemeClr val="bg1">
-                    <a:lumMod val="95000"/>
-                  </a:schemeClr>
-                </a:solidFill>
-                <a:latin typeface="Noto Sans KR Medium" panose="020B0200000000000000" pitchFamily="34" charset="-128"/>
-                <a:ea typeface="Noto Sans KR Medium" panose="020B0200000000000000" pitchFamily="34" charset="-128"/>
-              </a:rPr>
-              <a:t>하고</a:t>
-            </a:r>
-            <a:r>
-              <a:rPr lang="en-US" altLang="ko-KR" sz="1000" dirty="0">
-                <a:solidFill>
-                  <a:schemeClr val="bg1">
-                    <a:lumMod val="95000"/>
-                  </a:schemeClr>
-                </a:solidFill>
-                <a:latin typeface="Noto Sans KR Medium" panose="020B0200000000000000" pitchFamily="34" charset="-128"/>
-                <a:ea typeface="Noto Sans KR Medium" panose="020B0200000000000000" pitchFamily="34" charset="-128"/>
-              </a:rPr>
-              <a:t> </a:t>
-            </a:r>
-            <a:endParaRPr lang="en-US" altLang="ko-KR" sz="1000" dirty="0" smtClean="0">
-              <a:solidFill>
-                <a:schemeClr val="bg1">
-                  <a:lumMod val="95000"/>
-                </a:schemeClr>
-              </a:solidFill>
-              <a:latin typeface="Noto Sans KR Medium" panose="020B0200000000000000" pitchFamily="34" charset="-128"/>
-              <a:ea typeface="Noto Sans KR Medium" panose="020B0200000000000000" pitchFamily="34" charset="-128"/>
-            </a:endParaRPr>
-          </a:p>
-          <a:p>
-            <a:r>
-              <a:rPr lang="ko-KR" altLang="en-US" sz="1000" dirty="0" smtClean="0">
-                <a:solidFill>
-                  <a:schemeClr val="bg1">
-                    <a:lumMod val="95000"/>
-                  </a:schemeClr>
-                </a:solidFill>
-                <a:latin typeface="Noto Sans KR Medium" panose="020B0200000000000000" pitchFamily="34" charset="-128"/>
-                <a:ea typeface="Noto Sans KR Medium" panose="020B0200000000000000" pitchFamily="34" charset="-128"/>
-              </a:rPr>
-              <a:t>모든 구역이 완료되면 </a:t>
-            </a:r>
-            <a:r>
-              <a:rPr lang="en-US" altLang="ko-KR" sz="1000" dirty="0" err="1" smtClean="0">
-                <a:solidFill>
-                  <a:schemeClr val="bg1">
-                    <a:lumMod val="95000"/>
-                  </a:schemeClr>
-                </a:solidFill>
-                <a:latin typeface="Noto Sans KR Medium" panose="020B0200000000000000" pitchFamily="34" charset="-128"/>
-                <a:ea typeface="Noto Sans KR Medium" panose="020B0200000000000000" pitchFamily="34" charset="-128"/>
-              </a:rPr>
-              <a:t>GameMode</a:t>
-            </a:r>
-            <a:r>
-              <a:rPr lang="ko-KR" altLang="en-US" sz="1000" dirty="0" smtClean="0">
-                <a:solidFill>
-                  <a:schemeClr val="bg1">
-                    <a:lumMod val="95000"/>
-                  </a:schemeClr>
-                </a:solidFill>
-                <a:latin typeface="Noto Sans KR Medium" panose="020B0200000000000000" pitchFamily="34" charset="-128"/>
-                <a:ea typeface="Noto Sans KR Medium" panose="020B0200000000000000" pitchFamily="34" charset="-128"/>
-              </a:rPr>
-              <a:t>에서 </a:t>
-            </a:r>
-            <a:r>
-              <a:rPr lang="ko-KR" altLang="en-US" sz="1000" dirty="0" smtClean="0">
-                <a:solidFill>
-                  <a:schemeClr val="bg1">
-                    <a:lumMod val="95000"/>
-                  </a:schemeClr>
-                </a:solidFill>
-                <a:latin typeface="Noto Sans KR Medium" panose="020B0200000000000000" pitchFamily="34" charset="-128"/>
-                <a:ea typeface="Noto Sans KR Medium" panose="020B0200000000000000" pitchFamily="34" charset="-128"/>
-              </a:rPr>
-              <a:t>게임을 완료처리 합니다</a:t>
-            </a:r>
-            <a:r>
-              <a:rPr lang="en-US" altLang="ko-KR" sz="1000" dirty="0" smtClean="0">
-                <a:solidFill>
-                  <a:schemeClr val="bg1">
-                    <a:lumMod val="95000"/>
-                  </a:schemeClr>
-                </a:solidFill>
-                <a:latin typeface="Noto Sans KR Medium" panose="020B0200000000000000" pitchFamily="34" charset="-128"/>
-                <a:ea typeface="Noto Sans KR Medium" panose="020B0200000000000000" pitchFamily="34" charset="-128"/>
-              </a:rPr>
-              <a:t>.</a:t>
-            </a:r>
-            <a:endParaRPr lang="en-US" altLang="ko-KR" sz="1000" dirty="0" smtClean="0">
-              <a:solidFill>
-                <a:schemeClr val="bg1">
-                  <a:lumMod val="95000"/>
-                </a:schemeClr>
-              </a:solidFill>
-              <a:latin typeface="Noto Sans KR Medium" panose="020B0200000000000000" pitchFamily="34" charset="-128"/>
-              <a:ea typeface="Noto Sans KR Medium" panose="020B0200000000000000" pitchFamily="34" charset="-128"/>
-            </a:endParaRPr>
           </a:p>
         </p:txBody>
       </p:sp>
@@ -30373,19 +30086,7 @@
                 <a:latin typeface="Noto Sans KR ExtraBold" panose="020B0200000000000000" pitchFamily="34" charset="-128"/>
                 <a:ea typeface="Noto Sans KR ExtraBold" panose="020B0200000000000000" pitchFamily="34" charset="-128"/>
               </a:rPr>
-              <a:t>문제 </a:t>
-            </a:r>
-            <a:r>
-              <a:rPr lang="ko-KR" altLang="en-US" sz="1000" dirty="0" smtClean="0">
-                <a:solidFill>
-                  <a:schemeClr val="bg1">
-                    <a:lumMod val="95000"/>
-                  </a:schemeClr>
-                </a:solidFill>
-                <a:latin typeface="Noto Sans KR ExtraBold" panose="020B0200000000000000" pitchFamily="34" charset="-128"/>
-                <a:ea typeface="Noto Sans KR ExtraBold" panose="020B0200000000000000" pitchFamily="34" charset="-128"/>
-              </a:rPr>
-              <a:t>발생</a:t>
+              <a:t>문제 발생</a:t>
             </a:r>
             <a:endParaRPr lang="en-US" altLang="ko-KR" sz="1000" dirty="0">
               <a:solidFill>
@@ -30652,19 +30353,7 @@
                 <a:latin typeface="Noto Sans KR Medium" panose="020B0200000000000000" pitchFamily="34" charset="-128"/>
                 <a:ea typeface="Noto Sans KR Medium" panose="020B0200000000000000" pitchFamily="34" charset="-128"/>
               </a:rPr>
-              <a:t> 기반 기능 구현 </a:t>
-            </a:r>
-            <a:r>
-              <a:rPr lang="ko-KR" altLang="en-US" sz="1000" dirty="0" smtClean="0">
-                <a:solidFill>
-                  <a:schemeClr val="bg1">
-                    <a:lumMod val="95000"/>
-                  </a:schemeClr>
-                </a:solidFill>
-                <a:latin typeface="Noto Sans KR Medium" panose="020B0200000000000000" pitchFamily="34" charset="-128"/>
-                <a:ea typeface="Noto Sans KR Medium" panose="020B0200000000000000" pitchFamily="34" charset="-128"/>
-              </a:rPr>
-              <a:t>후</a:t>
+              <a:t> 기반 기능 구현 후</a:t>
             </a:r>
             <a:endParaRPr lang="en-US" altLang="ko-KR" sz="1000" dirty="0" smtClean="0">
               <a:solidFill>
@@ -30723,19 +30412,7 @@
                 <a:latin typeface="Noto Sans KR Medium" panose="020B0200000000000000" pitchFamily="34" charset="-128"/>
                 <a:ea typeface="Noto Sans KR Medium" panose="020B0200000000000000" pitchFamily="34" charset="-128"/>
               </a:rPr>
-              <a:t> 가지고 레벨을 만들어 테스트하던 도중 에러 </a:t>
-            </a:r>
-            <a:r>
-              <a:rPr lang="ko-KR" altLang="en-US" sz="1000" dirty="0" smtClean="0">
-                <a:solidFill>
-                  <a:schemeClr val="bg1">
-                    <a:lumMod val="95000"/>
-                  </a:schemeClr>
-                </a:solidFill>
-                <a:latin typeface="Noto Sans KR Medium" panose="020B0200000000000000" pitchFamily="34" charset="-128"/>
-                <a:ea typeface="Noto Sans KR Medium" panose="020B0200000000000000" pitchFamily="34" charset="-128"/>
-              </a:rPr>
-              <a:t>발생했습니다</a:t>
+              <a:t> 가지고 레벨을 만들어 테스트하던 도중 에러 발생했습니다</a:t>
             </a:r>
             <a:r>
               <a:rPr lang="en-US" altLang="ko-KR" sz="1000" dirty="0" smtClean="0">
@@ -32130,31 +31807,7 @@
                 <a:latin typeface="Noto Sans KR Medium" panose="020B0200000000000000" pitchFamily="34" charset="-128"/>
                 <a:ea typeface="Noto Sans KR Medium" panose="020B0200000000000000" pitchFamily="34" charset="-128"/>
               </a:rPr>
-              <a:t> 작업 후 </a:t>
-            </a:r>
-            <a:r>
-              <a:rPr lang="ko-KR" altLang="en-US" sz="1000" dirty="0" smtClean="0">
-                <a:solidFill>
-                  <a:schemeClr val="bg1">
-                    <a:lumMod val="95000"/>
-                  </a:schemeClr>
-                </a:solidFill>
-                <a:latin typeface="Noto Sans KR Medium" panose="020B0200000000000000" pitchFamily="34" charset="-128"/>
-                <a:ea typeface="Noto Sans KR Medium" panose="020B0200000000000000" pitchFamily="34" charset="-128"/>
-              </a:rPr>
-              <a:t>발생</a:t>
-            </a:r>
-            <a:r>
-              <a:rPr lang="ko-KR" altLang="en-US" sz="1000" dirty="0" smtClean="0">
-                <a:solidFill>
-                  <a:schemeClr val="bg1">
-                    <a:lumMod val="95000"/>
-                  </a:schemeClr>
-                </a:solidFill>
-                <a:latin typeface="Noto Sans KR Medium" panose="020B0200000000000000" pitchFamily="34" charset="-128"/>
-                <a:ea typeface="Noto Sans KR Medium" panose="020B0200000000000000" pitchFamily="34" charset="-128"/>
-              </a:rPr>
-              <a:t>했습니다</a:t>
+              <a:t> 작업 후 발생했습니다</a:t>
             </a:r>
             <a:r>
               <a:rPr lang="en-US" altLang="ko-KR" sz="1000" dirty="0" smtClean="0">
@@ -32168,15 +31821,6 @@
               </a:rPr>
               <a:t>.</a:t>
             </a:r>
-            <a:endParaRPr lang="en-US" altLang="ko-KR" sz="1000" dirty="0" smtClean="0">
-              <a:solidFill>
-                <a:schemeClr val="bg1">
-                  <a:lumMod val="95000"/>
-                </a:schemeClr>
-              </a:solidFill>
-              <a:latin typeface="Noto Sans KR Medium" panose="020B0200000000000000" pitchFamily="34" charset="-128"/>
-              <a:ea typeface="Noto Sans KR Medium" panose="020B0200000000000000" pitchFamily="34" charset="-128"/>
-            </a:endParaRPr>
           </a:p>
           <a:p>
             <a:r>
@@ -32263,15 +31907,6 @@
               </a:rPr>
               <a:t>.</a:t>
             </a:r>
-            <a:endParaRPr lang="en-US" altLang="ko-KR" sz="1000" dirty="0" smtClean="0">
-              <a:solidFill>
-                <a:schemeClr val="bg1">
-                  <a:lumMod val="95000"/>
-                </a:schemeClr>
-              </a:solidFill>
-              <a:latin typeface="Noto Sans KR Medium" panose="020B0200000000000000" pitchFamily="34" charset="-128"/>
-              <a:ea typeface="Noto Sans KR Medium" panose="020B0200000000000000" pitchFamily="34" charset="-128"/>
-            </a:endParaRPr>
           </a:p>
           <a:p>
             <a:endParaRPr lang="en-US" altLang="ko-KR" sz="1000" dirty="0">
@@ -32331,19 +31966,7 @@
                 <a:latin typeface="Noto Sans KR Medium" panose="020B0200000000000000" pitchFamily="34" charset="-128"/>
                 <a:ea typeface="Noto Sans KR Medium" panose="020B0200000000000000" pitchFamily="34" charset="-128"/>
               </a:rPr>
-              <a:t>초기화 중 스테이지 데이터 테이블을 참조하는 과정에서 문제가 </a:t>
-            </a:r>
-            <a:r>
-              <a:rPr lang="ko-KR" altLang="en-US" sz="1000" dirty="0" smtClean="0">
-                <a:solidFill>
-                  <a:schemeClr val="bg1">
-                    <a:lumMod val="95000"/>
-                  </a:schemeClr>
-                </a:solidFill>
-                <a:latin typeface="Noto Sans KR Medium" panose="020B0200000000000000" pitchFamily="34" charset="-128"/>
-                <a:ea typeface="Noto Sans KR Medium" panose="020B0200000000000000" pitchFamily="34" charset="-128"/>
-              </a:rPr>
-              <a:t>발생했습니다</a:t>
+              <a:t>초기화 중 스테이지 데이터 테이블을 참조하는 과정에서 문제가 발생했습니다</a:t>
             </a:r>
             <a:r>
               <a:rPr lang="en-US" altLang="ko-KR" sz="1000" dirty="0" smtClean="0">
@@ -32357,52 +31980,19 @@
               </a:rPr>
               <a:t>.</a:t>
             </a:r>
-            <a:endParaRPr lang="en-US" altLang="ko-KR" sz="1000" dirty="0" smtClean="0">
-              <a:solidFill>
-                <a:schemeClr val="bg1">
-                  <a:lumMod val="95000"/>
-                </a:schemeClr>
-              </a:solidFill>
-              <a:latin typeface="Noto Sans KR Medium" panose="020B0200000000000000" pitchFamily="34" charset="-128"/>
-              <a:ea typeface="Noto Sans KR Medium" panose="020B0200000000000000" pitchFamily="34" charset="-128"/>
-            </a:endParaRPr>
-          </a:p>
-          <a:p>
-            <a:r>
-              <a:rPr lang="ko-KR" altLang="en-US" sz="1000" dirty="0" smtClean="0">
-                <a:solidFill>
-                  <a:schemeClr val="bg1">
-                    <a:lumMod val="95000"/>
-                  </a:schemeClr>
-                </a:solidFill>
-                <a:latin typeface="Noto Sans KR Medium" panose="020B0200000000000000" pitchFamily="34" charset="-128"/>
-                <a:ea typeface="Noto Sans KR Medium" panose="020B0200000000000000" pitchFamily="34" charset="-128"/>
-              </a:rPr>
-              <a:t>스테이지 </a:t>
-            </a:r>
-            <a:r>
-              <a:rPr lang="ko-KR" altLang="en-US" sz="1000" dirty="0" smtClean="0">
-                <a:solidFill>
-                  <a:schemeClr val="bg1">
-                    <a:lumMod val="95000"/>
-                  </a:schemeClr>
-                </a:solidFill>
-                <a:latin typeface="Noto Sans KR Medium" panose="020B0200000000000000" pitchFamily="34" charset="-128"/>
-                <a:ea typeface="Noto Sans KR Medium" panose="020B0200000000000000" pitchFamily="34" charset="-128"/>
-              </a:rPr>
-              <a:t>데이터테이블에서 </a:t>
-            </a:r>
-            <a:r>
-              <a:rPr lang="ko-KR" altLang="en-US" sz="1000" dirty="0" smtClean="0">
-                <a:solidFill>
-                  <a:schemeClr val="bg1">
-                    <a:lumMod val="95000"/>
-                  </a:schemeClr>
-                </a:solidFill>
-                <a:latin typeface="Noto Sans KR Medium" panose="020B0200000000000000" pitchFamily="34" charset="-128"/>
-                <a:ea typeface="Noto Sans KR Medium" panose="020B0200000000000000" pitchFamily="34" charset="-128"/>
-              </a:rPr>
-              <a:t>레벨 시퀀스를 참조하고 있고</a:t>
+          </a:p>
+          <a:p>
+            <a:r>
+              <a:rPr lang="ko-KR" altLang="en-US" sz="1000" dirty="0" smtClean="0">
+                <a:solidFill>
+                  <a:schemeClr val="bg1">
+                    <a:lumMod val="95000"/>
+                  </a:schemeClr>
+                </a:solidFill>
+                <a:latin typeface="Noto Sans KR Medium" panose="020B0200000000000000" pitchFamily="34" charset="-128"/>
+                <a:ea typeface="Noto Sans KR Medium" panose="020B0200000000000000" pitchFamily="34" charset="-128"/>
+              </a:rPr>
+              <a:t>스테이지 데이터테이블에서 레벨 시퀀스를 참조하고 있고</a:t>
             </a:r>
             <a:r>
               <a:rPr lang="en-US" altLang="ko-KR" sz="1000" dirty="0" smtClean="0">
@@ -32450,19 +32040,7 @@
                 <a:latin typeface="Noto Sans KR Medium" panose="020B0200000000000000" pitchFamily="34" charset="-128"/>
                 <a:ea typeface="Noto Sans KR Medium" panose="020B0200000000000000" pitchFamily="34" charset="-128"/>
               </a:rPr>
-              <a:t> 아직 등록되지 않아 문제가 </a:t>
-            </a:r>
-            <a:r>
-              <a:rPr lang="ko-KR" altLang="en-US" sz="1000" dirty="0" smtClean="0">
-                <a:solidFill>
-                  <a:schemeClr val="bg1">
-                    <a:lumMod val="95000"/>
-                  </a:schemeClr>
-                </a:solidFill>
-                <a:latin typeface="Noto Sans KR Medium" panose="020B0200000000000000" pitchFamily="34" charset="-128"/>
-                <a:ea typeface="Noto Sans KR Medium" panose="020B0200000000000000" pitchFamily="34" charset="-128"/>
-              </a:rPr>
-              <a:t>발생했습니다</a:t>
+              <a:t> 아직 등록되지 않아 문제가 발생했습니다</a:t>
             </a:r>
             <a:r>
               <a:rPr lang="en-US" altLang="ko-KR" sz="1000" dirty="0" smtClean="0">
@@ -32476,15 +32054,6 @@
               </a:rPr>
               <a:t>.</a:t>
             </a:r>
-            <a:endParaRPr lang="en-US" altLang="ko-KR" sz="1000" dirty="0" smtClean="0">
-              <a:solidFill>
-                <a:schemeClr val="bg1">
-                  <a:lumMod val="95000"/>
-                </a:schemeClr>
-              </a:solidFill>
-              <a:latin typeface="Noto Sans KR Medium" panose="020B0200000000000000" pitchFamily="34" charset="-128"/>
-              <a:ea typeface="Noto Sans KR Medium" panose="020B0200000000000000" pitchFamily="34" charset="-128"/>
-            </a:endParaRPr>
           </a:p>
         </p:txBody>
       </p:sp>
@@ -32519,19 +32088,7 @@
                 <a:latin typeface="Noto Sans KR Medium" panose="020B0200000000000000" pitchFamily="34" charset="-128"/>
                 <a:ea typeface="Noto Sans KR Medium" panose="020B0200000000000000" pitchFamily="34" charset="-128"/>
               </a:rPr>
-              <a:t>등록되지 않았다는 로그를 </a:t>
-            </a:r>
-            <a:r>
-              <a:rPr lang="ko-KR" altLang="en-US" sz="1000" dirty="0" smtClean="0">
-                <a:solidFill>
-                  <a:schemeClr val="bg1">
-                    <a:lumMod val="95000"/>
-                  </a:schemeClr>
-                </a:solidFill>
-                <a:latin typeface="Noto Sans KR Medium" panose="020B0200000000000000" pitchFamily="34" charset="-128"/>
-                <a:ea typeface="Noto Sans KR Medium" panose="020B0200000000000000" pitchFamily="34" charset="-128"/>
-              </a:rPr>
-              <a:t>보고</a:t>
+              <a:t>등록되지 않았다는 로그를 보고</a:t>
             </a:r>
             <a:r>
               <a:rPr lang="en-US" altLang="ko-KR" sz="1000" dirty="0" smtClean="0">
@@ -32603,19 +32160,7 @@
                 <a:latin typeface="Noto Sans KR Medium" panose="020B0200000000000000" pitchFamily="34" charset="-128"/>
                 <a:ea typeface="Noto Sans KR Medium" panose="020B0200000000000000" pitchFamily="34" charset="-128"/>
               </a:rPr>
-              <a:t> 누락이 발생했다고 </a:t>
-            </a:r>
-            <a:r>
-              <a:rPr lang="ko-KR" altLang="en-US" sz="1000" dirty="0" smtClean="0">
-                <a:solidFill>
-                  <a:schemeClr val="bg1">
-                    <a:lumMod val="95000"/>
-                  </a:schemeClr>
-                </a:solidFill>
-                <a:latin typeface="Noto Sans KR Medium" panose="020B0200000000000000" pitchFamily="34" charset="-128"/>
-                <a:ea typeface="Noto Sans KR Medium" panose="020B0200000000000000" pitchFamily="34" charset="-128"/>
-              </a:rPr>
-              <a:t>생각했습니다</a:t>
+              <a:t> 누락이 발생했다고 생각했습니다</a:t>
             </a:r>
             <a:r>
               <a:rPr lang="en-US" altLang="ko-KR" sz="1000" dirty="0" smtClean="0">
@@ -32677,7 +32222,43 @@
                 <a:latin typeface="Noto Sans KR Medium" panose="020B0200000000000000" pitchFamily="34" charset="-128"/>
                 <a:ea typeface="Noto Sans KR Medium" panose="020B0200000000000000" pitchFamily="34" charset="-128"/>
               </a:rPr>
-              <a:t>패키</a:t>
+              <a:t>패키징</a:t>
+            </a:r>
+            <a:r>
+              <a:rPr lang="ko-KR" altLang="en-US" sz="1000" dirty="0" smtClean="0">
+                <a:solidFill>
+                  <a:schemeClr val="bg1">
+                    <a:lumMod val="95000"/>
+                  </a:schemeClr>
+                </a:solidFill>
+                <a:latin typeface="Noto Sans KR Medium" panose="020B0200000000000000" pitchFamily="34" charset="-128"/>
+                <a:ea typeface="Noto Sans KR Medium" panose="020B0200000000000000" pitchFamily="34" charset="-128"/>
+              </a:rPr>
+              <a:t> 시</a:t>
+            </a:r>
+            <a:r>
+              <a:rPr lang="en-US" altLang="ko-KR" sz="1000" dirty="0" smtClean="0">
+                <a:solidFill>
+                  <a:schemeClr val="bg1">
+                    <a:lumMod val="95000"/>
+                  </a:schemeClr>
+                </a:solidFill>
+                <a:latin typeface="Noto Sans KR Medium" panose="020B0200000000000000" pitchFamily="34" charset="-128"/>
+                <a:ea typeface="Noto Sans KR Medium" panose="020B0200000000000000" pitchFamily="34" charset="-128"/>
+              </a:rPr>
+              <a:t>, </a:t>
+            </a:r>
+            <a:r>
+              <a:rPr lang="ko-KR" altLang="en-US" sz="1000" dirty="0" smtClean="0">
+                <a:solidFill>
+                  <a:schemeClr val="bg1">
+                    <a:lumMod val="95000"/>
+                  </a:schemeClr>
+                </a:solidFill>
+                <a:latin typeface="Noto Sans KR Medium" panose="020B0200000000000000" pitchFamily="34" charset="-128"/>
+                <a:ea typeface="Noto Sans KR Medium" panose="020B0200000000000000" pitchFamily="34" charset="-128"/>
+              </a:rPr>
+              <a:t>특정 </a:t>
             </a:r>
             <a:r>
               <a:rPr lang="ko-KR" altLang="en-US" sz="1000" dirty="0" err="1" smtClean="0">
@@ -32689,31 +32270,93 @@
                 <a:latin typeface="Noto Sans KR Medium" panose="020B0200000000000000" pitchFamily="34" charset="-128"/>
                 <a:ea typeface="Noto Sans KR Medium" panose="020B0200000000000000" pitchFamily="34" charset="-128"/>
               </a:rPr>
-              <a:t>징</a:t>
-            </a:r>
-            <a:r>
-              <a:rPr lang="ko-KR" altLang="en-US" sz="1000" dirty="0" smtClean="0">
-                <a:solidFill>
-                  <a:schemeClr val="bg1">
-                    <a:lumMod val="95000"/>
-                  </a:schemeClr>
-                </a:solidFill>
-                <a:latin typeface="Noto Sans KR Medium" panose="020B0200000000000000" pitchFamily="34" charset="-128"/>
-                <a:ea typeface="Noto Sans KR Medium" panose="020B0200000000000000" pitchFamily="34" charset="-128"/>
-              </a:rPr>
-              <a:t> 시</a:t>
-            </a:r>
-            <a:r>
-              <a:rPr lang="en-US" altLang="ko-KR" sz="1000" dirty="0" smtClean="0">
-                <a:solidFill>
-                  <a:schemeClr val="bg1">
-                    <a:lumMod val="95000"/>
-                  </a:schemeClr>
-                </a:solidFill>
-                <a:latin typeface="Noto Sans KR Medium" panose="020B0200000000000000" pitchFamily="34" charset="-128"/>
-                <a:ea typeface="Noto Sans KR Medium" panose="020B0200000000000000" pitchFamily="34" charset="-128"/>
-              </a:rPr>
-              <a:t>,</a:t>
+              <a:t>에셋을</a:t>
+            </a:r>
+            <a:r>
+              <a:rPr lang="ko-KR" altLang="en-US" sz="1000" dirty="0" smtClean="0">
+                <a:solidFill>
+                  <a:schemeClr val="bg1">
+                    <a:lumMod val="95000"/>
+                  </a:schemeClr>
+                </a:solidFill>
+                <a:latin typeface="Noto Sans KR Medium" panose="020B0200000000000000" pitchFamily="34" charset="-128"/>
+                <a:ea typeface="Noto Sans KR Medium" panose="020B0200000000000000" pitchFamily="34" charset="-128"/>
+              </a:rPr>
+              <a:t> 반드시 포함하도록 설정하고 다시 </a:t>
+            </a:r>
+            <a:r>
+              <a:rPr lang="ko-KR" altLang="en-US" sz="1000" dirty="0" err="1" smtClean="0">
+                <a:solidFill>
+                  <a:schemeClr val="bg1">
+                    <a:lumMod val="95000"/>
+                  </a:schemeClr>
+                </a:solidFill>
+                <a:latin typeface="Noto Sans KR Medium" panose="020B0200000000000000" pitchFamily="34" charset="-128"/>
+                <a:ea typeface="Noto Sans KR Medium" panose="020B0200000000000000" pitchFamily="34" charset="-128"/>
+              </a:rPr>
+              <a:t>빌드를</a:t>
+            </a:r>
+            <a:r>
+              <a:rPr lang="ko-KR" altLang="en-US" sz="1000" dirty="0" smtClean="0">
+                <a:solidFill>
+                  <a:schemeClr val="bg1">
+                    <a:lumMod val="95000"/>
+                  </a:schemeClr>
+                </a:solidFill>
+                <a:latin typeface="Noto Sans KR Medium" panose="020B0200000000000000" pitchFamily="34" charset="-128"/>
+                <a:ea typeface="Noto Sans KR Medium" panose="020B0200000000000000" pitchFamily="34" charset="-128"/>
+              </a:rPr>
+              <a:t> 시도했습니다</a:t>
+            </a:r>
+            <a:r>
+              <a:rPr lang="en-US" altLang="ko-KR" sz="1000" dirty="0" smtClean="0">
+                <a:solidFill>
+                  <a:schemeClr val="bg1">
+                    <a:lumMod val="95000"/>
+                  </a:schemeClr>
+                </a:solidFill>
+                <a:latin typeface="Noto Sans KR Medium" panose="020B0200000000000000" pitchFamily="34" charset="-128"/>
+                <a:ea typeface="Noto Sans KR Medium" panose="020B0200000000000000" pitchFamily="34" charset="-128"/>
+              </a:rPr>
+              <a:t>.</a:t>
+            </a:r>
+          </a:p>
+          <a:p>
+            <a:r>
+              <a:rPr lang="ko-KR" altLang="en-US" sz="1000" dirty="0" smtClean="0">
+                <a:solidFill>
+                  <a:schemeClr val="bg1">
+                    <a:lumMod val="95000"/>
+                  </a:schemeClr>
+                </a:solidFill>
+                <a:latin typeface="Noto Sans KR Medium" panose="020B0200000000000000" pitchFamily="34" charset="-128"/>
+                <a:ea typeface="Noto Sans KR Medium" panose="020B0200000000000000" pitchFamily="34" charset="-128"/>
+              </a:rPr>
+              <a:t>그럼에도 </a:t>
+            </a:r>
+            <a:r>
+              <a:rPr lang="ko-KR" altLang="en-US" sz="1000" dirty="0" err="1" smtClean="0">
+                <a:solidFill>
+                  <a:schemeClr val="bg1">
+                    <a:lumMod val="95000"/>
+                  </a:schemeClr>
+                </a:solidFill>
+                <a:latin typeface="Noto Sans KR Medium" panose="020B0200000000000000" pitchFamily="34" charset="-128"/>
+                <a:ea typeface="Noto Sans KR Medium" panose="020B0200000000000000" pitchFamily="34" charset="-128"/>
+              </a:rPr>
+              <a:t>빌드는</a:t>
+            </a:r>
+            <a:r>
+              <a:rPr lang="ko-KR" altLang="en-US" sz="1000" dirty="0" smtClean="0">
+                <a:solidFill>
+                  <a:schemeClr val="bg1">
+                    <a:lumMod val="95000"/>
+                  </a:schemeClr>
+                </a:solidFill>
+                <a:latin typeface="Noto Sans KR Medium" panose="020B0200000000000000" pitchFamily="34" charset="-128"/>
+                <a:ea typeface="Noto Sans KR Medium" panose="020B0200000000000000" pitchFamily="34" charset="-128"/>
+              </a:rPr>
+              <a:t> 실패했고</a:t>
             </a:r>
             <a:r>
               <a:rPr lang="en-US" altLang="ko-KR" sz="1000" dirty="0" smtClean="0">
@@ -32737,8 +32380,33 @@
                 <a:latin typeface="Noto Sans KR Medium" panose="020B0200000000000000" pitchFamily="34" charset="-128"/>
                 <a:ea typeface="Noto Sans KR Medium" panose="020B0200000000000000" pitchFamily="34" charset="-128"/>
               </a:rPr>
-              <a:t>특정 </a:t>
-            </a:r>
+              <a:t>동일한 에러 로그가 출력됐습니다</a:t>
+            </a:r>
+            <a:r>
+              <a:rPr lang="en-US" altLang="ko-KR" sz="1000" dirty="0" smtClean="0">
+                <a:solidFill>
+                  <a:schemeClr val="bg1">
+                    <a:lumMod val="95000"/>
+                  </a:schemeClr>
+                </a:solidFill>
+                <a:latin typeface="Noto Sans KR Medium" panose="020B0200000000000000" pitchFamily="34" charset="-128"/>
+                <a:ea typeface="Noto Sans KR Medium" panose="020B0200000000000000" pitchFamily="34" charset="-128"/>
+              </a:rPr>
+              <a:t>.</a:t>
+            </a:r>
+          </a:p>
+          <a:p>
+            <a:endParaRPr lang="en-US" altLang="ko-KR" sz="1000" dirty="0">
+              <a:solidFill>
+                <a:schemeClr val="bg1">
+                  <a:lumMod val="95000"/>
+                </a:schemeClr>
+              </a:solidFill>
+              <a:latin typeface="Noto Sans KR Medium" panose="020B0200000000000000" pitchFamily="34" charset="-128"/>
+              <a:ea typeface="Noto Sans KR Medium" panose="020B0200000000000000" pitchFamily="34" charset="-128"/>
+            </a:endParaRPr>
+          </a:p>
+          <a:p>
             <a:r>
               <a:rPr lang="ko-KR" altLang="en-US" sz="1000" dirty="0" err="1" smtClean="0">
                 <a:solidFill>
@@ -32749,67 +32417,19 @@
                 <a:latin typeface="Noto Sans KR Medium" panose="020B0200000000000000" pitchFamily="34" charset="-128"/>
                 <a:ea typeface="Noto Sans KR Medium" panose="020B0200000000000000" pitchFamily="34" charset="-128"/>
               </a:rPr>
-              <a:t>에셋을</a:t>
-            </a:r>
-            <a:r>
-              <a:rPr lang="ko-KR" altLang="en-US" sz="1000" dirty="0" smtClean="0">
-                <a:solidFill>
-                  <a:schemeClr val="bg1">
-                    <a:lumMod val="95000"/>
-                  </a:schemeClr>
-                </a:solidFill>
-                <a:latin typeface="Noto Sans KR Medium" panose="020B0200000000000000" pitchFamily="34" charset="-128"/>
-                <a:ea typeface="Noto Sans KR Medium" panose="020B0200000000000000" pitchFamily="34" charset="-128"/>
-              </a:rPr>
-              <a:t> 반드시 포함하도록 </a:t>
-            </a:r>
-            <a:r>
-              <a:rPr lang="ko-KR" altLang="en-US" sz="1000" dirty="0" smtClean="0">
-                <a:solidFill>
-                  <a:schemeClr val="bg1">
-                    <a:lumMod val="95000"/>
-                  </a:schemeClr>
-                </a:solidFill>
-                <a:latin typeface="Noto Sans KR Medium" panose="020B0200000000000000" pitchFamily="34" charset="-128"/>
-                <a:ea typeface="Noto Sans KR Medium" panose="020B0200000000000000" pitchFamily="34" charset="-128"/>
-              </a:rPr>
-              <a:t>설정하고 다시 </a:t>
-            </a:r>
-            <a:r>
-              <a:rPr lang="ko-KR" altLang="en-US" sz="1000" dirty="0" err="1" smtClean="0">
-                <a:solidFill>
-                  <a:schemeClr val="bg1">
-                    <a:lumMod val="95000"/>
-                  </a:schemeClr>
-                </a:solidFill>
-                <a:latin typeface="Noto Sans KR Medium" panose="020B0200000000000000" pitchFamily="34" charset="-128"/>
-                <a:ea typeface="Noto Sans KR Medium" panose="020B0200000000000000" pitchFamily="34" charset="-128"/>
-              </a:rPr>
-              <a:t>빌드를</a:t>
-            </a:r>
-            <a:r>
-              <a:rPr lang="ko-KR" altLang="en-US" sz="1000" dirty="0" smtClean="0">
-                <a:solidFill>
-                  <a:schemeClr val="bg1">
-                    <a:lumMod val="95000"/>
-                  </a:schemeClr>
-                </a:solidFill>
-                <a:latin typeface="Noto Sans KR Medium" panose="020B0200000000000000" pitchFamily="34" charset="-128"/>
-                <a:ea typeface="Noto Sans KR Medium" panose="020B0200000000000000" pitchFamily="34" charset="-128"/>
-              </a:rPr>
-              <a:t> 시도했습니다</a:t>
-            </a:r>
-            <a:r>
-              <a:rPr lang="en-US" altLang="ko-KR" sz="1000" dirty="0" smtClean="0">
-                <a:solidFill>
-                  <a:schemeClr val="bg1">
-                    <a:lumMod val="95000"/>
-                  </a:schemeClr>
-                </a:solidFill>
-                <a:latin typeface="Noto Sans KR Medium" panose="020B0200000000000000" pitchFamily="34" charset="-128"/>
-                <a:ea typeface="Noto Sans KR Medium" panose="020B0200000000000000" pitchFamily="34" charset="-128"/>
-              </a:rPr>
-              <a:t>.</a:t>
+              <a:t>에셋</a:t>
+            </a:r>
+            <a:r>
+              <a:rPr lang="ko-KR" altLang="en-US" sz="1000" dirty="0" smtClean="0">
+                <a:solidFill>
+                  <a:schemeClr val="bg1">
+                    <a:lumMod val="95000"/>
+                  </a:schemeClr>
+                </a:solidFill>
+                <a:latin typeface="Noto Sans KR Medium" panose="020B0200000000000000" pitchFamily="34" charset="-128"/>
+                <a:ea typeface="Noto Sans KR Medium" panose="020B0200000000000000" pitchFamily="34" charset="-128"/>
+              </a:rPr>
+              <a:t> 누락이 아니라 데이터테이블에서 레벨 시퀀스를 직접 참조하기 때문에 발생한 것이라 판단했고</a:t>
             </a:r>
             <a:endParaRPr lang="en-US" altLang="ko-KR" sz="1000" dirty="0" smtClean="0">
               <a:solidFill>
@@ -32823,16 +32443,112 @@
           </a:p>
           <a:p>
             <a:r>
-              <a:rPr lang="ko-KR" altLang="en-US" sz="1000" dirty="0" smtClean="0">
-                <a:solidFill>
-                  <a:schemeClr val="bg1">
-                    <a:lumMod val="95000"/>
-                  </a:schemeClr>
-                </a:solidFill>
-                <a:latin typeface="Noto Sans KR Medium" panose="020B0200000000000000" pitchFamily="34" charset="-128"/>
-                <a:ea typeface="Noto Sans KR Medium" panose="020B0200000000000000" pitchFamily="34" charset="-128"/>
-              </a:rPr>
-              <a:t>그럼에도 </a:t>
+              <a:rPr lang="ko-KR" altLang="en-US" sz="1000" dirty="0">
+                <a:solidFill>
+                  <a:schemeClr val="bg1">
+                    <a:lumMod val="95000"/>
+                  </a:schemeClr>
+                </a:solidFill>
+                <a:latin typeface="Noto Sans KR Medium" panose="020B0200000000000000" pitchFamily="34" charset="-128"/>
+                <a:ea typeface="Noto Sans KR Medium" panose="020B0200000000000000" pitchFamily="34" charset="-128"/>
+              </a:rPr>
+              <a:t>검증을 위해서 </a:t>
+            </a:r>
+            <a:r>
+              <a:rPr lang="en-US" altLang="ko-KR" sz="1000" dirty="0" smtClean="0">
+                <a:solidFill>
+                  <a:schemeClr val="bg1">
+                    <a:lumMod val="95000"/>
+                  </a:schemeClr>
+                </a:solidFill>
+                <a:latin typeface="Noto Sans KR Medium" panose="020B0200000000000000" pitchFamily="34" charset="-128"/>
+                <a:ea typeface="Noto Sans KR Medium" panose="020B0200000000000000" pitchFamily="34" charset="-128"/>
+              </a:rPr>
+              <a:t> </a:t>
+            </a:r>
+            <a:r>
+              <a:rPr lang="ko-KR" altLang="en-US" sz="1000" dirty="0" smtClean="0">
+                <a:solidFill>
+                  <a:schemeClr val="bg1">
+                    <a:lumMod val="95000"/>
+                  </a:schemeClr>
+                </a:solidFill>
+                <a:latin typeface="Noto Sans KR Medium" panose="020B0200000000000000" pitchFamily="34" charset="-128"/>
+                <a:ea typeface="Noto Sans KR Medium" panose="020B0200000000000000" pitchFamily="34" charset="-128"/>
+              </a:rPr>
+              <a:t>데이터테이블에서 레벨 시퀀스를 </a:t>
+            </a:r>
+            <a:r>
+              <a:rPr lang="en-US" altLang="ko-KR" sz="1000" dirty="0" err="1" smtClean="0">
+                <a:solidFill>
+                  <a:schemeClr val="bg1">
+                    <a:lumMod val="95000"/>
+                  </a:schemeClr>
+                </a:solidFill>
+                <a:latin typeface="Noto Sans KR Medium" panose="020B0200000000000000" pitchFamily="34" charset="-128"/>
+                <a:ea typeface="Noto Sans KR Medium" panose="020B0200000000000000" pitchFamily="34" charset="-128"/>
+              </a:rPr>
+              <a:t>TObjectPtr</a:t>
+            </a:r>
+            <a:r>
+              <a:rPr lang="ko-KR" altLang="en-US" sz="1000" dirty="0" smtClean="0">
+                <a:solidFill>
+                  <a:schemeClr val="bg1">
+                    <a:lumMod val="95000"/>
+                  </a:schemeClr>
+                </a:solidFill>
+                <a:latin typeface="Noto Sans KR Medium" panose="020B0200000000000000" pitchFamily="34" charset="-128"/>
+                <a:ea typeface="Noto Sans KR Medium" panose="020B0200000000000000" pitchFamily="34" charset="-128"/>
+              </a:rPr>
+              <a:t>이 아닌 </a:t>
+            </a:r>
+            <a:r>
+              <a:rPr lang="en-US" altLang="ko-KR" sz="1000" dirty="0" err="1" smtClean="0">
+                <a:solidFill>
+                  <a:schemeClr val="bg1">
+                    <a:lumMod val="95000"/>
+                  </a:schemeClr>
+                </a:solidFill>
+                <a:latin typeface="Noto Sans KR Medium" panose="020B0200000000000000" pitchFamily="34" charset="-128"/>
+                <a:ea typeface="Noto Sans KR Medium" panose="020B0200000000000000" pitchFamily="34" charset="-128"/>
+              </a:rPr>
+              <a:t>TSoftObjectPtr</a:t>
+            </a:r>
+            <a:r>
+              <a:rPr lang="ko-KR" altLang="en-US" sz="1000" dirty="0" smtClean="0">
+                <a:solidFill>
+                  <a:schemeClr val="bg1">
+                    <a:lumMod val="95000"/>
+                  </a:schemeClr>
+                </a:solidFill>
+                <a:latin typeface="Noto Sans KR Medium" panose="020B0200000000000000" pitchFamily="34" charset="-128"/>
+                <a:ea typeface="Noto Sans KR Medium" panose="020B0200000000000000" pitchFamily="34" charset="-128"/>
+              </a:rPr>
+              <a:t>로 변경했습니다</a:t>
+            </a:r>
+            <a:r>
+              <a:rPr lang="en-US" altLang="ko-KR" sz="1000" dirty="0" smtClean="0">
+                <a:solidFill>
+                  <a:schemeClr val="bg1">
+                    <a:lumMod val="95000"/>
+                  </a:schemeClr>
+                </a:solidFill>
+                <a:latin typeface="Noto Sans KR Medium" panose="020B0200000000000000" pitchFamily="34" charset="-128"/>
+                <a:ea typeface="Noto Sans KR Medium" panose="020B0200000000000000" pitchFamily="34" charset="-128"/>
+              </a:rPr>
+              <a:t>. (</a:t>
+            </a:r>
+            <a:r>
+              <a:rPr lang="ko-KR" altLang="en-US" sz="1000" dirty="0" smtClean="0">
+                <a:solidFill>
+                  <a:schemeClr val="bg1">
+                    <a:lumMod val="95000"/>
+                  </a:schemeClr>
+                </a:solidFill>
+                <a:latin typeface="Noto Sans KR Medium" panose="020B0200000000000000" pitchFamily="34" charset="-128"/>
+                <a:ea typeface="Noto Sans KR Medium" panose="020B0200000000000000" pitchFamily="34" charset="-128"/>
+              </a:rPr>
+              <a:t>하드 </a:t>
             </a:r>
             <a:r>
               <a:rPr lang="ko-KR" altLang="en-US" sz="1000" dirty="0" err="1" smtClean="0">
@@ -32844,7 +32560,7 @@
                 <a:latin typeface="Noto Sans KR Medium" panose="020B0200000000000000" pitchFamily="34" charset="-128"/>
                 <a:ea typeface="Noto Sans KR Medium" panose="020B0200000000000000" pitchFamily="34" charset="-128"/>
               </a:rPr>
-              <a:t>빌드는</a:t>
+              <a:t>레퍼런스</a:t>
             </a:r>
             <a:r>
               <a:rPr lang="ko-KR" altLang="en-US" sz="1000" dirty="0" smtClean="0">
@@ -32859,64 +32575,102 @@
               <a:t> </a:t>
             </a:r>
             <a:r>
-              <a:rPr lang="ko-KR" altLang="en-US" sz="1000" dirty="0" smtClean="0">
-                <a:solidFill>
-                  <a:schemeClr val="bg1">
-                    <a:lumMod val="95000"/>
-                  </a:schemeClr>
-                </a:solidFill>
-                <a:latin typeface="Noto Sans KR Medium" panose="020B0200000000000000" pitchFamily="34" charset="-128"/>
-                <a:ea typeface="Noto Sans KR Medium" panose="020B0200000000000000" pitchFamily="34" charset="-128"/>
-              </a:rPr>
-              <a:t>실패했고</a:t>
-            </a:r>
-            <a:r>
-              <a:rPr lang="en-US" altLang="ko-KR" sz="1000" dirty="0" smtClean="0">
-                <a:solidFill>
-                  <a:schemeClr val="bg1">
-                    <a:lumMod val="95000"/>
-                  </a:schemeClr>
-                </a:solidFill>
-                <a:latin typeface="Noto Sans KR Medium" panose="020B0200000000000000" pitchFamily="34" charset="-128"/>
-                <a:ea typeface="Noto Sans KR Medium" panose="020B0200000000000000" pitchFamily="34" charset="-128"/>
-              </a:rPr>
-              <a:t> </a:t>
-            </a:r>
-            <a:r>
-              <a:rPr lang="ko-KR" altLang="en-US" sz="1000" dirty="0" smtClean="0">
-                <a:solidFill>
-                  <a:schemeClr val="bg1">
-                    <a:lumMod val="95000"/>
-                  </a:schemeClr>
-                </a:solidFill>
-                <a:latin typeface="Noto Sans KR Medium" panose="020B0200000000000000" pitchFamily="34" charset="-128"/>
-                <a:ea typeface="Noto Sans KR Medium" panose="020B0200000000000000" pitchFamily="34" charset="-128"/>
-              </a:rPr>
-              <a:t>동일한 에러 로그가 </a:t>
-            </a:r>
-            <a:r>
-              <a:rPr lang="ko-KR" altLang="en-US" sz="1000" dirty="0" smtClean="0">
-                <a:solidFill>
-                  <a:schemeClr val="bg1">
-                    <a:lumMod val="95000"/>
-                  </a:schemeClr>
-                </a:solidFill>
-                <a:latin typeface="Noto Sans KR Medium" panose="020B0200000000000000" pitchFamily="34" charset="-128"/>
-                <a:ea typeface="Noto Sans KR Medium" panose="020B0200000000000000" pitchFamily="34" charset="-128"/>
-              </a:rPr>
-              <a:t>출력</a:t>
-            </a:r>
-            <a:r>
-              <a:rPr lang="ko-KR" altLang="en-US" sz="1000" dirty="0" smtClean="0">
-                <a:solidFill>
-                  <a:schemeClr val="bg1">
-                    <a:lumMod val="95000"/>
-                  </a:schemeClr>
-                </a:solidFill>
-                <a:latin typeface="Noto Sans KR Medium" panose="020B0200000000000000" pitchFamily="34" charset="-128"/>
-                <a:ea typeface="Noto Sans KR Medium" panose="020B0200000000000000" pitchFamily="34" charset="-128"/>
-              </a:rPr>
-              <a:t>됐습니다</a:t>
+              <a:rPr lang="en-US" altLang="ko-KR" sz="1000" dirty="0" smtClean="0">
+                <a:solidFill>
+                  <a:schemeClr val="bg1">
+                    <a:lumMod val="95000"/>
+                  </a:schemeClr>
+                </a:solidFill>
+                <a:latin typeface="Noto Sans KR Medium" panose="020B0200000000000000" pitchFamily="34" charset="-128"/>
+                <a:ea typeface="Noto Sans KR Medium" panose="020B0200000000000000" pitchFamily="34" charset="-128"/>
+              </a:rPr>
+              <a:t>-&gt; </a:t>
+            </a:r>
+            <a:r>
+              <a:rPr lang="ko-KR" altLang="en-US" sz="1000" dirty="0" smtClean="0">
+                <a:solidFill>
+                  <a:schemeClr val="bg1">
+                    <a:lumMod val="95000"/>
+                  </a:schemeClr>
+                </a:solidFill>
+                <a:latin typeface="Noto Sans KR Medium" panose="020B0200000000000000" pitchFamily="34" charset="-128"/>
+                <a:ea typeface="Noto Sans KR Medium" panose="020B0200000000000000" pitchFamily="34" charset="-128"/>
+              </a:rPr>
+              <a:t>소프트 </a:t>
+            </a:r>
+            <a:r>
+              <a:rPr lang="ko-KR" altLang="en-US" sz="1000" dirty="0" err="1" smtClean="0">
+                <a:solidFill>
+                  <a:schemeClr val="bg1">
+                    <a:lumMod val="95000"/>
+                  </a:schemeClr>
+                </a:solidFill>
+                <a:latin typeface="Noto Sans KR Medium" panose="020B0200000000000000" pitchFamily="34" charset="-128"/>
+                <a:ea typeface="Noto Sans KR Medium" panose="020B0200000000000000" pitchFamily="34" charset="-128"/>
+              </a:rPr>
+              <a:t>레퍼런스로</a:t>
+            </a:r>
+            <a:r>
+              <a:rPr lang="ko-KR" altLang="en-US" sz="1000" dirty="0" smtClean="0">
+                <a:solidFill>
+                  <a:schemeClr val="bg1">
+                    <a:lumMod val="95000"/>
+                  </a:schemeClr>
+                </a:solidFill>
+                <a:latin typeface="Noto Sans KR Medium" panose="020B0200000000000000" pitchFamily="34" charset="-128"/>
+                <a:ea typeface="Noto Sans KR Medium" panose="020B0200000000000000" pitchFamily="34" charset="-128"/>
+              </a:rPr>
+              <a:t> 변경</a:t>
+            </a:r>
+            <a:r>
+              <a:rPr lang="en-US" altLang="ko-KR" sz="1000" dirty="0" smtClean="0">
+                <a:solidFill>
+                  <a:schemeClr val="bg1">
+                    <a:lumMod val="95000"/>
+                  </a:schemeClr>
+                </a:solidFill>
+                <a:latin typeface="Noto Sans KR Medium" panose="020B0200000000000000" pitchFamily="34" charset="-128"/>
+                <a:ea typeface="Noto Sans KR Medium" panose="020B0200000000000000" pitchFamily="34" charset="-128"/>
+              </a:rPr>
+              <a:t>)</a:t>
+            </a:r>
+          </a:p>
+          <a:p>
+            <a:r>
+              <a:rPr lang="ko-KR" altLang="en-US" sz="1000" dirty="0" smtClean="0">
+                <a:solidFill>
+                  <a:schemeClr val="bg1">
+                    <a:lumMod val="95000"/>
+                  </a:schemeClr>
+                </a:solidFill>
+                <a:latin typeface="Noto Sans KR Medium" panose="020B0200000000000000" pitchFamily="34" charset="-128"/>
+                <a:ea typeface="Noto Sans KR Medium" panose="020B0200000000000000" pitchFamily="34" charset="-128"/>
+              </a:rPr>
+              <a:t>그 후 다시 </a:t>
+            </a:r>
+            <a:r>
+              <a:rPr lang="ko-KR" altLang="en-US" sz="1000" dirty="0" err="1" smtClean="0">
+                <a:solidFill>
+                  <a:schemeClr val="bg1">
+                    <a:lumMod val="95000"/>
+                  </a:schemeClr>
+                </a:solidFill>
+                <a:latin typeface="Noto Sans KR Medium" panose="020B0200000000000000" pitchFamily="34" charset="-128"/>
+                <a:ea typeface="Noto Sans KR Medium" panose="020B0200000000000000" pitchFamily="34" charset="-128"/>
+              </a:rPr>
+              <a:t>빌드</a:t>
+            </a:r>
+            <a:r>
+              <a:rPr lang="ko-KR" altLang="en-US" sz="1000" dirty="0" smtClean="0">
+                <a:solidFill>
+                  <a:schemeClr val="bg1">
+                    <a:lumMod val="95000"/>
+                  </a:schemeClr>
+                </a:solidFill>
+                <a:latin typeface="Noto Sans KR Medium" panose="020B0200000000000000" pitchFamily="34" charset="-128"/>
+                <a:ea typeface="Noto Sans KR Medium" panose="020B0200000000000000" pitchFamily="34" charset="-128"/>
+              </a:rPr>
+              <a:t> 시도에서 성공한 것을 확인했습니다</a:t>
             </a:r>
             <a:r>
               <a:rPr lang="en-US" altLang="ko-KR" sz="1000" dirty="0" smtClean="0">
@@ -32930,15 +32684,6 @@
               </a:rPr>
               <a:t>.</a:t>
             </a:r>
-            <a:endParaRPr lang="en-US" altLang="ko-KR" sz="1000" dirty="0" smtClean="0">
-              <a:solidFill>
-                <a:schemeClr val="bg1">
-                  <a:lumMod val="95000"/>
-                </a:schemeClr>
-              </a:solidFill>
-              <a:latin typeface="Noto Sans KR Medium" panose="020B0200000000000000" pitchFamily="34" charset="-128"/>
-              <a:ea typeface="Noto Sans KR Medium" panose="020B0200000000000000" pitchFamily="34" charset="-128"/>
-            </a:endParaRPr>
           </a:p>
           <a:p>
             <a:endParaRPr lang="en-US" altLang="ko-KR" sz="1000" dirty="0">
@@ -32953,6 +32698,18 @@
           </a:p>
           <a:p>
             <a:r>
+              <a:rPr lang="ko-KR" altLang="en-US" sz="1000" dirty="0" smtClean="0">
+                <a:solidFill>
+                  <a:schemeClr val="bg1">
+                    <a:lumMod val="95000"/>
+                  </a:schemeClr>
+                </a:solidFill>
+                <a:latin typeface="Noto Sans KR Medium" panose="020B0200000000000000" pitchFamily="34" charset="-128"/>
+                <a:ea typeface="Noto Sans KR Medium" panose="020B0200000000000000" pitchFamily="34" charset="-128"/>
+              </a:rPr>
+              <a:t>레벨 시퀀스를 사용하는 부분에서 레벨 시퀀스 </a:t>
+            </a:r>
+            <a:r>
               <a:rPr lang="ko-KR" altLang="en-US" sz="1000" dirty="0" err="1" smtClean="0">
                 <a:solidFill>
                   <a:schemeClr val="bg1">
@@ -32962,69 +32719,10 @@
                 <a:latin typeface="Noto Sans KR Medium" panose="020B0200000000000000" pitchFamily="34" charset="-128"/>
                 <a:ea typeface="Noto Sans KR Medium" panose="020B0200000000000000" pitchFamily="34" charset="-128"/>
               </a:rPr>
-              <a:t>에셋</a:t>
-            </a:r>
-            <a:r>
-              <a:rPr lang="ko-KR" altLang="en-US" sz="1000" dirty="0" smtClean="0">
-                <a:solidFill>
-                  <a:schemeClr val="bg1">
-                    <a:lumMod val="95000"/>
-                  </a:schemeClr>
-                </a:solidFill>
-                <a:latin typeface="Noto Sans KR Medium" panose="020B0200000000000000" pitchFamily="34" charset="-128"/>
-                <a:ea typeface="Noto Sans KR Medium" panose="020B0200000000000000" pitchFamily="34" charset="-128"/>
-              </a:rPr>
-              <a:t> 누락이 아니라 데이터테이블에서 레벨 시퀀스를 직접 참조하기 때문에 발생한 것이라 </a:t>
-            </a:r>
-            <a:r>
-              <a:rPr lang="ko-KR" altLang="en-US" sz="1000" dirty="0" smtClean="0">
-                <a:solidFill>
-                  <a:schemeClr val="bg1">
-                    <a:lumMod val="95000"/>
-                  </a:schemeClr>
-                </a:solidFill>
-                <a:latin typeface="Noto Sans KR Medium" panose="020B0200000000000000" pitchFamily="34" charset="-128"/>
-                <a:ea typeface="Noto Sans KR Medium" panose="020B0200000000000000" pitchFamily="34" charset="-128"/>
-              </a:rPr>
-              <a:t>판단</a:t>
-            </a:r>
-            <a:r>
-              <a:rPr lang="ko-KR" altLang="en-US" sz="1000" dirty="0" smtClean="0">
-                <a:solidFill>
-                  <a:schemeClr val="bg1">
-                    <a:lumMod val="95000"/>
-                  </a:schemeClr>
-                </a:solidFill>
-                <a:latin typeface="Noto Sans KR Medium" panose="020B0200000000000000" pitchFamily="34" charset="-128"/>
-                <a:ea typeface="Noto Sans KR Medium" panose="020B0200000000000000" pitchFamily="34" charset="-128"/>
-              </a:rPr>
-              <a:t>했고</a:t>
-            </a:r>
-            <a:endParaRPr lang="en-US" altLang="ko-KR" sz="1000" dirty="0" smtClean="0">
-              <a:solidFill>
-                <a:schemeClr val="bg1">
-                  <a:lumMod val="95000"/>
-                </a:schemeClr>
-              </a:solidFill>
-              <a:latin typeface="Noto Sans KR Medium" panose="020B0200000000000000" pitchFamily="34" charset="-128"/>
-              <a:ea typeface="Noto Sans KR Medium" panose="020B0200000000000000" pitchFamily="34" charset="-128"/>
-            </a:endParaRPr>
-          </a:p>
-          <a:p>
-            <a:r>
-              <a:rPr lang="ko-KR" altLang="en-US" sz="1000" dirty="0">
-                <a:solidFill>
-                  <a:schemeClr val="bg1">
-                    <a:lumMod val="95000"/>
-                  </a:schemeClr>
-                </a:solidFill>
-                <a:latin typeface="Noto Sans KR Medium" panose="020B0200000000000000" pitchFamily="34" charset="-128"/>
-                <a:ea typeface="Noto Sans KR Medium" panose="020B0200000000000000" pitchFamily="34" charset="-128"/>
-              </a:rPr>
-              <a:t>검증을 위해서 </a:t>
-            </a:r>
-            <a:r>
-              <a:rPr lang="en-US" altLang="ko-KR" sz="1000" dirty="0" smtClean="0">
+              <a:t>에셋을</a:t>
+            </a:r>
+            <a:r>
+              <a:rPr lang="ko-KR" altLang="en-US" sz="1000" dirty="0" smtClean="0">
                 <a:solidFill>
                   <a:schemeClr val="bg1">
                     <a:lumMod val="95000"/>
@@ -33036,114 +32734,6 @@
               <a:t> </a:t>
             </a:r>
             <a:r>
-              <a:rPr lang="ko-KR" altLang="en-US" sz="1000" dirty="0" smtClean="0">
-                <a:solidFill>
-                  <a:schemeClr val="bg1">
-                    <a:lumMod val="95000"/>
-                  </a:schemeClr>
-                </a:solidFill>
-                <a:latin typeface="Noto Sans KR Medium" panose="020B0200000000000000" pitchFamily="34" charset="-128"/>
-                <a:ea typeface="Noto Sans KR Medium" panose="020B0200000000000000" pitchFamily="34" charset="-128"/>
-              </a:rPr>
-              <a:t>데이터테이블에서 레벨 시퀀스를 </a:t>
-            </a:r>
-            <a:r>
-              <a:rPr lang="en-US" altLang="ko-KR" sz="1000" dirty="0" err="1" smtClean="0">
-                <a:solidFill>
-                  <a:schemeClr val="bg1">
-                    <a:lumMod val="95000"/>
-                  </a:schemeClr>
-                </a:solidFill>
-                <a:latin typeface="Noto Sans KR Medium" panose="020B0200000000000000" pitchFamily="34" charset="-128"/>
-                <a:ea typeface="Noto Sans KR Medium" panose="020B0200000000000000" pitchFamily="34" charset="-128"/>
-              </a:rPr>
-              <a:t>TObjectPtr</a:t>
-            </a:r>
-            <a:r>
-              <a:rPr lang="ko-KR" altLang="en-US" sz="1000" dirty="0" smtClean="0">
-                <a:solidFill>
-                  <a:schemeClr val="bg1">
-                    <a:lumMod val="95000"/>
-                  </a:schemeClr>
-                </a:solidFill>
-                <a:latin typeface="Noto Sans KR Medium" panose="020B0200000000000000" pitchFamily="34" charset="-128"/>
-                <a:ea typeface="Noto Sans KR Medium" panose="020B0200000000000000" pitchFamily="34" charset="-128"/>
-              </a:rPr>
-              <a:t>이 아닌 </a:t>
-            </a:r>
-            <a:r>
-              <a:rPr lang="en-US" altLang="ko-KR" sz="1000" dirty="0" err="1" smtClean="0">
-                <a:solidFill>
-                  <a:schemeClr val="bg1">
-                    <a:lumMod val="95000"/>
-                  </a:schemeClr>
-                </a:solidFill>
-                <a:latin typeface="Noto Sans KR Medium" panose="020B0200000000000000" pitchFamily="34" charset="-128"/>
-                <a:ea typeface="Noto Sans KR Medium" panose="020B0200000000000000" pitchFamily="34" charset="-128"/>
-              </a:rPr>
-              <a:t>TSoftObjectPtr</a:t>
-            </a:r>
-            <a:r>
-              <a:rPr lang="ko-KR" altLang="en-US" sz="1000" dirty="0" smtClean="0">
-                <a:solidFill>
-                  <a:schemeClr val="bg1">
-                    <a:lumMod val="95000"/>
-                  </a:schemeClr>
-                </a:solidFill>
-                <a:latin typeface="Noto Sans KR Medium" panose="020B0200000000000000" pitchFamily="34" charset="-128"/>
-                <a:ea typeface="Noto Sans KR Medium" panose="020B0200000000000000" pitchFamily="34" charset="-128"/>
-              </a:rPr>
-              <a:t>로 </a:t>
-            </a:r>
-            <a:r>
-              <a:rPr lang="ko-KR" altLang="en-US" sz="1000" dirty="0" smtClean="0">
-                <a:solidFill>
-                  <a:schemeClr val="bg1">
-                    <a:lumMod val="95000"/>
-                  </a:schemeClr>
-                </a:solidFill>
-                <a:latin typeface="Noto Sans KR Medium" panose="020B0200000000000000" pitchFamily="34" charset="-128"/>
-                <a:ea typeface="Noto Sans KR Medium" panose="020B0200000000000000" pitchFamily="34" charset="-128"/>
-              </a:rPr>
-              <a:t>변경했습니다</a:t>
-            </a:r>
-            <a:r>
-              <a:rPr lang="en-US" altLang="ko-KR" sz="1000" dirty="0" smtClean="0">
-                <a:solidFill>
-                  <a:schemeClr val="bg1">
-                    <a:lumMod val="95000"/>
-                  </a:schemeClr>
-                </a:solidFill>
-                <a:latin typeface="Noto Sans KR Medium" panose="020B0200000000000000" pitchFamily="34" charset="-128"/>
-                <a:ea typeface="Noto Sans KR Medium" panose="020B0200000000000000" pitchFamily="34" charset="-128"/>
-              </a:rPr>
-              <a:t>. </a:t>
-            </a:r>
-            <a:r>
-              <a:rPr lang="en-US" altLang="ko-KR" sz="1000" dirty="0" smtClean="0">
-                <a:solidFill>
-                  <a:schemeClr val="bg1">
-                    <a:lumMod val="95000"/>
-                  </a:schemeClr>
-                </a:solidFill>
-                <a:latin typeface="Noto Sans KR Medium" panose="020B0200000000000000" pitchFamily="34" charset="-128"/>
-                <a:ea typeface="Noto Sans KR Medium" panose="020B0200000000000000" pitchFamily="34" charset="-128"/>
-              </a:rPr>
-              <a:t>(</a:t>
-            </a:r>
-            <a:r>
-              <a:rPr lang="ko-KR" altLang="en-US" sz="1000" dirty="0" smtClean="0">
-                <a:solidFill>
-                  <a:schemeClr val="bg1">
-                    <a:lumMod val="95000"/>
-                  </a:schemeClr>
-                </a:solidFill>
-                <a:latin typeface="Noto Sans KR Medium" panose="020B0200000000000000" pitchFamily="34" charset="-128"/>
-                <a:ea typeface="Noto Sans KR Medium" panose="020B0200000000000000" pitchFamily="34" charset="-128"/>
-              </a:rPr>
-              <a:t>하드 </a:t>
-            </a:r>
-            <a:r>
               <a:rPr lang="ko-KR" altLang="en-US" sz="1000" dirty="0" err="1" smtClean="0">
                 <a:solidFill>
                   <a:schemeClr val="bg1">
@@ -33153,7 +32743,7 @@
                 <a:latin typeface="Noto Sans KR Medium" panose="020B0200000000000000" pitchFamily="34" charset="-128"/>
                 <a:ea typeface="Noto Sans KR Medium" panose="020B0200000000000000" pitchFamily="34" charset="-128"/>
               </a:rPr>
-              <a:t>레퍼런스</a:t>
+              <a:t>비동기</a:t>
             </a:r>
             <a:r>
               <a:rPr lang="ko-KR" altLang="en-US" sz="1000" dirty="0" smtClean="0">
@@ -33168,30 +32758,6 @@
               <a:t> </a:t>
             </a:r>
             <a:r>
-              <a:rPr lang="en-US" altLang="ko-KR" sz="1000" dirty="0" smtClean="0">
-                <a:solidFill>
-                  <a:schemeClr val="bg1">
-                    <a:lumMod val="95000"/>
-                  </a:schemeClr>
-                </a:solidFill>
-                <a:latin typeface="Noto Sans KR Medium" panose="020B0200000000000000" pitchFamily="34" charset="-128"/>
-                <a:ea typeface="Noto Sans KR Medium" panose="020B0200000000000000" pitchFamily="34" charset="-128"/>
-              </a:rPr>
-              <a:t>-&gt; </a:t>
-            </a:r>
-            <a:r>
-              <a:rPr lang="ko-KR" altLang="en-US" sz="1000" dirty="0" smtClean="0">
-                <a:solidFill>
-                  <a:schemeClr val="bg1">
-                    <a:lumMod val="95000"/>
-                  </a:schemeClr>
-                </a:solidFill>
-                <a:latin typeface="Noto Sans KR Medium" panose="020B0200000000000000" pitchFamily="34" charset="-128"/>
-                <a:ea typeface="Noto Sans KR Medium" panose="020B0200000000000000" pitchFamily="34" charset="-128"/>
-              </a:rPr>
-              <a:t>소프트 </a:t>
-            </a:r>
-            <a:r>
               <a:rPr lang="ko-KR" altLang="en-US" sz="1000" dirty="0" err="1" smtClean="0">
                 <a:solidFill>
                   <a:schemeClr val="bg1">
@@ -33201,210 +32767,6 @@
                 <a:latin typeface="Noto Sans KR Medium" panose="020B0200000000000000" pitchFamily="34" charset="-128"/>
                 <a:ea typeface="Noto Sans KR Medium" panose="020B0200000000000000" pitchFamily="34" charset="-128"/>
               </a:rPr>
-              <a:t>레퍼런스로</a:t>
-            </a:r>
-            <a:r>
-              <a:rPr lang="ko-KR" altLang="en-US" sz="1000" dirty="0" smtClean="0">
-                <a:solidFill>
-                  <a:schemeClr val="bg1">
-                    <a:lumMod val="95000"/>
-                  </a:schemeClr>
-                </a:solidFill>
-                <a:latin typeface="Noto Sans KR Medium" panose="020B0200000000000000" pitchFamily="34" charset="-128"/>
-                <a:ea typeface="Noto Sans KR Medium" panose="020B0200000000000000" pitchFamily="34" charset="-128"/>
-              </a:rPr>
-              <a:t> 변경</a:t>
-            </a:r>
-            <a:r>
-              <a:rPr lang="en-US" altLang="ko-KR" sz="1000" dirty="0" smtClean="0">
-                <a:solidFill>
-                  <a:schemeClr val="bg1">
-                    <a:lumMod val="95000"/>
-                  </a:schemeClr>
-                </a:solidFill>
-                <a:latin typeface="Noto Sans KR Medium" panose="020B0200000000000000" pitchFamily="34" charset="-128"/>
-                <a:ea typeface="Noto Sans KR Medium" panose="020B0200000000000000" pitchFamily="34" charset="-128"/>
-              </a:rPr>
-              <a:t>)</a:t>
-            </a:r>
-          </a:p>
-          <a:p>
-            <a:r>
-              <a:rPr lang="ko-KR" altLang="en-US" sz="1000" dirty="0" smtClean="0">
-                <a:solidFill>
-                  <a:schemeClr val="bg1">
-                    <a:lumMod val="95000"/>
-                  </a:schemeClr>
-                </a:solidFill>
-                <a:latin typeface="Noto Sans KR Medium" panose="020B0200000000000000" pitchFamily="34" charset="-128"/>
-                <a:ea typeface="Noto Sans KR Medium" panose="020B0200000000000000" pitchFamily="34" charset="-128"/>
-              </a:rPr>
-              <a:t>그 후 </a:t>
-            </a:r>
-            <a:r>
-              <a:rPr lang="ko-KR" altLang="en-US" sz="1000" dirty="0" smtClean="0">
-                <a:solidFill>
-                  <a:schemeClr val="bg1">
-                    <a:lumMod val="95000"/>
-                  </a:schemeClr>
-                </a:solidFill>
-                <a:latin typeface="Noto Sans KR Medium" panose="020B0200000000000000" pitchFamily="34" charset="-128"/>
-                <a:ea typeface="Noto Sans KR Medium" panose="020B0200000000000000" pitchFamily="34" charset="-128"/>
-              </a:rPr>
-              <a:t>다시 </a:t>
-            </a:r>
-            <a:r>
-              <a:rPr lang="ko-KR" altLang="en-US" sz="1000" dirty="0" err="1" smtClean="0">
-                <a:solidFill>
-                  <a:schemeClr val="bg1">
-                    <a:lumMod val="95000"/>
-                  </a:schemeClr>
-                </a:solidFill>
-                <a:latin typeface="Noto Sans KR Medium" panose="020B0200000000000000" pitchFamily="34" charset="-128"/>
-                <a:ea typeface="Noto Sans KR Medium" panose="020B0200000000000000" pitchFamily="34" charset="-128"/>
-              </a:rPr>
-              <a:t>빌드</a:t>
-            </a:r>
-            <a:r>
-              <a:rPr lang="ko-KR" altLang="en-US" sz="1000" dirty="0" smtClean="0">
-                <a:solidFill>
-                  <a:schemeClr val="bg1">
-                    <a:lumMod val="95000"/>
-                  </a:schemeClr>
-                </a:solidFill>
-                <a:latin typeface="Noto Sans KR Medium" panose="020B0200000000000000" pitchFamily="34" charset="-128"/>
-                <a:ea typeface="Noto Sans KR Medium" panose="020B0200000000000000" pitchFamily="34" charset="-128"/>
-              </a:rPr>
-              <a:t> 시도에서 성공한 것을 </a:t>
-            </a:r>
-            <a:r>
-              <a:rPr lang="ko-KR" altLang="en-US" sz="1000" dirty="0" smtClean="0">
-                <a:solidFill>
-                  <a:schemeClr val="bg1">
-                    <a:lumMod val="95000"/>
-                  </a:schemeClr>
-                </a:solidFill>
-                <a:latin typeface="Noto Sans KR Medium" panose="020B0200000000000000" pitchFamily="34" charset="-128"/>
-                <a:ea typeface="Noto Sans KR Medium" panose="020B0200000000000000" pitchFamily="34" charset="-128"/>
-              </a:rPr>
-              <a:t>확인</a:t>
-            </a:r>
-            <a:r>
-              <a:rPr lang="ko-KR" altLang="en-US" sz="1000" dirty="0" smtClean="0">
-                <a:solidFill>
-                  <a:schemeClr val="bg1">
-                    <a:lumMod val="95000"/>
-                  </a:schemeClr>
-                </a:solidFill>
-                <a:latin typeface="Noto Sans KR Medium" panose="020B0200000000000000" pitchFamily="34" charset="-128"/>
-                <a:ea typeface="Noto Sans KR Medium" panose="020B0200000000000000" pitchFamily="34" charset="-128"/>
-              </a:rPr>
-              <a:t>했습니다</a:t>
-            </a:r>
-            <a:r>
-              <a:rPr lang="en-US" altLang="ko-KR" sz="1000" dirty="0" smtClean="0">
-                <a:solidFill>
-                  <a:schemeClr val="bg1">
-                    <a:lumMod val="95000"/>
-                  </a:schemeClr>
-                </a:solidFill>
-                <a:latin typeface="Noto Sans KR Medium" panose="020B0200000000000000" pitchFamily="34" charset="-128"/>
-                <a:ea typeface="Noto Sans KR Medium" panose="020B0200000000000000" pitchFamily="34" charset="-128"/>
-              </a:rPr>
-              <a:t>.</a:t>
-            </a:r>
-            <a:endParaRPr lang="en-US" altLang="ko-KR" sz="1000" dirty="0" smtClean="0">
-              <a:solidFill>
-                <a:schemeClr val="bg1">
-                  <a:lumMod val="95000"/>
-                </a:schemeClr>
-              </a:solidFill>
-              <a:latin typeface="Noto Sans KR Medium" panose="020B0200000000000000" pitchFamily="34" charset="-128"/>
-              <a:ea typeface="Noto Sans KR Medium" panose="020B0200000000000000" pitchFamily="34" charset="-128"/>
-            </a:endParaRPr>
-          </a:p>
-          <a:p>
-            <a:endParaRPr lang="en-US" altLang="ko-KR" sz="1000" dirty="0">
-              <a:solidFill>
-                <a:schemeClr val="bg1">
-                  <a:lumMod val="95000"/>
-                </a:schemeClr>
-              </a:solidFill>
-              <a:latin typeface="Noto Sans KR Medium" panose="020B0200000000000000" pitchFamily="34" charset="-128"/>
-              <a:ea typeface="Noto Sans KR Medium" panose="020B0200000000000000" pitchFamily="34" charset="-128"/>
-            </a:endParaRPr>
-          </a:p>
-          <a:p>
-            <a:r>
-              <a:rPr lang="ko-KR" altLang="en-US" sz="1000" dirty="0" smtClean="0">
-                <a:solidFill>
-                  <a:schemeClr val="bg1">
-                    <a:lumMod val="95000"/>
-                  </a:schemeClr>
-                </a:solidFill>
-                <a:latin typeface="Noto Sans KR Medium" panose="020B0200000000000000" pitchFamily="34" charset="-128"/>
-                <a:ea typeface="Noto Sans KR Medium" panose="020B0200000000000000" pitchFamily="34" charset="-128"/>
-              </a:rPr>
-              <a:t>레벨 시퀀스를 사용하는 부분에서 레벨 시퀀스 </a:t>
-            </a:r>
-            <a:r>
-              <a:rPr lang="ko-KR" altLang="en-US" sz="1000" dirty="0" err="1" smtClean="0">
-                <a:solidFill>
-                  <a:schemeClr val="bg1">
-                    <a:lumMod val="95000"/>
-                  </a:schemeClr>
-                </a:solidFill>
-                <a:latin typeface="Noto Sans KR Medium" panose="020B0200000000000000" pitchFamily="34" charset="-128"/>
-                <a:ea typeface="Noto Sans KR Medium" panose="020B0200000000000000" pitchFamily="34" charset="-128"/>
-              </a:rPr>
-              <a:t>에셋을</a:t>
-            </a:r>
-            <a:r>
-              <a:rPr lang="ko-KR" altLang="en-US" sz="1000" dirty="0" smtClean="0">
-                <a:solidFill>
-                  <a:schemeClr val="bg1">
-                    <a:lumMod val="95000"/>
-                  </a:schemeClr>
-                </a:solidFill>
-                <a:latin typeface="Noto Sans KR Medium" panose="020B0200000000000000" pitchFamily="34" charset="-128"/>
-                <a:ea typeface="Noto Sans KR Medium" panose="020B0200000000000000" pitchFamily="34" charset="-128"/>
-              </a:rPr>
-              <a:t> </a:t>
-            </a:r>
-            <a:r>
-              <a:rPr lang="ko-KR" altLang="en-US" sz="1000" dirty="0" err="1" smtClean="0">
-                <a:solidFill>
-                  <a:schemeClr val="bg1">
-                    <a:lumMod val="95000"/>
-                  </a:schemeClr>
-                </a:solidFill>
-                <a:latin typeface="Noto Sans KR Medium" panose="020B0200000000000000" pitchFamily="34" charset="-128"/>
-                <a:ea typeface="Noto Sans KR Medium" panose="020B0200000000000000" pitchFamily="34" charset="-128"/>
-              </a:rPr>
-              <a:t>비동기</a:t>
-            </a:r>
-            <a:r>
-              <a:rPr lang="ko-KR" altLang="en-US" sz="1000" dirty="0" smtClean="0">
-                <a:solidFill>
-                  <a:schemeClr val="bg1">
-                    <a:lumMod val="95000"/>
-                  </a:schemeClr>
-                </a:solidFill>
-                <a:latin typeface="Noto Sans KR Medium" panose="020B0200000000000000" pitchFamily="34" charset="-128"/>
-                <a:ea typeface="Noto Sans KR Medium" panose="020B0200000000000000" pitchFamily="34" charset="-128"/>
-              </a:rPr>
-              <a:t> </a:t>
-            </a:r>
-            <a:r>
-              <a:rPr lang="ko-KR" altLang="en-US" sz="1000" dirty="0" err="1" smtClean="0">
-                <a:solidFill>
-                  <a:schemeClr val="bg1">
-                    <a:lumMod val="95000"/>
-                  </a:schemeClr>
-                </a:solidFill>
-                <a:latin typeface="Noto Sans KR Medium" panose="020B0200000000000000" pitchFamily="34" charset="-128"/>
-                <a:ea typeface="Noto Sans KR Medium" panose="020B0200000000000000" pitchFamily="34" charset="-128"/>
-              </a:rPr>
               <a:t>로드하도록</a:t>
             </a:r>
             <a:r>
@@ -33429,31 +32791,7 @@
                 <a:latin typeface="Noto Sans KR Medium" panose="020B0200000000000000" pitchFamily="34" charset="-128"/>
                 <a:ea typeface="Noto Sans KR Medium" panose="020B0200000000000000" pitchFamily="34" charset="-128"/>
               </a:rPr>
-              <a:t>후 </a:t>
-            </a:r>
-            <a:r>
-              <a:rPr lang="ko-KR" altLang="en-US" sz="1000" smtClean="0">
-                <a:solidFill>
-                  <a:schemeClr val="bg1">
-                    <a:lumMod val="95000"/>
-                  </a:schemeClr>
-                </a:solidFill>
-                <a:latin typeface="Noto Sans KR Medium" panose="020B0200000000000000" pitchFamily="34" charset="-128"/>
-                <a:ea typeface="Noto Sans KR Medium" panose="020B0200000000000000" pitchFamily="34" charset="-128"/>
-              </a:rPr>
-              <a:t>사용</a:t>
-            </a:r>
-            <a:r>
-              <a:rPr lang="ko-KR" altLang="en-US" sz="1000" smtClean="0">
-                <a:solidFill>
-                  <a:schemeClr val="bg1">
-                    <a:lumMod val="95000"/>
-                  </a:schemeClr>
-                </a:solidFill>
-                <a:latin typeface="Noto Sans KR Medium" panose="020B0200000000000000" pitchFamily="34" charset="-128"/>
-                <a:ea typeface="Noto Sans KR Medium" panose="020B0200000000000000" pitchFamily="34" charset="-128"/>
-              </a:rPr>
-              <a:t>하는 것으로 문제를 해결했습니다</a:t>
+              <a:t>후 사용하는 것으로 문제를 해결했습니다</a:t>
             </a:r>
             <a:r>
               <a:rPr lang="en-US" altLang="ko-KR" sz="1000" smtClean="0">
@@ -33729,7 +33067,7 @@
         <p:spPr>
           <a:xfrm>
             <a:off x="454275" y="1234126"/>
-            <a:ext cx="9212239" cy="707886"/>
+            <a:ext cx="9212239" cy="861774"/>
           </a:xfrm>
           <a:prstGeom prst="rect">
             <a:avLst/>
@@ -33916,7 +33254,42 @@
                 <a:latin typeface="Noto Sans KR Medium" panose="020B0200000000000000" pitchFamily="34" charset="-128"/>
                 <a:ea typeface="Noto Sans KR Medium" panose="020B0200000000000000" pitchFamily="34" charset="-128"/>
               </a:rPr>
-              <a:t>로 변경한다면 어떻게 변경할지 정리</a:t>
+              <a:t>로 변경한다면 어떻게 변경할지 </a:t>
+            </a:r>
+            <a:r>
+              <a:rPr lang="ko-KR" altLang="en-US" sz="1000" dirty="0" smtClean="0">
+                <a:solidFill>
+                  <a:schemeClr val="bg1">
+                    <a:lumMod val="95000"/>
+                  </a:schemeClr>
+                </a:solidFill>
+                <a:latin typeface="Noto Sans KR Medium" panose="020B0200000000000000" pitchFamily="34" charset="-128"/>
+                <a:ea typeface="Noto Sans KR Medium" panose="020B0200000000000000" pitchFamily="34" charset="-128"/>
+              </a:rPr>
+              <a:t>정리</a:t>
+            </a:r>
+            <a:endParaRPr lang="en-US" altLang="ko-KR" sz="1000" dirty="0" smtClean="0">
+              <a:solidFill>
+                <a:schemeClr val="bg1">
+                  <a:lumMod val="95000"/>
+                </a:schemeClr>
+              </a:solidFill>
+              <a:latin typeface="Noto Sans KR Medium" panose="020B0200000000000000" pitchFamily="34" charset="-128"/>
+              <a:ea typeface="Noto Sans KR Medium" panose="020B0200000000000000" pitchFamily="34" charset="-128"/>
+            </a:endParaRPr>
+          </a:p>
+          <a:p>
+            <a:r>
+              <a:rPr lang="ko-KR" altLang="en-US" sz="1000" dirty="0" smtClean="0">
+                <a:solidFill>
+                  <a:schemeClr val="bg1">
+                    <a:lumMod val="95000"/>
+                  </a:schemeClr>
+                </a:solidFill>
+                <a:latin typeface="Noto Sans KR Medium" panose="020B0200000000000000" pitchFamily="34" charset="-128"/>
+                <a:ea typeface="Noto Sans KR Medium" panose="020B0200000000000000" pitchFamily="34" charset="-128"/>
+              </a:rPr>
+              <a:t>내용 정리 중</a:t>
             </a:r>
             <a:endParaRPr lang="en-US" altLang="ko-KR" sz="1000" dirty="0" smtClean="0">
               <a:solidFill>
@@ -36336,50 +35709,6 @@
       </p:sp>
       <p:sp>
         <p:nvSpPr>
-          <p:cNvPr id="2" name="직사각형 1"/>
-          <p:cNvSpPr/>
-          <p:nvPr/>
-        </p:nvSpPr>
-        <p:spPr>
-          <a:xfrm>
-            <a:off x="6585735" y="319553"/>
-            <a:ext cx="5106256" cy="1829145"/>
-          </a:xfrm>
-          <a:prstGeom prst="rect">
-            <a:avLst/>
-          </a:prstGeom>
-        </p:spPr>
-        <p:style>
-          <a:lnRef idx="2">
-            <a:schemeClr val="accent1">
-              <a:shade val="50000"/>
-            </a:schemeClr>
-          </a:lnRef>
-          <a:fillRef idx="1">
-            <a:schemeClr val="accent1"/>
-          </a:fillRef>
-          <a:effectRef idx="0">
-            <a:schemeClr val="accent1"/>
-          </a:effectRef>
-          <a:fontRef idx="minor">
-            <a:schemeClr val="lt1"/>
-          </a:fontRef>
-        </p:style>
-        <p:txBody>
-          <a:bodyPr rtlCol="0" anchor="ctr"/>
-          <a:lstStyle/>
-          <a:p>
-            <a:pPr algn="ctr"/>
-            <a:r>
-              <a:rPr lang="ko-KR" altLang="en-US" dirty="0" smtClean="0"/>
-              <a:t>컨트롤러 바인딩 코드</a:t>
-            </a:r>
-            <a:endParaRPr lang="ko-KR" altLang="en-US" dirty="0"/>
-          </a:p>
-        </p:txBody>
-      </p:sp>
-      <p:sp>
-        <p:nvSpPr>
           <p:cNvPr id="10" name="직사각형 9"/>
           <p:cNvSpPr/>
           <p:nvPr/>
@@ -36388,46 +35717,6 @@
           <a:xfrm>
             <a:off x="540000" y="4364074"/>
             <a:ext cx="2501151" cy="1944258"/>
-          </a:xfrm>
-          <a:prstGeom prst="rect">
-            <a:avLst/>
-          </a:prstGeom>
-        </p:spPr>
-        <p:style>
-          <a:lnRef idx="2">
-            <a:schemeClr val="accent1">
-              <a:shade val="50000"/>
-            </a:schemeClr>
-          </a:lnRef>
-          <a:fillRef idx="1">
-            <a:schemeClr val="accent1"/>
-          </a:fillRef>
-          <a:effectRef idx="0">
-            <a:schemeClr val="accent1"/>
-          </a:effectRef>
-          <a:fontRef idx="minor">
-            <a:schemeClr val="lt1"/>
-          </a:fontRef>
-        </p:style>
-        <p:txBody>
-          <a:bodyPr rtlCol="0" anchor="ctr"/>
-          <a:lstStyle/>
-          <a:p>
-            <a:pPr algn="ctr"/>
-            <a:endParaRPr lang="ko-KR" altLang="en-US"/>
-          </a:p>
-        </p:txBody>
-      </p:sp>
-      <p:sp>
-        <p:nvSpPr>
-          <p:cNvPr id="12" name="직사각형 11"/>
-          <p:cNvSpPr/>
-          <p:nvPr/>
-        </p:nvSpPr>
-        <p:spPr>
-          <a:xfrm>
-            <a:off x="6585735" y="2477918"/>
-            <a:ext cx="5106256" cy="3830414"/>
           </a:xfrm>
           <a:prstGeom prst="rect">
             <a:avLst/>
@@ -36712,6 +36001,66 @@
           </a:p>
         </p:txBody>
       </p:sp>
+      <p:pic>
+        <p:nvPicPr>
+          <p:cNvPr id="3" name="그림 2"/>
+          <p:cNvPicPr>
+            <a:picLocks noChangeAspect="1"/>
+          </p:cNvPicPr>
+          <p:nvPr/>
+        </p:nvPicPr>
+        <p:blipFill>
+          <a:blip r:embed="rId3" cstate="print">
+            <a:extLst>
+              <a:ext uri="{28A0092B-C50C-407E-A947-70E740481C1C}">
+                <a14:useLocalDpi xmlns:a14="http://schemas.microsoft.com/office/drawing/2010/main" val="0"/>
+              </a:ext>
+            </a:extLst>
+          </a:blip>
+          <a:stretch>
+            <a:fillRect/>
+          </a:stretch>
+        </p:blipFill>
+        <p:spPr>
+          <a:xfrm>
+            <a:off x="6551904" y="1480347"/>
+            <a:ext cx="5235905" cy="2285587"/>
+          </a:xfrm>
+          <a:prstGeom prst="rect">
+            <a:avLst/>
+          </a:prstGeom>
+        </p:spPr>
+      </p:pic>
+      <p:pic>
+        <p:nvPicPr>
+          <p:cNvPr id="5" name="그림 4"/>
+          <p:cNvPicPr>
+            <a:picLocks noChangeAspect="1"/>
+          </p:cNvPicPr>
+          <p:nvPr/>
+        </p:nvPicPr>
+        <p:blipFill>
+          <a:blip r:embed="rId4" cstate="print">
+            <a:extLst>
+              <a:ext uri="{28A0092B-C50C-407E-A947-70E740481C1C}">
+                <a14:useLocalDpi xmlns:a14="http://schemas.microsoft.com/office/drawing/2010/main" val="0"/>
+              </a:ext>
+            </a:extLst>
+          </a:blip>
+          <a:stretch>
+            <a:fillRect/>
+          </a:stretch>
+        </p:blipFill>
+        <p:spPr>
+          <a:xfrm>
+            <a:off x="6551904" y="3929361"/>
+            <a:ext cx="5235905" cy="1525242"/>
+          </a:xfrm>
+          <a:prstGeom prst="rect">
+            <a:avLst/>
+          </a:prstGeom>
+        </p:spPr>
+      </p:pic>
     </p:spTree>
     <p:extLst>
       <p:ext uri="{BB962C8B-B14F-4D97-AF65-F5344CB8AC3E}">
@@ -37882,158 +37231,126 @@
           </a:p>
         </p:txBody>
       </p:sp>
-      <p:sp>
-        <p:nvSpPr>
-          <p:cNvPr id="13" name="직사각형 12"/>
-          <p:cNvSpPr/>
+      <p:pic>
+        <p:nvPicPr>
+          <p:cNvPr id="5" name="그림 4"/>
+          <p:cNvPicPr>
+            <a:picLocks noChangeAspect="1"/>
+          </p:cNvPicPr>
           <p:nvPr/>
-        </p:nvSpPr>
+        </p:nvPicPr>
+        <p:blipFill>
+          <a:blip r:embed="rId3" cstate="print">
+            <a:extLst>
+              <a:ext uri="{28A0092B-C50C-407E-A947-70E740481C1C}">
+                <a14:useLocalDpi xmlns:a14="http://schemas.microsoft.com/office/drawing/2010/main" val="0"/>
+              </a:ext>
+            </a:extLst>
+          </a:blip>
+          <a:stretch>
+            <a:fillRect/>
+          </a:stretch>
+        </p:blipFill>
         <p:spPr>
           <a:xfrm>
-            <a:off x="6666334" y="513837"/>
-            <a:ext cx="5179769" cy="2061726"/>
+            <a:off x="6666334" y="315048"/>
+            <a:ext cx="4535066" cy="1810784"/>
           </a:xfrm>
           <a:prstGeom prst="rect">
             <a:avLst/>
           </a:prstGeom>
         </p:spPr>
-        <p:style>
-          <a:lnRef idx="2">
-            <a:schemeClr val="accent1">
-              <a:shade val="50000"/>
-            </a:schemeClr>
-          </a:lnRef>
-          <a:fillRef idx="1">
-            <a:schemeClr val="accent1"/>
-          </a:fillRef>
-          <a:effectRef idx="0">
-            <a:schemeClr val="accent1"/>
-          </a:effectRef>
-          <a:fontRef idx="minor">
-            <a:schemeClr val="lt1"/>
-          </a:fontRef>
-        </p:style>
-        <p:txBody>
-          <a:bodyPr rtlCol="0" anchor="ctr"/>
-          <a:lstStyle/>
-          <a:p>
-            <a:pPr algn="ctr"/>
-            <a:r>
-              <a:rPr lang="ko-KR" altLang="en-US" dirty="0" err="1" smtClean="0"/>
-              <a:t>스탯</a:t>
-            </a:r>
-            <a:r>
-              <a:rPr lang="ko-KR" altLang="en-US" dirty="0"/>
-              <a:t> </a:t>
-            </a:r>
-            <a:r>
-              <a:rPr lang="ko-KR" altLang="en-US" dirty="0" smtClean="0"/>
-              <a:t>관련 주요 코드</a:t>
-            </a:r>
-            <a:endParaRPr lang="ko-KR" altLang="en-US" dirty="0"/>
-          </a:p>
-        </p:txBody>
-      </p:sp>
-      <p:sp>
-        <p:nvSpPr>
-          <p:cNvPr id="14" name="직사각형 13"/>
-          <p:cNvSpPr/>
+      </p:pic>
+      <p:pic>
+        <p:nvPicPr>
+          <p:cNvPr id="6" name="그림 5"/>
+          <p:cNvPicPr>
+            <a:picLocks noChangeAspect="1"/>
+          </p:cNvPicPr>
           <p:nvPr/>
-        </p:nvSpPr>
+        </p:nvPicPr>
+        <p:blipFill>
+          <a:blip r:embed="rId4" cstate="print">
+            <a:extLst>
+              <a:ext uri="{28A0092B-C50C-407E-A947-70E740481C1C}">
+                <a14:useLocalDpi xmlns:a14="http://schemas.microsoft.com/office/drawing/2010/main" val="0"/>
+              </a:ext>
+            </a:extLst>
+          </a:blip>
+          <a:stretch>
+            <a:fillRect/>
+          </a:stretch>
+        </p:blipFill>
         <p:spPr>
           <a:xfrm>
-            <a:off x="6666333" y="2885455"/>
-            <a:ext cx="5179769" cy="2004045"/>
+            <a:off x="6666334" y="2192626"/>
+            <a:ext cx="1669262" cy="1907063"/>
           </a:xfrm>
           <a:prstGeom prst="rect">
             <a:avLst/>
           </a:prstGeom>
         </p:spPr>
-        <p:style>
-          <a:lnRef idx="2">
-            <a:schemeClr val="accent1">
-              <a:shade val="50000"/>
-            </a:schemeClr>
-          </a:lnRef>
-          <a:fillRef idx="1">
-            <a:schemeClr val="accent1"/>
-          </a:fillRef>
-          <a:effectRef idx="0">
-            <a:schemeClr val="accent1"/>
-          </a:effectRef>
-          <a:fontRef idx="minor">
-            <a:schemeClr val="lt1"/>
-          </a:fontRef>
-        </p:style>
-        <p:txBody>
-          <a:bodyPr rtlCol="0" anchor="ctr"/>
-          <a:lstStyle/>
-          <a:p>
-            <a:pPr algn="ctr"/>
-            <a:r>
-              <a:rPr lang="ko-KR" altLang="en-US" dirty="0" err="1" smtClean="0"/>
-              <a:t>스탯</a:t>
-            </a:r>
-            <a:r>
-              <a:rPr lang="ko-KR" altLang="en-US" dirty="0" smtClean="0"/>
-              <a:t> 구독 코드</a:t>
-            </a:r>
-            <a:endParaRPr lang="ko-KR" altLang="en-US" dirty="0"/>
-          </a:p>
-        </p:txBody>
-      </p:sp>
-      <p:sp>
-        <p:nvSpPr>
-          <p:cNvPr id="15" name="직사각형 14"/>
-          <p:cNvSpPr/>
+      </p:pic>
+      <p:pic>
+        <p:nvPicPr>
+          <p:cNvPr id="16" name="그림 15"/>
+          <p:cNvPicPr>
+            <a:picLocks noChangeAspect="1"/>
+          </p:cNvPicPr>
           <p:nvPr/>
-        </p:nvSpPr>
+        </p:nvPicPr>
+        <p:blipFill>
+          <a:blip r:embed="rId5" cstate="print">
+            <a:extLst>
+              <a:ext uri="{28A0092B-C50C-407E-A947-70E740481C1C}">
+                <a14:useLocalDpi xmlns:a14="http://schemas.microsoft.com/office/drawing/2010/main" val="0"/>
+              </a:ext>
+            </a:extLst>
+          </a:blip>
+          <a:stretch>
+            <a:fillRect/>
+          </a:stretch>
+        </p:blipFill>
         <p:spPr>
           <a:xfrm>
-            <a:off x="6666333" y="5067300"/>
-            <a:ext cx="5179769" cy="1271855"/>
+            <a:off x="8440430" y="2192628"/>
+            <a:ext cx="2427595" cy="1676792"/>
           </a:xfrm>
           <a:prstGeom prst="rect">
             <a:avLst/>
           </a:prstGeom>
         </p:spPr>
-        <p:style>
-          <a:lnRef idx="2">
-            <a:schemeClr val="accent1">
-              <a:shade val="50000"/>
-            </a:schemeClr>
-          </a:lnRef>
-          <a:fillRef idx="1">
-            <a:schemeClr val="accent1"/>
-          </a:fillRef>
-          <a:effectRef idx="0">
-            <a:schemeClr val="accent1"/>
-          </a:effectRef>
-          <a:fontRef idx="minor">
-            <a:schemeClr val="lt1"/>
-          </a:fontRef>
-        </p:style>
-        <p:txBody>
-          <a:bodyPr rtlCol="0" anchor="ctr"/>
-          <a:lstStyle/>
-          <a:p>
-            <a:pPr algn="ctr"/>
-            <a:r>
-              <a:rPr lang="ko-KR" altLang="en-US" dirty="0" smtClean="0"/>
-              <a:t>자원 </a:t>
-            </a:r>
-            <a:r>
-              <a:rPr lang="ko-KR" altLang="en-US" dirty="0" err="1" smtClean="0"/>
-              <a:t>스탯</a:t>
-            </a:r>
-            <a:r>
-              <a:rPr lang="ko-KR" altLang="en-US" dirty="0" smtClean="0"/>
-              <a:t> 사용 코드</a:t>
-            </a:r>
-            <a:endParaRPr lang="ko-KR" altLang="en-US" dirty="0"/>
-          </a:p>
-        </p:txBody>
-      </p:sp>
+      </p:pic>
+      <p:pic>
+        <p:nvPicPr>
+          <p:cNvPr id="18" name="그림 17"/>
+          <p:cNvPicPr>
+            <a:picLocks noChangeAspect="1"/>
+          </p:cNvPicPr>
+          <p:nvPr/>
+        </p:nvPicPr>
+        <p:blipFill>
+          <a:blip r:embed="rId6" cstate="print">
+            <a:extLst>
+              <a:ext uri="{28A0092B-C50C-407E-A947-70E740481C1C}">
+                <a14:useLocalDpi xmlns:a14="http://schemas.microsoft.com/office/drawing/2010/main" val="0"/>
+              </a:ext>
+            </a:extLst>
+          </a:blip>
+          <a:stretch>
+            <a:fillRect/>
+          </a:stretch>
+        </p:blipFill>
+        <p:spPr>
+          <a:xfrm>
+            <a:off x="6666333" y="4166482"/>
+            <a:ext cx="4201691" cy="2429579"/>
+          </a:xfrm>
+          <a:prstGeom prst="rect">
+            <a:avLst/>
+          </a:prstGeom>
+        </p:spPr>
+      </p:pic>
     </p:spTree>
     <p:extLst>
       <p:ext uri="{BB962C8B-B14F-4D97-AF65-F5344CB8AC3E}">
@@ -39241,106 +38558,6 @@
       </p:sp>
       <p:sp>
         <p:nvSpPr>
-          <p:cNvPr id="7" name="직사각형 6"/>
-          <p:cNvSpPr/>
-          <p:nvPr/>
-        </p:nvSpPr>
-        <p:spPr>
-          <a:xfrm>
-            <a:off x="6666334" y="1707802"/>
-            <a:ext cx="5179769" cy="2545699"/>
-          </a:xfrm>
-          <a:prstGeom prst="rect">
-            <a:avLst/>
-          </a:prstGeom>
-        </p:spPr>
-        <p:style>
-          <a:lnRef idx="2">
-            <a:schemeClr val="accent1">
-              <a:shade val="50000"/>
-            </a:schemeClr>
-          </a:lnRef>
-          <a:fillRef idx="1">
-            <a:schemeClr val="accent1"/>
-          </a:fillRef>
-          <a:effectRef idx="0">
-            <a:schemeClr val="accent1"/>
-          </a:effectRef>
-          <a:fontRef idx="minor">
-            <a:schemeClr val="lt1"/>
-          </a:fontRef>
-        </p:style>
-        <p:txBody>
-          <a:bodyPr rtlCol="0" anchor="ctr"/>
-          <a:lstStyle/>
-          <a:p>
-            <a:pPr algn="ctr"/>
-            <a:r>
-              <a:rPr lang="ko-KR" altLang="en-US" dirty="0" err="1" smtClean="0"/>
-              <a:t>스탯에서</a:t>
-            </a:r>
-            <a:r>
-              <a:rPr lang="ko-KR" altLang="en-US" dirty="0" smtClean="0"/>
-              <a:t> 등록</a:t>
-            </a:r>
-            <a:r>
-              <a:rPr lang="en-US" altLang="ko-KR" dirty="0" smtClean="0"/>
-              <a:t>, </a:t>
-            </a:r>
-            <a:r>
-              <a:rPr lang="ko-KR" altLang="en-US" dirty="0" smtClean="0"/>
-              <a:t>제거하는 코드</a:t>
-            </a:r>
-            <a:endParaRPr lang="ko-KR" altLang="en-US" dirty="0"/>
-          </a:p>
-        </p:txBody>
-      </p:sp>
-      <p:sp>
-        <p:nvSpPr>
-          <p:cNvPr id="10" name="직사각형 9"/>
-          <p:cNvSpPr/>
-          <p:nvPr/>
-        </p:nvSpPr>
-        <p:spPr>
-          <a:xfrm>
-            <a:off x="6666333" y="433872"/>
-            <a:ext cx="5179769" cy="1138074"/>
-          </a:xfrm>
-          <a:prstGeom prst="rect">
-            <a:avLst/>
-          </a:prstGeom>
-        </p:spPr>
-        <p:style>
-          <a:lnRef idx="2">
-            <a:schemeClr val="accent1">
-              <a:shade val="50000"/>
-            </a:schemeClr>
-          </a:lnRef>
-          <a:fillRef idx="1">
-            <a:schemeClr val="accent1"/>
-          </a:fillRef>
-          <a:effectRef idx="0">
-            <a:schemeClr val="accent1"/>
-          </a:effectRef>
-          <a:fontRef idx="minor">
-            <a:schemeClr val="lt1"/>
-          </a:fontRef>
-        </p:style>
-        <p:txBody>
-          <a:bodyPr rtlCol="0" anchor="ctr"/>
-          <a:lstStyle/>
-          <a:p>
-            <a:pPr algn="ctr"/>
-            <a:r>
-              <a:rPr lang="ko-KR" altLang="en-US" dirty="0" smtClean="0"/>
-              <a:t>인터페이스 코드</a:t>
-            </a:r>
-            <a:endParaRPr lang="ko-KR" altLang="en-US" dirty="0"/>
-          </a:p>
-        </p:txBody>
-      </p:sp>
-      <p:sp>
-        <p:nvSpPr>
           <p:cNvPr id="13" name="직사각형 12"/>
           <p:cNvSpPr/>
           <p:nvPr/>
@@ -39387,62 +38604,126 @@
           </a:p>
         </p:txBody>
       </p:sp>
-      <p:sp>
-        <p:nvSpPr>
-          <p:cNvPr id="12" name="직사각형 11"/>
-          <p:cNvSpPr/>
+      <p:pic>
+        <p:nvPicPr>
+          <p:cNvPr id="2" name="그림 1"/>
+          <p:cNvPicPr>
+            <a:picLocks noChangeAspect="1"/>
+          </p:cNvPicPr>
           <p:nvPr/>
-        </p:nvSpPr>
+        </p:nvPicPr>
+        <p:blipFill>
+          <a:blip r:embed="rId3" cstate="print">
+            <a:extLst>
+              <a:ext uri="{28A0092B-C50C-407E-A947-70E740481C1C}">
+                <a14:useLocalDpi xmlns:a14="http://schemas.microsoft.com/office/drawing/2010/main" val="0"/>
+              </a:ext>
+            </a:extLst>
+          </a:blip>
+          <a:stretch>
+            <a:fillRect/>
+          </a:stretch>
+        </p:blipFill>
         <p:spPr>
           <a:xfrm>
-            <a:off x="6666333" y="4389357"/>
-            <a:ext cx="5179769" cy="2044961"/>
+            <a:off x="6666334" y="315047"/>
+            <a:ext cx="3173406" cy="1806794"/>
           </a:xfrm>
           <a:prstGeom prst="rect">
             <a:avLst/>
           </a:prstGeom>
         </p:spPr>
-        <p:style>
-          <a:lnRef idx="2">
-            <a:schemeClr val="accent1">
-              <a:shade val="50000"/>
-            </a:schemeClr>
-          </a:lnRef>
-          <a:fillRef idx="1">
-            <a:schemeClr val="accent1"/>
-          </a:fillRef>
-          <a:effectRef idx="0">
-            <a:schemeClr val="accent1"/>
-          </a:effectRef>
-          <a:fontRef idx="minor">
-            <a:schemeClr val="lt1"/>
-          </a:fontRef>
-        </p:style>
-        <p:txBody>
-          <a:bodyPr rtlCol="0" anchor="ctr"/>
-          <a:lstStyle/>
-          <a:p>
-            <a:pPr algn="ctr"/>
-            <a:r>
-              <a:rPr lang="ko-KR" altLang="en-US" dirty="0" err="1" smtClean="0"/>
-              <a:t>이펙트</a:t>
-            </a:r>
-            <a:r>
-              <a:rPr lang="ko-KR" altLang="en-US" dirty="0" smtClean="0"/>
-              <a:t> 발동</a:t>
-            </a:r>
-            <a:r>
-              <a:rPr lang="en-US" altLang="ko-KR" dirty="0" smtClean="0"/>
-              <a:t>, </a:t>
-            </a:r>
-            <a:r>
-              <a:rPr lang="ko-KR" altLang="en-US" dirty="0" smtClean="0"/>
-              <a:t>발동 해제 코드</a:t>
-            </a:r>
-            <a:endParaRPr lang="ko-KR" altLang="en-US" dirty="0"/>
-          </a:p>
-        </p:txBody>
-      </p:sp>
+      </p:pic>
+      <p:pic>
+        <p:nvPicPr>
+          <p:cNvPr id="3" name="그림 2"/>
+          <p:cNvPicPr>
+            <a:picLocks noChangeAspect="1"/>
+          </p:cNvPicPr>
+          <p:nvPr/>
+        </p:nvPicPr>
+        <p:blipFill>
+          <a:blip r:embed="rId4" cstate="print">
+            <a:extLst>
+              <a:ext uri="{28A0092B-C50C-407E-A947-70E740481C1C}">
+                <a14:useLocalDpi xmlns:a14="http://schemas.microsoft.com/office/drawing/2010/main" val="0"/>
+              </a:ext>
+            </a:extLst>
+          </a:blip>
+          <a:stretch>
+            <a:fillRect/>
+          </a:stretch>
+        </p:blipFill>
+        <p:spPr>
+          <a:xfrm>
+            <a:off x="6666333" y="2218519"/>
+            <a:ext cx="3756128" cy="2379023"/>
+          </a:xfrm>
+          <a:prstGeom prst="rect">
+            <a:avLst/>
+          </a:prstGeom>
+        </p:spPr>
+      </p:pic>
+      <p:pic>
+        <p:nvPicPr>
+          <p:cNvPr id="4" name="그림 3"/>
+          <p:cNvPicPr>
+            <a:picLocks noChangeAspect="1"/>
+          </p:cNvPicPr>
+          <p:nvPr/>
+        </p:nvPicPr>
+        <p:blipFill>
+          <a:blip r:embed="rId5" cstate="print">
+            <a:extLst>
+              <a:ext uri="{28A0092B-C50C-407E-A947-70E740481C1C}">
+                <a14:useLocalDpi xmlns:a14="http://schemas.microsoft.com/office/drawing/2010/main" val="0"/>
+              </a:ext>
+            </a:extLst>
+          </a:blip>
+          <a:stretch>
+            <a:fillRect/>
+          </a:stretch>
+        </p:blipFill>
+        <p:spPr>
+          <a:xfrm>
+            <a:off x="9274576" y="3824209"/>
+            <a:ext cx="2304511" cy="2610110"/>
+          </a:xfrm>
+          <a:prstGeom prst="rect">
+            <a:avLst/>
+          </a:prstGeom>
+        </p:spPr>
+      </p:pic>
+      <p:pic>
+        <p:nvPicPr>
+          <p:cNvPr id="6" name="그림 5"/>
+          <p:cNvPicPr>
+            <a:picLocks noChangeAspect="1"/>
+          </p:cNvPicPr>
+          <p:nvPr/>
+        </p:nvPicPr>
+        <p:blipFill>
+          <a:blip r:embed="rId6" cstate="print">
+            <a:extLst>
+              <a:ext uri="{28A0092B-C50C-407E-A947-70E740481C1C}">
+                <a14:useLocalDpi xmlns:a14="http://schemas.microsoft.com/office/drawing/2010/main" val="0"/>
+              </a:ext>
+            </a:extLst>
+          </a:blip>
+          <a:stretch>
+            <a:fillRect/>
+          </a:stretch>
+        </p:blipFill>
+        <p:spPr>
+          <a:xfrm>
+            <a:off x="6666334" y="4712012"/>
+            <a:ext cx="2229188" cy="1722306"/>
+          </a:xfrm>
+          <a:prstGeom prst="rect">
+            <a:avLst/>
+          </a:prstGeom>
+        </p:spPr>
+      </p:pic>
     </p:spTree>
     <p:extLst>
       <p:ext uri="{BB962C8B-B14F-4D97-AF65-F5344CB8AC3E}">

--- a/Docs/UnrealEngine_문서_김정환.pptx
+++ b/Docs/UnrealEngine_문서_김정환.pptx
@@ -133,7 +133,7 @@
   </p:defaultTextStyle>
   <p:extLst>
     <p:ext uri="{EFAFB233-063F-42B5-8137-9DF3F51BA10A}">
-      <p15:sldGuideLst xmlns:p15="http://schemas.microsoft.com/office/powerpoint/2012/main">
+      <p15:sldGuideLst xmlns:p15="http://schemas.microsoft.com/office/powerpoint/2012/main" xmlns="">
         <p15:guide id="1" orient="horz" pos="2137" userDrawn="1">
           <p15:clr>
             <a:srgbClr val="A4A3A4"/>
@@ -5212,26 +5212,494 @@
           <a:bodyPr/>
           <a:lstStyle/>
           <a:p>
-            <a:pPr marL="0" lvl="0" indent="0">
-              <a:buFont typeface="Arial" panose="020B0604020202020204" pitchFamily="34" charset="0"/>
-              <a:buNone/>
+            <a:r>
+              <a:rPr lang="en-US" altLang="ko-KR" sz="1200" dirty="0" err="1" smtClean="0">
+                <a:solidFill>
+                  <a:schemeClr val="bg1">
+                    <a:lumMod val="95000"/>
+                  </a:schemeClr>
+                </a:solidFill>
+                <a:latin typeface="Noto Sans KR Medium" panose="020B0200000000000000" pitchFamily="34" charset="-128"/>
+                <a:ea typeface="Noto Sans KR Medium" panose="020B0200000000000000" pitchFamily="34" charset="-128"/>
+              </a:rPr>
+              <a:t>BehaviorTree</a:t>
+            </a:r>
+            <a:r>
+              <a:rPr lang="ko-KR" altLang="en-US" sz="1200" dirty="0" smtClean="0">
+                <a:solidFill>
+                  <a:schemeClr val="bg1">
+                    <a:lumMod val="95000"/>
+                  </a:schemeClr>
+                </a:solidFill>
+                <a:latin typeface="Noto Sans KR Medium" panose="020B0200000000000000" pitchFamily="34" charset="-128"/>
+                <a:ea typeface="Noto Sans KR Medium" panose="020B0200000000000000" pitchFamily="34" charset="-128"/>
+              </a:rPr>
+              <a:t>를 활용하여 행동 양식을 구현했습니다</a:t>
+            </a:r>
+            <a:r>
+              <a:rPr lang="en-US" altLang="ko-KR" sz="1200" dirty="0" smtClean="0">
+                <a:solidFill>
+                  <a:schemeClr val="bg1">
+                    <a:lumMod val="95000"/>
+                  </a:schemeClr>
+                </a:solidFill>
+                <a:latin typeface="Noto Sans KR Medium" panose="020B0200000000000000" pitchFamily="34" charset="-128"/>
+                <a:ea typeface="Noto Sans KR Medium" panose="020B0200000000000000" pitchFamily="34" charset="-128"/>
+              </a:rPr>
+              <a:t>.</a:t>
+            </a:r>
+          </a:p>
+          <a:p>
+            <a:endParaRPr lang="en-US" altLang="ko-KR" sz="1200" dirty="0" smtClean="0">
+              <a:solidFill>
+                <a:schemeClr val="bg1">
+                  <a:lumMod val="95000"/>
+                </a:schemeClr>
+              </a:solidFill>
+              <a:latin typeface="Noto Sans KR Medium" panose="020B0200000000000000" pitchFamily="34" charset="-128"/>
+              <a:ea typeface="Noto Sans KR Medium" panose="020B0200000000000000" pitchFamily="34" charset="-128"/>
+            </a:endParaRPr>
+          </a:p>
+          <a:p>
+            <a:r>
+              <a:rPr lang="ko-KR" altLang="en-US" sz="1200" dirty="0" smtClean="0">
+                <a:solidFill>
+                  <a:schemeClr val="bg1">
+                    <a:lumMod val="95000"/>
+                  </a:schemeClr>
+                </a:solidFill>
+                <a:latin typeface="Noto Sans KR Medium" panose="020B0200000000000000" pitchFamily="34" charset="-128"/>
+                <a:ea typeface="Noto Sans KR Medium" panose="020B0200000000000000" pitchFamily="34" charset="-128"/>
+              </a:rPr>
+              <a:t>일반 상태</a:t>
+            </a:r>
+            <a:endParaRPr lang="en-US" altLang="ko-KR" sz="1200" dirty="0" smtClean="0">
+              <a:solidFill>
+                <a:schemeClr val="bg1">
+                  <a:lumMod val="95000"/>
+                </a:schemeClr>
+              </a:solidFill>
+              <a:latin typeface="Noto Sans KR Medium" panose="020B0200000000000000" pitchFamily="34" charset="-128"/>
+              <a:ea typeface="Noto Sans KR Medium" panose="020B0200000000000000" pitchFamily="34" charset="-128"/>
+            </a:endParaRPr>
+          </a:p>
+          <a:p>
+            <a:r>
+              <a:rPr lang="ko-KR" altLang="en-US" sz="1200" dirty="0" smtClean="0">
+                <a:solidFill>
+                  <a:schemeClr val="bg1">
+                    <a:lumMod val="95000"/>
+                  </a:schemeClr>
+                </a:solidFill>
+                <a:latin typeface="Noto Sans KR Medium" panose="020B0200000000000000" pitchFamily="34" charset="-128"/>
+                <a:ea typeface="Noto Sans KR Medium" panose="020B0200000000000000" pitchFamily="34" charset="-128"/>
+              </a:rPr>
+              <a:t>주변을 돌아다니며 탐색합니다</a:t>
+            </a:r>
+            <a:r>
+              <a:rPr lang="en-US" altLang="ko-KR" sz="1200" dirty="0" smtClean="0">
+                <a:solidFill>
+                  <a:schemeClr val="bg1">
+                    <a:lumMod val="95000"/>
+                  </a:schemeClr>
+                </a:solidFill>
+                <a:latin typeface="Noto Sans KR Medium" panose="020B0200000000000000" pitchFamily="34" charset="-128"/>
+                <a:ea typeface="Noto Sans KR Medium" panose="020B0200000000000000" pitchFamily="34" charset="-128"/>
+              </a:rPr>
+              <a:t>.</a:t>
+            </a:r>
+          </a:p>
+          <a:p>
+            <a:r>
+              <a:rPr lang="en-US" altLang="ko-KR" sz="1200" dirty="0" err="1" smtClean="0">
+                <a:solidFill>
+                  <a:schemeClr val="bg1">
+                    <a:lumMod val="95000"/>
+                  </a:schemeClr>
+                </a:solidFill>
+                <a:latin typeface="Noto Sans KR Medium" panose="020B0200000000000000" pitchFamily="34" charset="-128"/>
+                <a:ea typeface="Noto Sans KR Medium" panose="020B0200000000000000" pitchFamily="34" charset="-128"/>
+              </a:rPr>
+              <a:t>UBTService</a:t>
+            </a:r>
+            <a:r>
+              <a:rPr lang="ko-KR" altLang="en-US" sz="1200" dirty="0" smtClean="0">
+                <a:solidFill>
+                  <a:schemeClr val="bg1">
+                    <a:lumMod val="95000"/>
+                  </a:schemeClr>
+                </a:solidFill>
+                <a:latin typeface="Noto Sans KR Medium" panose="020B0200000000000000" pitchFamily="34" charset="-128"/>
+                <a:ea typeface="Noto Sans KR Medium" panose="020B0200000000000000" pitchFamily="34" charset="-128"/>
+              </a:rPr>
+              <a:t>를 상속한 </a:t>
+            </a:r>
+            <a:r>
+              <a:rPr lang="en-US" altLang="ko-KR" sz="1200" dirty="0" err="1" smtClean="0">
+                <a:solidFill>
+                  <a:schemeClr val="bg1">
+                    <a:lumMod val="95000"/>
+                  </a:schemeClr>
+                </a:solidFill>
+                <a:latin typeface="Noto Sans KR Medium" panose="020B0200000000000000" pitchFamily="34" charset="-128"/>
+                <a:ea typeface="Noto Sans KR Medium" panose="020B0200000000000000" pitchFamily="34" charset="-128"/>
+              </a:rPr>
+              <a:t>UFindPlayerService</a:t>
+            </a:r>
+            <a:r>
+              <a:rPr lang="ko-KR" altLang="en-US" sz="1200" dirty="0" smtClean="0">
+                <a:solidFill>
+                  <a:schemeClr val="bg1">
+                    <a:lumMod val="95000"/>
+                  </a:schemeClr>
+                </a:solidFill>
+                <a:latin typeface="Noto Sans KR Medium" panose="020B0200000000000000" pitchFamily="34" charset="-128"/>
+                <a:ea typeface="Noto Sans KR Medium" panose="020B0200000000000000" pitchFamily="34" charset="-128"/>
+              </a:rPr>
+              <a:t>에서 </a:t>
+            </a:r>
+            <a:r>
+              <a:rPr lang="en-US" altLang="ko-KR" sz="1200" dirty="0" smtClean="0">
+                <a:solidFill>
+                  <a:schemeClr val="bg1">
+                    <a:lumMod val="95000"/>
+                  </a:schemeClr>
+                </a:solidFill>
+                <a:latin typeface="Noto Sans KR Medium" panose="020B0200000000000000" pitchFamily="34" charset="-128"/>
+                <a:ea typeface="Noto Sans KR Medium" panose="020B0200000000000000" pitchFamily="34" charset="-128"/>
+              </a:rPr>
+              <a:t>1</a:t>
+            </a:r>
+            <a:r>
+              <a:rPr lang="ko-KR" altLang="en-US" sz="1200" dirty="0" smtClean="0">
+                <a:solidFill>
+                  <a:schemeClr val="bg1">
+                    <a:lumMod val="95000"/>
+                  </a:schemeClr>
+                </a:solidFill>
+                <a:latin typeface="Noto Sans KR Medium" panose="020B0200000000000000" pitchFamily="34" charset="-128"/>
+                <a:ea typeface="Noto Sans KR Medium" panose="020B0200000000000000" pitchFamily="34" charset="-128"/>
+              </a:rPr>
+              <a:t>초 마다 </a:t>
+            </a:r>
+            <a:r>
+              <a:rPr lang="en-US" altLang="ko-KR" sz="1200" dirty="0" err="1" smtClean="0">
+                <a:solidFill>
+                  <a:schemeClr val="bg1">
+                    <a:lumMod val="95000"/>
+                  </a:schemeClr>
+                </a:solidFill>
+                <a:latin typeface="Noto Sans KR Medium" panose="020B0200000000000000" pitchFamily="34" charset="-128"/>
+                <a:ea typeface="Noto Sans KR Medium" panose="020B0200000000000000" pitchFamily="34" charset="-128"/>
+              </a:rPr>
+              <a:t>SphereTrace</a:t>
+            </a:r>
+            <a:r>
+              <a:rPr lang="ko-KR" altLang="en-US" sz="1200" dirty="0" smtClean="0">
+                <a:solidFill>
+                  <a:schemeClr val="bg1">
+                    <a:lumMod val="95000"/>
+                  </a:schemeClr>
+                </a:solidFill>
+                <a:latin typeface="Noto Sans KR Medium" panose="020B0200000000000000" pitchFamily="34" charset="-128"/>
+                <a:ea typeface="Noto Sans KR Medium" panose="020B0200000000000000" pitchFamily="34" charset="-128"/>
+              </a:rPr>
+              <a:t>로 주변을 탐색합니다</a:t>
+            </a:r>
+            <a:r>
+              <a:rPr lang="en-US" altLang="ko-KR" sz="1200" dirty="0" smtClean="0">
+                <a:solidFill>
+                  <a:schemeClr val="bg1">
+                    <a:lumMod val="95000"/>
+                  </a:schemeClr>
+                </a:solidFill>
+                <a:latin typeface="Noto Sans KR Medium" panose="020B0200000000000000" pitchFamily="34" charset="-128"/>
+                <a:ea typeface="Noto Sans KR Medium" panose="020B0200000000000000" pitchFamily="34" charset="-128"/>
+              </a:rPr>
+              <a:t>.</a:t>
+            </a:r>
+          </a:p>
+          <a:p>
+            <a:r>
+              <a:rPr lang="ko-KR" altLang="en-US" sz="1200" dirty="0" smtClean="0">
+                <a:solidFill>
+                  <a:schemeClr val="bg1">
+                    <a:lumMod val="95000"/>
+                  </a:schemeClr>
+                </a:solidFill>
+                <a:latin typeface="Noto Sans KR Medium" panose="020B0200000000000000" pitchFamily="34" charset="-128"/>
+                <a:ea typeface="Noto Sans KR Medium" panose="020B0200000000000000" pitchFamily="34" charset="-128"/>
+              </a:rPr>
+              <a:t>적을 발견하면 공격 상태로 전환합니다</a:t>
+            </a:r>
+            <a:r>
+              <a:rPr lang="en-US" altLang="ko-KR" sz="1200" dirty="0" smtClean="0">
+                <a:solidFill>
+                  <a:schemeClr val="bg1">
+                    <a:lumMod val="95000"/>
+                  </a:schemeClr>
+                </a:solidFill>
+                <a:latin typeface="Noto Sans KR Medium" panose="020B0200000000000000" pitchFamily="34" charset="-128"/>
+                <a:ea typeface="Noto Sans KR Medium" panose="020B0200000000000000" pitchFamily="34" charset="-128"/>
+              </a:rPr>
+              <a:t>.</a:t>
+            </a:r>
+          </a:p>
+          <a:p>
+            <a:pPr marL="171450" indent="-171450">
+              <a:buFontTx/>
+              <a:buChar char="-"/>
             </a:pPr>
-            <a:r>
-              <a:rPr lang="ko-KR" altLang="en-US" dirty="0" err="1" smtClean="0"/>
-              <a:t>몬스터</a:t>
-            </a:r>
-            <a:r>
-              <a:rPr lang="ko-KR" altLang="en-US" dirty="0" smtClean="0"/>
-              <a:t> 종류</a:t>
-            </a:r>
-            <a:endParaRPr lang="en-US" altLang="ko-KR" dirty="0" smtClean="0"/>
-          </a:p>
-          <a:p>
-            <a:pPr marL="0" lvl="0" indent="0">
-              <a:buFont typeface="Arial" panose="020B0604020202020204" pitchFamily="34" charset="0"/>
-              <a:buNone/>
-            </a:pPr>
-            <a:endParaRPr lang="en-US" altLang="ko-KR" dirty="0" smtClean="0"/>
+            <a:endParaRPr lang="en-US" altLang="ko-KR" sz="1200" dirty="0" smtClean="0">
+              <a:solidFill>
+                <a:schemeClr val="bg1">
+                  <a:lumMod val="95000"/>
+                </a:schemeClr>
+              </a:solidFill>
+              <a:latin typeface="Noto Sans KR Medium" panose="020B0200000000000000" pitchFamily="34" charset="-128"/>
+              <a:ea typeface="Noto Sans KR Medium" panose="020B0200000000000000" pitchFamily="34" charset="-128"/>
+            </a:endParaRPr>
+          </a:p>
+          <a:p>
+            <a:r>
+              <a:rPr lang="ko-KR" altLang="en-US" sz="1200" dirty="0" smtClean="0">
+                <a:solidFill>
+                  <a:schemeClr val="bg1">
+                    <a:lumMod val="95000"/>
+                  </a:schemeClr>
+                </a:solidFill>
+                <a:latin typeface="Noto Sans KR Medium" panose="020B0200000000000000" pitchFamily="34" charset="-128"/>
+                <a:ea typeface="Noto Sans KR Medium" panose="020B0200000000000000" pitchFamily="34" charset="-128"/>
+              </a:rPr>
+              <a:t>공격 상태</a:t>
+            </a:r>
+            <a:endParaRPr lang="en-US" altLang="ko-KR" sz="1200" dirty="0" smtClean="0">
+              <a:solidFill>
+                <a:schemeClr val="bg1">
+                  <a:lumMod val="95000"/>
+                </a:schemeClr>
+              </a:solidFill>
+              <a:latin typeface="Noto Sans KR Medium" panose="020B0200000000000000" pitchFamily="34" charset="-128"/>
+              <a:ea typeface="Noto Sans KR Medium" panose="020B0200000000000000" pitchFamily="34" charset="-128"/>
+            </a:endParaRPr>
+          </a:p>
+          <a:p>
+            <a:r>
+              <a:rPr lang="ko-KR" altLang="en-US" sz="1200" dirty="0" err="1" smtClean="0">
+                <a:solidFill>
+                  <a:schemeClr val="bg1">
+                    <a:lumMod val="95000"/>
+                  </a:schemeClr>
+                </a:solidFill>
+                <a:latin typeface="Noto Sans KR Medium" panose="020B0200000000000000" pitchFamily="34" charset="-128"/>
+                <a:ea typeface="Noto Sans KR Medium" panose="020B0200000000000000" pitchFamily="34" charset="-128"/>
+              </a:rPr>
+              <a:t>타겟에게</a:t>
+            </a:r>
+            <a:r>
+              <a:rPr lang="ko-KR" altLang="en-US" sz="1200" dirty="0" smtClean="0">
+                <a:solidFill>
+                  <a:schemeClr val="bg1">
+                    <a:lumMod val="95000"/>
+                  </a:schemeClr>
+                </a:solidFill>
+                <a:latin typeface="Noto Sans KR Medium" panose="020B0200000000000000" pitchFamily="34" charset="-128"/>
+                <a:ea typeface="Noto Sans KR Medium" panose="020B0200000000000000" pitchFamily="34" charset="-128"/>
+              </a:rPr>
+              <a:t> 다가가며</a:t>
+            </a:r>
+            <a:r>
+              <a:rPr lang="en-US" altLang="ko-KR" sz="1200" dirty="0" smtClean="0">
+                <a:solidFill>
+                  <a:schemeClr val="bg1">
+                    <a:lumMod val="95000"/>
+                  </a:schemeClr>
+                </a:solidFill>
+                <a:latin typeface="Noto Sans KR Medium" panose="020B0200000000000000" pitchFamily="34" charset="-128"/>
+                <a:ea typeface="Noto Sans KR Medium" panose="020B0200000000000000" pitchFamily="34" charset="-128"/>
+              </a:rPr>
+              <a:t> </a:t>
+            </a:r>
+            <a:r>
+              <a:rPr lang="ko-KR" altLang="en-US" sz="1200" dirty="0" smtClean="0">
+                <a:solidFill>
+                  <a:schemeClr val="bg1">
+                    <a:lumMod val="95000"/>
+                  </a:schemeClr>
+                </a:solidFill>
+                <a:latin typeface="Noto Sans KR Medium" panose="020B0200000000000000" pitchFamily="34" charset="-128"/>
+                <a:ea typeface="Noto Sans KR Medium" panose="020B0200000000000000" pitchFamily="34" charset="-128"/>
+              </a:rPr>
+              <a:t>공격 범위 내일 때 공격합니다</a:t>
+            </a:r>
+            <a:r>
+              <a:rPr lang="en-US" altLang="ko-KR" sz="1200" dirty="0" smtClean="0">
+                <a:solidFill>
+                  <a:schemeClr val="bg1">
+                    <a:lumMod val="95000"/>
+                  </a:schemeClr>
+                </a:solidFill>
+                <a:latin typeface="Noto Sans KR Medium" panose="020B0200000000000000" pitchFamily="34" charset="-128"/>
+                <a:ea typeface="Noto Sans KR Medium" panose="020B0200000000000000" pitchFamily="34" charset="-128"/>
+              </a:rPr>
+              <a:t>.</a:t>
+            </a:r>
+          </a:p>
+          <a:p>
+            <a:r>
+              <a:rPr lang="en-US" altLang="ko-KR" sz="1200" dirty="0" err="1" smtClean="0">
+                <a:solidFill>
+                  <a:schemeClr val="bg1">
+                    <a:lumMod val="95000"/>
+                  </a:schemeClr>
+                </a:solidFill>
+                <a:latin typeface="Noto Sans KR Medium" panose="020B0200000000000000" pitchFamily="34" charset="-128"/>
+                <a:ea typeface="Noto Sans KR Medium" panose="020B0200000000000000" pitchFamily="34" charset="-128"/>
+              </a:rPr>
+              <a:t>UBTTask</a:t>
+            </a:r>
+            <a:r>
+              <a:rPr lang="ko-KR" altLang="en-US" sz="1200" dirty="0" smtClean="0">
+                <a:solidFill>
+                  <a:schemeClr val="bg1">
+                    <a:lumMod val="95000"/>
+                  </a:schemeClr>
+                </a:solidFill>
+                <a:latin typeface="Noto Sans KR Medium" panose="020B0200000000000000" pitchFamily="34" charset="-128"/>
+                <a:ea typeface="Noto Sans KR Medium" panose="020B0200000000000000" pitchFamily="34" charset="-128"/>
+              </a:rPr>
+              <a:t>를 상속한 </a:t>
+            </a:r>
+            <a:r>
+              <a:rPr lang="en-US" altLang="ko-KR" sz="1200" dirty="0" err="1" smtClean="0">
+                <a:solidFill>
+                  <a:schemeClr val="bg1">
+                    <a:lumMod val="95000"/>
+                  </a:schemeClr>
+                </a:solidFill>
+                <a:latin typeface="Noto Sans KR Medium" panose="020B0200000000000000" pitchFamily="34" charset="-128"/>
+                <a:ea typeface="Noto Sans KR Medium" panose="020B0200000000000000" pitchFamily="34" charset="-128"/>
+              </a:rPr>
+              <a:t>UAttackTask</a:t>
+            </a:r>
+            <a:r>
+              <a:rPr lang="ko-KR" altLang="en-US" sz="1200" dirty="0" smtClean="0">
+                <a:solidFill>
+                  <a:schemeClr val="bg1">
+                    <a:lumMod val="95000"/>
+                  </a:schemeClr>
+                </a:solidFill>
+                <a:latin typeface="Noto Sans KR Medium" panose="020B0200000000000000" pitchFamily="34" charset="-128"/>
+                <a:ea typeface="Noto Sans KR Medium" panose="020B0200000000000000" pitchFamily="34" charset="-128"/>
+              </a:rPr>
+              <a:t>에서 </a:t>
+            </a:r>
+            <a:r>
+              <a:rPr lang="ko-KR" altLang="en-US" sz="1200" dirty="0" err="1" smtClean="0">
+                <a:solidFill>
+                  <a:schemeClr val="bg1">
+                    <a:lumMod val="95000"/>
+                  </a:schemeClr>
+                </a:solidFill>
+                <a:latin typeface="Noto Sans KR Medium" panose="020B0200000000000000" pitchFamily="34" charset="-128"/>
+                <a:ea typeface="Noto Sans KR Medium" panose="020B0200000000000000" pitchFamily="34" charset="-128"/>
+              </a:rPr>
+              <a:t>몬스터가</a:t>
+            </a:r>
+            <a:r>
+              <a:rPr lang="ko-KR" altLang="en-US" sz="1200" dirty="0" smtClean="0">
+                <a:solidFill>
+                  <a:schemeClr val="bg1">
+                    <a:lumMod val="95000"/>
+                  </a:schemeClr>
+                </a:solidFill>
+                <a:latin typeface="Noto Sans KR Medium" panose="020B0200000000000000" pitchFamily="34" charset="-128"/>
+                <a:ea typeface="Noto Sans KR Medium" panose="020B0200000000000000" pitchFamily="34" charset="-128"/>
+              </a:rPr>
+              <a:t> 가진 액션 중 랜덤으로 공격 액션을 수행하도록 구현했습니다</a:t>
+            </a:r>
+            <a:r>
+              <a:rPr lang="en-US" altLang="ko-KR" sz="1200" dirty="0" smtClean="0">
+                <a:solidFill>
+                  <a:schemeClr val="bg1">
+                    <a:lumMod val="95000"/>
+                  </a:schemeClr>
+                </a:solidFill>
+                <a:latin typeface="Noto Sans KR Medium" panose="020B0200000000000000" pitchFamily="34" charset="-128"/>
+                <a:ea typeface="Noto Sans KR Medium" panose="020B0200000000000000" pitchFamily="34" charset="-128"/>
+              </a:rPr>
+              <a:t>.</a:t>
+            </a:r>
+          </a:p>
+          <a:p>
+            <a:endParaRPr lang="en-US" altLang="ko-KR" sz="1200" dirty="0" smtClean="0">
+              <a:solidFill>
+                <a:schemeClr val="bg1">
+                  <a:lumMod val="95000"/>
+                </a:schemeClr>
+              </a:solidFill>
+              <a:latin typeface="Noto Sans KR Medium" panose="020B0200000000000000" pitchFamily="34" charset="-128"/>
+              <a:ea typeface="Noto Sans KR Medium" panose="020B0200000000000000" pitchFamily="34" charset="-128"/>
+            </a:endParaRPr>
+          </a:p>
+          <a:p>
+            <a:r>
+              <a:rPr lang="ko-KR" altLang="en-US" sz="1200" dirty="0" smtClean="0">
+                <a:solidFill>
+                  <a:schemeClr val="bg1">
+                    <a:lumMod val="95000"/>
+                  </a:schemeClr>
+                </a:solidFill>
+                <a:latin typeface="Noto Sans KR Medium" panose="020B0200000000000000" pitchFamily="34" charset="-128"/>
+                <a:ea typeface="Noto Sans KR Medium" panose="020B0200000000000000" pitchFamily="34" charset="-128"/>
+              </a:rPr>
+              <a:t>추적 불가한 경우 일정 시간 동안 적에게 다가가지 못하는 상황일 때</a:t>
+            </a:r>
+            <a:r>
+              <a:rPr lang="en-US" altLang="ko-KR" sz="1200" dirty="0" smtClean="0">
+                <a:solidFill>
+                  <a:schemeClr val="bg1">
+                    <a:lumMod val="95000"/>
+                  </a:schemeClr>
+                </a:solidFill>
+                <a:latin typeface="Noto Sans KR Medium" panose="020B0200000000000000" pitchFamily="34" charset="-128"/>
+                <a:ea typeface="Noto Sans KR Medium" panose="020B0200000000000000" pitchFamily="34" charset="-128"/>
+              </a:rPr>
+              <a:t>, </a:t>
+            </a:r>
+            <a:r>
+              <a:rPr lang="ko-KR" altLang="en-US" sz="1200" dirty="0" smtClean="0">
+                <a:solidFill>
+                  <a:schemeClr val="bg1">
+                    <a:lumMod val="95000"/>
+                  </a:schemeClr>
+                </a:solidFill>
+                <a:latin typeface="Noto Sans KR Medium" panose="020B0200000000000000" pitchFamily="34" charset="-128"/>
+                <a:ea typeface="Noto Sans KR Medium" panose="020B0200000000000000" pitchFamily="34" charset="-128"/>
+              </a:rPr>
+              <a:t>다시 일반 상태로 복귀합니다</a:t>
+            </a:r>
+            <a:r>
+              <a:rPr lang="en-US" altLang="ko-KR" sz="1200" smtClean="0">
+                <a:solidFill>
+                  <a:schemeClr val="bg1">
+                    <a:lumMod val="95000"/>
+                  </a:schemeClr>
+                </a:solidFill>
+                <a:latin typeface="Noto Sans KR Medium" panose="020B0200000000000000" pitchFamily="34" charset="-128"/>
+                <a:ea typeface="Noto Sans KR Medium" panose="020B0200000000000000" pitchFamily="34" charset="-128"/>
+              </a:rPr>
+              <a:t>.</a:t>
+            </a:r>
+            <a:endParaRPr lang="en-US" altLang="ko-KR" sz="1200" dirty="0" smtClean="0">
+              <a:solidFill>
+                <a:schemeClr val="bg1">
+                  <a:lumMod val="95000"/>
+                </a:schemeClr>
+              </a:solidFill>
+              <a:latin typeface="Noto Sans KR Medium" panose="020B0200000000000000" pitchFamily="34" charset="-128"/>
+              <a:ea typeface="Noto Sans KR Medium" panose="020B0200000000000000" pitchFamily="34" charset="-128"/>
+            </a:endParaRPr>
           </a:p>
         </p:txBody>
       </p:sp>
@@ -23775,8 +24243,8 @@
         </p:blipFill>
         <p:spPr>
           <a:xfrm>
-            <a:off x="540000" y="4292322"/>
-            <a:ext cx="3013376" cy="1419344"/>
+            <a:off x="540000" y="4833853"/>
+            <a:ext cx="3222678" cy="1517928"/>
           </a:xfrm>
           <a:prstGeom prst="rect">
             <a:avLst/>
@@ -23882,7 +24350,7 @@
         <p:spPr>
           <a:xfrm>
             <a:off x="540000" y="2512695"/>
-            <a:ext cx="5555999" cy="1499475"/>
+            <a:ext cx="5555999" cy="2042152"/>
           </a:xfrm>
           <a:prstGeom prst="rect">
             <a:avLst/>
@@ -25110,98 +25578,128 @@
           </a:p>
         </p:txBody>
       </p:sp>
-      <p:sp>
-        <p:nvSpPr>
-          <p:cNvPr id="12" name="직사각형 11"/>
-          <p:cNvSpPr/>
+      <p:pic>
+        <p:nvPicPr>
+          <p:cNvPr id="1026" name="Picture 2"/>
+          <p:cNvPicPr>
+            <a:picLocks noChangeAspect="1" noChangeArrowheads="1"/>
+          </p:cNvPicPr>
           <p:nvPr/>
-        </p:nvSpPr>
-        <p:spPr>
+        </p:nvPicPr>
+        <p:blipFill>
+          <a:blip r:embed="rId3" cstate="print">
+            <a:extLst>
+              <a:ext uri="{28A0092B-C50C-407E-A947-70E740481C1C}">
+                <a14:useLocalDpi xmlns:a14="http://schemas.microsoft.com/office/drawing/2010/main" val="0"/>
+              </a:ext>
+            </a:extLst>
+          </a:blip>
+          <a:stretch>
+            <a:fillRect/>
+          </a:stretch>
+        </p:blipFill>
+        <p:spPr bwMode="auto">
           <a:xfrm>
-            <a:off x="6334512" y="315047"/>
-            <a:ext cx="5555999" cy="2260855"/>
+            <a:off x="6588512" y="315046"/>
+            <a:ext cx="3438137" cy="2840601"/>
           </a:xfrm>
           <a:prstGeom prst="rect">
             <a:avLst/>
           </a:prstGeom>
+          <a:noFill/>
+          <a:extLst>
+            <a:ext uri="{909E8E84-426E-40DD-AFC4-6F175D3DCCD1}">
+              <a14:hiddenFill xmlns:a14="http://schemas.microsoft.com/office/drawing/2010/main">
+                <a:solidFill>
+                  <a:srgbClr val="FFFFFF"/>
+                </a:solidFill>
+              </a14:hiddenFill>
+            </a:ext>
+          </a:extLst>
         </p:spPr>
-        <p:style>
-          <a:lnRef idx="2">
-            <a:schemeClr val="accent1">
-              <a:shade val="50000"/>
-            </a:schemeClr>
-          </a:lnRef>
-          <a:fillRef idx="1">
-            <a:schemeClr val="accent1"/>
-          </a:fillRef>
-          <a:effectRef idx="0">
-            <a:schemeClr val="accent1"/>
-          </a:effectRef>
-          <a:fontRef idx="minor">
-            <a:schemeClr val="lt1"/>
-          </a:fontRef>
-        </p:style>
-        <p:txBody>
-          <a:bodyPr rtlCol="0" anchor="ctr"/>
-          <a:lstStyle/>
-          <a:p>
-            <a:pPr algn="ctr"/>
-            <a:r>
-              <a:rPr lang="ko-KR" altLang="en-US" dirty="0" smtClean="0"/>
-              <a:t>상속</a:t>
-            </a:r>
-            <a:endParaRPr lang="ko-KR" altLang="en-US" dirty="0"/>
-          </a:p>
-        </p:txBody>
-      </p:sp>
-      <p:sp>
-        <p:nvSpPr>
-          <p:cNvPr id="14" name="직사각형 13"/>
-          <p:cNvSpPr/>
+      </p:pic>
+      <p:pic>
+        <p:nvPicPr>
+          <p:cNvPr id="1027" name="Picture 3" descr="C:\Users\B-05\Downloads\carbon (1).png"/>
+          <p:cNvPicPr>
+            <a:picLocks noChangeAspect="1" noChangeArrowheads="1"/>
+          </p:cNvPicPr>
           <p:nvPr/>
-        </p:nvSpPr>
-        <p:spPr>
+        </p:nvPicPr>
+        <p:blipFill>
+          <a:blip r:embed="rId4" cstate="print">
+            <a:extLst>
+              <a:ext uri="{28A0092B-C50C-407E-A947-70E740481C1C}">
+                <a14:useLocalDpi xmlns:a14="http://schemas.microsoft.com/office/drawing/2010/main" val="0"/>
+              </a:ext>
+            </a:extLst>
+          </a:blip>
+          <a:srcRect/>
+          <a:stretch>
+            <a:fillRect/>
+          </a:stretch>
+        </p:blipFill>
+        <p:spPr bwMode="auto">
           <a:xfrm>
-            <a:off x="6334511" y="2733568"/>
-            <a:ext cx="5555999" cy="3688688"/>
+            <a:off x="6588513" y="3215268"/>
+            <a:ext cx="2685662" cy="3047597"/>
           </a:xfrm>
           <a:prstGeom prst="rect">
             <a:avLst/>
           </a:prstGeom>
+          <a:noFill/>
+          <a:extLst>
+            <a:ext uri="{909E8E84-426E-40DD-AFC4-6F175D3DCCD1}">
+              <a14:hiddenFill xmlns:a14="http://schemas.microsoft.com/office/drawing/2010/main">
+                <a:solidFill>
+                  <a:srgbClr val="FFFFFF"/>
+                </a:solidFill>
+              </a14:hiddenFill>
+            </a:ext>
+          </a:extLst>
         </p:spPr>
-        <p:style>
-          <a:lnRef idx="2">
-            <a:schemeClr val="accent1">
-              <a:shade val="50000"/>
-            </a:schemeClr>
-          </a:lnRef>
-          <a:fillRef idx="1">
-            <a:schemeClr val="accent1"/>
-          </a:fillRef>
-          <a:effectRef idx="0">
-            <a:schemeClr val="accent1"/>
-          </a:effectRef>
-          <a:fontRef idx="minor">
-            <a:schemeClr val="lt1"/>
-          </a:fontRef>
-        </p:style>
-        <p:txBody>
-          <a:bodyPr rtlCol="0" anchor="ctr"/>
-          <a:lstStyle/>
-          <a:p>
-            <a:pPr algn="ctr"/>
-            <a:r>
-              <a:rPr lang="ko-KR" altLang="en-US" dirty="0" err="1" smtClean="0"/>
-              <a:t>몬스터</a:t>
-            </a:r>
-            <a:r>
-              <a:rPr lang="ko-KR" altLang="en-US" dirty="0" smtClean="0"/>
-              <a:t> 데이터</a:t>
-            </a:r>
-            <a:endParaRPr lang="ko-KR" altLang="en-US" dirty="0"/>
-          </a:p>
-        </p:txBody>
-      </p:sp>
+      </p:pic>
+      <p:pic>
+        <p:nvPicPr>
+          <p:cNvPr id="1028" name="Picture 4" descr="C:\Users\B-05\Downloads\carbon (2).png"/>
+          <p:cNvPicPr>
+            <a:picLocks noChangeAspect="1" noChangeArrowheads="1"/>
+          </p:cNvPicPr>
+          <p:nvPr/>
+        </p:nvPicPr>
+        <p:blipFill>
+          <a:blip r:embed="rId5" cstate="print">
+            <a:extLst>
+              <a:ext uri="{28A0092B-C50C-407E-A947-70E740481C1C}">
+                <a14:useLocalDpi xmlns:a14="http://schemas.microsoft.com/office/drawing/2010/main" val="0"/>
+              </a:ext>
+            </a:extLst>
+          </a:blip>
+          <a:srcRect/>
+          <a:stretch>
+            <a:fillRect/>
+          </a:stretch>
+        </p:blipFill>
+        <p:spPr bwMode="auto">
+          <a:xfrm>
+            <a:off x="9344025" y="3215268"/>
+            <a:ext cx="2508041" cy="3414989"/>
+          </a:xfrm>
+          <a:prstGeom prst="rect">
+            <a:avLst/>
+          </a:prstGeom>
+          <a:noFill/>
+          <a:extLst>
+            <a:ext uri="{909E8E84-426E-40DD-AFC4-6F175D3DCCD1}">
+              <a14:hiddenFill xmlns:a14="http://schemas.microsoft.com/office/drawing/2010/main">
+                <a:solidFill>
+                  <a:srgbClr val="FFFFFF"/>
+                </a:solidFill>
+              </a14:hiddenFill>
+            </a:ext>
+          </a:extLst>
+        </p:spPr>
+      </p:pic>
     </p:spTree>
     <p:extLst>
       <p:ext uri="{BB962C8B-B14F-4D97-AF65-F5344CB8AC3E}">
@@ -25463,8 +25961,8 @@
         </p:nvSpPr>
         <p:spPr>
           <a:xfrm>
-            <a:off x="454275" y="1480347"/>
-            <a:ext cx="5651249" cy="2092881"/>
+            <a:off x="441575" y="1480347"/>
+            <a:ext cx="5651249" cy="246221"/>
           </a:xfrm>
           <a:prstGeom prst="rect">
             <a:avLst/>
@@ -25512,8 +26010,6 @@
               </a:rPr>
               <a:t>.</a:t>
             </a:r>
-          </a:p>
-          <a:p>
             <a:endParaRPr lang="en-US" altLang="ko-KR" sz="1000" dirty="0" smtClean="0">
               <a:solidFill>
                 <a:schemeClr val="bg1">
@@ -25523,456 +26019,6 @@
               <a:latin typeface="Noto Sans KR Medium" panose="020B0200000000000000" pitchFamily="34" charset="-128"/>
               <a:ea typeface="Noto Sans KR Medium" panose="020B0200000000000000" pitchFamily="34" charset="-128"/>
             </a:endParaRPr>
-          </a:p>
-          <a:p>
-            <a:r>
-              <a:rPr lang="ko-KR" altLang="en-US" sz="1000" dirty="0" smtClean="0">
-                <a:solidFill>
-                  <a:schemeClr val="bg1">
-                    <a:lumMod val="95000"/>
-                  </a:schemeClr>
-                </a:solidFill>
-                <a:latin typeface="Noto Sans KR Medium" panose="020B0200000000000000" pitchFamily="34" charset="-128"/>
-                <a:ea typeface="Noto Sans KR Medium" panose="020B0200000000000000" pitchFamily="34" charset="-128"/>
-              </a:rPr>
-              <a:t>일반 상태</a:t>
-            </a:r>
-            <a:endParaRPr lang="en-US" altLang="ko-KR" sz="1000" dirty="0" smtClean="0">
-              <a:solidFill>
-                <a:schemeClr val="bg1">
-                  <a:lumMod val="95000"/>
-                </a:schemeClr>
-              </a:solidFill>
-              <a:latin typeface="Noto Sans KR Medium" panose="020B0200000000000000" pitchFamily="34" charset="-128"/>
-              <a:ea typeface="Noto Sans KR Medium" panose="020B0200000000000000" pitchFamily="34" charset="-128"/>
-            </a:endParaRPr>
-          </a:p>
-          <a:p>
-            <a:r>
-              <a:rPr lang="ko-KR" altLang="en-US" sz="1000" dirty="0" smtClean="0">
-                <a:solidFill>
-                  <a:schemeClr val="bg1">
-                    <a:lumMod val="95000"/>
-                  </a:schemeClr>
-                </a:solidFill>
-                <a:latin typeface="Noto Sans KR Medium" panose="020B0200000000000000" pitchFamily="34" charset="-128"/>
-                <a:ea typeface="Noto Sans KR Medium" panose="020B0200000000000000" pitchFamily="34" charset="-128"/>
-              </a:rPr>
-              <a:t>주변을 돌아다니며 탐색합니다</a:t>
-            </a:r>
-            <a:r>
-              <a:rPr lang="en-US" altLang="ko-KR" sz="1000" dirty="0" smtClean="0">
-                <a:solidFill>
-                  <a:schemeClr val="bg1">
-                    <a:lumMod val="95000"/>
-                  </a:schemeClr>
-                </a:solidFill>
-                <a:latin typeface="Noto Sans KR Medium" panose="020B0200000000000000" pitchFamily="34" charset="-128"/>
-                <a:ea typeface="Noto Sans KR Medium" panose="020B0200000000000000" pitchFamily="34" charset="-128"/>
-              </a:rPr>
-              <a:t>.</a:t>
-            </a:r>
-          </a:p>
-          <a:p>
-            <a:r>
-              <a:rPr lang="en-US" altLang="ko-KR" sz="1000" dirty="0" err="1" smtClean="0">
-                <a:solidFill>
-                  <a:schemeClr val="bg1">
-                    <a:lumMod val="95000"/>
-                  </a:schemeClr>
-                </a:solidFill>
-                <a:latin typeface="Noto Sans KR Medium" panose="020B0200000000000000" pitchFamily="34" charset="-128"/>
-                <a:ea typeface="Noto Sans KR Medium" panose="020B0200000000000000" pitchFamily="34" charset="-128"/>
-              </a:rPr>
-              <a:t>UBTService</a:t>
-            </a:r>
-            <a:r>
-              <a:rPr lang="ko-KR" altLang="en-US" sz="1000" dirty="0" smtClean="0">
-                <a:solidFill>
-                  <a:schemeClr val="bg1">
-                    <a:lumMod val="95000"/>
-                  </a:schemeClr>
-                </a:solidFill>
-                <a:latin typeface="Noto Sans KR Medium" panose="020B0200000000000000" pitchFamily="34" charset="-128"/>
-                <a:ea typeface="Noto Sans KR Medium" panose="020B0200000000000000" pitchFamily="34" charset="-128"/>
-              </a:rPr>
-              <a:t>를 상속한 </a:t>
-            </a:r>
-            <a:r>
-              <a:rPr lang="en-US" altLang="ko-KR" sz="1000" dirty="0" err="1" smtClean="0">
-                <a:solidFill>
-                  <a:schemeClr val="bg1">
-                    <a:lumMod val="95000"/>
-                  </a:schemeClr>
-                </a:solidFill>
-                <a:latin typeface="Noto Sans KR Medium" panose="020B0200000000000000" pitchFamily="34" charset="-128"/>
-                <a:ea typeface="Noto Sans KR Medium" panose="020B0200000000000000" pitchFamily="34" charset="-128"/>
-              </a:rPr>
-              <a:t>UFindPlayerService</a:t>
-            </a:r>
-            <a:r>
-              <a:rPr lang="ko-KR" altLang="en-US" sz="1000" dirty="0" smtClean="0">
-                <a:solidFill>
-                  <a:schemeClr val="bg1">
-                    <a:lumMod val="95000"/>
-                  </a:schemeClr>
-                </a:solidFill>
-                <a:latin typeface="Noto Sans KR Medium" panose="020B0200000000000000" pitchFamily="34" charset="-128"/>
-                <a:ea typeface="Noto Sans KR Medium" panose="020B0200000000000000" pitchFamily="34" charset="-128"/>
-              </a:rPr>
-              <a:t>에서 </a:t>
-            </a:r>
-            <a:r>
-              <a:rPr lang="en-US" altLang="ko-KR" sz="1000" dirty="0" smtClean="0">
-                <a:solidFill>
-                  <a:schemeClr val="bg1">
-                    <a:lumMod val="95000"/>
-                  </a:schemeClr>
-                </a:solidFill>
-                <a:latin typeface="Noto Sans KR Medium" panose="020B0200000000000000" pitchFamily="34" charset="-128"/>
-                <a:ea typeface="Noto Sans KR Medium" panose="020B0200000000000000" pitchFamily="34" charset="-128"/>
-              </a:rPr>
-              <a:t>1</a:t>
-            </a:r>
-            <a:r>
-              <a:rPr lang="ko-KR" altLang="en-US" sz="1000" dirty="0" smtClean="0">
-                <a:solidFill>
-                  <a:schemeClr val="bg1">
-                    <a:lumMod val="95000"/>
-                  </a:schemeClr>
-                </a:solidFill>
-                <a:latin typeface="Noto Sans KR Medium" panose="020B0200000000000000" pitchFamily="34" charset="-128"/>
-                <a:ea typeface="Noto Sans KR Medium" panose="020B0200000000000000" pitchFamily="34" charset="-128"/>
-              </a:rPr>
-              <a:t>초 마다 </a:t>
-            </a:r>
-            <a:r>
-              <a:rPr lang="en-US" altLang="ko-KR" sz="1000" dirty="0" err="1" smtClean="0">
-                <a:solidFill>
-                  <a:schemeClr val="bg1">
-                    <a:lumMod val="95000"/>
-                  </a:schemeClr>
-                </a:solidFill>
-                <a:latin typeface="Noto Sans KR Medium" panose="020B0200000000000000" pitchFamily="34" charset="-128"/>
-                <a:ea typeface="Noto Sans KR Medium" panose="020B0200000000000000" pitchFamily="34" charset="-128"/>
-              </a:rPr>
-              <a:t>SphereTrace</a:t>
-            </a:r>
-            <a:r>
-              <a:rPr lang="ko-KR" altLang="en-US" sz="1000" dirty="0" smtClean="0">
-                <a:solidFill>
-                  <a:schemeClr val="bg1">
-                    <a:lumMod val="95000"/>
-                  </a:schemeClr>
-                </a:solidFill>
-                <a:latin typeface="Noto Sans KR Medium" panose="020B0200000000000000" pitchFamily="34" charset="-128"/>
-                <a:ea typeface="Noto Sans KR Medium" panose="020B0200000000000000" pitchFamily="34" charset="-128"/>
-              </a:rPr>
-              <a:t>로 주변을 탐색합니다</a:t>
-            </a:r>
-            <a:r>
-              <a:rPr lang="en-US" altLang="ko-KR" sz="1000" dirty="0" smtClean="0">
-                <a:solidFill>
-                  <a:schemeClr val="bg1">
-                    <a:lumMod val="95000"/>
-                  </a:schemeClr>
-                </a:solidFill>
-                <a:latin typeface="Noto Sans KR Medium" panose="020B0200000000000000" pitchFamily="34" charset="-128"/>
-                <a:ea typeface="Noto Sans KR Medium" panose="020B0200000000000000" pitchFamily="34" charset="-128"/>
-              </a:rPr>
-              <a:t>.</a:t>
-            </a:r>
-            <a:endParaRPr lang="en-US" altLang="ko-KR" sz="1000" dirty="0">
-              <a:solidFill>
-                <a:schemeClr val="bg1">
-                  <a:lumMod val="95000"/>
-                </a:schemeClr>
-              </a:solidFill>
-              <a:latin typeface="Noto Sans KR Medium" panose="020B0200000000000000" pitchFamily="34" charset="-128"/>
-              <a:ea typeface="Noto Sans KR Medium" panose="020B0200000000000000" pitchFamily="34" charset="-128"/>
-            </a:endParaRPr>
-          </a:p>
-          <a:p>
-            <a:r>
-              <a:rPr lang="ko-KR" altLang="en-US" sz="1000" dirty="0" smtClean="0">
-                <a:solidFill>
-                  <a:schemeClr val="bg1">
-                    <a:lumMod val="95000"/>
-                  </a:schemeClr>
-                </a:solidFill>
-                <a:latin typeface="Noto Sans KR Medium" panose="020B0200000000000000" pitchFamily="34" charset="-128"/>
-                <a:ea typeface="Noto Sans KR Medium" panose="020B0200000000000000" pitchFamily="34" charset="-128"/>
-              </a:rPr>
-              <a:t>적을 발견하면 공격 상태로 전환합니다</a:t>
-            </a:r>
-            <a:r>
-              <a:rPr lang="en-US" altLang="ko-KR" sz="1000" dirty="0" smtClean="0">
-                <a:solidFill>
-                  <a:schemeClr val="bg1">
-                    <a:lumMod val="95000"/>
-                  </a:schemeClr>
-                </a:solidFill>
-                <a:latin typeface="Noto Sans KR Medium" panose="020B0200000000000000" pitchFamily="34" charset="-128"/>
-                <a:ea typeface="Noto Sans KR Medium" panose="020B0200000000000000" pitchFamily="34" charset="-128"/>
-              </a:rPr>
-              <a:t>.</a:t>
-            </a:r>
-          </a:p>
-          <a:p>
-            <a:pPr marL="171450" indent="-171450">
-              <a:buFontTx/>
-              <a:buChar char="-"/>
-            </a:pPr>
-            <a:endParaRPr lang="en-US" altLang="ko-KR" sz="1000" dirty="0" smtClean="0">
-              <a:solidFill>
-                <a:schemeClr val="bg1">
-                  <a:lumMod val="95000"/>
-                </a:schemeClr>
-              </a:solidFill>
-              <a:latin typeface="Noto Sans KR Medium" panose="020B0200000000000000" pitchFamily="34" charset="-128"/>
-              <a:ea typeface="Noto Sans KR Medium" panose="020B0200000000000000" pitchFamily="34" charset="-128"/>
-            </a:endParaRPr>
-          </a:p>
-          <a:p>
-            <a:r>
-              <a:rPr lang="ko-KR" altLang="en-US" sz="1000" dirty="0" smtClean="0">
-                <a:solidFill>
-                  <a:schemeClr val="bg1">
-                    <a:lumMod val="95000"/>
-                  </a:schemeClr>
-                </a:solidFill>
-                <a:latin typeface="Noto Sans KR Medium" panose="020B0200000000000000" pitchFamily="34" charset="-128"/>
-                <a:ea typeface="Noto Sans KR Medium" panose="020B0200000000000000" pitchFamily="34" charset="-128"/>
-              </a:rPr>
-              <a:t>공격 상태</a:t>
-            </a:r>
-            <a:endParaRPr lang="en-US" altLang="ko-KR" sz="1000" dirty="0" smtClean="0">
-              <a:solidFill>
-                <a:schemeClr val="bg1">
-                  <a:lumMod val="95000"/>
-                </a:schemeClr>
-              </a:solidFill>
-              <a:latin typeface="Noto Sans KR Medium" panose="020B0200000000000000" pitchFamily="34" charset="-128"/>
-              <a:ea typeface="Noto Sans KR Medium" panose="020B0200000000000000" pitchFamily="34" charset="-128"/>
-            </a:endParaRPr>
-          </a:p>
-          <a:p>
-            <a:r>
-              <a:rPr lang="ko-KR" altLang="en-US" sz="1000" dirty="0" err="1" smtClean="0">
-                <a:solidFill>
-                  <a:schemeClr val="bg1">
-                    <a:lumMod val="95000"/>
-                  </a:schemeClr>
-                </a:solidFill>
-                <a:latin typeface="Noto Sans KR Medium" panose="020B0200000000000000" pitchFamily="34" charset="-128"/>
-                <a:ea typeface="Noto Sans KR Medium" panose="020B0200000000000000" pitchFamily="34" charset="-128"/>
-              </a:rPr>
-              <a:t>타겟에게</a:t>
-            </a:r>
-            <a:r>
-              <a:rPr lang="ko-KR" altLang="en-US" sz="1000" dirty="0" smtClean="0">
-                <a:solidFill>
-                  <a:schemeClr val="bg1">
-                    <a:lumMod val="95000"/>
-                  </a:schemeClr>
-                </a:solidFill>
-                <a:latin typeface="Noto Sans KR Medium" panose="020B0200000000000000" pitchFamily="34" charset="-128"/>
-                <a:ea typeface="Noto Sans KR Medium" panose="020B0200000000000000" pitchFamily="34" charset="-128"/>
-              </a:rPr>
-              <a:t> 다가가며</a:t>
-            </a:r>
-            <a:r>
-              <a:rPr lang="en-US" altLang="ko-KR" sz="1000" dirty="0" smtClean="0">
-                <a:solidFill>
-                  <a:schemeClr val="bg1">
-                    <a:lumMod val="95000"/>
-                  </a:schemeClr>
-                </a:solidFill>
-                <a:latin typeface="Noto Sans KR Medium" panose="020B0200000000000000" pitchFamily="34" charset="-128"/>
-                <a:ea typeface="Noto Sans KR Medium" panose="020B0200000000000000" pitchFamily="34" charset="-128"/>
-              </a:rPr>
-              <a:t> </a:t>
-            </a:r>
-            <a:r>
-              <a:rPr lang="ko-KR" altLang="en-US" sz="1000" dirty="0" smtClean="0">
-                <a:solidFill>
-                  <a:schemeClr val="bg1">
-                    <a:lumMod val="95000"/>
-                  </a:schemeClr>
-                </a:solidFill>
-                <a:latin typeface="Noto Sans KR Medium" panose="020B0200000000000000" pitchFamily="34" charset="-128"/>
-                <a:ea typeface="Noto Sans KR Medium" panose="020B0200000000000000" pitchFamily="34" charset="-128"/>
-              </a:rPr>
-              <a:t>공격 범위 내일 때 공격합니다</a:t>
-            </a:r>
-            <a:r>
-              <a:rPr lang="en-US" altLang="ko-KR" sz="1000" dirty="0" smtClean="0">
-                <a:solidFill>
-                  <a:schemeClr val="bg1">
-                    <a:lumMod val="95000"/>
-                  </a:schemeClr>
-                </a:solidFill>
-                <a:latin typeface="Noto Sans KR Medium" panose="020B0200000000000000" pitchFamily="34" charset="-128"/>
-                <a:ea typeface="Noto Sans KR Medium" panose="020B0200000000000000" pitchFamily="34" charset="-128"/>
-              </a:rPr>
-              <a:t>.</a:t>
-            </a:r>
-            <a:endParaRPr lang="en-US" altLang="ko-KR" sz="1000" dirty="0">
-              <a:solidFill>
-                <a:schemeClr val="bg1">
-                  <a:lumMod val="95000"/>
-                </a:schemeClr>
-              </a:solidFill>
-              <a:latin typeface="Noto Sans KR Medium" panose="020B0200000000000000" pitchFamily="34" charset="-128"/>
-              <a:ea typeface="Noto Sans KR Medium" panose="020B0200000000000000" pitchFamily="34" charset="-128"/>
-            </a:endParaRPr>
-          </a:p>
-          <a:p>
-            <a:r>
-              <a:rPr lang="en-US" altLang="ko-KR" sz="1000" dirty="0" err="1" smtClean="0">
-                <a:solidFill>
-                  <a:schemeClr val="bg1">
-                    <a:lumMod val="95000"/>
-                  </a:schemeClr>
-                </a:solidFill>
-                <a:latin typeface="Noto Sans KR Medium" panose="020B0200000000000000" pitchFamily="34" charset="-128"/>
-                <a:ea typeface="Noto Sans KR Medium" panose="020B0200000000000000" pitchFamily="34" charset="-128"/>
-              </a:rPr>
-              <a:t>UBTTask</a:t>
-            </a:r>
-            <a:r>
-              <a:rPr lang="ko-KR" altLang="en-US" sz="1000" dirty="0" smtClean="0">
-                <a:solidFill>
-                  <a:schemeClr val="bg1">
-                    <a:lumMod val="95000"/>
-                  </a:schemeClr>
-                </a:solidFill>
-                <a:latin typeface="Noto Sans KR Medium" panose="020B0200000000000000" pitchFamily="34" charset="-128"/>
-                <a:ea typeface="Noto Sans KR Medium" panose="020B0200000000000000" pitchFamily="34" charset="-128"/>
-              </a:rPr>
-              <a:t>를 상속한 </a:t>
-            </a:r>
-            <a:r>
-              <a:rPr lang="en-US" altLang="ko-KR" sz="1000" dirty="0" err="1" smtClean="0">
-                <a:solidFill>
-                  <a:schemeClr val="bg1">
-                    <a:lumMod val="95000"/>
-                  </a:schemeClr>
-                </a:solidFill>
-                <a:latin typeface="Noto Sans KR Medium" panose="020B0200000000000000" pitchFamily="34" charset="-128"/>
-                <a:ea typeface="Noto Sans KR Medium" panose="020B0200000000000000" pitchFamily="34" charset="-128"/>
-              </a:rPr>
-              <a:t>UAttackTask</a:t>
-            </a:r>
-            <a:r>
-              <a:rPr lang="ko-KR" altLang="en-US" sz="1000" dirty="0" smtClean="0">
-                <a:solidFill>
-                  <a:schemeClr val="bg1">
-                    <a:lumMod val="95000"/>
-                  </a:schemeClr>
-                </a:solidFill>
-                <a:latin typeface="Noto Sans KR Medium" panose="020B0200000000000000" pitchFamily="34" charset="-128"/>
-                <a:ea typeface="Noto Sans KR Medium" panose="020B0200000000000000" pitchFamily="34" charset="-128"/>
-              </a:rPr>
-              <a:t>에서 </a:t>
-            </a:r>
-            <a:r>
-              <a:rPr lang="ko-KR" altLang="en-US" sz="1000" dirty="0" err="1" smtClean="0">
-                <a:solidFill>
-                  <a:schemeClr val="bg1">
-                    <a:lumMod val="95000"/>
-                  </a:schemeClr>
-                </a:solidFill>
-                <a:latin typeface="Noto Sans KR Medium" panose="020B0200000000000000" pitchFamily="34" charset="-128"/>
-                <a:ea typeface="Noto Sans KR Medium" panose="020B0200000000000000" pitchFamily="34" charset="-128"/>
-              </a:rPr>
-              <a:t>몬스터가</a:t>
-            </a:r>
-            <a:r>
-              <a:rPr lang="ko-KR" altLang="en-US" sz="1000" dirty="0" smtClean="0">
-                <a:solidFill>
-                  <a:schemeClr val="bg1">
-                    <a:lumMod val="95000"/>
-                  </a:schemeClr>
-                </a:solidFill>
-                <a:latin typeface="Noto Sans KR Medium" panose="020B0200000000000000" pitchFamily="34" charset="-128"/>
-                <a:ea typeface="Noto Sans KR Medium" panose="020B0200000000000000" pitchFamily="34" charset="-128"/>
-              </a:rPr>
-              <a:t> 가진 액션 중 랜덤으로 공격 액션을 수행하도록 구현했습니다</a:t>
-            </a:r>
-            <a:r>
-              <a:rPr lang="en-US" altLang="ko-KR" sz="1000" dirty="0" smtClean="0">
-                <a:solidFill>
-                  <a:schemeClr val="bg1">
-                    <a:lumMod val="95000"/>
-                  </a:schemeClr>
-                </a:solidFill>
-                <a:latin typeface="Noto Sans KR Medium" panose="020B0200000000000000" pitchFamily="34" charset="-128"/>
-                <a:ea typeface="Noto Sans KR Medium" panose="020B0200000000000000" pitchFamily="34" charset="-128"/>
-              </a:rPr>
-              <a:t>.</a:t>
-            </a:r>
-          </a:p>
-          <a:p>
-            <a:endParaRPr lang="en-US" altLang="ko-KR" sz="1000" dirty="0" smtClean="0">
-              <a:solidFill>
-                <a:schemeClr val="bg1">
-                  <a:lumMod val="95000"/>
-                </a:schemeClr>
-              </a:solidFill>
-              <a:latin typeface="Noto Sans KR Medium" panose="020B0200000000000000" pitchFamily="34" charset="-128"/>
-              <a:ea typeface="Noto Sans KR Medium" panose="020B0200000000000000" pitchFamily="34" charset="-128"/>
-            </a:endParaRPr>
-          </a:p>
-          <a:p>
-            <a:r>
-              <a:rPr lang="ko-KR" altLang="en-US" sz="1000" dirty="0" smtClean="0">
-                <a:solidFill>
-                  <a:schemeClr val="bg1">
-                    <a:lumMod val="95000"/>
-                  </a:schemeClr>
-                </a:solidFill>
-                <a:latin typeface="Noto Sans KR Medium" panose="020B0200000000000000" pitchFamily="34" charset="-128"/>
-                <a:ea typeface="Noto Sans KR Medium" panose="020B0200000000000000" pitchFamily="34" charset="-128"/>
-              </a:rPr>
-              <a:t>추적 불가한 경우 일정 시간 동안 적에게 다가가지 못하는 상황일 때</a:t>
-            </a:r>
-            <a:r>
-              <a:rPr lang="en-US" altLang="ko-KR" sz="1000" dirty="0" smtClean="0">
-                <a:solidFill>
-                  <a:schemeClr val="bg1">
-                    <a:lumMod val="95000"/>
-                  </a:schemeClr>
-                </a:solidFill>
-                <a:latin typeface="Noto Sans KR Medium" panose="020B0200000000000000" pitchFamily="34" charset="-128"/>
-                <a:ea typeface="Noto Sans KR Medium" panose="020B0200000000000000" pitchFamily="34" charset="-128"/>
-              </a:rPr>
-              <a:t>, </a:t>
-            </a:r>
-            <a:r>
-              <a:rPr lang="ko-KR" altLang="en-US" sz="1000" dirty="0" smtClean="0">
-                <a:solidFill>
-                  <a:schemeClr val="bg1">
-                    <a:lumMod val="95000"/>
-                  </a:schemeClr>
-                </a:solidFill>
-                <a:latin typeface="Noto Sans KR Medium" panose="020B0200000000000000" pitchFamily="34" charset="-128"/>
-                <a:ea typeface="Noto Sans KR Medium" panose="020B0200000000000000" pitchFamily="34" charset="-128"/>
-              </a:rPr>
-              <a:t>다시 일반 상태로 복귀합니다</a:t>
-            </a:r>
-            <a:r>
-              <a:rPr lang="en-US" altLang="ko-KR" sz="1000" dirty="0" smtClean="0">
-                <a:solidFill>
-                  <a:schemeClr val="bg1">
-                    <a:lumMod val="95000"/>
-                  </a:schemeClr>
-                </a:solidFill>
-                <a:latin typeface="Noto Sans KR Medium" panose="020B0200000000000000" pitchFamily="34" charset="-128"/>
-                <a:ea typeface="Noto Sans KR Medium" panose="020B0200000000000000" pitchFamily="34" charset="-128"/>
-              </a:rPr>
-              <a:t>.</a:t>
-            </a:r>
           </a:p>
         </p:txBody>
       </p:sp>
@@ -25985,6 +26031,257 @@
         <p:spPr>
           <a:xfrm>
             <a:off x="444751" y="1234126"/>
+            <a:ext cx="5376929" cy="246221"/>
+          </a:xfrm>
+          <a:prstGeom prst="rect">
+            <a:avLst/>
+          </a:prstGeom>
+        </p:spPr>
+        <p:txBody>
+          <a:bodyPr wrap="square">
+            <a:spAutoFit/>
+          </a:bodyPr>
+          <a:lstStyle/>
+          <a:p>
+            <a:r>
+              <a:rPr lang="en-US" altLang="ko-KR" sz="1000" dirty="0" err="1" smtClean="0">
+                <a:solidFill>
+                  <a:schemeClr val="bg1">
+                    <a:lumMod val="95000"/>
+                  </a:schemeClr>
+                </a:solidFill>
+                <a:latin typeface="Noto Sans KR ExtraBold" panose="020B0200000000000000" pitchFamily="34" charset="-128"/>
+                <a:ea typeface="Noto Sans KR ExtraBold" panose="020B0200000000000000" pitchFamily="34" charset="-128"/>
+              </a:rPr>
+              <a:t>BehaviorTree</a:t>
+            </a:r>
+            <a:endParaRPr lang="en-US" altLang="ko-KR" sz="1000" dirty="0" smtClean="0">
+              <a:solidFill>
+                <a:schemeClr val="bg1">
+                  <a:lumMod val="95000"/>
+                </a:schemeClr>
+              </a:solidFill>
+              <a:latin typeface="Noto Sans KR ExtraBold" panose="020B0200000000000000" pitchFamily="34" charset="-128"/>
+              <a:ea typeface="Noto Sans KR ExtraBold" panose="020B0200000000000000" pitchFamily="34" charset="-128"/>
+            </a:endParaRPr>
+          </a:p>
+        </p:txBody>
+      </p:sp>
+      <p:pic>
+        <p:nvPicPr>
+          <p:cNvPr id="2051" name="Picture 3"/>
+          <p:cNvPicPr>
+            <a:picLocks noChangeAspect="1" noChangeArrowheads="1"/>
+          </p:cNvPicPr>
+          <p:nvPr/>
+        </p:nvPicPr>
+        <p:blipFill>
+          <a:blip r:embed="rId3" cstate="print">
+            <a:extLst>
+              <a:ext uri="{28A0092B-C50C-407E-A947-70E740481C1C}">
+                <a14:useLocalDpi xmlns:a14="http://schemas.microsoft.com/office/drawing/2010/main" val="0"/>
+              </a:ext>
+            </a:extLst>
+          </a:blip>
+          <a:stretch>
+            <a:fillRect/>
+          </a:stretch>
+        </p:blipFill>
+        <p:spPr bwMode="auto">
+          <a:xfrm>
+            <a:off x="6599095" y="3069375"/>
+            <a:ext cx="4812244" cy="3567785"/>
+          </a:xfrm>
+          <a:prstGeom prst="rect">
+            <a:avLst/>
+          </a:prstGeom>
+          <a:noFill/>
+          <a:extLst>
+            <a:ext uri="{909E8E84-426E-40DD-AFC4-6F175D3DCCD1}">
+              <a14:hiddenFill xmlns:a14="http://schemas.microsoft.com/office/drawing/2010/main">
+                <a:solidFill>
+                  <a:srgbClr val="FFFFFF"/>
+                </a:solidFill>
+              </a14:hiddenFill>
+            </a:ext>
+          </a:extLst>
+        </p:spPr>
+      </p:pic>
+      <p:sp>
+        <p:nvSpPr>
+          <p:cNvPr id="10" name="직사각형 9"/>
+          <p:cNvSpPr/>
+          <p:nvPr/>
+        </p:nvSpPr>
+        <p:spPr>
+          <a:xfrm>
+            <a:off x="540000" y="3808094"/>
+            <a:ext cx="5555999" cy="2630805"/>
+          </a:xfrm>
+          <a:prstGeom prst="rect">
+            <a:avLst/>
+          </a:prstGeom>
+        </p:spPr>
+        <p:style>
+          <a:lnRef idx="2">
+            <a:schemeClr val="accent1">
+              <a:shade val="50000"/>
+            </a:schemeClr>
+          </a:lnRef>
+          <a:fillRef idx="1">
+            <a:schemeClr val="accent1"/>
+          </a:fillRef>
+          <a:effectRef idx="0">
+            <a:schemeClr val="accent1"/>
+          </a:effectRef>
+          <a:fontRef idx="minor">
+            <a:schemeClr val="lt1"/>
+          </a:fontRef>
+        </p:style>
+        <p:txBody>
+          <a:bodyPr rtlCol="0" anchor="ctr"/>
+          <a:lstStyle/>
+          <a:p>
+            <a:pPr algn="ctr"/>
+            <a:r>
+              <a:rPr lang="ko-KR" altLang="en-US" dirty="0" smtClean="0"/>
+              <a:t>일반 </a:t>
+            </a:r>
+            <a:r>
+              <a:rPr lang="ko-KR" altLang="en-US" dirty="0" err="1" smtClean="0"/>
+              <a:t>몬스터</a:t>
+            </a:r>
+            <a:r>
+              <a:rPr lang="ko-KR" altLang="en-US" dirty="0" smtClean="0"/>
+              <a:t> </a:t>
+            </a:r>
+            <a:r>
+              <a:rPr lang="en-US" altLang="ko-KR" dirty="0" smtClean="0"/>
+              <a:t>BT</a:t>
+            </a:r>
+            <a:endParaRPr lang="ko-KR" altLang="en-US" dirty="0"/>
+          </a:p>
+        </p:txBody>
+      </p:sp>
+      <p:pic>
+        <p:nvPicPr>
+          <p:cNvPr id="2053" name="Picture 5" descr="C:\Users\B-05\Downloads\carbon (7).png"/>
+          <p:cNvPicPr>
+            <a:picLocks noChangeAspect="1" noChangeArrowheads="1"/>
+          </p:cNvPicPr>
+          <p:nvPr/>
+        </p:nvPicPr>
+        <p:blipFill>
+          <a:blip r:embed="rId4" cstate="print">
+            <a:extLst>
+              <a:ext uri="{28A0092B-C50C-407E-A947-70E740481C1C}">
+                <a14:useLocalDpi xmlns:a14="http://schemas.microsoft.com/office/drawing/2010/main" val="0"/>
+              </a:ext>
+            </a:extLst>
+          </a:blip>
+          <a:srcRect/>
+          <a:stretch>
+            <a:fillRect/>
+          </a:stretch>
+        </p:blipFill>
+        <p:spPr bwMode="auto">
+          <a:xfrm>
+            <a:off x="6599095" y="302800"/>
+            <a:ext cx="4970605" cy="2647501"/>
+          </a:xfrm>
+          <a:prstGeom prst="rect">
+            <a:avLst/>
+          </a:prstGeom>
+          <a:noFill/>
+          <a:extLst>
+            <a:ext uri="{909E8E84-426E-40DD-AFC4-6F175D3DCCD1}">
+              <a14:hiddenFill xmlns:a14="http://schemas.microsoft.com/office/drawing/2010/main">
+                <a:solidFill>
+                  <a:srgbClr val="FFFFFF"/>
+                </a:solidFill>
+              </a14:hiddenFill>
+            </a:ext>
+          </a:extLst>
+        </p:spPr>
+      </p:pic>
+      <p:sp>
+        <p:nvSpPr>
+          <p:cNvPr id="12" name="직사각형 11"/>
+          <p:cNvSpPr/>
+          <p:nvPr/>
+        </p:nvSpPr>
+        <p:spPr>
+          <a:xfrm>
+            <a:off x="451099" y="2059243"/>
+            <a:ext cx="5651249" cy="246221"/>
+          </a:xfrm>
+          <a:prstGeom prst="rect">
+            <a:avLst/>
+          </a:prstGeom>
+        </p:spPr>
+        <p:txBody>
+          <a:bodyPr wrap="square">
+            <a:spAutoFit/>
+          </a:bodyPr>
+          <a:lstStyle/>
+          <a:p>
+            <a:r>
+              <a:rPr lang="en-US" altLang="ko-KR" sz="1000" dirty="0" err="1" smtClean="0">
+                <a:solidFill>
+                  <a:schemeClr val="bg1">
+                    <a:lumMod val="95000"/>
+                  </a:schemeClr>
+                </a:solidFill>
+                <a:latin typeface="Noto Sans KR Medium" panose="020B0200000000000000" pitchFamily="34" charset="-128"/>
+                <a:ea typeface="Noto Sans KR Medium" panose="020B0200000000000000" pitchFamily="34" charset="-128"/>
+              </a:rPr>
+              <a:t>BehaviorTree</a:t>
+            </a:r>
+            <a:r>
+              <a:rPr lang="ko-KR" altLang="en-US" sz="1000" dirty="0" smtClean="0">
+                <a:solidFill>
+                  <a:schemeClr val="bg1">
+                    <a:lumMod val="95000"/>
+                  </a:schemeClr>
+                </a:solidFill>
+                <a:latin typeface="Noto Sans KR Medium" panose="020B0200000000000000" pitchFamily="34" charset="-128"/>
+                <a:ea typeface="Noto Sans KR Medium" panose="020B0200000000000000" pitchFamily="34" charset="-128"/>
+              </a:rPr>
+              <a:t>를 활용하여 행동 양식을 구현했습니다</a:t>
+            </a:r>
+            <a:r>
+              <a:rPr lang="en-US" altLang="ko-KR" sz="1000" dirty="0" smtClean="0">
+                <a:solidFill>
+                  <a:schemeClr val="bg1">
+                    <a:lumMod val="95000"/>
+                  </a:schemeClr>
+                </a:solidFill>
+                <a:latin typeface="Noto Sans KR Medium" panose="020B0200000000000000" pitchFamily="34" charset="-128"/>
+                <a:ea typeface="Noto Sans KR Medium" panose="020B0200000000000000" pitchFamily="34" charset="-128"/>
+              </a:rPr>
+              <a:t>.</a:t>
+            </a:r>
+            <a:endParaRPr lang="en-US" altLang="ko-KR" sz="1000" dirty="0" smtClean="0">
+              <a:solidFill>
+                <a:schemeClr val="bg1">
+                  <a:lumMod val="95000"/>
+                </a:schemeClr>
+              </a:solidFill>
+              <a:latin typeface="Noto Sans KR Medium" panose="020B0200000000000000" pitchFamily="34" charset="-128"/>
+              <a:ea typeface="Noto Sans KR Medium" panose="020B0200000000000000" pitchFamily="34" charset="-128"/>
+            </a:endParaRPr>
+          </a:p>
+        </p:txBody>
+      </p:sp>
+      <p:sp>
+        <p:nvSpPr>
+          <p:cNvPr id="13" name="직사각형 12"/>
+          <p:cNvSpPr/>
+          <p:nvPr/>
+        </p:nvSpPr>
+        <p:spPr>
+          <a:xfrm>
+            <a:off x="454275" y="1813022"/>
             <a:ext cx="5376929" cy="246221"/>
           </a:xfrm>
           <a:prstGeom prst="rect">
@@ -26961,6 +27258,62 @@
           </a:p>
         </p:txBody>
       </p:sp>
+      <p:sp>
+        <p:nvSpPr>
+          <p:cNvPr id="7" name="직사각형 6"/>
+          <p:cNvSpPr/>
+          <p:nvPr/>
+        </p:nvSpPr>
+        <p:spPr>
+          <a:xfrm>
+            <a:off x="540000" y="3200400"/>
+            <a:ext cx="5555999" cy="3238499"/>
+          </a:xfrm>
+          <a:prstGeom prst="rect">
+            <a:avLst/>
+          </a:prstGeom>
+        </p:spPr>
+        <p:style>
+          <a:lnRef idx="2">
+            <a:schemeClr val="accent1">
+              <a:shade val="50000"/>
+            </a:schemeClr>
+          </a:lnRef>
+          <a:fillRef idx="1">
+            <a:schemeClr val="accent1"/>
+          </a:fillRef>
+          <a:effectRef idx="0">
+            <a:schemeClr val="accent1"/>
+          </a:effectRef>
+          <a:fontRef idx="minor">
+            <a:schemeClr val="lt1"/>
+          </a:fontRef>
+        </p:style>
+        <p:txBody>
+          <a:bodyPr rtlCol="0" anchor="ctr"/>
+          <a:lstStyle/>
+          <a:p>
+            <a:pPr algn="ctr"/>
+            <a:r>
+              <a:rPr lang="ko-KR" altLang="en-US" dirty="0" smtClean="0"/>
+              <a:t>보스 </a:t>
+            </a:r>
+            <a:r>
+              <a:rPr lang="ko-KR" altLang="en-US" dirty="0" err="1" smtClean="0"/>
+              <a:t>몬스터</a:t>
+            </a:r>
+            <a:r>
+              <a:rPr lang="ko-KR" altLang="en-US" dirty="0" smtClean="0"/>
+              <a:t> </a:t>
+            </a:r>
+            <a:r>
+              <a:rPr lang="en-US" altLang="ko-KR" dirty="0" smtClean="0"/>
+              <a:t>BT</a:t>
+            </a:r>
+            <a:endParaRPr lang="ko-KR" altLang="en-US" dirty="0"/>
+          </a:p>
+        </p:txBody>
+      </p:sp>
     </p:spTree>
     <p:extLst>
       <p:ext uri="{BB962C8B-B14F-4D97-AF65-F5344CB8AC3E}">
@@ -27784,31 +28137,19 @@
                 <a:latin typeface="Noto Sans KR Medium" panose="020B0200000000000000" pitchFamily="34" charset="-128"/>
                 <a:ea typeface="Noto Sans KR Medium" panose="020B0200000000000000" pitchFamily="34" charset="-128"/>
               </a:rPr>
-              <a:t>불가한 경우</a:t>
-            </a:r>
-            <a:r>
-              <a:rPr lang="en-US" altLang="ko-KR" sz="1000" dirty="0" smtClean="0">
-                <a:solidFill>
-                  <a:schemeClr val="bg1">
-                    <a:lumMod val="95000"/>
-                  </a:schemeClr>
-                </a:solidFill>
-                <a:latin typeface="Noto Sans KR Medium" panose="020B0200000000000000" pitchFamily="34" charset="-128"/>
-                <a:ea typeface="Noto Sans KR Medium" panose="020B0200000000000000" pitchFamily="34" charset="-128"/>
-              </a:rPr>
-              <a:t>,</a:t>
-            </a:r>
-            <a:r>
-              <a:rPr lang="ko-KR" altLang="en-US" sz="1000" dirty="0" smtClean="0">
-                <a:solidFill>
-                  <a:schemeClr val="bg1">
-                    <a:lumMod val="95000"/>
-                  </a:schemeClr>
-                </a:solidFill>
-                <a:latin typeface="Noto Sans KR Medium" panose="020B0200000000000000" pitchFamily="34" charset="-128"/>
-                <a:ea typeface="Noto Sans KR Medium" panose="020B0200000000000000" pitchFamily="34" charset="-128"/>
-              </a:rPr>
-              <a:t> </a:t>
+              <a:t>불가한 </a:t>
+            </a:r>
+            <a:r>
+              <a:rPr lang="ko-KR" altLang="en-US" sz="1000" dirty="0" smtClean="0">
+                <a:solidFill>
+                  <a:schemeClr val="bg1">
+                    <a:lumMod val="95000"/>
+                  </a:schemeClr>
+                </a:solidFill>
+                <a:latin typeface="Noto Sans KR Medium" panose="020B0200000000000000" pitchFamily="34" charset="-128"/>
+                <a:ea typeface="Noto Sans KR Medium" panose="020B0200000000000000" pitchFamily="34" charset="-128"/>
+              </a:rPr>
+              <a:t>경우 </a:t>
             </a:r>
             <a:r>
               <a:rPr lang="ko-KR" altLang="en-US" sz="1000" dirty="0" err="1" smtClean="0">
@@ -32975,7 +33316,7 @@
         <p:spPr>
           <a:xfrm>
             <a:off x="454275" y="710906"/>
-            <a:ext cx="3733714" cy="523220"/>
+            <a:ext cx="4233851" cy="523220"/>
           </a:xfrm>
           <a:prstGeom prst="rect">
             <a:avLst/>
@@ -33020,7 +33361,7 @@
                 <a:latin typeface="Noto Sans KR ExtraBold" panose="020B0200000000000000" pitchFamily="34" charset="-128"/>
                 <a:ea typeface="Noto Sans KR ExtraBold" panose="020B0200000000000000" pitchFamily="34" charset="-128"/>
               </a:rPr>
-              <a:t>Game </a:t>
+              <a:t>Gameplay </a:t>
             </a:r>
             <a:r>
               <a:rPr lang="en-US" altLang="ko-KR" dirty="0">
@@ -33125,7 +33466,19 @@
                 <a:latin typeface="Noto Sans KR Medium" panose="020B0200000000000000" pitchFamily="34" charset="-128"/>
                 <a:ea typeface="Noto Sans KR Medium" panose="020B0200000000000000" pitchFamily="34" charset="-128"/>
               </a:rPr>
-              <a:t>Game Ability System(</a:t>
+              <a:t>Gameplay </a:t>
+            </a:r>
+            <a:r>
+              <a:rPr lang="en-US" altLang="ko-KR" sz="1000" dirty="0" smtClean="0">
+                <a:solidFill>
+                  <a:schemeClr val="bg1">
+                    <a:lumMod val="95000"/>
+                  </a:schemeClr>
+                </a:solidFill>
+                <a:latin typeface="Noto Sans KR Medium" panose="020B0200000000000000" pitchFamily="34" charset="-128"/>
+                <a:ea typeface="Noto Sans KR Medium" panose="020B0200000000000000" pitchFamily="34" charset="-128"/>
+              </a:rPr>
+              <a:t>Ability System(</a:t>
             </a:r>
             <a:r>
               <a:rPr lang="ko-KR" altLang="en-US" sz="1000" dirty="0" smtClean="0">
@@ -33209,6 +33562,175 @@
             </a:endParaRPr>
           </a:p>
           <a:p>
+            <a:endParaRPr lang="en-US" altLang="ko-KR" sz="1000" dirty="0" smtClean="0">
+              <a:solidFill>
+                <a:schemeClr val="bg1">
+                  <a:lumMod val="95000"/>
+                </a:schemeClr>
+              </a:solidFill>
+              <a:latin typeface="Noto Sans KR Medium" panose="020B0200000000000000" pitchFamily="34" charset="-128"/>
+              <a:ea typeface="Noto Sans KR Medium" panose="020B0200000000000000" pitchFamily="34" charset="-128"/>
+            </a:endParaRPr>
+          </a:p>
+          <a:p>
+            <a:r>
+              <a:rPr lang="ko-KR" altLang="en-US" sz="1000" dirty="0" smtClean="0">
+                <a:solidFill>
+                  <a:schemeClr val="bg1">
+                    <a:lumMod val="95000"/>
+                  </a:schemeClr>
+                </a:solidFill>
+                <a:latin typeface="Noto Sans KR Medium" panose="020B0200000000000000" pitchFamily="34" charset="-128"/>
+                <a:ea typeface="Noto Sans KR Medium" panose="020B0200000000000000" pitchFamily="34" charset="-128"/>
+              </a:rPr>
+              <a:t>엔진 단에서 이미 지원하는 기능이 있다는 것을 모른 상태로 개발을 진행한 것이</a:t>
+            </a:r>
+            <a:r>
+              <a:rPr lang="en-US" altLang="ko-KR" sz="1000" dirty="0">
+                <a:solidFill>
+                  <a:schemeClr val="bg1">
+                    <a:lumMod val="95000"/>
+                  </a:schemeClr>
+                </a:solidFill>
+                <a:latin typeface="Noto Sans KR Medium" panose="020B0200000000000000" pitchFamily="34" charset="-128"/>
+                <a:ea typeface="Noto Sans KR Medium" panose="020B0200000000000000" pitchFamily="34" charset="-128"/>
+              </a:rPr>
+              <a:t> </a:t>
+            </a:r>
+            <a:r>
+              <a:rPr lang="ko-KR" altLang="en-US" sz="1000" dirty="0" smtClean="0">
+                <a:solidFill>
+                  <a:schemeClr val="bg1">
+                    <a:lumMod val="95000"/>
+                  </a:schemeClr>
+                </a:solidFill>
+                <a:latin typeface="Noto Sans KR Medium" panose="020B0200000000000000" pitchFamily="34" charset="-128"/>
+                <a:ea typeface="Noto Sans KR Medium" panose="020B0200000000000000" pitchFamily="34" charset="-128"/>
+              </a:rPr>
+              <a:t>엔진을 사용하는 장점을 져버렸다는 점이 아쉬웠습니다</a:t>
+            </a:r>
+            <a:r>
+              <a:rPr lang="en-US" altLang="ko-KR" sz="1000" dirty="0" smtClean="0">
+                <a:solidFill>
+                  <a:schemeClr val="bg1">
+                    <a:lumMod val="95000"/>
+                  </a:schemeClr>
+                </a:solidFill>
+                <a:latin typeface="Noto Sans KR Medium" panose="020B0200000000000000" pitchFamily="34" charset="-128"/>
+                <a:ea typeface="Noto Sans KR Medium" panose="020B0200000000000000" pitchFamily="34" charset="-128"/>
+              </a:rPr>
+              <a:t>.</a:t>
+            </a:r>
+          </a:p>
+          <a:p>
+            <a:r>
+              <a:rPr lang="ko-KR" altLang="en-US" sz="1000" dirty="0" smtClean="0">
+                <a:solidFill>
+                  <a:schemeClr val="bg1">
+                    <a:lumMod val="95000"/>
+                  </a:schemeClr>
+                </a:solidFill>
+                <a:latin typeface="Noto Sans KR Medium" panose="020B0200000000000000" pitchFamily="34" charset="-128"/>
+                <a:ea typeface="Noto Sans KR Medium" panose="020B0200000000000000" pitchFamily="34" charset="-128"/>
+              </a:rPr>
+              <a:t>그 점을 반성하고자</a:t>
+            </a:r>
+            <a:r>
+              <a:rPr lang="en-US" altLang="ko-KR" sz="1000" dirty="0">
+                <a:solidFill>
+                  <a:schemeClr val="bg1">
+                    <a:lumMod val="95000"/>
+                  </a:schemeClr>
+                </a:solidFill>
+                <a:latin typeface="Noto Sans KR Medium" panose="020B0200000000000000" pitchFamily="34" charset="-128"/>
+                <a:ea typeface="Noto Sans KR Medium" panose="020B0200000000000000" pitchFamily="34" charset="-128"/>
+              </a:rPr>
+              <a:t> </a:t>
+            </a:r>
+            <a:r>
+              <a:rPr lang="en-US" altLang="ko-KR" sz="1000" dirty="0" smtClean="0">
+                <a:solidFill>
+                  <a:schemeClr val="bg1">
+                    <a:lumMod val="95000"/>
+                  </a:schemeClr>
+                </a:solidFill>
+                <a:latin typeface="Noto Sans KR Medium" panose="020B0200000000000000" pitchFamily="34" charset="-128"/>
+                <a:ea typeface="Noto Sans KR Medium" panose="020B0200000000000000" pitchFamily="34" charset="-128"/>
+              </a:rPr>
+              <a:t>GAS</a:t>
+            </a:r>
+            <a:r>
+              <a:rPr lang="ko-KR" altLang="en-US" sz="1000" dirty="0" smtClean="0">
+                <a:solidFill>
+                  <a:schemeClr val="bg1">
+                    <a:lumMod val="95000"/>
+                  </a:schemeClr>
+                </a:solidFill>
+                <a:latin typeface="Noto Sans KR Medium" panose="020B0200000000000000" pitchFamily="34" charset="-128"/>
+                <a:ea typeface="Noto Sans KR Medium" panose="020B0200000000000000" pitchFamily="34" charset="-128"/>
+              </a:rPr>
+              <a:t>에 대해 학습하고</a:t>
+            </a:r>
+            <a:r>
+              <a:rPr lang="en-US" altLang="ko-KR" sz="1000" dirty="0">
+                <a:solidFill>
+                  <a:schemeClr val="bg1">
+                    <a:lumMod val="95000"/>
+                  </a:schemeClr>
+                </a:solidFill>
+                <a:latin typeface="Noto Sans KR Medium" panose="020B0200000000000000" pitchFamily="34" charset="-128"/>
+                <a:ea typeface="Noto Sans KR Medium" panose="020B0200000000000000" pitchFamily="34" charset="-128"/>
+              </a:rPr>
+              <a:t> </a:t>
+            </a:r>
+            <a:r>
+              <a:rPr lang="ko-KR" altLang="en-US" sz="1000" dirty="0" smtClean="0">
+                <a:solidFill>
+                  <a:schemeClr val="bg1">
+                    <a:lumMod val="95000"/>
+                  </a:schemeClr>
+                </a:solidFill>
+                <a:latin typeface="Noto Sans KR Medium" panose="020B0200000000000000" pitchFamily="34" charset="-128"/>
+                <a:ea typeface="Noto Sans KR Medium" panose="020B0200000000000000" pitchFamily="34" charset="-128"/>
+              </a:rPr>
+              <a:t>현재 프로젝트 </a:t>
+            </a:r>
+            <a:r>
+              <a:rPr lang="en-US" altLang="ko-KR" sz="1000" dirty="0" smtClean="0">
+                <a:solidFill>
+                  <a:schemeClr val="bg1">
+                    <a:lumMod val="95000"/>
+                  </a:schemeClr>
+                </a:solidFill>
+                <a:latin typeface="Noto Sans KR Medium" panose="020B0200000000000000" pitchFamily="34" charset="-128"/>
+                <a:ea typeface="Noto Sans KR Medium" panose="020B0200000000000000" pitchFamily="34" charset="-128"/>
+              </a:rPr>
+              <a:t>GAS</a:t>
+            </a:r>
+            <a:r>
+              <a:rPr lang="ko-KR" altLang="en-US" sz="1000" dirty="0" smtClean="0">
+                <a:solidFill>
+                  <a:schemeClr val="bg1">
+                    <a:lumMod val="95000"/>
+                  </a:schemeClr>
+                </a:solidFill>
+                <a:latin typeface="Noto Sans KR Medium" panose="020B0200000000000000" pitchFamily="34" charset="-128"/>
+                <a:ea typeface="Noto Sans KR Medium" panose="020B0200000000000000" pitchFamily="34" charset="-128"/>
+              </a:rPr>
+              <a:t>를 적용한다면 어떤 식으로 작업할지 정리해보았습니다</a:t>
+            </a:r>
+            <a:r>
+              <a:rPr lang="en-US" altLang="ko-KR" sz="1000" dirty="0" smtClean="0">
+                <a:solidFill>
+                  <a:schemeClr val="bg1">
+                    <a:lumMod val="95000"/>
+                  </a:schemeClr>
+                </a:solidFill>
+                <a:latin typeface="Noto Sans KR Medium" panose="020B0200000000000000" pitchFamily="34" charset="-128"/>
+                <a:ea typeface="Noto Sans KR Medium" panose="020B0200000000000000" pitchFamily="34" charset="-128"/>
+              </a:rPr>
+              <a:t>.</a:t>
+            </a:r>
             <a:endParaRPr lang="en-US" altLang="ko-KR" sz="1000" dirty="0">
               <a:solidFill>
                 <a:schemeClr val="bg1">
@@ -33219,54 +33741,145 @@
               <a:ea typeface="Noto Sans KR Medium" panose="020B0200000000000000" pitchFamily="34" charset="-128"/>
             </a:endParaRPr>
           </a:p>
-          <a:p>
-            <a:r>
-              <a:rPr lang="ko-KR" altLang="en-US" sz="1000" dirty="0" smtClean="0">
-                <a:solidFill>
-                  <a:schemeClr val="bg1">
-                    <a:lumMod val="95000"/>
-                  </a:schemeClr>
-                </a:solidFill>
-                <a:latin typeface="Noto Sans KR Medium" panose="020B0200000000000000" pitchFamily="34" charset="-128"/>
-                <a:ea typeface="Noto Sans KR Medium" panose="020B0200000000000000" pitchFamily="34" charset="-128"/>
-              </a:rPr>
-              <a:t>구조를 </a:t>
-            </a:r>
-            <a:r>
-              <a:rPr lang="en-US" altLang="ko-KR" sz="1000" dirty="0" smtClean="0">
-                <a:solidFill>
-                  <a:schemeClr val="bg1">
-                    <a:lumMod val="95000"/>
-                  </a:schemeClr>
-                </a:solidFill>
-                <a:latin typeface="Noto Sans KR Medium" panose="020B0200000000000000" pitchFamily="34" charset="-128"/>
-                <a:ea typeface="Noto Sans KR Medium" panose="020B0200000000000000" pitchFamily="34" charset="-128"/>
-              </a:rPr>
-              <a:t>GAS</a:t>
-            </a:r>
-            <a:r>
-              <a:rPr lang="ko-KR" altLang="en-US" sz="1000" dirty="0" smtClean="0">
-                <a:solidFill>
-                  <a:schemeClr val="bg1">
-                    <a:lumMod val="95000"/>
-                  </a:schemeClr>
-                </a:solidFill>
-                <a:latin typeface="Noto Sans KR Medium" panose="020B0200000000000000" pitchFamily="34" charset="-128"/>
-                <a:ea typeface="Noto Sans KR Medium" panose="020B0200000000000000" pitchFamily="34" charset="-128"/>
-              </a:rPr>
-              <a:t>로 변경한다면 어떻게 변경할지 </a:t>
-            </a:r>
-            <a:r>
-              <a:rPr lang="ko-KR" altLang="en-US" sz="1000" dirty="0" smtClean="0">
-                <a:solidFill>
-                  <a:schemeClr val="bg1">
-                    <a:lumMod val="95000"/>
-                  </a:schemeClr>
-                </a:solidFill>
-                <a:latin typeface="Noto Sans KR Medium" panose="020B0200000000000000" pitchFamily="34" charset="-128"/>
-                <a:ea typeface="Noto Sans KR Medium" panose="020B0200000000000000" pitchFamily="34" charset="-128"/>
-              </a:rPr>
-              <a:t>정리</a:t>
+        </p:txBody>
+      </p:sp>
+      <p:sp>
+        <p:nvSpPr>
+          <p:cNvPr id="6" name="직사각형 5"/>
+          <p:cNvSpPr/>
+          <p:nvPr/>
+        </p:nvSpPr>
+        <p:spPr>
+          <a:xfrm>
+            <a:off x="454275" y="2120828"/>
+            <a:ext cx="3340979" cy="246221"/>
+          </a:xfrm>
+          <a:prstGeom prst="rect">
+            <a:avLst/>
+          </a:prstGeom>
+        </p:spPr>
+        <p:txBody>
+          <a:bodyPr wrap="none">
+            <a:spAutoFit/>
+          </a:bodyPr>
+          <a:lstStyle/>
+          <a:p>
+            <a:r>
+              <a:rPr lang="en-US" altLang="ko-KR" sz="1000" dirty="0" err="1" smtClean="0">
+                <a:solidFill>
+                  <a:schemeClr val="bg1">
+                    <a:lumMod val="95000"/>
+                  </a:schemeClr>
+                </a:solidFill>
+                <a:latin typeface="Noto Sans KR ExtraBold" panose="020B0200000000000000" pitchFamily="34" charset="-128"/>
+                <a:ea typeface="Noto Sans KR ExtraBold" panose="020B0200000000000000" pitchFamily="34" charset="-128"/>
+              </a:rPr>
+              <a:t>UStatComponent</a:t>
+            </a:r>
+            <a:r>
+              <a:rPr lang="en-US" altLang="ko-KR" sz="1000" dirty="0" smtClean="0">
+                <a:solidFill>
+                  <a:schemeClr val="bg1">
+                    <a:lumMod val="95000"/>
+                  </a:schemeClr>
+                </a:solidFill>
+                <a:latin typeface="Noto Sans KR ExtraBold" panose="020B0200000000000000" pitchFamily="34" charset="-128"/>
+                <a:ea typeface="Noto Sans KR ExtraBold" panose="020B0200000000000000" pitchFamily="34" charset="-128"/>
+              </a:rPr>
+              <a:t> </a:t>
+            </a:r>
+            <a:r>
+              <a:rPr lang="ko-KR" altLang="en-US" sz="1000" dirty="0" smtClean="0">
+                <a:solidFill>
+                  <a:schemeClr val="bg1">
+                    <a:lumMod val="95000"/>
+                  </a:schemeClr>
+                </a:solidFill>
+                <a:latin typeface="Noto Sans KR ExtraBold" panose="020B0200000000000000" pitchFamily="34" charset="-128"/>
+                <a:ea typeface="Noto Sans KR ExtraBold" panose="020B0200000000000000" pitchFamily="34" charset="-128"/>
+              </a:rPr>
+              <a:t>대응 </a:t>
+            </a:r>
+            <a:r>
+              <a:rPr lang="en-US" altLang="ko-KR" sz="1000" dirty="0" err="1" smtClean="0">
+                <a:solidFill>
+                  <a:schemeClr val="bg1">
+                    <a:lumMod val="95000"/>
+                  </a:schemeClr>
+                </a:solidFill>
+                <a:latin typeface="Noto Sans KR ExtraBold" panose="020B0200000000000000" pitchFamily="34" charset="-128"/>
+                <a:ea typeface="Noto Sans KR ExtraBold" panose="020B0200000000000000" pitchFamily="34" charset="-128"/>
+              </a:rPr>
+              <a:t>UAbilitySystemComponent</a:t>
+            </a:r>
+            <a:endParaRPr lang="en-US" altLang="ko-KR" sz="1000" dirty="0">
+              <a:solidFill>
+                <a:schemeClr val="bg1">
+                  <a:lumMod val="95000"/>
+                </a:schemeClr>
+              </a:solidFill>
+              <a:latin typeface="Noto Sans KR ExtraBold" panose="020B0200000000000000" pitchFamily="34" charset="-128"/>
+              <a:ea typeface="Noto Sans KR ExtraBold" panose="020B0200000000000000" pitchFamily="34" charset="-128"/>
+            </a:endParaRPr>
+          </a:p>
+        </p:txBody>
+      </p:sp>
+      <p:sp>
+        <p:nvSpPr>
+          <p:cNvPr id="7" name="직사각형 6"/>
+          <p:cNvSpPr/>
+          <p:nvPr/>
+        </p:nvSpPr>
+        <p:spPr>
+          <a:xfrm>
+            <a:off x="454275" y="2367049"/>
+            <a:ext cx="8755039" cy="246221"/>
+          </a:xfrm>
+          <a:prstGeom prst="rect">
+            <a:avLst/>
+          </a:prstGeom>
+        </p:spPr>
+        <p:txBody>
+          <a:bodyPr wrap="square">
+            <a:spAutoFit/>
+          </a:bodyPr>
+          <a:lstStyle/>
+          <a:p>
+            <a:r>
+              <a:rPr lang="ko-KR" altLang="en-US" sz="1000" dirty="0" smtClean="0">
+                <a:solidFill>
+                  <a:schemeClr val="bg1">
+                    <a:lumMod val="95000"/>
+                  </a:schemeClr>
+                </a:solidFill>
+                <a:latin typeface="Noto Sans KR Medium" panose="020B0200000000000000" pitchFamily="34" charset="-128"/>
+                <a:ea typeface="Noto Sans KR Medium" panose="020B0200000000000000" pitchFamily="34" charset="-128"/>
+              </a:rPr>
+              <a:t>각</a:t>
+            </a:r>
+            <a:r>
+              <a:rPr lang="en-US" altLang="ko-KR" sz="1000" dirty="0" smtClean="0">
+                <a:solidFill>
+                  <a:schemeClr val="bg1">
+                    <a:lumMod val="95000"/>
+                  </a:schemeClr>
+                </a:solidFill>
+                <a:latin typeface="Noto Sans KR Medium" panose="020B0200000000000000" pitchFamily="34" charset="-128"/>
+                <a:ea typeface="Noto Sans KR Medium" panose="020B0200000000000000" pitchFamily="34" charset="-128"/>
+              </a:rPr>
+              <a:t> </a:t>
+            </a:r>
+            <a:r>
+              <a:rPr lang="ko-KR" altLang="en-US" sz="1000" dirty="0" smtClean="0">
+                <a:solidFill>
+                  <a:schemeClr val="bg1">
+                    <a:lumMod val="95000"/>
+                  </a:schemeClr>
+                </a:solidFill>
+                <a:latin typeface="Noto Sans KR Medium" panose="020B0200000000000000" pitchFamily="34" charset="-128"/>
+                <a:ea typeface="Noto Sans KR Medium" panose="020B0200000000000000" pitchFamily="34" charset="-128"/>
+              </a:rPr>
+              <a:t>주요 클래스들의 대응 클래스</a:t>
             </a:r>
             <a:endParaRPr lang="en-US" altLang="ko-KR" sz="1000" dirty="0" smtClean="0">
               <a:solidFill>
@@ -33278,18 +33891,469 @@
               <a:ea typeface="Noto Sans KR Medium" panose="020B0200000000000000" pitchFamily="34" charset="-128"/>
             </a:endParaRPr>
           </a:p>
-          <a:p>
-            <a:r>
-              <a:rPr lang="ko-KR" altLang="en-US" sz="1000" dirty="0" smtClean="0">
-                <a:solidFill>
-                  <a:schemeClr val="bg1">
-                    <a:lumMod val="95000"/>
-                  </a:schemeClr>
-                </a:solidFill>
-                <a:latin typeface="Noto Sans KR Medium" panose="020B0200000000000000" pitchFamily="34" charset="-128"/>
-                <a:ea typeface="Noto Sans KR Medium" panose="020B0200000000000000" pitchFamily="34" charset="-128"/>
-              </a:rPr>
-              <a:t>내용 정리 중</a:t>
+        </p:txBody>
+      </p:sp>
+      <p:sp>
+        <p:nvSpPr>
+          <p:cNvPr id="8" name="직사각형 7"/>
+          <p:cNvSpPr/>
+          <p:nvPr/>
+        </p:nvSpPr>
+        <p:spPr>
+          <a:xfrm>
+            <a:off x="454275" y="3105712"/>
+            <a:ext cx="2079415" cy="246221"/>
+          </a:xfrm>
+          <a:prstGeom prst="rect">
+            <a:avLst/>
+          </a:prstGeom>
+        </p:spPr>
+        <p:txBody>
+          <a:bodyPr wrap="none">
+            <a:spAutoFit/>
+          </a:bodyPr>
+          <a:lstStyle/>
+          <a:p>
+            <a:r>
+              <a:rPr lang="en-US" altLang="ko-KR" sz="1000" dirty="0" err="1" smtClean="0">
+                <a:solidFill>
+                  <a:schemeClr val="bg1">
+                    <a:lumMod val="95000"/>
+                  </a:schemeClr>
+                </a:solidFill>
+                <a:latin typeface="Noto Sans KR ExtraBold" panose="020B0200000000000000" pitchFamily="34" charset="-128"/>
+                <a:ea typeface="Noto Sans KR ExtraBold" panose="020B0200000000000000" pitchFamily="34" charset="-128"/>
+              </a:rPr>
+              <a:t>UEffect</a:t>
+            </a:r>
+            <a:r>
+              <a:rPr lang="en-US" altLang="ko-KR" sz="1000" dirty="0" smtClean="0">
+                <a:solidFill>
+                  <a:schemeClr val="bg1">
+                    <a:lumMod val="95000"/>
+                  </a:schemeClr>
+                </a:solidFill>
+                <a:latin typeface="Noto Sans KR ExtraBold" panose="020B0200000000000000" pitchFamily="34" charset="-128"/>
+                <a:ea typeface="Noto Sans KR ExtraBold" panose="020B0200000000000000" pitchFamily="34" charset="-128"/>
+              </a:rPr>
+              <a:t> </a:t>
+            </a:r>
+            <a:r>
+              <a:rPr lang="ko-KR" altLang="en-US" sz="1000" dirty="0" smtClean="0">
+                <a:solidFill>
+                  <a:schemeClr val="bg1">
+                    <a:lumMod val="95000"/>
+                  </a:schemeClr>
+                </a:solidFill>
+                <a:latin typeface="Noto Sans KR ExtraBold" panose="020B0200000000000000" pitchFamily="34" charset="-128"/>
+                <a:ea typeface="Noto Sans KR ExtraBold" panose="020B0200000000000000" pitchFamily="34" charset="-128"/>
+              </a:rPr>
+              <a:t>대응 </a:t>
+            </a:r>
+            <a:r>
+              <a:rPr lang="en-US" altLang="ko-KR" sz="1000" dirty="0" err="1" smtClean="0">
+                <a:solidFill>
+                  <a:schemeClr val="bg1">
+                    <a:lumMod val="95000"/>
+                  </a:schemeClr>
+                </a:solidFill>
+                <a:latin typeface="Noto Sans KR ExtraBold" panose="020B0200000000000000" pitchFamily="34" charset="-128"/>
+                <a:ea typeface="Noto Sans KR ExtraBold" panose="020B0200000000000000" pitchFamily="34" charset="-128"/>
+              </a:rPr>
+              <a:t>UGameplayEffect</a:t>
+            </a:r>
+            <a:endParaRPr lang="en-US" altLang="ko-KR" sz="1000" dirty="0">
+              <a:solidFill>
+                <a:schemeClr val="bg1">
+                  <a:lumMod val="95000"/>
+                </a:schemeClr>
+              </a:solidFill>
+              <a:latin typeface="Noto Sans KR ExtraBold" panose="020B0200000000000000" pitchFamily="34" charset="-128"/>
+              <a:ea typeface="Noto Sans KR ExtraBold" panose="020B0200000000000000" pitchFamily="34" charset="-128"/>
+            </a:endParaRPr>
+          </a:p>
+        </p:txBody>
+      </p:sp>
+      <p:sp>
+        <p:nvSpPr>
+          <p:cNvPr id="9" name="직사각형 8"/>
+          <p:cNvSpPr/>
+          <p:nvPr/>
+        </p:nvSpPr>
+        <p:spPr>
+          <a:xfrm>
+            <a:off x="454275" y="3351933"/>
+            <a:ext cx="8755039" cy="246221"/>
+          </a:xfrm>
+          <a:prstGeom prst="rect">
+            <a:avLst/>
+          </a:prstGeom>
+        </p:spPr>
+        <p:txBody>
+          <a:bodyPr wrap="square">
+            <a:spAutoFit/>
+          </a:bodyPr>
+          <a:lstStyle/>
+          <a:p>
+            <a:r>
+              <a:rPr lang="ko-KR" altLang="en-US" sz="1000" dirty="0" smtClean="0">
+                <a:solidFill>
+                  <a:schemeClr val="bg1">
+                    <a:lumMod val="95000"/>
+                  </a:schemeClr>
+                </a:solidFill>
+                <a:latin typeface="Noto Sans KR Medium" panose="020B0200000000000000" pitchFamily="34" charset="-128"/>
+                <a:ea typeface="Noto Sans KR Medium" panose="020B0200000000000000" pitchFamily="34" charset="-128"/>
+              </a:rPr>
+              <a:t>각</a:t>
+            </a:r>
+            <a:r>
+              <a:rPr lang="en-US" altLang="ko-KR" sz="1000" dirty="0" smtClean="0">
+                <a:solidFill>
+                  <a:schemeClr val="bg1">
+                    <a:lumMod val="95000"/>
+                  </a:schemeClr>
+                </a:solidFill>
+                <a:latin typeface="Noto Sans KR Medium" panose="020B0200000000000000" pitchFamily="34" charset="-128"/>
+                <a:ea typeface="Noto Sans KR Medium" panose="020B0200000000000000" pitchFamily="34" charset="-128"/>
+              </a:rPr>
+              <a:t> </a:t>
+            </a:r>
+            <a:r>
+              <a:rPr lang="ko-KR" altLang="en-US" sz="1000" dirty="0" smtClean="0">
+                <a:solidFill>
+                  <a:schemeClr val="bg1">
+                    <a:lumMod val="95000"/>
+                  </a:schemeClr>
+                </a:solidFill>
+                <a:latin typeface="Noto Sans KR Medium" panose="020B0200000000000000" pitchFamily="34" charset="-128"/>
+                <a:ea typeface="Noto Sans KR Medium" panose="020B0200000000000000" pitchFamily="34" charset="-128"/>
+              </a:rPr>
+              <a:t>주요 클래스들의 대응 클래스</a:t>
+            </a:r>
+            <a:endParaRPr lang="en-US" altLang="ko-KR" sz="1000" dirty="0" smtClean="0">
+              <a:solidFill>
+                <a:schemeClr val="bg1">
+                  <a:lumMod val="95000"/>
+                </a:schemeClr>
+              </a:solidFill>
+              <a:latin typeface="Noto Sans KR Medium" panose="020B0200000000000000" pitchFamily="34" charset="-128"/>
+              <a:ea typeface="Noto Sans KR Medium" panose="020B0200000000000000" pitchFamily="34" charset="-128"/>
+            </a:endParaRPr>
+          </a:p>
+        </p:txBody>
+      </p:sp>
+      <p:sp>
+        <p:nvSpPr>
+          <p:cNvPr id="10" name="직사각형 9"/>
+          <p:cNvSpPr/>
+          <p:nvPr/>
+        </p:nvSpPr>
+        <p:spPr>
+          <a:xfrm>
+            <a:off x="454275" y="3598154"/>
+            <a:ext cx="3352200" cy="246221"/>
+          </a:xfrm>
+          <a:prstGeom prst="rect">
+            <a:avLst/>
+          </a:prstGeom>
+        </p:spPr>
+        <p:txBody>
+          <a:bodyPr wrap="none">
+            <a:spAutoFit/>
+          </a:bodyPr>
+          <a:lstStyle/>
+          <a:p>
+            <a:r>
+              <a:rPr lang="en-US" altLang="ko-KR" sz="1000" dirty="0" err="1" smtClean="0">
+                <a:solidFill>
+                  <a:schemeClr val="bg1">
+                    <a:lumMod val="95000"/>
+                  </a:schemeClr>
+                </a:solidFill>
+                <a:latin typeface="Noto Sans KR ExtraBold" panose="020B0200000000000000" pitchFamily="34" charset="-128"/>
+                <a:ea typeface="Noto Sans KR ExtraBold" panose="020B0200000000000000" pitchFamily="34" charset="-128"/>
+              </a:rPr>
+              <a:t>UAction</a:t>
+            </a:r>
+            <a:r>
+              <a:rPr lang="en-US" altLang="ko-KR" sz="1000" dirty="0" smtClean="0">
+                <a:solidFill>
+                  <a:schemeClr val="bg1">
+                    <a:lumMod val="95000"/>
+                  </a:schemeClr>
+                </a:solidFill>
+                <a:latin typeface="Noto Sans KR ExtraBold" panose="020B0200000000000000" pitchFamily="34" charset="-128"/>
+                <a:ea typeface="Noto Sans KR ExtraBold" panose="020B0200000000000000" pitchFamily="34" charset="-128"/>
+              </a:rPr>
+              <a:t> </a:t>
+            </a:r>
+            <a:r>
+              <a:rPr lang="ko-KR" altLang="en-US" sz="1000" dirty="0" smtClean="0">
+                <a:solidFill>
+                  <a:schemeClr val="bg1">
+                    <a:lumMod val="95000"/>
+                  </a:schemeClr>
+                </a:solidFill>
+                <a:latin typeface="Noto Sans KR ExtraBold" panose="020B0200000000000000" pitchFamily="34" charset="-128"/>
+                <a:ea typeface="Noto Sans KR ExtraBold" panose="020B0200000000000000" pitchFamily="34" charset="-128"/>
+              </a:rPr>
+              <a:t>대응 </a:t>
+            </a:r>
+            <a:r>
+              <a:rPr lang="en-US" altLang="ko-KR" sz="1000" dirty="0" err="1" smtClean="0">
+                <a:solidFill>
+                  <a:schemeClr val="bg1">
+                    <a:lumMod val="95000"/>
+                  </a:schemeClr>
+                </a:solidFill>
+                <a:latin typeface="Noto Sans KR ExtraBold" panose="020B0200000000000000" pitchFamily="34" charset="-128"/>
+                <a:ea typeface="Noto Sans KR ExtraBold" panose="020B0200000000000000" pitchFamily="34" charset="-128"/>
+              </a:rPr>
+              <a:t>UGameplayAbility</a:t>
+            </a:r>
+            <a:r>
+              <a:rPr lang="en-US" altLang="ko-KR" sz="1000" dirty="0" smtClean="0">
+                <a:solidFill>
+                  <a:schemeClr val="bg1">
+                    <a:lumMod val="95000"/>
+                  </a:schemeClr>
+                </a:solidFill>
+                <a:latin typeface="Noto Sans KR ExtraBold" panose="020B0200000000000000" pitchFamily="34" charset="-128"/>
+                <a:ea typeface="Noto Sans KR ExtraBold" panose="020B0200000000000000" pitchFamily="34" charset="-128"/>
+              </a:rPr>
+              <a:t>, </a:t>
+            </a:r>
+            <a:r>
+              <a:rPr lang="en-US" altLang="ko-KR" sz="1000" dirty="0" err="1" smtClean="0">
+                <a:solidFill>
+                  <a:schemeClr val="bg1">
+                    <a:lumMod val="95000"/>
+                  </a:schemeClr>
+                </a:solidFill>
+                <a:latin typeface="Noto Sans KR ExtraBold" panose="020B0200000000000000" pitchFamily="34" charset="-128"/>
+                <a:ea typeface="Noto Sans KR ExtraBold" panose="020B0200000000000000" pitchFamily="34" charset="-128"/>
+              </a:rPr>
+              <a:t>UAbilityTask</a:t>
+            </a:r>
+            <a:r>
+              <a:rPr lang="en-US" altLang="ko-KR" sz="1000" dirty="0" smtClean="0">
+                <a:solidFill>
+                  <a:schemeClr val="bg1">
+                    <a:lumMod val="95000"/>
+                  </a:schemeClr>
+                </a:solidFill>
+                <a:latin typeface="Noto Sans KR ExtraBold" panose="020B0200000000000000" pitchFamily="34" charset="-128"/>
+                <a:ea typeface="Noto Sans KR ExtraBold" panose="020B0200000000000000" pitchFamily="34" charset="-128"/>
+              </a:rPr>
+              <a:t>, Tag</a:t>
+            </a:r>
+            <a:endParaRPr lang="en-US" altLang="ko-KR" sz="1000" dirty="0">
+              <a:solidFill>
+                <a:schemeClr val="bg1">
+                  <a:lumMod val="95000"/>
+                </a:schemeClr>
+              </a:solidFill>
+              <a:latin typeface="Noto Sans KR ExtraBold" panose="020B0200000000000000" pitchFamily="34" charset="-128"/>
+              <a:ea typeface="Noto Sans KR ExtraBold" panose="020B0200000000000000" pitchFamily="34" charset="-128"/>
+            </a:endParaRPr>
+          </a:p>
+        </p:txBody>
+      </p:sp>
+      <p:sp>
+        <p:nvSpPr>
+          <p:cNvPr id="11" name="직사각형 10"/>
+          <p:cNvSpPr/>
+          <p:nvPr/>
+        </p:nvSpPr>
+        <p:spPr>
+          <a:xfrm>
+            <a:off x="454275" y="3844375"/>
+            <a:ext cx="8755039" cy="246221"/>
+          </a:xfrm>
+          <a:prstGeom prst="rect">
+            <a:avLst/>
+          </a:prstGeom>
+        </p:spPr>
+        <p:txBody>
+          <a:bodyPr wrap="square">
+            <a:spAutoFit/>
+          </a:bodyPr>
+          <a:lstStyle/>
+          <a:p>
+            <a:r>
+              <a:rPr lang="ko-KR" altLang="en-US" sz="1000" dirty="0" smtClean="0">
+                <a:solidFill>
+                  <a:schemeClr val="bg1">
+                    <a:lumMod val="95000"/>
+                  </a:schemeClr>
+                </a:solidFill>
+                <a:latin typeface="Noto Sans KR Medium" panose="020B0200000000000000" pitchFamily="34" charset="-128"/>
+                <a:ea typeface="Noto Sans KR Medium" panose="020B0200000000000000" pitchFamily="34" charset="-128"/>
+              </a:rPr>
+              <a:t>각</a:t>
+            </a:r>
+            <a:r>
+              <a:rPr lang="en-US" altLang="ko-KR" sz="1000" dirty="0" smtClean="0">
+                <a:solidFill>
+                  <a:schemeClr val="bg1">
+                    <a:lumMod val="95000"/>
+                  </a:schemeClr>
+                </a:solidFill>
+                <a:latin typeface="Noto Sans KR Medium" panose="020B0200000000000000" pitchFamily="34" charset="-128"/>
+                <a:ea typeface="Noto Sans KR Medium" panose="020B0200000000000000" pitchFamily="34" charset="-128"/>
+              </a:rPr>
+              <a:t> </a:t>
+            </a:r>
+            <a:r>
+              <a:rPr lang="ko-KR" altLang="en-US" sz="1000" dirty="0" smtClean="0">
+                <a:solidFill>
+                  <a:schemeClr val="bg1">
+                    <a:lumMod val="95000"/>
+                  </a:schemeClr>
+                </a:solidFill>
+                <a:latin typeface="Noto Sans KR Medium" panose="020B0200000000000000" pitchFamily="34" charset="-128"/>
+                <a:ea typeface="Noto Sans KR Medium" panose="020B0200000000000000" pitchFamily="34" charset="-128"/>
+              </a:rPr>
+              <a:t>주요 클래스들의 대응 클래스</a:t>
+            </a:r>
+            <a:endParaRPr lang="en-US" altLang="ko-KR" sz="1000" dirty="0" smtClean="0">
+              <a:solidFill>
+                <a:schemeClr val="bg1">
+                  <a:lumMod val="95000"/>
+                </a:schemeClr>
+              </a:solidFill>
+              <a:latin typeface="Noto Sans KR Medium" panose="020B0200000000000000" pitchFamily="34" charset="-128"/>
+              <a:ea typeface="Noto Sans KR Medium" panose="020B0200000000000000" pitchFamily="34" charset="-128"/>
+            </a:endParaRPr>
+          </a:p>
+        </p:txBody>
+      </p:sp>
+      <p:sp>
+        <p:nvSpPr>
+          <p:cNvPr id="13" name="직사각형 12"/>
+          <p:cNvSpPr/>
+          <p:nvPr/>
+        </p:nvSpPr>
+        <p:spPr>
+          <a:xfrm>
+            <a:off x="454275" y="2613270"/>
+            <a:ext cx="2064989" cy="246221"/>
+          </a:xfrm>
+          <a:prstGeom prst="rect">
+            <a:avLst/>
+          </a:prstGeom>
+        </p:spPr>
+        <p:txBody>
+          <a:bodyPr wrap="none">
+            <a:spAutoFit/>
+          </a:bodyPr>
+          <a:lstStyle/>
+          <a:p>
+            <a:r>
+              <a:rPr lang="en-US" altLang="ko-KR" sz="1000" dirty="0" smtClean="0">
+                <a:solidFill>
+                  <a:schemeClr val="bg1">
+                    <a:lumMod val="95000"/>
+                  </a:schemeClr>
+                </a:solidFill>
+                <a:latin typeface="Noto Sans KR ExtraBold" panose="020B0200000000000000" pitchFamily="34" charset="-128"/>
+                <a:ea typeface="Noto Sans KR ExtraBold" panose="020B0200000000000000" pitchFamily="34" charset="-128"/>
+              </a:rPr>
+              <a:t>Stat </a:t>
+            </a:r>
+            <a:r>
+              <a:rPr lang="ko-KR" altLang="en-US" sz="1000" dirty="0" smtClean="0">
+                <a:solidFill>
+                  <a:schemeClr val="bg1">
+                    <a:lumMod val="95000"/>
+                  </a:schemeClr>
+                </a:solidFill>
+                <a:latin typeface="Noto Sans KR ExtraBold" panose="020B0200000000000000" pitchFamily="34" charset="-128"/>
+                <a:ea typeface="Noto Sans KR ExtraBold" panose="020B0200000000000000" pitchFamily="34" charset="-128"/>
+              </a:rPr>
+              <a:t>대응 </a:t>
+            </a:r>
+            <a:r>
+              <a:rPr lang="en-US" altLang="ko-KR" sz="1000" dirty="0" err="1" smtClean="0">
+                <a:solidFill>
+                  <a:schemeClr val="bg1">
+                    <a:lumMod val="95000"/>
+                  </a:schemeClr>
+                </a:solidFill>
+                <a:latin typeface="Noto Sans KR ExtraBold" panose="020B0200000000000000" pitchFamily="34" charset="-128"/>
+                <a:ea typeface="Noto Sans KR ExtraBold" panose="020B0200000000000000" pitchFamily="34" charset="-128"/>
+              </a:rPr>
+              <a:t>FGameplayAttribute</a:t>
+            </a:r>
+            <a:endParaRPr lang="en-US" altLang="ko-KR" sz="1000" dirty="0">
+              <a:solidFill>
+                <a:schemeClr val="bg1">
+                  <a:lumMod val="95000"/>
+                </a:schemeClr>
+              </a:solidFill>
+              <a:latin typeface="Noto Sans KR ExtraBold" panose="020B0200000000000000" pitchFamily="34" charset="-128"/>
+              <a:ea typeface="Noto Sans KR ExtraBold" panose="020B0200000000000000" pitchFamily="34" charset="-128"/>
+            </a:endParaRPr>
+          </a:p>
+        </p:txBody>
+      </p:sp>
+      <p:sp>
+        <p:nvSpPr>
+          <p:cNvPr id="14" name="직사각형 13"/>
+          <p:cNvSpPr/>
+          <p:nvPr/>
+        </p:nvSpPr>
+        <p:spPr>
+          <a:xfrm>
+            <a:off x="454275" y="2859491"/>
+            <a:ext cx="8755039" cy="246221"/>
+          </a:xfrm>
+          <a:prstGeom prst="rect">
+            <a:avLst/>
+          </a:prstGeom>
+        </p:spPr>
+        <p:txBody>
+          <a:bodyPr wrap="square">
+            <a:spAutoFit/>
+          </a:bodyPr>
+          <a:lstStyle/>
+          <a:p>
+            <a:r>
+              <a:rPr lang="ko-KR" altLang="en-US" sz="1000" dirty="0" smtClean="0">
+                <a:solidFill>
+                  <a:schemeClr val="bg1">
+                    <a:lumMod val="95000"/>
+                  </a:schemeClr>
+                </a:solidFill>
+                <a:latin typeface="Noto Sans KR Medium" panose="020B0200000000000000" pitchFamily="34" charset="-128"/>
+                <a:ea typeface="Noto Sans KR Medium" panose="020B0200000000000000" pitchFamily="34" charset="-128"/>
+              </a:rPr>
+              <a:t>각</a:t>
+            </a:r>
+            <a:r>
+              <a:rPr lang="en-US" altLang="ko-KR" sz="1000" dirty="0" smtClean="0">
+                <a:solidFill>
+                  <a:schemeClr val="bg1">
+                    <a:lumMod val="95000"/>
+                  </a:schemeClr>
+                </a:solidFill>
+                <a:latin typeface="Noto Sans KR Medium" panose="020B0200000000000000" pitchFamily="34" charset="-128"/>
+                <a:ea typeface="Noto Sans KR Medium" panose="020B0200000000000000" pitchFamily="34" charset="-128"/>
+              </a:rPr>
+              <a:t> </a:t>
+            </a:r>
+            <a:r>
+              <a:rPr lang="ko-KR" altLang="en-US" sz="1000" dirty="0" smtClean="0">
+                <a:solidFill>
+                  <a:schemeClr val="bg1">
+                    <a:lumMod val="95000"/>
+                  </a:schemeClr>
+                </a:solidFill>
+                <a:latin typeface="Noto Sans KR Medium" panose="020B0200000000000000" pitchFamily="34" charset="-128"/>
+                <a:ea typeface="Noto Sans KR Medium" panose="020B0200000000000000" pitchFamily="34" charset="-128"/>
+              </a:rPr>
+              <a:t>주요 클래스들의 대응 클래스</a:t>
             </a:r>
             <a:endParaRPr lang="en-US" altLang="ko-KR" sz="1000" dirty="0" smtClean="0">
               <a:solidFill>
@@ -38787,7 +39851,7 @@
     </a:clrScheme>
     <a:fontScheme name="Office">
       <a:majorFont>
-        <a:latin typeface="맑은 고딕" panose="020F0302020204030204"/>
+        <a:latin typeface="맑은 고딕"/>
         <a:ea typeface=""/>
         <a:cs typeface=""/>
         <a:font script="Jpan" typeface="ＭＳ Ｐゴシック"/>
@@ -38822,7 +39886,7 @@
         <a:font script="Geor" typeface="Sylfaen"/>
       </a:majorFont>
       <a:minorFont>
-        <a:latin typeface="맑은 고딕" panose="020F0502020204030204"/>
+        <a:latin typeface="맑은 고딕"/>
         <a:ea typeface=""/>
         <a:cs typeface=""/>
         <a:font script="Jpan" typeface="ＭＳ Ｐゴシック"/>
@@ -38999,7 +40063,7 @@
   <a:extraClrSchemeLst/>
   <a:extLst>
     <a:ext uri="{05A4C25C-085E-4340-85A3-A5531E510DB2}">
-      <thm15:themeFamily xmlns:thm15="http://schemas.microsoft.com/office/thememl/2012/main" name="Office Theme" id="{62F939B6-93AF-4DB8-9C6B-D6C7DFDC589F}" vid="{4A3C46E8-61CC-4603-A589-7422A47A8E4A}"/>
+      <thm15:themeFamily xmlns:thm15="http://schemas.microsoft.com/office/thememl/2012/main" xmlns="" name="Office Theme" id="{62F939B6-93AF-4DB8-9C6B-D6C7DFDC589F}" vid="{4A3C46E8-61CC-4603-A589-7422A47A8E4A}"/>
     </a:ext>
   </a:extLst>
 </a:theme>
@@ -39048,7 +40112,7 @@
     </a:clrScheme>
     <a:fontScheme name="Office">
       <a:majorFont>
-        <a:latin typeface="맑은 고딕" panose="020F0302020204030204"/>
+        <a:latin typeface="맑은 고딕"/>
         <a:ea typeface=""/>
         <a:cs typeface=""/>
         <a:font script="Jpan" typeface="ＭＳ Ｐゴシック"/>
@@ -39083,7 +40147,7 @@
         <a:font script="Geor" typeface="Sylfaen"/>
       </a:majorFont>
       <a:minorFont>
-        <a:latin typeface="맑은 고딕" panose="020F0502020204030204"/>
+        <a:latin typeface="맑은 고딕"/>
         <a:ea typeface=""/>
         <a:cs typeface=""/>
         <a:font script="Jpan" typeface="ＭＳ Ｐゴシック"/>
@@ -39260,7 +40324,7 @@
   <a:extraClrSchemeLst/>
   <a:extLst>
     <a:ext uri="{05A4C25C-085E-4340-85A3-A5531E510DB2}">
-      <thm15:themeFamily xmlns:thm15="http://schemas.microsoft.com/office/thememl/2012/main" name="Office Theme" id="{62F939B6-93AF-4DB8-9C6B-D6C7DFDC589F}" vid="{4A3C46E8-61CC-4603-A589-7422A47A8E4A}"/>
+      <thm15:themeFamily xmlns:thm15="http://schemas.microsoft.com/office/thememl/2012/main" xmlns="" name="Office Theme" id="{62F939B6-93AF-4DB8-9C6B-D6C7DFDC589F}" vid="{4A3C46E8-61CC-4603-A589-7422A47A8E4A}"/>
     </a:ext>
   </a:extLst>
 </a:theme>
